--- a/report/搜索引擎总结.pptx
+++ b/report/搜索引擎总结.pptx
@@ -5,22 +5,24 @@
     <p:sldMasterId id="2147483648" r:id="rId1"/>
   </p:sldMasterIdLst>
   <p:notesMasterIdLst>
-    <p:notesMasterId r:id="rId15"/>
+    <p:notesMasterId r:id="rId4"/>
   </p:notesMasterIdLst>
   <p:sldIdLst>
-    <p:sldId id="256" r:id="rId2"/>
-    <p:sldId id="273" r:id="rId3"/>
-    <p:sldId id="258" r:id="rId4"/>
-    <p:sldId id="260" r:id="rId5"/>
-    <p:sldId id="262" r:id="rId6"/>
-    <p:sldId id="263" r:id="rId7"/>
-    <p:sldId id="270" r:id="rId8"/>
-    <p:sldId id="259" r:id="rId9"/>
-    <p:sldId id="271" r:id="rId10"/>
-    <p:sldId id="264" r:id="rId11"/>
-    <p:sldId id="272" r:id="rId12"/>
-    <p:sldId id="261" r:id="rId13"/>
-    <p:sldId id="268" r:id="rId14"/>
+    <p:sldId id="256" r:id="rId3"/>
+    <p:sldId id="273" r:id="rId5"/>
+    <p:sldId id="258" r:id="rId6"/>
+    <p:sldId id="260" r:id="rId7"/>
+    <p:sldId id="262" r:id="rId8"/>
+    <p:sldId id="263" r:id="rId9"/>
+    <p:sldId id="274" r:id="rId10"/>
+    <p:sldId id="276" r:id="rId11"/>
+    <p:sldId id="270" r:id="rId12"/>
+    <p:sldId id="259" r:id="rId13"/>
+    <p:sldId id="271" r:id="rId14"/>
+    <p:sldId id="264" r:id="rId15"/>
+    <p:sldId id="272" r:id="rId16"/>
+    <p:sldId id="261" r:id="rId17"/>
+    <p:sldId id="268" r:id="rId18"/>
   </p:sldIdLst>
   <p:sldSz cx="12192000" cy="6858000"/>
   <p:notesSz cx="6858000" cy="9144000"/>
@@ -119,11 +121,6 @@
       </a:defRPr>
     </a:lvl9pPr>
   </p:defaultTextStyle>
-  <p:extLst>
-    <p:ext uri="{EFAFB233-063F-42B5-8137-9DF3F51BA10A}">
-      <p15:sldGuideLst xmlns:p15="http://schemas.microsoft.com/office/powerpoint/2012/main"/>
-    </p:ext>
-  </p:extLst>
 </p:presentation>
 </file>
 
@@ -167,9 +164,7 @@
         <p:txBody>
           <a:bodyPr/>
           <a:lstStyle/>
-          <a:p>
-            <a:endParaRPr/>
-          </a:p>
+          <a:p/>
         </p:txBody>
       </p:sp>
       <p:sp>
@@ -190,9 +185,7 @@
         <p:txBody>
           <a:bodyPr/>
           <a:lstStyle/>
-          <a:p>
-            <a:endParaRPr/>
-          </a:p>
+          <a:p/>
         </p:txBody>
       </p:sp>
       <p:sp>
@@ -213,9 +206,7 @@
         <p:txBody>
           <a:bodyPr/>
           <a:lstStyle/>
-          <a:p>
-            <a:endParaRPr/>
-          </a:p>
+          <a:p/>
         </p:txBody>
       </p:sp>
       <p:sp>
@@ -236,9 +227,7 @@
         <p:txBody>
           <a:bodyPr/>
           <a:lstStyle/>
-          <a:p>
-            <a:endParaRPr/>
-          </a:p>
+          <a:p/>
         </p:txBody>
       </p:sp>
       <p:sp>
@@ -259,9 +248,7 @@
         <p:txBody>
           <a:bodyPr/>
           <a:lstStyle/>
-          <a:p>
-            <a:endParaRPr/>
-          </a:p>
+          <a:p/>
         </p:txBody>
       </p:sp>
       <p:sp>
@@ -282,9 +269,7 @@
         <p:txBody>
           <a:bodyPr/>
           <a:lstStyle/>
-          <a:p>
-            <a:endParaRPr/>
-          </a:p>
+          <a:p/>
         </p:txBody>
       </p:sp>
     </p:spTree>
@@ -341,9 +326,7 @@
         <p:txBody>
           <a:bodyPr/>
           <a:lstStyle/>
-          <a:p>
-            <a:endParaRPr/>
-          </a:p>
+          <a:p/>
         </p:txBody>
       </p:sp>
       <p:sp>
@@ -360,9 +343,7 @@
         <p:txBody>
           <a:bodyPr/>
           <a:lstStyle/>
-          <a:p>
-            <a:endParaRPr/>
-          </a:p>
+          <a:p/>
         </p:txBody>
       </p:sp>
     </p:spTree>
@@ -416,9 +397,7 @@
         <p:txBody>
           <a:bodyPr/>
           <a:lstStyle/>
-          <a:p>
-            <a:endParaRPr/>
-          </a:p>
+          <a:p/>
         </p:txBody>
       </p:sp>
       <p:sp>
@@ -435,9 +414,7 @@
         <p:txBody>
           <a:bodyPr/>
           <a:lstStyle/>
-          <a:p>
-            <a:endParaRPr/>
-          </a:p>
+          <a:p/>
         </p:txBody>
       </p:sp>
     </p:spTree>
@@ -491,9 +468,7 @@
         <p:txBody>
           <a:bodyPr/>
           <a:lstStyle/>
-          <a:p>
-            <a:endParaRPr/>
-          </a:p>
+          <a:p/>
         </p:txBody>
       </p:sp>
       <p:sp>
@@ -525,7 +500,6 @@
               <a:buSzTx/>
               <a:buFontTx/>
               <a:buNone/>
-              <a:tabLst/>
               <a:defRPr/>
             </a:pPr>
             <a:endParaRPr kumimoji="0" sz="1800" b="0" i="0" u="none" strike="noStrike" kern="1200" cap="none" spc="0" normalizeH="0" baseline="0" noProof="0">
@@ -538,19 +512,14 @@
               <a:effectLst/>
               <a:uLnTx/>
               <a:uFillTx/>
-              <a:latin typeface="Arial"/>
-              <a:ea typeface="STZhongsong"/>
+              <a:latin typeface="Arial" panose="020B0604020202020204"/>
+              <a:ea typeface="华文中宋" panose="02010600040101010101" charset="-122"/>
               <a:cs typeface="+mn-cs"/>
             </a:endParaRPr>
           </a:p>
         </p:txBody>
       </p:sp>
     </p:spTree>
-    <p:extLst>
-      <p:ext uri="{BB962C8B-B14F-4D97-AF65-F5344CB8AC3E}">
-        <p14:creationId xmlns:p14="http://schemas.microsoft.com/office/powerpoint/2010/main" val="567967028"/>
-      </p:ext>
-    </p:extLst>
   </p:cSld>
   <p:clrMapOvr>
     <a:masterClrMapping/>
@@ -601,9 +570,7 @@
         <p:txBody>
           <a:bodyPr/>
           <a:lstStyle/>
-          <a:p>
-            <a:endParaRPr/>
-          </a:p>
+          <a:p/>
         </p:txBody>
       </p:sp>
       <p:sp>
@@ -620,9 +587,7 @@
         <p:txBody>
           <a:bodyPr/>
           <a:lstStyle/>
-          <a:p>
-            <a:endParaRPr/>
-          </a:p>
+          <a:p/>
         </p:txBody>
       </p:sp>
     </p:spTree>
@@ -676,9 +641,7 @@
         <p:txBody>
           <a:bodyPr/>
           <a:lstStyle/>
-          <a:p>
-            <a:endParaRPr/>
-          </a:p>
+          <a:p/>
         </p:txBody>
       </p:sp>
       <p:sp>
@@ -696,8 +659,179 @@
           <a:bodyPr/>
           <a:lstStyle/>
           <a:p>
-            <a:endParaRPr/>
-          </a:p>
+            <a:pPr marL="0" marR="0" lvl="0" indent="0" algn="l" defTabSz="914400" eaLnBrk="1" fontAlgn="auto" latinLnBrk="0" hangingPunct="1">
+              <a:lnSpc>
+                <a:spcPct val="100000"/>
+              </a:lnSpc>
+              <a:spcBef>
+                <a:spcPts val="0"/>
+              </a:spcBef>
+              <a:spcAft>
+                <a:spcPts val="0"/>
+              </a:spcAft>
+              <a:buClrTx/>
+              <a:buSzTx/>
+              <a:buFontTx/>
+              <a:buNone/>
+              <a:defRPr/>
+            </a:pPr>
+            <a:endParaRPr kumimoji="0" sz="1800" b="0" i="0" u="none" strike="noStrike" kern="1200" cap="none" spc="0" normalizeH="0" baseline="0" noProof="0">
+              <a:ln>
+                <a:noFill/>
+              </a:ln>
+              <a:solidFill>
+                <a:prstClr val="black"/>
+              </a:solidFill>
+              <a:effectLst/>
+              <a:uLnTx/>
+              <a:uFillTx/>
+              <a:latin typeface="Arial" panose="020B0604020202020204"/>
+              <a:ea typeface="华文中宋" panose="02010600040101010101" charset="-122"/>
+              <a:cs typeface="+mn-cs"/>
+            </a:endParaRPr>
+          </a:p>
+        </p:txBody>
+      </p:sp>
+    </p:spTree>
+  </p:cSld>
+  <p:clrMapOvr>
+    <a:masterClrMapping/>
+  </p:clrMapOvr>
+</p:notes>
+</file>
+
+<file path=ppt/notesSlides/notesSlide14.xml><?xml version="1.0" encoding="utf-8"?>
+<p:notes xmlns:a="http://schemas.openxmlformats.org/drawingml/2006/main" xmlns:r="http://schemas.openxmlformats.org/officeDocument/2006/relationships" xmlns:p="http://schemas.openxmlformats.org/presentationml/2006/main">
+  <p:cSld>
+    <p:spTree>
+      <p:nvGrpSpPr>
+        <p:cNvPr id="1" name=""/>
+        <p:cNvGrpSpPr/>
+        <p:nvPr/>
+      </p:nvGrpSpPr>
+      <p:grpSpPr>
+        <a:xfrm>
+          <a:off x="0" y="0"/>
+          <a:ext cx="0" cy="0"/>
+          <a:chOff x="0" y="0"/>
+          <a:chExt cx="0" cy="0"/>
+        </a:xfrm>
+      </p:grpSpPr>
+      <p:sp>
+        <p:nvSpPr>
+          <p:cNvPr id="2" name="Slide Image Placeholder 1"/>
+          <p:cNvSpPr>
+            <a:spLocks noGrp="1" noRot="1" noChangeAspect="1"/>
+          </p:cNvSpPr>
+          <p:nvPr>
+            <p:ph type="sldImg"/>
+          </p:nvPr>
+        </p:nvSpPr>
+        <p:spPr/>
+      </p:sp>
+      <p:sp>
+        <p:nvSpPr>
+          <p:cNvPr id="3" name="Notes Placeholder 2"/>
+          <p:cNvSpPr>
+            <a:spLocks noGrp="1"/>
+          </p:cNvSpPr>
+          <p:nvPr>
+            <p:ph type="body" idx="1"/>
+          </p:nvPr>
+        </p:nvSpPr>
+        <p:spPr/>
+        <p:txBody>
+          <a:bodyPr/>
+          <a:lstStyle/>
+          <a:p/>
+        </p:txBody>
+      </p:sp>
+      <p:sp>
+        <p:nvSpPr>
+          <p:cNvPr id="4" name="Slide Number Placeholder 3"/>
+          <p:cNvSpPr>
+            <a:spLocks noGrp="1"/>
+          </p:cNvSpPr>
+          <p:nvPr>
+            <p:ph type="sldNum" idx="5"/>
+          </p:nvPr>
+        </p:nvSpPr>
+        <p:spPr/>
+        <p:txBody>
+          <a:bodyPr/>
+          <a:lstStyle/>
+          <a:p/>
+        </p:txBody>
+      </p:sp>
+    </p:spTree>
+  </p:cSld>
+  <p:clrMapOvr>
+    <a:masterClrMapping/>
+  </p:clrMapOvr>
+</p:notes>
+</file>
+
+<file path=ppt/notesSlides/notesSlide15.xml><?xml version="1.0" encoding="utf-8"?>
+<p:notes xmlns:a="http://schemas.openxmlformats.org/drawingml/2006/main" xmlns:r="http://schemas.openxmlformats.org/officeDocument/2006/relationships" xmlns:p="http://schemas.openxmlformats.org/presentationml/2006/main">
+  <p:cSld>
+    <p:spTree>
+      <p:nvGrpSpPr>
+        <p:cNvPr id="1" name=""/>
+        <p:cNvGrpSpPr/>
+        <p:nvPr/>
+      </p:nvGrpSpPr>
+      <p:grpSpPr>
+        <a:xfrm>
+          <a:off x="0" y="0"/>
+          <a:ext cx="0" cy="0"/>
+          <a:chOff x="0" y="0"/>
+          <a:chExt cx="0" cy="0"/>
+        </a:xfrm>
+      </p:grpSpPr>
+      <p:sp>
+        <p:nvSpPr>
+          <p:cNvPr id="2" name="Slide Image Placeholder 1"/>
+          <p:cNvSpPr>
+            <a:spLocks noGrp="1" noRot="1" noChangeAspect="1"/>
+          </p:cNvSpPr>
+          <p:nvPr>
+            <p:ph type="sldImg"/>
+          </p:nvPr>
+        </p:nvSpPr>
+        <p:spPr/>
+      </p:sp>
+      <p:sp>
+        <p:nvSpPr>
+          <p:cNvPr id="3" name="Notes Placeholder 2"/>
+          <p:cNvSpPr>
+            <a:spLocks noGrp="1"/>
+          </p:cNvSpPr>
+          <p:nvPr>
+            <p:ph type="body" idx="1"/>
+          </p:nvPr>
+        </p:nvSpPr>
+        <p:spPr/>
+        <p:txBody>
+          <a:bodyPr/>
+          <a:lstStyle/>
+          <a:p/>
+        </p:txBody>
+      </p:sp>
+      <p:sp>
+        <p:nvSpPr>
+          <p:cNvPr id="4" name="Slide Number Placeholder 3"/>
+          <p:cNvSpPr>
+            <a:spLocks noGrp="1"/>
+          </p:cNvSpPr>
+          <p:nvPr>
+            <p:ph type="sldNum" idx="5"/>
+          </p:nvPr>
+        </p:nvSpPr>
+        <p:spPr/>
+        <p:txBody>
+          <a:bodyPr/>
+          <a:lstStyle/>
+          <a:p/>
         </p:txBody>
       </p:sp>
     </p:spTree>
@@ -751,9 +885,7 @@
         <p:txBody>
           <a:bodyPr/>
           <a:lstStyle/>
-          <a:p>
-            <a:endParaRPr/>
-          </a:p>
+          <a:p/>
         </p:txBody>
       </p:sp>
       <p:sp>
@@ -785,7 +917,6 @@
               <a:buSzTx/>
               <a:buFontTx/>
               <a:buNone/>
-              <a:tabLst/>
               <a:defRPr/>
             </a:pPr>
             <a:endParaRPr kumimoji="0" sz="1800" b="0" i="0" u="none" strike="noStrike" kern="1200" cap="none" spc="0" normalizeH="0" baseline="0" noProof="0">
@@ -798,19 +929,14 @@
               <a:effectLst/>
               <a:uLnTx/>
               <a:uFillTx/>
-              <a:latin typeface="Arial"/>
-              <a:ea typeface="STZhongsong"/>
+              <a:latin typeface="Arial" panose="020B0604020202020204"/>
+              <a:ea typeface="华文中宋" panose="02010600040101010101" charset="-122"/>
               <a:cs typeface="+mn-cs"/>
             </a:endParaRPr>
           </a:p>
         </p:txBody>
       </p:sp>
     </p:spTree>
-    <p:extLst>
-      <p:ext uri="{BB962C8B-B14F-4D97-AF65-F5344CB8AC3E}">
-        <p14:creationId xmlns:p14="http://schemas.microsoft.com/office/powerpoint/2010/main" val="3990083614"/>
-      </p:ext>
-    </p:extLst>
   </p:cSld>
   <p:clrMapOvr>
     <a:masterClrMapping/>
@@ -861,9 +987,7 @@
         <p:txBody>
           <a:bodyPr/>
           <a:lstStyle/>
-          <a:p>
-            <a:endParaRPr/>
-          </a:p>
+          <a:p/>
         </p:txBody>
       </p:sp>
       <p:sp>
@@ -880,9 +1004,7 @@
         <p:txBody>
           <a:bodyPr/>
           <a:lstStyle/>
-          <a:p>
-            <a:endParaRPr/>
-          </a:p>
+          <a:p/>
         </p:txBody>
       </p:sp>
     </p:spTree>
@@ -936,9 +1058,7 @@
         <p:txBody>
           <a:bodyPr/>
           <a:lstStyle/>
-          <a:p>
-            <a:endParaRPr/>
-          </a:p>
+          <a:p/>
         </p:txBody>
       </p:sp>
       <p:sp>
@@ -955,9 +1075,7 @@
         <p:txBody>
           <a:bodyPr/>
           <a:lstStyle/>
-          <a:p>
-            <a:endParaRPr/>
-          </a:p>
+          <a:p/>
         </p:txBody>
       </p:sp>
     </p:spTree>
@@ -1011,9 +1129,7 @@
         <p:txBody>
           <a:bodyPr/>
           <a:lstStyle/>
-          <a:p>
-            <a:endParaRPr/>
-          </a:p>
+          <a:p/>
         </p:txBody>
       </p:sp>
       <p:sp>
@@ -1030,9 +1146,7 @@
         <p:txBody>
           <a:bodyPr/>
           <a:lstStyle/>
-          <a:p>
-            <a:endParaRPr/>
-          </a:p>
+          <a:p/>
         </p:txBody>
       </p:sp>
     </p:spTree>
@@ -1086,9 +1200,7 @@
         <p:txBody>
           <a:bodyPr/>
           <a:lstStyle/>
-          <a:p>
-            <a:endParaRPr/>
-          </a:p>
+          <a:p/>
         </p:txBody>
       </p:sp>
       <p:sp>
@@ -1105,9 +1217,7 @@
         <p:txBody>
           <a:bodyPr/>
           <a:lstStyle/>
-          <a:p>
-            <a:endParaRPr/>
-          </a:p>
+          <a:p/>
         </p:txBody>
       </p:sp>
     </p:spTree>
@@ -1161,9 +1271,7 @@
         <p:txBody>
           <a:bodyPr/>
           <a:lstStyle/>
-          <a:p>
-            <a:endParaRPr/>
-          </a:p>
+          <a:p/>
         </p:txBody>
       </p:sp>
       <p:sp>
@@ -1180,47 +1288,10 @@
         <p:txBody>
           <a:bodyPr/>
           <a:lstStyle/>
-          <a:p>
-            <a:pPr marL="0" marR="0" lvl="0" indent="0" algn="l" defTabSz="914400" eaLnBrk="1" fontAlgn="auto" latinLnBrk="0" hangingPunct="1">
-              <a:lnSpc>
-                <a:spcPct val="100000"/>
-              </a:lnSpc>
-              <a:spcBef>
-                <a:spcPts val="0"/>
-              </a:spcBef>
-              <a:spcAft>
-                <a:spcPts val="0"/>
-              </a:spcAft>
-              <a:buClrTx/>
-              <a:buSzTx/>
-              <a:buFontTx/>
-              <a:buNone/>
-              <a:tabLst/>
-              <a:defRPr/>
-            </a:pPr>
-            <a:endParaRPr kumimoji="0" sz="1800" b="0" i="0" u="none" strike="noStrike" kern="1200" cap="none" spc="0" normalizeH="0" baseline="0" noProof="0">
-              <a:ln>
-                <a:noFill/>
-              </a:ln>
-              <a:solidFill>
-                <a:prstClr val="black"/>
-              </a:solidFill>
-              <a:effectLst/>
-              <a:uLnTx/>
-              <a:uFillTx/>
-              <a:latin typeface="Arial"/>
-              <a:ea typeface="STZhongsong"/>
-              <a:cs typeface="+mn-cs"/>
-            </a:endParaRPr>
-          </a:p>
+          <a:p/>
         </p:txBody>
       </p:sp>
     </p:spTree>
-    <p:extLst>
-      <p:ext uri="{BB962C8B-B14F-4D97-AF65-F5344CB8AC3E}">
-        <p14:creationId xmlns:p14="http://schemas.microsoft.com/office/powerpoint/2010/main" val="1321021020"/>
-      </p:ext>
-    </p:extLst>
   </p:cSld>
   <p:clrMapOvr>
     <a:masterClrMapping/>
@@ -1271,9 +1342,7 @@
         <p:txBody>
           <a:bodyPr/>
           <a:lstStyle/>
-          <a:p>
-            <a:endParaRPr/>
-          </a:p>
+          <a:p/>
         </p:txBody>
       </p:sp>
       <p:sp>
@@ -1290,9 +1359,7 @@
         <p:txBody>
           <a:bodyPr/>
           <a:lstStyle/>
-          <a:p>
-            <a:endParaRPr/>
-          </a:p>
+          <a:p/>
         </p:txBody>
       </p:sp>
     </p:spTree>
@@ -1346,9 +1413,7 @@
         <p:txBody>
           <a:bodyPr/>
           <a:lstStyle/>
-          <a:p>
-            <a:endParaRPr/>
-          </a:p>
+          <a:p/>
         </p:txBody>
       </p:sp>
       <p:sp>
@@ -1380,7 +1445,6 @@
               <a:buSzTx/>
               <a:buFontTx/>
               <a:buNone/>
-              <a:tabLst/>
               <a:defRPr/>
             </a:pPr>
             <a:endParaRPr kumimoji="0" sz="1800" b="0" i="0" u="none" strike="noStrike" kern="1200" cap="none" spc="0" normalizeH="0" baseline="0" noProof="0">
@@ -1393,19 +1457,14 @@
               <a:effectLst/>
               <a:uLnTx/>
               <a:uFillTx/>
-              <a:latin typeface="Arial"/>
-              <a:ea typeface="STZhongsong"/>
+              <a:latin typeface="Arial" panose="020B0604020202020204"/>
+              <a:ea typeface="华文中宋" panose="02010600040101010101" charset="-122"/>
               <a:cs typeface="+mn-cs"/>
             </a:endParaRPr>
           </a:p>
         </p:txBody>
       </p:sp>
     </p:spTree>
-    <p:extLst>
-      <p:ext uri="{BB962C8B-B14F-4D97-AF65-F5344CB8AC3E}">
-        <p14:creationId xmlns:p14="http://schemas.microsoft.com/office/powerpoint/2010/main" val="207738448"/>
-      </p:ext>
-    </p:extLst>
   </p:cSld>
   <p:clrMapOvr>
     <a:masterClrMapping/>
@@ -1432,13 +1491,7 @@
       </p:grpSpPr>
       <p:sp>
         <p:nvSpPr>
-          <p:cNvPr id="2" name="标题 1">
-            <a:extLst>
-              <a:ext uri="{FF2B5EF4-FFF2-40B4-BE49-F238E27FC236}">
-                <a16:creationId xmlns:a16="http://schemas.microsoft.com/office/drawing/2014/main" id="{AA72F6E9-A7DB-4EE5-BABD-C7E4FC05266F}"/>
-              </a:ext>
-            </a:extLst>
-          </p:cNvPr>
+          <p:cNvPr id="2" name="标题 1"/>
           <p:cNvSpPr>
             <a:spLocks noGrp="1"/>
           </p:cNvSpPr>
@@ -1469,18 +1522,12 @@
       </p:sp>
       <p:sp>
         <p:nvSpPr>
-          <p:cNvPr id="3" name="副标题 2">
-            <a:extLst>
-              <a:ext uri="{FF2B5EF4-FFF2-40B4-BE49-F238E27FC236}">
-                <a16:creationId xmlns:a16="http://schemas.microsoft.com/office/drawing/2014/main" id="{AC7CD555-0E7D-46E3-A92B-ED861A2C05EC}"/>
-              </a:ext>
-            </a:extLst>
-          </p:cNvPr>
-          <p:cNvSpPr>
-            <a:spLocks noGrp="1"/>
-          </p:cNvSpPr>
-          <p:nvPr>
-            <p:ph type="subTitle" idx="1"/>
+          <p:cNvPr id="3" name="副标题 2"/>
+          <p:cNvSpPr>
+            <a:spLocks noGrp="1"/>
+          </p:cNvSpPr>
+          <p:nvPr>
+            <p:ph type="subTitle" idx="1" hasCustomPrompt="1"/>
           </p:nvPr>
         </p:nvSpPr>
         <p:spPr>
@@ -1538,13 +1585,7 @@
       </p:sp>
       <p:sp>
         <p:nvSpPr>
-          <p:cNvPr id="4" name="日期占位符 3">
-            <a:extLst>
-              <a:ext uri="{FF2B5EF4-FFF2-40B4-BE49-F238E27FC236}">
-                <a16:creationId xmlns:a16="http://schemas.microsoft.com/office/drawing/2014/main" id="{FF574459-61E1-4D49-AC46-970CF986C1FB}"/>
-              </a:ext>
-            </a:extLst>
-          </p:cNvPr>
+          <p:cNvPr id="4" name="日期占位符 3"/>
           <p:cNvSpPr>
             <a:spLocks noGrp="1"/>
           </p:cNvSpPr>
@@ -1558,7 +1599,7 @@
           <a:lstStyle/>
           <a:p>
             <a:fld id="{A653A8F1-9EDF-49EF-A14D-E495AD864F8A}" type="datetimeFigureOut">
-              <a:t>2026/6/15</a:t>
+              <a:rPr/>
             </a:fld>
             <a:endParaRPr/>
           </a:p>
@@ -1566,13 +1607,7 @@
       </p:sp>
       <p:sp>
         <p:nvSpPr>
-          <p:cNvPr id="5" name="页脚占位符 4">
-            <a:extLst>
-              <a:ext uri="{FF2B5EF4-FFF2-40B4-BE49-F238E27FC236}">
-                <a16:creationId xmlns:a16="http://schemas.microsoft.com/office/drawing/2014/main" id="{34FC7371-B810-4A27-98BE-F850FC6012EF}"/>
-              </a:ext>
-            </a:extLst>
-          </p:cNvPr>
+          <p:cNvPr id="5" name="页脚占位符 4"/>
           <p:cNvSpPr>
             <a:spLocks noGrp="1"/>
           </p:cNvSpPr>
@@ -1584,20 +1619,12 @@
         <p:txBody>
           <a:bodyPr/>
           <a:lstStyle/>
-          <a:p>
-            <a:endParaRPr/>
-          </a:p>
-        </p:txBody>
-      </p:sp>
-      <p:sp>
-        <p:nvSpPr>
-          <p:cNvPr id="6" name="灯片编号占位符 5">
-            <a:extLst>
-              <a:ext uri="{FF2B5EF4-FFF2-40B4-BE49-F238E27FC236}">
-                <a16:creationId xmlns:a16="http://schemas.microsoft.com/office/drawing/2014/main" id="{7D9F63B2-4215-4D56-9E34-DDA0D38A72A5}"/>
-              </a:ext>
-            </a:extLst>
-          </p:cNvPr>
+          <a:p/>
+        </p:txBody>
+      </p:sp>
+      <p:sp>
+        <p:nvSpPr>
+          <p:cNvPr id="6" name="灯片编号占位符 5"/>
           <p:cNvSpPr>
             <a:spLocks noGrp="1"/>
           </p:cNvSpPr>
@@ -1611,7 +1638,7 @@
           <a:lstStyle/>
           <a:p>
             <a:fld id="{43A13857-8FE2-426A-A37B-64DF65062EF2}" type="slidenum">
-              <a:t>‹#›</a:t>
+              <a:rPr/>
             </a:fld>
             <a:endParaRPr/>
           </a:p>
@@ -1644,13 +1671,7 @@
       </p:grpSpPr>
       <p:sp>
         <p:nvSpPr>
-          <p:cNvPr id="2" name="标题 1">
-            <a:extLst>
-              <a:ext uri="{FF2B5EF4-FFF2-40B4-BE49-F238E27FC236}">
-                <a16:creationId xmlns:a16="http://schemas.microsoft.com/office/drawing/2014/main" id="{40830027-6BA9-4579-8EDD-089953EF2617}"/>
-              </a:ext>
-            </a:extLst>
-          </p:cNvPr>
+          <p:cNvPr id="2" name="标题 1"/>
           <p:cNvSpPr>
             <a:spLocks noGrp="1"/>
           </p:cNvSpPr>
@@ -1671,18 +1692,12 @@
       </p:sp>
       <p:sp>
         <p:nvSpPr>
-          <p:cNvPr id="3" name="竖排文字占位符 2">
-            <a:extLst>
-              <a:ext uri="{FF2B5EF4-FFF2-40B4-BE49-F238E27FC236}">
-                <a16:creationId xmlns:a16="http://schemas.microsoft.com/office/drawing/2014/main" id="{F61ACF89-9A2E-450D-8BFB-C9CB9E1C22FA}"/>
-              </a:ext>
-            </a:extLst>
-          </p:cNvPr>
-          <p:cNvSpPr>
-            <a:spLocks noGrp="1"/>
-          </p:cNvSpPr>
-          <p:nvPr>
-            <p:ph type="body" idx="1"/>
+          <p:cNvPr id="3" name="竖排文字占位符 2"/>
+          <p:cNvSpPr>
+            <a:spLocks noGrp="1"/>
+          </p:cNvSpPr>
+          <p:nvPr>
+            <p:ph type="body" idx="1" hasCustomPrompt="1"/>
           </p:nvPr>
         </p:nvSpPr>
         <p:spPr/>
@@ -1733,13 +1748,7 @@
       </p:sp>
       <p:sp>
         <p:nvSpPr>
-          <p:cNvPr id="4" name="日期占位符 3">
-            <a:extLst>
-              <a:ext uri="{FF2B5EF4-FFF2-40B4-BE49-F238E27FC236}">
-                <a16:creationId xmlns:a16="http://schemas.microsoft.com/office/drawing/2014/main" id="{0979072A-6014-4B4E-A18D-0372B1C51826}"/>
-              </a:ext>
-            </a:extLst>
-          </p:cNvPr>
+          <p:cNvPr id="4" name="日期占位符 3"/>
           <p:cNvSpPr>
             <a:spLocks noGrp="1"/>
           </p:cNvSpPr>
@@ -1753,7 +1762,7 @@
           <a:lstStyle/>
           <a:p>
             <a:fld id="{A653A8F1-9EDF-49EF-A14D-E495AD864F8A}" type="datetimeFigureOut">
-              <a:t>2026/6/15</a:t>
+              <a:rPr/>
             </a:fld>
             <a:endParaRPr/>
           </a:p>
@@ -1761,13 +1770,7 @@
       </p:sp>
       <p:sp>
         <p:nvSpPr>
-          <p:cNvPr id="5" name="页脚占位符 4">
-            <a:extLst>
-              <a:ext uri="{FF2B5EF4-FFF2-40B4-BE49-F238E27FC236}">
-                <a16:creationId xmlns:a16="http://schemas.microsoft.com/office/drawing/2014/main" id="{B7FDF371-B7AE-4241-BF00-12CAD6919B6C}"/>
-              </a:ext>
-            </a:extLst>
-          </p:cNvPr>
+          <p:cNvPr id="5" name="页脚占位符 4"/>
           <p:cNvSpPr>
             <a:spLocks noGrp="1"/>
           </p:cNvSpPr>
@@ -1779,20 +1782,12 @@
         <p:txBody>
           <a:bodyPr/>
           <a:lstStyle/>
-          <a:p>
-            <a:endParaRPr/>
-          </a:p>
-        </p:txBody>
-      </p:sp>
-      <p:sp>
-        <p:nvSpPr>
-          <p:cNvPr id="6" name="灯片编号占位符 5">
-            <a:extLst>
-              <a:ext uri="{FF2B5EF4-FFF2-40B4-BE49-F238E27FC236}">
-                <a16:creationId xmlns:a16="http://schemas.microsoft.com/office/drawing/2014/main" id="{95D76FD6-5D96-4706-B932-8EE5F104ECB1}"/>
-              </a:ext>
-            </a:extLst>
-          </p:cNvPr>
+          <a:p/>
+        </p:txBody>
+      </p:sp>
+      <p:sp>
+        <p:nvSpPr>
+          <p:cNvPr id="6" name="灯片编号占位符 5"/>
           <p:cNvSpPr>
             <a:spLocks noGrp="1"/>
           </p:cNvSpPr>
@@ -1806,7 +1801,7 @@
           <a:lstStyle/>
           <a:p>
             <a:fld id="{43A13857-8FE2-426A-A37B-64DF65062EF2}" type="slidenum">
-              <a:t>‹#›</a:t>
+              <a:rPr/>
             </a:fld>
             <a:endParaRPr/>
           </a:p>
@@ -1839,13 +1834,7 @@
       </p:grpSpPr>
       <p:sp>
         <p:nvSpPr>
-          <p:cNvPr id="2" name="竖排标题 1">
-            <a:extLst>
-              <a:ext uri="{FF2B5EF4-FFF2-40B4-BE49-F238E27FC236}">
-                <a16:creationId xmlns:a16="http://schemas.microsoft.com/office/drawing/2014/main" id="{12F09CD8-5BBF-4E8A-9BF8-28D43A1CF253}"/>
-              </a:ext>
-            </a:extLst>
-          </p:cNvPr>
+          <p:cNvPr id="2" name="竖排标题 1"/>
           <p:cNvSpPr>
             <a:spLocks noGrp="1"/>
           </p:cNvSpPr>
@@ -1871,18 +1860,12 @@
       </p:sp>
       <p:sp>
         <p:nvSpPr>
-          <p:cNvPr id="3" name="竖排文字占位符 2">
-            <a:extLst>
-              <a:ext uri="{FF2B5EF4-FFF2-40B4-BE49-F238E27FC236}">
-                <a16:creationId xmlns:a16="http://schemas.microsoft.com/office/drawing/2014/main" id="{3555FEEC-FD82-4242-8E24-AE155E715A55}"/>
-              </a:ext>
-            </a:extLst>
-          </p:cNvPr>
-          <p:cNvSpPr>
-            <a:spLocks noGrp="1"/>
-          </p:cNvSpPr>
-          <p:nvPr>
-            <p:ph type="body" idx="1"/>
+          <p:cNvPr id="3" name="竖排文字占位符 2"/>
+          <p:cNvSpPr>
+            <a:spLocks noGrp="1"/>
+          </p:cNvSpPr>
+          <p:nvPr>
+            <p:ph type="body" idx="1" hasCustomPrompt="1"/>
           </p:nvPr>
         </p:nvSpPr>
         <p:spPr>
@@ -1938,13 +1921,7 @@
       </p:sp>
       <p:sp>
         <p:nvSpPr>
-          <p:cNvPr id="4" name="日期占位符 3">
-            <a:extLst>
-              <a:ext uri="{FF2B5EF4-FFF2-40B4-BE49-F238E27FC236}">
-                <a16:creationId xmlns:a16="http://schemas.microsoft.com/office/drawing/2014/main" id="{DC7CC20B-95BA-468A-99C5-C46FB84761D1}"/>
-              </a:ext>
-            </a:extLst>
-          </p:cNvPr>
+          <p:cNvPr id="4" name="日期占位符 3"/>
           <p:cNvSpPr>
             <a:spLocks noGrp="1"/>
           </p:cNvSpPr>
@@ -1958,7 +1935,7 @@
           <a:lstStyle/>
           <a:p>
             <a:fld id="{A653A8F1-9EDF-49EF-A14D-E495AD864F8A}" type="datetimeFigureOut">
-              <a:t>2026/6/15</a:t>
+              <a:rPr/>
             </a:fld>
             <a:endParaRPr/>
           </a:p>
@@ -1966,13 +1943,7 @@
       </p:sp>
       <p:sp>
         <p:nvSpPr>
-          <p:cNvPr id="5" name="页脚占位符 4">
-            <a:extLst>
-              <a:ext uri="{FF2B5EF4-FFF2-40B4-BE49-F238E27FC236}">
-                <a16:creationId xmlns:a16="http://schemas.microsoft.com/office/drawing/2014/main" id="{EDDF5F36-97DD-451C-B825-5DDC6F6AB61F}"/>
-              </a:ext>
-            </a:extLst>
-          </p:cNvPr>
+          <p:cNvPr id="5" name="页脚占位符 4"/>
           <p:cNvSpPr>
             <a:spLocks noGrp="1"/>
           </p:cNvSpPr>
@@ -1984,20 +1955,12 @@
         <p:txBody>
           <a:bodyPr/>
           <a:lstStyle/>
-          <a:p>
-            <a:endParaRPr/>
-          </a:p>
-        </p:txBody>
-      </p:sp>
-      <p:sp>
-        <p:nvSpPr>
-          <p:cNvPr id="6" name="灯片编号占位符 5">
-            <a:extLst>
-              <a:ext uri="{FF2B5EF4-FFF2-40B4-BE49-F238E27FC236}">
-                <a16:creationId xmlns:a16="http://schemas.microsoft.com/office/drawing/2014/main" id="{63007A96-BE60-43F1-8235-C37C0D91E5B7}"/>
-              </a:ext>
-            </a:extLst>
-          </p:cNvPr>
+          <a:p/>
+        </p:txBody>
+      </p:sp>
+      <p:sp>
+        <p:nvSpPr>
+          <p:cNvPr id="6" name="灯片编号占位符 5"/>
           <p:cNvSpPr>
             <a:spLocks noGrp="1"/>
           </p:cNvSpPr>
@@ -2011,7 +1974,7 @@
           <a:lstStyle/>
           <a:p>
             <a:fld id="{43A13857-8FE2-426A-A37B-64DF65062EF2}" type="slidenum">
-              <a:t>‹#›</a:t>
+              <a:rPr/>
             </a:fld>
             <a:endParaRPr/>
           </a:p>
@@ -2044,13 +2007,7 @@
       </p:grpSpPr>
       <p:sp>
         <p:nvSpPr>
-          <p:cNvPr id="2" name="标题 1">
-            <a:extLst>
-              <a:ext uri="{FF2B5EF4-FFF2-40B4-BE49-F238E27FC236}">
-                <a16:creationId xmlns:a16="http://schemas.microsoft.com/office/drawing/2014/main" id="{09FD4038-7C43-439E-9BD7-248A93D25E40}"/>
-              </a:ext>
-            </a:extLst>
-          </p:cNvPr>
+          <p:cNvPr id="2" name="标题 1"/>
           <p:cNvSpPr>
             <a:spLocks noGrp="1"/>
           </p:cNvSpPr>
@@ -2071,18 +2028,12 @@
       </p:sp>
       <p:sp>
         <p:nvSpPr>
-          <p:cNvPr id="3" name="内容占位符 2">
-            <a:extLst>
-              <a:ext uri="{FF2B5EF4-FFF2-40B4-BE49-F238E27FC236}">
-                <a16:creationId xmlns:a16="http://schemas.microsoft.com/office/drawing/2014/main" id="{8580561D-23F9-45ED-9106-108A882EEB9F}"/>
-              </a:ext>
-            </a:extLst>
-          </p:cNvPr>
-          <p:cNvSpPr>
-            <a:spLocks noGrp="1"/>
-          </p:cNvSpPr>
-          <p:nvPr>
-            <p:ph idx="1"/>
+          <p:cNvPr id="3" name="内容占位符 2"/>
+          <p:cNvSpPr>
+            <a:spLocks noGrp="1"/>
+          </p:cNvSpPr>
+          <p:nvPr>
+            <p:ph idx="1" hasCustomPrompt="1"/>
           </p:nvPr>
         </p:nvSpPr>
         <p:spPr/>
@@ -2133,13 +2084,7 @@
       </p:sp>
       <p:sp>
         <p:nvSpPr>
-          <p:cNvPr id="4" name="日期占位符 3">
-            <a:extLst>
-              <a:ext uri="{FF2B5EF4-FFF2-40B4-BE49-F238E27FC236}">
-                <a16:creationId xmlns:a16="http://schemas.microsoft.com/office/drawing/2014/main" id="{A8BB6EB5-840B-4BFD-9D08-BB6EC56200BD}"/>
-              </a:ext>
-            </a:extLst>
-          </p:cNvPr>
+          <p:cNvPr id="4" name="日期占位符 3"/>
           <p:cNvSpPr>
             <a:spLocks noGrp="1"/>
           </p:cNvSpPr>
@@ -2153,7 +2098,7 @@
           <a:lstStyle/>
           <a:p>
             <a:fld id="{A653A8F1-9EDF-49EF-A14D-E495AD864F8A}" type="datetimeFigureOut">
-              <a:t>2026/6/15</a:t>
+              <a:rPr/>
             </a:fld>
             <a:endParaRPr/>
           </a:p>
@@ -2161,13 +2106,7 @@
       </p:sp>
       <p:sp>
         <p:nvSpPr>
-          <p:cNvPr id="5" name="页脚占位符 4">
-            <a:extLst>
-              <a:ext uri="{FF2B5EF4-FFF2-40B4-BE49-F238E27FC236}">
-                <a16:creationId xmlns:a16="http://schemas.microsoft.com/office/drawing/2014/main" id="{38D1123A-754E-496D-8CE0-FD9B6A709950}"/>
-              </a:ext>
-            </a:extLst>
-          </p:cNvPr>
+          <p:cNvPr id="5" name="页脚占位符 4"/>
           <p:cNvSpPr>
             <a:spLocks noGrp="1"/>
           </p:cNvSpPr>
@@ -2179,20 +2118,12 @@
         <p:txBody>
           <a:bodyPr/>
           <a:lstStyle/>
-          <a:p>
-            <a:endParaRPr/>
-          </a:p>
-        </p:txBody>
-      </p:sp>
-      <p:sp>
-        <p:nvSpPr>
-          <p:cNvPr id="6" name="灯片编号占位符 5">
-            <a:extLst>
-              <a:ext uri="{FF2B5EF4-FFF2-40B4-BE49-F238E27FC236}">
-                <a16:creationId xmlns:a16="http://schemas.microsoft.com/office/drawing/2014/main" id="{D4F39AEC-6527-4E30-86C4-9AA752E0CB26}"/>
-              </a:ext>
-            </a:extLst>
-          </p:cNvPr>
+          <a:p/>
+        </p:txBody>
+      </p:sp>
+      <p:sp>
+        <p:nvSpPr>
+          <p:cNvPr id="6" name="灯片编号占位符 5"/>
           <p:cNvSpPr>
             <a:spLocks noGrp="1"/>
           </p:cNvSpPr>
@@ -2206,7 +2137,7 @@
           <a:lstStyle/>
           <a:p>
             <a:fld id="{43A13857-8FE2-426A-A37B-64DF65062EF2}" type="slidenum">
-              <a:t>‹#›</a:t>
+              <a:rPr/>
             </a:fld>
             <a:endParaRPr/>
           </a:p>
@@ -2239,13 +2170,7 @@
       </p:grpSpPr>
       <p:sp>
         <p:nvSpPr>
-          <p:cNvPr id="2" name="标题 1">
-            <a:extLst>
-              <a:ext uri="{FF2B5EF4-FFF2-40B4-BE49-F238E27FC236}">
-                <a16:creationId xmlns:a16="http://schemas.microsoft.com/office/drawing/2014/main" id="{00C9BF6A-5393-4D5D-8AEE-1B81D083E461}"/>
-              </a:ext>
-            </a:extLst>
-          </p:cNvPr>
+          <p:cNvPr id="2" name="标题 1"/>
           <p:cNvSpPr>
             <a:spLocks noGrp="1"/>
           </p:cNvSpPr>
@@ -2276,18 +2201,12 @@
       </p:sp>
       <p:sp>
         <p:nvSpPr>
-          <p:cNvPr id="3" name="文本占位符 2">
-            <a:extLst>
-              <a:ext uri="{FF2B5EF4-FFF2-40B4-BE49-F238E27FC236}">
-                <a16:creationId xmlns:a16="http://schemas.microsoft.com/office/drawing/2014/main" id="{C3E6E325-8421-4FE8-AF29-E302A1DBB9F8}"/>
-              </a:ext>
-            </a:extLst>
-          </p:cNvPr>
-          <p:cNvSpPr>
-            <a:spLocks noGrp="1"/>
-          </p:cNvSpPr>
-          <p:nvPr>
-            <p:ph type="body" idx="1"/>
+          <p:cNvPr id="3" name="文本占位符 2"/>
+          <p:cNvSpPr>
+            <a:spLocks noGrp="1"/>
+          </p:cNvSpPr>
+          <p:nvPr>
+            <p:ph type="body" idx="1" hasCustomPrompt="1"/>
           </p:nvPr>
         </p:nvSpPr>
         <p:spPr>
@@ -2402,13 +2321,7 @@
       </p:sp>
       <p:sp>
         <p:nvSpPr>
-          <p:cNvPr id="4" name="日期占位符 3">
-            <a:extLst>
-              <a:ext uri="{FF2B5EF4-FFF2-40B4-BE49-F238E27FC236}">
-                <a16:creationId xmlns:a16="http://schemas.microsoft.com/office/drawing/2014/main" id="{63816A9D-26EF-40AC-B308-2D7A27577789}"/>
-              </a:ext>
-            </a:extLst>
-          </p:cNvPr>
+          <p:cNvPr id="4" name="日期占位符 3"/>
           <p:cNvSpPr>
             <a:spLocks noGrp="1"/>
           </p:cNvSpPr>
@@ -2422,7 +2335,7 @@
           <a:lstStyle/>
           <a:p>
             <a:fld id="{A653A8F1-9EDF-49EF-A14D-E495AD864F8A}" type="datetimeFigureOut">
-              <a:t>2026/6/15</a:t>
+              <a:rPr/>
             </a:fld>
             <a:endParaRPr/>
           </a:p>
@@ -2430,13 +2343,7 @@
       </p:sp>
       <p:sp>
         <p:nvSpPr>
-          <p:cNvPr id="5" name="页脚占位符 4">
-            <a:extLst>
-              <a:ext uri="{FF2B5EF4-FFF2-40B4-BE49-F238E27FC236}">
-                <a16:creationId xmlns:a16="http://schemas.microsoft.com/office/drawing/2014/main" id="{58BB73DC-B2C0-4909-8318-3659735A8855}"/>
-              </a:ext>
-            </a:extLst>
-          </p:cNvPr>
+          <p:cNvPr id="5" name="页脚占位符 4"/>
           <p:cNvSpPr>
             <a:spLocks noGrp="1"/>
           </p:cNvSpPr>
@@ -2448,20 +2355,12 @@
         <p:txBody>
           <a:bodyPr/>
           <a:lstStyle/>
-          <a:p>
-            <a:endParaRPr/>
-          </a:p>
-        </p:txBody>
-      </p:sp>
-      <p:sp>
-        <p:nvSpPr>
-          <p:cNvPr id="6" name="灯片编号占位符 5">
-            <a:extLst>
-              <a:ext uri="{FF2B5EF4-FFF2-40B4-BE49-F238E27FC236}">
-                <a16:creationId xmlns:a16="http://schemas.microsoft.com/office/drawing/2014/main" id="{6ACF43A9-C7FC-4B98-BBF3-AE947E3BD882}"/>
-              </a:ext>
-            </a:extLst>
-          </p:cNvPr>
+          <a:p/>
+        </p:txBody>
+      </p:sp>
+      <p:sp>
+        <p:nvSpPr>
+          <p:cNvPr id="6" name="灯片编号占位符 5"/>
           <p:cNvSpPr>
             <a:spLocks noGrp="1"/>
           </p:cNvSpPr>
@@ -2475,7 +2374,7 @@
           <a:lstStyle/>
           <a:p>
             <a:fld id="{43A13857-8FE2-426A-A37B-64DF65062EF2}" type="slidenum">
-              <a:t>‹#›</a:t>
+              <a:rPr/>
             </a:fld>
             <a:endParaRPr/>
           </a:p>
@@ -2508,13 +2407,7 @@
       </p:grpSpPr>
       <p:sp>
         <p:nvSpPr>
-          <p:cNvPr id="2" name="标题 1">
-            <a:extLst>
-              <a:ext uri="{FF2B5EF4-FFF2-40B4-BE49-F238E27FC236}">
-                <a16:creationId xmlns:a16="http://schemas.microsoft.com/office/drawing/2014/main" id="{46D80635-DB14-48F9-9272-CE69DF4BCD46}"/>
-              </a:ext>
-            </a:extLst>
-          </p:cNvPr>
+          <p:cNvPr id="2" name="标题 1"/>
           <p:cNvSpPr>
             <a:spLocks noGrp="1"/>
           </p:cNvSpPr>
@@ -2535,18 +2428,12 @@
       </p:sp>
       <p:sp>
         <p:nvSpPr>
-          <p:cNvPr id="3" name="内容占位符 2">
-            <a:extLst>
-              <a:ext uri="{FF2B5EF4-FFF2-40B4-BE49-F238E27FC236}">
-                <a16:creationId xmlns:a16="http://schemas.microsoft.com/office/drawing/2014/main" id="{B07C7ABE-BA6F-45B7-9B69-996A42252FBC}"/>
-              </a:ext>
-            </a:extLst>
-          </p:cNvPr>
-          <p:cNvSpPr>
-            <a:spLocks noGrp="1"/>
-          </p:cNvSpPr>
-          <p:nvPr>
-            <p:ph idx="1"/>
+          <p:cNvPr id="3" name="内容占位符 2"/>
+          <p:cNvSpPr>
+            <a:spLocks noGrp="1"/>
+          </p:cNvSpPr>
+          <p:nvPr>
+            <p:ph idx="1" hasCustomPrompt="1"/>
           </p:nvPr>
         </p:nvSpPr>
         <p:spPr>
@@ -2602,18 +2489,12 @@
       </p:sp>
       <p:sp>
         <p:nvSpPr>
-          <p:cNvPr id="4" name="内容占位符 3">
-            <a:extLst>
-              <a:ext uri="{FF2B5EF4-FFF2-40B4-BE49-F238E27FC236}">
-                <a16:creationId xmlns:a16="http://schemas.microsoft.com/office/drawing/2014/main" id="{385D180F-2FC4-4937-8120-1E810EEF044B}"/>
-              </a:ext>
-            </a:extLst>
-          </p:cNvPr>
-          <p:cNvSpPr>
-            <a:spLocks noGrp="1"/>
-          </p:cNvSpPr>
-          <p:nvPr>
-            <p:ph idx="2"/>
+          <p:cNvPr id="4" name="内容占位符 3"/>
+          <p:cNvSpPr>
+            <a:spLocks noGrp="1"/>
+          </p:cNvSpPr>
+          <p:nvPr>
+            <p:ph idx="2" hasCustomPrompt="1"/>
           </p:nvPr>
         </p:nvSpPr>
         <p:spPr>
@@ -2669,13 +2550,7 @@
       </p:sp>
       <p:sp>
         <p:nvSpPr>
-          <p:cNvPr id="5" name="日期占位符 4">
-            <a:extLst>
-              <a:ext uri="{FF2B5EF4-FFF2-40B4-BE49-F238E27FC236}">
-                <a16:creationId xmlns:a16="http://schemas.microsoft.com/office/drawing/2014/main" id="{2ED37408-0507-4932-92BE-35D30B50AA13}"/>
-              </a:ext>
-            </a:extLst>
-          </p:cNvPr>
+          <p:cNvPr id="5" name="日期占位符 4"/>
           <p:cNvSpPr>
             <a:spLocks noGrp="1"/>
           </p:cNvSpPr>
@@ -2689,7 +2564,7 @@
           <a:lstStyle/>
           <a:p>
             <a:fld id="{A653A8F1-9EDF-49EF-A14D-E495AD864F8A}" type="datetimeFigureOut">
-              <a:t>2026/6/15</a:t>
+              <a:rPr/>
             </a:fld>
             <a:endParaRPr/>
           </a:p>
@@ -2697,13 +2572,7 @@
       </p:sp>
       <p:sp>
         <p:nvSpPr>
-          <p:cNvPr id="6" name="页脚占位符 5">
-            <a:extLst>
-              <a:ext uri="{FF2B5EF4-FFF2-40B4-BE49-F238E27FC236}">
-                <a16:creationId xmlns:a16="http://schemas.microsoft.com/office/drawing/2014/main" id="{B9F0B637-EFF2-46E7-A07C-60F2990559C7}"/>
-              </a:ext>
-            </a:extLst>
-          </p:cNvPr>
+          <p:cNvPr id="6" name="页脚占位符 5"/>
           <p:cNvSpPr>
             <a:spLocks noGrp="1"/>
           </p:cNvSpPr>
@@ -2715,20 +2584,12 @@
         <p:txBody>
           <a:bodyPr/>
           <a:lstStyle/>
-          <a:p>
-            <a:endParaRPr/>
-          </a:p>
-        </p:txBody>
-      </p:sp>
-      <p:sp>
-        <p:nvSpPr>
-          <p:cNvPr id="7" name="灯片编号占位符 6">
-            <a:extLst>
-              <a:ext uri="{FF2B5EF4-FFF2-40B4-BE49-F238E27FC236}">
-                <a16:creationId xmlns:a16="http://schemas.microsoft.com/office/drawing/2014/main" id="{83623D48-9D66-4919-847B-1A5AEB513487}"/>
-              </a:ext>
-            </a:extLst>
-          </p:cNvPr>
+          <a:p/>
+        </p:txBody>
+      </p:sp>
+      <p:sp>
+        <p:nvSpPr>
+          <p:cNvPr id="7" name="灯片编号占位符 6"/>
           <p:cNvSpPr>
             <a:spLocks noGrp="1"/>
           </p:cNvSpPr>
@@ -2742,7 +2603,7 @@
           <a:lstStyle/>
           <a:p>
             <a:fld id="{43A13857-8FE2-426A-A37B-64DF65062EF2}" type="slidenum">
-              <a:t>‹#›</a:t>
+              <a:rPr/>
             </a:fld>
             <a:endParaRPr/>
           </a:p>
@@ -2775,13 +2636,7 @@
       </p:grpSpPr>
       <p:sp>
         <p:nvSpPr>
-          <p:cNvPr id="2" name="标题 1">
-            <a:extLst>
-              <a:ext uri="{FF2B5EF4-FFF2-40B4-BE49-F238E27FC236}">
-                <a16:creationId xmlns:a16="http://schemas.microsoft.com/office/drawing/2014/main" id="{D31CFE67-D30D-4B22-889C-55C816B46156}"/>
-              </a:ext>
-            </a:extLst>
-          </p:cNvPr>
+          <p:cNvPr id="2" name="标题 1"/>
           <p:cNvSpPr>
             <a:spLocks noGrp="1"/>
           </p:cNvSpPr>
@@ -2807,18 +2662,12 @@
       </p:sp>
       <p:sp>
         <p:nvSpPr>
-          <p:cNvPr id="3" name="文本占位符 2">
-            <a:extLst>
-              <a:ext uri="{FF2B5EF4-FFF2-40B4-BE49-F238E27FC236}">
-                <a16:creationId xmlns:a16="http://schemas.microsoft.com/office/drawing/2014/main" id="{E48C4D59-EF31-4FBE-BC9A-9A5EBA0C0B32}"/>
-              </a:ext>
-            </a:extLst>
-          </p:cNvPr>
-          <p:cNvSpPr>
-            <a:spLocks noGrp="1"/>
-          </p:cNvSpPr>
-          <p:nvPr>
-            <p:ph type="body" idx="1"/>
+          <p:cNvPr id="3" name="文本占位符 2"/>
+          <p:cNvSpPr>
+            <a:spLocks noGrp="1"/>
+          </p:cNvSpPr>
+          <p:nvPr>
+            <p:ph type="body" idx="1" hasCustomPrompt="1"/>
           </p:nvPr>
         </p:nvSpPr>
         <p:spPr>
@@ -2879,18 +2728,12 @@
       </p:sp>
       <p:sp>
         <p:nvSpPr>
-          <p:cNvPr id="4" name="内容占位符 3">
-            <a:extLst>
-              <a:ext uri="{FF2B5EF4-FFF2-40B4-BE49-F238E27FC236}">
-                <a16:creationId xmlns:a16="http://schemas.microsoft.com/office/drawing/2014/main" id="{E4EA7E20-2BEF-4705-B668-41BA3AFD3BA7}"/>
-              </a:ext>
-            </a:extLst>
-          </p:cNvPr>
-          <p:cNvSpPr>
-            <a:spLocks noGrp="1"/>
-          </p:cNvSpPr>
-          <p:nvPr>
-            <p:ph idx="2"/>
+          <p:cNvPr id="4" name="内容占位符 3"/>
+          <p:cNvSpPr>
+            <a:spLocks noGrp="1"/>
+          </p:cNvSpPr>
+          <p:nvPr>
+            <p:ph idx="2" hasCustomPrompt="1"/>
           </p:nvPr>
         </p:nvSpPr>
         <p:spPr>
@@ -2946,18 +2789,12 @@
       </p:sp>
       <p:sp>
         <p:nvSpPr>
-          <p:cNvPr id="5" name="文本占位符 4">
-            <a:extLst>
-              <a:ext uri="{FF2B5EF4-FFF2-40B4-BE49-F238E27FC236}">
-                <a16:creationId xmlns:a16="http://schemas.microsoft.com/office/drawing/2014/main" id="{517528E1-74F4-47FF-AFB0-0FFA9CDEB98D}"/>
-              </a:ext>
-            </a:extLst>
-          </p:cNvPr>
-          <p:cNvSpPr>
-            <a:spLocks noGrp="1"/>
-          </p:cNvSpPr>
-          <p:nvPr>
-            <p:ph type="body" idx="3"/>
+          <p:cNvPr id="5" name="文本占位符 4"/>
+          <p:cNvSpPr>
+            <a:spLocks noGrp="1"/>
+          </p:cNvSpPr>
+          <p:nvPr>
+            <p:ph type="body" idx="3" hasCustomPrompt="1"/>
           </p:nvPr>
         </p:nvSpPr>
         <p:spPr>
@@ -3018,18 +2855,12 @@
       </p:sp>
       <p:sp>
         <p:nvSpPr>
-          <p:cNvPr id="6" name="内容占位符 5">
-            <a:extLst>
-              <a:ext uri="{FF2B5EF4-FFF2-40B4-BE49-F238E27FC236}">
-                <a16:creationId xmlns:a16="http://schemas.microsoft.com/office/drawing/2014/main" id="{1DEC6AD9-641D-4C8D-A3A9-8035C6C53F32}"/>
-              </a:ext>
-            </a:extLst>
-          </p:cNvPr>
-          <p:cNvSpPr>
-            <a:spLocks noGrp="1"/>
-          </p:cNvSpPr>
-          <p:nvPr>
-            <p:ph idx="4"/>
+          <p:cNvPr id="6" name="内容占位符 5"/>
+          <p:cNvSpPr>
+            <a:spLocks noGrp="1"/>
+          </p:cNvSpPr>
+          <p:nvPr>
+            <p:ph idx="4" hasCustomPrompt="1"/>
           </p:nvPr>
         </p:nvSpPr>
         <p:spPr>
@@ -3085,13 +2916,7 @@
       </p:sp>
       <p:sp>
         <p:nvSpPr>
-          <p:cNvPr id="7" name="日期占位符 6">
-            <a:extLst>
-              <a:ext uri="{FF2B5EF4-FFF2-40B4-BE49-F238E27FC236}">
-                <a16:creationId xmlns:a16="http://schemas.microsoft.com/office/drawing/2014/main" id="{C884D206-1519-40EE-83EF-96FCCF73CA65}"/>
-              </a:ext>
-            </a:extLst>
-          </p:cNvPr>
+          <p:cNvPr id="7" name="日期占位符 6"/>
           <p:cNvSpPr>
             <a:spLocks noGrp="1"/>
           </p:cNvSpPr>
@@ -3105,7 +2930,7 @@
           <a:lstStyle/>
           <a:p>
             <a:fld id="{A653A8F1-9EDF-49EF-A14D-E495AD864F8A}" type="datetimeFigureOut">
-              <a:t>2026/6/15</a:t>
+              <a:rPr/>
             </a:fld>
             <a:endParaRPr/>
           </a:p>
@@ -3113,13 +2938,7 @@
       </p:sp>
       <p:sp>
         <p:nvSpPr>
-          <p:cNvPr id="8" name="页脚占位符 7">
-            <a:extLst>
-              <a:ext uri="{FF2B5EF4-FFF2-40B4-BE49-F238E27FC236}">
-                <a16:creationId xmlns:a16="http://schemas.microsoft.com/office/drawing/2014/main" id="{639ADFE1-CDE2-4D74-8221-13526DF8EE30}"/>
-              </a:ext>
-            </a:extLst>
-          </p:cNvPr>
+          <p:cNvPr id="8" name="页脚占位符 7"/>
           <p:cNvSpPr>
             <a:spLocks noGrp="1"/>
           </p:cNvSpPr>
@@ -3131,20 +2950,12 @@
         <p:txBody>
           <a:bodyPr/>
           <a:lstStyle/>
-          <a:p>
-            <a:endParaRPr/>
-          </a:p>
-        </p:txBody>
-      </p:sp>
-      <p:sp>
-        <p:nvSpPr>
-          <p:cNvPr id="9" name="灯片编号占位符 8">
-            <a:extLst>
-              <a:ext uri="{FF2B5EF4-FFF2-40B4-BE49-F238E27FC236}">
-                <a16:creationId xmlns:a16="http://schemas.microsoft.com/office/drawing/2014/main" id="{C7341B9C-7226-489F-A04C-0A343671B094}"/>
-              </a:ext>
-            </a:extLst>
-          </p:cNvPr>
+          <a:p/>
+        </p:txBody>
+      </p:sp>
+      <p:sp>
+        <p:nvSpPr>
+          <p:cNvPr id="9" name="灯片编号占位符 8"/>
           <p:cNvSpPr>
             <a:spLocks noGrp="1"/>
           </p:cNvSpPr>
@@ -3158,7 +2969,7 @@
           <a:lstStyle/>
           <a:p>
             <a:fld id="{43A13857-8FE2-426A-A37B-64DF65062EF2}" type="slidenum">
-              <a:t>‹#›</a:t>
+              <a:rPr/>
             </a:fld>
             <a:endParaRPr/>
           </a:p>
@@ -3191,13 +3002,7 @@
       </p:grpSpPr>
       <p:sp>
         <p:nvSpPr>
-          <p:cNvPr id="2" name="标题 1">
-            <a:extLst>
-              <a:ext uri="{FF2B5EF4-FFF2-40B4-BE49-F238E27FC236}">
-                <a16:creationId xmlns:a16="http://schemas.microsoft.com/office/drawing/2014/main" id="{59EB7912-49CA-483F-9076-E0D2F23E26F5}"/>
-              </a:ext>
-            </a:extLst>
-          </p:cNvPr>
+          <p:cNvPr id="2" name="标题 1"/>
           <p:cNvSpPr>
             <a:spLocks noGrp="1"/>
           </p:cNvSpPr>
@@ -3218,13 +3023,7 @@
       </p:sp>
       <p:sp>
         <p:nvSpPr>
-          <p:cNvPr id="3" name="日期占位符 2">
-            <a:extLst>
-              <a:ext uri="{FF2B5EF4-FFF2-40B4-BE49-F238E27FC236}">
-                <a16:creationId xmlns:a16="http://schemas.microsoft.com/office/drawing/2014/main" id="{42595294-2A25-490E-AB14-A95C1633F57A}"/>
-              </a:ext>
-            </a:extLst>
-          </p:cNvPr>
+          <p:cNvPr id="3" name="日期占位符 2"/>
           <p:cNvSpPr>
             <a:spLocks noGrp="1"/>
           </p:cNvSpPr>
@@ -3238,7 +3037,7 @@
           <a:lstStyle/>
           <a:p>
             <a:fld id="{A653A8F1-9EDF-49EF-A14D-E495AD864F8A}" type="datetimeFigureOut">
-              <a:t>2026/6/15</a:t>
+              <a:rPr/>
             </a:fld>
             <a:endParaRPr/>
           </a:p>
@@ -3246,13 +3045,7 @@
       </p:sp>
       <p:sp>
         <p:nvSpPr>
-          <p:cNvPr id="4" name="页脚占位符 3">
-            <a:extLst>
-              <a:ext uri="{FF2B5EF4-FFF2-40B4-BE49-F238E27FC236}">
-                <a16:creationId xmlns:a16="http://schemas.microsoft.com/office/drawing/2014/main" id="{6E12734D-7EAD-4F31-B03F-D200B6C39A61}"/>
-              </a:ext>
-            </a:extLst>
-          </p:cNvPr>
+          <p:cNvPr id="4" name="页脚占位符 3"/>
           <p:cNvSpPr>
             <a:spLocks noGrp="1"/>
           </p:cNvSpPr>
@@ -3264,20 +3057,12 @@
         <p:txBody>
           <a:bodyPr/>
           <a:lstStyle/>
-          <a:p>
-            <a:endParaRPr/>
-          </a:p>
-        </p:txBody>
-      </p:sp>
-      <p:sp>
-        <p:nvSpPr>
-          <p:cNvPr id="5" name="灯片编号占位符 4">
-            <a:extLst>
-              <a:ext uri="{FF2B5EF4-FFF2-40B4-BE49-F238E27FC236}">
-                <a16:creationId xmlns:a16="http://schemas.microsoft.com/office/drawing/2014/main" id="{FF73709D-D57A-41FB-A534-0FABF34C0A23}"/>
-              </a:ext>
-            </a:extLst>
-          </p:cNvPr>
+          <a:p/>
+        </p:txBody>
+      </p:sp>
+      <p:sp>
+        <p:nvSpPr>
+          <p:cNvPr id="5" name="灯片编号占位符 4"/>
           <p:cNvSpPr>
             <a:spLocks noGrp="1"/>
           </p:cNvSpPr>
@@ -3291,7 +3076,7 @@
           <a:lstStyle/>
           <a:p>
             <a:fld id="{43A13857-8FE2-426A-A37B-64DF65062EF2}" type="slidenum">
-              <a:t>‹#›</a:t>
+              <a:rPr/>
             </a:fld>
             <a:endParaRPr/>
           </a:p>
@@ -3324,13 +3109,7 @@
       </p:grpSpPr>
       <p:sp>
         <p:nvSpPr>
-          <p:cNvPr id="2" name="日期占位符 1">
-            <a:extLst>
-              <a:ext uri="{FF2B5EF4-FFF2-40B4-BE49-F238E27FC236}">
-                <a16:creationId xmlns:a16="http://schemas.microsoft.com/office/drawing/2014/main" id="{0B5A0B8B-32A0-4BD3-9321-DF4BD5F3F604}"/>
-              </a:ext>
-            </a:extLst>
-          </p:cNvPr>
+          <p:cNvPr id="2" name="日期占位符 1"/>
           <p:cNvSpPr>
             <a:spLocks noGrp="1"/>
           </p:cNvSpPr>
@@ -3344,7 +3123,7 @@
           <a:lstStyle/>
           <a:p>
             <a:fld id="{A653A8F1-9EDF-49EF-A14D-E495AD864F8A}" type="datetimeFigureOut">
-              <a:t>2026/6/15</a:t>
+              <a:rPr/>
             </a:fld>
             <a:endParaRPr/>
           </a:p>
@@ -3352,13 +3131,7 @@
       </p:sp>
       <p:sp>
         <p:nvSpPr>
-          <p:cNvPr id="3" name="页脚占位符 2">
-            <a:extLst>
-              <a:ext uri="{FF2B5EF4-FFF2-40B4-BE49-F238E27FC236}">
-                <a16:creationId xmlns:a16="http://schemas.microsoft.com/office/drawing/2014/main" id="{313455FE-1521-43F5-9A46-B1AEDBCC0ACA}"/>
-              </a:ext>
-            </a:extLst>
-          </p:cNvPr>
+          <p:cNvPr id="3" name="页脚占位符 2"/>
           <p:cNvSpPr>
             <a:spLocks noGrp="1"/>
           </p:cNvSpPr>
@@ -3370,20 +3143,12 @@
         <p:txBody>
           <a:bodyPr/>
           <a:lstStyle/>
-          <a:p>
-            <a:endParaRPr/>
-          </a:p>
-        </p:txBody>
-      </p:sp>
-      <p:sp>
-        <p:nvSpPr>
-          <p:cNvPr id="4" name="灯片编号占位符 3">
-            <a:extLst>
-              <a:ext uri="{FF2B5EF4-FFF2-40B4-BE49-F238E27FC236}">
-                <a16:creationId xmlns:a16="http://schemas.microsoft.com/office/drawing/2014/main" id="{14D8DFAB-D0F3-4614-AD41-3038E3A12838}"/>
-              </a:ext>
-            </a:extLst>
-          </p:cNvPr>
+          <a:p/>
+        </p:txBody>
+      </p:sp>
+      <p:sp>
+        <p:nvSpPr>
+          <p:cNvPr id="4" name="灯片编号占位符 3"/>
           <p:cNvSpPr>
             <a:spLocks noGrp="1"/>
           </p:cNvSpPr>
@@ -3397,7 +3162,7 @@
           <a:lstStyle/>
           <a:p>
             <a:fld id="{43A13857-8FE2-426A-A37B-64DF65062EF2}" type="slidenum">
-              <a:t>‹#›</a:t>
+              <a:rPr/>
             </a:fld>
             <a:endParaRPr/>
           </a:p>
@@ -3430,13 +3195,7 @@
       </p:grpSpPr>
       <p:sp>
         <p:nvSpPr>
-          <p:cNvPr id="2" name="标题 1">
-            <a:extLst>
-              <a:ext uri="{FF2B5EF4-FFF2-40B4-BE49-F238E27FC236}">
-                <a16:creationId xmlns:a16="http://schemas.microsoft.com/office/drawing/2014/main" id="{A1463CC7-5A86-4D8F-BF0F-CF3DB480D143}"/>
-              </a:ext>
-            </a:extLst>
-          </p:cNvPr>
+          <p:cNvPr id="2" name="标题 1"/>
           <p:cNvSpPr>
             <a:spLocks noGrp="1"/>
           </p:cNvSpPr>
@@ -3467,18 +3226,12 @@
       </p:sp>
       <p:sp>
         <p:nvSpPr>
-          <p:cNvPr id="3" name="内容占位符 2">
-            <a:extLst>
-              <a:ext uri="{FF2B5EF4-FFF2-40B4-BE49-F238E27FC236}">
-                <a16:creationId xmlns:a16="http://schemas.microsoft.com/office/drawing/2014/main" id="{AB6D0E11-DA2E-4B3F-BD08-E5C7E284A445}"/>
-              </a:ext>
-            </a:extLst>
-          </p:cNvPr>
-          <p:cNvSpPr>
-            <a:spLocks noGrp="1"/>
-          </p:cNvSpPr>
-          <p:nvPr>
-            <p:ph idx="1"/>
+          <p:cNvPr id="3" name="内容占位符 2"/>
+          <p:cNvSpPr>
+            <a:spLocks noGrp="1"/>
+          </p:cNvSpPr>
+          <p:nvPr>
+            <p:ph idx="1" hasCustomPrompt="1"/>
           </p:nvPr>
         </p:nvSpPr>
         <p:spPr>
@@ -3571,18 +3324,12 @@
       </p:sp>
       <p:sp>
         <p:nvSpPr>
-          <p:cNvPr id="4" name="文本占位符 3">
-            <a:extLst>
-              <a:ext uri="{FF2B5EF4-FFF2-40B4-BE49-F238E27FC236}">
-                <a16:creationId xmlns:a16="http://schemas.microsoft.com/office/drawing/2014/main" id="{1636FB98-781E-49FA-B0A7-F8EEFF1D1805}"/>
-              </a:ext>
-            </a:extLst>
-          </p:cNvPr>
-          <p:cNvSpPr>
-            <a:spLocks noGrp="1"/>
-          </p:cNvSpPr>
-          <p:nvPr>
-            <p:ph type="body" idx="2"/>
+          <p:cNvPr id="4" name="文本占位符 3"/>
+          <p:cNvSpPr>
+            <a:spLocks noGrp="1"/>
+          </p:cNvSpPr>
+          <p:nvPr>
+            <p:ph type="body" idx="2" hasCustomPrompt="1"/>
           </p:nvPr>
         </p:nvSpPr>
         <p:spPr>
@@ -3643,13 +3390,7 @@
       </p:sp>
       <p:sp>
         <p:nvSpPr>
-          <p:cNvPr id="5" name="日期占位符 4">
-            <a:extLst>
-              <a:ext uri="{FF2B5EF4-FFF2-40B4-BE49-F238E27FC236}">
-                <a16:creationId xmlns:a16="http://schemas.microsoft.com/office/drawing/2014/main" id="{2369D888-3303-4386-8D33-ECD52F3AA74C}"/>
-              </a:ext>
-            </a:extLst>
-          </p:cNvPr>
+          <p:cNvPr id="5" name="日期占位符 4"/>
           <p:cNvSpPr>
             <a:spLocks noGrp="1"/>
           </p:cNvSpPr>
@@ -3663,7 +3404,7 @@
           <a:lstStyle/>
           <a:p>
             <a:fld id="{A653A8F1-9EDF-49EF-A14D-E495AD864F8A}" type="datetimeFigureOut">
-              <a:t>2026/6/15</a:t>
+              <a:rPr/>
             </a:fld>
             <a:endParaRPr/>
           </a:p>
@@ -3671,13 +3412,7 @@
       </p:sp>
       <p:sp>
         <p:nvSpPr>
-          <p:cNvPr id="6" name="页脚占位符 5">
-            <a:extLst>
-              <a:ext uri="{FF2B5EF4-FFF2-40B4-BE49-F238E27FC236}">
-                <a16:creationId xmlns:a16="http://schemas.microsoft.com/office/drawing/2014/main" id="{A6D7732A-D768-4DA1-8E7D-D5193634346A}"/>
-              </a:ext>
-            </a:extLst>
-          </p:cNvPr>
+          <p:cNvPr id="6" name="页脚占位符 5"/>
           <p:cNvSpPr>
             <a:spLocks noGrp="1"/>
           </p:cNvSpPr>
@@ -3689,20 +3424,12 @@
         <p:txBody>
           <a:bodyPr/>
           <a:lstStyle/>
-          <a:p>
-            <a:endParaRPr/>
-          </a:p>
-        </p:txBody>
-      </p:sp>
-      <p:sp>
-        <p:nvSpPr>
-          <p:cNvPr id="7" name="灯片编号占位符 6">
-            <a:extLst>
-              <a:ext uri="{FF2B5EF4-FFF2-40B4-BE49-F238E27FC236}">
-                <a16:creationId xmlns:a16="http://schemas.microsoft.com/office/drawing/2014/main" id="{CC07DCDD-B55B-4694-95B1-D1C5B1EE0402}"/>
-              </a:ext>
-            </a:extLst>
-          </p:cNvPr>
+          <a:p/>
+        </p:txBody>
+      </p:sp>
+      <p:sp>
+        <p:nvSpPr>
+          <p:cNvPr id="7" name="灯片编号占位符 6"/>
           <p:cNvSpPr>
             <a:spLocks noGrp="1"/>
           </p:cNvSpPr>
@@ -3716,7 +3443,7 @@
           <a:lstStyle/>
           <a:p>
             <a:fld id="{43A13857-8FE2-426A-A37B-64DF65062EF2}" type="slidenum">
-              <a:t>‹#›</a:t>
+              <a:rPr/>
             </a:fld>
             <a:endParaRPr/>
           </a:p>
@@ -3749,13 +3476,7 @@
       </p:grpSpPr>
       <p:sp>
         <p:nvSpPr>
-          <p:cNvPr id="2" name="标题 1">
-            <a:extLst>
-              <a:ext uri="{FF2B5EF4-FFF2-40B4-BE49-F238E27FC236}">
-                <a16:creationId xmlns:a16="http://schemas.microsoft.com/office/drawing/2014/main" id="{F9C333A5-B233-4BE5-A80D-E5BABEA42336}"/>
-              </a:ext>
-            </a:extLst>
-          </p:cNvPr>
+          <p:cNvPr id="2" name="标题 1"/>
           <p:cNvSpPr>
             <a:spLocks noGrp="1"/>
           </p:cNvSpPr>
@@ -3786,13 +3507,7 @@
       </p:sp>
       <p:sp>
         <p:nvSpPr>
-          <p:cNvPr id="3" name="图片占位符 2">
-            <a:extLst>
-              <a:ext uri="{FF2B5EF4-FFF2-40B4-BE49-F238E27FC236}">
-                <a16:creationId xmlns:a16="http://schemas.microsoft.com/office/drawing/2014/main" id="{E690864D-645E-4F31-A4AF-C0E25FE29EB5}"/>
-              </a:ext>
-            </a:extLst>
-          </p:cNvPr>
+          <p:cNvPr id="3" name="图片占位符 2"/>
           <p:cNvSpPr>
             <a:spLocks noGrp="1"/>
           </p:cNvSpPr>
@@ -3846,25 +3561,17 @@
               <a:defRPr sz="2000"/>
             </a:lvl9pPr>
           </a:lstStyle>
-          <a:p>
-            <a:endParaRPr/>
-          </a:p>
-        </p:txBody>
-      </p:sp>
-      <p:sp>
-        <p:nvSpPr>
-          <p:cNvPr id="4" name="文本占位符 3">
-            <a:extLst>
-              <a:ext uri="{FF2B5EF4-FFF2-40B4-BE49-F238E27FC236}">
-                <a16:creationId xmlns:a16="http://schemas.microsoft.com/office/drawing/2014/main" id="{E7107EF1-54F5-42F7-A644-5A50AA46D316}"/>
-              </a:ext>
-            </a:extLst>
-          </p:cNvPr>
-          <p:cNvSpPr>
-            <a:spLocks noGrp="1"/>
-          </p:cNvSpPr>
-          <p:nvPr>
-            <p:ph type="body" idx="2"/>
+          <a:p/>
+        </p:txBody>
+      </p:sp>
+      <p:sp>
+        <p:nvSpPr>
+          <p:cNvPr id="4" name="文本占位符 3"/>
+          <p:cNvSpPr>
+            <a:spLocks noGrp="1"/>
+          </p:cNvSpPr>
+          <p:nvPr>
+            <p:ph type="body" idx="2" hasCustomPrompt="1"/>
           </p:nvPr>
         </p:nvSpPr>
         <p:spPr>
@@ -3925,13 +3632,7 @@
       </p:sp>
       <p:sp>
         <p:nvSpPr>
-          <p:cNvPr id="5" name="日期占位符 4">
-            <a:extLst>
-              <a:ext uri="{FF2B5EF4-FFF2-40B4-BE49-F238E27FC236}">
-                <a16:creationId xmlns:a16="http://schemas.microsoft.com/office/drawing/2014/main" id="{7CB5786B-734D-4F2D-8500-8303049D9D55}"/>
-              </a:ext>
-            </a:extLst>
-          </p:cNvPr>
+          <p:cNvPr id="5" name="日期占位符 4"/>
           <p:cNvSpPr>
             <a:spLocks noGrp="1"/>
           </p:cNvSpPr>
@@ -3945,7 +3646,7 @@
           <a:lstStyle/>
           <a:p>
             <a:fld id="{A653A8F1-9EDF-49EF-A14D-E495AD864F8A}" type="datetimeFigureOut">
-              <a:t>2026/6/15</a:t>
+              <a:rPr/>
             </a:fld>
             <a:endParaRPr/>
           </a:p>
@@ -3953,13 +3654,7 @@
       </p:sp>
       <p:sp>
         <p:nvSpPr>
-          <p:cNvPr id="6" name="页脚占位符 5">
-            <a:extLst>
-              <a:ext uri="{FF2B5EF4-FFF2-40B4-BE49-F238E27FC236}">
-                <a16:creationId xmlns:a16="http://schemas.microsoft.com/office/drawing/2014/main" id="{5F4F483E-5FEC-4176-8928-650AFEA37906}"/>
-              </a:ext>
-            </a:extLst>
-          </p:cNvPr>
+          <p:cNvPr id="6" name="页脚占位符 5"/>
           <p:cNvSpPr>
             <a:spLocks noGrp="1"/>
           </p:cNvSpPr>
@@ -3971,20 +3666,12 @@
         <p:txBody>
           <a:bodyPr/>
           <a:lstStyle/>
-          <a:p>
-            <a:endParaRPr/>
-          </a:p>
-        </p:txBody>
-      </p:sp>
-      <p:sp>
-        <p:nvSpPr>
-          <p:cNvPr id="7" name="灯片编号占位符 6">
-            <a:extLst>
-              <a:ext uri="{FF2B5EF4-FFF2-40B4-BE49-F238E27FC236}">
-                <a16:creationId xmlns:a16="http://schemas.microsoft.com/office/drawing/2014/main" id="{C8850916-12F4-40B6-9054-339E1445A3C3}"/>
-              </a:ext>
-            </a:extLst>
-          </p:cNvPr>
+          <a:p/>
+        </p:txBody>
+      </p:sp>
+      <p:sp>
+        <p:nvSpPr>
+          <p:cNvPr id="7" name="灯片编号占位符 6"/>
           <p:cNvSpPr>
             <a:spLocks noGrp="1"/>
           </p:cNvSpPr>
@@ -3998,7 +3685,7 @@
           <a:lstStyle/>
           <a:p>
             <a:fld id="{43A13857-8FE2-426A-A37B-64DF65062EF2}" type="slidenum">
-              <a:t>‹#›</a:t>
+              <a:rPr/>
             </a:fld>
             <a:endParaRPr/>
           </a:p>
@@ -4036,13 +3723,7 @@
       </p:grpSpPr>
       <p:sp>
         <p:nvSpPr>
-          <p:cNvPr id="2" name="标题占位符 1">
-            <a:extLst>
-              <a:ext uri="{FF2B5EF4-FFF2-40B4-BE49-F238E27FC236}">
-                <a16:creationId xmlns:a16="http://schemas.microsoft.com/office/drawing/2014/main" id="{0E41609F-3331-439D-B0F8-1F25E8EB908C}"/>
-              </a:ext>
-            </a:extLst>
-          </p:cNvPr>
+          <p:cNvPr id="2" name="标题占位符 1"/>
           <p:cNvSpPr>
             <a:spLocks noGrp="1"/>
           </p:cNvSpPr>
@@ -4073,13 +3754,7 @@
       </p:sp>
       <p:sp>
         <p:nvSpPr>
-          <p:cNvPr id="3" name="文本占位符 2">
-            <a:extLst>
-              <a:ext uri="{FF2B5EF4-FFF2-40B4-BE49-F238E27FC236}">
-                <a16:creationId xmlns:a16="http://schemas.microsoft.com/office/drawing/2014/main" id="{AFE24023-1CA4-4BDC-8DC5-1C11F41C7754}"/>
-              </a:ext>
-            </a:extLst>
-          </p:cNvPr>
+          <p:cNvPr id="3" name="文本占位符 2"/>
           <p:cNvSpPr>
             <a:spLocks noGrp="1"/>
           </p:cNvSpPr>
@@ -4145,13 +3820,7 @@
       </p:sp>
       <p:sp>
         <p:nvSpPr>
-          <p:cNvPr id="4" name="日期占位符 3">
-            <a:extLst>
-              <a:ext uri="{FF2B5EF4-FFF2-40B4-BE49-F238E27FC236}">
-                <a16:creationId xmlns:a16="http://schemas.microsoft.com/office/drawing/2014/main" id="{2FCE8571-A74E-415B-8900-450A14D4097D}"/>
-              </a:ext>
-            </a:extLst>
-          </p:cNvPr>
+          <p:cNvPr id="4" name="日期占位符 3"/>
           <p:cNvSpPr>
             <a:spLocks noGrp="1"/>
           </p:cNvSpPr>
@@ -4184,7 +3853,7 @@
           </a:lstStyle>
           <a:p>
             <a:fld id="{A653A8F1-9EDF-49EF-A14D-E495AD864F8A}" type="datetimeFigureOut">
-              <a:t>2026/6/15</a:t>
+              <a:rPr/>
             </a:fld>
             <a:endParaRPr/>
           </a:p>
@@ -4192,13 +3861,7 @@
       </p:sp>
       <p:sp>
         <p:nvSpPr>
-          <p:cNvPr id="5" name="页脚占位符 4">
-            <a:extLst>
-              <a:ext uri="{FF2B5EF4-FFF2-40B4-BE49-F238E27FC236}">
-                <a16:creationId xmlns:a16="http://schemas.microsoft.com/office/drawing/2014/main" id="{A018B585-8404-477C-9FB7-0443696D314F}"/>
-              </a:ext>
-            </a:extLst>
-          </p:cNvPr>
+          <p:cNvPr id="5" name="页脚占位符 4"/>
           <p:cNvSpPr>
             <a:spLocks noGrp="1"/>
           </p:cNvSpPr>
@@ -4229,20 +3892,12 @@
               </a:defRPr>
             </a:lvl1pPr>
           </a:lstStyle>
-          <a:p>
-            <a:endParaRPr/>
-          </a:p>
-        </p:txBody>
-      </p:sp>
-      <p:sp>
-        <p:nvSpPr>
-          <p:cNvPr id="6" name="灯片编号占位符 5">
-            <a:extLst>
-              <a:ext uri="{FF2B5EF4-FFF2-40B4-BE49-F238E27FC236}">
-                <a16:creationId xmlns:a16="http://schemas.microsoft.com/office/drawing/2014/main" id="{A6870DD4-577D-45D7-925C-1776615E4D1F}"/>
-              </a:ext>
-            </a:extLst>
-          </p:cNvPr>
+          <a:p/>
+        </p:txBody>
+      </p:sp>
+      <p:sp>
+        <p:nvSpPr>
+          <p:cNvPr id="6" name="灯片编号占位符 5"/>
           <p:cNvSpPr>
             <a:spLocks noGrp="1"/>
           </p:cNvSpPr>
@@ -4275,7 +3930,7 @@
           </a:lstStyle>
           <a:p>
             <a:fld id="{43A13857-8FE2-426A-A37B-64DF65062EF2}" type="slidenum">
-              <a:t>‹#›</a:t>
+              <a:rPr/>
             </a:fld>
             <a:endParaRPr/>
           </a:p>
@@ -4604,13 +4259,7 @@
       </p:grpSpPr>
       <p:sp>
         <p:nvSpPr>
-          <p:cNvPr id="5" name="矩形 4">
-            <a:extLst>
-              <a:ext uri="{FF2B5EF4-FFF2-40B4-BE49-F238E27FC236}">
-                <a16:creationId xmlns:a16="http://schemas.microsoft.com/office/drawing/2014/main" id="{540D35B1-31AE-46E4-AD38-CE2127573BCF}"/>
-              </a:ext>
-            </a:extLst>
-          </p:cNvPr>
+          <p:cNvPr id="5" name="矩形 4"/>
           <p:cNvSpPr>
             <a:spLocks noGrp="1"/>
           </p:cNvSpPr>
@@ -4654,19 +4303,12 @@
             <a:pPr algn="ctr">
               <a:buNone/>
             </a:pPr>
-            <a:endParaRPr/>
-          </a:p>
-        </p:txBody>
-      </p:sp>
-      <p:sp>
-        <p:nvSpPr>
-          <p:cNvPr id="6" name="文本框 5">
-            <a:extLst>
-              <a:ext uri="{FF2B5EF4-FFF2-40B4-BE49-F238E27FC236}">
-                <a16:creationId xmlns:a16="http://schemas.microsoft.com/office/drawing/2014/main" id="{01009F98-A134-45A8-957A-C46581E6DDEA}"/>
-              </a:ext>
-            </a:extLst>
-          </p:cNvPr>
+          </a:p>
+        </p:txBody>
+      </p:sp>
+      <p:sp>
+        <p:nvSpPr>
+          <p:cNvPr id="6" name="文本框 5"/>
           <p:cNvSpPr>
             <a:spLocks noGrp="1"/>
           </p:cNvSpPr>
@@ -4702,18 +4344,20 @@
               </a:rPr>
               <a:t>搜索引擎总结</a:t>
             </a:r>
-          </a:p>
-        </p:txBody>
-      </p:sp>
-      <p:sp>
-        <p:nvSpPr>
-          <p:cNvPr id="7" name="文本框 6">
-            <a:extLst>
-              <a:ext uri="{FF2B5EF4-FFF2-40B4-BE49-F238E27FC236}">
-                <a16:creationId xmlns:a16="http://schemas.microsoft.com/office/drawing/2014/main" id="{485B0D77-90F1-4E5A-ACB5-8D0FFD5681A8}"/>
-              </a:ext>
-            </a:extLst>
-          </p:cNvPr>
+            <a:endParaRPr lang="zh-CN" altLang="en-US" sz="4400" dirty="0">
+              <a:solidFill>
+                <a:schemeClr val="bg1"/>
+              </a:solidFill>
+              <a:latin typeface="字魂17号-萌趣果冻体"/>
+              <a:ea typeface="字魂17号-萌趣果冻体"/>
+              <a:cs typeface="字魂17号-萌趣果冻体"/>
+            </a:endParaRPr>
+          </a:p>
+        </p:txBody>
+      </p:sp>
+      <p:sp>
+        <p:nvSpPr>
+          <p:cNvPr id="7" name="文本框 6"/>
           <p:cNvSpPr>
             <a:spLocks noGrp="1"/>
           </p:cNvSpPr>
@@ -4756,13 +4400,7 @@
       </p:sp>
       <p:sp>
         <p:nvSpPr>
-          <p:cNvPr id="10" name="椭圆 9">
-            <a:extLst>
-              <a:ext uri="{FF2B5EF4-FFF2-40B4-BE49-F238E27FC236}">
-                <a16:creationId xmlns:a16="http://schemas.microsoft.com/office/drawing/2014/main" id="{FC386E4F-7907-4FDD-B3B9-E3127F053484}"/>
-              </a:ext>
-            </a:extLst>
-          </p:cNvPr>
+          <p:cNvPr id="10" name="椭圆 9"/>
           <p:cNvSpPr>
             <a:spLocks noGrp="1"/>
           </p:cNvSpPr>
@@ -4806,19 +4444,12 @@
             <a:pPr algn="ctr">
               <a:buNone/>
             </a:pPr>
-            <a:endParaRPr/>
-          </a:p>
-        </p:txBody>
-      </p:sp>
-      <p:sp>
-        <p:nvSpPr>
-          <p:cNvPr id="13" name="等腰三角形 12">
-            <a:extLst>
-              <a:ext uri="{FF2B5EF4-FFF2-40B4-BE49-F238E27FC236}">
-                <a16:creationId xmlns:a16="http://schemas.microsoft.com/office/drawing/2014/main" id="{ADBB85B5-2B68-44EC-837A-7CF86BE98265}"/>
-              </a:ext>
-            </a:extLst>
-          </p:cNvPr>
+          </a:p>
+        </p:txBody>
+      </p:sp>
+      <p:sp>
+        <p:nvSpPr>
+          <p:cNvPr id="13" name="等腰三角形 12"/>
           <p:cNvSpPr>
             <a:spLocks noGrp="1"/>
           </p:cNvSpPr>
@@ -4862,19 +4493,12 @@
             <a:pPr algn="ctr">
               <a:buNone/>
             </a:pPr>
-            <a:endParaRPr/>
-          </a:p>
-        </p:txBody>
-      </p:sp>
-      <p:sp>
-        <p:nvSpPr>
-          <p:cNvPr id="16" name="椭圆 15">
-            <a:extLst>
-              <a:ext uri="{FF2B5EF4-FFF2-40B4-BE49-F238E27FC236}">
-                <a16:creationId xmlns:a16="http://schemas.microsoft.com/office/drawing/2014/main" id="{F817E4FC-2B81-474B-A08F-73CA0FE7F988}"/>
-              </a:ext>
-            </a:extLst>
-          </p:cNvPr>
+          </a:p>
+        </p:txBody>
+      </p:sp>
+      <p:sp>
+        <p:nvSpPr>
+          <p:cNvPr id="16" name="椭圆 15"/>
           <p:cNvSpPr>
             <a:spLocks noGrp="1"/>
           </p:cNvSpPr>
@@ -4918,19 +4542,12 @@
             <a:pPr algn="ctr">
               <a:buNone/>
             </a:pPr>
-            <a:endParaRPr/>
-          </a:p>
-        </p:txBody>
-      </p:sp>
-      <p:sp>
-        <p:nvSpPr>
-          <p:cNvPr id="17" name="等腰三角形 16">
-            <a:extLst>
-              <a:ext uri="{FF2B5EF4-FFF2-40B4-BE49-F238E27FC236}">
-                <a16:creationId xmlns:a16="http://schemas.microsoft.com/office/drawing/2014/main" id="{EB26C5CC-5887-4191-BC00-B4BBD85A9AFC}"/>
-              </a:ext>
-            </a:extLst>
-          </p:cNvPr>
+          </a:p>
+        </p:txBody>
+      </p:sp>
+      <p:sp>
+        <p:nvSpPr>
+          <p:cNvPr id="17" name="等腰三角形 16"/>
           <p:cNvSpPr>
             <a:spLocks noGrp="1"/>
           </p:cNvSpPr>
@@ -4974,19 +4591,12 @@
             <a:pPr algn="ctr">
               <a:buNone/>
             </a:pPr>
-            <a:endParaRPr/>
-          </a:p>
-        </p:txBody>
-      </p:sp>
-      <p:sp>
-        <p:nvSpPr>
-          <p:cNvPr id="19" name="椭圆 18">
-            <a:extLst>
-              <a:ext uri="{FF2B5EF4-FFF2-40B4-BE49-F238E27FC236}">
-                <a16:creationId xmlns:a16="http://schemas.microsoft.com/office/drawing/2014/main" id="{258F5FFE-7C49-46D3-A163-2EDEEDA471FE}"/>
-              </a:ext>
-            </a:extLst>
-          </p:cNvPr>
+          </a:p>
+        </p:txBody>
+      </p:sp>
+      <p:sp>
+        <p:nvSpPr>
+          <p:cNvPr id="19" name="椭圆 18"/>
           <p:cNvSpPr>
             <a:spLocks noGrp="1"/>
           </p:cNvSpPr>
@@ -5032,7 +4642,6 @@
             <a:pPr algn="ctr">
               <a:buNone/>
             </a:pPr>
-            <a:endParaRPr/>
           </a:p>
         </p:txBody>
       </p:sp>
@@ -5045,7 +4654,7 @@
           <p:nvPr/>
         </p:nvPicPr>
         <p:blipFill>
-          <a:blip r:embed="rId3"/>
+          <a:blip r:embed="rId1"/>
           <a:stretch>
             <a:fillRect/>
           </a:stretch>
@@ -5062,13 +4671,7 @@
       </p:pic>
       <p:sp>
         <p:nvSpPr>
-          <p:cNvPr id="4" name="文本框 3">
-            <a:extLst>
-              <a:ext uri="{FF2B5EF4-FFF2-40B4-BE49-F238E27FC236}">
-                <a16:creationId xmlns:a16="http://schemas.microsoft.com/office/drawing/2014/main" id="{F88C68E8-475C-4113-BA48-2830529E4DF3}"/>
-              </a:ext>
-            </a:extLst>
-          </p:cNvPr>
+          <p:cNvPr id="4" name="文本框 3"/>
           <p:cNvSpPr txBox="1"/>
           <p:nvPr/>
         </p:nvSpPr>
@@ -5096,15 +4699,15 @@
               </a:rPr>
               <a:t>小组成员：李嘉轩 刘义群 王秀崧 汤语涵 谢羿衡 唐熙雷 邢泽雷</a:t>
             </a:r>
+            <a:endParaRPr lang="zh-CN" altLang="en-US" dirty="0">
+              <a:solidFill>
+                <a:schemeClr val="bg1"/>
+              </a:solidFill>
+            </a:endParaRPr>
           </a:p>
         </p:txBody>
       </p:sp>
     </p:spTree>
-    <p:extLst>
-      <p:ext uri="{BB962C8B-B14F-4D97-AF65-F5344CB8AC3E}">
-        <p14:creationId xmlns:p14="http://schemas.microsoft.com/office/powerpoint/2010/main" val="1515971607"/>
-      </p:ext>
-    </p:extLst>
   </p:cSld>
   <p:clrMapOvr>
     <a:masterClrMapping/>
@@ -5115,14 +4718,6 @@
 <file path=ppt/slides/slide10.xml><?xml version="1.0" encoding="utf-8"?>
 <p:sld xmlns:a="http://schemas.openxmlformats.org/drawingml/2006/main" xmlns:r="http://schemas.openxmlformats.org/officeDocument/2006/relationships" xmlns:p="http://schemas.openxmlformats.org/presentationml/2006/main">
   <p:cSld>
-    <p:bg>
-      <p:bgPr>
-        <a:solidFill>
-          <a:srgbClr val="F7F7F4"/>
-        </a:solidFill>
-        <a:effectLst/>
-      </p:bgPr>
-    </p:bg>
     <p:spTree>
       <p:nvGrpSpPr>
         <p:cNvPr id="1" name=""/>
@@ -5139,13 +4734,7 @@
       </p:grpSpPr>
       <p:sp>
         <p:nvSpPr>
-          <p:cNvPr id="13" name="矩形 12">
-            <a:extLst>
-              <a:ext uri="{FF2B5EF4-FFF2-40B4-BE49-F238E27FC236}">
-                <a16:creationId xmlns:a16="http://schemas.microsoft.com/office/drawing/2014/main" id="{49C5998F-8D86-4862-8469-086DC510390B}"/>
-              </a:ext>
-            </a:extLst>
-          </p:cNvPr>
+          <p:cNvPr id="13" name="矩形 12"/>
           <p:cNvSpPr>
             <a:spLocks noGrp="1"/>
           </p:cNvSpPr>
@@ -5172,13 +4761,7 @@
       </p:sp>
       <p:sp>
         <p:nvSpPr>
-          <p:cNvPr id="2" name="矩形 1">
-            <a:extLst>
-              <a:ext uri="{FF2B5EF4-FFF2-40B4-BE49-F238E27FC236}">
-                <a16:creationId xmlns:a16="http://schemas.microsoft.com/office/drawing/2014/main" id="{7014062F-B6B3-42D0-923B-A7424561BC77}"/>
-              </a:ext>
-            </a:extLst>
-          </p:cNvPr>
+          <p:cNvPr id="2" name="矩形 1"/>
           <p:cNvSpPr>
             <a:spLocks noGrp="1"/>
           </p:cNvSpPr>
@@ -5223,7 +4806,7 @@
                   <a:srgbClr val="2D4A33"/>
                 </a:solidFill>
               </a:rPr>
-              <a:t>唐熙雷</a:t>
+              <a:t>李嘉轩</a:t>
             </a:r>
             <a:endParaRPr sz="2550" b="1" dirty="0">
               <a:solidFill>
@@ -5235,13 +4818,7 @@
       </p:sp>
       <p:sp>
         <p:nvSpPr>
-          <p:cNvPr id="4" name="矩形 3">
-            <a:extLst>
-              <a:ext uri="{FF2B5EF4-FFF2-40B4-BE49-F238E27FC236}">
-                <a16:creationId xmlns:a16="http://schemas.microsoft.com/office/drawing/2014/main" id="{C6221659-10CA-473D-B608-E2633E14E235}"/>
-              </a:ext>
-            </a:extLst>
-          </p:cNvPr>
+          <p:cNvPr id="4" name="矩形 3"/>
           <p:cNvSpPr>
             <a:spLocks noGrp="1"/>
           </p:cNvSpPr>
@@ -5249,8 +4826,8 @@
         </p:nvSpPr>
         <p:spPr>
           <a:xfrm>
-            <a:off x="857250" y="1619250"/>
-            <a:ext cx="4762500" cy="1619250"/>
+            <a:off x="1498600" y="1481665"/>
+            <a:ext cx="9465733" cy="2057401"/>
           </a:xfrm>
           <a:prstGeom prst="rect">
             <a:avLst/>
@@ -5268,13 +4845,7 @@
       </p:sp>
       <p:sp>
         <p:nvSpPr>
-          <p:cNvPr id="5" name="矩形 4">
-            <a:extLst>
-              <a:ext uri="{FF2B5EF4-FFF2-40B4-BE49-F238E27FC236}">
-                <a16:creationId xmlns:a16="http://schemas.microsoft.com/office/drawing/2014/main" id="{BE326CC3-10C1-4780-ADEA-D2C23EB4593B}"/>
-              </a:ext>
-            </a:extLst>
-          </p:cNvPr>
+          <p:cNvPr id="5" name="矩形 4"/>
           <p:cNvSpPr>
             <a:spLocks noGrp="1"/>
           </p:cNvSpPr>
@@ -5282,7 +4853,7 @@
         </p:nvSpPr>
         <p:spPr>
           <a:xfrm>
-            <a:off x="1085850" y="1790700"/>
+            <a:off x="1634067" y="1678782"/>
             <a:ext cx="4305300" cy="323850"/>
           </a:xfrm>
           <a:prstGeom prst="rect">
@@ -5314,25 +4885,24 @@
               </a:defRPr>
             </a:pPr>
             <a:r>
-              <a:rPr sz="1650" b="1">
+              <a:rPr lang="zh-CN" altLang="en-US" sz="3200" b="1" dirty="0">
                 <a:solidFill>
                   <a:srgbClr val="2D4A33"/>
                 </a:solidFill>
               </a:rPr>
-              <a:t>Faiss</a:t>
-            </a:r>
-          </a:p>
-        </p:txBody>
-      </p:sp>
-      <p:sp>
-        <p:nvSpPr>
-          <p:cNvPr id="6" name="矩形 5">
-            <a:extLst>
-              <a:ext uri="{FF2B5EF4-FFF2-40B4-BE49-F238E27FC236}">
-                <a16:creationId xmlns:a16="http://schemas.microsoft.com/office/drawing/2014/main" id="{30F903FA-7735-436D-AA14-6FDE08DB3204}"/>
-              </a:ext>
-            </a:extLst>
-          </p:cNvPr>
+              <a:t>文件解析</a:t>
+            </a:r>
+            <a:endParaRPr sz="3200" b="1" dirty="0">
+              <a:solidFill>
+                <a:srgbClr val="2D4A33"/>
+              </a:solidFill>
+            </a:endParaRPr>
+          </a:p>
+        </p:txBody>
+      </p:sp>
+      <p:sp>
+        <p:nvSpPr>
+          <p:cNvPr id="6" name="矩形 5"/>
           <p:cNvSpPr>
             <a:spLocks noGrp="1"/>
           </p:cNvSpPr>
@@ -5340,8 +4910,8 @@
         </p:nvSpPr>
         <p:spPr>
           <a:xfrm>
-            <a:off x="1085850" y="2228850"/>
-            <a:ext cx="4305300" cy="857250"/>
+            <a:off x="1634067" y="2091531"/>
+            <a:ext cx="9059333" cy="1358635"/>
           </a:xfrm>
           <a:prstGeom prst="rect">
             <a:avLst/>
@@ -5372,25 +4942,208 @@
               </a:defRPr>
             </a:pPr>
             <a:r>
-              <a:rPr sz="1350" b="0">
-                <a:solidFill>
-                  <a:srgbClr val="1F2D22"/>
-                </a:solidFill>
-              </a:rPr>
-              <a:t>替换 / 增强向量检索底座</a:t>
-            </a:r>
-          </a:p>
-        </p:txBody>
-      </p:sp>
-      <p:sp>
-        <p:nvSpPr>
-          <p:cNvPr id="7" name="矩形 6">
-            <a:extLst>
-              <a:ext uri="{FF2B5EF4-FFF2-40B4-BE49-F238E27FC236}">
-                <a16:creationId xmlns:a16="http://schemas.microsoft.com/office/drawing/2014/main" id="{5C63DCCE-58D8-46C2-8CD3-78F707B6307B}"/>
-              </a:ext>
-            </a:extLst>
-          </p:cNvPr>
+              <a:rPr lang="zh-CN" altLang="en-US" sz="2000" dirty="0">
+                <a:solidFill>
+                  <a:srgbClr val="1F2D22"/>
+                </a:solidFill>
+                <a:latin typeface="ui-monospace"/>
+              </a:rPr>
+              <a:t>新增了 </a:t>
+            </a:r>
+            <a:r>
+              <a:rPr lang="en-US" altLang="zh-CN" sz="2000" dirty="0" err="1">
+                <a:solidFill>
+                  <a:srgbClr val="1F2D22"/>
+                </a:solidFill>
+                <a:latin typeface="ui-monospace"/>
+              </a:rPr>
+              <a:t>structured_blocks</a:t>
+            </a:r>
+            <a:r>
+              <a:rPr lang="en-US" altLang="zh-CN" sz="2000" dirty="0">
+                <a:solidFill>
+                  <a:srgbClr val="1F2D22"/>
+                </a:solidFill>
+                <a:latin typeface="ui-monospace"/>
+              </a:rPr>
+              <a:t> </a:t>
+            </a:r>
+            <a:r>
+              <a:rPr lang="zh-CN" altLang="en-US" sz="2000" dirty="0">
+                <a:solidFill>
+                  <a:srgbClr val="1F2D22"/>
+                </a:solidFill>
+                <a:latin typeface="ui-monospace"/>
+              </a:rPr>
+              <a:t>解析模式，把论文 </a:t>
+            </a:r>
+            <a:r>
+              <a:rPr lang="en-US" altLang="zh-CN" sz="2000" dirty="0">
+                <a:solidFill>
+                  <a:srgbClr val="1F2D22"/>
+                </a:solidFill>
+                <a:latin typeface="ui-monospace"/>
+              </a:rPr>
+              <a:t>PDF </a:t>
+            </a:r>
+            <a:r>
+              <a:rPr lang="zh-CN" altLang="en-US" sz="2000" dirty="0">
+                <a:solidFill>
+                  <a:srgbClr val="1F2D22"/>
+                </a:solidFill>
+                <a:latin typeface="ui-monospace"/>
+              </a:rPr>
+              <a:t>解析成统一 </a:t>
+            </a:r>
+            <a:r>
+              <a:rPr lang="en-US" altLang="zh-CN" sz="2000" dirty="0">
+                <a:solidFill>
+                  <a:srgbClr val="1F2D22"/>
+                </a:solidFill>
+                <a:latin typeface="ui-monospace"/>
+              </a:rPr>
+              <a:t>block </a:t>
+            </a:r>
+            <a:r>
+              <a:rPr lang="zh-CN" altLang="en-US" sz="2000" dirty="0">
+                <a:solidFill>
+                  <a:srgbClr val="1F2D22"/>
+                </a:solidFill>
+                <a:latin typeface="ui-monospace"/>
+              </a:rPr>
+              <a:t>结构</a:t>
+            </a:r>
+            <a:endParaRPr lang="en-US" altLang="zh-CN" sz="2000" dirty="0">
+              <a:solidFill>
+                <a:srgbClr val="1F2D22"/>
+              </a:solidFill>
+              <a:latin typeface="ui-monospace"/>
+            </a:endParaRPr>
+          </a:p>
+          <a:p>
+            <a:pPr algn="l"/>
+            <a:r>
+              <a:rPr lang="zh-CN" altLang="en-US" sz="2000" dirty="0">
+                <a:solidFill>
+                  <a:srgbClr val="1F2D22"/>
+                </a:solidFill>
+                <a:latin typeface="ui-monospace"/>
+              </a:rPr>
+              <a:t>基于 </a:t>
+            </a:r>
+            <a:r>
+              <a:rPr lang="en-US" altLang="zh-CN" sz="2000" dirty="0" err="1">
+                <a:solidFill>
+                  <a:srgbClr val="1F2D22"/>
+                </a:solidFill>
+                <a:latin typeface="ui-monospace"/>
+              </a:rPr>
+              <a:t>PyMuPDF</a:t>
+            </a:r>
+            <a:r>
+              <a:rPr lang="en-US" altLang="zh-CN" sz="2000" dirty="0">
+                <a:solidFill>
+                  <a:srgbClr val="1F2D22"/>
+                </a:solidFill>
+                <a:latin typeface="ui-monospace"/>
+              </a:rPr>
+              <a:t> </a:t>
+            </a:r>
+            <a:r>
+              <a:rPr lang="zh-CN" altLang="en-US" sz="2000" dirty="0">
+                <a:solidFill>
+                  <a:srgbClr val="1F2D22"/>
+                </a:solidFill>
+                <a:latin typeface="ui-monospace"/>
+              </a:rPr>
+              <a:t>提取版面块、字号、粗体、</a:t>
+            </a:r>
+            <a:r>
+              <a:rPr lang="en-US" altLang="zh-CN" sz="2000" dirty="0" err="1">
+                <a:solidFill>
+                  <a:srgbClr val="1F2D22"/>
+                </a:solidFill>
+                <a:latin typeface="ui-monospace"/>
+              </a:rPr>
+              <a:t>bbox</a:t>
+            </a:r>
+            <a:r>
+              <a:rPr lang="zh-CN" altLang="en-US" sz="2000" dirty="0">
+                <a:solidFill>
+                  <a:srgbClr val="1F2D22"/>
+                </a:solidFill>
+                <a:latin typeface="ui-monospace"/>
+              </a:rPr>
+              <a:t>、列信息</a:t>
+            </a:r>
+            <a:endParaRPr lang="zh-CN" altLang="en-US" sz="2000" dirty="0">
+              <a:solidFill>
+                <a:srgbClr val="1F2D22"/>
+              </a:solidFill>
+              <a:latin typeface="ui-monospace"/>
+            </a:endParaRPr>
+          </a:p>
+          <a:p>
+            <a:pPr>
+              <a:defRPr sz="1350" b="0">
+                <a:solidFill>
+                  <a:srgbClr val="1F2D22"/>
+                </a:solidFill>
+              </a:defRPr>
+            </a:pPr>
+            <a:r>
+              <a:rPr lang="zh-CN" altLang="en-US" sz="2000" dirty="0">
+                <a:solidFill>
+                  <a:srgbClr val="1F2D22"/>
+                </a:solidFill>
+                <a:latin typeface="ui-monospace"/>
+              </a:rPr>
+              <a:t>过滤重复页眉页脚噪声，精确分类为正确的</a:t>
+            </a:r>
+            <a:r>
+              <a:rPr lang="en-US" altLang="zh-CN" sz="2000" dirty="0">
+                <a:solidFill>
+                  <a:srgbClr val="1F2D22"/>
+                </a:solidFill>
+                <a:latin typeface="ui-monospace"/>
+              </a:rPr>
+              <a:t>block</a:t>
+            </a:r>
+            <a:r>
+              <a:rPr lang="zh-CN" altLang="en-US" sz="2000" dirty="0">
+                <a:solidFill>
+                  <a:srgbClr val="1F2D22"/>
+                </a:solidFill>
+                <a:latin typeface="ui-monospace"/>
+              </a:rPr>
+              <a:t>类别</a:t>
+            </a:r>
+            <a:endParaRPr lang="zh-CN" altLang="en-US" sz="2000" dirty="0">
+              <a:solidFill>
+                <a:srgbClr val="1F2D22"/>
+              </a:solidFill>
+              <a:latin typeface="ui-monospace"/>
+            </a:endParaRPr>
+          </a:p>
+          <a:p>
+            <a:pPr algn="l">
+              <a:defRPr sz="1350" b="0">
+                <a:solidFill>
+                  <a:srgbClr val="1F2D22"/>
+                </a:solidFill>
+              </a:defRPr>
+            </a:pPr>
+            <a:endParaRPr sz="1350" b="0" dirty="0">
+              <a:solidFill>
+                <a:srgbClr val="1F2D22"/>
+              </a:solidFill>
+            </a:endParaRPr>
+          </a:p>
+        </p:txBody>
+      </p:sp>
+      <p:sp>
+        <p:nvSpPr>
+          <p:cNvPr id="7" name="矩形 6"/>
           <p:cNvSpPr>
             <a:spLocks noGrp="1"/>
           </p:cNvSpPr>
@@ -5398,8 +5151,8 @@
         </p:nvSpPr>
         <p:spPr>
           <a:xfrm>
-            <a:off x="6572250" y="1619250"/>
-            <a:ext cx="4762500" cy="1619250"/>
+            <a:off x="1498600" y="4171950"/>
+            <a:ext cx="9465733" cy="1619250"/>
           </a:xfrm>
           <a:prstGeom prst="rect">
             <a:avLst/>
@@ -5417,13 +5170,7 @@
       </p:sp>
       <p:sp>
         <p:nvSpPr>
-          <p:cNvPr id="8" name="矩形 7">
-            <a:extLst>
-              <a:ext uri="{FF2B5EF4-FFF2-40B4-BE49-F238E27FC236}">
-                <a16:creationId xmlns:a16="http://schemas.microsoft.com/office/drawing/2014/main" id="{BE864F01-824A-4742-BCDE-992C14CE649A}"/>
-              </a:ext>
-            </a:extLst>
-          </p:cNvPr>
+          <p:cNvPr id="8" name="矩形 7"/>
           <p:cNvSpPr>
             <a:spLocks noGrp="1"/>
           </p:cNvSpPr>
@@ -5431,7 +5178,7 @@
         </p:nvSpPr>
         <p:spPr>
           <a:xfrm>
-            <a:off x="6800850" y="1790700"/>
+            <a:off x="1634067" y="4362450"/>
             <a:ext cx="4305300" cy="323850"/>
           </a:xfrm>
           <a:prstGeom prst="rect">
@@ -5463,25 +5210,24 @@
               </a:defRPr>
             </a:pPr>
             <a:r>
-              <a:rPr sz="1650" b="1">
+              <a:rPr lang="zh-CN" altLang="en-US" sz="3200" b="1" dirty="0">
                 <a:solidFill>
                   <a:srgbClr val="2D4A33"/>
                 </a:solidFill>
               </a:rPr>
-              <a:t>多检索</a:t>
-            </a:r>
-          </a:p>
-        </p:txBody>
-      </p:sp>
-      <p:sp>
-        <p:nvSpPr>
-          <p:cNvPr id="9" name="矩形 8">
-            <a:extLst>
-              <a:ext uri="{FF2B5EF4-FFF2-40B4-BE49-F238E27FC236}">
-                <a16:creationId xmlns:a16="http://schemas.microsoft.com/office/drawing/2014/main" id="{02E654C1-4FDB-491C-8E0F-675E749870C4}"/>
-              </a:ext>
-            </a:extLst>
-          </p:cNvPr>
+              <a:t>知识分块</a:t>
+            </a:r>
+            <a:endParaRPr sz="3200" b="1" dirty="0">
+              <a:solidFill>
+                <a:srgbClr val="2D4A33"/>
+              </a:solidFill>
+            </a:endParaRPr>
+          </a:p>
+        </p:txBody>
+      </p:sp>
+      <p:sp>
+        <p:nvSpPr>
+          <p:cNvPr id="9" name="矩形 8"/>
           <p:cNvSpPr>
             <a:spLocks noGrp="1"/>
           </p:cNvSpPr>
@@ -5489,8 +5235,8 @@
         </p:nvSpPr>
         <p:spPr>
           <a:xfrm>
-            <a:off x="6800850" y="2228850"/>
-            <a:ext cx="4305300" cy="857250"/>
+            <a:off x="1634067" y="4677833"/>
+            <a:ext cx="9330266" cy="977900"/>
           </a:xfrm>
           <a:prstGeom prst="rect">
             <a:avLst/>
@@ -5513,7 +5259,7 @@
           <a:bodyPr anchor="ctr"/>
           <a:lstStyle/>
           <a:p>
-            <a:pPr algn="l">
+            <a:pPr>
               <a:defRPr sz="1350" b="0">
                 <a:solidFill>
                   <a:srgbClr val="1F2D22"/>
@@ -5521,171 +5267,123 @@
               </a:defRPr>
             </a:pPr>
             <a:r>
-              <a:rPr sz="1350" b="0">
-                <a:solidFill>
-                  <a:srgbClr val="1F2D22"/>
-                </a:solidFill>
-              </a:rPr>
-              <a:t>支持多种召回方式并行比较</a:t>
-            </a:r>
-          </a:p>
-        </p:txBody>
-      </p:sp>
-      <p:sp>
-        <p:nvSpPr>
-          <p:cNvPr id="10" name="矩形 9">
-            <a:extLst>
-              <a:ext uri="{FF2B5EF4-FFF2-40B4-BE49-F238E27FC236}">
-                <a16:creationId xmlns:a16="http://schemas.microsoft.com/office/drawing/2014/main" id="{36D0BD11-F236-4FBA-8154-83D3D2A1D76A}"/>
-              </a:ext>
-            </a:extLst>
-          </p:cNvPr>
-          <p:cNvSpPr>
-            <a:spLocks noGrp="1"/>
-          </p:cNvSpPr>
-          <p:nvPr/>
-        </p:nvSpPr>
-        <p:spPr>
-          <a:xfrm>
-            <a:off x="2000250" y="3714750"/>
-            <a:ext cx="8191500" cy="1428750"/>
-          </a:xfrm>
-          <a:prstGeom prst="rect">
-            <a:avLst/>
-          </a:prstGeom>
-          <a:solidFill>
-            <a:srgbClr val="FFFFFF"/>
-          </a:solidFill>
-          <a:ln w="9525">
-            <a:solidFill>
-              <a:srgbClr val="C7D0C4"/>
-            </a:solidFill>
-            <a:prstDash val="solid"/>
-          </a:ln>
-        </p:spPr>
-      </p:sp>
-      <p:sp>
-        <p:nvSpPr>
-          <p:cNvPr id="11" name="矩形 10">
-            <a:extLst>
-              <a:ext uri="{FF2B5EF4-FFF2-40B4-BE49-F238E27FC236}">
-                <a16:creationId xmlns:a16="http://schemas.microsoft.com/office/drawing/2014/main" id="{7E12BFA7-42DC-4404-8442-3A427F38924F}"/>
-              </a:ext>
-            </a:extLst>
-          </p:cNvPr>
-          <p:cNvSpPr>
-            <a:spLocks noGrp="1"/>
-          </p:cNvSpPr>
-          <p:nvPr/>
-        </p:nvSpPr>
-        <p:spPr>
-          <a:xfrm>
-            <a:off x="2228850" y="3886200"/>
-            <a:ext cx="7734300" cy="323850"/>
-          </a:xfrm>
-          <a:prstGeom prst="rect">
-            <a:avLst/>
-          </a:prstGeom>
-          <a:solidFill>
-            <a:srgbClr val="000000">
-              <a:alpha val="0"/>
-            </a:srgbClr>
-          </a:solidFill>
-          <a:ln w="0">
-            <a:solidFill>
-              <a:srgbClr val="000000">
-                <a:alpha val="0"/>
-              </a:srgbClr>
-            </a:solidFill>
-            <a:prstDash val="solid"/>
-          </a:ln>
-        </p:spPr>
-        <p:txBody>
-          <a:bodyPr anchor="ctr"/>
-          <a:lstStyle/>
-          <a:p>
-            <a:pPr algn="l">
-              <a:defRPr sz="1650" b="1">
-                <a:solidFill>
-                  <a:srgbClr val="2D4A33"/>
-                </a:solidFill>
-              </a:defRPr>
-            </a:pPr>
-            <a:r>
-              <a:rPr sz="1650" b="1">
-                <a:solidFill>
-                  <a:srgbClr val="2D4A33"/>
-                </a:solidFill>
-              </a:rPr>
-              <a:t>结果</a:t>
-            </a:r>
-          </a:p>
-        </p:txBody>
-      </p:sp>
-      <p:sp>
-        <p:nvSpPr>
-          <p:cNvPr id="12" name="矩形 11">
-            <a:extLst>
-              <a:ext uri="{FF2B5EF4-FFF2-40B4-BE49-F238E27FC236}">
-                <a16:creationId xmlns:a16="http://schemas.microsoft.com/office/drawing/2014/main" id="{8D583150-E769-40CD-B44A-9B1246362845}"/>
-              </a:ext>
-            </a:extLst>
-          </p:cNvPr>
-          <p:cNvSpPr>
-            <a:spLocks noGrp="1"/>
-          </p:cNvSpPr>
-          <p:nvPr/>
-        </p:nvSpPr>
-        <p:spPr>
-          <a:xfrm>
-            <a:off x="2228850" y="4324350"/>
-            <a:ext cx="7734300" cy="666750"/>
-          </a:xfrm>
-          <a:prstGeom prst="rect">
-            <a:avLst/>
-          </a:prstGeom>
-          <a:solidFill>
-            <a:srgbClr val="000000">
-              <a:alpha val="0"/>
-            </a:srgbClr>
-          </a:solidFill>
-          <a:ln w="0">
-            <a:solidFill>
-              <a:srgbClr val="000000">
-                <a:alpha val="0"/>
-              </a:srgbClr>
-            </a:solidFill>
-            <a:prstDash val="solid"/>
-          </a:ln>
-        </p:spPr>
-        <p:txBody>
-          <a:bodyPr anchor="ctr"/>
-          <a:lstStyle/>
-          <a:p>
-            <a:pPr algn="l">
-              <a:defRPr sz="1350" b="0">
-                <a:solidFill>
-                  <a:srgbClr val="1F2D22"/>
-                </a:solidFill>
-              </a:defRPr>
-            </a:pPr>
-            <a:r>
-              <a:rPr sz="1350" b="0">
-                <a:solidFill>
-                  <a:srgbClr val="1F2D22"/>
-                </a:solidFill>
-              </a:rPr>
-              <a:t>索引与召回更灵活，检索能力明显增强。</a:t>
-            </a:r>
+              <a:rPr lang="zh-CN" altLang="en-US" sz="2000" dirty="0">
+                <a:solidFill>
+                  <a:srgbClr val="1F2D22"/>
+                </a:solidFill>
+                <a:latin typeface="ui-monospace"/>
+              </a:rPr>
+              <a:t>按解析块分块：基本一个结构块生成一个 </a:t>
+            </a:r>
+            <a:r>
+              <a:rPr lang="en-US" altLang="zh-CN" sz="2000" dirty="0">
+                <a:solidFill>
+                  <a:srgbClr val="1F2D22"/>
+                </a:solidFill>
+                <a:latin typeface="ui-monospace"/>
+              </a:rPr>
+              <a:t>chunk</a:t>
+            </a:r>
+            <a:endParaRPr lang="en-US" altLang="zh-CN" sz="2000" dirty="0">
+              <a:solidFill>
+                <a:srgbClr val="1F2D22"/>
+              </a:solidFill>
+              <a:latin typeface="ui-monospace"/>
+            </a:endParaRPr>
+          </a:p>
+          <a:p>
+            <a:pPr algn="l"/>
+            <a:r>
+              <a:rPr lang="zh-CN" altLang="en-US" sz="2000" dirty="0">
+                <a:solidFill>
+                  <a:srgbClr val="1F2D22"/>
+                </a:solidFill>
+                <a:latin typeface="ui-monospace"/>
+              </a:rPr>
+              <a:t>按章节分块：先按 </a:t>
+            </a:r>
+            <a:r>
+              <a:rPr lang="en-US" altLang="zh-CN" sz="2000" dirty="0" err="1">
+                <a:solidFill>
+                  <a:srgbClr val="1F2D22"/>
+                </a:solidFill>
+                <a:latin typeface="ui-monospace"/>
+              </a:rPr>
+              <a:t>section_path</a:t>
+            </a:r>
+            <a:r>
+              <a:rPr lang="en-US" altLang="zh-CN" sz="2000" dirty="0">
+                <a:solidFill>
+                  <a:srgbClr val="1F2D22"/>
+                </a:solidFill>
+                <a:latin typeface="ui-monospace"/>
+              </a:rPr>
+              <a:t> </a:t>
+            </a:r>
+            <a:r>
+              <a:rPr lang="zh-CN" altLang="en-US" sz="2000" dirty="0">
+                <a:solidFill>
+                  <a:srgbClr val="1F2D22"/>
+                </a:solidFill>
+                <a:latin typeface="ui-monospace"/>
+              </a:rPr>
+              <a:t>聚合同章节 </a:t>
+            </a:r>
+            <a:r>
+              <a:rPr lang="en-US" altLang="zh-CN" sz="2000" dirty="0">
+                <a:solidFill>
+                  <a:srgbClr val="1F2D22"/>
+                </a:solidFill>
+                <a:latin typeface="ui-monospace"/>
+              </a:rPr>
+              <a:t>block</a:t>
+            </a:r>
+            <a:r>
+              <a:rPr lang="zh-CN" altLang="en-US" sz="2000" dirty="0">
+                <a:solidFill>
+                  <a:srgbClr val="1F2D22"/>
+                </a:solidFill>
+                <a:latin typeface="ui-monospace"/>
+              </a:rPr>
+              <a:t>，再按 </a:t>
+            </a:r>
+            <a:r>
+              <a:rPr lang="en-US" altLang="zh-CN" sz="2000" dirty="0" err="1">
+                <a:solidFill>
+                  <a:srgbClr val="1F2D22"/>
+                </a:solidFill>
+                <a:latin typeface="ui-monospace"/>
+              </a:rPr>
+              <a:t>chunk_size</a:t>
+            </a:r>
+            <a:r>
+              <a:rPr lang="en-US" altLang="zh-CN" sz="2000" dirty="0">
+                <a:solidFill>
+                  <a:srgbClr val="1F2D22"/>
+                </a:solidFill>
+                <a:latin typeface="ui-monospace"/>
+              </a:rPr>
+              <a:t> </a:t>
+            </a:r>
+            <a:r>
+              <a:rPr lang="zh-CN" altLang="en-US" sz="2000" dirty="0">
+                <a:solidFill>
+                  <a:srgbClr val="1F2D22"/>
+                </a:solidFill>
+                <a:latin typeface="ui-monospace"/>
+              </a:rPr>
+              <a:t>做递归切分</a:t>
+            </a:r>
+            <a:endParaRPr lang="zh-CN" altLang="en-US" sz="2000" dirty="0">
+              <a:solidFill>
+                <a:srgbClr val="1F2D22"/>
+              </a:solidFill>
+              <a:latin typeface="ui-monospace"/>
+            </a:endParaRPr>
           </a:p>
         </p:txBody>
       </p:sp>
     </p:spTree>
-    <p:extLst>
-      <p:ext uri="{BB962C8B-B14F-4D97-AF65-F5344CB8AC3E}">
-        <p14:creationId xmlns:p14="http://schemas.microsoft.com/office/powerpoint/2010/main" val="3301625095"/>
-      </p:ext>
-    </p:extLst>
   </p:cSld>
   <p:clrMapOvr>
     <a:masterClrMapping/>
@@ -5720,13 +5418,7 @@
       </p:grpSpPr>
       <p:sp>
         <p:nvSpPr>
-          <p:cNvPr id="11" name="文本框 10">
-            <a:extLst>
-              <a:ext uri="{FF2B5EF4-FFF2-40B4-BE49-F238E27FC236}">
-                <a16:creationId xmlns:a16="http://schemas.microsoft.com/office/drawing/2014/main" id="{642171A4-C23A-4145-BED1-2E8834D0E5B1}"/>
-              </a:ext>
-            </a:extLst>
-          </p:cNvPr>
+          <p:cNvPr id="11" name="文本框 10"/>
           <p:cNvSpPr>
             <a:spLocks noGrp="1"/>
           </p:cNvSpPr>
@@ -5762,7 +5454,6 @@
               <a:buSzTx/>
               <a:buFontTx/>
               <a:buNone/>
-              <a:tabLst/>
               <a:defRPr/>
             </a:pPr>
             <a:r>
@@ -5776,8 +5467,8 @@
                 <a:effectLst/>
                 <a:uLnTx/>
                 <a:uFillTx/>
-                <a:latin typeface="Arial"/>
-                <a:ea typeface="STZhongsong"/>
+                <a:latin typeface="Arial" panose="020B0604020202020204"/>
+                <a:ea typeface="华文中宋" panose="02010600040101010101" charset="-122"/>
                 <a:cs typeface="+mn-cs"/>
               </a:rPr>
               <a:t>0</a:t>
@@ -5793,11 +5484,11 @@
                 <a:effectLst/>
                 <a:uLnTx/>
                 <a:uFillTx/>
-                <a:latin typeface="Arial"/>
-                <a:ea typeface="STZhongsong"/>
+                <a:latin typeface="Arial" panose="020B0604020202020204"/>
+                <a:ea typeface="华文中宋" panose="02010600040101010101" charset="-122"/>
                 <a:cs typeface="+mn-cs"/>
               </a:rPr>
-              <a:t>6</a:t>
+              <a:t>5</a:t>
             </a:r>
             <a:endParaRPr kumimoji="0" sz="13800" b="0" i="0" u="none" strike="noStrike" kern="1200" cap="none" spc="0" normalizeH="0" baseline="0" noProof="0" dirty="0">
               <a:ln>
@@ -5809,8 +5500,8 @@
               <a:effectLst/>
               <a:uLnTx/>
               <a:uFillTx/>
-              <a:latin typeface="Arial"/>
-              <a:ea typeface="STZhongsong"/>
+              <a:latin typeface="Arial" panose="020B0604020202020204"/>
+              <a:ea typeface="华文中宋" panose="02010600040101010101" charset="-122"/>
               <a:cs typeface="+mn-cs"/>
             </a:endParaRPr>
           </a:p>
@@ -5818,13 +5509,737 @@
       </p:sp>
       <p:sp>
         <p:nvSpPr>
-          <p:cNvPr id="13" name="矩形 12">
-            <a:extLst>
-              <a:ext uri="{FF2B5EF4-FFF2-40B4-BE49-F238E27FC236}">
-                <a16:creationId xmlns:a16="http://schemas.microsoft.com/office/drawing/2014/main" id="{638E2919-D9D9-4496-93DC-FD75812F9CF1}"/>
-              </a:ext>
-            </a:extLst>
-          </p:cNvPr>
+          <p:cNvPr id="13" name="矩形 12"/>
+          <p:cNvSpPr>
+            <a:spLocks noGrp="1"/>
+          </p:cNvSpPr>
+          <p:nvPr/>
+        </p:nvSpPr>
+        <p:spPr>
+          <a:xfrm>
+            <a:off x="6293290" y="2685166"/>
+            <a:ext cx="2339103" cy="923330"/>
+          </a:xfrm>
+          <a:prstGeom prst="rect">
+            <a:avLst/>
+          </a:prstGeom>
+        </p:spPr>
+        <p:txBody>
+          <a:bodyPr wrap="none">
+            <a:spAutoFit/>
+          </a:bodyPr>
+          <a:lstStyle/>
+          <a:p>
+            <a:pPr marL="0" marR="0" lvl="0" indent="0" algn="ctr" defTabSz="914400" eaLnBrk="1" fontAlgn="auto" latinLnBrk="0" hangingPunct="1">
+              <a:lnSpc>
+                <a:spcPct val="100000"/>
+              </a:lnSpc>
+              <a:spcBef>
+                <a:spcPts val="0"/>
+              </a:spcBef>
+              <a:spcAft>
+                <a:spcPts val="0"/>
+              </a:spcAft>
+              <a:buClrTx/>
+              <a:buSzTx/>
+              <a:buFontTx/>
+              <a:buNone/>
+              <a:defRPr/>
+            </a:pPr>
+            <a:r>
+              <a:rPr lang="zh-CN" altLang="en-US" sz="5400" b="1" dirty="0">
+                <a:solidFill>
+                  <a:prstClr val="white"/>
+                </a:solidFill>
+                <a:latin typeface="Arial" panose="020B0604020202020204"/>
+                <a:ea typeface="华文中宋" panose="02010600040101010101" charset="-122"/>
+              </a:rPr>
+              <a:t>唐熙雷</a:t>
+            </a:r>
+            <a:endParaRPr kumimoji="0" sz="5400" b="1" i="0" u="none" strike="noStrike" kern="1200" cap="none" spc="0" normalizeH="0" baseline="0" noProof="0" dirty="0">
+              <a:ln>
+                <a:noFill/>
+              </a:ln>
+              <a:solidFill>
+                <a:prstClr val="white"/>
+              </a:solidFill>
+              <a:effectLst/>
+              <a:uLnTx/>
+              <a:uFillTx/>
+              <a:latin typeface="Arial" panose="020B0604020202020204"/>
+              <a:ea typeface="华文中宋" panose="02010600040101010101" charset="-122"/>
+              <a:cs typeface="+mn-cs"/>
+            </a:endParaRPr>
+          </a:p>
+        </p:txBody>
+      </p:sp>
+    </p:spTree>
+  </p:cSld>
+  <p:clrMapOvr>
+    <a:masterClrMapping/>
+  </p:clrMapOvr>
+</p:sld>
+</file>
+
+<file path=ppt/slides/slide12.xml><?xml version="1.0" encoding="utf-8"?>
+<p:sld xmlns:a="http://schemas.openxmlformats.org/drawingml/2006/main" xmlns:r="http://schemas.openxmlformats.org/officeDocument/2006/relationships" xmlns:p="http://schemas.openxmlformats.org/presentationml/2006/main">
+  <p:cSld>
+    <p:bg>
+      <p:bgPr>
+        <a:solidFill>
+          <a:srgbClr val="F7F7F4"/>
+        </a:solidFill>
+        <a:effectLst/>
+      </p:bgPr>
+    </p:bg>
+    <p:spTree>
+      <p:nvGrpSpPr>
+        <p:cNvPr id="1" name=""/>
+        <p:cNvGrpSpPr/>
+        <p:nvPr/>
+      </p:nvGrpSpPr>
+      <p:grpSpPr>
+        <a:xfrm>
+          <a:off x="0" y="0"/>
+          <a:ext cx="0" cy="0"/>
+          <a:chOff x="0" y="0"/>
+          <a:chExt cx="0" cy="0"/>
+        </a:xfrm>
+      </p:grpSpPr>
+      <p:sp>
+        <p:nvSpPr>
+          <p:cNvPr id="13" name="矩形 12"/>
+          <p:cNvSpPr>
+            <a:spLocks noGrp="1"/>
+          </p:cNvSpPr>
+          <p:nvPr/>
+        </p:nvSpPr>
+        <p:spPr>
+          <a:xfrm>
+            <a:off x="0" y="0"/>
+            <a:ext cx="12192000" cy="114300"/>
+          </a:xfrm>
+          <a:prstGeom prst="rect">
+            <a:avLst/>
+          </a:prstGeom>
+          <a:solidFill>
+            <a:srgbClr val="2D4A33"/>
+          </a:solidFill>
+          <a:ln w="0">
+            <a:solidFill>
+              <a:srgbClr val="2D4A33"/>
+            </a:solidFill>
+            <a:prstDash val="solid"/>
+          </a:ln>
+        </p:spPr>
+      </p:sp>
+      <p:sp>
+        <p:nvSpPr>
+          <p:cNvPr id="2" name="矩形 1"/>
+          <p:cNvSpPr>
+            <a:spLocks noGrp="1"/>
+          </p:cNvSpPr>
+          <p:nvPr/>
+        </p:nvSpPr>
+        <p:spPr>
+          <a:xfrm>
+            <a:off x="762000" y="400050"/>
+            <a:ext cx="10668000" cy="457200"/>
+          </a:xfrm>
+          <a:prstGeom prst="rect">
+            <a:avLst/>
+          </a:prstGeom>
+          <a:solidFill>
+            <a:srgbClr val="000000">
+              <a:alpha val="0"/>
+            </a:srgbClr>
+          </a:solidFill>
+          <a:ln w="0">
+            <a:solidFill>
+              <a:srgbClr val="000000">
+                <a:alpha val="0"/>
+              </a:srgbClr>
+            </a:solidFill>
+            <a:prstDash val="solid"/>
+          </a:ln>
+        </p:spPr>
+        <p:txBody>
+          <a:bodyPr anchor="ctr"/>
+          <a:lstStyle/>
+          <a:p>
+            <a:pPr algn="ctr">
+              <a:defRPr sz="2550" b="1">
+                <a:solidFill>
+                  <a:srgbClr val="2D4A33"/>
+                </a:solidFill>
+              </a:defRPr>
+            </a:pPr>
+            <a:r>
+              <a:rPr lang="zh-CN" altLang="en-US" sz="2550" b="1" dirty="0">
+                <a:solidFill>
+                  <a:srgbClr val="2D4A33"/>
+                </a:solidFill>
+              </a:rPr>
+              <a:t>唐熙雷</a:t>
+            </a:r>
+            <a:endParaRPr sz="2550" b="1" dirty="0">
+              <a:solidFill>
+                <a:srgbClr val="2D4A33"/>
+              </a:solidFill>
+            </a:endParaRPr>
+          </a:p>
+        </p:txBody>
+      </p:sp>
+      <p:sp>
+        <p:nvSpPr>
+          <p:cNvPr id="4" name="矩形 3"/>
+          <p:cNvSpPr>
+            <a:spLocks noGrp="1"/>
+          </p:cNvSpPr>
+          <p:nvPr/>
+        </p:nvSpPr>
+        <p:spPr>
+          <a:xfrm>
+            <a:off x="857250" y="1619250"/>
+            <a:ext cx="4762500" cy="1619250"/>
+          </a:xfrm>
+          <a:prstGeom prst="rect">
+            <a:avLst/>
+          </a:prstGeom>
+          <a:solidFill>
+            <a:srgbClr val="FFFFFF"/>
+          </a:solidFill>
+          <a:ln w="9525">
+            <a:solidFill>
+              <a:srgbClr val="C7D0C4"/>
+            </a:solidFill>
+            <a:prstDash val="solid"/>
+          </a:ln>
+        </p:spPr>
+      </p:sp>
+      <p:sp>
+        <p:nvSpPr>
+          <p:cNvPr id="5" name="矩形 4"/>
+          <p:cNvSpPr>
+            <a:spLocks noGrp="1"/>
+          </p:cNvSpPr>
+          <p:nvPr/>
+        </p:nvSpPr>
+        <p:spPr>
+          <a:xfrm>
+            <a:off x="1085850" y="1790700"/>
+            <a:ext cx="4305300" cy="323850"/>
+          </a:xfrm>
+          <a:prstGeom prst="rect">
+            <a:avLst/>
+          </a:prstGeom>
+          <a:solidFill>
+            <a:srgbClr val="000000">
+              <a:alpha val="0"/>
+            </a:srgbClr>
+          </a:solidFill>
+          <a:ln w="0">
+            <a:solidFill>
+              <a:srgbClr val="000000">
+                <a:alpha val="0"/>
+              </a:srgbClr>
+            </a:solidFill>
+            <a:prstDash val="solid"/>
+          </a:ln>
+        </p:spPr>
+        <p:txBody>
+          <a:bodyPr anchor="ctr"/>
+          <a:lstStyle/>
+          <a:p>
+            <a:pPr algn="l">
+              <a:defRPr sz="1650" b="1">
+                <a:solidFill>
+                  <a:srgbClr val="2D4A33"/>
+                </a:solidFill>
+              </a:defRPr>
+            </a:pPr>
+            <a:r>
+              <a:rPr sz="1650" b="1">
+                <a:solidFill>
+                  <a:srgbClr val="2D4A33"/>
+                </a:solidFill>
+              </a:rPr>
+              <a:t>Faiss</a:t>
+            </a:r>
+            <a:endParaRPr sz="1650" b="1">
+              <a:solidFill>
+                <a:srgbClr val="2D4A33"/>
+              </a:solidFill>
+            </a:endParaRPr>
+          </a:p>
+        </p:txBody>
+      </p:sp>
+      <p:sp>
+        <p:nvSpPr>
+          <p:cNvPr id="6" name="矩形 5"/>
+          <p:cNvSpPr>
+            <a:spLocks noGrp="1"/>
+          </p:cNvSpPr>
+          <p:nvPr/>
+        </p:nvSpPr>
+        <p:spPr>
+          <a:xfrm>
+            <a:off x="1085850" y="2228850"/>
+            <a:ext cx="4305300" cy="857250"/>
+          </a:xfrm>
+          <a:prstGeom prst="rect">
+            <a:avLst/>
+          </a:prstGeom>
+          <a:solidFill>
+            <a:srgbClr val="000000">
+              <a:alpha val="0"/>
+            </a:srgbClr>
+          </a:solidFill>
+          <a:ln w="0">
+            <a:solidFill>
+              <a:srgbClr val="000000">
+                <a:alpha val="0"/>
+              </a:srgbClr>
+            </a:solidFill>
+            <a:prstDash val="solid"/>
+          </a:ln>
+        </p:spPr>
+        <p:txBody>
+          <a:bodyPr anchor="ctr"/>
+          <a:lstStyle/>
+          <a:p>
+            <a:pPr algn="l">
+              <a:defRPr sz="1350" b="0">
+                <a:solidFill>
+                  <a:srgbClr val="1F2D22"/>
+                </a:solidFill>
+              </a:defRPr>
+            </a:pPr>
+            <a:r>
+              <a:rPr sz="1350" b="0">
+                <a:solidFill>
+                  <a:srgbClr val="1F2D22"/>
+                </a:solidFill>
+              </a:rPr>
+              <a:t>替换 / 增强向量检索底座</a:t>
+            </a:r>
+            <a:endParaRPr sz="1350" b="0">
+              <a:solidFill>
+                <a:srgbClr val="1F2D22"/>
+              </a:solidFill>
+            </a:endParaRPr>
+          </a:p>
+        </p:txBody>
+      </p:sp>
+      <p:sp>
+        <p:nvSpPr>
+          <p:cNvPr id="7" name="矩形 6"/>
+          <p:cNvSpPr>
+            <a:spLocks noGrp="1"/>
+          </p:cNvSpPr>
+          <p:nvPr/>
+        </p:nvSpPr>
+        <p:spPr>
+          <a:xfrm>
+            <a:off x="6572250" y="1619250"/>
+            <a:ext cx="4762500" cy="1619250"/>
+          </a:xfrm>
+          <a:prstGeom prst="rect">
+            <a:avLst/>
+          </a:prstGeom>
+          <a:solidFill>
+            <a:srgbClr val="FFFFFF"/>
+          </a:solidFill>
+          <a:ln w="9525">
+            <a:solidFill>
+              <a:srgbClr val="C7D0C4"/>
+            </a:solidFill>
+            <a:prstDash val="solid"/>
+          </a:ln>
+        </p:spPr>
+      </p:sp>
+      <p:sp>
+        <p:nvSpPr>
+          <p:cNvPr id="8" name="矩形 7"/>
+          <p:cNvSpPr>
+            <a:spLocks noGrp="1"/>
+          </p:cNvSpPr>
+          <p:nvPr/>
+        </p:nvSpPr>
+        <p:spPr>
+          <a:xfrm>
+            <a:off x="6800850" y="1790700"/>
+            <a:ext cx="4305300" cy="323850"/>
+          </a:xfrm>
+          <a:prstGeom prst="rect">
+            <a:avLst/>
+          </a:prstGeom>
+          <a:solidFill>
+            <a:srgbClr val="000000">
+              <a:alpha val="0"/>
+            </a:srgbClr>
+          </a:solidFill>
+          <a:ln w="0">
+            <a:solidFill>
+              <a:srgbClr val="000000">
+                <a:alpha val="0"/>
+              </a:srgbClr>
+            </a:solidFill>
+            <a:prstDash val="solid"/>
+          </a:ln>
+        </p:spPr>
+        <p:txBody>
+          <a:bodyPr anchor="ctr"/>
+          <a:lstStyle/>
+          <a:p>
+            <a:pPr algn="l">
+              <a:defRPr sz="1650" b="1">
+                <a:solidFill>
+                  <a:srgbClr val="2D4A33"/>
+                </a:solidFill>
+              </a:defRPr>
+            </a:pPr>
+            <a:r>
+              <a:rPr sz="1650" b="1">
+                <a:solidFill>
+                  <a:srgbClr val="2D4A33"/>
+                </a:solidFill>
+              </a:rPr>
+              <a:t>多检索</a:t>
+            </a:r>
+            <a:endParaRPr sz="1650" b="1">
+              <a:solidFill>
+                <a:srgbClr val="2D4A33"/>
+              </a:solidFill>
+            </a:endParaRPr>
+          </a:p>
+        </p:txBody>
+      </p:sp>
+      <p:sp>
+        <p:nvSpPr>
+          <p:cNvPr id="9" name="矩形 8"/>
+          <p:cNvSpPr>
+            <a:spLocks noGrp="1"/>
+          </p:cNvSpPr>
+          <p:nvPr/>
+        </p:nvSpPr>
+        <p:spPr>
+          <a:xfrm>
+            <a:off x="6800850" y="2228850"/>
+            <a:ext cx="4305300" cy="857250"/>
+          </a:xfrm>
+          <a:prstGeom prst="rect">
+            <a:avLst/>
+          </a:prstGeom>
+          <a:solidFill>
+            <a:srgbClr val="000000">
+              <a:alpha val="0"/>
+            </a:srgbClr>
+          </a:solidFill>
+          <a:ln w="0">
+            <a:solidFill>
+              <a:srgbClr val="000000">
+                <a:alpha val="0"/>
+              </a:srgbClr>
+            </a:solidFill>
+            <a:prstDash val="solid"/>
+          </a:ln>
+        </p:spPr>
+        <p:txBody>
+          <a:bodyPr anchor="ctr"/>
+          <a:lstStyle/>
+          <a:p>
+            <a:pPr algn="l">
+              <a:defRPr sz="1350" b="0">
+                <a:solidFill>
+                  <a:srgbClr val="1F2D22"/>
+                </a:solidFill>
+              </a:defRPr>
+            </a:pPr>
+            <a:r>
+              <a:rPr sz="1350" b="0">
+                <a:solidFill>
+                  <a:srgbClr val="1F2D22"/>
+                </a:solidFill>
+              </a:rPr>
+              <a:t>支持多种召回方式并行比较</a:t>
+            </a:r>
+            <a:endParaRPr sz="1350" b="0">
+              <a:solidFill>
+                <a:srgbClr val="1F2D22"/>
+              </a:solidFill>
+            </a:endParaRPr>
+          </a:p>
+        </p:txBody>
+      </p:sp>
+      <p:sp>
+        <p:nvSpPr>
+          <p:cNvPr id="10" name="矩形 9"/>
+          <p:cNvSpPr>
+            <a:spLocks noGrp="1"/>
+          </p:cNvSpPr>
+          <p:nvPr/>
+        </p:nvSpPr>
+        <p:spPr>
+          <a:xfrm>
+            <a:off x="2000250" y="3714750"/>
+            <a:ext cx="8191500" cy="1428750"/>
+          </a:xfrm>
+          <a:prstGeom prst="rect">
+            <a:avLst/>
+          </a:prstGeom>
+          <a:solidFill>
+            <a:srgbClr val="FFFFFF"/>
+          </a:solidFill>
+          <a:ln w="9525">
+            <a:solidFill>
+              <a:srgbClr val="C7D0C4"/>
+            </a:solidFill>
+            <a:prstDash val="solid"/>
+          </a:ln>
+        </p:spPr>
+      </p:sp>
+      <p:sp>
+        <p:nvSpPr>
+          <p:cNvPr id="11" name="矩形 10"/>
+          <p:cNvSpPr>
+            <a:spLocks noGrp="1"/>
+          </p:cNvSpPr>
+          <p:nvPr/>
+        </p:nvSpPr>
+        <p:spPr>
+          <a:xfrm>
+            <a:off x="2228850" y="3886200"/>
+            <a:ext cx="7734300" cy="323850"/>
+          </a:xfrm>
+          <a:prstGeom prst="rect">
+            <a:avLst/>
+          </a:prstGeom>
+          <a:solidFill>
+            <a:srgbClr val="000000">
+              <a:alpha val="0"/>
+            </a:srgbClr>
+          </a:solidFill>
+          <a:ln w="0">
+            <a:solidFill>
+              <a:srgbClr val="000000">
+                <a:alpha val="0"/>
+              </a:srgbClr>
+            </a:solidFill>
+            <a:prstDash val="solid"/>
+          </a:ln>
+        </p:spPr>
+        <p:txBody>
+          <a:bodyPr anchor="ctr"/>
+          <a:lstStyle/>
+          <a:p>
+            <a:pPr algn="l">
+              <a:defRPr sz="1650" b="1">
+                <a:solidFill>
+                  <a:srgbClr val="2D4A33"/>
+                </a:solidFill>
+              </a:defRPr>
+            </a:pPr>
+            <a:r>
+              <a:rPr sz="1650" b="1">
+                <a:solidFill>
+                  <a:srgbClr val="2D4A33"/>
+                </a:solidFill>
+              </a:rPr>
+              <a:t>结果</a:t>
+            </a:r>
+            <a:endParaRPr sz="1650" b="1">
+              <a:solidFill>
+                <a:srgbClr val="2D4A33"/>
+              </a:solidFill>
+            </a:endParaRPr>
+          </a:p>
+        </p:txBody>
+      </p:sp>
+      <p:sp>
+        <p:nvSpPr>
+          <p:cNvPr id="12" name="矩形 11"/>
+          <p:cNvSpPr>
+            <a:spLocks noGrp="1"/>
+          </p:cNvSpPr>
+          <p:nvPr/>
+        </p:nvSpPr>
+        <p:spPr>
+          <a:xfrm>
+            <a:off x="2228850" y="4324350"/>
+            <a:ext cx="7734300" cy="666750"/>
+          </a:xfrm>
+          <a:prstGeom prst="rect">
+            <a:avLst/>
+          </a:prstGeom>
+          <a:solidFill>
+            <a:srgbClr val="000000">
+              <a:alpha val="0"/>
+            </a:srgbClr>
+          </a:solidFill>
+          <a:ln w="0">
+            <a:solidFill>
+              <a:srgbClr val="000000">
+                <a:alpha val="0"/>
+              </a:srgbClr>
+            </a:solidFill>
+            <a:prstDash val="solid"/>
+          </a:ln>
+        </p:spPr>
+        <p:txBody>
+          <a:bodyPr anchor="ctr"/>
+          <a:lstStyle/>
+          <a:p>
+            <a:pPr algn="l">
+              <a:defRPr sz="1350" b="0">
+                <a:solidFill>
+                  <a:srgbClr val="1F2D22"/>
+                </a:solidFill>
+              </a:defRPr>
+            </a:pPr>
+            <a:r>
+              <a:rPr sz="1350" b="0">
+                <a:solidFill>
+                  <a:srgbClr val="1F2D22"/>
+                </a:solidFill>
+              </a:rPr>
+              <a:t>索引与召回更灵活，检索能力明显增强。</a:t>
+            </a:r>
+            <a:endParaRPr sz="1350" b="0">
+              <a:solidFill>
+                <a:srgbClr val="1F2D22"/>
+              </a:solidFill>
+            </a:endParaRPr>
+          </a:p>
+        </p:txBody>
+      </p:sp>
+    </p:spTree>
+  </p:cSld>
+  <p:clrMapOvr>
+    <a:masterClrMapping/>
+  </p:clrMapOvr>
+</p:sld>
+</file>
+
+<file path=ppt/slides/slide13.xml><?xml version="1.0" encoding="utf-8"?>
+<p:sld xmlns:a="http://schemas.openxmlformats.org/drawingml/2006/main" xmlns:r="http://schemas.openxmlformats.org/officeDocument/2006/relationships" xmlns:p="http://schemas.openxmlformats.org/presentationml/2006/main">
+  <p:cSld>
+    <p:bg>
+      <p:bgPr>
+        <a:solidFill>
+          <a:srgbClr val="253A2A"/>
+        </a:solidFill>
+        <a:effectLst/>
+      </p:bgPr>
+    </p:bg>
+    <p:spTree>
+      <p:nvGrpSpPr>
+        <p:cNvPr id="1" name=""/>
+        <p:cNvGrpSpPr/>
+        <p:nvPr/>
+      </p:nvGrpSpPr>
+      <p:grpSpPr>
+        <a:xfrm>
+          <a:off x="0" y="0"/>
+          <a:ext cx="0" cy="0"/>
+          <a:chOff x="0" y="0"/>
+          <a:chExt cx="0" cy="0"/>
+        </a:xfrm>
+      </p:grpSpPr>
+      <p:sp>
+        <p:nvSpPr>
+          <p:cNvPr id="11" name="文本框 10"/>
+          <p:cNvSpPr>
+            <a:spLocks noGrp="1"/>
+          </p:cNvSpPr>
+          <p:nvPr/>
+        </p:nvSpPr>
+        <p:spPr>
+          <a:xfrm>
+            <a:off x="2614979" y="2321005"/>
+            <a:ext cx="2604077" cy="2215991"/>
+          </a:xfrm>
+          <a:prstGeom prst="rect">
+            <a:avLst/>
+          </a:prstGeom>
+          <a:noFill/>
+        </p:spPr>
+        <p:txBody>
+          <a:bodyPr wrap="square">
+            <a:spAutoFit/>
+          </a:bodyPr>
+          <a:lstStyle/>
+          <a:p>
+            <a:pPr marL="0" marR="0" lvl="0" indent="0" algn="ctr" defTabSz="914400" eaLnBrk="1" fontAlgn="auto" latinLnBrk="0" hangingPunct="1">
+              <a:lnSpc>
+                <a:spcPct val="100000"/>
+              </a:lnSpc>
+              <a:spcBef>
+                <a:spcPts val="0"/>
+              </a:spcBef>
+              <a:spcAft>
+                <a:spcPts val="0"/>
+              </a:spcAft>
+              <a:buClrTx/>
+              <a:buSzTx/>
+              <a:buFontTx/>
+              <a:buNone/>
+              <a:defRPr/>
+            </a:pPr>
+            <a:r>
+              <a:rPr kumimoji="0" sz="13800" b="0" i="0" u="none" strike="noStrike" kern="1200" cap="none" spc="0" normalizeH="0" baseline="0" noProof="0" dirty="0">
+                <a:ln>
+                  <a:noFill/>
+                </a:ln>
+                <a:solidFill>
+                  <a:srgbClr val="F5F4F9"/>
+                </a:solidFill>
+                <a:effectLst/>
+                <a:uLnTx/>
+                <a:uFillTx/>
+                <a:latin typeface="Arial" panose="020B0604020202020204"/>
+                <a:ea typeface="华文中宋" panose="02010600040101010101" charset="-122"/>
+                <a:cs typeface="+mn-cs"/>
+              </a:rPr>
+              <a:t>0</a:t>
+            </a:r>
+            <a:r>
+              <a:rPr kumimoji="0" lang="en-US" sz="13800" b="0" i="0" u="none" strike="noStrike" kern="1200" cap="none" spc="0" normalizeH="0" baseline="0" noProof="0" dirty="0">
+                <a:ln>
+                  <a:noFill/>
+                </a:ln>
+                <a:solidFill>
+                  <a:srgbClr val="F5F4F9"/>
+                </a:solidFill>
+                <a:effectLst/>
+                <a:uLnTx/>
+                <a:uFillTx/>
+                <a:latin typeface="Arial" panose="020B0604020202020204"/>
+                <a:ea typeface="华文中宋" panose="02010600040101010101" charset="-122"/>
+                <a:cs typeface="+mn-cs"/>
+              </a:rPr>
+              <a:t>6</a:t>
+            </a:r>
+            <a:endParaRPr kumimoji="0" sz="13800" b="0" i="0" u="none" strike="noStrike" kern="1200" cap="none" spc="0" normalizeH="0" baseline="0" noProof="0" dirty="0">
+              <a:ln>
+                <a:noFill/>
+              </a:ln>
+              <a:solidFill>
+                <a:srgbClr val="F5F4F9"/>
+              </a:solidFill>
+              <a:effectLst/>
+              <a:uLnTx/>
+              <a:uFillTx/>
+              <a:latin typeface="Arial" panose="020B0604020202020204"/>
+              <a:ea typeface="华文中宋" panose="02010600040101010101" charset="-122"/>
+              <a:cs typeface="+mn-cs"/>
+            </a:endParaRPr>
+          </a:p>
+        </p:txBody>
+      </p:sp>
+      <p:sp>
+        <p:nvSpPr>
+          <p:cNvPr id="13" name="矩形 12"/>
           <p:cNvSpPr>
             <a:spLocks noGrp="1"/>
           </p:cNvSpPr>
@@ -5868,19 +6283,14 @@
               <a:effectLst/>
               <a:uLnTx/>
               <a:uFillTx/>
-              <a:latin typeface="Arial"/>
-              <a:ea typeface="STZhongsong"/>
+              <a:latin typeface="Arial" panose="020B0604020202020204"/>
+              <a:ea typeface="华文中宋" panose="02010600040101010101" charset="-122"/>
               <a:cs typeface="+mn-cs"/>
             </a:endParaRPr>
           </a:p>
         </p:txBody>
       </p:sp>
     </p:spTree>
-    <p:extLst>
-      <p:ext uri="{BB962C8B-B14F-4D97-AF65-F5344CB8AC3E}">
-        <p14:creationId xmlns:p14="http://schemas.microsoft.com/office/powerpoint/2010/main" val="2604580078"/>
-      </p:ext>
-    </p:extLst>
   </p:cSld>
   <p:clrMapOvr>
     <a:masterClrMapping/>
@@ -5888,7 +6298,7 @@
 </p:sld>
 </file>
 
-<file path=ppt/slides/slide12.xml><?xml version="1.0" encoding="utf-8"?>
+<file path=ppt/slides/slide14.xml><?xml version="1.0" encoding="utf-8"?>
 <p:sld xmlns:a="http://schemas.openxmlformats.org/drawingml/2006/main" xmlns:r="http://schemas.openxmlformats.org/officeDocument/2006/relationships" xmlns:p="http://schemas.openxmlformats.org/presentationml/2006/main">
   <p:cSld>
     <p:spTree>
@@ -5907,13 +6317,7 @@
       </p:grpSpPr>
       <p:sp>
         <p:nvSpPr>
-          <p:cNvPr id="13" name="矩形 12">
-            <a:extLst>
-              <a:ext uri="{FF2B5EF4-FFF2-40B4-BE49-F238E27FC236}">
-                <a16:creationId xmlns:a16="http://schemas.microsoft.com/office/drawing/2014/main" id="{CB19A068-375C-44CD-B486-A2E0564D9945}"/>
-              </a:ext>
-            </a:extLst>
-          </p:cNvPr>
+          <p:cNvPr id="13" name="矩形 12"/>
           <p:cNvSpPr>
             <a:spLocks noGrp="1"/>
           </p:cNvSpPr>
@@ -5940,13 +6344,7 @@
       </p:sp>
       <p:sp>
         <p:nvSpPr>
-          <p:cNvPr id="2" name="矩形 1">
-            <a:extLst>
-              <a:ext uri="{FF2B5EF4-FFF2-40B4-BE49-F238E27FC236}">
-                <a16:creationId xmlns:a16="http://schemas.microsoft.com/office/drawing/2014/main" id="{78EDCF9F-E0B5-4603-A825-182C7732172E}"/>
-              </a:ext>
-            </a:extLst>
-          </p:cNvPr>
+          <p:cNvPr id="2" name="矩形 1"/>
           <p:cNvSpPr>
             <a:spLocks noGrp="1"/>
           </p:cNvSpPr>
@@ -5998,13 +6396,7 @@
       </p:sp>
       <p:sp>
         <p:nvSpPr>
-          <p:cNvPr id="4" name="矩形 3">
-            <a:extLst>
-              <a:ext uri="{FF2B5EF4-FFF2-40B4-BE49-F238E27FC236}">
-                <a16:creationId xmlns:a16="http://schemas.microsoft.com/office/drawing/2014/main" id="{0CCF3AAA-E565-49A5-9E5D-12AB5BEA2BCC}"/>
-              </a:ext>
-            </a:extLst>
-          </p:cNvPr>
+          <p:cNvPr id="4" name="矩形 3"/>
           <p:cNvSpPr>
             <a:spLocks noGrp="1"/>
           </p:cNvSpPr>
@@ -6031,13 +6423,7 @@
       </p:sp>
       <p:sp>
         <p:nvSpPr>
-          <p:cNvPr id="5" name="矩形 4">
-            <a:extLst>
-              <a:ext uri="{FF2B5EF4-FFF2-40B4-BE49-F238E27FC236}">
-                <a16:creationId xmlns:a16="http://schemas.microsoft.com/office/drawing/2014/main" id="{ECC68CB8-D28B-4FBA-BFEE-BA369B649486}"/>
-              </a:ext>
-            </a:extLst>
-          </p:cNvPr>
+          <p:cNvPr id="5" name="矩形 4"/>
           <p:cNvSpPr>
             <a:spLocks noGrp="1"/>
           </p:cNvSpPr>
@@ -6094,13 +6480,7 @@
       </p:sp>
       <p:sp>
         <p:nvSpPr>
-          <p:cNvPr id="6" name="矩形 5">
-            <a:extLst>
-              <a:ext uri="{FF2B5EF4-FFF2-40B4-BE49-F238E27FC236}">
-                <a16:creationId xmlns:a16="http://schemas.microsoft.com/office/drawing/2014/main" id="{80F4B1FB-DFE4-43C7-98D1-891507107452}"/>
-              </a:ext>
-            </a:extLst>
-          </p:cNvPr>
+          <p:cNvPr id="6" name="矩形 5"/>
           <p:cNvSpPr>
             <a:spLocks noGrp="1"/>
           </p:cNvSpPr>
@@ -6207,13 +6587,7 @@
       </p:sp>
       <p:sp>
         <p:nvSpPr>
-          <p:cNvPr id="7" name="矩形 6">
-            <a:extLst>
-              <a:ext uri="{FF2B5EF4-FFF2-40B4-BE49-F238E27FC236}">
-                <a16:creationId xmlns:a16="http://schemas.microsoft.com/office/drawing/2014/main" id="{02F5307D-47AA-4496-B027-2EBC00B0661D}"/>
-              </a:ext>
-            </a:extLst>
-          </p:cNvPr>
+          <p:cNvPr id="7" name="矩形 6"/>
           <p:cNvSpPr>
             <a:spLocks noGrp="1"/>
           </p:cNvSpPr>
@@ -6240,13 +6614,7 @@
       </p:sp>
       <p:sp>
         <p:nvSpPr>
-          <p:cNvPr id="8" name="矩形 7">
-            <a:extLst>
-              <a:ext uri="{FF2B5EF4-FFF2-40B4-BE49-F238E27FC236}">
-                <a16:creationId xmlns:a16="http://schemas.microsoft.com/office/drawing/2014/main" id="{E8ED42BD-464C-42DE-BDFA-1C3FED5B7ACA}"/>
-              </a:ext>
-            </a:extLst>
-          </p:cNvPr>
+          <p:cNvPr id="8" name="矩形 7"/>
           <p:cNvSpPr>
             <a:spLocks noGrp="1"/>
           </p:cNvSpPr>
@@ -6303,13 +6671,7 @@
       </p:sp>
       <p:sp>
         <p:nvSpPr>
-          <p:cNvPr id="9" name="矩形 8">
-            <a:extLst>
-              <a:ext uri="{FF2B5EF4-FFF2-40B4-BE49-F238E27FC236}">
-                <a16:creationId xmlns:a16="http://schemas.microsoft.com/office/drawing/2014/main" id="{0396FB42-E968-4370-8713-7F8120653B23}"/>
-              </a:ext>
-            </a:extLst>
-          </p:cNvPr>
+          <p:cNvPr id="9" name="矩形 8"/>
           <p:cNvSpPr>
             <a:spLocks noGrp="1"/>
           </p:cNvSpPr>
@@ -6392,13 +6754,7 @@
       </p:sp>
       <p:sp>
         <p:nvSpPr>
-          <p:cNvPr id="10" name="矩形 9">
-            <a:extLst>
-              <a:ext uri="{FF2B5EF4-FFF2-40B4-BE49-F238E27FC236}">
-                <a16:creationId xmlns:a16="http://schemas.microsoft.com/office/drawing/2014/main" id="{E5C669DF-CAC4-4D06-92B2-8A85E452067E}"/>
-              </a:ext>
-            </a:extLst>
-          </p:cNvPr>
+          <p:cNvPr id="10" name="矩形 9"/>
           <p:cNvSpPr>
             <a:spLocks noGrp="1"/>
           </p:cNvSpPr>
@@ -6425,13 +6781,7 @@
       </p:sp>
       <p:sp>
         <p:nvSpPr>
-          <p:cNvPr id="11" name="矩形 10">
-            <a:extLst>
-              <a:ext uri="{FF2B5EF4-FFF2-40B4-BE49-F238E27FC236}">
-                <a16:creationId xmlns:a16="http://schemas.microsoft.com/office/drawing/2014/main" id="{AA327DB0-DBD6-42E5-85A2-3C88543BC4E9}"/>
-              </a:ext>
-            </a:extLst>
-          </p:cNvPr>
+          <p:cNvPr id="11" name="矩形 10"/>
           <p:cNvSpPr>
             <a:spLocks noGrp="1"/>
           </p:cNvSpPr>
@@ -6488,13 +6838,7 @@
       </p:sp>
       <p:sp>
         <p:nvSpPr>
-          <p:cNvPr id="12" name="矩形 11">
-            <a:extLst>
-              <a:ext uri="{FF2B5EF4-FFF2-40B4-BE49-F238E27FC236}">
-                <a16:creationId xmlns:a16="http://schemas.microsoft.com/office/drawing/2014/main" id="{E7E24D30-F662-4C81-B43C-F0978EE590E4}"/>
-              </a:ext>
-            </a:extLst>
-          </p:cNvPr>
+          <p:cNvPr id="12" name="矩形 11"/>
           <p:cNvSpPr>
             <a:spLocks noGrp="1"/>
           </p:cNvSpPr>
@@ -6551,15 +6895,16 @@
               </a:rPr>
               <a:t>。</a:t>
             </a:r>
+            <a:endParaRPr sz="2000" dirty="0">
+              <a:solidFill>
+                <a:srgbClr val="1F2D22"/>
+              </a:solidFill>
+              <a:latin typeface="ui-monospace"/>
+            </a:endParaRPr>
           </a:p>
         </p:txBody>
       </p:sp>
     </p:spTree>
-    <p:extLst>
-      <p:ext uri="{BB962C8B-B14F-4D97-AF65-F5344CB8AC3E}">
-        <p14:creationId xmlns:p14="http://schemas.microsoft.com/office/powerpoint/2010/main" val="1962087935"/>
-      </p:ext>
-    </p:extLst>
   </p:cSld>
   <p:clrMapOvr>
     <a:masterClrMapping/>
@@ -6567,7 +6912,7 @@
 </p:sld>
 </file>
 
-<file path=ppt/slides/slide13.xml><?xml version="1.0" encoding="utf-8"?>
+<file path=ppt/slides/slide15.xml><?xml version="1.0" encoding="utf-8"?>
 <p:sld xmlns:a="http://schemas.openxmlformats.org/drawingml/2006/main" xmlns:r="http://schemas.openxmlformats.org/officeDocument/2006/relationships" xmlns:p="http://schemas.openxmlformats.org/presentationml/2006/main">
   <p:cSld>
     <p:spTree>
@@ -6586,13 +6931,7 @@
       </p:grpSpPr>
       <p:sp>
         <p:nvSpPr>
-          <p:cNvPr id="5" name="矩形 4">
-            <a:extLst>
-              <a:ext uri="{FF2B5EF4-FFF2-40B4-BE49-F238E27FC236}">
-                <a16:creationId xmlns:a16="http://schemas.microsoft.com/office/drawing/2014/main" id="{8D1C4FE0-3CAF-4428-91B5-F4637A0F2702}"/>
-              </a:ext>
-            </a:extLst>
-          </p:cNvPr>
+          <p:cNvPr id="5" name="矩形 4"/>
           <p:cNvSpPr>
             <a:spLocks noGrp="1"/>
           </p:cNvSpPr>
@@ -6636,19 +6975,12 @@
             <a:pPr algn="ctr">
               <a:buNone/>
             </a:pPr>
-            <a:endParaRPr/>
-          </a:p>
-        </p:txBody>
-      </p:sp>
-      <p:sp>
-        <p:nvSpPr>
-          <p:cNvPr id="6" name="文本框 5">
-            <a:extLst>
-              <a:ext uri="{FF2B5EF4-FFF2-40B4-BE49-F238E27FC236}">
-                <a16:creationId xmlns:a16="http://schemas.microsoft.com/office/drawing/2014/main" id="{162FA069-8E92-4FF7-8119-1BBFAAE75D08}"/>
-              </a:ext>
-            </a:extLst>
-          </p:cNvPr>
+          </a:p>
+        </p:txBody>
+      </p:sp>
+      <p:sp>
+        <p:nvSpPr>
+          <p:cNvPr id="6" name="文本框 5"/>
           <p:cNvSpPr>
             <a:spLocks noGrp="1"/>
           </p:cNvSpPr>
@@ -6708,13 +7040,7 @@
       </p:sp>
       <p:sp>
         <p:nvSpPr>
-          <p:cNvPr id="7" name="文本框 6">
-            <a:extLst>
-              <a:ext uri="{FF2B5EF4-FFF2-40B4-BE49-F238E27FC236}">
-                <a16:creationId xmlns:a16="http://schemas.microsoft.com/office/drawing/2014/main" id="{6583A319-A2E7-4817-AEA9-F2FED40256A2}"/>
-              </a:ext>
-            </a:extLst>
-          </p:cNvPr>
+          <p:cNvPr id="7" name="文本框 6"/>
           <p:cNvSpPr>
             <a:spLocks noGrp="1"/>
           </p:cNvSpPr>
@@ -6757,13 +7083,7 @@
       </p:sp>
       <p:sp>
         <p:nvSpPr>
-          <p:cNvPr id="10" name="椭圆 9">
-            <a:extLst>
-              <a:ext uri="{FF2B5EF4-FFF2-40B4-BE49-F238E27FC236}">
-                <a16:creationId xmlns:a16="http://schemas.microsoft.com/office/drawing/2014/main" id="{7F76FFC3-0B4B-4F04-B150-F2537BA4A393}"/>
-              </a:ext>
-            </a:extLst>
-          </p:cNvPr>
+          <p:cNvPr id="10" name="椭圆 9"/>
           <p:cNvSpPr>
             <a:spLocks noGrp="1"/>
           </p:cNvSpPr>
@@ -6807,19 +7127,12 @@
             <a:pPr algn="ctr">
               <a:buNone/>
             </a:pPr>
-            <a:endParaRPr/>
-          </a:p>
-        </p:txBody>
-      </p:sp>
-      <p:sp>
-        <p:nvSpPr>
-          <p:cNvPr id="13" name="等腰三角形 12">
-            <a:extLst>
-              <a:ext uri="{FF2B5EF4-FFF2-40B4-BE49-F238E27FC236}">
-                <a16:creationId xmlns:a16="http://schemas.microsoft.com/office/drawing/2014/main" id="{A258E667-FBBE-4E4A-A6ED-C1501840503E}"/>
-              </a:ext>
-            </a:extLst>
-          </p:cNvPr>
+          </a:p>
+        </p:txBody>
+      </p:sp>
+      <p:sp>
+        <p:nvSpPr>
+          <p:cNvPr id="13" name="等腰三角形 12"/>
           <p:cNvSpPr>
             <a:spLocks noGrp="1"/>
           </p:cNvSpPr>
@@ -6863,19 +7176,12 @@
             <a:pPr algn="ctr">
               <a:buNone/>
             </a:pPr>
-            <a:endParaRPr/>
-          </a:p>
-        </p:txBody>
-      </p:sp>
-      <p:sp>
-        <p:nvSpPr>
-          <p:cNvPr id="16" name="椭圆 15">
-            <a:extLst>
-              <a:ext uri="{FF2B5EF4-FFF2-40B4-BE49-F238E27FC236}">
-                <a16:creationId xmlns:a16="http://schemas.microsoft.com/office/drawing/2014/main" id="{924DBAFA-088D-405C-BC4D-58F76E8EC34B}"/>
-              </a:ext>
-            </a:extLst>
-          </p:cNvPr>
+          </a:p>
+        </p:txBody>
+      </p:sp>
+      <p:sp>
+        <p:nvSpPr>
+          <p:cNvPr id="16" name="椭圆 15"/>
           <p:cNvSpPr>
             <a:spLocks noGrp="1"/>
           </p:cNvSpPr>
@@ -6919,19 +7225,12 @@
             <a:pPr algn="ctr">
               <a:buNone/>
             </a:pPr>
-            <a:endParaRPr/>
-          </a:p>
-        </p:txBody>
-      </p:sp>
-      <p:sp>
-        <p:nvSpPr>
-          <p:cNvPr id="17" name="等腰三角形 16">
-            <a:extLst>
-              <a:ext uri="{FF2B5EF4-FFF2-40B4-BE49-F238E27FC236}">
-                <a16:creationId xmlns:a16="http://schemas.microsoft.com/office/drawing/2014/main" id="{026B5618-3673-422F-B68F-69144154F724}"/>
-              </a:ext>
-            </a:extLst>
-          </p:cNvPr>
+          </a:p>
+        </p:txBody>
+      </p:sp>
+      <p:sp>
+        <p:nvSpPr>
+          <p:cNvPr id="17" name="等腰三角形 16"/>
           <p:cNvSpPr>
             <a:spLocks noGrp="1"/>
           </p:cNvSpPr>
@@ -6975,19 +7274,12 @@
             <a:pPr algn="ctr">
               <a:buNone/>
             </a:pPr>
-            <a:endParaRPr/>
-          </a:p>
-        </p:txBody>
-      </p:sp>
-      <p:sp>
-        <p:nvSpPr>
-          <p:cNvPr id="19" name="椭圆 18">
-            <a:extLst>
-              <a:ext uri="{FF2B5EF4-FFF2-40B4-BE49-F238E27FC236}">
-                <a16:creationId xmlns:a16="http://schemas.microsoft.com/office/drawing/2014/main" id="{5FDAC167-36A5-4CF7-BA84-E9C7B4803AF1}"/>
-              </a:ext>
-            </a:extLst>
-          </p:cNvPr>
+          </a:p>
+        </p:txBody>
+      </p:sp>
+      <p:sp>
+        <p:nvSpPr>
+          <p:cNvPr id="19" name="椭圆 18"/>
           <p:cNvSpPr>
             <a:spLocks noGrp="1"/>
           </p:cNvSpPr>
@@ -7033,7 +7325,6 @@
             <a:pPr algn="ctr">
               <a:buNone/>
             </a:pPr>
-            <a:endParaRPr/>
           </a:p>
         </p:txBody>
       </p:sp>
@@ -7046,7 +7337,7 @@
           <p:nvPr/>
         </p:nvPicPr>
         <p:blipFill>
-          <a:blip r:embed="rId3"/>
+          <a:blip r:embed="rId1"/>
           <a:stretch>
             <a:fillRect/>
           </a:stretch>
@@ -7062,11 +7353,6 @@
         </p:spPr>
       </p:pic>
     </p:spTree>
-    <p:extLst>
-      <p:ext uri="{BB962C8B-B14F-4D97-AF65-F5344CB8AC3E}">
-        <p14:creationId xmlns:p14="http://schemas.microsoft.com/office/powerpoint/2010/main" val="796609823"/>
-      </p:ext>
-    </p:extLst>
   </p:cSld>
   <p:clrMapOvr>
     <a:masterClrMapping/>
@@ -7101,13 +7387,7 @@
       </p:grpSpPr>
       <p:sp>
         <p:nvSpPr>
-          <p:cNvPr id="5" name="文本框 4">
-            <a:extLst>
-              <a:ext uri="{FF2B5EF4-FFF2-40B4-BE49-F238E27FC236}">
-                <a16:creationId xmlns:a16="http://schemas.microsoft.com/office/drawing/2014/main" id="{0F6846B8-6A34-4BAA-9BC6-D1B3C2CA9216}"/>
-              </a:ext>
-            </a:extLst>
-          </p:cNvPr>
+          <p:cNvPr id="5" name="文本框 4"/>
           <p:cNvSpPr>
             <a:spLocks noGrp="1"/>
           </p:cNvSpPr>
@@ -7143,7 +7423,6 @@
               <a:buSzTx/>
               <a:buFontTx/>
               <a:buNone/>
-              <a:tabLst/>
               <a:defRPr/>
             </a:pPr>
             <a:r>
@@ -7157,24 +7436,32 @@
                 <a:effectLst/>
                 <a:uLnTx/>
                 <a:uFillTx/>
-                <a:latin typeface="Arial"/>
-                <a:ea typeface="STZhongsong"/>
+                <a:latin typeface="Arial" panose="020B0604020202020204"/>
+                <a:ea typeface="华文中宋" panose="02010600040101010101" charset="-122"/>
                 <a:cs typeface="+mn-cs"/>
               </a:rPr>
               <a:t>01</a:t>
             </a:r>
-          </a:p>
-        </p:txBody>
-      </p:sp>
-      <p:sp>
-        <p:nvSpPr>
-          <p:cNvPr id="6" name="矩形 5">
-            <a:extLst>
-              <a:ext uri="{FF2B5EF4-FFF2-40B4-BE49-F238E27FC236}">
-                <a16:creationId xmlns:a16="http://schemas.microsoft.com/office/drawing/2014/main" id="{2E436048-77E1-49E0-B359-2A0FF4966252}"/>
-              </a:ext>
-            </a:extLst>
-          </p:cNvPr>
+            <a:endParaRPr kumimoji="0" sz="13800" b="0" i="0" u="none" strike="noStrike" kern="1200" cap="none" spc="0" normalizeH="0" baseline="0" noProof="0" dirty="0">
+              <a:ln>
+                <a:noFill/>
+              </a:ln>
+              <a:solidFill>
+                <a:srgbClr val="F5F4F9"/>
+              </a:solidFill>
+              <a:effectLst/>
+              <a:uLnTx/>
+              <a:uFillTx/>
+              <a:latin typeface="Arial" panose="020B0604020202020204"/>
+              <a:ea typeface="华文中宋" panose="02010600040101010101" charset="-122"/>
+              <a:cs typeface="+mn-cs"/>
+            </a:endParaRPr>
+          </a:p>
+        </p:txBody>
+      </p:sp>
+      <p:sp>
+        <p:nvSpPr>
+          <p:cNvPr id="6" name="矩形 5"/>
           <p:cNvSpPr>
             <a:spLocks noGrp="1"/>
           </p:cNvSpPr>
@@ -7209,7 +7496,6 @@
               <a:buSzTx/>
               <a:buFontTx/>
               <a:buNone/>
-              <a:tabLst/>
               <a:defRPr/>
             </a:pPr>
             <a:r>
@@ -7223,8 +7509,8 @@
                 <a:effectLst/>
                 <a:uLnTx/>
                 <a:uFillTx/>
-                <a:latin typeface="Arial"/>
-                <a:ea typeface="STZhongsong"/>
+                <a:latin typeface="Arial" panose="020B0604020202020204"/>
+                <a:ea typeface="华文中宋" panose="02010600040101010101" charset="-122"/>
                 <a:cs typeface="+mn-cs"/>
               </a:rPr>
               <a:t>组内评分</a:t>
@@ -7239,19 +7525,14 @@
               <a:effectLst/>
               <a:uLnTx/>
               <a:uFillTx/>
-              <a:latin typeface="Arial"/>
-              <a:ea typeface="STZhongsong"/>
+              <a:latin typeface="Arial" panose="020B0604020202020204"/>
+              <a:ea typeface="华文中宋" panose="02010600040101010101" charset="-122"/>
               <a:cs typeface="+mn-cs"/>
             </a:endParaRPr>
           </a:p>
         </p:txBody>
       </p:sp>
     </p:spTree>
-    <p:extLst>
-      <p:ext uri="{BB962C8B-B14F-4D97-AF65-F5344CB8AC3E}">
-        <p14:creationId xmlns:p14="http://schemas.microsoft.com/office/powerpoint/2010/main" val="3254142151"/>
-      </p:ext>
-    </p:extLst>
   </p:cSld>
   <p:clrMapOvr>
     <a:masterClrMapping/>
@@ -7286,13 +7567,7 @@
       </p:grpSpPr>
       <p:sp>
         <p:nvSpPr>
-          <p:cNvPr id="5" name="文本框 4">
-            <a:extLst>
-              <a:ext uri="{FF2B5EF4-FFF2-40B4-BE49-F238E27FC236}">
-                <a16:creationId xmlns:a16="http://schemas.microsoft.com/office/drawing/2014/main" id="{0F6846B8-6A34-4BAA-9BC6-D1B3C2CA9216}"/>
-              </a:ext>
-            </a:extLst>
-          </p:cNvPr>
+          <p:cNvPr id="5" name="文本框 4"/>
           <p:cNvSpPr>
             <a:spLocks noGrp="1"/>
           </p:cNvSpPr>
@@ -7343,13 +7618,7 @@
       </p:sp>
       <p:sp>
         <p:nvSpPr>
-          <p:cNvPr id="6" name="矩形 5">
-            <a:extLst>
-              <a:ext uri="{FF2B5EF4-FFF2-40B4-BE49-F238E27FC236}">
-                <a16:creationId xmlns:a16="http://schemas.microsoft.com/office/drawing/2014/main" id="{2E436048-77E1-49E0-B359-2A0FF4966252}"/>
-              </a:ext>
-            </a:extLst>
-          </p:cNvPr>
+          <p:cNvPr id="6" name="矩形 5"/>
           <p:cNvSpPr>
             <a:spLocks noGrp="1"/>
           </p:cNvSpPr>
@@ -7390,11 +7659,6 @@
         </p:txBody>
       </p:sp>
     </p:spTree>
-    <p:extLst>
-      <p:ext uri="{BB962C8B-B14F-4D97-AF65-F5344CB8AC3E}">
-        <p14:creationId xmlns:p14="http://schemas.microsoft.com/office/powerpoint/2010/main" val="219137894"/>
-      </p:ext>
-    </p:extLst>
   </p:cSld>
   <p:clrMapOvr>
     <a:masterClrMapping/>
@@ -7740,6 +8004,11 @@
               </a:rPr>
               <a:t>API</a:t>
             </a:r>
+            <a:endParaRPr lang="en-US" altLang="zh-CN" sz="1350" dirty="0">
+              <a:solidFill>
+                <a:srgbClr val="1F2D22"/>
+              </a:solidFill>
+            </a:endParaRPr>
           </a:p>
           <a:p>
             <a:pPr algn="l">
@@ -7841,6 +8110,11 @@
               </a:rPr>
               <a:t>结果</a:t>
             </a:r>
+            <a:endParaRPr sz="1650" b="1">
+              <a:solidFill>
+                <a:srgbClr val="2D4A33"/>
+              </a:solidFill>
+            </a:endParaRPr>
           </a:p>
         </p:txBody>
       </p:sp>
@@ -7958,13 +8232,7 @@
       </p:grpSpPr>
       <p:sp>
         <p:nvSpPr>
-          <p:cNvPr id="11" name="文本框 10">
-            <a:extLst>
-              <a:ext uri="{FF2B5EF4-FFF2-40B4-BE49-F238E27FC236}">
-                <a16:creationId xmlns:a16="http://schemas.microsoft.com/office/drawing/2014/main" id="{642171A4-C23A-4145-BED1-2E8834D0E5B1}"/>
-              </a:ext>
-            </a:extLst>
-          </p:cNvPr>
+          <p:cNvPr id="11" name="文本框 10"/>
           <p:cNvSpPr>
             <a:spLocks noGrp="1"/>
           </p:cNvSpPr>
@@ -7972,7 +8240,7 @@
         </p:nvSpPr>
         <p:spPr>
           <a:xfrm>
-            <a:off x="2614979" y="2321005"/>
+            <a:off x="2061894" y="2321005"/>
             <a:ext cx="2604077" cy="2215991"/>
           </a:xfrm>
           <a:prstGeom prst="rect">
@@ -8015,13 +8283,7 @@
       </p:sp>
       <p:sp>
         <p:nvSpPr>
-          <p:cNvPr id="13" name="矩形 12">
-            <a:extLst>
-              <a:ext uri="{FF2B5EF4-FFF2-40B4-BE49-F238E27FC236}">
-                <a16:creationId xmlns:a16="http://schemas.microsoft.com/office/drawing/2014/main" id="{638E2919-D9D9-4496-93DC-FD75812F9CF1}"/>
-              </a:ext>
-            </a:extLst>
-          </p:cNvPr>
+          <p:cNvPr id="13" name="矩形 12"/>
           <p:cNvSpPr>
             <a:spLocks noGrp="1"/>
           </p:cNvSpPr>
@@ -8029,8 +8291,8 @@
         </p:nvSpPr>
         <p:spPr>
           <a:xfrm>
-            <a:off x="6331761" y="2685166"/>
-            <a:ext cx="2262158" cy="923330"/>
+            <a:off x="4623120" y="2685166"/>
+            <a:ext cx="5679440" cy="1753235"/>
           </a:xfrm>
           <a:prstGeom prst="rect">
             <a:avLst/>
@@ -8053,20 +8315,33 @@
               </a:rPr>
               <a:t>刘义群</a:t>
             </a:r>
-            <a:endParaRPr sz="5400" b="1" dirty="0">
+            <a:endParaRPr lang="zh-CN" altLang="en-US" sz="5400" b="1" dirty="0">
               <a:solidFill>
                 <a:schemeClr val="bg1"/>
               </a:solidFill>
             </a:endParaRPr>
           </a:p>
+          <a:p>
+            <a:pPr algn="ctr">
+              <a:buNone/>
+            </a:pPr>
+            <a:r>
+              <a:rPr lang="zh-CN" sz="5400" b="1" dirty="0">
+                <a:solidFill>
+                  <a:schemeClr val="bg1"/>
+                </a:solidFill>
+              </a:rPr>
+              <a:t>负责垂直搜索引擎</a:t>
+            </a:r>
+            <a:endParaRPr lang="zh-CN" sz="5400" b="1" dirty="0">
+              <a:solidFill>
+                <a:schemeClr val="bg1"/>
+              </a:solidFill>
+            </a:endParaRPr>
+          </a:p>
         </p:txBody>
       </p:sp>
     </p:spTree>
-    <p:extLst>
-      <p:ext uri="{BB962C8B-B14F-4D97-AF65-F5344CB8AC3E}">
-        <p14:creationId xmlns:p14="http://schemas.microsoft.com/office/powerpoint/2010/main" val="17073351"/>
-      </p:ext>
-    </p:extLst>
   </p:cSld>
   <p:clrMapOvr>
     <a:masterClrMapping/>
@@ -8167,7 +8442,23 @@
               </a:rPr>
               <a:t>刘义群</a:t>
             </a:r>
-            <a:endParaRPr sz="2550" b="1" dirty="0">
+            <a:r>
+              <a:rPr lang="en-US" altLang="zh-CN" sz="2550" b="1" dirty="0">
+                <a:solidFill>
+                  <a:srgbClr val="2D4A33"/>
+                </a:solidFill>
+              </a:rPr>
+              <a:t> </a:t>
+            </a:r>
+            <a:r>
+              <a:rPr lang="zh-CN" altLang="en-US" sz="2550" b="1" dirty="0">
+                <a:solidFill>
+                  <a:srgbClr val="2D4A33"/>
+                </a:solidFill>
+              </a:rPr>
+              <a:t>首页显示部分（新增前端功能）</a:t>
+            </a:r>
+            <a:endParaRPr lang="zh-CN" altLang="en-US" sz="2550" b="1" dirty="0">
               <a:solidFill>
                 <a:srgbClr val="2D4A33"/>
               </a:solidFill>
@@ -8251,6 +8542,11 @@
               </a:rPr>
               <a:t>页面</a:t>
             </a:r>
+            <a:endParaRPr sz="1650" b="1">
+              <a:solidFill>
+                <a:srgbClr val="2D4A33"/>
+              </a:solidFill>
+            </a:endParaRPr>
           </a:p>
         </p:txBody>
       </p:sp>
@@ -8296,21 +8592,26 @@
               </a:defRPr>
             </a:pPr>
             <a:r>
+              <a:rPr lang="en-US" altLang="zh-CN" sz="1350" b="0">
+                <a:solidFill>
+                  <a:srgbClr val="1F2D22"/>
+                </a:solidFill>
+              </a:rPr>
+              <a:t>jdsearch </a:t>
+            </a:r>
+            <a:r>
               <a:rPr lang="zh-CN" altLang="en-US" sz="1350" b="0">
                 <a:solidFill>
                   <a:srgbClr val="1F2D22"/>
                 </a:solidFill>
               </a:rPr>
-              <a:t>系统首页「数据概览」</a:t>
-            </a:r>
-            <a:r>
-              <a:rPr lang="en-US" altLang="zh-CN" sz="1350" b="0">
-                <a:solidFill>
-                  <a:srgbClr val="1F2D22"/>
-                </a:solidFill>
-              </a:rPr>
-              <a:t>Dashboard</a:t>
-            </a:r>
+              <a:t>搜索页面</a:t>
+            </a:r>
+            <a:endParaRPr lang="zh-CN" altLang="en-US" sz="1350" b="0">
+              <a:solidFill>
+                <a:srgbClr val="1F2D22"/>
+              </a:solidFill>
+            </a:endParaRPr>
           </a:p>
           <a:p>
             <a:pPr algn="l">
@@ -8326,7 +8627,7 @@
                   <a:srgbClr val="1F2D22"/>
                 </a:solidFill>
               </a:rPr>
-              <a:t>顶部：</a:t>
+              <a:t>搜索框下方：空关键词时显示提示文字</a:t>
             </a:r>
             <a:r>
               <a:rPr lang="en-US" altLang="zh-CN" sz="1350" b="0">
@@ -8334,7 +8635,7 @@
                   <a:srgbClr val="1F2D22"/>
                 </a:solidFill>
               </a:rPr>
-              <a:t>5 </a:t>
+              <a:t>"</a:t>
             </a:r>
             <a:r>
               <a:rPr lang="zh-CN" altLang="en-US" sz="1350" b="0">
@@ -8342,7 +8643,7 @@
                   <a:srgbClr val="1F2D22"/>
                 </a:solidFill>
               </a:rPr>
-              <a:t>张统计卡片（已导入文档</a:t>
+              <a:t>首页随机展示部分图书，输入关键词后可进行精确搜索</a:t>
             </a:r>
             <a:r>
               <a:rPr lang="en-US" altLang="zh-CN" sz="1350" b="0">
@@ -8350,64 +8651,13 @@
                   <a:srgbClr val="1F2D22"/>
                 </a:solidFill>
               </a:rPr>
-              <a:t> / </a:t>
-            </a:r>
-            <a:r>
-              <a:rPr lang="zh-CN" altLang="en-US" sz="1350" b="0">
-                <a:solidFill>
-                  <a:srgbClr val="1F2D22"/>
-                </a:solidFill>
-              </a:rPr>
-              <a:t>已分块</a:t>
-            </a:r>
-            <a:r>
-              <a:rPr lang="en-US" altLang="zh-CN" sz="1350" b="0">
-                <a:solidFill>
-                  <a:srgbClr val="1F2D22"/>
-                </a:solidFill>
-              </a:rPr>
-              <a:t> / </a:t>
-            </a:r>
-            <a:r>
-              <a:rPr lang="zh-CN" altLang="en-US" sz="1350" b="0">
-                <a:solidFill>
-                  <a:srgbClr val="1F2D22"/>
-                </a:solidFill>
-              </a:rPr>
-              <a:t>已嵌入</a:t>
-            </a:r>
-            <a:r>
-              <a:rPr lang="en-US" altLang="zh-CN" sz="1350" b="0">
-                <a:solidFill>
-                  <a:srgbClr val="1F2D22"/>
-                </a:solidFill>
-              </a:rPr>
-              <a:t> / </a:t>
-            </a:r>
-            <a:r>
-              <a:rPr lang="zh-CN" altLang="en-US" sz="1350" b="0">
-                <a:solidFill>
-                  <a:srgbClr val="1F2D22"/>
-                </a:solidFill>
-              </a:rPr>
-              <a:t>向量库集合</a:t>
-            </a:r>
-            <a:r>
-              <a:rPr lang="en-US" altLang="zh-CN" sz="1350" b="0">
-                <a:solidFill>
-                  <a:srgbClr val="1F2D22"/>
-                </a:solidFill>
-              </a:rPr>
-              <a:t> / </a:t>
-            </a:r>
-            <a:r>
-              <a:rPr lang="zh-CN" altLang="en-US" sz="1350" b="0">
-                <a:solidFill>
-                  <a:srgbClr val="1F2D22"/>
-                </a:solidFill>
-              </a:rPr>
-              <a:t>检索记录）</a:t>
-            </a:r>
+              <a:t>"</a:t>
+            </a:r>
+            <a:endParaRPr lang="en-US" altLang="zh-CN" sz="1350" b="0">
+              <a:solidFill>
+                <a:srgbClr val="1F2D22"/>
+              </a:solidFill>
+            </a:endParaRPr>
           </a:p>
           <a:p>
             <a:pPr algn="l">
@@ -8423,26 +8673,9 @@
                   <a:srgbClr val="1F2D22"/>
                 </a:solidFill>
               </a:rPr>
-              <a:t>下方：文档列表区，含搜索筛选、单条删除、批量删除功能</a:t>
-            </a:r>
-          </a:p>
-          <a:p>
-            <a:pPr algn="l">
-              <a:defRPr sz="1350" b="0">
-                <a:solidFill>
-                  <a:srgbClr val="1F2D22"/>
-                </a:solidFill>
-              </a:defRPr>
-            </a:pPr>
-            <a:r>
-              <a:rPr lang="zh-CN" altLang="en-US" sz="1350" b="0">
-                <a:solidFill>
-                  <a:srgbClr val="1F2D22"/>
-                </a:solidFill>
-              </a:rPr>
-              <a:t>点击卡片切换视图，选中高亮，无路由跳转</a:t>
-            </a:r>
-            <a:endParaRPr sz="1350" b="0">
+              <a:t>结果区域：页面挂载即自动渲染图书列表，无需点击搜索</a:t>
+            </a:r>
+            <a:endParaRPr lang="zh-CN" altLang="en-US" sz="1350" b="0">
               <a:solidFill>
                 <a:srgbClr val="1F2D22"/>
               </a:solidFill>
@@ -8526,6 +8759,11 @@
               </a:rPr>
               <a:t>流程</a:t>
             </a:r>
+            <a:endParaRPr sz="1650" b="1">
+              <a:solidFill>
+                <a:srgbClr val="2D4A33"/>
+              </a:solidFill>
+            </a:endParaRPr>
           </a:p>
         </p:txBody>
       </p:sp>
@@ -8600,6 +8838,60 @@
                   <a:srgbClr val="1F2D22"/>
                 </a:solidFill>
               </a:rPr>
+              <a:t> Vue mounted() </a:t>
+            </a:r>
+            <a:r>
+              <a:rPr lang="zh-CN" altLang="en-US" sz="1350" b="0">
+                <a:solidFill>
+                  <a:srgbClr val="1F2D22"/>
+                </a:solidFill>
+              </a:rPr>
+              <a:t>自动调用</a:t>
+            </a:r>
+            <a:r>
+              <a:rPr lang="en-US" altLang="zh-CN" sz="1350" b="0">
+                <a:solidFill>
+                  <a:srgbClr val="1F2D22"/>
+                </a:solidFill>
+              </a:rPr>
+              <a:t> searchPage()</a:t>
+            </a:r>
+            <a:endParaRPr lang="en-US" altLang="zh-CN" sz="1350" b="0">
+              <a:solidFill>
+                <a:srgbClr val="1F2D22"/>
+              </a:solidFill>
+            </a:endParaRPr>
+          </a:p>
+          <a:p>
+            <a:pPr algn="l">
+              <a:defRPr sz="1350" b="0">
+                <a:solidFill>
+                  <a:srgbClr val="1F2D22"/>
+                </a:solidFill>
+              </a:defRPr>
+            </a:pPr>
+            <a:r>
+              <a:rPr lang="en-US" altLang="zh-CN" sz="1350" b="0">
+                <a:solidFill>
+                  <a:srgbClr val="1F2D22"/>
+                </a:solidFill>
+              </a:rPr>
+              <a:t>searchPage() </a:t>
+            </a:r>
+            <a:r>
+              <a:rPr lang="en-US" altLang="en-US" sz="1350" b="0">
+                <a:solidFill>
+                  <a:srgbClr val="1F2D22"/>
+                </a:solidFill>
+              </a:rPr>
+              <a:t>→</a:t>
+            </a:r>
+            <a:r>
+              <a:rPr lang="en-US" altLang="zh-CN" sz="1350" b="0">
+                <a:solidFill>
+                  <a:srgbClr val="1F2D22"/>
+                </a:solidFill>
+              </a:rPr>
               <a:t> </a:t>
             </a:r>
             <a:r>
@@ -8608,7 +8900,7 @@
                   <a:srgbClr val="1F2D22"/>
                 </a:solidFill>
               </a:rPr>
-              <a:t>并发请求</a:t>
+              <a:t>发送</a:t>
             </a:r>
             <a:r>
               <a:rPr lang="en-US" altLang="zh-CN" sz="1350" b="0">
@@ -8616,7 +8908,7 @@
                   <a:srgbClr val="1F2D22"/>
                 </a:solidFill>
               </a:rPr>
-              <a:t> 5 </a:t>
+              <a:t> POST </a:t>
             </a:r>
             <a:r>
               <a:rPr lang="zh-CN" altLang="en-US" sz="1350" b="0">
@@ -8624,7 +8916,7 @@
                   <a:srgbClr val="1F2D22"/>
                 </a:solidFill>
               </a:rPr>
-              <a:t>个</a:t>
+              <a:t>请求至</a:t>
             </a:r>
             <a:r>
               <a:rPr lang="en-US" altLang="zh-CN" sz="1350" b="0">
@@ -8632,7 +8924,93 @@
                   <a:srgbClr val="1F2D22"/>
                 </a:solidFill>
               </a:rPr>
-              <a:t>GET  API</a:t>
+              <a:t> /query</a:t>
+            </a:r>
+            <a:endParaRPr lang="en-US" altLang="zh-CN" sz="1350" b="0">
+              <a:solidFill>
+                <a:srgbClr val="1F2D22"/>
+              </a:solidFill>
+            </a:endParaRPr>
+          </a:p>
+          <a:p>
+            <a:pPr algn="l">
+              <a:defRPr sz="1350" b="0">
+                <a:solidFill>
+                  <a:srgbClr val="1F2D22"/>
+                </a:solidFill>
+              </a:defRPr>
+            </a:pPr>
+            <a:r>
+              <a:rPr lang="zh-CN" altLang="en-US" sz="1350" b="0">
+                <a:solidFill>
+                  <a:srgbClr val="1F2D22"/>
+                </a:solidFill>
+              </a:rPr>
+              <a:t>后端判断</a:t>
+            </a:r>
+            <a:r>
+              <a:rPr lang="en-US" altLang="zh-CN" sz="1350" b="0">
+                <a:solidFill>
+                  <a:srgbClr val="1F2D22"/>
+                </a:solidFill>
+              </a:rPr>
+              <a:t> keyword </a:t>
+            </a:r>
+            <a:r>
+              <a:rPr lang="zh-CN" altLang="en-US" sz="1350" b="0">
+                <a:solidFill>
+                  <a:srgbClr val="1F2D22"/>
+                </a:solidFill>
+              </a:rPr>
+              <a:t>是否为空</a:t>
+            </a:r>
+            <a:r>
+              <a:rPr lang="en-US" altLang="zh-CN" sz="1350" b="0">
+                <a:solidFill>
+                  <a:srgbClr val="1F2D22"/>
+                </a:solidFill>
+              </a:rPr>
+              <a:t> </a:t>
+            </a:r>
+            <a:r>
+              <a:rPr lang="en-US" altLang="en-US" sz="1350" b="0">
+                <a:solidFill>
+                  <a:srgbClr val="1F2D22"/>
+                </a:solidFill>
+              </a:rPr>
+              <a:t>→</a:t>
+            </a:r>
+            <a:r>
+              <a:rPr lang="en-US" altLang="zh-CN" sz="1350" b="0">
+                <a:solidFill>
+                  <a:srgbClr val="1F2D22"/>
+                </a:solidFill>
+              </a:rPr>
+              <a:t> </a:t>
+            </a:r>
+            <a:r>
+              <a:rPr lang="zh-CN" altLang="en-US" sz="1350" b="0">
+                <a:solidFill>
+                  <a:srgbClr val="1F2D22"/>
+                </a:solidFill>
+              </a:rPr>
+              <a:t>为空则执行</a:t>
+            </a:r>
+            <a:r>
+              <a:rPr lang="en-US" altLang="zh-CN" sz="1350" b="0">
+                <a:solidFill>
+                  <a:srgbClr val="1F2D22"/>
+                </a:solidFill>
+              </a:rPr>
+              <a:t> matchAllQuery + randomFunction </a:t>
+            </a:r>
+            <a:r>
+              <a:rPr lang="zh-CN" altLang="en-US" sz="1350" b="0">
+                <a:solidFill>
+                  <a:srgbClr val="1F2D22"/>
+                </a:solidFill>
+              </a:rPr>
+              <a:t>随机排序</a:t>
             </a:r>
             <a:endParaRPr lang="zh-CN" altLang="en-US" sz="1350" b="0">
               <a:solidFill>
@@ -8649,175 +9027,34 @@
               </a:defRPr>
             </a:pPr>
             <a:r>
+              <a:rPr lang="en-US" altLang="en-US" sz="1350" b="0">
+                <a:solidFill>
+                  <a:srgbClr val="1F2D22"/>
+                </a:solidFill>
+              </a:rPr>
+              <a:t>→</a:t>
+            </a:r>
+            <a:r>
+              <a:rPr lang="en-US" altLang="zh-CN" sz="1350" b="0">
+                <a:solidFill>
+                  <a:srgbClr val="1F2D22"/>
+                </a:solidFill>
+              </a:rPr>
+              <a:t> </a:t>
+            </a:r>
+            <a:r>
               <a:rPr lang="zh-CN" altLang="en-US" sz="1350" b="0">
                 <a:solidFill>
                   <a:srgbClr val="1F2D22"/>
                 </a:solidFill>
               </a:rPr>
-              <a:t>点击统计卡片</a:t>
-            </a:r>
-            <a:r>
-              <a:rPr lang="en-US" altLang="zh-CN" sz="1350" b="0">
-                <a:solidFill>
-                  <a:srgbClr val="1F2D22"/>
-                </a:solidFill>
-              </a:rPr>
-              <a:t> </a:t>
-            </a:r>
-            <a:r>
-              <a:rPr lang="en-US" altLang="en-US" sz="1350" b="0">
-                <a:solidFill>
-                  <a:srgbClr val="1F2D22"/>
-                </a:solidFill>
-              </a:rPr>
-              <a:t>→</a:t>
-            </a:r>
-            <a:r>
-              <a:rPr lang="en-US" altLang="zh-CN" sz="1350" b="0">
-                <a:solidFill>
-                  <a:srgbClr val="1F2D22"/>
-                </a:solidFill>
-              </a:rPr>
-              <a:t> </a:t>
-            </a:r>
-            <a:r>
-              <a:rPr lang="zh-CN" altLang="en-US" sz="1350" b="0">
-                <a:solidFill>
-                  <a:srgbClr val="1F2D22"/>
-                </a:solidFill>
-              </a:rPr>
-              <a:t>切换下方文档列表视图</a:t>
-            </a:r>
-          </a:p>
-          <a:p>
-            <a:pPr algn="l">
-              <a:defRPr sz="1350" b="0">
-                <a:solidFill>
-                  <a:srgbClr val="1F2D22"/>
-                </a:solidFill>
-              </a:defRPr>
-            </a:pPr>
-            <a:r>
-              <a:rPr lang="zh-CN" altLang="en-US" sz="1350" b="0">
-                <a:solidFill>
-                  <a:srgbClr val="1F2D22"/>
-                </a:solidFill>
-              </a:rPr>
-              <a:t>输入关键词</a:t>
-            </a:r>
-            <a:r>
-              <a:rPr lang="en-US" altLang="zh-CN" sz="1350" b="0">
-                <a:solidFill>
-                  <a:srgbClr val="1F2D22"/>
-                </a:solidFill>
-              </a:rPr>
-              <a:t> </a:t>
-            </a:r>
-            <a:r>
-              <a:rPr lang="en-US" altLang="en-US" sz="1350" b="0">
-                <a:solidFill>
-                  <a:srgbClr val="1F2D22"/>
-                </a:solidFill>
-              </a:rPr>
-              <a:t>→</a:t>
-            </a:r>
-            <a:r>
-              <a:rPr lang="en-US" altLang="zh-CN" sz="1350" b="0">
-                <a:solidFill>
-                  <a:srgbClr val="1F2D22"/>
-                </a:solidFill>
-              </a:rPr>
-              <a:t> </a:t>
-            </a:r>
-            <a:r>
-              <a:rPr lang="zh-CN" altLang="en-US" sz="1350" b="0">
-                <a:solidFill>
-                  <a:srgbClr val="1F2D22"/>
-                </a:solidFill>
-              </a:rPr>
-              <a:t>前端实时过滤列表</a:t>
-            </a:r>
-          </a:p>
-          <a:p>
-            <a:pPr algn="l">
-              <a:defRPr sz="1350" b="0">
-                <a:solidFill>
-                  <a:srgbClr val="1F2D22"/>
-                </a:solidFill>
-              </a:defRPr>
-            </a:pPr>
-            <a:r>
-              <a:rPr lang="zh-CN" altLang="en-US" sz="1350" b="0">
-                <a:solidFill>
-                  <a:srgbClr val="1F2D22"/>
-                </a:solidFill>
-              </a:rPr>
-              <a:t>删除的确认弹窗</a:t>
-            </a:r>
-            <a:r>
-              <a:rPr lang="en-US" altLang="zh-CN" sz="1350" b="0">
-                <a:solidFill>
-                  <a:srgbClr val="1F2D22"/>
-                </a:solidFill>
-              </a:rPr>
-              <a:t> </a:t>
-            </a:r>
-            <a:r>
-              <a:rPr lang="en-US" altLang="en-US" sz="1350" b="0">
-                <a:solidFill>
-                  <a:srgbClr val="1F2D22"/>
-                </a:solidFill>
-              </a:rPr>
-              <a:t>→</a:t>
-            </a:r>
-            <a:r>
-              <a:rPr lang="en-US" altLang="zh-CN" sz="1350" b="0">
-                <a:solidFill>
-                  <a:srgbClr val="1F2D22"/>
-                </a:solidFill>
-              </a:rPr>
-              <a:t> </a:t>
-            </a:r>
-            <a:r>
-              <a:rPr lang="zh-CN" altLang="en-US" sz="1350" b="0">
-                <a:solidFill>
-                  <a:srgbClr val="1F2D22"/>
-                </a:solidFill>
-              </a:rPr>
-              <a:t>调用</a:t>
-            </a:r>
-            <a:r>
-              <a:rPr lang="en-US" altLang="zh-CN" sz="1350" b="0">
-                <a:solidFill>
-                  <a:srgbClr val="1F2D22"/>
-                </a:solidFill>
-              </a:rPr>
-              <a:t> DELETE API </a:t>
-            </a:r>
-            <a:r>
-              <a:rPr lang="en-US" altLang="en-US" sz="1350" b="0">
-                <a:solidFill>
-                  <a:srgbClr val="1F2D22"/>
-                </a:solidFill>
-              </a:rPr>
-              <a:t>→</a:t>
-            </a:r>
-            <a:r>
-              <a:rPr lang="en-US" altLang="zh-CN" sz="1350" b="0">
-                <a:solidFill>
-                  <a:srgbClr val="1F2D22"/>
-                </a:solidFill>
-              </a:rPr>
-              <a:t> </a:t>
-            </a:r>
-            <a:r>
-              <a:rPr lang="zh-CN" altLang="en-US" sz="1350" b="0">
-                <a:solidFill>
-                  <a:srgbClr val="1F2D22"/>
-                </a:solidFill>
-              </a:rPr>
-              <a:t>刷新数据</a:t>
-            </a:r>
+              <a:t>返回结果，前端渲染图书列表</a:t>
+            </a:r>
+            <a:endParaRPr lang="zh-CN" altLang="en-US" sz="1350" b="0">
+              <a:solidFill>
+                <a:srgbClr val="1F2D22"/>
+              </a:solidFill>
+            </a:endParaRPr>
           </a:p>
         </p:txBody>
       </p:sp>
@@ -8897,6 +9134,11 @@
               </a:rPr>
               <a:t>结果</a:t>
             </a:r>
+            <a:endParaRPr sz="1650" b="1">
+              <a:solidFill>
+                <a:srgbClr val="2D4A33"/>
+              </a:solidFill>
+            </a:endParaRPr>
           </a:p>
         </p:txBody>
       </p:sp>
@@ -8947,24 +9189,13 @@
                   <a:srgbClr val="1F2D22"/>
                 </a:solidFill>
               </a:rPr>
-              <a:t>一站式查看</a:t>
-            </a:r>
-            <a:r>
-              <a:rPr lang="en-US" altLang="zh-CN" sz="1350" b="0">
-                <a:solidFill>
-                  <a:srgbClr val="1F2D22"/>
-                </a:solidFill>
-              </a:rPr>
-              <a:t> RAG </a:t>
-            </a:r>
-            <a:r>
-              <a:rPr lang="zh-CN" altLang="en-US" sz="1350" b="0">
-                <a:solidFill>
-                  <a:srgbClr val="1F2D22"/>
-                </a:solidFill>
-              </a:rPr>
-              <a:t>流水线各阶段数据状态</a:t>
-            </a:r>
+              <a:t>首页打开即展示随机图书，无需手动搜索</a:t>
+            </a:r>
+            <a:endParaRPr lang="zh-CN" altLang="en-US" sz="1350" b="0">
+              <a:solidFill>
+                <a:srgbClr val="1F2D22"/>
+              </a:solidFill>
+            </a:endParaRPr>
           </a:p>
           <a:p>
             <a:pPr algn="l">
@@ -8980,7 +9211,7 @@
                   <a:srgbClr val="1F2D22"/>
                 </a:solidFill>
               </a:rPr>
-              <a:t>支持知识库文档的搜索、单条</a:t>
+              <a:t>空关键词时随机展示</a:t>
             </a:r>
             <a:r>
               <a:rPr lang="en-US" altLang="zh-CN" sz="1350" b="0">
@@ -8988,7 +9219,7 @@
                   <a:srgbClr val="1F2D22"/>
                 </a:solidFill>
               </a:rPr>
-              <a:t>/</a:t>
+              <a:t> jddata </a:t>
             </a:r>
             <a:r>
               <a:rPr lang="zh-CN" altLang="en-US" sz="1350" b="0">
@@ -8996,8 +9227,13 @@
                   <a:srgbClr val="1F2D22"/>
                 </a:solidFill>
               </a:rPr>
-              <a:t>批量删除管理</a:t>
-            </a:r>
+              <a:t>索引中的书籍</a:t>
+            </a:r>
+            <a:endParaRPr lang="zh-CN" altLang="en-US" sz="1350" b="0">
+              <a:solidFill>
+                <a:srgbClr val="1F2D22"/>
+              </a:solidFill>
+            </a:endParaRPr>
           </a:p>
           <a:p>
             <a:pPr algn="l">
@@ -9013,34 +9249,9 @@
                   <a:srgbClr val="1F2D22"/>
                 </a:solidFill>
               </a:rPr>
-              <a:t>纯</a:t>
-            </a:r>
-            <a:r>
-              <a:rPr lang="en-US" altLang="zh-CN" sz="1350" b="0">
-                <a:solidFill>
-                  <a:srgbClr val="1F2D22"/>
-                </a:solidFill>
-              </a:rPr>
-              <a:t> Tailwind CSS </a:t>
-            </a:r>
-            <a:r>
-              <a:rPr lang="zh-CN" altLang="en-US" sz="1350" b="0">
-                <a:solidFill>
-                  <a:srgbClr val="1F2D22"/>
-                </a:solidFill>
-              </a:rPr>
-              <a:t>实现，零额外依赖，加载快速</a:t>
-            </a:r>
-          </a:p>
-          <a:p>
-            <a:pPr algn="l">
-              <a:defRPr sz="1350" b="0">
-                <a:solidFill>
-                  <a:srgbClr val="1F2D22"/>
-                </a:solidFill>
-              </a:defRPr>
-            </a:pPr>
-            <a:endParaRPr sz="1350" b="0">
+              <a:t>有关键词时仍按标题匹配精确搜索</a:t>
+            </a:r>
+            <a:endParaRPr lang="zh-CN" altLang="en-US" sz="1350" b="0">
               <a:solidFill>
                 <a:srgbClr val="1F2D22"/>
               </a:solidFill>
@@ -9059,14 +9270,6 @@
 <file path=ppt/slides/slide7.xml><?xml version="1.0" encoding="utf-8"?>
 <p:sld xmlns:a="http://schemas.openxmlformats.org/drawingml/2006/main" xmlns:r="http://schemas.openxmlformats.org/officeDocument/2006/relationships" xmlns:p="http://schemas.openxmlformats.org/presentationml/2006/main">
   <p:cSld>
-    <p:bg>
-      <p:bgPr>
-        <a:solidFill>
-          <a:srgbClr val="253A2A"/>
-        </a:solidFill>
-        <a:effectLst/>
-      </p:bgPr>
-    </p:bg>
     <p:spTree>
       <p:nvGrpSpPr>
         <p:cNvPr id="1" name=""/>
@@ -9083,13 +9286,7 @@
       </p:grpSpPr>
       <p:sp>
         <p:nvSpPr>
-          <p:cNvPr id="11" name="文本框 10">
-            <a:extLst>
-              <a:ext uri="{FF2B5EF4-FFF2-40B4-BE49-F238E27FC236}">
-                <a16:creationId xmlns:a16="http://schemas.microsoft.com/office/drawing/2014/main" id="{642171A4-C23A-4145-BED1-2E8834D0E5B1}"/>
-              </a:ext>
-            </a:extLst>
-          </p:cNvPr>
+          <p:cNvPr id="13" name="矩形 12"/>
           <p:cNvSpPr>
             <a:spLocks noGrp="1"/>
           </p:cNvSpPr>
@@ -9097,90 +9294,26 @@
         </p:nvSpPr>
         <p:spPr>
           <a:xfrm>
-            <a:off x="2614979" y="2321005"/>
-            <a:ext cx="2604077" cy="2215991"/>
+            <a:off x="0" y="0"/>
+            <a:ext cx="12192000" cy="114300"/>
           </a:xfrm>
           <a:prstGeom prst="rect">
             <a:avLst/>
           </a:prstGeom>
-          <a:noFill/>
-        </p:spPr>
-        <p:txBody>
-          <a:bodyPr wrap="square">
-            <a:spAutoFit/>
-          </a:bodyPr>
-          <a:lstStyle/>
-          <a:p>
-            <a:pPr marL="0" marR="0" lvl="0" indent="0" algn="ctr" defTabSz="914400" eaLnBrk="1" fontAlgn="auto" latinLnBrk="0" hangingPunct="1">
-              <a:lnSpc>
-                <a:spcPct val="100000"/>
-              </a:lnSpc>
-              <a:spcBef>
-                <a:spcPts val="0"/>
-              </a:spcBef>
-              <a:spcAft>
-                <a:spcPts val="0"/>
-              </a:spcAft>
-              <a:buClrTx/>
-              <a:buSzTx/>
-              <a:buFontTx/>
-              <a:buNone/>
-              <a:tabLst/>
-              <a:defRPr/>
-            </a:pPr>
-            <a:r>
-              <a:rPr kumimoji="0" sz="13800" b="0" i="0" u="none" strike="noStrike" kern="1200" cap="none" spc="0" normalizeH="0" baseline="0" noProof="0" dirty="0">
-                <a:ln>
-                  <a:noFill/>
-                </a:ln>
-                <a:solidFill>
-                  <a:srgbClr val="F5F4F9"/>
-                </a:solidFill>
-                <a:effectLst/>
-                <a:uLnTx/>
-                <a:uFillTx/>
-                <a:latin typeface="Arial"/>
-                <a:ea typeface="STZhongsong"/>
-                <a:cs typeface="+mn-cs"/>
-              </a:rPr>
-              <a:t>0</a:t>
-            </a:r>
-            <a:r>
-              <a:rPr lang="en-US" sz="13800" dirty="0">
-                <a:solidFill>
-                  <a:srgbClr val="F5F4F9"/>
-                </a:solidFill>
-                <a:latin typeface="Arial"/>
-                <a:ea typeface="STZhongsong"/>
-              </a:rPr>
-              <a:t>4</a:t>
-            </a:r>
-            <a:endParaRPr kumimoji="0" sz="13800" b="0" i="0" u="none" strike="noStrike" kern="1200" cap="none" spc="0" normalizeH="0" baseline="0" noProof="0" dirty="0">
-              <a:ln>
-                <a:noFill/>
-              </a:ln>
-              <a:solidFill>
-                <a:srgbClr val="F5F4F9"/>
-              </a:solidFill>
-              <a:effectLst/>
-              <a:uLnTx/>
-              <a:uFillTx/>
-              <a:latin typeface="Arial"/>
-              <a:ea typeface="STZhongsong"/>
-              <a:cs typeface="+mn-cs"/>
-            </a:endParaRPr>
-          </a:p>
-        </p:txBody>
-      </p:sp>
-      <p:sp>
-        <p:nvSpPr>
-          <p:cNvPr id="13" name="矩形 12">
-            <a:extLst>
-              <a:ext uri="{FF2B5EF4-FFF2-40B4-BE49-F238E27FC236}">
-                <a16:creationId xmlns:a16="http://schemas.microsoft.com/office/drawing/2014/main" id="{638E2919-D9D9-4496-93DC-FD75812F9CF1}"/>
-              </a:ext>
-            </a:extLst>
-          </p:cNvPr>
+          <a:solidFill>
+            <a:srgbClr val="2D4A33"/>
+          </a:solidFill>
+          <a:ln w="0">
+            <a:solidFill>
+              <a:srgbClr val="2D4A33"/>
+            </a:solidFill>
+            <a:prstDash val="solid"/>
+          </a:ln>
+        </p:spPr>
+      </p:sp>
+      <p:sp>
+        <p:nvSpPr>
+          <p:cNvPr id="2" name="矩形 1"/>
           <p:cNvSpPr>
             <a:spLocks noGrp="1"/>
           </p:cNvSpPr>
@@ -9188,76 +9321,957 @@
         </p:nvSpPr>
         <p:spPr>
           <a:xfrm>
-            <a:off x="6331761" y="2685166"/>
-            <a:ext cx="2262159" cy="923330"/>
+            <a:off x="762000" y="400050"/>
+            <a:ext cx="10668000" cy="457200"/>
           </a:xfrm>
           <a:prstGeom prst="rect">
             <a:avLst/>
           </a:prstGeom>
-        </p:spPr>
-        <p:txBody>
-          <a:bodyPr wrap="none">
-            <a:spAutoFit/>
-          </a:bodyPr>
-          <a:lstStyle/>
-          <a:p>
-            <a:pPr marL="0" marR="0" lvl="0" indent="0" algn="ctr" defTabSz="914400" eaLnBrk="1" fontAlgn="auto" latinLnBrk="0" hangingPunct="1">
-              <a:lnSpc>
-                <a:spcPct val="100000"/>
-              </a:lnSpc>
-              <a:spcBef>
-                <a:spcPts val="0"/>
-              </a:spcBef>
-              <a:spcAft>
-                <a:spcPts val="0"/>
-              </a:spcAft>
-              <a:buClrTx/>
-              <a:buSzTx/>
-              <a:buFontTx/>
-              <a:buNone/>
-              <a:tabLst/>
-              <a:defRPr/>
-            </a:pPr>
-            <a:r>
-              <a:rPr kumimoji="0" lang="zh-CN" altLang="en-US" sz="5400" b="1" i="0" u="none" strike="noStrike" kern="1200" cap="none" spc="0" normalizeH="0" baseline="0" noProof="0" dirty="0">
-                <a:ln>
-                  <a:noFill/>
-                </a:ln>
-                <a:solidFill>
-                  <a:prstClr val="white"/>
-                </a:solidFill>
-                <a:effectLst/>
-                <a:uLnTx/>
-                <a:uFillTx/>
-                <a:latin typeface="Arial"/>
-                <a:ea typeface="STZhongsong"/>
-                <a:cs typeface="+mn-cs"/>
-              </a:rPr>
-              <a:t>李嘉轩</a:t>
-            </a:r>
-            <a:endParaRPr kumimoji="0" sz="5400" b="1" i="0" u="none" strike="noStrike" kern="1200" cap="none" spc="0" normalizeH="0" baseline="0" noProof="0" dirty="0">
-              <a:ln>
-                <a:noFill/>
-              </a:ln>
+          <a:solidFill>
+            <a:srgbClr val="000000">
+              <a:alpha val="0"/>
+            </a:srgbClr>
+          </a:solidFill>
+          <a:ln w="0">
+            <a:solidFill>
+              <a:srgbClr val="000000">
+                <a:alpha val="0"/>
+              </a:srgbClr>
+            </a:solidFill>
+            <a:prstDash val="solid"/>
+          </a:ln>
+        </p:spPr>
+        <p:txBody>
+          <a:bodyPr anchor="ctr"/>
+          <a:lstStyle/>
+          <a:p>
+            <a:pPr algn="ctr">
+              <a:defRPr sz="2550" b="1">
+                <a:solidFill>
+                  <a:srgbClr val="2D4A33"/>
+                </a:solidFill>
+              </a:defRPr>
+            </a:pPr>
+            <a:r>
+              <a:rPr lang="zh-CN" altLang="en-US" sz="2550" b="1" dirty="0">
+                <a:solidFill>
+                  <a:srgbClr val="2D4A33"/>
+                </a:solidFill>
+              </a:rPr>
+              <a:t>刘义群</a:t>
+            </a:r>
+            <a:r>
+              <a:rPr lang="en-US" altLang="zh-CN" sz="2550" b="1" dirty="0">
+                <a:solidFill>
+                  <a:srgbClr val="2D4A33"/>
+                </a:solidFill>
+              </a:rPr>
+              <a:t> </a:t>
+            </a:r>
+            <a:r>
+              <a:rPr lang="zh-CN" altLang="en-US" sz="2550" b="1" dirty="0">
+                <a:solidFill>
+                  <a:srgbClr val="2D4A33"/>
+                </a:solidFill>
+              </a:rPr>
+              <a:t>价格排序部分</a:t>
+            </a:r>
+            <a:endParaRPr lang="zh-CN" altLang="en-US" sz="2550" b="1" dirty="0">
               <a:solidFill>
-                <a:prstClr val="white"/>
+                <a:srgbClr val="2D4A33"/>
               </a:solidFill>
-              <a:effectLst/>
-              <a:uLnTx/>
-              <a:uFillTx/>
-              <a:latin typeface="Arial"/>
-              <a:ea typeface="STZhongsong"/>
-              <a:cs typeface="+mn-cs"/>
             </a:endParaRPr>
           </a:p>
         </p:txBody>
       </p:sp>
+      <p:sp>
+        <p:nvSpPr>
+          <p:cNvPr id="4" name="矩形 3"/>
+          <p:cNvSpPr>
+            <a:spLocks noGrp="1"/>
+          </p:cNvSpPr>
+          <p:nvPr/>
+        </p:nvSpPr>
+        <p:spPr>
+          <a:xfrm>
+            <a:off x="857250" y="1619250"/>
+            <a:ext cx="4762500" cy="1809750"/>
+          </a:xfrm>
+          <a:prstGeom prst="rect">
+            <a:avLst/>
+          </a:prstGeom>
+          <a:solidFill>
+            <a:srgbClr val="FFFFFF"/>
+          </a:solidFill>
+          <a:ln w="9525">
+            <a:solidFill>
+              <a:srgbClr val="C7D0C4"/>
+            </a:solidFill>
+            <a:prstDash val="solid"/>
+          </a:ln>
+        </p:spPr>
+      </p:sp>
+      <p:sp>
+        <p:nvSpPr>
+          <p:cNvPr id="5" name="矩形 4"/>
+          <p:cNvSpPr>
+            <a:spLocks noGrp="1"/>
+          </p:cNvSpPr>
+          <p:nvPr/>
+        </p:nvSpPr>
+        <p:spPr>
+          <a:xfrm>
+            <a:off x="1157605" y="1666875"/>
+            <a:ext cx="4305300" cy="323850"/>
+          </a:xfrm>
+          <a:prstGeom prst="rect">
+            <a:avLst/>
+          </a:prstGeom>
+          <a:solidFill>
+            <a:srgbClr val="000000">
+              <a:alpha val="0"/>
+            </a:srgbClr>
+          </a:solidFill>
+          <a:ln w="0">
+            <a:solidFill>
+              <a:srgbClr val="000000">
+                <a:alpha val="0"/>
+              </a:srgbClr>
+            </a:solidFill>
+            <a:prstDash val="solid"/>
+          </a:ln>
+        </p:spPr>
+        <p:txBody>
+          <a:bodyPr anchor="ctr"/>
+          <a:lstStyle/>
+          <a:p>
+            <a:pPr algn="l">
+              <a:defRPr sz="1650" b="1">
+                <a:solidFill>
+                  <a:srgbClr val="2D4A33"/>
+                </a:solidFill>
+              </a:defRPr>
+            </a:pPr>
+            <a:r>
+              <a:rPr sz="1650" b="1">
+                <a:solidFill>
+                  <a:srgbClr val="2D4A33"/>
+                </a:solidFill>
+              </a:rPr>
+              <a:t>页面</a:t>
+            </a:r>
+            <a:endParaRPr sz="1650" b="1">
+              <a:solidFill>
+                <a:srgbClr val="2D4A33"/>
+              </a:solidFill>
+            </a:endParaRPr>
+          </a:p>
+        </p:txBody>
+      </p:sp>
+      <p:sp>
+        <p:nvSpPr>
+          <p:cNvPr id="6" name="矩形 5"/>
+          <p:cNvSpPr>
+            <a:spLocks noGrp="1"/>
+          </p:cNvSpPr>
+          <p:nvPr/>
+        </p:nvSpPr>
+        <p:spPr>
+          <a:xfrm>
+            <a:off x="1157605" y="2228850"/>
+            <a:ext cx="4305300" cy="857250"/>
+          </a:xfrm>
+          <a:prstGeom prst="rect">
+            <a:avLst/>
+          </a:prstGeom>
+          <a:solidFill>
+            <a:srgbClr val="000000">
+              <a:alpha val="0"/>
+            </a:srgbClr>
+          </a:solidFill>
+          <a:ln w="0">
+            <a:solidFill>
+              <a:srgbClr val="000000">
+                <a:alpha val="0"/>
+              </a:srgbClr>
+            </a:solidFill>
+            <a:prstDash val="solid"/>
+          </a:ln>
+        </p:spPr>
+        <p:txBody>
+          <a:bodyPr anchor="ctr"/>
+          <a:lstStyle/>
+          <a:p>
+            <a:pPr algn="l">
+              <a:defRPr sz="1350" b="0">
+                <a:solidFill>
+                  <a:srgbClr val="1F2D22"/>
+                </a:solidFill>
+              </a:defRPr>
+            </a:pPr>
+            <a:r>
+              <a:rPr lang="en-US" altLang="zh-CN" sz="1350" b="0">
+                <a:solidFill>
+                  <a:srgbClr val="1F2D22"/>
+                </a:solidFill>
+              </a:rPr>
+              <a:t>jdsearch </a:t>
+            </a:r>
+            <a:r>
+              <a:rPr lang="zh-CN" altLang="en-US" sz="1350" b="0">
+                <a:solidFill>
+                  <a:srgbClr val="1F2D22"/>
+                </a:solidFill>
+              </a:rPr>
+              <a:t>搜索页面</a:t>
+            </a:r>
+            <a:endParaRPr lang="zh-CN" altLang="en-US" sz="1350" b="0">
+              <a:solidFill>
+                <a:srgbClr val="1F2D22"/>
+              </a:solidFill>
+            </a:endParaRPr>
+          </a:p>
+          <a:p>
+            <a:pPr algn="l">
+              <a:defRPr sz="1350" b="0">
+                <a:solidFill>
+                  <a:srgbClr val="1F2D22"/>
+                </a:solidFill>
+              </a:defRPr>
+            </a:pPr>
+            <a:r>
+              <a:rPr lang="en-US" altLang="zh-CN" sz="1350" b="0">
+                <a:solidFill>
+                  <a:srgbClr val="1F2D22"/>
+                </a:solidFill>
+              </a:rPr>
+              <a:t>"</a:t>
+            </a:r>
+            <a:r>
+              <a:rPr lang="zh-CN" altLang="en-US" sz="1350" b="0">
+                <a:solidFill>
+                  <a:srgbClr val="1F2D22"/>
+                </a:solidFill>
+              </a:rPr>
+              <a:t>价格</a:t>
+            </a:r>
+            <a:r>
+              <a:rPr lang="en-US" altLang="zh-CN" sz="1350" b="0">
+                <a:solidFill>
+                  <a:srgbClr val="1F2D22"/>
+                </a:solidFill>
+              </a:rPr>
+              <a:t>"</a:t>
+            </a:r>
+            <a:r>
+              <a:rPr lang="zh-CN" altLang="en-US" sz="1350" b="0">
+                <a:solidFill>
+                  <a:srgbClr val="1F2D22"/>
+                </a:solidFill>
+              </a:rPr>
+              <a:t>文字变为可点击排序控件</a:t>
+            </a:r>
+            <a:endParaRPr lang="zh-CN" altLang="en-US" sz="1350" b="0">
+              <a:solidFill>
+                <a:srgbClr val="1F2D22"/>
+              </a:solidFill>
+            </a:endParaRPr>
+          </a:p>
+          <a:p>
+            <a:pPr algn="l">
+              <a:defRPr sz="1350" b="0">
+                <a:solidFill>
+                  <a:srgbClr val="1F2D22"/>
+                </a:solidFill>
+              </a:defRPr>
+            </a:pPr>
+            <a:r>
+              <a:rPr lang="zh-CN" altLang="en-US" sz="1350" b="0">
+                <a:solidFill>
+                  <a:srgbClr val="1F2D22"/>
+                </a:solidFill>
+              </a:rPr>
+              <a:t>点击后显示排序方向箭头（</a:t>
+            </a:r>
+            <a:r>
+              <a:rPr lang="en-US" altLang="en-US" sz="1350" b="0">
+                <a:solidFill>
+                  <a:srgbClr val="1F2D22"/>
+                </a:solidFill>
+              </a:rPr>
+              <a:t>↑</a:t>
+            </a:r>
+            <a:r>
+              <a:rPr lang="zh-CN" altLang="en-US" sz="1350" b="0">
+                <a:solidFill>
+                  <a:srgbClr val="1F2D22"/>
+                </a:solidFill>
+              </a:rPr>
+              <a:t>升序</a:t>
+            </a:r>
+            <a:r>
+              <a:rPr lang="en-US" altLang="zh-CN" sz="1350" b="0">
+                <a:solidFill>
+                  <a:srgbClr val="1F2D22"/>
+                </a:solidFill>
+              </a:rPr>
+              <a:t> / </a:t>
+            </a:r>
+            <a:r>
+              <a:rPr lang="en-US" altLang="en-US" sz="1350" b="0">
+                <a:solidFill>
+                  <a:srgbClr val="1F2D22"/>
+                </a:solidFill>
+              </a:rPr>
+              <a:t>↓</a:t>
+            </a:r>
+            <a:r>
+              <a:rPr lang="zh-CN" altLang="en-US" sz="1350" b="0">
+                <a:solidFill>
+                  <a:srgbClr val="1F2D22"/>
+                </a:solidFill>
+              </a:rPr>
+              <a:t>降序）</a:t>
+            </a:r>
+            <a:endParaRPr lang="zh-CN" altLang="en-US" sz="1350" b="0">
+              <a:solidFill>
+                <a:srgbClr val="1F2D22"/>
+              </a:solidFill>
+            </a:endParaRPr>
+          </a:p>
+        </p:txBody>
+      </p:sp>
+      <p:sp>
+        <p:nvSpPr>
+          <p:cNvPr id="7" name="矩形 6"/>
+          <p:cNvSpPr>
+            <a:spLocks noGrp="1"/>
+          </p:cNvSpPr>
+          <p:nvPr/>
+        </p:nvSpPr>
+        <p:spPr>
+          <a:xfrm>
+            <a:off x="6285865" y="1379855"/>
+            <a:ext cx="5144135" cy="2091055"/>
+          </a:xfrm>
+          <a:prstGeom prst="rect">
+            <a:avLst/>
+          </a:prstGeom>
+          <a:solidFill>
+            <a:srgbClr val="FFFFFF"/>
+          </a:solidFill>
+          <a:ln w="9525">
+            <a:solidFill>
+              <a:srgbClr val="C7D0C4"/>
+            </a:solidFill>
+            <a:prstDash val="solid"/>
+          </a:ln>
+        </p:spPr>
+      </p:sp>
+      <p:sp>
+        <p:nvSpPr>
+          <p:cNvPr id="8" name="矩形 7"/>
+          <p:cNvSpPr>
+            <a:spLocks noGrp="1"/>
+          </p:cNvSpPr>
+          <p:nvPr/>
+        </p:nvSpPr>
+        <p:spPr>
+          <a:xfrm>
+            <a:off x="6534785" y="1475740"/>
+            <a:ext cx="4305300" cy="323850"/>
+          </a:xfrm>
+          <a:prstGeom prst="rect">
+            <a:avLst/>
+          </a:prstGeom>
+          <a:solidFill>
+            <a:srgbClr val="000000">
+              <a:alpha val="0"/>
+            </a:srgbClr>
+          </a:solidFill>
+          <a:ln w="0">
+            <a:solidFill>
+              <a:srgbClr val="000000">
+                <a:alpha val="0"/>
+              </a:srgbClr>
+            </a:solidFill>
+            <a:prstDash val="solid"/>
+          </a:ln>
+        </p:spPr>
+        <p:txBody>
+          <a:bodyPr anchor="ctr"/>
+          <a:lstStyle/>
+          <a:p>
+            <a:pPr algn="l">
+              <a:defRPr sz="1650" b="1">
+                <a:solidFill>
+                  <a:srgbClr val="2D4A33"/>
+                </a:solidFill>
+              </a:defRPr>
+            </a:pPr>
+            <a:r>
+              <a:rPr sz="1650" b="1">
+                <a:solidFill>
+                  <a:srgbClr val="2D4A33"/>
+                </a:solidFill>
+              </a:rPr>
+              <a:t>流程</a:t>
+            </a:r>
+            <a:endParaRPr sz="1650" b="1">
+              <a:solidFill>
+                <a:srgbClr val="2D4A33"/>
+              </a:solidFill>
+            </a:endParaRPr>
+          </a:p>
+        </p:txBody>
+      </p:sp>
+      <p:sp>
+        <p:nvSpPr>
+          <p:cNvPr id="9" name="矩形 8"/>
+          <p:cNvSpPr>
+            <a:spLocks noGrp="1"/>
+          </p:cNvSpPr>
+          <p:nvPr/>
+        </p:nvSpPr>
+        <p:spPr>
+          <a:xfrm>
+            <a:off x="6595110" y="1990725"/>
+            <a:ext cx="4671060" cy="1076960"/>
+          </a:xfrm>
+          <a:prstGeom prst="rect">
+            <a:avLst/>
+          </a:prstGeom>
+          <a:solidFill>
+            <a:srgbClr val="000000">
+              <a:alpha val="0"/>
+            </a:srgbClr>
+          </a:solidFill>
+          <a:ln w="0">
+            <a:solidFill>
+              <a:srgbClr val="000000">
+                <a:alpha val="0"/>
+              </a:srgbClr>
+            </a:solidFill>
+            <a:prstDash val="solid"/>
+          </a:ln>
+        </p:spPr>
+        <p:txBody>
+          <a:bodyPr anchor="ctr"/>
+          <a:lstStyle/>
+          <a:p>
+            <a:pPr algn="l">
+              <a:defRPr sz="1350" b="0">
+                <a:solidFill>
+                  <a:srgbClr val="1F2D22"/>
+                </a:solidFill>
+              </a:defRPr>
+            </a:pPr>
+            <a:r>
+              <a:rPr lang="zh-CN" altLang="en-US" sz="1350" b="0">
+                <a:solidFill>
+                  <a:srgbClr val="1F2D22"/>
+                </a:solidFill>
+              </a:rPr>
+              <a:t>点击</a:t>
+            </a:r>
+            <a:r>
+              <a:rPr lang="en-US" altLang="zh-CN" sz="1350" b="0">
+                <a:solidFill>
+                  <a:srgbClr val="1F2D22"/>
+                </a:solidFill>
+              </a:rPr>
+              <a:t>"</a:t>
+            </a:r>
+            <a:r>
+              <a:rPr lang="zh-CN" altLang="en-US" sz="1350" b="0">
+                <a:solidFill>
+                  <a:srgbClr val="1F2D22"/>
+                </a:solidFill>
+              </a:rPr>
+              <a:t>价格</a:t>
+            </a:r>
+            <a:r>
+              <a:rPr lang="en-US" altLang="zh-CN" sz="1350" b="0">
+                <a:solidFill>
+                  <a:srgbClr val="1F2D22"/>
+                </a:solidFill>
+              </a:rPr>
+              <a:t>" </a:t>
+            </a:r>
+            <a:r>
+              <a:rPr lang="en-US" altLang="en-US" sz="1350" b="0">
+                <a:solidFill>
+                  <a:srgbClr val="1F2D22"/>
+                </a:solidFill>
+              </a:rPr>
+              <a:t>→</a:t>
+            </a:r>
+            <a:r>
+              <a:rPr lang="en-US" altLang="zh-CN" sz="1350" b="0">
+                <a:solidFill>
+                  <a:srgbClr val="1F2D22"/>
+                </a:solidFill>
+              </a:rPr>
+              <a:t> togglePriceSort() </a:t>
+            </a:r>
+            <a:r>
+              <a:rPr lang="zh-CN" altLang="en-US" sz="1350" b="0">
+                <a:solidFill>
+                  <a:srgbClr val="1F2D22"/>
+                </a:solidFill>
+              </a:rPr>
+              <a:t>设置</a:t>
+            </a:r>
+            <a:r>
+              <a:rPr lang="en-US" altLang="zh-CN" sz="1350" b="0">
+                <a:solidFill>
+                  <a:srgbClr val="1F2D22"/>
+                </a:solidFill>
+              </a:rPr>
+              <a:t> sortField='price' </a:t>
+            </a:r>
+            <a:r>
+              <a:rPr lang="zh-CN" altLang="en-US" sz="1350" b="0">
+                <a:solidFill>
+                  <a:srgbClr val="1F2D22"/>
+                </a:solidFill>
+              </a:rPr>
+              <a:t>和</a:t>
+            </a:r>
+            <a:r>
+              <a:rPr lang="en-US" altLang="zh-CN" sz="1350" b="0">
+                <a:solidFill>
+                  <a:srgbClr val="1F2D22"/>
+                </a:solidFill>
+              </a:rPr>
+              <a:t> sortOrder</a:t>
+            </a:r>
+            <a:endParaRPr lang="en-US" altLang="zh-CN" sz="1350" b="0">
+              <a:solidFill>
+                <a:srgbClr val="1F2D22"/>
+              </a:solidFill>
+            </a:endParaRPr>
+          </a:p>
+          <a:p>
+            <a:pPr algn="l">
+              <a:defRPr sz="1350" b="0">
+                <a:solidFill>
+                  <a:srgbClr val="1F2D22"/>
+                </a:solidFill>
+              </a:defRPr>
+            </a:pPr>
+            <a:r>
+              <a:rPr lang="en-US" altLang="en-US" sz="1350" b="0">
+                <a:solidFill>
+                  <a:srgbClr val="1F2D22"/>
+                </a:solidFill>
+              </a:rPr>
+              <a:t>→</a:t>
+            </a:r>
+            <a:r>
+              <a:rPr lang="en-US" altLang="zh-CN" sz="1350" b="0">
+                <a:solidFill>
+                  <a:srgbClr val="1F2D22"/>
+                </a:solidFill>
+              </a:rPr>
+              <a:t> </a:t>
+            </a:r>
+            <a:r>
+              <a:rPr lang="zh-CN" altLang="en-US" sz="1350" b="0">
+                <a:solidFill>
+                  <a:srgbClr val="1F2D22"/>
+                </a:solidFill>
+              </a:rPr>
+              <a:t>自动重新调用</a:t>
+            </a:r>
+            <a:r>
+              <a:rPr lang="en-US" altLang="zh-CN" sz="1350" b="0">
+                <a:solidFill>
+                  <a:srgbClr val="1F2D22"/>
+                </a:solidFill>
+              </a:rPr>
+              <a:t> searchPage()</a:t>
+            </a:r>
+            <a:r>
+              <a:rPr lang="zh-CN" altLang="en-US" sz="1350" b="0">
+                <a:solidFill>
+                  <a:srgbClr val="1F2D22"/>
+                </a:solidFill>
+              </a:rPr>
+              <a:t>，将排序参数传至后端</a:t>
+            </a:r>
+            <a:r>
+              <a:rPr lang="en-US" altLang="zh-CN" sz="1350" b="0">
+                <a:solidFill>
+                  <a:srgbClr val="1F2D22"/>
+                </a:solidFill>
+              </a:rPr>
+              <a:t> /query</a:t>
+            </a:r>
+            <a:endParaRPr lang="en-US" altLang="zh-CN" sz="1350" b="0">
+              <a:solidFill>
+                <a:srgbClr val="1F2D22"/>
+              </a:solidFill>
+            </a:endParaRPr>
+          </a:p>
+          <a:p>
+            <a:pPr algn="l">
+              <a:defRPr sz="1350" b="0">
+                <a:solidFill>
+                  <a:srgbClr val="1F2D22"/>
+                </a:solidFill>
+              </a:defRPr>
+            </a:pPr>
+            <a:r>
+              <a:rPr lang="en-US" altLang="en-US" sz="1350" b="0">
+                <a:solidFill>
+                  <a:srgbClr val="1F2D22"/>
+                </a:solidFill>
+              </a:rPr>
+              <a:t>→</a:t>
+            </a:r>
+            <a:r>
+              <a:rPr lang="en-US" altLang="zh-CN" sz="1350" b="0">
+                <a:solidFill>
+                  <a:srgbClr val="1F2D22"/>
+                </a:solidFill>
+              </a:rPr>
+              <a:t> ContentController </a:t>
+            </a:r>
+            <a:r>
+              <a:rPr lang="zh-CN" altLang="en-US" sz="1350" b="0">
+                <a:solidFill>
+                  <a:srgbClr val="1F2D22"/>
+                </a:solidFill>
+              </a:rPr>
+              <a:t>接收参数传给</a:t>
+            </a:r>
+            <a:r>
+              <a:rPr lang="en-US" altLang="zh-CN" sz="1350" b="0">
+                <a:solidFill>
+                  <a:srgbClr val="1F2D22"/>
+                </a:solidFill>
+              </a:rPr>
+              <a:t> ContentService</a:t>
+            </a:r>
+            <a:endParaRPr lang="en-US" altLang="zh-CN" sz="1350" b="0">
+              <a:solidFill>
+                <a:srgbClr val="1F2D22"/>
+              </a:solidFill>
+            </a:endParaRPr>
+          </a:p>
+          <a:p>
+            <a:pPr algn="l">
+              <a:defRPr sz="1350" b="0">
+                <a:solidFill>
+                  <a:srgbClr val="1F2D22"/>
+                </a:solidFill>
+              </a:defRPr>
+            </a:pPr>
+            <a:r>
+              <a:rPr lang="en-US" altLang="en-US" sz="1350" b="0">
+                <a:solidFill>
+                  <a:srgbClr val="1F2D22"/>
+                </a:solidFill>
+              </a:rPr>
+              <a:t>→</a:t>
+            </a:r>
+            <a:r>
+              <a:rPr lang="en-US" altLang="zh-CN" sz="1350" b="0">
+                <a:solidFill>
+                  <a:srgbClr val="1F2D22"/>
+                </a:solidFill>
+              </a:rPr>
+              <a:t> ES </a:t>
+            </a:r>
+            <a:r>
+              <a:rPr lang="zh-CN" altLang="en-US" sz="1350" b="0">
+                <a:solidFill>
+                  <a:srgbClr val="1F2D22"/>
+                </a:solidFill>
+              </a:rPr>
+              <a:t>查询返回结果后，</a:t>
+            </a:r>
+            <a:r>
+              <a:rPr lang="en-US" altLang="zh-CN" sz="1350" b="0">
+                <a:solidFill>
+                  <a:srgbClr val="1F2D22"/>
+                </a:solidFill>
+              </a:rPr>
+              <a:t>Java </a:t>
+            </a:r>
+            <a:r>
+              <a:rPr lang="zh-CN" altLang="en-US" sz="1350" b="0">
+                <a:solidFill>
+                  <a:srgbClr val="1F2D22"/>
+                </a:solidFill>
+              </a:rPr>
+              <a:t>端按价格字段排序</a:t>
+            </a:r>
+            <a:endParaRPr lang="zh-CN" altLang="en-US" sz="1350" b="0">
+              <a:solidFill>
+                <a:srgbClr val="1F2D22"/>
+              </a:solidFill>
+            </a:endParaRPr>
+          </a:p>
+          <a:p>
+            <a:pPr algn="l">
+              <a:defRPr sz="1350" b="0">
+                <a:solidFill>
+                  <a:srgbClr val="1F2D22"/>
+                </a:solidFill>
+              </a:defRPr>
+            </a:pPr>
+            <a:r>
+              <a:rPr lang="en-US" altLang="en-US" sz="1350" b="0">
+                <a:solidFill>
+                  <a:srgbClr val="1F2D22"/>
+                </a:solidFill>
+              </a:rPr>
+              <a:t>→</a:t>
+            </a:r>
+            <a:r>
+              <a:rPr lang="en-US" altLang="zh-CN" sz="1350" b="0">
+                <a:solidFill>
+                  <a:srgbClr val="1F2D22"/>
+                </a:solidFill>
+              </a:rPr>
+              <a:t> </a:t>
+            </a:r>
+            <a:r>
+              <a:rPr lang="zh-CN" altLang="en-US" sz="1350" b="0">
+                <a:solidFill>
+                  <a:srgbClr val="1F2D22"/>
+                </a:solidFill>
+              </a:rPr>
+              <a:t>排序结果返回前端，页面重新渲染</a:t>
+            </a:r>
+            <a:endParaRPr lang="zh-CN" altLang="en-US" sz="1350" b="0">
+              <a:solidFill>
+                <a:srgbClr val="1F2D22"/>
+              </a:solidFill>
+            </a:endParaRPr>
+          </a:p>
+        </p:txBody>
+      </p:sp>
+      <p:sp>
+        <p:nvSpPr>
+          <p:cNvPr id="10" name="矩形 9"/>
+          <p:cNvSpPr>
+            <a:spLocks noGrp="1"/>
+          </p:cNvSpPr>
+          <p:nvPr/>
+        </p:nvSpPr>
+        <p:spPr>
+          <a:xfrm>
+            <a:off x="2000250" y="3714750"/>
+            <a:ext cx="8191500" cy="1995170"/>
+          </a:xfrm>
+          <a:prstGeom prst="rect">
+            <a:avLst/>
+          </a:prstGeom>
+          <a:solidFill>
+            <a:srgbClr val="FFFFFF"/>
+          </a:solidFill>
+          <a:ln w="9525">
+            <a:solidFill>
+              <a:srgbClr val="C7D0C4"/>
+            </a:solidFill>
+            <a:prstDash val="solid"/>
+          </a:ln>
+        </p:spPr>
+      </p:sp>
+      <p:sp>
+        <p:nvSpPr>
+          <p:cNvPr id="11" name="矩形 10"/>
+          <p:cNvSpPr>
+            <a:spLocks noGrp="1"/>
+          </p:cNvSpPr>
+          <p:nvPr/>
+        </p:nvSpPr>
+        <p:spPr>
+          <a:xfrm>
+            <a:off x="2228850" y="3886200"/>
+            <a:ext cx="7734300" cy="323850"/>
+          </a:xfrm>
+          <a:prstGeom prst="rect">
+            <a:avLst/>
+          </a:prstGeom>
+          <a:solidFill>
+            <a:srgbClr val="000000">
+              <a:alpha val="0"/>
+            </a:srgbClr>
+          </a:solidFill>
+          <a:ln w="0">
+            <a:solidFill>
+              <a:srgbClr val="000000">
+                <a:alpha val="0"/>
+              </a:srgbClr>
+            </a:solidFill>
+            <a:prstDash val="solid"/>
+          </a:ln>
+        </p:spPr>
+        <p:txBody>
+          <a:bodyPr anchor="ctr"/>
+          <a:lstStyle/>
+          <a:p>
+            <a:pPr algn="l">
+              <a:defRPr sz="1650" b="1">
+                <a:solidFill>
+                  <a:srgbClr val="2D4A33"/>
+                </a:solidFill>
+              </a:defRPr>
+            </a:pPr>
+            <a:r>
+              <a:rPr sz="1650" b="1">
+                <a:solidFill>
+                  <a:srgbClr val="2D4A33"/>
+                </a:solidFill>
+              </a:rPr>
+              <a:t>结果</a:t>
+            </a:r>
+            <a:endParaRPr sz="1650" b="1">
+              <a:solidFill>
+                <a:srgbClr val="2D4A33"/>
+              </a:solidFill>
+            </a:endParaRPr>
+          </a:p>
+        </p:txBody>
+      </p:sp>
+      <p:sp>
+        <p:nvSpPr>
+          <p:cNvPr id="12" name="矩形 11"/>
+          <p:cNvSpPr>
+            <a:spLocks noGrp="1"/>
+          </p:cNvSpPr>
+          <p:nvPr/>
+        </p:nvSpPr>
+        <p:spPr>
+          <a:xfrm>
+            <a:off x="2146935" y="4324350"/>
+            <a:ext cx="7734300" cy="919480"/>
+          </a:xfrm>
+          <a:prstGeom prst="rect">
+            <a:avLst/>
+          </a:prstGeom>
+          <a:solidFill>
+            <a:srgbClr val="000000">
+              <a:alpha val="0"/>
+            </a:srgbClr>
+          </a:solidFill>
+          <a:ln w="0">
+            <a:solidFill>
+              <a:srgbClr val="000000">
+                <a:alpha val="0"/>
+              </a:srgbClr>
+            </a:solidFill>
+            <a:prstDash val="solid"/>
+          </a:ln>
+        </p:spPr>
+        <p:txBody>
+          <a:bodyPr anchor="ctr"/>
+          <a:lstStyle/>
+          <a:p>
+            <a:pPr algn="l">
+              <a:defRPr sz="1350" b="0">
+                <a:solidFill>
+                  <a:srgbClr val="1F2D22"/>
+                </a:solidFill>
+              </a:defRPr>
+            </a:pPr>
+            <a:r>
+              <a:rPr lang="zh-CN" altLang="en-US" sz="1350" b="0">
+                <a:solidFill>
+                  <a:srgbClr val="1F2D22"/>
+                </a:solidFill>
+              </a:rPr>
+              <a:t>支持价格升序</a:t>
+            </a:r>
+            <a:r>
+              <a:rPr lang="en-US" altLang="zh-CN" sz="1350" b="0">
+                <a:solidFill>
+                  <a:srgbClr val="1F2D22"/>
+                </a:solidFill>
+              </a:rPr>
+              <a:t> / </a:t>
+            </a:r>
+            <a:r>
+              <a:rPr lang="zh-CN" altLang="en-US" sz="1350" b="0">
+                <a:solidFill>
+                  <a:srgbClr val="1F2D22"/>
+                </a:solidFill>
+              </a:rPr>
+              <a:t>降序切换</a:t>
+            </a:r>
+            <a:endParaRPr lang="zh-CN" altLang="en-US" sz="1350" b="0">
+              <a:solidFill>
+                <a:srgbClr val="1F2D22"/>
+              </a:solidFill>
+            </a:endParaRPr>
+          </a:p>
+          <a:p>
+            <a:pPr algn="l">
+              <a:defRPr sz="1350" b="0">
+                <a:solidFill>
+                  <a:srgbClr val="1F2D22"/>
+                </a:solidFill>
+              </a:defRPr>
+            </a:pPr>
+            <a:r>
+              <a:rPr lang="zh-CN" altLang="en-US" sz="1350" b="0">
+                <a:solidFill>
+                  <a:srgbClr val="1F2D22"/>
+                </a:solidFill>
+              </a:rPr>
+              <a:t>价格字段含非数字符号时自动解析为数值再排序</a:t>
+            </a:r>
+            <a:endParaRPr lang="zh-CN" altLang="en-US" sz="1350" b="0">
+              <a:solidFill>
+                <a:srgbClr val="1F2D22"/>
+              </a:solidFill>
+            </a:endParaRPr>
+          </a:p>
+          <a:p>
+            <a:pPr algn="l">
+              <a:defRPr sz="1350" b="0">
+                <a:solidFill>
+                  <a:srgbClr val="1F2D22"/>
+                </a:solidFill>
+              </a:defRPr>
+            </a:pPr>
+            <a:r>
+              <a:rPr lang="zh-CN" altLang="en-US" sz="1350" b="0">
+                <a:solidFill>
+                  <a:srgbClr val="1F2D22"/>
+                </a:solidFill>
+              </a:rPr>
+              <a:t>排序在后端内存中完成，无需改动</a:t>
+            </a:r>
+            <a:r>
+              <a:rPr lang="en-US" altLang="zh-CN" sz="1350" b="0">
+                <a:solidFill>
+                  <a:srgbClr val="1F2D22"/>
+                </a:solidFill>
+              </a:rPr>
+              <a:t> ES </a:t>
+            </a:r>
+            <a:r>
+              <a:rPr lang="zh-CN" altLang="en-US" sz="1350" b="0">
+                <a:solidFill>
+                  <a:srgbClr val="1F2D22"/>
+                </a:solidFill>
+              </a:rPr>
+              <a:t>索引结构</a:t>
+            </a:r>
+            <a:endParaRPr lang="zh-CN" altLang="en-US" sz="1350" b="0">
+              <a:solidFill>
+                <a:srgbClr val="1F2D22"/>
+              </a:solidFill>
+            </a:endParaRPr>
+          </a:p>
+        </p:txBody>
+      </p:sp>
     </p:spTree>
-    <p:extLst>
-      <p:ext uri="{BB962C8B-B14F-4D97-AF65-F5344CB8AC3E}">
-        <p14:creationId xmlns:p14="http://schemas.microsoft.com/office/powerpoint/2010/main" val="2232598541"/>
-      </p:ext>
-    </p:extLst>
   </p:cSld>
   <p:clrMapOvr>
     <a:masterClrMapping/>
@@ -9284,13 +10298,7 @@
       </p:grpSpPr>
       <p:sp>
         <p:nvSpPr>
-          <p:cNvPr id="13" name="矩形 12">
-            <a:extLst>
-              <a:ext uri="{FF2B5EF4-FFF2-40B4-BE49-F238E27FC236}">
-                <a16:creationId xmlns:a16="http://schemas.microsoft.com/office/drawing/2014/main" id="{0AE95B23-90A2-47EB-9DB0-EF921EB2D2A6}"/>
-              </a:ext>
-            </a:extLst>
-          </p:cNvPr>
+          <p:cNvPr id="13" name="矩形 12"/>
           <p:cNvSpPr>
             <a:spLocks noGrp="1"/>
           </p:cNvSpPr>
@@ -9317,13 +10325,7 @@
       </p:sp>
       <p:sp>
         <p:nvSpPr>
-          <p:cNvPr id="2" name="矩形 1">
-            <a:extLst>
-              <a:ext uri="{FF2B5EF4-FFF2-40B4-BE49-F238E27FC236}">
-                <a16:creationId xmlns:a16="http://schemas.microsoft.com/office/drawing/2014/main" id="{6C42F653-EC31-48A4-A29A-2DDE93A0D539}"/>
-              </a:ext>
-            </a:extLst>
-          </p:cNvPr>
+          <p:cNvPr id="2" name="矩形 1"/>
           <p:cNvSpPr>
             <a:spLocks noGrp="1"/>
           </p:cNvSpPr>
@@ -9368,9 +10370,25 @@
                   <a:srgbClr val="2D4A33"/>
                 </a:solidFill>
               </a:rPr>
-              <a:t>李嘉轩</a:t>
-            </a:r>
-            <a:endParaRPr sz="2550" b="1" dirty="0">
+              <a:t>刘义群</a:t>
+            </a:r>
+            <a:r>
+              <a:rPr lang="en-US" altLang="zh-CN" sz="2550" b="1" dirty="0">
+                <a:solidFill>
+                  <a:srgbClr val="2D4A33"/>
+                </a:solidFill>
+              </a:rPr>
+              <a:t> </a:t>
+            </a:r>
+            <a:r>
+              <a:rPr lang="zh-CN" altLang="en-US" sz="2550" b="1" dirty="0">
+                <a:solidFill>
+                  <a:srgbClr val="2D4A33"/>
+                </a:solidFill>
+              </a:rPr>
+              <a:t>增加商品部分</a:t>
+            </a:r>
+            <a:endParaRPr lang="zh-CN" altLang="en-US" sz="2550" b="1" dirty="0">
               <a:solidFill>
                 <a:srgbClr val="2D4A33"/>
               </a:solidFill>
@@ -9380,13 +10398,7 @@
       </p:sp>
       <p:sp>
         <p:nvSpPr>
-          <p:cNvPr id="4" name="矩形 3">
-            <a:extLst>
-              <a:ext uri="{FF2B5EF4-FFF2-40B4-BE49-F238E27FC236}">
-                <a16:creationId xmlns:a16="http://schemas.microsoft.com/office/drawing/2014/main" id="{7BD7F060-279B-476B-ADD0-60F9D22D690F}"/>
-              </a:ext>
-            </a:extLst>
-          </p:cNvPr>
+          <p:cNvPr id="7" name="矩形 6"/>
           <p:cNvSpPr>
             <a:spLocks noGrp="1"/>
           </p:cNvSpPr>
@@ -9394,8 +10406,8 @@
         </p:nvSpPr>
         <p:spPr>
           <a:xfrm>
-            <a:off x="1498600" y="1481665"/>
-            <a:ext cx="9465733" cy="2057401"/>
+            <a:off x="3295015" y="1143000"/>
+            <a:ext cx="5144135" cy="2091055"/>
           </a:xfrm>
           <a:prstGeom prst="rect">
             <a:avLst/>
@@ -9413,13 +10425,7 @@
       </p:sp>
       <p:sp>
         <p:nvSpPr>
-          <p:cNvPr id="5" name="矩形 4">
-            <a:extLst>
-              <a:ext uri="{FF2B5EF4-FFF2-40B4-BE49-F238E27FC236}">
-                <a16:creationId xmlns:a16="http://schemas.microsoft.com/office/drawing/2014/main" id="{B5B9DCD3-3DCB-492D-A18F-7F83A194A750}"/>
-              </a:ext>
-            </a:extLst>
-          </p:cNvPr>
+          <p:cNvPr id="8" name="矩形 7"/>
           <p:cNvSpPr>
             <a:spLocks noGrp="1"/>
           </p:cNvSpPr>
@@ -9427,7 +10433,7 @@
         </p:nvSpPr>
         <p:spPr>
           <a:xfrm>
-            <a:off x="1634067" y="1678782"/>
+            <a:off x="3543935" y="1238885"/>
             <a:ext cx="4305300" cy="323850"/>
           </a:xfrm>
           <a:prstGeom prst="rect">
@@ -9459,14 +10465,14 @@
               </a:defRPr>
             </a:pPr>
             <a:r>
-              <a:rPr lang="zh-CN" altLang="en-US" sz="3200" b="1" dirty="0">
+              <a:rPr sz="1650" b="1">
                 <a:solidFill>
                   <a:srgbClr val="2D4A33"/>
                 </a:solidFill>
               </a:rPr>
-              <a:t>文件解析</a:t>
-            </a:r>
-            <a:endParaRPr sz="3200" b="1" dirty="0">
+              <a:t>流程</a:t>
+            </a:r>
+            <a:endParaRPr sz="1650" b="1">
               <a:solidFill>
                 <a:srgbClr val="2D4A33"/>
               </a:solidFill>
@@ -9476,13 +10482,7 @@
       </p:sp>
       <p:sp>
         <p:nvSpPr>
-          <p:cNvPr id="6" name="矩形 5">
-            <a:extLst>
-              <a:ext uri="{FF2B5EF4-FFF2-40B4-BE49-F238E27FC236}">
-                <a16:creationId xmlns:a16="http://schemas.microsoft.com/office/drawing/2014/main" id="{47E76C44-57B2-4BCD-969D-2F43D77383C3}"/>
-              </a:ext>
-            </a:extLst>
-          </p:cNvPr>
+          <p:cNvPr id="9" name="矩形 8"/>
           <p:cNvSpPr>
             <a:spLocks noGrp="1"/>
           </p:cNvSpPr>
@@ -9490,8 +10490,8 @@
         </p:nvSpPr>
         <p:spPr>
           <a:xfrm>
-            <a:off x="1634067" y="2091531"/>
-            <a:ext cx="9059333" cy="1358635"/>
+            <a:off x="3604260" y="1753870"/>
+            <a:ext cx="4671060" cy="1076960"/>
           </a:xfrm>
           <a:prstGeom prst="rect">
             <a:avLst/>
@@ -9522,202 +10522,142 @@
               </a:defRPr>
             </a:pPr>
             <a:r>
-              <a:rPr lang="zh-CN" altLang="en-US" sz="2000" dirty="0">
-                <a:solidFill>
-                  <a:srgbClr val="1F2D22"/>
-                </a:solidFill>
-                <a:latin typeface="ui-monospace"/>
-              </a:rPr>
-              <a:t>新增了 </a:t>
-            </a:r>
-            <a:r>
-              <a:rPr lang="en-US" altLang="zh-CN" sz="2000" dirty="0" err="1">
-                <a:solidFill>
-                  <a:srgbClr val="1F2D22"/>
-                </a:solidFill>
-                <a:latin typeface="ui-monospace"/>
-              </a:rPr>
-              <a:t>structured_blocks</a:t>
-            </a:r>
-            <a:r>
-              <a:rPr lang="en-US" altLang="zh-CN" sz="2000" dirty="0">
-                <a:solidFill>
-                  <a:srgbClr val="1F2D22"/>
-                </a:solidFill>
-                <a:latin typeface="ui-monospace"/>
-              </a:rPr>
-              <a:t> </a:t>
-            </a:r>
-            <a:r>
-              <a:rPr lang="zh-CN" altLang="en-US" sz="2000" dirty="0">
-                <a:solidFill>
-                  <a:srgbClr val="1F2D22"/>
-                </a:solidFill>
-                <a:latin typeface="ui-monospace"/>
-              </a:rPr>
-              <a:t>解析模式，把论文 </a:t>
-            </a:r>
-            <a:r>
-              <a:rPr lang="en-US" altLang="zh-CN" sz="2000" dirty="0">
-                <a:solidFill>
-                  <a:srgbClr val="1F2D22"/>
-                </a:solidFill>
-                <a:latin typeface="ui-monospace"/>
-              </a:rPr>
-              <a:t>PDF </a:t>
-            </a:r>
-            <a:r>
-              <a:rPr lang="zh-CN" altLang="en-US" sz="2000" dirty="0">
-                <a:solidFill>
-                  <a:srgbClr val="1F2D22"/>
-                </a:solidFill>
-                <a:latin typeface="ui-monospace"/>
-              </a:rPr>
-              <a:t>解析成统一 </a:t>
-            </a:r>
-            <a:r>
-              <a:rPr lang="en-US" altLang="zh-CN" sz="2000" dirty="0">
-                <a:solidFill>
-                  <a:srgbClr val="1F2D22"/>
-                </a:solidFill>
-                <a:latin typeface="ui-monospace"/>
-              </a:rPr>
-              <a:t>block </a:t>
-            </a:r>
-            <a:r>
-              <a:rPr lang="zh-CN" altLang="en-US" sz="2000" dirty="0">
-                <a:solidFill>
-                  <a:srgbClr val="1F2D22"/>
-                </a:solidFill>
-                <a:latin typeface="ui-monospace"/>
-              </a:rPr>
-              <a:t>结构</a:t>
-            </a:r>
-            <a:endParaRPr lang="en-US" altLang="zh-CN" sz="2000" dirty="0">
-              <a:solidFill>
-                <a:srgbClr val="1F2D22"/>
-              </a:solidFill>
-              <a:latin typeface="ui-monospace"/>
-            </a:endParaRPr>
-          </a:p>
-          <a:p>
-            <a:pPr algn="l"/>
-            <a:r>
-              <a:rPr lang="zh-CN" altLang="en-US" sz="2000" dirty="0">
-                <a:solidFill>
-                  <a:srgbClr val="1F2D22"/>
-                </a:solidFill>
-                <a:latin typeface="ui-monospace"/>
-              </a:rPr>
-              <a:t>基于 </a:t>
-            </a:r>
-            <a:r>
-              <a:rPr lang="en-US" altLang="zh-CN" sz="2000" dirty="0" err="1">
-                <a:solidFill>
-                  <a:srgbClr val="1F2D22"/>
-                </a:solidFill>
-                <a:latin typeface="ui-monospace"/>
-              </a:rPr>
-              <a:t>PyMuPDF</a:t>
-            </a:r>
-            <a:r>
-              <a:rPr lang="en-US" altLang="zh-CN" sz="2000" dirty="0">
-                <a:solidFill>
-                  <a:srgbClr val="1F2D22"/>
-                </a:solidFill>
-                <a:latin typeface="ui-monospace"/>
-              </a:rPr>
-              <a:t> </a:t>
-            </a:r>
-            <a:r>
-              <a:rPr lang="zh-CN" altLang="en-US" sz="2000" dirty="0">
-                <a:solidFill>
-                  <a:srgbClr val="1F2D22"/>
-                </a:solidFill>
-                <a:latin typeface="ui-monospace"/>
-              </a:rPr>
-              <a:t>提取版面块、字号、粗体、</a:t>
-            </a:r>
-            <a:r>
-              <a:rPr lang="en-US" altLang="zh-CN" sz="2000" dirty="0" err="1">
-                <a:solidFill>
-                  <a:srgbClr val="1F2D22"/>
-                </a:solidFill>
-                <a:latin typeface="ui-monospace"/>
-              </a:rPr>
-              <a:t>bbox</a:t>
-            </a:r>
-            <a:r>
-              <a:rPr lang="zh-CN" altLang="en-US" sz="2000" dirty="0">
-                <a:solidFill>
-                  <a:srgbClr val="1F2D22"/>
-                </a:solidFill>
-                <a:latin typeface="ui-monospace"/>
-              </a:rPr>
-              <a:t>、列信息</a:t>
-            </a:r>
-          </a:p>
-          <a:p>
-            <a:pPr>
-              <a:defRPr sz="1350" b="0">
-                <a:solidFill>
-                  <a:srgbClr val="1F2D22"/>
-                </a:solidFill>
-              </a:defRPr>
-            </a:pPr>
-            <a:r>
-              <a:rPr lang="zh-CN" altLang="en-US" sz="2000" dirty="0">
-                <a:solidFill>
-                  <a:srgbClr val="1F2D22"/>
-                </a:solidFill>
-                <a:latin typeface="ui-monospace"/>
-              </a:rPr>
-              <a:t>过滤重复页眉页脚噪声，精确分类为正确的</a:t>
-            </a:r>
-            <a:r>
-              <a:rPr lang="en-US" altLang="zh-CN" sz="2000" dirty="0">
-                <a:solidFill>
-                  <a:srgbClr val="1F2D22"/>
-                </a:solidFill>
-                <a:latin typeface="ui-monospace"/>
-              </a:rPr>
-              <a:t>block</a:t>
-            </a:r>
-            <a:r>
-              <a:rPr lang="zh-CN" altLang="en-US" sz="2000" dirty="0">
-                <a:solidFill>
-                  <a:srgbClr val="1F2D22"/>
-                </a:solidFill>
-                <a:latin typeface="ui-monospace"/>
-              </a:rPr>
-              <a:t>类别</a:t>
-            </a:r>
-          </a:p>
-          <a:p>
-            <a:pPr algn="l">
-              <a:defRPr sz="1350" b="0">
-                <a:solidFill>
-                  <a:srgbClr val="1F2D22"/>
-                </a:solidFill>
-              </a:defRPr>
-            </a:pPr>
-            <a:endParaRPr sz="1350" b="0" dirty="0">
+              <a:rPr lang="zh-CN" altLang="en-US" sz="1350" b="0">
+                <a:solidFill>
+                  <a:srgbClr val="1F2D22"/>
+                </a:solidFill>
+              </a:rPr>
+              <a:t>增加</a:t>
+            </a:r>
+            <a:r>
+              <a:rPr lang="en-US" altLang="zh-CN" sz="1350" b="0">
+                <a:solidFill>
+                  <a:srgbClr val="1F2D22"/>
+                </a:solidFill>
+              </a:rPr>
+              <a:t>“</a:t>
+            </a:r>
+            <a:r>
+              <a:rPr lang="zh-CN" altLang="en-US" sz="1350" b="0">
+                <a:solidFill>
+                  <a:srgbClr val="1F2D22"/>
+                </a:solidFill>
+              </a:rPr>
+              <a:t>高数</a:t>
+            </a:r>
+            <a:r>
+              <a:rPr lang="en-US" altLang="zh-CN" sz="1350" b="0">
+                <a:solidFill>
+                  <a:srgbClr val="1F2D22"/>
+                </a:solidFill>
+              </a:rPr>
+              <a:t>”“</a:t>
+            </a:r>
+            <a:r>
+              <a:rPr lang="zh-CN" altLang="en-US" sz="1350" b="0">
+                <a:solidFill>
+                  <a:srgbClr val="1F2D22"/>
+                </a:solidFill>
+              </a:rPr>
+              <a:t>大学英语</a:t>
+            </a:r>
+            <a:r>
+              <a:rPr lang="en-US" altLang="zh-CN" sz="1350" b="0">
+                <a:solidFill>
+                  <a:srgbClr val="1F2D22"/>
+                </a:solidFill>
+              </a:rPr>
+              <a:t>”</a:t>
+            </a:r>
+            <a:r>
+              <a:rPr lang="zh-CN" altLang="en-US" sz="1350" b="0">
+                <a:solidFill>
+                  <a:srgbClr val="1F2D22"/>
+                </a:solidFill>
+              </a:rPr>
+              <a:t>相关的书籍数据到老师提供的</a:t>
+            </a:r>
+            <a:r>
+              <a:rPr lang="en-US" altLang="zh-CN" sz="1350" b="0">
+                <a:solidFill>
+                  <a:srgbClr val="1F2D22"/>
+                </a:solidFill>
+              </a:rPr>
+              <a:t>“jddata.json”</a:t>
+            </a:r>
+            <a:r>
+              <a:rPr lang="zh-CN" altLang="en-US" sz="1350" b="0">
+                <a:solidFill>
+                  <a:srgbClr val="1F2D22"/>
+                </a:solidFill>
+              </a:rPr>
+              <a:t>中</a:t>
+            </a:r>
+            <a:endParaRPr lang="zh-CN" altLang="en-US" sz="1350" b="0">
               <a:solidFill>
                 <a:srgbClr val="1F2D22"/>
               </a:solidFill>
             </a:endParaRPr>
           </a:p>
-        </p:txBody>
-      </p:sp>
-      <p:sp>
-        <p:nvSpPr>
-          <p:cNvPr id="7" name="矩形 6">
-            <a:extLst>
-              <a:ext uri="{FF2B5EF4-FFF2-40B4-BE49-F238E27FC236}">
-                <a16:creationId xmlns:a16="http://schemas.microsoft.com/office/drawing/2014/main" id="{34797A82-E8A1-4FD5-A480-1468A75DCB41}"/>
-              </a:ext>
-            </a:extLst>
-          </p:cNvPr>
+          <a:p>
+            <a:pPr algn="l">
+              <a:defRPr sz="1350" b="0">
+                <a:solidFill>
+                  <a:srgbClr val="1F2D22"/>
+                </a:solidFill>
+              </a:defRPr>
+            </a:pPr>
+            <a:r>
+              <a:rPr lang="zh-CN" altLang="en-US" sz="1350" b="0">
+                <a:solidFill>
+                  <a:srgbClr val="1F2D22"/>
+                </a:solidFill>
+              </a:rPr>
+              <a:t>通过</a:t>
+            </a:r>
+            <a:r>
+              <a:rPr lang="en-US" altLang="zh-CN" sz="1350" b="0">
+                <a:solidFill>
+                  <a:srgbClr val="1F2D22"/>
+                </a:solidFill>
+              </a:rPr>
+              <a:t>src\main\java\com\example\demo\EsJDDoc.java</a:t>
+            </a:r>
+            <a:r>
+              <a:rPr lang="zh-CN" altLang="en-US" sz="1350" b="0">
+                <a:solidFill>
+                  <a:srgbClr val="1F2D22"/>
+                </a:solidFill>
+              </a:rPr>
+              <a:t>代码将数据写入</a:t>
+            </a:r>
+            <a:r>
+              <a:rPr lang="en-US" altLang="zh-CN" sz="1350" b="0">
+                <a:solidFill>
+                  <a:srgbClr val="1F2D22"/>
+                </a:solidFill>
+              </a:rPr>
+              <a:t>ES</a:t>
+            </a:r>
+            <a:r>
+              <a:rPr lang="zh-CN" altLang="en-US" sz="1350" b="0">
+                <a:solidFill>
+                  <a:srgbClr val="1F2D22"/>
+                </a:solidFill>
+              </a:rPr>
+              <a:t>数据库中</a:t>
+            </a:r>
+            <a:endParaRPr lang="zh-CN" altLang="en-US" sz="1350" b="0">
+              <a:solidFill>
+                <a:srgbClr val="1F2D22"/>
+              </a:solidFill>
+            </a:endParaRPr>
+          </a:p>
+        </p:txBody>
+      </p:sp>
+      <p:sp>
+        <p:nvSpPr>
+          <p:cNvPr id="10" name="矩形 9"/>
           <p:cNvSpPr>
             <a:spLocks noGrp="1"/>
           </p:cNvSpPr>
@@ -9725,8 +10665,8 @@
         </p:nvSpPr>
         <p:spPr>
           <a:xfrm>
-            <a:off x="1498600" y="4171950"/>
-            <a:ext cx="9465733" cy="1619250"/>
+            <a:off x="3295650" y="3836670"/>
+            <a:ext cx="5143500" cy="1873250"/>
           </a:xfrm>
           <a:prstGeom prst="rect">
             <a:avLst/>
@@ -9744,22 +10684,20 @@
       </p:sp>
       <p:sp>
         <p:nvSpPr>
-          <p:cNvPr id="8" name="矩形 7">
-            <a:extLst>
-              <a:ext uri="{FF2B5EF4-FFF2-40B4-BE49-F238E27FC236}">
-                <a16:creationId xmlns:a16="http://schemas.microsoft.com/office/drawing/2014/main" id="{CAF760D5-7BD6-4703-9C53-D0A2A5E3F7A2}"/>
-              </a:ext>
-            </a:extLst>
-          </p:cNvPr>
-          <p:cNvSpPr>
-            <a:spLocks noGrp="1"/>
-          </p:cNvSpPr>
-          <p:nvPr/>
-        </p:nvSpPr>
-        <p:spPr>
-          <a:xfrm>
-            <a:off x="1634067" y="4362450"/>
-            <a:ext cx="4305300" cy="323850"/>
+          <p:cNvPr id="11" name="矩形 10"/>
+          <p:cNvSpPr>
+            <a:spLocks noGrp="1"/>
+          </p:cNvSpPr>
+          <p:nvPr>
+            <p:custDataLst>
+              <p:tags r:id="rId1"/>
+            </p:custDataLst>
+          </p:nvPr>
+        </p:nvSpPr>
+        <p:spPr>
+          <a:xfrm>
+            <a:off x="3604260" y="3968115"/>
+            <a:ext cx="6358890" cy="241935"/>
           </a:xfrm>
           <a:prstGeom prst="rect">
             <a:avLst/>
@@ -9790,14 +10728,14 @@
               </a:defRPr>
             </a:pPr>
             <a:r>
-              <a:rPr lang="zh-CN" altLang="en-US" sz="3200" b="1" dirty="0">
+              <a:rPr sz="1650" b="1">
                 <a:solidFill>
                   <a:srgbClr val="2D4A33"/>
                 </a:solidFill>
               </a:rPr>
-              <a:t>知识分块</a:t>
-            </a:r>
-            <a:endParaRPr sz="3200" b="1" dirty="0">
+              <a:t>结果</a:t>
+            </a:r>
+            <a:endParaRPr sz="1650" b="1">
               <a:solidFill>
                 <a:srgbClr val="2D4A33"/>
               </a:solidFill>
@@ -9807,22 +10745,20 @@
       </p:sp>
       <p:sp>
         <p:nvSpPr>
-          <p:cNvPr id="9" name="矩形 8">
-            <a:extLst>
-              <a:ext uri="{FF2B5EF4-FFF2-40B4-BE49-F238E27FC236}">
-                <a16:creationId xmlns:a16="http://schemas.microsoft.com/office/drawing/2014/main" id="{78ECD07B-701D-4861-812E-B364FA3E3C92}"/>
-              </a:ext>
-            </a:extLst>
-          </p:cNvPr>
-          <p:cNvSpPr>
-            <a:spLocks noGrp="1"/>
-          </p:cNvSpPr>
-          <p:nvPr/>
-        </p:nvSpPr>
-        <p:spPr>
-          <a:xfrm>
-            <a:off x="1634067" y="4677833"/>
-            <a:ext cx="9330266" cy="977900"/>
+          <p:cNvPr id="12" name="矩形 11"/>
+          <p:cNvSpPr>
+            <a:spLocks noGrp="1"/>
+          </p:cNvSpPr>
+          <p:nvPr>
+            <p:custDataLst>
+              <p:tags r:id="rId2"/>
+            </p:custDataLst>
+          </p:nvPr>
+        </p:nvSpPr>
+        <p:spPr>
+          <a:xfrm>
+            <a:off x="3604895" y="4514850"/>
+            <a:ext cx="4669790" cy="728980"/>
           </a:xfrm>
           <a:prstGeom prst="rect">
             <a:avLst/>
@@ -9845,7 +10781,7 @@
           <a:bodyPr anchor="ctr"/>
           <a:lstStyle/>
           <a:p>
-            <a:pPr>
+            <a:pPr algn="l">
               <a:defRPr sz="1350" b="0">
                 <a:solidFill>
                   <a:srgbClr val="1F2D22"/>
@@ -9853,116 +10789,38 @@
               </a:defRPr>
             </a:pPr>
             <a:r>
-              <a:rPr lang="zh-CN" altLang="en-US" sz="2000" dirty="0">
-                <a:solidFill>
-                  <a:srgbClr val="1F2D22"/>
-                </a:solidFill>
-                <a:latin typeface="ui-monospace"/>
-              </a:rPr>
-              <a:t>按解析块分块：基本一个结构块生成一个 </a:t>
-            </a:r>
-            <a:r>
-              <a:rPr lang="en-US" altLang="zh-CN" sz="2000" dirty="0">
-                <a:solidFill>
-                  <a:srgbClr val="1F2D22"/>
-                </a:solidFill>
-                <a:latin typeface="ui-monospace"/>
-              </a:rPr>
-              <a:t>chunk</a:t>
-            </a:r>
-          </a:p>
-          <a:p>
-            <a:pPr algn="l"/>
-            <a:r>
-              <a:rPr lang="zh-CN" altLang="en-US" sz="2000" dirty="0">
-                <a:solidFill>
-                  <a:srgbClr val="1F2D22"/>
-                </a:solidFill>
-                <a:latin typeface="ui-monospace"/>
-              </a:rPr>
-              <a:t>按章节分块：先按 </a:t>
-            </a:r>
-            <a:r>
-              <a:rPr lang="en-US" altLang="zh-CN" sz="2000" dirty="0" err="1">
-                <a:solidFill>
-                  <a:srgbClr val="1F2D22"/>
-                </a:solidFill>
-                <a:latin typeface="ui-monospace"/>
-              </a:rPr>
-              <a:t>section_path</a:t>
-            </a:r>
-            <a:r>
-              <a:rPr lang="en-US" altLang="zh-CN" sz="2000" dirty="0">
-                <a:solidFill>
-                  <a:srgbClr val="1F2D22"/>
-                </a:solidFill>
-                <a:latin typeface="ui-monospace"/>
-              </a:rPr>
-              <a:t> </a:t>
-            </a:r>
-            <a:r>
-              <a:rPr lang="zh-CN" altLang="en-US" sz="2000" dirty="0">
-                <a:solidFill>
-                  <a:srgbClr val="1F2D22"/>
-                </a:solidFill>
-                <a:latin typeface="ui-monospace"/>
-              </a:rPr>
-              <a:t>聚合同章节 </a:t>
-            </a:r>
-            <a:r>
-              <a:rPr lang="en-US" altLang="zh-CN" sz="2000" dirty="0">
-                <a:solidFill>
-                  <a:srgbClr val="1F2D22"/>
-                </a:solidFill>
-                <a:latin typeface="ui-monospace"/>
-              </a:rPr>
-              <a:t>block</a:t>
-            </a:r>
-            <a:r>
-              <a:rPr lang="zh-CN" altLang="en-US" sz="2000" dirty="0">
-                <a:solidFill>
-                  <a:srgbClr val="1F2D22"/>
-                </a:solidFill>
-                <a:latin typeface="ui-monospace"/>
-              </a:rPr>
-              <a:t>，再按 </a:t>
-            </a:r>
-            <a:r>
-              <a:rPr lang="en-US" altLang="zh-CN" sz="2000" dirty="0" err="1">
-                <a:solidFill>
-                  <a:srgbClr val="1F2D22"/>
-                </a:solidFill>
-                <a:latin typeface="ui-monospace"/>
-              </a:rPr>
-              <a:t>chunk_size</a:t>
-            </a:r>
-            <a:r>
-              <a:rPr lang="en-US" altLang="zh-CN" sz="2000" dirty="0">
-                <a:solidFill>
-                  <a:srgbClr val="1F2D22"/>
-                </a:solidFill>
-                <a:latin typeface="ui-monospace"/>
-              </a:rPr>
-              <a:t> </a:t>
-            </a:r>
-            <a:r>
-              <a:rPr lang="zh-CN" altLang="en-US" sz="2000" dirty="0">
-                <a:solidFill>
-                  <a:srgbClr val="1F2D22"/>
-                </a:solidFill>
-                <a:latin typeface="ui-monospace"/>
-              </a:rPr>
-              <a:t>做递归切分</a:t>
-            </a:r>
+              <a:rPr lang="zh-CN" sz="1350" b="0">
+                <a:solidFill>
+                  <a:srgbClr val="1F2D22"/>
+                </a:solidFill>
+              </a:rPr>
+              <a:t>实现了增加两个关键词的商品到</a:t>
+            </a:r>
+            <a:r>
+              <a:rPr lang="en-US" altLang="zh-CN" sz="1350" b="0">
+                <a:solidFill>
+                  <a:srgbClr val="1F2D22"/>
+                </a:solidFill>
+              </a:rPr>
+              <a:t>ES</a:t>
+            </a:r>
+            <a:r>
+              <a:rPr lang="zh-CN" altLang="en-US" sz="1350" b="0">
+                <a:solidFill>
+                  <a:srgbClr val="1F2D22"/>
+                </a:solidFill>
+              </a:rPr>
+              <a:t>的功能，并且可以通过搜索引擎查询到</a:t>
+            </a:r>
+            <a:endParaRPr lang="zh-CN" altLang="en-US" sz="1350" b="0">
+              <a:solidFill>
+                <a:srgbClr val="1F2D22"/>
+              </a:solidFill>
+            </a:endParaRPr>
           </a:p>
         </p:txBody>
       </p:sp>
     </p:spTree>
-    <p:extLst>
-      <p:ext uri="{BB962C8B-B14F-4D97-AF65-F5344CB8AC3E}">
-        <p14:creationId xmlns:p14="http://schemas.microsoft.com/office/powerpoint/2010/main" val="1941770515"/>
-      </p:ext>
-    </p:extLst>
   </p:cSld>
   <p:clrMapOvr>
     <a:masterClrMapping/>
@@ -9997,13 +10855,7 @@
       </p:grpSpPr>
       <p:sp>
         <p:nvSpPr>
-          <p:cNvPr id="11" name="文本框 10">
-            <a:extLst>
-              <a:ext uri="{FF2B5EF4-FFF2-40B4-BE49-F238E27FC236}">
-                <a16:creationId xmlns:a16="http://schemas.microsoft.com/office/drawing/2014/main" id="{642171A4-C23A-4145-BED1-2E8834D0E5B1}"/>
-              </a:ext>
-            </a:extLst>
-          </p:cNvPr>
+          <p:cNvPr id="11" name="文本框 10"/>
           <p:cNvSpPr>
             <a:spLocks noGrp="1"/>
           </p:cNvSpPr>
@@ -10039,7 +10891,6 @@
               <a:buSzTx/>
               <a:buFontTx/>
               <a:buNone/>
-              <a:tabLst/>
               <a:defRPr/>
             </a:pPr>
             <a:r>
@@ -10053,28 +10904,21 @@
                 <a:effectLst/>
                 <a:uLnTx/>
                 <a:uFillTx/>
-                <a:latin typeface="Arial"/>
-                <a:ea typeface="STZhongsong"/>
+                <a:latin typeface="Arial" panose="020B0604020202020204"/>
+                <a:ea typeface="华文中宋" panose="02010600040101010101" charset="-122"/>
                 <a:cs typeface="+mn-cs"/>
               </a:rPr>
               <a:t>0</a:t>
             </a:r>
             <a:r>
-              <a:rPr kumimoji="0" lang="en-US" sz="13800" b="0" i="0" u="none" strike="noStrike" kern="1200" cap="none" spc="0" normalizeH="0" baseline="0" noProof="0" dirty="0">
-                <a:ln>
-                  <a:noFill/>
-                </a:ln>
+              <a:rPr lang="en-US" sz="13800" dirty="0">
                 <a:solidFill>
                   <a:srgbClr val="F5F4F9"/>
                 </a:solidFill>
-                <a:effectLst/>
-                <a:uLnTx/>
-                <a:uFillTx/>
-                <a:latin typeface="Arial"/>
-                <a:ea typeface="STZhongsong"/>
-                <a:cs typeface="+mn-cs"/>
-              </a:rPr>
-              <a:t>5</a:t>
+                <a:latin typeface="Arial" panose="020B0604020202020204"/>
+                <a:ea typeface="华文中宋" panose="02010600040101010101" charset="-122"/>
+              </a:rPr>
+              <a:t>4</a:t>
             </a:r>
             <a:endParaRPr kumimoji="0" sz="13800" b="0" i="0" u="none" strike="noStrike" kern="1200" cap="none" spc="0" normalizeH="0" baseline="0" noProof="0" dirty="0">
               <a:ln>
@@ -10086,8 +10930,8 @@
               <a:effectLst/>
               <a:uLnTx/>
               <a:uFillTx/>
-              <a:latin typeface="Arial"/>
-              <a:ea typeface="STZhongsong"/>
+              <a:latin typeface="Arial" panose="020B0604020202020204"/>
+              <a:ea typeface="华文中宋" panose="02010600040101010101" charset="-122"/>
               <a:cs typeface="+mn-cs"/>
             </a:endParaRPr>
           </a:p>
@@ -10095,13 +10939,7 @@
       </p:sp>
       <p:sp>
         <p:nvSpPr>
-          <p:cNvPr id="13" name="矩形 12">
-            <a:extLst>
-              <a:ext uri="{FF2B5EF4-FFF2-40B4-BE49-F238E27FC236}">
-                <a16:creationId xmlns:a16="http://schemas.microsoft.com/office/drawing/2014/main" id="{638E2919-D9D9-4496-93DC-FD75812F9CF1}"/>
-              </a:ext>
-            </a:extLst>
-          </p:cNvPr>
+          <p:cNvPr id="13" name="矩形 12"/>
           <p:cNvSpPr>
             <a:spLocks noGrp="1"/>
           </p:cNvSpPr>
@@ -10109,8 +10947,8 @@
         </p:nvSpPr>
         <p:spPr>
           <a:xfrm>
-            <a:off x="6293290" y="2685166"/>
-            <a:ext cx="2339103" cy="923330"/>
+            <a:off x="6331761" y="2685166"/>
+            <a:ext cx="2262159" cy="923330"/>
           </a:xfrm>
           <a:prstGeom prst="rect">
             <a:avLst/>
@@ -10136,18 +10974,24 @@
               <a:buSzTx/>
               <a:buFontTx/>
               <a:buNone/>
-              <a:tabLst/>
               <a:defRPr/>
             </a:pPr>
             <a:r>
-              <a:rPr lang="zh-CN" altLang="en-US" sz="5400" b="1" dirty="0">
+              <a:rPr kumimoji="0" lang="zh-CN" altLang="en-US" sz="5400" b="1" i="0" u="none" strike="noStrike" kern="1200" cap="none" spc="0" normalizeH="0" baseline="0" noProof="0" dirty="0">
+                <a:ln>
+                  <a:noFill/>
+                </a:ln>
                 <a:solidFill>
                   <a:prstClr val="white"/>
                 </a:solidFill>
-                <a:latin typeface="Arial"/>
-                <a:ea typeface="STZhongsong"/>
-              </a:rPr>
-              <a:t>唐熙雷</a:t>
+                <a:effectLst/>
+                <a:uLnTx/>
+                <a:uFillTx/>
+                <a:latin typeface="Arial" panose="020B0604020202020204"/>
+                <a:ea typeface="华文中宋" panose="02010600040101010101" charset="-122"/>
+                <a:cs typeface="+mn-cs"/>
+              </a:rPr>
+              <a:t>李嘉轩</a:t>
             </a:r>
             <a:endParaRPr kumimoji="0" sz="5400" b="1" i="0" u="none" strike="noStrike" kern="1200" cap="none" spc="0" normalizeH="0" baseline="0" noProof="0" dirty="0">
               <a:ln>
@@ -10159,24 +11003,31 @@
               <a:effectLst/>
               <a:uLnTx/>
               <a:uFillTx/>
-              <a:latin typeface="Arial"/>
-              <a:ea typeface="STZhongsong"/>
+              <a:latin typeface="Arial" panose="020B0604020202020204"/>
+              <a:ea typeface="华文中宋" panose="02010600040101010101" charset="-122"/>
               <a:cs typeface="+mn-cs"/>
             </a:endParaRPr>
           </a:p>
         </p:txBody>
       </p:sp>
     </p:spTree>
-    <p:extLst>
-      <p:ext uri="{BB962C8B-B14F-4D97-AF65-F5344CB8AC3E}">
-        <p14:creationId xmlns:p14="http://schemas.microsoft.com/office/powerpoint/2010/main" val="969448289"/>
-      </p:ext>
-    </p:extLst>
   </p:cSld>
   <p:clrMapOvr>
     <a:masterClrMapping/>
   </p:clrMapOvr>
 </p:sld>
+</file>
+
+<file path=ppt/tags/tag1.xml><?xml version="1.0" encoding="utf-8"?>
+<p:tagLst xmlns:p="http://schemas.openxmlformats.org/presentationml/2006/main">
+  <p:tag name="KSO_WM_DIAGRAM_VIRTUALLY_FRAME" val="{&quot;height&quot;:285.4,&quot;left&quot;:67.5,&quot;top&quot;:127.5,&quot;width&quot;:717}"/>
+</p:tagLst>
+</file>
+
+<file path=ppt/tags/tag2.xml><?xml version="1.0" encoding="utf-8"?>
+<p:tagLst xmlns:p="http://schemas.openxmlformats.org/presentationml/2006/main">
+  <p:tag name="KSO_WM_DIAGRAM_VIRTUALLY_FRAME" val="{&quot;height&quot;:285.4,&quot;left&quot;:67.5,&quot;top&quot;:127.5,&quot;width&quot;:717}"/>
+</p:tagLst>
 </file>
 
 <file path=ppt/theme/theme1.xml><?xml version="1.0" encoding="utf-8"?>
@@ -10321,8 +11172,11 @@
       </a:bgFillStyleLst>
     </a:fmtScheme>
   </a:themeElements>
-  <a:objectDefaults/>
-  <a:extraClrSchemeLst/>
+  <a:extLst>
+    <a:ext uri="{05A4C25C-085E-4340-85A3-A5531E510DB2}">
+      <thm15:themeFamily xmlns:thm15="http://schemas.microsoft.com/office/thememl/2012/main" name="Office Theme" id="{62F939B6-93AF-4DB8-9C6B-D6C7DFDC589F}" vid="{4A3C46E8-61CC-4603-A589-7422A47A8E4A}"/>
+    </a:ext>
+  </a:extLst>
 </a:theme>
 </file>
 
@@ -10468,7 +11322,10 @@
       </a:bgFillStyleLst>
     </a:fmtScheme>
   </a:themeElements>
-  <a:objectDefaults/>
-  <a:extraClrSchemeLst/>
+  <a:extLst>
+    <a:ext uri="{05A4C25C-085E-4340-85A3-A5531E510DB2}">
+      <thm15:themeFamily xmlns:thm15="http://schemas.microsoft.com/office/thememl/2012/main" name="Office Theme" id="{62F939B6-93AF-4DB8-9C6B-D6C7DFDC589F}" vid="{4A3C46E8-61CC-4603-A589-7422A47A8E4A}"/>
+    </a:ext>
+  </a:extLst>
 </a:theme>
 </file>
--- a/report/搜索引擎总结.pptx
+++ b/report/搜索引擎总结.pptx
@@ -5,24 +5,24 @@
     <p:sldMasterId id="2147483648" r:id="rId1"/>
   </p:sldMasterIdLst>
   <p:notesMasterIdLst>
-    <p:notesMasterId r:id="rId4"/>
+    <p:notesMasterId r:id="rId17"/>
   </p:notesMasterIdLst>
   <p:sldIdLst>
-    <p:sldId id="256" r:id="rId3"/>
-    <p:sldId id="273" r:id="rId5"/>
-    <p:sldId id="258" r:id="rId6"/>
-    <p:sldId id="260" r:id="rId7"/>
-    <p:sldId id="262" r:id="rId8"/>
-    <p:sldId id="263" r:id="rId9"/>
-    <p:sldId id="274" r:id="rId10"/>
-    <p:sldId id="276" r:id="rId11"/>
-    <p:sldId id="270" r:id="rId12"/>
-    <p:sldId id="259" r:id="rId13"/>
-    <p:sldId id="271" r:id="rId14"/>
-    <p:sldId id="264" r:id="rId15"/>
-    <p:sldId id="272" r:id="rId16"/>
-    <p:sldId id="261" r:id="rId17"/>
-    <p:sldId id="268" r:id="rId18"/>
+    <p:sldId id="256" r:id="rId2"/>
+    <p:sldId id="273" r:id="rId3"/>
+    <p:sldId id="258" r:id="rId4"/>
+    <p:sldId id="260" r:id="rId5"/>
+    <p:sldId id="262" r:id="rId6"/>
+    <p:sldId id="263" r:id="rId7"/>
+    <p:sldId id="274" r:id="rId8"/>
+    <p:sldId id="276" r:id="rId9"/>
+    <p:sldId id="270" r:id="rId10"/>
+    <p:sldId id="259" r:id="rId11"/>
+    <p:sldId id="271" r:id="rId12"/>
+    <p:sldId id="264" r:id="rId13"/>
+    <p:sldId id="272" r:id="rId14"/>
+    <p:sldId id="261" r:id="rId15"/>
+    <p:sldId id="268" r:id="rId16"/>
   </p:sldIdLst>
   <p:sldSz cx="12192000" cy="6858000"/>
   <p:notesSz cx="6858000" cy="9144000"/>
@@ -121,6 +121,11 @@
       </a:defRPr>
     </a:lvl9pPr>
   </p:defaultTextStyle>
+  <p:extLst>
+    <p:ext uri="{EFAFB233-063F-42B5-8137-9DF3F51BA10A}">
+      <p15:sldGuideLst xmlns:p15="http://schemas.microsoft.com/office/powerpoint/2012/main"/>
+    </p:ext>
+  </p:extLst>
 </p:presentation>
 </file>
 
@@ -164,7 +169,9 @@
         <p:txBody>
           <a:bodyPr/>
           <a:lstStyle/>
-          <a:p/>
+          <a:p>
+            <a:endParaRPr/>
+          </a:p>
         </p:txBody>
       </p:sp>
       <p:sp>
@@ -185,7 +192,9 @@
         <p:txBody>
           <a:bodyPr/>
           <a:lstStyle/>
-          <a:p/>
+          <a:p>
+            <a:endParaRPr/>
+          </a:p>
         </p:txBody>
       </p:sp>
       <p:sp>
@@ -206,7 +215,9 @@
         <p:txBody>
           <a:bodyPr/>
           <a:lstStyle/>
-          <a:p/>
+          <a:p>
+            <a:endParaRPr/>
+          </a:p>
         </p:txBody>
       </p:sp>
       <p:sp>
@@ -227,7 +238,9 @@
         <p:txBody>
           <a:bodyPr/>
           <a:lstStyle/>
-          <a:p/>
+          <a:p>
+            <a:endParaRPr/>
+          </a:p>
         </p:txBody>
       </p:sp>
       <p:sp>
@@ -248,7 +261,9 @@
         <p:txBody>
           <a:bodyPr/>
           <a:lstStyle/>
-          <a:p/>
+          <a:p>
+            <a:endParaRPr/>
+          </a:p>
         </p:txBody>
       </p:sp>
       <p:sp>
@@ -269,7 +284,9 @@
         <p:txBody>
           <a:bodyPr/>
           <a:lstStyle/>
-          <a:p/>
+          <a:p>
+            <a:endParaRPr/>
+          </a:p>
         </p:txBody>
       </p:sp>
     </p:spTree>
@@ -326,7 +343,9 @@
         <p:txBody>
           <a:bodyPr/>
           <a:lstStyle/>
-          <a:p/>
+          <a:p>
+            <a:endParaRPr/>
+          </a:p>
         </p:txBody>
       </p:sp>
       <p:sp>
@@ -343,7 +362,9 @@
         <p:txBody>
           <a:bodyPr/>
           <a:lstStyle/>
-          <a:p/>
+          <a:p>
+            <a:endParaRPr/>
+          </a:p>
         </p:txBody>
       </p:sp>
     </p:spTree>
@@ -397,7 +418,9 @@
         <p:txBody>
           <a:bodyPr/>
           <a:lstStyle/>
-          <a:p/>
+          <a:p>
+            <a:endParaRPr/>
+          </a:p>
         </p:txBody>
       </p:sp>
       <p:sp>
@@ -414,7 +437,9 @@
         <p:txBody>
           <a:bodyPr/>
           <a:lstStyle/>
-          <a:p/>
+          <a:p>
+            <a:endParaRPr/>
+          </a:p>
         </p:txBody>
       </p:sp>
     </p:spTree>
@@ -468,7 +493,9 @@
         <p:txBody>
           <a:bodyPr/>
           <a:lstStyle/>
-          <a:p/>
+          <a:p>
+            <a:endParaRPr/>
+          </a:p>
         </p:txBody>
       </p:sp>
       <p:sp>
@@ -570,7 +597,9 @@
         <p:txBody>
           <a:bodyPr/>
           <a:lstStyle/>
-          <a:p/>
+          <a:p>
+            <a:endParaRPr/>
+          </a:p>
         </p:txBody>
       </p:sp>
       <p:sp>
@@ -587,7 +616,9 @@
         <p:txBody>
           <a:bodyPr/>
           <a:lstStyle/>
-          <a:p/>
+          <a:p>
+            <a:endParaRPr/>
+          </a:p>
         </p:txBody>
       </p:sp>
     </p:spTree>
@@ -641,7 +672,9 @@
         <p:txBody>
           <a:bodyPr/>
           <a:lstStyle/>
-          <a:p/>
+          <a:p>
+            <a:endParaRPr/>
+          </a:p>
         </p:txBody>
       </p:sp>
       <p:sp>
@@ -743,7 +776,9 @@
         <p:txBody>
           <a:bodyPr/>
           <a:lstStyle/>
-          <a:p/>
+          <a:p>
+            <a:endParaRPr/>
+          </a:p>
         </p:txBody>
       </p:sp>
       <p:sp>
@@ -760,7 +795,9 @@
         <p:txBody>
           <a:bodyPr/>
           <a:lstStyle/>
-          <a:p/>
+          <a:p>
+            <a:endParaRPr/>
+          </a:p>
         </p:txBody>
       </p:sp>
     </p:spTree>
@@ -814,7 +851,9 @@
         <p:txBody>
           <a:bodyPr/>
           <a:lstStyle/>
-          <a:p/>
+          <a:p>
+            <a:endParaRPr/>
+          </a:p>
         </p:txBody>
       </p:sp>
       <p:sp>
@@ -831,7 +870,9 @@
         <p:txBody>
           <a:bodyPr/>
           <a:lstStyle/>
-          <a:p/>
+          <a:p>
+            <a:endParaRPr/>
+          </a:p>
         </p:txBody>
       </p:sp>
     </p:spTree>
@@ -885,7 +926,9 @@
         <p:txBody>
           <a:bodyPr/>
           <a:lstStyle/>
-          <a:p/>
+          <a:p>
+            <a:endParaRPr/>
+          </a:p>
         </p:txBody>
       </p:sp>
       <p:sp>
@@ -987,7 +1030,9 @@
         <p:txBody>
           <a:bodyPr/>
           <a:lstStyle/>
-          <a:p/>
+          <a:p>
+            <a:endParaRPr/>
+          </a:p>
         </p:txBody>
       </p:sp>
       <p:sp>
@@ -1004,7 +1049,9 @@
         <p:txBody>
           <a:bodyPr/>
           <a:lstStyle/>
-          <a:p/>
+          <a:p>
+            <a:endParaRPr/>
+          </a:p>
         </p:txBody>
       </p:sp>
     </p:spTree>
@@ -1058,7 +1105,9 @@
         <p:txBody>
           <a:bodyPr/>
           <a:lstStyle/>
-          <a:p/>
+          <a:p>
+            <a:endParaRPr/>
+          </a:p>
         </p:txBody>
       </p:sp>
       <p:sp>
@@ -1075,7 +1124,9 @@
         <p:txBody>
           <a:bodyPr/>
           <a:lstStyle/>
-          <a:p/>
+          <a:p>
+            <a:endParaRPr/>
+          </a:p>
         </p:txBody>
       </p:sp>
     </p:spTree>
@@ -1129,7 +1180,9 @@
         <p:txBody>
           <a:bodyPr/>
           <a:lstStyle/>
-          <a:p/>
+          <a:p>
+            <a:endParaRPr/>
+          </a:p>
         </p:txBody>
       </p:sp>
       <p:sp>
@@ -1146,7 +1199,9 @@
         <p:txBody>
           <a:bodyPr/>
           <a:lstStyle/>
-          <a:p/>
+          <a:p>
+            <a:endParaRPr/>
+          </a:p>
         </p:txBody>
       </p:sp>
     </p:spTree>
@@ -1200,7 +1255,9 @@
         <p:txBody>
           <a:bodyPr/>
           <a:lstStyle/>
-          <a:p/>
+          <a:p>
+            <a:endParaRPr/>
+          </a:p>
         </p:txBody>
       </p:sp>
       <p:sp>
@@ -1217,7 +1274,9 @@
         <p:txBody>
           <a:bodyPr/>
           <a:lstStyle/>
-          <a:p/>
+          <a:p>
+            <a:endParaRPr/>
+          </a:p>
         </p:txBody>
       </p:sp>
     </p:spTree>
@@ -1271,7 +1330,9 @@
         <p:txBody>
           <a:bodyPr/>
           <a:lstStyle/>
-          <a:p/>
+          <a:p>
+            <a:endParaRPr/>
+          </a:p>
         </p:txBody>
       </p:sp>
       <p:sp>
@@ -1288,7 +1349,9 @@
         <p:txBody>
           <a:bodyPr/>
           <a:lstStyle/>
-          <a:p/>
+          <a:p>
+            <a:endParaRPr/>
+          </a:p>
         </p:txBody>
       </p:sp>
     </p:spTree>
@@ -1342,7 +1405,9 @@
         <p:txBody>
           <a:bodyPr/>
           <a:lstStyle/>
-          <a:p/>
+          <a:p>
+            <a:endParaRPr/>
+          </a:p>
         </p:txBody>
       </p:sp>
       <p:sp>
@@ -1359,7 +1424,9 @@
         <p:txBody>
           <a:bodyPr/>
           <a:lstStyle/>
-          <a:p/>
+          <a:p>
+            <a:endParaRPr/>
+          </a:p>
         </p:txBody>
       </p:sp>
     </p:spTree>
@@ -1413,7 +1480,9 @@
         <p:txBody>
           <a:bodyPr/>
           <a:lstStyle/>
-          <a:p/>
+          <a:p>
+            <a:endParaRPr/>
+          </a:p>
         </p:txBody>
       </p:sp>
       <p:sp>
@@ -1599,7 +1668,8 @@
           <a:lstStyle/>
           <a:p>
             <a:fld id="{A653A8F1-9EDF-49EF-A14D-E495AD864F8A}" type="datetimeFigureOut">
-              <a:rPr/>
+              <a:rPr lang="zh-CN" altLang="en-US"/>
+              <a:t>2026/6/15</a:t>
             </a:fld>
             <a:endParaRPr/>
           </a:p>
@@ -1619,7 +1689,9 @@
         <p:txBody>
           <a:bodyPr/>
           <a:lstStyle/>
-          <a:p/>
+          <a:p>
+            <a:endParaRPr/>
+          </a:p>
         </p:txBody>
       </p:sp>
       <p:sp>
@@ -1639,6 +1711,7 @@
           <a:p>
             <a:fld id="{43A13857-8FE2-426A-A37B-64DF65062EF2}" type="slidenum">
               <a:rPr/>
+              <a:t>‹#›</a:t>
             </a:fld>
             <a:endParaRPr/>
           </a:p>
@@ -1762,7 +1835,8 @@
           <a:lstStyle/>
           <a:p>
             <a:fld id="{A653A8F1-9EDF-49EF-A14D-E495AD864F8A}" type="datetimeFigureOut">
-              <a:rPr/>
+              <a:rPr lang="zh-CN" altLang="en-US"/>
+              <a:t>2026/6/15</a:t>
             </a:fld>
             <a:endParaRPr/>
           </a:p>
@@ -1782,7 +1856,9 @@
         <p:txBody>
           <a:bodyPr/>
           <a:lstStyle/>
-          <a:p/>
+          <a:p>
+            <a:endParaRPr/>
+          </a:p>
         </p:txBody>
       </p:sp>
       <p:sp>
@@ -1802,6 +1878,7 @@
           <a:p>
             <a:fld id="{43A13857-8FE2-426A-A37B-64DF65062EF2}" type="slidenum">
               <a:rPr/>
+              <a:t>‹#›</a:t>
             </a:fld>
             <a:endParaRPr/>
           </a:p>
@@ -1935,7 +2012,8 @@
           <a:lstStyle/>
           <a:p>
             <a:fld id="{A653A8F1-9EDF-49EF-A14D-E495AD864F8A}" type="datetimeFigureOut">
-              <a:rPr/>
+              <a:rPr lang="zh-CN" altLang="en-US"/>
+              <a:t>2026/6/15</a:t>
             </a:fld>
             <a:endParaRPr/>
           </a:p>
@@ -1955,7 +2033,9 @@
         <p:txBody>
           <a:bodyPr/>
           <a:lstStyle/>
-          <a:p/>
+          <a:p>
+            <a:endParaRPr/>
+          </a:p>
         </p:txBody>
       </p:sp>
       <p:sp>
@@ -1975,6 +2055,7 @@
           <a:p>
             <a:fld id="{43A13857-8FE2-426A-A37B-64DF65062EF2}" type="slidenum">
               <a:rPr/>
+              <a:t>‹#›</a:t>
             </a:fld>
             <a:endParaRPr/>
           </a:p>
@@ -2098,7 +2179,8 @@
           <a:lstStyle/>
           <a:p>
             <a:fld id="{A653A8F1-9EDF-49EF-A14D-E495AD864F8A}" type="datetimeFigureOut">
-              <a:rPr/>
+              <a:rPr lang="zh-CN" altLang="en-US"/>
+              <a:t>2026/6/15</a:t>
             </a:fld>
             <a:endParaRPr/>
           </a:p>
@@ -2118,7 +2200,9 @@
         <p:txBody>
           <a:bodyPr/>
           <a:lstStyle/>
-          <a:p/>
+          <a:p>
+            <a:endParaRPr/>
+          </a:p>
         </p:txBody>
       </p:sp>
       <p:sp>
@@ -2138,6 +2222,7 @@
           <a:p>
             <a:fld id="{43A13857-8FE2-426A-A37B-64DF65062EF2}" type="slidenum">
               <a:rPr/>
+              <a:t>‹#›</a:t>
             </a:fld>
             <a:endParaRPr/>
           </a:p>
@@ -2335,7 +2420,8 @@
           <a:lstStyle/>
           <a:p>
             <a:fld id="{A653A8F1-9EDF-49EF-A14D-E495AD864F8A}" type="datetimeFigureOut">
-              <a:rPr/>
+              <a:rPr lang="zh-CN" altLang="en-US"/>
+              <a:t>2026/6/15</a:t>
             </a:fld>
             <a:endParaRPr/>
           </a:p>
@@ -2355,7 +2441,9 @@
         <p:txBody>
           <a:bodyPr/>
           <a:lstStyle/>
-          <a:p/>
+          <a:p>
+            <a:endParaRPr/>
+          </a:p>
         </p:txBody>
       </p:sp>
       <p:sp>
@@ -2375,6 +2463,7 @@
           <a:p>
             <a:fld id="{43A13857-8FE2-426A-A37B-64DF65062EF2}" type="slidenum">
               <a:rPr/>
+              <a:t>‹#›</a:t>
             </a:fld>
             <a:endParaRPr/>
           </a:p>
@@ -2564,7 +2653,8 @@
           <a:lstStyle/>
           <a:p>
             <a:fld id="{A653A8F1-9EDF-49EF-A14D-E495AD864F8A}" type="datetimeFigureOut">
-              <a:rPr/>
+              <a:rPr lang="zh-CN" altLang="en-US"/>
+              <a:t>2026/6/15</a:t>
             </a:fld>
             <a:endParaRPr/>
           </a:p>
@@ -2584,7 +2674,9 @@
         <p:txBody>
           <a:bodyPr/>
           <a:lstStyle/>
-          <a:p/>
+          <a:p>
+            <a:endParaRPr/>
+          </a:p>
         </p:txBody>
       </p:sp>
       <p:sp>
@@ -2604,6 +2696,7 @@
           <a:p>
             <a:fld id="{43A13857-8FE2-426A-A37B-64DF65062EF2}" type="slidenum">
               <a:rPr/>
+              <a:t>‹#›</a:t>
             </a:fld>
             <a:endParaRPr/>
           </a:p>
@@ -2930,7 +3023,8 @@
           <a:lstStyle/>
           <a:p>
             <a:fld id="{A653A8F1-9EDF-49EF-A14D-E495AD864F8A}" type="datetimeFigureOut">
-              <a:rPr/>
+              <a:rPr lang="zh-CN" altLang="en-US"/>
+              <a:t>2026/6/15</a:t>
             </a:fld>
             <a:endParaRPr/>
           </a:p>
@@ -2950,7 +3044,9 @@
         <p:txBody>
           <a:bodyPr/>
           <a:lstStyle/>
-          <a:p/>
+          <a:p>
+            <a:endParaRPr/>
+          </a:p>
         </p:txBody>
       </p:sp>
       <p:sp>
@@ -2970,6 +3066,7 @@
           <a:p>
             <a:fld id="{43A13857-8FE2-426A-A37B-64DF65062EF2}" type="slidenum">
               <a:rPr/>
+              <a:t>‹#›</a:t>
             </a:fld>
             <a:endParaRPr/>
           </a:p>
@@ -3037,7 +3134,8 @@
           <a:lstStyle/>
           <a:p>
             <a:fld id="{A653A8F1-9EDF-49EF-A14D-E495AD864F8A}" type="datetimeFigureOut">
-              <a:rPr/>
+              <a:rPr lang="zh-CN" altLang="en-US"/>
+              <a:t>2026/6/15</a:t>
             </a:fld>
             <a:endParaRPr/>
           </a:p>
@@ -3057,7 +3155,9 @@
         <p:txBody>
           <a:bodyPr/>
           <a:lstStyle/>
-          <a:p/>
+          <a:p>
+            <a:endParaRPr/>
+          </a:p>
         </p:txBody>
       </p:sp>
       <p:sp>
@@ -3077,6 +3177,7 @@
           <a:p>
             <a:fld id="{43A13857-8FE2-426A-A37B-64DF65062EF2}" type="slidenum">
               <a:rPr/>
+              <a:t>‹#›</a:t>
             </a:fld>
             <a:endParaRPr/>
           </a:p>
@@ -3123,7 +3224,8 @@
           <a:lstStyle/>
           <a:p>
             <a:fld id="{A653A8F1-9EDF-49EF-A14D-E495AD864F8A}" type="datetimeFigureOut">
-              <a:rPr/>
+              <a:rPr lang="zh-CN" altLang="en-US"/>
+              <a:t>2026/6/15</a:t>
             </a:fld>
             <a:endParaRPr/>
           </a:p>
@@ -3143,7 +3245,9 @@
         <p:txBody>
           <a:bodyPr/>
           <a:lstStyle/>
-          <a:p/>
+          <a:p>
+            <a:endParaRPr/>
+          </a:p>
         </p:txBody>
       </p:sp>
       <p:sp>
@@ -3163,6 +3267,7 @@
           <a:p>
             <a:fld id="{43A13857-8FE2-426A-A37B-64DF65062EF2}" type="slidenum">
               <a:rPr/>
+              <a:t>‹#›</a:t>
             </a:fld>
             <a:endParaRPr/>
           </a:p>
@@ -3404,7 +3509,8 @@
           <a:lstStyle/>
           <a:p>
             <a:fld id="{A653A8F1-9EDF-49EF-A14D-E495AD864F8A}" type="datetimeFigureOut">
-              <a:rPr/>
+              <a:rPr lang="zh-CN" altLang="en-US"/>
+              <a:t>2026/6/15</a:t>
             </a:fld>
             <a:endParaRPr/>
           </a:p>
@@ -3424,7 +3530,9 @@
         <p:txBody>
           <a:bodyPr/>
           <a:lstStyle/>
-          <a:p/>
+          <a:p>
+            <a:endParaRPr/>
+          </a:p>
         </p:txBody>
       </p:sp>
       <p:sp>
@@ -3444,6 +3552,7 @@
           <a:p>
             <a:fld id="{43A13857-8FE2-426A-A37B-64DF65062EF2}" type="slidenum">
               <a:rPr/>
+              <a:t>‹#›</a:t>
             </a:fld>
             <a:endParaRPr/>
           </a:p>
@@ -3561,7 +3670,9 @@
               <a:defRPr sz="2000"/>
             </a:lvl9pPr>
           </a:lstStyle>
-          <a:p/>
+          <a:p>
+            <a:endParaRPr/>
+          </a:p>
         </p:txBody>
       </p:sp>
       <p:sp>
@@ -3646,7 +3757,8 @@
           <a:lstStyle/>
           <a:p>
             <a:fld id="{A653A8F1-9EDF-49EF-A14D-E495AD864F8A}" type="datetimeFigureOut">
-              <a:rPr/>
+              <a:rPr lang="zh-CN" altLang="en-US"/>
+              <a:t>2026/6/15</a:t>
             </a:fld>
             <a:endParaRPr/>
           </a:p>
@@ -3666,7 +3778,9 @@
         <p:txBody>
           <a:bodyPr/>
           <a:lstStyle/>
-          <a:p/>
+          <a:p>
+            <a:endParaRPr/>
+          </a:p>
         </p:txBody>
       </p:sp>
       <p:sp>
@@ -3686,6 +3800,7 @@
           <a:p>
             <a:fld id="{43A13857-8FE2-426A-A37B-64DF65062EF2}" type="slidenum">
               <a:rPr/>
+              <a:t>‹#›</a:t>
             </a:fld>
             <a:endParaRPr/>
           </a:p>
@@ -3853,7 +3968,8 @@
           </a:lstStyle>
           <a:p>
             <a:fld id="{A653A8F1-9EDF-49EF-A14D-E495AD864F8A}" type="datetimeFigureOut">
-              <a:rPr/>
+              <a:rPr lang="zh-CN" altLang="en-US"/>
+              <a:t>2026/6/15</a:t>
             </a:fld>
             <a:endParaRPr/>
           </a:p>
@@ -3892,7 +4008,9 @@
               </a:defRPr>
             </a:lvl1pPr>
           </a:lstStyle>
-          <a:p/>
+          <a:p>
+            <a:endParaRPr/>
+          </a:p>
         </p:txBody>
       </p:sp>
       <p:sp>
@@ -3931,6 +4049,7 @@
           <a:p>
             <a:fld id="{43A13857-8FE2-426A-A37B-64DF65062EF2}" type="slidenum">
               <a:rPr/>
+              <a:t>‹#›</a:t>
             </a:fld>
             <a:endParaRPr/>
           </a:p>
@@ -4303,6 +4422,7 @@
             <a:pPr algn="ctr">
               <a:buNone/>
             </a:pPr>
+            <a:endParaRPr/>
           </a:p>
         </p:txBody>
       </p:sp>
@@ -4344,14 +4464,6 @@
               </a:rPr>
               <a:t>搜索引擎总结</a:t>
             </a:r>
-            <a:endParaRPr lang="zh-CN" altLang="en-US" sz="4400" dirty="0">
-              <a:solidFill>
-                <a:schemeClr val="bg1"/>
-              </a:solidFill>
-              <a:latin typeface="字魂17号-萌趣果冻体"/>
-              <a:ea typeface="字魂17号-萌趣果冻体"/>
-              <a:cs typeface="字魂17号-萌趣果冻体"/>
-            </a:endParaRPr>
           </a:p>
         </p:txBody>
       </p:sp>
@@ -4444,6 +4556,7 @@
             <a:pPr algn="ctr">
               <a:buNone/>
             </a:pPr>
+            <a:endParaRPr/>
           </a:p>
         </p:txBody>
       </p:sp>
@@ -4493,6 +4606,7 @@
             <a:pPr algn="ctr">
               <a:buNone/>
             </a:pPr>
+            <a:endParaRPr/>
           </a:p>
         </p:txBody>
       </p:sp>
@@ -4542,6 +4656,7 @@
             <a:pPr algn="ctr">
               <a:buNone/>
             </a:pPr>
+            <a:endParaRPr/>
           </a:p>
         </p:txBody>
       </p:sp>
@@ -4591,6 +4706,7 @@
             <a:pPr algn="ctr">
               <a:buNone/>
             </a:pPr>
+            <a:endParaRPr/>
           </a:p>
         </p:txBody>
       </p:sp>
@@ -4642,6 +4758,7 @@
             <a:pPr algn="ctr">
               <a:buNone/>
             </a:pPr>
+            <a:endParaRPr/>
           </a:p>
         </p:txBody>
       </p:sp>
@@ -4654,7 +4771,7 @@
           <p:nvPr/>
         </p:nvPicPr>
         <p:blipFill>
-          <a:blip r:embed="rId1"/>
+          <a:blip r:embed="rId3"/>
           <a:stretch>
             <a:fillRect/>
           </a:stretch>
@@ -4699,11 +4816,6 @@
               </a:rPr>
               <a:t>小组成员：李嘉轩 刘义群 王秀崧 汤语涵 谢羿衡 唐熙雷 邢泽雷</a:t>
             </a:r>
-            <a:endParaRPr lang="zh-CN" altLang="en-US" dirty="0">
-              <a:solidFill>
-                <a:schemeClr val="bg1"/>
-              </a:solidFill>
-            </a:endParaRPr>
           </a:p>
         </p:txBody>
       </p:sp>
@@ -4877,26 +4989,14 @@
           <a:bodyPr anchor="ctr"/>
           <a:lstStyle/>
           <a:p>
-            <a:pPr algn="l">
-              <a:defRPr sz="1650" b="1">
+            <a:r>
+              <a:rPr lang="zh-CN" altLang="en-US" sz="3200" b="1" dirty="0">
                 <a:solidFill>
                   <a:srgbClr val="2D4A33"/>
                 </a:solidFill>
-              </a:defRPr>
-            </a:pPr>
-            <a:r>
-              <a:rPr lang="zh-CN" altLang="en-US" sz="3200" b="1" dirty="0">
-                <a:solidFill>
-                  <a:srgbClr val="2D4A33"/>
-                </a:solidFill>
-              </a:rPr>
-              <a:t>文件解析</a:t>
-            </a:r>
-            <a:endParaRPr sz="3200" b="1" dirty="0">
-              <a:solidFill>
-                <a:srgbClr val="2D4A33"/>
-              </a:solidFill>
-            </a:endParaRPr>
+              </a:rPr>
+              <a:t>数据集初始化与扩充</a:t>
+            </a:r>
           </a:p>
         </p:txBody>
       </p:sp>
@@ -4910,7 +5010,7 @@
         </p:nvSpPr>
         <p:spPr>
           <a:xfrm>
-            <a:off x="1634067" y="2091531"/>
+            <a:off x="1634067" y="2070365"/>
             <a:ext cx="9059333" cy="1358635"/>
           </a:xfrm>
           <a:prstGeom prst="rect">
@@ -4948,7 +5048,7 @@
                 </a:solidFill>
                 <a:latin typeface="ui-monospace"/>
               </a:rPr>
-              <a:t>新增了 </a:t>
+              <a:t>提交并扩充了 </a:t>
             </a:r>
             <a:r>
               <a:rPr lang="en-US" altLang="zh-CN" sz="2000" dirty="0" err="1">
@@ -4957,61 +5057,7 @@
                 </a:solidFill>
                 <a:latin typeface="ui-monospace"/>
               </a:rPr>
-              <a:t>structured_blocks</a:t>
-            </a:r>
-            <a:r>
-              <a:rPr lang="en-US" altLang="zh-CN" sz="2000" dirty="0">
-                <a:solidFill>
-                  <a:srgbClr val="1F2D22"/>
-                </a:solidFill>
-                <a:latin typeface="ui-monospace"/>
-              </a:rPr>
-              <a:t> </a:t>
-            </a:r>
-            <a:r>
-              <a:rPr lang="zh-CN" altLang="en-US" sz="2000" dirty="0">
-                <a:solidFill>
-                  <a:srgbClr val="1F2D22"/>
-                </a:solidFill>
-                <a:latin typeface="ui-monospace"/>
-              </a:rPr>
-              <a:t>解析模式，把论文 </a:t>
-            </a:r>
-            <a:r>
-              <a:rPr lang="en-US" altLang="zh-CN" sz="2000" dirty="0">
-                <a:solidFill>
-                  <a:srgbClr val="1F2D22"/>
-                </a:solidFill>
-                <a:latin typeface="ui-monospace"/>
-              </a:rPr>
-              <a:t>PDF </a:t>
-            </a:r>
-            <a:r>
-              <a:rPr lang="zh-CN" altLang="en-US" sz="2000" dirty="0">
-                <a:solidFill>
-                  <a:srgbClr val="1F2D22"/>
-                </a:solidFill>
-                <a:latin typeface="ui-monospace"/>
-              </a:rPr>
-              <a:t>解析成统一 </a:t>
-            </a:r>
-            <a:r>
-              <a:rPr lang="en-US" altLang="zh-CN" sz="2000" dirty="0">
-                <a:solidFill>
-                  <a:srgbClr val="1F2D22"/>
-                </a:solidFill>
-                <a:latin typeface="ui-monospace"/>
-              </a:rPr>
-              <a:t>block </a:t>
-            </a:r>
-            <a:r>
-              <a:rPr lang="zh-CN" altLang="en-US" sz="2000" dirty="0">
-                <a:solidFill>
-                  <a:srgbClr val="1F2D22"/>
-                </a:solidFill>
-                <a:latin typeface="ui-monospace"/>
-              </a:rPr>
-              <a:t>结构</a:t>
+              <a:t>course_qa.json</a:t>
             </a:r>
             <a:endParaRPr lang="en-US" altLang="zh-CN" sz="2000" dirty="0">
               <a:solidFill>
@@ -5021,7 +5067,13 @@
             </a:endParaRPr>
           </a:p>
           <a:p>
-            <a:pPr algn="l"/>
+            <a:pPr algn="l">
+              <a:defRPr sz="1350" b="0">
+                <a:solidFill>
+                  <a:srgbClr val="1F2D22"/>
+                </a:solidFill>
+              </a:defRPr>
+            </a:pPr>
             <a:r>
               <a:rPr lang="zh-CN" altLang="en-US" sz="2000" dirty="0">
                 <a:solidFill>
@@ -5029,7 +5081,7 @@
                 </a:solidFill>
                 <a:latin typeface="ui-monospace"/>
               </a:rPr>
-              <a:t>基于 </a:t>
+              <a:t>整理统一 </a:t>
             </a:r>
             <a:r>
               <a:rPr lang="en-US" altLang="zh-CN" sz="2000" dirty="0" err="1">
@@ -5038,87 +5090,18 @@
                 </a:solidFill>
                 <a:latin typeface="ui-monospace"/>
               </a:rPr>
-              <a:t>PyMuPDF</a:t>
-            </a:r>
-            <a:r>
-              <a:rPr lang="en-US" altLang="zh-CN" sz="2000" dirty="0">
+              <a:t>course_qa.json</a:t>
+            </a:r>
+            <a:r>
+              <a:rPr lang="zh-CN" altLang="en-US" sz="2000" dirty="0">
                 <a:solidFill>
                   <a:srgbClr val="1F2D22"/>
                 </a:solidFill>
                 <a:latin typeface="ui-monospace"/>
               </a:rPr>
-              <a:t> </a:t>
-            </a:r>
-            <a:r>
-              <a:rPr lang="zh-CN" altLang="en-US" sz="2000" dirty="0">
-                <a:solidFill>
-                  <a:srgbClr val="1F2D22"/>
-                </a:solidFill>
-                <a:latin typeface="ui-monospace"/>
-              </a:rPr>
-              <a:t>提取版面块、字号、粗体、</a:t>
-            </a:r>
-            <a:r>
-              <a:rPr lang="en-US" altLang="zh-CN" sz="2000" dirty="0" err="1">
-                <a:solidFill>
-                  <a:srgbClr val="1F2D22"/>
-                </a:solidFill>
-                <a:latin typeface="ui-monospace"/>
-              </a:rPr>
-              <a:t>bbox</a:t>
-            </a:r>
-            <a:r>
-              <a:rPr lang="zh-CN" altLang="en-US" sz="2000" dirty="0">
-                <a:solidFill>
-                  <a:srgbClr val="1F2D22"/>
-                </a:solidFill>
-                <a:latin typeface="ui-monospace"/>
-              </a:rPr>
-              <a:t>、列信息</a:t>
-            </a:r>
-            <a:endParaRPr lang="zh-CN" altLang="en-US" sz="2000" dirty="0">
-              <a:solidFill>
-                <a:srgbClr val="1F2D22"/>
-              </a:solidFill>
-              <a:latin typeface="ui-monospace"/>
-            </a:endParaRPr>
-          </a:p>
-          <a:p>
-            <a:pPr>
-              <a:defRPr sz="1350" b="0">
-                <a:solidFill>
-                  <a:srgbClr val="1F2D22"/>
-                </a:solidFill>
-              </a:defRPr>
-            </a:pPr>
-            <a:r>
-              <a:rPr lang="zh-CN" altLang="en-US" sz="2000" dirty="0">
-                <a:solidFill>
-                  <a:srgbClr val="1F2D22"/>
-                </a:solidFill>
-                <a:latin typeface="ui-monospace"/>
-              </a:rPr>
-              <a:t>过滤重复页眉页脚噪声，精确分类为正确的</a:t>
-            </a:r>
-            <a:r>
-              <a:rPr lang="en-US" altLang="zh-CN" sz="2000" dirty="0">
-                <a:solidFill>
-                  <a:srgbClr val="1F2D22"/>
-                </a:solidFill>
-                <a:latin typeface="ui-monospace"/>
-              </a:rPr>
-              <a:t>block</a:t>
-            </a:r>
-            <a:r>
-              <a:rPr lang="zh-CN" altLang="en-US" sz="2000" dirty="0">
-                <a:solidFill>
-                  <a:srgbClr val="1F2D22"/>
-                </a:solidFill>
-                <a:latin typeface="ui-monospace"/>
-              </a:rPr>
-              <a:t>类别</a:t>
-            </a:r>
-            <a:endParaRPr lang="zh-CN" altLang="en-US" sz="2000" dirty="0">
+              <a:t>数据格式、增加质量标注</a:t>
+            </a:r>
+            <a:endParaRPr lang="en-US" altLang="zh-CN" sz="2000" dirty="0">
               <a:solidFill>
                 <a:srgbClr val="1F2D22"/>
               </a:solidFill>
@@ -5179,7 +5162,7 @@
         <p:spPr>
           <a:xfrm>
             <a:off x="1634067" y="4362450"/>
-            <a:ext cx="4305300" cy="323850"/>
+            <a:ext cx="5872052" cy="323850"/>
           </a:xfrm>
           <a:prstGeom prst="rect">
             <a:avLst/>
@@ -5210,12 +5193,12 @@
               </a:defRPr>
             </a:pPr>
             <a:r>
-              <a:rPr lang="zh-CN" altLang="en-US" sz="3200" b="1" dirty="0">
-                <a:solidFill>
-                  <a:srgbClr val="2D4A33"/>
-                </a:solidFill>
-              </a:rPr>
-              <a:t>知识分块</a:t>
+              <a:rPr lang="en-US" altLang="zh-CN" sz="3200" dirty="0"/>
+              <a:t>Elasticsearch </a:t>
+            </a:r>
+            <a:r>
+              <a:rPr lang="zh-CN" altLang="en-US" sz="3200" dirty="0"/>
+              <a:t>数据导入能力</a:t>
             </a:r>
             <a:endParaRPr sz="3200" b="1" dirty="0">
               <a:solidFill>
@@ -5259,13 +5242,6 @@
           <a:bodyPr anchor="ctr"/>
           <a:lstStyle/>
           <a:p>
-            <a:pPr>
-              <a:defRPr sz="1350" b="0">
-                <a:solidFill>
-                  <a:srgbClr val="1F2D22"/>
-                </a:solidFill>
-              </a:defRPr>
-            </a:pPr>
             <a:r>
               <a:rPr lang="zh-CN" altLang="en-US" sz="2000" dirty="0">
                 <a:solidFill>
@@ -5273,7 +5249,7 @@
                 </a:solidFill>
                 <a:latin typeface="ui-monospace"/>
               </a:rPr>
-              <a:t>按解析块分块：基本一个结构块生成一个 </a:t>
+              <a:t>添加</a:t>
             </a:r>
             <a:r>
               <a:rPr lang="en-US" altLang="zh-CN" sz="2000" dirty="0">
@@ -5282,7 +5258,16 @@
                 </a:solidFill>
                 <a:latin typeface="ui-monospace"/>
               </a:rPr>
-              <a:t>chunk</a:t>
+              <a:t>ES</a:t>
+            </a:r>
+            <a:r>
+              <a:rPr lang="zh-CN" altLang="en-US" sz="2000" dirty="0">
+                <a:solidFill>
+                  <a:srgbClr val="1F2D22"/>
+                </a:solidFill>
+                <a:latin typeface="ui-monospace"/>
+              </a:rPr>
+              <a:t>数据导入脚本</a:t>
             </a:r>
             <a:endParaRPr lang="en-US" altLang="zh-CN" sz="2000" dirty="0">
               <a:solidFill>
@@ -5292,7 +5277,6 @@
             </a:endParaRPr>
           </a:p>
           <a:p>
-            <a:pPr algn="l"/>
             <a:r>
               <a:rPr lang="zh-CN" altLang="en-US" sz="2000" dirty="0">
                 <a:solidFill>
@@ -5300,7 +5284,7 @@
                 </a:solidFill>
                 <a:latin typeface="ui-monospace"/>
               </a:rPr>
-              <a:t>按章节分块：先按 </a:t>
+              <a:t>解析</a:t>
             </a:r>
             <a:r>
               <a:rPr lang="en-US" altLang="zh-CN" sz="2000" dirty="0" err="1">
@@ -5309,70 +5293,25 @@
                 </a:solidFill>
                 <a:latin typeface="ui-monospace"/>
               </a:rPr>
-              <a:t>section_path</a:t>
-            </a:r>
-            <a:r>
-              <a:rPr lang="en-US" altLang="zh-CN" sz="2000" dirty="0">
+              <a:t>course_qa.json</a:t>
+            </a:r>
+            <a:r>
+              <a:rPr lang="zh-CN" altLang="en-US" sz="2000" dirty="0">
                 <a:solidFill>
                   <a:srgbClr val="1F2D22"/>
                 </a:solidFill>
                 <a:latin typeface="ui-monospace"/>
               </a:rPr>
-              <a:t> </a:t>
-            </a:r>
-            <a:r>
-              <a:rPr lang="zh-CN" altLang="en-US" sz="2000" dirty="0">
+              <a:t>并将数据导入</a:t>
+            </a:r>
+            <a:r>
+              <a:rPr lang="en-US" altLang="zh-CN" sz="2000">
                 <a:solidFill>
                   <a:srgbClr val="1F2D22"/>
                 </a:solidFill>
                 <a:latin typeface="ui-monospace"/>
               </a:rPr>
-              <a:t>聚合同章节 </a:t>
-            </a:r>
-            <a:r>
-              <a:rPr lang="en-US" altLang="zh-CN" sz="2000" dirty="0">
-                <a:solidFill>
-                  <a:srgbClr val="1F2D22"/>
-                </a:solidFill>
-                <a:latin typeface="ui-monospace"/>
-              </a:rPr>
-              <a:t>block</a:t>
-            </a:r>
-            <a:r>
-              <a:rPr lang="zh-CN" altLang="en-US" sz="2000" dirty="0">
-                <a:solidFill>
-                  <a:srgbClr val="1F2D22"/>
-                </a:solidFill>
-                <a:latin typeface="ui-monospace"/>
-              </a:rPr>
-              <a:t>，再按 </a:t>
-            </a:r>
-            <a:r>
-              <a:rPr lang="en-US" altLang="zh-CN" sz="2000" dirty="0" err="1">
-                <a:solidFill>
-                  <a:srgbClr val="1F2D22"/>
-                </a:solidFill>
-                <a:latin typeface="ui-monospace"/>
-              </a:rPr>
-              <a:t>chunk_size</a:t>
-            </a:r>
-            <a:r>
-              <a:rPr lang="en-US" altLang="zh-CN" sz="2000" dirty="0">
-                <a:solidFill>
-                  <a:srgbClr val="1F2D22"/>
-                </a:solidFill>
-                <a:latin typeface="ui-monospace"/>
-              </a:rPr>
-              <a:t> </a:t>
-            </a:r>
-            <a:r>
-              <a:rPr lang="zh-CN" altLang="en-US" sz="2000" dirty="0">
-                <a:solidFill>
-                  <a:srgbClr val="1F2D22"/>
-                </a:solidFill>
-                <a:latin typeface="ui-monospace"/>
-              </a:rPr>
-              <a:t>做递归切分</a:t>
+              <a:t>ES</a:t>
             </a:r>
             <a:endParaRPr lang="zh-CN" altLang="en-US" sz="2000" dirty="0">
               <a:solidFill>
@@ -5766,11 +5705,6 @@
               </a:rPr>
               <a:t>Faiss</a:t>
             </a:r>
-            <a:endParaRPr sz="1650" b="1">
-              <a:solidFill>
-                <a:srgbClr val="2D4A33"/>
-              </a:solidFill>
-            </a:endParaRPr>
           </a:p>
         </p:txBody>
       </p:sp>
@@ -5823,11 +5757,6 @@
               </a:rPr>
               <a:t>替换 / 增强向量检索底座</a:t>
             </a:r>
-            <a:endParaRPr sz="1350" b="0">
-              <a:solidFill>
-                <a:srgbClr val="1F2D22"/>
-              </a:solidFill>
-            </a:endParaRPr>
           </a:p>
         </p:txBody>
       </p:sp>
@@ -5907,11 +5836,6 @@
               </a:rPr>
               <a:t>多检索</a:t>
             </a:r>
-            <a:endParaRPr sz="1650" b="1">
-              <a:solidFill>
-                <a:srgbClr val="2D4A33"/>
-              </a:solidFill>
-            </a:endParaRPr>
           </a:p>
         </p:txBody>
       </p:sp>
@@ -5964,11 +5888,6 @@
               </a:rPr>
               <a:t>支持多种召回方式并行比较</a:t>
             </a:r>
-            <a:endParaRPr sz="1350" b="0">
-              <a:solidFill>
-                <a:srgbClr val="1F2D22"/>
-              </a:solidFill>
-            </a:endParaRPr>
           </a:p>
         </p:txBody>
       </p:sp>
@@ -6048,11 +5967,6 @@
               </a:rPr>
               <a:t>结果</a:t>
             </a:r>
-            <a:endParaRPr sz="1650" b="1">
-              <a:solidFill>
-                <a:srgbClr val="2D4A33"/>
-              </a:solidFill>
-            </a:endParaRPr>
           </a:p>
         </p:txBody>
       </p:sp>
@@ -6105,11 +6019,6 @@
               </a:rPr>
               <a:t>索引与召回更灵活，检索能力明显增强。</a:t>
             </a:r>
-            <a:endParaRPr sz="1350" b="0">
-              <a:solidFill>
-                <a:srgbClr val="1F2D22"/>
-              </a:solidFill>
-            </a:endParaRPr>
           </a:p>
         </p:txBody>
       </p:sp>
@@ -6895,12 +6804,6 @@
               </a:rPr>
               <a:t>。</a:t>
             </a:r>
-            <a:endParaRPr sz="2000" dirty="0">
-              <a:solidFill>
-                <a:srgbClr val="1F2D22"/>
-              </a:solidFill>
-              <a:latin typeface="ui-monospace"/>
-            </a:endParaRPr>
           </a:p>
         </p:txBody>
       </p:sp>
@@ -6975,6 +6878,7 @@
             <a:pPr algn="ctr">
               <a:buNone/>
             </a:pPr>
+            <a:endParaRPr/>
           </a:p>
         </p:txBody>
       </p:sp>
@@ -7127,6 +7031,7 @@
             <a:pPr algn="ctr">
               <a:buNone/>
             </a:pPr>
+            <a:endParaRPr/>
           </a:p>
         </p:txBody>
       </p:sp>
@@ -7176,6 +7081,7 @@
             <a:pPr algn="ctr">
               <a:buNone/>
             </a:pPr>
+            <a:endParaRPr/>
           </a:p>
         </p:txBody>
       </p:sp>
@@ -7225,6 +7131,7 @@
             <a:pPr algn="ctr">
               <a:buNone/>
             </a:pPr>
+            <a:endParaRPr/>
           </a:p>
         </p:txBody>
       </p:sp>
@@ -7274,6 +7181,7 @@
             <a:pPr algn="ctr">
               <a:buNone/>
             </a:pPr>
+            <a:endParaRPr/>
           </a:p>
         </p:txBody>
       </p:sp>
@@ -7325,6 +7233,7 @@
             <a:pPr algn="ctr">
               <a:buNone/>
             </a:pPr>
+            <a:endParaRPr/>
           </a:p>
         </p:txBody>
       </p:sp>
@@ -7337,7 +7246,7 @@
           <p:nvPr/>
         </p:nvPicPr>
         <p:blipFill>
-          <a:blip r:embed="rId1"/>
+          <a:blip r:embed="rId3"/>
           <a:stretch>
             <a:fillRect/>
           </a:stretch>
@@ -7442,20 +7351,6 @@
               </a:rPr>
               <a:t>01</a:t>
             </a:r>
-            <a:endParaRPr kumimoji="0" sz="13800" b="0" i="0" u="none" strike="noStrike" kern="1200" cap="none" spc="0" normalizeH="0" baseline="0" noProof="0" dirty="0">
-              <a:ln>
-                <a:noFill/>
-              </a:ln>
-              <a:solidFill>
-                <a:srgbClr val="F5F4F9"/>
-              </a:solidFill>
-              <a:effectLst/>
-              <a:uLnTx/>
-              <a:uFillTx/>
-              <a:latin typeface="Arial" panose="020B0604020202020204"/>
-              <a:ea typeface="华文中宋" panose="02010600040101010101" charset="-122"/>
-              <a:cs typeface="+mn-cs"/>
-            </a:endParaRPr>
           </a:p>
         </p:txBody>
       </p:sp>
@@ -8004,11 +7899,6 @@
               </a:rPr>
               <a:t>API</a:t>
             </a:r>
-            <a:endParaRPr lang="en-US" altLang="zh-CN" sz="1350" dirty="0">
-              <a:solidFill>
-                <a:srgbClr val="1F2D22"/>
-              </a:solidFill>
-            </a:endParaRPr>
           </a:p>
           <a:p>
             <a:pPr algn="l">
@@ -8110,11 +8000,6 @@
               </a:rPr>
               <a:t>结果</a:t>
             </a:r>
-            <a:endParaRPr sz="1650" b="1">
-              <a:solidFill>
-                <a:srgbClr val="2D4A33"/>
-              </a:solidFill>
-            </a:endParaRPr>
           </a:p>
         </p:txBody>
       </p:sp>
@@ -8315,11 +8200,6 @@
               </a:rPr>
               <a:t>刘义群</a:t>
             </a:r>
-            <a:endParaRPr lang="zh-CN" altLang="en-US" sz="5400" b="1" dirty="0">
-              <a:solidFill>
-                <a:schemeClr val="bg1"/>
-              </a:solidFill>
-            </a:endParaRPr>
           </a:p>
           <a:p>
             <a:pPr algn="ctr">
@@ -8333,11 +8213,6 @@
               </a:rPr>
               <a:t>负责垂直搜索引擎</a:t>
             </a:r>
-            <a:endParaRPr lang="zh-CN" sz="5400" b="1" dirty="0">
-              <a:solidFill>
-                <a:schemeClr val="bg1"/>
-              </a:solidFill>
-            </a:endParaRPr>
           </a:p>
         </p:txBody>
       </p:sp>
@@ -8458,11 +8333,6 @@
               </a:rPr>
               <a:t>首页显示部分（新增前端功能）</a:t>
             </a:r>
-            <a:endParaRPr lang="zh-CN" altLang="en-US" sz="2550" b="1" dirty="0">
-              <a:solidFill>
-                <a:srgbClr val="2D4A33"/>
-              </a:solidFill>
-            </a:endParaRPr>
           </a:p>
         </p:txBody>
       </p:sp>
@@ -8542,11 +8412,6 @@
               </a:rPr>
               <a:t>页面</a:t>
             </a:r>
-            <a:endParaRPr sz="1650" b="1">
-              <a:solidFill>
-                <a:srgbClr val="2D4A33"/>
-              </a:solidFill>
-            </a:endParaRPr>
           </a:p>
         </p:txBody>
       </p:sp>
@@ -8607,11 +8472,6 @@
               </a:rPr>
               <a:t>搜索页面</a:t>
             </a:r>
-            <a:endParaRPr lang="zh-CN" altLang="en-US" sz="1350" b="0">
-              <a:solidFill>
-                <a:srgbClr val="1F2D22"/>
-              </a:solidFill>
-            </a:endParaRPr>
           </a:p>
           <a:p>
             <a:pPr algn="l">
@@ -8653,11 +8513,6 @@
               </a:rPr>
               <a:t>"</a:t>
             </a:r>
-            <a:endParaRPr lang="en-US" altLang="zh-CN" sz="1350" b="0">
-              <a:solidFill>
-                <a:srgbClr val="1F2D22"/>
-              </a:solidFill>
-            </a:endParaRPr>
           </a:p>
           <a:p>
             <a:pPr algn="l">
@@ -8675,11 +8530,6 @@
               </a:rPr>
               <a:t>结果区域：页面挂载即自动渲染图书列表，无需点击搜索</a:t>
             </a:r>
-            <a:endParaRPr lang="zh-CN" altLang="en-US" sz="1350" b="0">
-              <a:solidFill>
-                <a:srgbClr val="1F2D22"/>
-              </a:solidFill>
-            </a:endParaRPr>
           </a:p>
         </p:txBody>
       </p:sp>
@@ -8759,11 +8609,6 @@
               </a:rPr>
               <a:t>流程</a:t>
             </a:r>
-            <a:endParaRPr sz="1650" b="1">
-              <a:solidFill>
-                <a:srgbClr val="2D4A33"/>
-              </a:solidFill>
-            </a:endParaRPr>
           </a:p>
         </p:txBody>
       </p:sp>
@@ -8856,11 +8701,6 @@
               </a:rPr>
               <a:t> searchPage()</a:t>
             </a:r>
-            <a:endParaRPr lang="en-US" altLang="zh-CN" sz="1350" b="0">
-              <a:solidFill>
-                <a:srgbClr val="1F2D22"/>
-              </a:solidFill>
-            </a:endParaRPr>
           </a:p>
           <a:p>
             <a:pPr algn="l">
@@ -8926,11 +8766,6 @@
               </a:rPr>
               <a:t> /query</a:t>
             </a:r>
-            <a:endParaRPr lang="en-US" altLang="zh-CN" sz="1350" b="0">
-              <a:solidFill>
-                <a:srgbClr val="1F2D22"/>
-              </a:solidFill>
-            </a:endParaRPr>
           </a:p>
           <a:p>
             <a:pPr algn="l">
@@ -9012,11 +8847,6 @@
               </a:rPr>
               <a:t>随机排序</a:t>
             </a:r>
-            <a:endParaRPr lang="zh-CN" altLang="en-US" sz="1350" b="0">
-              <a:solidFill>
-                <a:srgbClr val="1F2D22"/>
-              </a:solidFill>
-            </a:endParaRPr>
           </a:p>
           <a:p>
             <a:pPr algn="l">
@@ -9050,11 +8880,6 @@
               </a:rPr>
               <a:t>返回结果，前端渲染图书列表</a:t>
             </a:r>
-            <a:endParaRPr lang="zh-CN" altLang="en-US" sz="1350" b="0">
-              <a:solidFill>
-                <a:srgbClr val="1F2D22"/>
-              </a:solidFill>
-            </a:endParaRPr>
           </a:p>
         </p:txBody>
       </p:sp>
@@ -9134,11 +8959,6 @@
               </a:rPr>
               <a:t>结果</a:t>
             </a:r>
-            <a:endParaRPr sz="1650" b="1">
-              <a:solidFill>
-                <a:srgbClr val="2D4A33"/>
-              </a:solidFill>
-            </a:endParaRPr>
           </a:p>
         </p:txBody>
       </p:sp>
@@ -9191,11 +9011,6 @@
               </a:rPr>
               <a:t>首页打开即展示随机图书，无需手动搜索</a:t>
             </a:r>
-            <a:endParaRPr lang="zh-CN" altLang="en-US" sz="1350" b="0">
-              <a:solidFill>
-                <a:srgbClr val="1F2D22"/>
-              </a:solidFill>
-            </a:endParaRPr>
           </a:p>
           <a:p>
             <a:pPr algn="l">
@@ -9229,11 +9044,6 @@
               </a:rPr>
               <a:t>索引中的书籍</a:t>
             </a:r>
-            <a:endParaRPr lang="zh-CN" altLang="en-US" sz="1350" b="0">
-              <a:solidFill>
-                <a:srgbClr val="1F2D22"/>
-              </a:solidFill>
-            </a:endParaRPr>
           </a:p>
           <a:p>
             <a:pPr algn="l">
@@ -9251,11 +9061,6 @@
               </a:rPr>
               <a:t>有关键词时仍按标题匹配精确搜索</a:t>
             </a:r>
-            <a:endParaRPr lang="zh-CN" altLang="en-US" sz="1350" b="0">
-              <a:solidFill>
-                <a:srgbClr val="1F2D22"/>
-              </a:solidFill>
-            </a:endParaRPr>
           </a:p>
         </p:txBody>
       </p:sp>
@@ -9376,11 +9181,6 @@
               </a:rPr>
               <a:t>价格排序部分</a:t>
             </a:r>
-            <a:endParaRPr lang="zh-CN" altLang="en-US" sz="2550" b="1" dirty="0">
-              <a:solidFill>
-                <a:srgbClr val="2D4A33"/>
-              </a:solidFill>
-            </a:endParaRPr>
           </a:p>
         </p:txBody>
       </p:sp>
@@ -9460,11 +9260,6 @@
               </a:rPr>
               <a:t>页面</a:t>
             </a:r>
-            <a:endParaRPr sz="1650" b="1">
-              <a:solidFill>
-                <a:srgbClr val="2D4A33"/>
-              </a:solidFill>
-            </a:endParaRPr>
           </a:p>
         </p:txBody>
       </p:sp>
@@ -9525,11 +9320,6 @@
               </a:rPr>
               <a:t>搜索页面</a:t>
             </a:r>
-            <a:endParaRPr lang="zh-CN" altLang="en-US" sz="1350" b="0">
-              <a:solidFill>
-                <a:srgbClr val="1F2D22"/>
-              </a:solidFill>
-            </a:endParaRPr>
           </a:p>
           <a:p>
             <a:pPr algn="l">
@@ -9571,11 +9361,6 @@
               </a:rPr>
               <a:t>文字变为可点击排序控件</a:t>
             </a:r>
-            <a:endParaRPr lang="zh-CN" altLang="en-US" sz="1350" b="0">
-              <a:solidFill>
-                <a:srgbClr val="1F2D22"/>
-              </a:solidFill>
-            </a:endParaRPr>
           </a:p>
           <a:p>
             <a:pPr algn="l">
@@ -9633,11 +9418,6 @@
               </a:rPr>
               <a:t>降序）</a:t>
             </a:r>
-            <a:endParaRPr lang="zh-CN" altLang="en-US" sz="1350" b="0">
-              <a:solidFill>
-                <a:srgbClr val="1F2D22"/>
-              </a:solidFill>
-            </a:endParaRPr>
           </a:p>
         </p:txBody>
       </p:sp>
@@ -9717,11 +9497,6 @@
               </a:rPr>
               <a:t>流程</a:t>
             </a:r>
-            <a:endParaRPr sz="1650" b="1">
-              <a:solidFill>
-                <a:srgbClr val="2D4A33"/>
-              </a:solidFill>
-            </a:endParaRPr>
           </a:p>
         </p:txBody>
       </p:sp>
@@ -9846,11 +9621,6 @@
               </a:rPr>
               <a:t> sortOrder</a:t>
             </a:r>
-            <a:endParaRPr lang="en-US" altLang="zh-CN" sz="1350" b="0">
-              <a:solidFill>
-                <a:srgbClr val="1F2D22"/>
-              </a:solidFill>
-            </a:endParaRPr>
           </a:p>
           <a:p>
             <a:pPr algn="l">
@@ -9908,11 +9678,6 @@
               </a:rPr>
               <a:t> /query</a:t>
             </a:r>
-            <a:endParaRPr lang="en-US" altLang="zh-CN" sz="1350" b="0">
-              <a:solidFill>
-                <a:srgbClr val="1F2D22"/>
-              </a:solidFill>
-            </a:endParaRPr>
           </a:p>
           <a:p>
             <a:pPr algn="l">
@@ -9954,11 +9719,6 @@
               </a:rPr>
               <a:t> ContentService</a:t>
             </a:r>
-            <a:endParaRPr lang="en-US" altLang="zh-CN" sz="1350" b="0">
-              <a:solidFill>
-                <a:srgbClr val="1F2D22"/>
-              </a:solidFill>
-            </a:endParaRPr>
           </a:p>
           <a:p>
             <a:pPr algn="l">
@@ -10008,11 +9768,6 @@
               </a:rPr>
               <a:t>端按价格字段排序</a:t>
             </a:r>
-            <a:endParaRPr lang="zh-CN" altLang="en-US" sz="1350" b="0">
-              <a:solidFill>
-                <a:srgbClr val="1F2D22"/>
-              </a:solidFill>
-            </a:endParaRPr>
           </a:p>
           <a:p>
             <a:pPr algn="l">
@@ -10046,11 +9801,6 @@
               </a:rPr>
               <a:t>排序结果返回前端，页面重新渲染</a:t>
             </a:r>
-            <a:endParaRPr lang="zh-CN" altLang="en-US" sz="1350" b="0">
-              <a:solidFill>
-                <a:srgbClr val="1F2D22"/>
-              </a:solidFill>
-            </a:endParaRPr>
           </a:p>
         </p:txBody>
       </p:sp>
@@ -10130,11 +9880,6 @@
               </a:rPr>
               <a:t>结果</a:t>
             </a:r>
-            <a:endParaRPr sz="1650" b="1">
-              <a:solidFill>
-                <a:srgbClr val="2D4A33"/>
-              </a:solidFill>
-            </a:endParaRPr>
           </a:p>
         </p:txBody>
       </p:sp>
@@ -10203,11 +9948,6 @@
               </a:rPr>
               <a:t>降序切换</a:t>
             </a:r>
-            <a:endParaRPr lang="zh-CN" altLang="en-US" sz="1350" b="0">
-              <a:solidFill>
-                <a:srgbClr val="1F2D22"/>
-              </a:solidFill>
-            </a:endParaRPr>
           </a:p>
           <a:p>
             <a:pPr algn="l">
@@ -10225,11 +9965,6 @@
               </a:rPr>
               <a:t>价格字段含非数字符号时自动解析为数值再排序</a:t>
             </a:r>
-            <a:endParaRPr lang="zh-CN" altLang="en-US" sz="1350" b="0">
-              <a:solidFill>
-                <a:srgbClr val="1F2D22"/>
-              </a:solidFill>
-            </a:endParaRPr>
           </a:p>
           <a:p>
             <a:pPr algn="l">
@@ -10263,11 +9998,6 @@
               </a:rPr>
               <a:t>索引结构</a:t>
             </a:r>
-            <a:endParaRPr lang="zh-CN" altLang="en-US" sz="1350" b="0">
-              <a:solidFill>
-                <a:srgbClr val="1F2D22"/>
-              </a:solidFill>
-            </a:endParaRPr>
           </a:p>
         </p:txBody>
       </p:sp>
@@ -10388,11 +10118,6 @@
               </a:rPr>
               <a:t>增加商品部分</a:t>
             </a:r>
-            <a:endParaRPr lang="zh-CN" altLang="en-US" sz="2550" b="1" dirty="0">
-              <a:solidFill>
-                <a:srgbClr val="2D4A33"/>
-              </a:solidFill>
-            </a:endParaRPr>
           </a:p>
         </p:txBody>
       </p:sp>
@@ -10472,11 +10197,6 @@
               </a:rPr>
               <a:t>流程</a:t>
             </a:r>
-            <a:endParaRPr sz="1650" b="1">
-              <a:solidFill>
-                <a:srgbClr val="2D4A33"/>
-              </a:solidFill>
-            </a:endParaRPr>
           </a:p>
         </p:txBody>
       </p:sp>
@@ -10593,11 +10313,6 @@
               </a:rPr>
               <a:t>中</a:t>
             </a:r>
-            <a:endParaRPr lang="zh-CN" altLang="en-US" sz="1350" b="0">
-              <a:solidFill>
-                <a:srgbClr val="1F2D22"/>
-              </a:solidFill>
-            </a:endParaRPr>
           </a:p>
           <a:p>
             <a:pPr algn="l">
@@ -10647,11 +10362,6 @@
               </a:rPr>
               <a:t>数据库中</a:t>
             </a:r>
-            <a:endParaRPr lang="zh-CN" altLang="en-US" sz="1350" b="0">
-              <a:solidFill>
-                <a:srgbClr val="1F2D22"/>
-              </a:solidFill>
-            </a:endParaRPr>
           </a:p>
         </p:txBody>
       </p:sp>
@@ -10735,11 +10445,6 @@
               </a:rPr>
               <a:t>结果</a:t>
             </a:r>
-            <a:endParaRPr sz="1650" b="1">
-              <a:solidFill>
-                <a:srgbClr val="2D4A33"/>
-              </a:solidFill>
-            </a:endParaRPr>
           </a:p>
         </p:txBody>
       </p:sp>
@@ -10812,11 +10517,6 @@
               </a:rPr>
               <a:t>的功能，并且可以通过搜索引擎查询到</a:t>
             </a:r>
-            <a:endParaRPr lang="zh-CN" altLang="en-US" sz="1350" b="0">
-              <a:solidFill>
-                <a:srgbClr val="1F2D22"/>
-              </a:solidFill>
-            </a:endParaRPr>
           </a:p>
         </p:txBody>
       </p:sp>
@@ -11019,13 +10719,13 @@
 </file>
 
 <file path=ppt/tags/tag1.xml><?xml version="1.0" encoding="utf-8"?>
-<p:tagLst xmlns:p="http://schemas.openxmlformats.org/presentationml/2006/main">
+<p:tagLst xmlns:a="http://schemas.openxmlformats.org/drawingml/2006/main" xmlns:r="http://schemas.openxmlformats.org/officeDocument/2006/relationships" xmlns:p="http://schemas.openxmlformats.org/presentationml/2006/main">
   <p:tag name="KSO_WM_DIAGRAM_VIRTUALLY_FRAME" val="{&quot;height&quot;:285.4,&quot;left&quot;:67.5,&quot;top&quot;:127.5,&quot;width&quot;:717}"/>
 </p:tagLst>
 </file>
 
 <file path=ppt/tags/tag2.xml><?xml version="1.0" encoding="utf-8"?>
-<p:tagLst xmlns:p="http://schemas.openxmlformats.org/presentationml/2006/main">
+<p:tagLst xmlns:a="http://schemas.openxmlformats.org/drawingml/2006/main" xmlns:r="http://schemas.openxmlformats.org/officeDocument/2006/relationships" xmlns:p="http://schemas.openxmlformats.org/presentationml/2006/main">
   <p:tag name="KSO_WM_DIAGRAM_VIRTUALLY_FRAME" val="{&quot;height&quot;:285.4,&quot;left&quot;:67.5,&quot;top&quot;:127.5,&quot;width&quot;:717}"/>
 </p:tagLst>
 </file>
@@ -11172,6 +10872,8 @@
       </a:bgFillStyleLst>
     </a:fmtScheme>
   </a:themeElements>
+  <a:objectDefaults/>
+  <a:extraClrSchemeLst/>
   <a:extLst>
     <a:ext uri="{05A4C25C-085E-4340-85A3-A5531E510DB2}">
       <thm15:themeFamily xmlns:thm15="http://schemas.microsoft.com/office/thememl/2012/main" name="Office Theme" id="{62F939B6-93AF-4DB8-9C6B-D6C7DFDC589F}" vid="{4A3C46E8-61CC-4603-A589-7422A47A8E4A}"/>
@@ -11322,6 +11024,8 @@
       </a:bgFillStyleLst>
     </a:fmtScheme>
   </a:themeElements>
+  <a:objectDefaults/>
+  <a:extraClrSchemeLst/>
   <a:extLst>
     <a:ext uri="{05A4C25C-085E-4340-85A3-A5531E510DB2}">
       <thm15:themeFamily xmlns:thm15="http://schemas.microsoft.com/office/thememl/2012/main" name="Office Theme" id="{62F939B6-93AF-4DB8-9C6B-D6C7DFDC589F}" vid="{4A3C46E8-61CC-4603-A589-7422A47A8E4A}"/>

--- a/report/搜索引擎总结.pptx
+++ b/report/搜索引擎总结.pptx
@@ -1669,7 +1669,7 @@
           <a:p>
             <a:fld id="{A653A8F1-9EDF-49EF-A14D-E495AD864F8A}" type="datetimeFigureOut">
               <a:rPr lang="zh-CN" altLang="en-US"/>
-              <a:t>2026/6/15</a:t>
+              <a:t>2026.6.15</a:t>
             </a:fld>
             <a:endParaRPr/>
           </a:p>
@@ -1836,7 +1836,7 @@
           <a:p>
             <a:fld id="{A653A8F1-9EDF-49EF-A14D-E495AD864F8A}" type="datetimeFigureOut">
               <a:rPr lang="zh-CN" altLang="en-US"/>
-              <a:t>2026/6/15</a:t>
+              <a:t>2026.6.15</a:t>
             </a:fld>
             <a:endParaRPr/>
           </a:p>
@@ -2013,7 +2013,7 @@
           <a:p>
             <a:fld id="{A653A8F1-9EDF-49EF-A14D-E495AD864F8A}" type="datetimeFigureOut">
               <a:rPr lang="zh-CN" altLang="en-US"/>
-              <a:t>2026/6/15</a:t>
+              <a:t>2026.6.15</a:t>
             </a:fld>
             <a:endParaRPr/>
           </a:p>
@@ -2180,7 +2180,7 @@
           <a:p>
             <a:fld id="{A653A8F1-9EDF-49EF-A14D-E495AD864F8A}" type="datetimeFigureOut">
               <a:rPr lang="zh-CN" altLang="en-US"/>
-              <a:t>2026/6/15</a:t>
+              <a:t>2026.6.15</a:t>
             </a:fld>
             <a:endParaRPr/>
           </a:p>
@@ -2421,7 +2421,7 @@
           <a:p>
             <a:fld id="{A653A8F1-9EDF-49EF-A14D-E495AD864F8A}" type="datetimeFigureOut">
               <a:rPr lang="zh-CN" altLang="en-US"/>
-              <a:t>2026/6/15</a:t>
+              <a:t>2026.6.15</a:t>
             </a:fld>
             <a:endParaRPr/>
           </a:p>
@@ -2654,7 +2654,7 @@
           <a:p>
             <a:fld id="{A653A8F1-9EDF-49EF-A14D-E495AD864F8A}" type="datetimeFigureOut">
               <a:rPr lang="zh-CN" altLang="en-US"/>
-              <a:t>2026/6/15</a:t>
+              <a:t>2026.6.15</a:t>
             </a:fld>
             <a:endParaRPr/>
           </a:p>
@@ -3024,7 +3024,7 @@
           <a:p>
             <a:fld id="{A653A8F1-9EDF-49EF-A14D-E495AD864F8A}" type="datetimeFigureOut">
               <a:rPr lang="zh-CN" altLang="en-US"/>
-              <a:t>2026/6/15</a:t>
+              <a:t>2026.6.15</a:t>
             </a:fld>
             <a:endParaRPr/>
           </a:p>
@@ -3135,7 +3135,7 @@
           <a:p>
             <a:fld id="{A653A8F1-9EDF-49EF-A14D-E495AD864F8A}" type="datetimeFigureOut">
               <a:rPr lang="zh-CN" altLang="en-US"/>
-              <a:t>2026/6/15</a:t>
+              <a:t>2026.6.15</a:t>
             </a:fld>
             <a:endParaRPr/>
           </a:p>
@@ -3225,7 +3225,7 @@
           <a:p>
             <a:fld id="{A653A8F1-9EDF-49EF-A14D-E495AD864F8A}" type="datetimeFigureOut">
               <a:rPr lang="zh-CN" altLang="en-US"/>
-              <a:t>2026/6/15</a:t>
+              <a:t>2026.6.15</a:t>
             </a:fld>
             <a:endParaRPr/>
           </a:p>
@@ -3510,7 +3510,7 @@
           <a:p>
             <a:fld id="{A653A8F1-9EDF-49EF-A14D-E495AD864F8A}" type="datetimeFigureOut">
               <a:rPr lang="zh-CN" altLang="en-US"/>
-              <a:t>2026/6/15</a:t>
+              <a:t>2026.6.15</a:t>
             </a:fld>
             <a:endParaRPr/>
           </a:p>
@@ -3758,7 +3758,7 @@
           <a:p>
             <a:fld id="{A653A8F1-9EDF-49EF-A14D-E495AD864F8A}" type="datetimeFigureOut">
               <a:rPr lang="zh-CN" altLang="en-US"/>
-              <a:t>2026/6/15</a:t>
+              <a:t>2026.6.15</a:t>
             </a:fld>
             <a:endParaRPr/>
           </a:p>
@@ -3969,7 +3969,7 @@
           <a:p>
             <a:fld id="{A653A8F1-9EDF-49EF-A14D-E495AD864F8A}" type="datetimeFigureOut">
               <a:rPr lang="zh-CN" altLang="en-US"/>
-              <a:t>2026/6/15</a:t>
+              <a:t>2026.6.15</a:t>
             </a:fld>
             <a:endParaRPr/>
           </a:p>
@@ -5305,7 +5305,7 @@
               <a:t>并将数据导入</a:t>
             </a:r>
             <a:r>
-              <a:rPr lang="en-US" altLang="zh-CN" sz="2000">
+              <a:rPr lang="en-US" altLang="zh-CN" sz="2000" dirty="0">
                 <a:solidFill>
                   <a:srgbClr val="1F2D22"/>
                 </a:solidFill>
@@ -7672,7 +7672,7 @@
         </p:nvSpPr>
         <p:spPr>
           <a:xfrm>
-            <a:off x="2000250" y="1476375"/>
+            <a:off x="3750561" y="1429282"/>
             <a:ext cx="4762500" cy="1619250"/>
           </a:xfrm>
           <a:prstGeom prst="rect">
@@ -7699,7 +7699,7 @@
         </p:nvSpPr>
         <p:spPr>
           <a:xfrm>
-            <a:off x="2228850" y="1647825"/>
+            <a:off x="3979161" y="1600732"/>
             <a:ext cx="4305300" cy="323850"/>
           </a:xfrm>
           <a:prstGeom prst="rect">
@@ -7756,7 +7756,7 @@
         </p:nvSpPr>
         <p:spPr>
           <a:xfrm>
-            <a:off x="2228850" y="2085975"/>
+            <a:off x="3979161" y="2038882"/>
             <a:ext cx="4305300" cy="857250"/>
           </a:xfrm>
           <a:prstGeom prst="rect">
@@ -7793,49 +7793,22 @@
                   <a:srgbClr val="1F2D22"/>
                 </a:solidFill>
               </a:rPr>
-              <a:t>整理并配置环境，生成</a:t>
-            </a:r>
-            <a:r>
-              <a:rPr lang="en-US" altLang="zh-CN" sz="1350" b="0" dirty="0">
-                <a:solidFill>
-                  <a:srgbClr val="1F2D22"/>
-                </a:solidFill>
-              </a:rPr>
-              <a:t>requirements</a:t>
-            </a:r>
-            <a:r>
-              <a:rPr lang="zh-CN" altLang="en-US" sz="1350" b="0" dirty="0">
-                <a:solidFill>
-                  <a:srgbClr val="1F2D22"/>
-                </a:solidFill>
-              </a:rPr>
-              <a:t>配置文件</a:t>
-            </a:r>
-            <a:endParaRPr lang="en-US" altLang="zh-CN" sz="1350" b="0" dirty="0">
-              <a:solidFill>
-                <a:srgbClr val="1F2D22"/>
-              </a:solidFill>
-            </a:endParaRPr>
-          </a:p>
-          <a:p>
-            <a:pPr>
-              <a:defRPr sz="1350" b="0">
-                <a:solidFill>
-                  <a:srgbClr val="1F2D22"/>
-                </a:solidFill>
-              </a:defRPr>
-            </a:pPr>
+              <a:t>负责进行改动后的功能测试</a:t>
+            </a:r>
+            <a:br>
+              <a:rPr lang="en-US" altLang="zh-CN" sz="1350" dirty="0">
+                <a:solidFill>
+                  <a:srgbClr val="1F2D22"/>
+                </a:solidFill>
+              </a:rPr>
+            </a:br>
             <a:r>
               <a:rPr lang="zh-CN" altLang="en-US" sz="1350" dirty="0">
                 <a:solidFill>
                   <a:srgbClr val="1F2D22"/>
                 </a:solidFill>
               </a:rPr>
-              <a:t>部署本地嵌入模型</a:t>
-            </a:r>
-            <a:r>
-              <a:rPr lang="zh-CN" altLang="zh-CN" sz="1350" dirty="0"/>
-              <a:t>BAAI/bge-small-zh-v1.5</a:t>
+              <a:t>测试搜索页面和功能能否可以正常运行</a:t>
             </a:r>
             <a:endParaRPr lang="en-US" altLang="zh-CN" sz="1350" dirty="0">
               <a:solidFill>
@@ -7852,227 +7825,12 @@
               </a:defRPr>
             </a:pPr>
             <a:r>
-              <a:rPr lang="zh-CN" altLang="en-US" sz="1350" dirty="0">
-                <a:solidFill>
-                  <a:srgbClr val="1F2D22"/>
-                </a:solidFill>
-              </a:rPr>
-              <a:t>支持</a:t>
-            </a:r>
-            <a:r>
-              <a:rPr lang="en-US" altLang="zh-CN" sz="1350" dirty="0" err="1">
-                <a:solidFill>
-                  <a:srgbClr val="1F2D22"/>
-                </a:solidFill>
-              </a:rPr>
-              <a:t>deepseek</a:t>
-            </a:r>
-            <a:r>
-              <a:rPr lang="zh-CN" altLang="en-US" sz="1350" dirty="0">
-                <a:solidFill>
-                  <a:srgbClr val="1F2D22"/>
-                </a:solidFill>
-              </a:rPr>
-              <a:t>和</a:t>
-            </a:r>
-            <a:r>
-              <a:rPr lang="en-US" altLang="zh-CN" sz="1350" dirty="0">
-                <a:solidFill>
-                  <a:srgbClr val="1F2D22"/>
-                </a:solidFill>
-              </a:rPr>
-              <a:t>Qwen</a:t>
-            </a:r>
-            <a:r>
-              <a:rPr lang="zh-CN" altLang="en-US" sz="1350" dirty="0">
-                <a:solidFill>
-                  <a:srgbClr val="1F2D22"/>
-                </a:solidFill>
-              </a:rPr>
-              <a:t>的</a:t>
-            </a:r>
-            <a:r>
-              <a:rPr lang="en-US" altLang="zh-CN" sz="1350" dirty="0">
-                <a:solidFill>
-                  <a:srgbClr val="1F2D22"/>
-                </a:solidFill>
-              </a:rPr>
-              <a:t>API</a:t>
-            </a:r>
-          </a:p>
-          <a:p>
-            <a:pPr algn="l">
-              <a:defRPr sz="1350" b="0">
-                <a:solidFill>
-                  <a:srgbClr val="1F2D22"/>
-                </a:solidFill>
-              </a:defRPr>
-            </a:pPr>
-            <a:r>
               <a:rPr lang="zh-CN" altLang="en-US" sz="1350" b="0" dirty="0">
                 <a:solidFill>
                   <a:srgbClr val="1F2D22"/>
                 </a:solidFill>
               </a:rPr>
-              <a:t>导入课程问答数据</a:t>
-            </a:r>
-            <a:endParaRPr sz="1350" b="0" dirty="0">
-              <a:solidFill>
-                <a:srgbClr val="1F2D22"/>
-              </a:solidFill>
-            </a:endParaRPr>
-          </a:p>
-        </p:txBody>
-      </p:sp>
-      <p:sp>
-        <p:nvSpPr>
-          <p:cNvPr id="10" name="矩形 9"/>
-          <p:cNvSpPr>
-            <a:spLocks noGrp="1"/>
-          </p:cNvSpPr>
-          <p:nvPr/>
-        </p:nvSpPr>
-        <p:spPr>
-          <a:xfrm>
-            <a:off x="2000250" y="3714750"/>
-            <a:ext cx="8191500" cy="1428750"/>
-          </a:xfrm>
-          <a:prstGeom prst="rect">
-            <a:avLst/>
-          </a:prstGeom>
-          <a:solidFill>
-            <a:srgbClr val="FFFFFF"/>
-          </a:solidFill>
-          <a:ln w="9525">
-            <a:solidFill>
-              <a:srgbClr val="C7D0C4"/>
-            </a:solidFill>
-            <a:prstDash val="solid"/>
-          </a:ln>
-        </p:spPr>
-      </p:sp>
-      <p:sp>
-        <p:nvSpPr>
-          <p:cNvPr id="11" name="矩形 10"/>
-          <p:cNvSpPr>
-            <a:spLocks noGrp="1"/>
-          </p:cNvSpPr>
-          <p:nvPr/>
-        </p:nvSpPr>
-        <p:spPr>
-          <a:xfrm>
-            <a:off x="2228850" y="3886200"/>
-            <a:ext cx="7734300" cy="323850"/>
-          </a:xfrm>
-          <a:prstGeom prst="rect">
-            <a:avLst/>
-          </a:prstGeom>
-          <a:solidFill>
-            <a:srgbClr val="000000">
-              <a:alpha val="0"/>
-            </a:srgbClr>
-          </a:solidFill>
-          <a:ln w="0">
-            <a:solidFill>
-              <a:srgbClr val="000000">
-                <a:alpha val="0"/>
-              </a:srgbClr>
-            </a:solidFill>
-            <a:prstDash val="solid"/>
-          </a:ln>
-        </p:spPr>
-        <p:txBody>
-          <a:bodyPr anchor="ctr"/>
-          <a:lstStyle/>
-          <a:p>
-            <a:pPr algn="l">
-              <a:defRPr sz="1650" b="1">
-                <a:solidFill>
-                  <a:srgbClr val="2D4A33"/>
-                </a:solidFill>
-              </a:defRPr>
-            </a:pPr>
-            <a:r>
-              <a:rPr sz="1650" b="1">
-                <a:solidFill>
-                  <a:srgbClr val="2D4A33"/>
-                </a:solidFill>
-              </a:rPr>
-              <a:t>结果</a:t>
-            </a:r>
-          </a:p>
-        </p:txBody>
-      </p:sp>
-      <p:sp>
-        <p:nvSpPr>
-          <p:cNvPr id="12" name="矩形 11"/>
-          <p:cNvSpPr>
-            <a:spLocks noGrp="1"/>
-          </p:cNvSpPr>
-          <p:nvPr/>
-        </p:nvSpPr>
-        <p:spPr>
-          <a:xfrm>
-            <a:off x="2228850" y="4324350"/>
-            <a:ext cx="7734300" cy="666750"/>
-          </a:xfrm>
-          <a:prstGeom prst="rect">
-            <a:avLst/>
-          </a:prstGeom>
-          <a:solidFill>
-            <a:srgbClr val="000000">
-              <a:alpha val="0"/>
-            </a:srgbClr>
-          </a:solidFill>
-          <a:ln w="0">
-            <a:solidFill>
-              <a:srgbClr val="000000">
-                <a:alpha val="0"/>
-              </a:srgbClr>
-            </a:solidFill>
-            <a:prstDash val="solid"/>
-          </a:ln>
-        </p:spPr>
-        <p:txBody>
-          <a:bodyPr anchor="ctr"/>
-          <a:lstStyle/>
-          <a:p>
-            <a:pPr algn="l">
-              <a:defRPr sz="1350" b="0">
-                <a:solidFill>
-                  <a:srgbClr val="1F2D22"/>
-                </a:solidFill>
-              </a:defRPr>
-            </a:pPr>
-            <a:r>
-              <a:rPr lang="zh-CN" altLang="en-US" sz="1350" b="0" dirty="0">
-                <a:solidFill>
-                  <a:srgbClr val="1F2D22"/>
-                </a:solidFill>
-              </a:rPr>
-              <a:t>项目环境开箱即用</a:t>
-            </a:r>
-            <a:endParaRPr lang="en-US" altLang="zh-CN" sz="1350" b="0" dirty="0">
-              <a:solidFill>
-                <a:srgbClr val="1F2D22"/>
-              </a:solidFill>
-            </a:endParaRPr>
-          </a:p>
-          <a:p>
-            <a:pPr algn="l">
-              <a:defRPr sz="1350" b="0">
-                <a:solidFill>
-                  <a:srgbClr val="1F2D22"/>
-                </a:solidFill>
-              </a:defRPr>
-            </a:pPr>
-            <a:r>
-              <a:rPr lang="zh-CN" altLang="en-US" sz="1350" dirty="0">
-                <a:solidFill>
-                  <a:srgbClr val="1F2D22"/>
-                </a:solidFill>
-              </a:rPr>
-              <a:t>模型开箱即用</a:t>
+              <a:t>测试结果排序是否合理</a:t>
             </a:r>
             <a:endParaRPr sz="1350" b="0" dirty="0">
               <a:solidFill>

--- a/report/搜索引擎总结.pptx
+++ b/report/搜索引擎总结.pptx
@@ -5,7 +5,7 @@
     <p:sldMasterId id="2147483648" r:id="rId1"/>
   </p:sldMasterIdLst>
   <p:notesMasterIdLst>
-    <p:notesMasterId r:id="rId17"/>
+    <p:notesMasterId r:id="rId19"/>
   </p:notesMasterIdLst>
   <p:sldIdLst>
     <p:sldId id="256" r:id="rId2"/>
@@ -22,7 +22,9 @@
     <p:sldId id="264" r:id="rId13"/>
     <p:sldId id="272" r:id="rId14"/>
     <p:sldId id="261" r:id="rId15"/>
-    <p:sldId id="268" r:id="rId16"/>
+    <p:sldId id="277" r:id="rId16"/>
+    <p:sldId id="278" r:id="rId17"/>
+    <p:sldId id="268" r:id="rId18"/>
   </p:sldIdLst>
   <p:sldSz cx="12192000" cy="6858000"/>
   <p:notesSz cx="6858000" cy="9144000"/>
@@ -813,6 +815,244 @@
   <p:cSld>
     <p:spTree>
       <p:nvGrpSpPr>
+        <p:cNvPr id="1" name="">
+          <a:extLst>
+            <a:ext uri="{FF2B5EF4-FFF2-40B4-BE49-F238E27FC236}">
+              <a16:creationId xmlns:a16="http://schemas.microsoft.com/office/drawing/2014/main" id="{427FE98F-99FE-6221-8B45-DB141A8C755F}"/>
+            </a:ext>
+          </a:extLst>
+        </p:cNvPr>
+        <p:cNvGrpSpPr/>
+        <p:nvPr/>
+      </p:nvGrpSpPr>
+      <p:grpSpPr>
+        <a:xfrm>
+          <a:off x="0" y="0"/>
+          <a:ext cx="0" cy="0"/>
+          <a:chOff x="0" y="0"/>
+          <a:chExt cx="0" cy="0"/>
+        </a:xfrm>
+      </p:grpSpPr>
+      <p:sp>
+        <p:nvSpPr>
+          <p:cNvPr id="2" name="Slide Image Placeholder 1">
+            <a:extLst>
+              <a:ext uri="{FF2B5EF4-FFF2-40B4-BE49-F238E27FC236}">
+                <a16:creationId xmlns:a16="http://schemas.microsoft.com/office/drawing/2014/main" id="{BCFE8849-4DAA-F9AF-FEAD-933DEC3A3A72}"/>
+              </a:ext>
+            </a:extLst>
+          </p:cNvPr>
+          <p:cNvSpPr>
+            <a:spLocks noGrp="1" noRot="1" noChangeAspect="1"/>
+          </p:cNvSpPr>
+          <p:nvPr>
+            <p:ph type="sldImg"/>
+          </p:nvPr>
+        </p:nvSpPr>
+        <p:spPr/>
+      </p:sp>
+      <p:sp>
+        <p:nvSpPr>
+          <p:cNvPr id="3" name="Notes Placeholder 2">
+            <a:extLst>
+              <a:ext uri="{FF2B5EF4-FFF2-40B4-BE49-F238E27FC236}">
+                <a16:creationId xmlns:a16="http://schemas.microsoft.com/office/drawing/2014/main" id="{B4D6E39A-5DA3-1957-2F38-C939CC70DDB0}"/>
+              </a:ext>
+            </a:extLst>
+          </p:cNvPr>
+          <p:cNvSpPr>
+            <a:spLocks noGrp="1"/>
+          </p:cNvSpPr>
+          <p:nvPr>
+            <p:ph type="body" idx="1"/>
+          </p:nvPr>
+        </p:nvSpPr>
+        <p:spPr/>
+        <p:txBody>
+          <a:bodyPr/>
+          <a:lstStyle/>
+          <a:p>
+            <a:endParaRPr/>
+          </a:p>
+        </p:txBody>
+      </p:sp>
+      <p:sp>
+        <p:nvSpPr>
+          <p:cNvPr id="4" name="Slide Number Placeholder 3">
+            <a:extLst>
+              <a:ext uri="{FF2B5EF4-FFF2-40B4-BE49-F238E27FC236}">
+                <a16:creationId xmlns:a16="http://schemas.microsoft.com/office/drawing/2014/main" id="{8CDEB725-EA38-3C98-6C9C-744406FFBDDF}"/>
+              </a:ext>
+            </a:extLst>
+          </p:cNvPr>
+          <p:cNvSpPr>
+            <a:spLocks noGrp="1"/>
+          </p:cNvSpPr>
+          <p:nvPr>
+            <p:ph type="sldNum" idx="5"/>
+          </p:nvPr>
+        </p:nvSpPr>
+        <p:spPr/>
+        <p:txBody>
+          <a:bodyPr/>
+          <a:lstStyle/>
+          <a:p>
+            <a:pPr marL="0" marR="0" lvl="0" indent="0" algn="l" defTabSz="914400" eaLnBrk="1" fontAlgn="auto" latinLnBrk="0" hangingPunct="1">
+              <a:lnSpc>
+                <a:spcPct val="100000"/>
+              </a:lnSpc>
+              <a:spcBef>
+                <a:spcPts val="0"/>
+              </a:spcBef>
+              <a:spcAft>
+                <a:spcPts val="0"/>
+              </a:spcAft>
+              <a:buClrTx/>
+              <a:buSzTx/>
+              <a:buFontTx/>
+              <a:buNone/>
+              <a:tabLst/>
+              <a:defRPr/>
+            </a:pPr>
+            <a:endParaRPr kumimoji="0" sz="1800" b="0" i="0" u="none" strike="noStrike" kern="1200" cap="none" spc="0" normalizeH="0" baseline="0" noProof="0">
+              <a:ln>
+                <a:noFill/>
+              </a:ln>
+              <a:solidFill>
+                <a:prstClr val="black"/>
+              </a:solidFill>
+              <a:effectLst/>
+              <a:uLnTx/>
+              <a:uFillTx/>
+              <a:latin typeface="Arial" panose="020B0604020202020204"/>
+              <a:ea typeface="华文中宋" panose="02010600040101010101" charset="-122"/>
+              <a:cs typeface="+mn-cs"/>
+            </a:endParaRPr>
+          </a:p>
+        </p:txBody>
+      </p:sp>
+    </p:spTree>
+    <p:extLst>
+      <p:ext uri="{BB962C8B-B14F-4D97-AF65-F5344CB8AC3E}">
+        <p14:creationId xmlns:p14="http://schemas.microsoft.com/office/powerpoint/2010/main" val="3534818587"/>
+      </p:ext>
+    </p:extLst>
+  </p:cSld>
+  <p:clrMapOvr>
+    <a:masterClrMapping/>
+  </p:clrMapOvr>
+</p:notes>
+</file>
+
+<file path=ppt/notesSlides/notesSlide16.xml><?xml version="1.0" encoding="utf-8"?>
+<p:notes xmlns:a="http://schemas.openxmlformats.org/drawingml/2006/main" xmlns:r="http://schemas.openxmlformats.org/officeDocument/2006/relationships" xmlns:p="http://schemas.openxmlformats.org/presentationml/2006/main">
+  <p:cSld>
+    <p:spTree>
+      <p:nvGrpSpPr>
+        <p:cNvPr id="1" name="">
+          <a:extLst>
+            <a:ext uri="{FF2B5EF4-FFF2-40B4-BE49-F238E27FC236}">
+              <a16:creationId xmlns:a16="http://schemas.microsoft.com/office/drawing/2014/main" id="{34B84345-985B-12BC-D6D8-D3D43234F6E1}"/>
+            </a:ext>
+          </a:extLst>
+        </p:cNvPr>
+        <p:cNvGrpSpPr/>
+        <p:nvPr/>
+      </p:nvGrpSpPr>
+      <p:grpSpPr>
+        <a:xfrm>
+          <a:off x="0" y="0"/>
+          <a:ext cx="0" cy="0"/>
+          <a:chOff x="0" y="0"/>
+          <a:chExt cx="0" cy="0"/>
+        </a:xfrm>
+      </p:grpSpPr>
+      <p:sp>
+        <p:nvSpPr>
+          <p:cNvPr id="2" name="Slide Image Placeholder 1">
+            <a:extLst>
+              <a:ext uri="{FF2B5EF4-FFF2-40B4-BE49-F238E27FC236}">
+                <a16:creationId xmlns:a16="http://schemas.microsoft.com/office/drawing/2014/main" id="{1B61CF1B-1357-7310-F075-11C3BB73E802}"/>
+              </a:ext>
+            </a:extLst>
+          </p:cNvPr>
+          <p:cNvSpPr>
+            <a:spLocks noGrp="1" noRot="1" noChangeAspect="1"/>
+          </p:cNvSpPr>
+          <p:nvPr>
+            <p:ph type="sldImg"/>
+          </p:nvPr>
+        </p:nvSpPr>
+        <p:spPr/>
+      </p:sp>
+      <p:sp>
+        <p:nvSpPr>
+          <p:cNvPr id="3" name="Notes Placeholder 2">
+            <a:extLst>
+              <a:ext uri="{FF2B5EF4-FFF2-40B4-BE49-F238E27FC236}">
+                <a16:creationId xmlns:a16="http://schemas.microsoft.com/office/drawing/2014/main" id="{2956C420-5562-C84E-2588-F4B99A397757}"/>
+              </a:ext>
+            </a:extLst>
+          </p:cNvPr>
+          <p:cNvSpPr>
+            <a:spLocks noGrp="1"/>
+          </p:cNvSpPr>
+          <p:nvPr>
+            <p:ph type="body" idx="1"/>
+          </p:nvPr>
+        </p:nvSpPr>
+        <p:spPr/>
+        <p:txBody>
+          <a:bodyPr/>
+          <a:lstStyle/>
+          <a:p>
+            <a:endParaRPr/>
+          </a:p>
+        </p:txBody>
+      </p:sp>
+      <p:sp>
+        <p:nvSpPr>
+          <p:cNvPr id="4" name="Slide Number Placeholder 3">
+            <a:extLst>
+              <a:ext uri="{FF2B5EF4-FFF2-40B4-BE49-F238E27FC236}">
+                <a16:creationId xmlns:a16="http://schemas.microsoft.com/office/drawing/2014/main" id="{1C05C454-A65E-F302-19ED-1F704262633F}"/>
+              </a:ext>
+            </a:extLst>
+          </p:cNvPr>
+          <p:cNvSpPr>
+            <a:spLocks noGrp="1"/>
+          </p:cNvSpPr>
+          <p:nvPr>
+            <p:ph type="sldNum" idx="5"/>
+          </p:nvPr>
+        </p:nvSpPr>
+        <p:spPr/>
+        <p:txBody>
+          <a:bodyPr/>
+          <a:lstStyle/>
+          <a:p>
+            <a:endParaRPr/>
+          </a:p>
+        </p:txBody>
+      </p:sp>
+    </p:spTree>
+    <p:extLst>
+      <p:ext uri="{BB962C8B-B14F-4D97-AF65-F5344CB8AC3E}">
+        <p14:creationId xmlns:p14="http://schemas.microsoft.com/office/powerpoint/2010/main" val="129320305"/>
+      </p:ext>
+    </p:extLst>
+  </p:cSld>
+  <p:clrMapOvr>
+    <a:masterClrMapping/>
+  </p:clrMapOvr>
+</p:notes>
+</file>
+
+<file path=ppt/notesSlides/notesSlide17.xml><?xml version="1.0" encoding="utf-8"?>
+<p:notes xmlns:a="http://schemas.openxmlformats.org/drawingml/2006/main" xmlns:r="http://schemas.openxmlformats.org/officeDocument/2006/relationships" xmlns:p="http://schemas.openxmlformats.org/presentationml/2006/main">
+  <p:cSld>
+    <p:spTree>
+      <p:nvGrpSpPr>
         <p:cNvPr id="1" name=""/>
         <p:cNvGrpSpPr/>
         <p:nvPr/>
@@ -1669,7 +1909,7 @@
           <a:p>
             <a:fld id="{A653A8F1-9EDF-49EF-A14D-E495AD864F8A}" type="datetimeFigureOut">
               <a:rPr lang="zh-CN" altLang="en-US"/>
-              <a:t>2026.6.15</a:t>
+              <a:t>2026/6/16</a:t>
             </a:fld>
             <a:endParaRPr/>
           </a:p>
@@ -1836,7 +2076,7 @@
           <a:p>
             <a:fld id="{A653A8F1-9EDF-49EF-A14D-E495AD864F8A}" type="datetimeFigureOut">
               <a:rPr lang="zh-CN" altLang="en-US"/>
-              <a:t>2026.6.15</a:t>
+              <a:t>2026/6/16</a:t>
             </a:fld>
             <a:endParaRPr/>
           </a:p>
@@ -2013,7 +2253,7 @@
           <a:p>
             <a:fld id="{A653A8F1-9EDF-49EF-A14D-E495AD864F8A}" type="datetimeFigureOut">
               <a:rPr lang="zh-CN" altLang="en-US"/>
-              <a:t>2026.6.15</a:t>
+              <a:t>2026/6/16</a:t>
             </a:fld>
             <a:endParaRPr/>
           </a:p>
@@ -2180,7 +2420,7 @@
           <a:p>
             <a:fld id="{A653A8F1-9EDF-49EF-A14D-E495AD864F8A}" type="datetimeFigureOut">
               <a:rPr lang="zh-CN" altLang="en-US"/>
-              <a:t>2026.6.15</a:t>
+              <a:t>2026/6/16</a:t>
             </a:fld>
             <a:endParaRPr/>
           </a:p>
@@ -2421,7 +2661,7 @@
           <a:p>
             <a:fld id="{A653A8F1-9EDF-49EF-A14D-E495AD864F8A}" type="datetimeFigureOut">
               <a:rPr lang="zh-CN" altLang="en-US"/>
-              <a:t>2026.6.15</a:t>
+              <a:t>2026/6/16</a:t>
             </a:fld>
             <a:endParaRPr/>
           </a:p>
@@ -2654,7 +2894,7 @@
           <a:p>
             <a:fld id="{A653A8F1-9EDF-49EF-A14D-E495AD864F8A}" type="datetimeFigureOut">
               <a:rPr lang="zh-CN" altLang="en-US"/>
-              <a:t>2026.6.15</a:t>
+              <a:t>2026/6/16</a:t>
             </a:fld>
             <a:endParaRPr/>
           </a:p>
@@ -3024,7 +3264,7 @@
           <a:p>
             <a:fld id="{A653A8F1-9EDF-49EF-A14D-E495AD864F8A}" type="datetimeFigureOut">
               <a:rPr lang="zh-CN" altLang="en-US"/>
-              <a:t>2026.6.15</a:t>
+              <a:t>2026/6/16</a:t>
             </a:fld>
             <a:endParaRPr/>
           </a:p>
@@ -3135,7 +3375,7 @@
           <a:p>
             <a:fld id="{A653A8F1-9EDF-49EF-A14D-E495AD864F8A}" type="datetimeFigureOut">
               <a:rPr lang="zh-CN" altLang="en-US"/>
-              <a:t>2026.6.15</a:t>
+              <a:t>2026/6/16</a:t>
             </a:fld>
             <a:endParaRPr/>
           </a:p>
@@ -3225,7 +3465,7 @@
           <a:p>
             <a:fld id="{A653A8F1-9EDF-49EF-A14D-E495AD864F8A}" type="datetimeFigureOut">
               <a:rPr lang="zh-CN" altLang="en-US"/>
-              <a:t>2026.6.15</a:t>
+              <a:t>2026/6/16</a:t>
             </a:fld>
             <a:endParaRPr/>
           </a:p>
@@ -3510,7 +3750,7 @@
           <a:p>
             <a:fld id="{A653A8F1-9EDF-49EF-A14D-E495AD864F8A}" type="datetimeFigureOut">
               <a:rPr lang="zh-CN" altLang="en-US"/>
-              <a:t>2026.6.15</a:t>
+              <a:t>2026/6/16</a:t>
             </a:fld>
             <a:endParaRPr/>
           </a:p>
@@ -3758,7 +3998,7 @@
           <a:p>
             <a:fld id="{A653A8F1-9EDF-49EF-A14D-E495AD864F8A}" type="datetimeFigureOut">
               <a:rPr lang="zh-CN" altLang="en-US"/>
-              <a:t>2026.6.15</a:t>
+              <a:t>2026/6/16</a:t>
             </a:fld>
             <a:endParaRPr/>
           </a:p>
@@ -3969,7 +4209,7 @@
           <a:p>
             <a:fld id="{A653A8F1-9EDF-49EF-A14D-E495AD864F8A}" type="datetimeFigureOut">
               <a:rPr lang="zh-CN" altLang="en-US"/>
-              <a:t>2026.6.15</a:t>
+              <a:t>2026/6/16</a:t>
             </a:fld>
             <a:endParaRPr/>
           </a:p>
@@ -6816,6 +7056,1878 @@
 </file>
 
 <file path=ppt/slides/slide15.xml><?xml version="1.0" encoding="utf-8"?>
+<p:sld xmlns:a="http://schemas.openxmlformats.org/drawingml/2006/main" xmlns:r="http://schemas.openxmlformats.org/officeDocument/2006/relationships" xmlns:p="http://schemas.openxmlformats.org/presentationml/2006/main">
+  <p:cSld>
+    <p:bg>
+      <p:bgPr>
+        <a:solidFill>
+          <a:srgbClr val="253A2A"/>
+        </a:solidFill>
+        <a:effectLst/>
+      </p:bgPr>
+    </p:bg>
+    <p:spTree>
+      <p:nvGrpSpPr>
+        <p:cNvPr id="1" name="">
+          <a:extLst>
+            <a:ext uri="{FF2B5EF4-FFF2-40B4-BE49-F238E27FC236}">
+              <a16:creationId xmlns:a16="http://schemas.microsoft.com/office/drawing/2014/main" id="{EE95AC3D-97B5-62C1-C623-39FEE40281DD}"/>
+            </a:ext>
+          </a:extLst>
+        </p:cNvPr>
+        <p:cNvGrpSpPr/>
+        <p:nvPr/>
+      </p:nvGrpSpPr>
+      <p:grpSpPr>
+        <a:xfrm>
+          <a:off x="0" y="0"/>
+          <a:ext cx="0" cy="0"/>
+          <a:chOff x="0" y="0"/>
+          <a:chExt cx="0" cy="0"/>
+        </a:xfrm>
+      </p:grpSpPr>
+      <p:sp>
+        <p:nvSpPr>
+          <p:cNvPr id="11" name="文本框 10">
+            <a:extLst>
+              <a:ext uri="{FF2B5EF4-FFF2-40B4-BE49-F238E27FC236}">
+                <a16:creationId xmlns:a16="http://schemas.microsoft.com/office/drawing/2014/main" id="{B17E99E7-F638-E6ED-0024-BFF9A3D1D19B}"/>
+              </a:ext>
+            </a:extLst>
+          </p:cNvPr>
+          <p:cNvSpPr>
+            <a:spLocks noGrp="1"/>
+          </p:cNvSpPr>
+          <p:nvPr/>
+        </p:nvSpPr>
+        <p:spPr>
+          <a:xfrm>
+            <a:off x="2614979" y="2321005"/>
+            <a:ext cx="2604077" cy="2215991"/>
+          </a:xfrm>
+          <a:prstGeom prst="rect">
+            <a:avLst/>
+          </a:prstGeom>
+          <a:noFill/>
+        </p:spPr>
+        <p:txBody>
+          <a:bodyPr wrap="square">
+            <a:spAutoFit/>
+          </a:bodyPr>
+          <a:lstStyle/>
+          <a:p>
+            <a:pPr marL="0" marR="0" lvl="0" indent="0" algn="ctr" defTabSz="914400" eaLnBrk="1" fontAlgn="auto" latinLnBrk="0" hangingPunct="1">
+              <a:lnSpc>
+                <a:spcPct val="100000"/>
+              </a:lnSpc>
+              <a:spcBef>
+                <a:spcPts val="0"/>
+              </a:spcBef>
+              <a:spcAft>
+                <a:spcPts val="0"/>
+              </a:spcAft>
+              <a:buClrTx/>
+              <a:buSzTx/>
+              <a:buFontTx/>
+              <a:buNone/>
+              <a:tabLst/>
+              <a:defRPr/>
+            </a:pPr>
+            <a:r>
+              <a:rPr kumimoji="0" sz="13800" b="0" i="0" u="none" strike="noStrike" kern="1200" cap="none" spc="0" normalizeH="0" baseline="0" noProof="0" dirty="0">
+                <a:ln>
+                  <a:noFill/>
+                </a:ln>
+                <a:solidFill>
+                  <a:srgbClr val="F5F4F9"/>
+                </a:solidFill>
+                <a:effectLst/>
+                <a:uLnTx/>
+                <a:uFillTx/>
+                <a:latin typeface="Arial" panose="020B0604020202020204"/>
+                <a:ea typeface="华文中宋" panose="02010600040101010101" charset="-122"/>
+                <a:cs typeface="+mn-cs"/>
+              </a:rPr>
+              <a:t>0</a:t>
+            </a:r>
+            <a:r>
+              <a:rPr lang="en-US" sz="13800" dirty="0">
+                <a:solidFill>
+                  <a:srgbClr val="F5F4F9"/>
+                </a:solidFill>
+                <a:latin typeface="Arial" panose="020B0604020202020204"/>
+                <a:ea typeface="华文中宋" panose="02010600040101010101" charset="-122"/>
+              </a:rPr>
+              <a:t>7</a:t>
+            </a:r>
+            <a:endParaRPr kumimoji="0" sz="13800" b="0" i="0" u="none" strike="noStrike" kern="1200" cap="none" spc="0" normalizeH="0" baseline="0" noProof="0" dirty="0">
+              <a:ln>
+                <a:noFill/>
+              </a:ln>
+              <a:solidFill>
+                <a:srgbClr val="F5F4F9"/>
+              </a:solidFill>
+              <a:effectLst/>
+              <a:uLnTx/>
+              <a:uFillTx/>
+              <a:latin typeface="Arial" panose="020B0604020202020204"/>
+              <a:ea typeface="华文中宋" panose="02010600040101010101" charset="-122"/>
+              <a:cs typeface="+mn-cs"/>
+            </a:endParaRPr>
+          </a:p>
+        </p:txBody>
+      </p:sp>
+      <p:sp>
+        <p:nvSpPr>
+          <p:cNvPr id="13" name="矩形 12">
+            <a:extLst>
+              <a:ext uri="{FF2B5EF4-FFF2-40B4-BE49-F238E27FC236}">
+                <a16:creationId xmlns:a16="http://schemas.microsoft.com/office/drawing/2014/main" id="{286FDCB7-259E-7173-B956-0C2E1C45251E}"/>
+              </a:ext>
+            </a:extLst>
+          </p:cNvPr>
+          <p:cNvSpPr>
+            <a:spLocks noGrp="1"/>
+          </p:cNvSpPr>
+          <p:nvPr/>
+        </p:nvSpPr>
+        <p:spPr>
+          <a:xfrm>
+            <a:off x="6331764" y="2685166"/>
+            <a:ext cx="2262158" cy="923330"/>
+          </a:xfrm>
+          <a:prstGeom prst="rect">
+            <a:avLst/>
+          </a:prstGeom>
+        </p:spPr>
+        <p:txBody>
+          <a:bodyPr wrap="none">
+            <a:spAutoFit/>
+          </a:bodyPr>
+          <a:lstStyle/>
+          <a:p>
+            <a:pPr marL="0" marR="0" lvl="0" indent="0" algn="ctr" defTabSz="914400" eaLnBrk="1" fontAlgn="auto" latinLnBrk="0" hangingPunct="1">
+              <a:lnSpc>
+                <a:spcPct val="100000"/>
+              </a:lnSpc>
+              <a:spcBef>
+                <a:spcPts val="0"/>
+              </a:spcBef>
+              <a:spcAft>
+                <a:spcPts val="0"/>
+              </a:spcAft>
+              <a:buClrTx/>
+              <a:buSzTx/>
+              <a:buFontTx/>
+              <a:buNone/>
+              <a:tabLst/>
+              <a:defRPr/>
+            </a:pPr>
+            <a:r>
+              <a:rPr lang="zh-CN" altLang="en-US" sz="5400" dirty="0">
+                <a:solidFill>
+                  <a:prstClr val="white"/>
+                </a:solidFill>
+                <a:latin typeface="Color Emoji"/>
+                <a:ea typeface="STZhongsong"/>
+              </a:rPr>
+              <a:t>汤语涵</a:t>
+            </a:r>
+            <a:endParaRPr kumimoji="0" lang="zh-CN" altLang="en-US" sz="5400" b="1" i="0" u="none" strike="noStrike" kern="1200" cap="none" spc="0" normalizeH="0" baseline="0" noProof="0" dirty="0">
+              <a:ln>
+                <a:noFill/>
+              </a:ln>
+              <a:solidFill>
+                <a:prstClr val="white"/>
+              </a:solidFill>
+              <a:effectLst/>
+              <a:uLnTx/>
+              <a:uFillTx/>
+              <a:latin typeface="Arial" panose="020B0604020202020204"/>
+              <a:ea typeface="华文中宋" panose="02010600040101010101" charset="-122"/>
+              <a:cs typeface="+mn-cs"/>
+            </a:endParaRPr>
+          </a:p>
+        </p:txBody>
+      </p:sp>
+    </p:spTree>
+    <p:extLst>
+      <p:ext uri="{BB962C8B-B14F-4D97-AF65-F5344CB8AC3E}">
+        <p14:creationId xmlns:p14="http://schemas.microsoft.com/office/powerpoint/2010/main" val="121705555"/>
+      </p:ext>
+    </p:extLst>
+  </p:cSld>
+  <p:clrMapOvr>
+    <a:masterClrMapping/>
+  </p:clrMapOvr>
+</p:sld>
+</file>
+
+<file path=ppt/slides/slide16.xml><?xml version="1.0" encoding="utf-8"?>
+<p:sld xmlns:a="http://schemas.openxmlformats.org/drawingml/2006/main" xmlns:r="http://schemas.openxmlformats.org/officeDocument/2006/relationships" xmlns:p="http://schemas.openxmlformats.org/presentationml/2006/main">
+  <p:cSld>
+    <p:spTree>
+      <p:nvGrpSpPr>
+        <p:cNvPr id="1" name="">
+          <a:extLst>
+            <a:ext uri="{FF2B5EF4-FFF2-40B4-BE49-F238E27FC236}">
+              <a16:creationId xmlns:a16="http://schemas.microsoft.com/office/drawing/2014/main" id="{53224DE3-BE87-60AE-C61E-71720FBE0D8C}"/>
+            </a:ext>
+          </a:extLst>
+        </p:cNvPr>
+        <p:cNvGrpSpPr/>
+        <p:nvPr/>
+      </p:nvGrpSpPr>
+      <p:grpSpPr>
+        <a:xfrm>
+          <a:off x="0" y="0"/>
+          <a:ext cx="0" cy="0"/>
+          <a:chOff x="0" y="0"/>
+          <a:chExt cx="0" cy="0"/>
+        </a:xfrm>
+      </p:grpSpPr>
+      <p:sp>
+        <p:nvSpPr>
+          <p:cNvPr id="13" name="矩形 12">
+            <a:extLst>
+              <a:ext uri="{FF2B5EF4-FFF2-40B4-BE49-F238E27FC236}">
+                <a16:creationId xmlns:a16="http://schemas.microsoft.com/office/drawing/2014/main" id="{0FC34F73-EB12-93C4-4293-35C0DDE5861F}"/>
+              </a:ext>
+            </a:extLst>
+          </p:cNvPr>
+          <p:cNvSpPr>
+            <a:spLocks noGrp="1"/>
+          </p:cNvSpPr>
+          <p:nvPr/>
+        </p:nvSpPr>
+        <p:spPr>
+          <a:xfrm>
+            <a:off x="0" y="0"/>
+            <a:ext cx="12192000" cy="114300"/>
+          </a:xfrm>
+          <a:prstGeom prst="rect">
+            <a:avLst/>
+          </a:prstGeom>
+          <a:solidFill>
+            <a:srgbClr val="2D4A33"/>
+          </a:solidFill>
+          <a:ln w="0">
+            <a:solidFill>
+              <a:srgbClr val="2D4A33"/>
+            </a:solidFill>
+            <a:prstDash val="solid"/>
+          </a:ln>
+        </p:spPr>
+      </p:sp>
+      <p:sp>
+        <p:nvSpPr>
+          <p:cNvPr id="2" name="矩形 1">
+            <a:extLst>
+              <a:ext uri="{FF2B5EF4-FFF2-40B4-BE49-F238E27FC236}">
+                <a16:creationId xmlns:a16="http://schemas.microsoft.com/office/drawing/2014/main" id="{16217816-ECAB-5639-7E3D-F542E9F02F33}"/>
+              </a:ext>
+            </a:extLst>
+          </p:cNvPr>
+          <p:cNvSpPr>
+            <a:spLocks noGrp="1"/>
+          </p:cNvSpPr>
+          <p:nvPr/>
+        </p:nvSpPr>
+        <p:spPr>
+          <a:xfrm>
+            <a:off x="762000" y="400050"/>
+            <a:ext cx="10668000" cy="457200"/>
+          </a:xfrm>
+          <a:prstGeom prst="rect">
+            <a:avLst/>
+          </a:prstGeom>
+          <a:solidFill>
+            <a:srgbClr val="000000">
+              <a:alpha val="0"/>
+            </a:srgbClr>
+          </a:solidFill>
+          <a:ln w="0">
+            <a:solidFill>
+              <a:srgbClr val="000000">
+                <a:alpha val="0"/>
+              </a:srgbClr>
+            </a:solidFill>
+            <a:prstDash val="solid"/>
+          </a:ln>
+        </p:spPr>
+        <p:txBody>
+          <a:bodyPr anchor="ctr"/>
+          <a:lstStyle/>
+          <a:p>
+            <a:pPr algn="ctr">
+              <a:defRPr sz="2550" b="1">
+                <a:solidFill>
+                  <a:srgbClr val="2D4A33"/>
+                </a:solidFill>
+              </a:defRPr>
+            </a:pPr>
+            <a:r>
+              <a:rPr lang="zh-CN" altLang="en-US" sz="2800" dirty="0">
+                <a:latin typeface="Color Emoji"/>
+              </a:rPr>
+              <a:t>汤语涵</a:t>
+            </a:r>
+            <a:endParaRPr sz="2550" b="1" dirty="0"/>
+          </a:p>
+        </p:txBody>
+      </p:sp>
+      <p:sp>
+        <p:nvSpPr>
+          <p:cNvPr id="5" name="矩形 4">
+            <a:extLst>
+              <a:ext uri="{FF2B5EF4-FFF2-40B4-BE49-F238E27FC236}">
+                <a16:creationId xmlns:a16="http://schemas.microsoft.com/office/drawing/2014/main" id="{03555D4E-EB34-77BF-9A14-80AB41FF11C2}"/>
+              </a:ext>
+            </a:extLst>
+          </p:cNvPr>
+          <p:cNvSpPr>
+            <a:spLocks noGrp="1"/>
+          </p:cNvSpPr>
+          <p:nvPr/>
+        </p:nvSpPr>
+        <p:spPr>
+          <a:xfrm>
+            <a:off x="823632" y="991284"/>
+            <a:ext cx="4305300" cy="323850"/>
+          </a:xfrm>
+          <a:prstGeom prst="rect">
+            <a:avLst/>
+          </a:prstGeom>
+          <a:solidFill>
+            <a:srgbClr val="000000">
+              <a:alpha val="0"/>
+            </a:srgbClr>
+          </a:solidFill>
+          <a:ln w="0">
+            <a:solidFill>
+              <a:srgbClr val="000000">
+                <a:alpha val="0"/>
+              </a:srgbClr>
+            </a:solidFill>
+            <a:prstDash val="solid"/>
+          </a:ln>
+        </p:spPr>
+        <p:txBody>
+          <a:bodyPr anchor="ctr"/>
+          <a:lstStyle/>
+          <a:p>
+            <a:pPr algn="l">
+              <a:defRPr sz="1650" b="1">
+                <a:solidFill>
+                  <a:srgbClr val="2D4A33"/>
+                </a:solidFill>
+              </a:defRPr>
+            </a:pPr>
+            <a:r>
+              <a:rPr lang="zh-CN" altLang="en-US" sz="3200" b="1" dirty="0">
+                <a:solidFill>
+                  <a:srgbClr val="2D4A33"/>
+                </a:solidFill>
+              </a:rPr>
+              <a:t>多种搜索方法构建</a:t>
+            </a:r>
+            <a:endParaRPr sz="3200" b="1" dirty="0">
+              <a:solidFill>
+                <a:srgbClr val="2D4A33"/>
+              </a:solidFill>
+            </a:endParaRPr>
+          </a:p>
+        </p:txBody>
+      </p:sp>
+      <p:sp>
+        <p:nvSpPr>
+          <p:cNvPr id="6" name="矩形 5">
+            <a:extLst>
+              <a:ext uri="{FF2B5EF4-FFF2-40B4-BE49-F238E27FC236}">
+                <a16:creationId xmlns:a16="http://schemas.microsoft.com/office/drawing/2014/main" id="{D6A10D85-8177-AAE4-76F0-8D3A45AB6BE8}"/>
+              </a:ext>
+            </a:extLst>
+          </p:cNvPr>
+          <p:cNvSpPr>
+            <a:spLocks noGrp="1"/>
+          </p:cNvSpPr>
+          <p:nvPr/>
+        </p:nvSpPr>
+        <p:spPr>
+          <a:xfrm>
+            <a:off x="896471" y="1724150"/>
+            <a:ext cx="4305300" cy="857250"/>
+          </a:xfrm>
+          <a:prstGeom prst="rect">
+            <a:avLst/>
+          </a:prstGeom>
+          <a:solidFill>
+            <a:srgbClr val="000000">
+              <a:alpha val="0"/>
+            </a:srgbClr>
+          </a:solidFill>
+          <a:ln w="0">
+            <a:solidFill>
+              <a:srgbClr val="000000">
+                <a:alpha val="0"/>
+              </a:srgbClr>
+            </a:solidFill>
+            <a:prstDash val="solid"/>
+          </a:ln>
+        </p:spPr>
+        <p:txBody>
+          <a:bodyPr anchor="ctr"/>
+          <a:lstStyle/>
+          <a:p>
+            <a:pPr algn="l">
+              <a:defRPr sz="1350" b="0">
+                <a:solidFill>
+                  <a:srgbClr val="1F2D22"/>
+                </a:solidFill>
+              </a:defRPr>
+            </a:pPr>
+            <a:r>
+              <a:rPr lang="zh-CN" altLang="en-US" sz="2000" dirty="0">
+                <a:solidFill>
+                  <a:srgbClr val="1F2D22"/>
+                </a:solidFill>
+                <a:latin typeface="ui-monospace"/>
+              </a:rPr>
+              <a:t>支持</a:t>
+            </a:r>
+            <a:r>
+              <a:rPr lang="en-US" altLang="zh-CN" sz="2000" dirty="0">
+                <a:solidFill>
+                  <a:srgbClr val="1F2D22"/>
+                </a:solidFill>
+                <a:latin typeface="ui-monospace"/>
+              </a:rPr>
+              <a:t>and</a:t>
+            </a:r>
+            <a:r>
+              <a:rPr lang="zh-CN" altLang="en-US" sz="2000" dirty="0">
+                <a:solidFill>
+                  <a:srgbClr val="1F2D22"/>
+                </a:solidFill>
+                <a:latin typeface="ui-monospace"/>
+              </a:rPr>
+              <a:t>、</a:t>
+            </a:r>
+            <a:r>
+              <a:rPr lang="en-US" altLang="zh-CN" sz="2000" dirty="0">
+                <a:solidFill>
+                  <a:srgbClr val="1F2D22"/>
+                </a:solidFill>
+                <a:latin typeface="ui-monospace"/>
+              </a:rPr>
+              <a:t>or</a:t>
+            </a:r>
+            <a:r>
+              <a:rPr lang="zh-CN" altLang="en-US" sz="2000" dirty="0">
+                <a:solidFill>
+                  <a:srgbClr val="1F2D22"/>
+                </a:solidFill>
+                <a:latin typeface="ui-monospace"/>
+              </a:rPr>
+              <a:t>连接多个关键词</a:t>
+            </a:r>
+            <a:endParaRPr lang="en-US" altLang="zh-CN" sz="2000" dirty="0">
+              <a:solidFill>
+                <a:srgbClr val="1F2D22"/>
+              </a:solidFill>
+              <a:latin typeface="ui-monospace"/>
+            </a:endParaRPr>
+          </a:p>
+          <a:p>
+            <a:pPr algn="l">
+              <a:defRPr sz="1350" b="0">
+                <a:solidFill>
+                  <a:srgbClr val="1F2D22"/>
+                </a:solidFill>
+              </a:defRPr>
+            </a:pPr>
+            <a:r>
+              <a:rPr lang="zh-CN" altLang="en-US" sz="2000" dirty="0">
+                <a:solidFill>
+                  <a:srgbClr val="1F2D22"/>
+                </a:solidFill>
+                <a:latin typeface="ui-monospace"/>
+              </a:rPr>
+              <a:t>支持排除词（负搜索）</a:t>
+            </a:r>
+            <a:endParaRPr sz="2000" dirty="0">
+              <a:solidFill>
+                <a:srgbClr val="1F2D22"/>
+              </a:solidFill>
+              <a:latin typeface="ui-monospace"/>
+            </a:endParaRPr>
+          </a:p>
+        </p:txBody>
+      </p:sp>
+      <p:sp>
+        <p:nvSpPr>
+          <p:cNvPr id="8" name="矩形 7">
+            <a:extLst>
+              <a:ext uri="{FF2B5EF4-FFF2-40B4-BE49-F238E27FC236}">
+                <a16:creationId xmlns:a16="http://schemas.microsoft.com/office/drawing/2014/main" id="{C6D8F764-F4D7-798A-39E7-3F1B0096862E}"/>
+              </a:ext>
+            </a:extLst>
+          </p:cNvPr>
+          <p:cNvSpPr>
+            <a:spLocks noGrp="1"/>
+          </p:cNvSpPr>
+          <p:nvPr/>
+        </p:nvSpPr>
+        <p:spPr>
+          <a:xfrm>
+            <a:off x="7567332" y="879662"/>
+            <a:ext cx="4305300" cy="323850"/>
+          </a:xfrm>
+          <a:prstGeom prst="rect">
+            <a:avLst/>
+          </a:prstGeom>
+          <a:solidFill>
+            <a:srgbClr val="000000">
+              <a:alpha val="0"/>
+            </a:srgbClr>
+          </a:solidFill>
+          <a:ln w="0">
+            <a:solidFill>
+              <a:srgbClr val="000000">
+                <a:alpha val="0"/>
+              </a:srgbClr>
+            </a:solidFill>
+            <a:prstDash val="solid"/>
+          </a:ln>
+        </p:spPr>
+        <p:txBody>
+          <a:bodyPr anchor="ctr"/>
+          <a:lstStyle/>
+          <a:p>
+            <a:pPr>
+              <a:defRPr sz="1650" b="1">
+                <a:solidFill>
+                  <a:srgbClr val="2D4A33"/>
+                </a:solidFill>
+              </a:defRPr>
+            </a:pPr>
+            <a:r>
+              <a:rPr lang="zh-CN" altLang="en-US" sz="3200" b="1" dirty="0">
+                <a:solidFill>
+                  <a:srgbClr val="2D4A33"/>
+                </a:solidFill>
+              </a:rPr>
+              <a:t>自定义排序指标</a:t>
+            </a:r>
+            <a:endParaRPr sz="3200" b="1" dirty="0">
+              <a:solidFill>
+                <a:srgbClr val="2D4A33"/>
+              </a:solidFill>
+            </a:endParaRPr>
+          </a:p>
+        </p:txBody>
+      </p:sp>
+      <p:sp>
+        <p:nvSpPr>
+          <p:cNvPr id="9" name="矩形 8">
+            <a:extLst>
+              <a:ext uri="{FF2B5EF4-FFF2-40B4-BE49-F238E27FC236}">
+                <a16:creationId xmlns:a16="http://schemas.microsoft.com/office/drawing/2014/main" id="{718F90BC-DC90-BEDC-F4AB-1694E864A254}"/>
+              </a:ext>
+            </a:extLst>
+          </p:cNvPr>
+          <p:cNvSpPr>
+            <a:spLocks noGrp="1"/>
+          </p:cNvSpPr>
+          <p:nvPr/>
+        </p:nvSpPr>
+        <p:spPr>
+          <a:xfrm>
+            <a:off x="6800850" y="2228850"/>
+            <a:ext cx="4305300" cy="857250"/>
+          </a:xfrm>
+          <a:prstGeom prst="rect">
+            <a:avLst/>
+          </a:prstGeom>
+          <a:solidFill>
+            <a:srgbClr val="000000">
+              <a:alpha val="0"/>
+            </a:srgbClr>
+          </a:solidFill>
+          <a:ln w="0">
+            <a:solidFill>
+              <a:srgbClr val="000000">
+                <a:alpha val="0"/>
+              </a:srgbClr>
+            </a:solidFill>
+            <a:prstDash val="solid"/>
+          </a:ln>
+        </p:spPr>
+        <p:txBody>
+          <a:bodyPr anchor="ctr"/>
+          <a:lstStyle/>
+          <a:p>
+            <a:pPr algn="l">
+              <a:defRPr sz="1350" b="0">
+                <a:solidFill>
+                  <a:srgbClr val="1F2D22"/>
+                </a:solidFill>
+              </a:defRPr>
+            </a:pPr>
+            <a:endParaRPr sz="2000" dirty="0">
+              <a:solidFill>
+                <a:srgbClr val="1F2D22"/>
+              </a:solidFill>
+              <a:latin typeface="ui-monospace"/>
+            </a:endParaRPr>
+          </a:p>
+        </p:txBody>
+      </p:sp>
+      <p:sp>
+        <p:nvSpPr>
+          <p:cNvPr id="11" name="矩形 10">
+            <a:extLst>
+              <a:ext uri="{FF2B5EF4-FFF2-40B4-BE49-F238E27FC236}">
+                <a16:creationId xmlns:a16="http://schemas.microsoft.com/office/drawing/2014/main" id="{11669D48-DFC2-F528-67F7-B6E0A04262CD}"/>
+              </a:ext>
+            </a:extLst>
+          </p:cNvPr>
+          <p:cNvSpPr>
+            <a:spLocks noGrp="1"/>
+          </p:cNvSpPr>
+          <p:nvPr/>
+        </p:nvSpPr>
+        <p:spPr>
+          <a:xfrm>
+            <a:off x="896471" y="3628340"/>
+            <a:ext cx="7734300" cy="323850"/>
+          </a:xfrm>
+          <a:prstGeom prst="rect">
+            <a:avLst/>
+          </a:prstGeom>
+          <a:solidFill>
+            <a:srgbClr val="000000">
+              <a:alpha val="0"/>
+            </a:srgbClr>
+          </a:solidFill>
+          <a:ln w="0">
+            <a:solidFill>
+              <a:srgbClr val="000000">
+                <a:alpha val="0"/>
+              </a:srgbClr>
+            </a:solidFill>
+            <a:prstDash val="solid"/>
+          </a:ln>
+        </p:spPr>
+        <p:txBody>
+          <a:bodyPr anchor="ctr"/>
+          <a:lstStyle/>
+          <a:p>
+            <a:pPr>
+              <a:defRPr sz="1650" b="1">
+                <a:solidFill>
+                  <a:srgbClr val="2D4A33"/>
+                </a:solidFill>
+              </a:defRPr>
+            </a:pPr>
+            <a:r>
+              <a:rPr lang="zh-CN" altLang="en-US" sz="3200" b="1" dirty="0">
+                <a:solidFill>
+                  <a:srgbClr val="2D4A33"/>
+                </a:solidFill>
+              </a:rPr>
+              <a:t>数据导入</a:t>
+            </a:r>
+            <a:endParaRPr sz="3200" b="1" dirty="0">
+              <a:solidFill>
+                <a:srgbClr val="2D4A33"/>
+              </a:solidFill>
+            </a:endParaRPr>
+          </a:p>
+        </p:txBody>
+      </p:sp>
+      <p:sp>
+        <p:nvSpPr>
+          <p:cNvPr id="12" name="矩形 11">
+            <a:extLst>
+              <a:ext uri="{FF2B5EF4-FFF2-40B4-BE49-F238E27FC236}">
+                <a16:creationId xmlns:a16="http://schemas.microsoft.com/office/drawing/2014/main" id="{044D2BBF-5EE7-B9A4-BE11-B7CCF0213BEB}"/>
+              </a:ext>
+            </a:extLst>
+          </p:cNvPr>
+          <p:cNvSpPr>
+            <a:spLocks noGrp="1"/>
+          </p:cNvSpPr>
+          <p:nvPr/>
+        </p:nvSpPr>
+        <p:spPr>
+          <a:xfrm>
+            <a:off x="305921" y="4665755"/>
+            <a:ext cx="7734300" cy="666750"/>
+          </a:xfrm>
+          <a:prstGeom prst="rect">
+            <a:avLst/>
+          </a:prstGeom>
+          <a:solidFill>
+            <a:srgbClr val="000000">
+              <a:alpha val="0"/>
+            </a:srgbClr>
+          </a:solidFill>
+          <a:ln w="0">
+            <a:solidFill>
+              <a:srgbClr val="000000">
+                <a:alpha val="0"/>
+              </a:srgbClr>
+            </a:solidFill>
+            <a:prstDash val="solid"/>
+          </a:ln>
+        </p:spPr>
+        <p:txBody>
+          <a:bodyPr anchor="ctr"/>
+          <a:lstStyle/>
+          <a:p>
+            <a:pPr algn="l">
+              <a:defRPr sz="1350" b="0">
+                <a:solidFill>
+                  <a:srgbClr val="1F2D22"/>
+                </a:solidFill>
+              </a:defRPr>
+            </a:pPr>
+            <a:r>
+              <a:rPr lang="zh-CN" altLang="en-US" sz="2000" dirty="0">
+                <a:solidFill>
+                  <a:srgbClr val="1F2D22"/>
+                </a:solidFill>
+                <a:latin typeface="ui-monospace"/>
+              </a:rPr>
+              <a:t>拍平数据，</a:t>
+            </a:r>
+            <a:r>
+              <a:rPr lang="en-US" altLang="zh-CN" sz="2000" dirty="0">
+                <a:solidFill>
+                  <a:srgbClr val="1F2D22"/>
+                </a:solidFill>
+                <a:latin typeface="ui-monospace"/>
+              </a:rPr>
+              <a:t>Bulk API </a:t>
+            </a:r>
+            <a:r>
+              <a:rPr lang="zh-CN" altLang="en-US" sz="2000" dirty="0">
+                <a:solidFill>
+                  <a:srgbClr val="1F2D22"/>
+                </a:solidFill>
+                <a:latin typeface="ui-monospace"/>
+              </a:rPr>
+              <a:t>写入 </a:t>
+            </a:r>
+            <a:r>
+              <a:rPr lang="en-US" altLang="zh-CN" sz="2000" dirty="0">
+                <a:solidFill>
+                  <a:srgbClr val="1F2D22"/>
+                </a:solidFill>
+                <a:latin typeface="ui-monospace"/>
+              </a:rPr>
+              <a:t>ES</a:t>
+            </a:r>
+          </a:p>
+          <a:p>
+            <a:pPr algn="l">
+              <a:defRPr sz="1350" b="0">
+                <a:solidFill>
+                  <a:srgbClr val="1F2D22"/>
+                </a:solidFill>
+              </a:defRPr>
+            </a:pPr>
+            <a:r>
+              <a:rPr lang="zh-CN" altLang="en-US" sz="2000" dirty="0">
+                <a:solidFill>
+                  <a:srgbClr val="1F2D22"/>
+                </a:solidFill>
+                <a:latin typeface="ui-monospace"/>
+              </a:rPr>
+              <a:t>查询数据：</a:t>
+            </a:r>
+            <a:endParaRPr lang="en-US" altLang="zh-CN" sz="2000" dirty="0">
+              <a:solidFill>
+                <a:srgbClr val="1F2D22"/>
+              </a:solidFill>
+              <a:latin typeface="ui-monospace"/>
+            </a:endParaRPr>
+          </a:p>
+          <a:p>
+            <a:pPr algn="l">
+              <a:defRPr sz="1350" b="0">
+                <a:solidFill>
+                  <a:srgbClr val="1F2D22"/>
+                </a:solidFill>
+              </a:defRPr>
+            </a:pPr>
+            <a:r>
+              <a:rPr lang="zh-CN" altLang="en-US" sz="2000" dirty="0">
+                <a:solidFill>
+                  <a:srgbClr val="1F2D22"/>
+                </a:solidFill>
+                <a:latin typeface="ui-monospace"/>
+              </a:rPr>
+              <a:t>写入用 </a:t>
+            </a:r>
+            <a:r>
+              <a:rPr lang="en-US" sz="2000" dirty="0">
+                <a:solidFill>
+                  <a:srgbClr val="1F2D22"/>
+                </a:solidFill>
+                <a:latin typeface="ui-monospace"/>
+              </a:rPr>
+              <a:t>POST /{index}/_bulk</a:t>
+            </a:r>
+          </a:p>
+          <a:p>
+            <a:pPr algn="l">
+              <a:defRPr sz="1350" b="0">
+                <a:solidFill>
+                  <a:srgbClr val="1F2D22"/>
+                </a:solidFill>
+              </a:defRPr>
+            </a:pPr>
+            <a:r>
+              <a:rPr lang="zh-CN" altLang="en-US" sz="2000" dirty="0">
+                <a:solidFill>
+                  <a:srgbClr val="1F2D22"/>
+                </a:solidFill>
+                <a:latin typeface="ui-monospace"/>
+              </a:rPr>
+              <a:t>查询用 </a:t>
+            </a:r>
+            <a:r>
+              <a:rPr lang="en-US" sz="2000" dirty="0">
+                <a:solidFill>
+                  <a:srgbClr val="1F2D22"/>
+                </a:solidFill>
+                <a:latin typeface="ui-monospace"/>
+              </a:rPr>
+              <a:t>POST /{index}/_search</a:t>
+            </a:r>
+          </a:p>
+          <a:p>
+            <a:pPr algn="l">
+              <a:defRPr sz="1350" b="0">
+                <a:solidFill>
+                  <a:srgbClr val="1F2D22"/>
+                </a:solidFill>
+              </a:defRPr>
+            </a:pPr>
+            <a:r>
+              <a:rPr lang="zh-CN" altLang="en-US" sz="2000" dirty="0">
+                <a:solidFill>
+                  <a:srgbClr val="1F2D22"/>
+                </a:solidFill>
+                <a:latin typeface="ui-monospace"/>
+              </a:rPr>
+              <a:t>代码里通过 </a:t>
+            </a:r>
+            <a:r>
+              <a:rPr lang="en-US" sz="2000" dirty="0">
+                <a:solidFill>
+                  <a:srgbClr val="1F2D22"/>
+                </a:solidFill>
+                <a:latin typeface="ui-monospace"/>
+              </a:rPr>
+              <a:t>fetch </a:t>
+            </a:r>
+            <a:r>
+              <a:rPr lang="zh-CN" altLang="en-US" sz="2000" dirty="0">
+                <a:solidFill>
+                  <a:srgbClr val="1F2D22"/>
+                </a:solidFill>
+                <a:latin typeface="ui-monospace"/>
+              </a:rPr>
+              <a:t>直接调用。</a:t>
+            </a:r>
+            <a:endParaRPr sz="2000" dirty="0">
+              <a:solidFill>
+                <a:srgbClr val="1F2D22"/>
+              </a:solidFill>
+              <a:latin typeface="ui-monospace"/>
+            </a:endParaRPr>
+          </a:p>
+        </p:txBody>
+      </p:sp>
+      <p:graphicFrame>
+        <p:nvGraphicFramePr>
+          <p:cNvPr id="3" name="表格 2">
+            <a:extLst>
+              <a:ext uri="{FF2B5EF4-FFF2-40B4-BE49-F238E27FC236}">
+                <a16:creationId xmlns:a16="http://schemas.microsoft.com/office/drawing/2014/main" id="{302C476D-95BD-A162-8160-7F8DD10193A5}"/>
+              </a:ext>
+            </a:extLst>
+          </p:cNvPr>
+          <p:cNvGraphicFramePr>
+            <a:graphicFrameLocks noGrp="1"/>
+          </p:cNvGraphicFramePr>
+          <p:nvPr>
+            <p:extLst>
+              <p:ext uri="{D42A27DB-BD31-4B8C-83A1-F6EECF244321}">
+                <p14:modId xmlns:p14="http://schemas.microsoft.com/office/powerpoint/2010/main" val="3837746730"/>
+              </p:ext>
+            </p:extLst>
+          </p:nvPr>
+        </p:nvGraphicFramePr>
+        <p:xfrm>
+          <a:off x="5289176" y="2190750"/>
+          <a:ext cx="6902824" cy="4267200"/>
+        </p:xfrm>
+        <a:graphic>
+          <a:graphicData uri="http://schemas.openxmlformats.org/drawingml/2006/table">
+            <a:tbl>
+              <a:tblPr/>
+              <a:tblGrid>
+                <a:gridCol w="1725706">
+                  <a:extLst>
+                    <a:ext uri="{9D8B030D-6E8A-4147-A177-3AD203B41FA5}">
+                      <a16:colId xmlns:a16="http://schemas.microsoft.com/office/drawing/2014/main" val="850741836"/>
+                    </a:ext>
+                  </a:extLst>
+                </a:gridCol>
+                <a:gridCol w="1725706">
+                  <a:extLst>
+                    <a:ext uri="{9D8B030D-6E8A-4147-A177-3AD203B41FA5}">
+                      <a16:colId xmlns:a16="http://schemas.microsoft.com/office/drawing/2014/main" val="1110310240"/>
+                    </a:ext>
+                  </a:extLst>
+                </a:gridCol>
+                <a:gridCol w="1725706">
+                  <a:extLst>
+                    <a:ext uri="{9D8B030D-6E8A-4147-A177-3AD203B41FA5}">
+                      <a16:colId xmlns:a16="http://schemas.microsoft.com/office/drawing/2014/main" val="839866319"/>
+                    </a:ext>
+                  </a:extLst>
+                </a:gridCol>
+                <a:gridCol w="1725706">
+                  <a:extLst>
+                    <a:ext uri="{9D8B030D-6E8A-4147-A177-3AD203B41FA5}">
+                      <a16:colId xmlns:a16="http://schemas.microsoft.com/office/drawing/2014/main" val="159932957"/>
+                    </a:ext>
+                  </a:extLst>
+                </a:gridCol>
+              </a:tblGrid>
+              <a:tr h="239952">
+                <a:tc>
+                  <a:txBody>
+                    <a:bodyPr/>
+                    <a:lstStyle/>
+                    <a:p>
+                      <a:pPr>
+                        <a:buNone/>
+                      </a:pPr>
+                      <a:r>
+                        <a:rPr lang="zh-CN">
+                          <a:effectLst/>
+                        </a:rPr>
+                        <a:t>特征</a:t>
+                      </a:r>
+                    </a:p>
+                  </a:txBody>
+                  <a:tcPr marL="28575" marR="28575" marT="19050" marB="19050" anchor="ctr">
+                    <a:lnL>
+                      <a:noFill/>
+                    </a:lnL>
+                    <a:lnR w="4763" cap="flat" cmpd="sng" algn="ctr">
+                      <a:solidFill>
+                        <a:srgbClr val="601D7F"/>
+                      </a:solidFill>
+                      <a:prstDash val="solid"/>
+                      <a:round/>
+                      <a:headEnd type="none" w="med" len="med"/>
+                      <a:tailEnd type="none" w="med" len="med"/>
+                    </a:lnR>
+                    <a:lnT>
+                      <a:noFill/>
+                    </a:lnT>
+                    <a:lnB w="4763" cap="flat" cmpd="sng" algn="ctr">
+                      <a:solidFill>
+                        <a:srgbClr val="601D7F"/>
+                      </a:solidFill>
+                      <a:prstDash val="solid"/>
+                      <a:round/>
+                      <a:headEnd type="none" w="med" len="med"/>
+                      <a:tailEnd type="none" w="med" len="med"/>
+                    </a:lnB>
+                    <a:noFill/>
+                  </a:tcPr>
+                </a:tc>
+                <a:tc>
+                  <a:txBody>
+                    <a:bodyPr/>
+                    <a:lstStyle/>
+                    <a:p>
+                      <a:pPr>
+                        <a:buNone/>
+                      </a:pPr>
+                      <a:r>
+                        <a:rPr lang="zh-CN">
+                          <a:effectLst/>
+                        </a:rPr>
+                        <a:t>权重</a:t>
+                      </a:r>
+                    </a:p>
+                  </a:txBody>
+                  <a:tcPr marL="28575" marR="28575" marT="19050" marB="19050" anchor="ctr">
+                    <a:lnL w="4763" cap="flat" cmpd="sng" algn="ctr">
+                      <a:solidFill>
+                        <a:srgbClr val="601D7F"/>
+                      </a:solidFill>
+                      <a:prstDash val="solid"/>
+                      <a:round/>
+                      <a:headEnd type="none" w="med" len="med"/>
+                      <a:tailEnd type="none" w="med" len="med"/>
+                    </a:lnL>
+                    <a:lnR w="4763" cap="flat" cmpd="sng" algn="ctr">
+                      <a:solidFill>
+                        <a:srgbClr val="E03B7F"/>
+                      </a:solidFill>
+                      <a:prstDash val="solid"/>
+                      <a:round/>
+                      <a:headEnd type="none" w="med" len="med"/>
+                      <a:tailEnd type="none" w="med" len="med"/>
+                    </a:lnR>
+                    <a:lnT>
+                      <a:noFill/>
+                    </a:lnT>
+                    <a:lnB w="4763" cap="flat" cmpd="sng" algn="ctr">
+                      <a:solidFill>
+                        <a:srgbClr val="E03B7F"/>
+                      </a:solidFill>
+                      <a:prstDash val="solid"/>
+                      <a:round/>
+                      <a:headEnd type="none" w="med" len="med"/>
+                      <a:tailEnd type="none" w="med" len="med"/>
+                    </a:lnB>
+                    <a:noFill/>
+                  </a:tcPr>
+                </a:tc>
+                <a:tc>
+                  <a:txBody>
+                    <a:bodyPr/>
+                    <a:lstStyle/>
+                    <a:p>
+                      <a:pPr>
+                        <a:buNone/>
+                      </a:pPr>
+                      <a:r>
+                        <a:rPr lang="zh-CN">
+                          <a:effectLst/>
+                        </a:rPr>
+                        <a:t>计算方式</a:t>
+                      </a:r>
+                    </a:p>
+                  </a:txBody>
+                  <a:tcPr marL="28575" marR="28575" marT="19050" marB="19050" anchor="ctr">
+                    <a:lnL w="4763" cap="flat" cmpd="sng" algn="ctr">
+                      <a:solidFill>
+                        <a:srgbClr val="E03B7F"/>
+                      </a:solidFill>
+                      <a:prstDash val="solid"/>
+                      <a:round/>
+                      <a:headEnd type="none" w="med" len="med"/>
+                      <a:tailEnd type="none" w="med" len="med"/>
+                    </a:lnL>
+                    <a:lnR w="4763" cap="flat" cmpd="sng" algn="ctr">
+                      <a:solidFill>
+                        <a:srgbClr val="203F7F"/>
+                      </a:solidFill>
+                      <a:prstDash val="solid"/>
+                      <a:round/>
+                      <a:headEnd type="none" w="med" len="med"/>
+                      <a:tailEnd type="none" w="med" len="med"/>
+                    </a:lnR>
+                    <a:lnT>
+                      <a:noFill/>
+                    </a:lnT>
+                    <a:lnB w="4763" cap="flat" cmpd="sng" algn="ctr">
+                      <a:solidFill>
+                        <a:srgbClr val="203F7F"/>
+                      </a:solidFill>
+                      <a:prstDash val="solid"/>
+                      <a:round/>
+                      <a:headEnd type="none" w="med" len="med"/>
+                      <a:tailEnd type="none" w="med" len="med"/>
+                    </a:lnB>
+                    <a:noFill/>
+                  </a:tcPr>
+                </a:tc>
+                <a:tc>
+                  <a:txBody>
+                    <a:bodyPr/>
+                    <a:lstStyle/>
+                    <a:p>
+                      <a:pPr>
+                        <a:buNone/>
+                      </a:pPr>
+                      <a:r>
+                        <a:rPr lang="zh-CN">
+                          <a:effectLst/>
+                        </a:rPr>
+                        <a:t>为什么有效</a:t>
+                      </a:r>
+                    </a:p>
+                  </a:txBody>
+                  <a:tcPr marL="28575" marR="28575" marT="19050" marB="19050" anchor="ctr">
+                    <a:lnL w="4763" cap="flat" cmpd="sng" algn="ctr">
+                      <a:solidFill>
+                        <a:srgbClr val="203F7F"/>
+                      </a:solidFill>
+                      <a:prstDash val="solid"/>
+                      <a:round/>
+                      <a:headEnd type="none" w="med" len="med"/>
+                      <a:tailEnd type="none" w="med" len="med"/>
+                    </a:lnL>
+                    <a:lnR>
+                      <a:noFill/>
+                    </a:lnR>
+                    <a:lnT>
+                      <a:noFill/>
+                    </a:lnT>
+                    <a:lnB w="4763" cap="flat" cmpd="sng" algn="ctr">
+                      <a:solidFill>
+                        <a:srgbClr val="A03E7F"/>
+                      </a:solidFill>
+                      <a:prstDash val="solid"/>
+                      <a:round/>
+                      <a:headEnd type="none" w="med" len="med"/>
+                      <a:tailEnd type="none" w="med" len="med"/>
+                    </a:lnB>
+                    <a:noFill/>
+                  </a:tcPr>
+                </a:tc>
+                <a:extLst>
+                  <a:ext uri="{0D108BD9-81ED-4DB2-BD59-A6C34878D82A}">
+                    <a16:rowId xmlns:a16="http://schemas.microsoft.com/office/drawing/2014/main" val="330288682"/>
+                  </a:ext>
+                </a:extLst>
+              </a:tr>
+              <a:tr h="1082711">
+                <a:tc>
+                  <a:txBody>
+                    <a:bodyPr/>
+                    <a:lstStyle/>
+                    <a:p>
+                      <a:pPr>
+                        <a:buNone/>
+                      </a:pPr>
+                      <a:r>
+                        <a:rPr lang="zh-CN" b="1">
+                          <a:effectLst/>
+                        </a:rPr>
+                        <a:t>F1 回答长度</a:t>
+                      </a:r>
+                      <a:endParaRPr lang="zh-CN">
+                        <a:effectLst/>
+                      </a:endParaRPr>
+                    </a:p>
+                  </a:txBody>
+                  <a:tcPr marL="28575" marR="28575" marT="19050" marB="19050" anchor="ctr">
+                    <a:lnL>
+                      <a:noFill/>
+                    </a:lnL>
+                    <a:lnR w="4763" cap="flat" cmpd="sng" algn="ctr">
+                      <a:solidFill>
+                        <a:srgbClr val="604B7F"/>
+                      </a:solidFill>
+                      <a:prstDash val="solid"/>
+                      <a:round/>
+                      <a:headEnd type="none" w="med" len="med"/>
+                      <a:tailEnd type="none" w="med" len="med"/>
+                    </a:lnR>
+                    <a:lnT w="4763" cap="flat" cmpd="sng" algn="ctr">
+                      <a:solidFill>
+                        <a:srgbClr val="601D7F"/>
+                      </a:solidFill>
+                      <a:prstDash val="solid"/>
+                      <a:round/>
+                      <a:headEnd type="none" w="med" len="med"/>
+                      <a:tailEnd type="none" w="med" len="med"/>
+                    </a:lnT>
+                    <a:lnB w="4763" cap="flat" cmpd="sng" algn="ctr">
+                      <a:solidFill>
+                        <a:srgbClr val="604B7F"/>
+                      </a:solidFill>
+                      <a:prstDash val="solid"/>
+                      <a:round/>
+                      <a:headEnd type="none" w="med" len="med"/>
+                      <a:tailEnd type="none" w="med" len="med"/>
+                    </a:lnB>
+                    <a:noFill/>
+                  </a:tcPr>
+                </a:tc>
+                <a:tc>
+                  <a:txBody>
+                    <a:bodyPr/>
+                    <a:lstStyle/>
+                    <a:p>
+                      <a:pPr>
+                        <a:buNone/>
+                      </a:pPr>
+                      <a:r>
+                        <a:rPr lang="zh-CN">
+                          <a:effectLst/>
+                        </a:rPr>
+                        <a:t>50%</a:t>
+                      </a:r>
+                    </a:p>
+                  </a:txBody>
+                  <a:tcPr marL="28575" marR="28575" marT="19050" marB="19050" anchor="ctr">
+                    <a:lnL w="4763" cap="flat" cmpd="sng" algn="ctr">
+                      <a:solidFill>
+                        <a:srgbClr val="604B7F"/>
+                      </a:solidFill>
+                      <a:prstDash val="solid"/>
+                      <a:round/>
+                      <a:headEnd type="none" w="med" len="med"/>
+                      <a:tailEnd type="none" w="med" len="med"/>
+                    </a:lnL>
+                    <a:lnR w="4763" cap="flat" cmpd="sng" algn="ctr">
+                      <a:solidFill>
+                        <a:srgbClr val="60507F"/>
+                      </a:solidFill>
+                      <a:prstDash val="solid"/>
+                      <a:round/>
+                      <a:headEnd type="none" w="med" len="med"/>
+                      <a:tailEnd type="none" w="med" len="med"/>
+                    </a:lnR>
+                    <a:lnT w="4763" cap="flat" cmpd="sng" algn="ctr">
+                      <a:solidFill>
+                        <a:srgbClr val="E03B7F"/>
+                      </a:solidFill>
+                      <a:prstDash val="solid"/>
+                      <a:round/>
+                      <a:headEnd type="none" w="med" len="med"/>
+                      <a:tailEnd type="none" w="med" len="med"/>
+                    </a:lnT>
+                    <a:lnB w="4763" cap="flat" cmpd="sng" algn="ctr">
+                      <a:solidFill>
+                        <a:srgbClr val="60507F"/>
+                      </a:solidFill>
+                      <a:prstDash val="solid"/>
+                      <a:round/>
+                      <a:headEnd type="none" w="med" len="med"/>
+                      <a:tailEnd type="none" w="med" len="med"/>
+                    </a:lnB>
+                    <a:noFill/>
+                  </a:tcPr>
+                </a:tc>
+                <a:tc>
+                  <a:txBody>
+                    <a:bodyPr/>
+                    <a:lstStyle/>
+                    <a:p>
+                      <a:pPr>
+                        <a:buNone/>
+                      </a:pPr>
+                      <a:r>
+                        <a:rPr lang="zh-CN" b="0" u="none" strike="noStrike">
+                          <a:effectLst/>
+                          <a:hlinkClick r:id="rId3"/>
+                        </a:rPr>
+                        <a:t>min(字符数 / 150, 1)</a:t>
+                      </a:r>
+                      <a:endParaRPr lang="zh-CN">
+                        <a:effectLst/>
+                      </a:endParaRPr>
+                    </a:p>
+                  </a:txBody>
+                  <a:tcPr marL="28575" marR="28575" marT="19050" marB="19050" anchor="ctr">
+                    <a:lnL w="4763" cap="flat" cmpd="sng" algn="ctr">
+                      <a:solidFill>
+                        <a:srgbClr val="60507F"/>
+                      </a:solidFill>
+                      <a:prstDash val="solid"/>
+                      <a:round/>
+                      <a:headEnd type="none" w="med" len="med"/>
+                      <a:tailEnd type="none" w="med" len="med"/>
+                    </a:lnL>
+                    <a:lnR w="4763" cap="flat" cmpd="sng" algn="ctr">
+                      <a:solidFill>
+                        <a:srgbClr val="A04D7F"/>
+                      </a:solidFill>
+                      <a:prstDash val="solid"/>
+                      <a:round/>
+                      <a:headEnd type="none" w="med" len="med"/>
+                      <a:tailEnd type="none" w="med" len="med"/>
+                    </a:lnR>
+                    <a:lnT w="4763" cap="flat" cmpd="sng" algn="ctr">
+                      <a:solidFill>
+                        <a:srgbClr val="203F7F"/>
+                      </a:solidFill>
+                      <a:prstDash val="solid"/>
+                      <a:round/>
+                      <a:headEnd type="none" w="med" len="med"/>
+                      <a:tailEnd type="none" w="med" len="med"/>
+                    </a:lnT>
+                    <a:lnB w="4763" cap="flat" cmpd="sng" algn="ctr">
+                      <a:solidFill>
+                        <a:srgbClr val="A04D7F"/>
+                      </a:solidFill>
+                      <a:prstDash val="solid"/>
+                      <a:round/>
+                      <a:headEnd type="none" w="med" len="med"/>
+                      <a:tailEnd type="none" w="med" len="med"/>
+                    </a:lnB>
+                    <a:noFill/>
+                  </a:tcPr>
+                </a:tc>
+                <a:tc>
+                  <a:txBody>
+                    <a:bodyPr/>
+                    <a:lstStyle/>
+                    <a:p>
+                      <a:pPr>
+                        <a:buNone/>
+                      </a:pPr>
+                      <a:r>
+                        <a:rPr lang="zh-CN">
+                          <a:effectLst/>
+                        </a:rPr>
+                        <a:t>高质量回答需要展开论述，必然更长；低质量回答往往一句话敷衍</a:t>
+                      </a:r>
+                    </a:p>
+                  </a:txBody>
+                  <a:tcPr marL="28575" marR="28575" marT="19050" marB="19050" anchor="ctr">
+                    <a:lnL w="4763" cap="flat" cmpd="sng" algn="ctr">
+                      <a:solidFill>
+                        <a:srgbClr val="A04D7F"/>
+                      </a:solidFill>
+                      <a:prstDash val="solid"/>
+                      <a:round/>
+                      <a:headEnd type="none" w="med" len="med"/>
+                      <a:tailEnd type="none" w="med" len="med"/>
+                    </a:lnL>
+                    <a:lnR>
+                      <a:noFill/>
+                    </a:lnR>
+                    <a:lnT w="4763" cap="flat" cmpd="sng" algn="ctr">
+                      <a:solidFill>
+                        <a:srgbClr val="A03E7F"/>
+                      </a:solidFill>
+                      <a:prstDash val="solid"/>
+                      <a:round/>
+                      <a:headEnd type="none" w="med" len="med"/>
+                      <a:tailEnd type="none" w="med" len="med"/>
+                    </a:lnT>
+                    <a:lnB w="4763" cap="flat" cmpd="sng" algn="ctr">
+                      <a:solidFill>
+                        <a:srgbClr val="604E7F"/>
+                      </a:solidFill>
+                      <a:prstDash val="solid"/>
+                      <a:round/>
+                      <a:headEnd type="none" w="med" len="med"/>
+                      <a:tailEnd type="none" w="med" len="med"/>
+                    </a:lnB>
+                    <a:noFill/>
+                  </a:tcPr>
+                </a:tc>
+                <a:extLst>
+                  <a:ext uri="{0D108BD9-81ED-4DB2-BD59-A6C34878D82A}">
+                    <a16:rowId xmlns:a16="http://schemas.microsoft.com/office/drawing/2014/main" val="1296430223"/>
+                  </a:ext>
+                </a:extLst>
+              </a:tr>
+              <a:tr h="1082711">
+                <a:tc>
+                  <a:txBody>
+                    <a:bodyPr/>
+                    <a:lstStyle/>
+                    <a:p>
+                      <a:pPr>
+                        <a:buNone/>
+                      </a:pPr>
+                      <a:r>
+                        <a:rPr lang="zh-CN" b="1">
+                          <a:effectLst/>
+                        </a:rPr>
+                        <a:t>F2 ES 文本相关性</a:t>
+                      </a:r>
+                      <a:endParaRPr lang="zh-CN">
+                        <a:effectLst/>
+                      </a:endParaRPr>
+                    </a:p>
+                  </a:txBody>
+                  <a:tcPr marL="28575" marR="28575" marT="19050" marB="19050" anchor="ctr">
+                    <a:lnL>
+                      <a:noFill/>
+                    </a:lnL>
+                    <a:lnR w="4763" cap="flat" cmpd="sng" algn="ctr">
+                      <a:solidFill>
+                        <a:srgbClr val="605F7F"/>
+                      </a:solidFill>
+                      <a:prstDash val="solid"/>
+                      <a:round/>
+                      <a:headEnd type="none" w="med" len="med"/>
+                      <a:tailEnd type="none" w="med" len="med"/>
+                    </a:lnR>
+                    <a:lnT w="4763" cap="flat" cmpd="sng" algn="ctr">
+                      <a:solidFill>
+                        <a:srgbClr val="604B7F"/>
+                      </a:solidFill>
+                      <a:prstDash val="solid"/>
+                      <a:round/>
+                      <a:headEnd type="none" w="med" len="med"/>
+                      <a:tailEnd type="none" w="med" len="med"/>
+                    </a:lnT>
+                    <a:lnB w="4763" cap="flat" cmpd="sng" algn="ctr">
+                      <a:solidFill>
+                        <a:srgbClr val="605F7F"/>
+                      </a:solidFill>
+                      <a:prstDash val="solid"/>
+                      <a:round/>
+                      <a:headEnd type="none" w="med" len="med"/>
+                      <a:tailEnd type="none" w="med" len="med"/>
+                    </a:lnB>
+                    <a:noFill/>
+                  </a:tcPr>
+                </a:tc>
+                <a:tc>
+                  <a:txBody>
+                    <a:bodyPr/>
+                    <a:lstStyle/>
+                    <a:p>
+                      <a:pPr>
+                        <a:buNone/>
+                      </a:pPr>
+                      <a:r>
+                        <a:rPr lang="zh-CN">
+                          <a:effectLst/>
+                        </a:rPr>
+                        <a:t>25%</a:t>
+                      </a:r>
+                    </a:p>
+                  </a:txBody>
+                  <a:tcPr marL="28575" marR="28575" marT="19050" marB="19050" anchor="ctr">
+                    <a:lnL w="4763" cap="flat" cmpd="sng" algn="ctr">
+                      <a:solidFill>
+                        <a:srgbClr val="605F7F"/>
+                      </a:solidFill>
+                      <a:prstDash val="solid"/>
+                      <a:round/>
+                      <a:headEnd type="none" w="med" len="med"/>
+                      <a:tailEnd type="none" w="med" len="med"/>
+                    </a:lnL>
+                    <a:lnR w="4763" cap="flat" cmpd="sng" algn="ctr">
+                      <a:solidFill>
+                        <a:srgbClr val="A0687F"/>
+                      </a:solidFill>
+                      <a:prstDash val="solid"/>
+                      <a:round/>
+                      <a:headEnd type="none" w="med" len="med"/>
+                      <a:tailEnd type="none" w="med" len="med"/>
+                    </a:lnR>
+                    <a:lnT w="4763" cap="flat" cmpd="sng" algn="ctr">
+                      <a:solidFill>
+                        <a:srgbClr val="60507F"/>
+                      </a:solidFill>
+                      <a:prstDash val="solid"/>
+                      <a:round/>
+                      <a:headEnd type="none" w="med" len="med"/>
+                      <a:tailEnd type="none" w="med" len="med"/>
+                    </a:lnT>
+                    <a:lnB w="4763" cap="flat" cmpd="sng" algn="ctr">
+                      <a:solidFill>
+                        <a:srgbClr val="A0687F"/>
+                      </a:solidFill>
+                      <a:prstDash val="solid"/>
+                      <a:round/>
+                      <a:headEnd type="none" w="med" len="med"/>
+                      <a:tailEnd type="none" w="med" len="med"/>
+                    </a:lnB>
+                    <a:noFill/>
+                  </a:tcPr>
+                </a:tc>
+                <a:tc>
+                  <a:txBody>
+                    <a:bodyPr/>
+                    <a:lstStyle/>
+                    <a:p>
+                      <a:pPr>
+                        <a:buNone/>
+                      </a:pPr>
+                      <a:r>
+                        <a:rPr lang="zh-CN">
+                          <a:effectLst/>
+                        </a:rPr>
+                        <a:t>组内 min-max 归一化 BM25 分数</a:t>
+                      </a:r>
+                    </a:p>
+                  </a:txBody>
+                  <a:tcPr marL="28575" marR="28575" marT="19050" marB="19050" anchor="ctr">
+                    <a:lnL w="4763" cap="flat" cmpd="sng" algn="ctr">
+                      <a:solidFill>
+                        <a:srgbClr val="A0687F"/>
+                      </a:solidFill>
+                      <a:prstDash val="solid"/>
+                      <a:round/>
+                      <a:headEnd type="none" w="med" len="med"/>
+                      <a:tailEnd type="none" w="med" len="med"/>
+                    </a:lnL>
+                    <a:lnR w="4763" cap="flat" cmpd="sng" algn="ctr">
+                      <a:solidFill>
+                        <a:srgbClr val="E0637F"/>
+                      </a:solidFill>
+                      <a:prstDash val="solid"/>
+                      <a:round/>
+                      <a:headEnd type="none" w="med" len="med"/>
+                      <a:tailEnd type="none" w="med" len="med"/>
+                    </a:lnR>
+                    <a:lnT w="4763" cap="flat" cmpd="sng" algn="ctr">
+                      <a:solidFill>
+                        <a:srgbClr val="A04D7F"/>
+                      </a:solidFill>
+                      <a:prstDash val="solid"/>
+                      <a:round/>
+                      <a:headEnd type="none" w="med" len="med"/>
+                      <a:tailEnd type="none" w="med" len="med"/>
+                    </a:lnT>
+                    <a:lnB w="4763" cap="flat" cmpd="sng" algn="ctr">
+                      <a:solidFill>
+                        <a:srgbClr val="E0637F"/>
+                      </a:solidFill>
+                      <a:prstDash val="solid"/>
+                      <a:round/>
+                      <a:headEnd type="none" w="med" len="med"/>
+                      <a:tailEnd type="none" w="med" len="med"/>
+                    </a:lnB>
+                    <a:noFill/>
+                  </a:tcPr>
+                </a:tc>
+                <a:tc>
+                  <a:txBody>
+                    <a:bodyPr/>
+                    <a:lstStyle/>
+                    <a:p>
+                      <a:pPr>
+                        <a:buNone/>
+                      </a:pPr>
+                      <a:r>
+                        <a:rPr lang="zh-CN">
+                          <a:effectLst/>
+                        </a:rPr>
+                        <a:t>BM25 越高说明答案与问题的词汇重合度越好，即"答非所问"的答案得分低</a:t>
+                      </a:r>
+                    </a:p>
+                  </a:txBody>
+                  <a:tcPr marL="28575" marR="28575" marT="19050" marB="19050" anchor="ctr">
+                    <a:lnL w="4763" cap="flat" cmpd="sng" algn="ctr">
+                      <a:solidFill>
+                        <a:srgbClr val="E0637F"/>
+                      </a:solidFill>
+                      <a:prstDash val="solid"/>
+                      <a:round/>
+                      <a:headEnd type="none" w="med" len="med"/>
+                      <a:tailEnd type="none" w="med" len="med"/>
+                    </a:lnL>
+                    <a:lnR>
+                      <a:noFill/>
+                    </a:lnR>
+                    <a:lnT w="4763" cap="flat" cmpd="sng" algn="ctr">
+                      <a:solidFill>
+                        <a:srgbClr val="604E7F"/>
+                      </a:solidFill>
+                      <a:prstDash val="solid"/>
+                      <a:round/>
+                      <a:headEnd type="none" w="med" len="med"/>
+                      <a:tailEnd type="none" w="med" len="med"/>
+                    </a:lnT>
+                    <a:lnB w="4763" cap="flat" cmpd="sng" algn="ctr">
+                      <a:solidFill>
+                        <a:srgbClr val="20687F"/>
+                      </a:solidFill>
+                      <a:prstDash val="solid"/>
+                      <a:round/>
+                      <a:headEnd type="none" w="med" len="med"/>
+                      <a:tailEnd type="none" w="med" len="med"/>
+                    </a:lnB>
+                    <a:noFill/>
+                  </a:tcPr>
+                </a:tc>
+                <a:extLst>
+                  <a:ext uri="{0D108BD9-81ED-4DB2-BD59-A6C34878D82A}">
+                    <a16:rowId xmlns:a16="http://schemas.microsoft.com/office/drawing/2014/main" val="2797616348"/>
+                  </a:ext>
+                </a:extLst>
+              </a:tr>
+              <a:tr h="872021">
+                <a:tc>
+                  <a:txBody>
+                    <a:bodyPr/>
+                    <a:lstStyle/>
+                    <a:p>
+                      <a:pPr>
+                        <a:buNone/>
+                      </a:pPr>
+                      <a:r>
+                        <a:rPr lang="zh-CN" b="1" dirty="0">
+                          <a:effectLst/>
+                        </a:rPr>
+                        <a:t>F3 词汇丰富度</a:t>
+                      </a:r>
+                      <a:endParaRPr lang="zh-CN" dirty="0">
+                        <a:effectLst/>
+                      </a:endParaRPr>
+                    </a:p>
+                  </a:txBody>
+                  <a:tcPr marL="28575" marR="28575" marT="19050" marB="19050" anchor="ctr">
+                    <a:lnL>
+                      <a:noFill/>
+                    </a:lnL>
+                    <a:lnR w="4763" cap="flat" cmpd="sng" algn="ctr">
+                      <a:solidFill>
+                        <a:srgbClr val="60647F"/>
+                      </a:solidFill>
+                      <a:prstDash val="solid"/>
+                      <a:round/>
+                      <a:headEnd type="none" w="med" len="med"/>
+                      <a:tailEnd type="none" w="med" len="med"/>
+                    </a:lnR>
+                    <a:lnT w="4763" cap="flat" cmpd="sng" algn="ctr">
+                      <a:solidFill>
+                        <a:srgbClr val="605F7F"/>
+                      </a:solidFill>
+                      <a:prstDash val="solid"/>
+                      <a:round/>
+                      <a:headEnd type="none" w="med" len="med"/>
+                      <a:tailEnd type="none" w="med" len="med"/>
+                    </a:lnT>
+                    <a:lnB>
+                      <a:noFill/>
+                    </a:lnB>
+                    <a:noFill/>
+                  </a:tcPr>
+                </a:tc>
+                <a:tc>
+                  <a:txBody>
+                    <a:bodyPr/>
+                    <a:lstStyle/>
+                    <a:p>
+                      <a:pPr>
+                        <a:buNone/>
+                      </a:pPr>
+                      <a:r>
+                        <a:rPr lang="zh-CN" dirty="0">
+                          <a:effectLst/>
+                        </a:rPr>
+                        <a:t>25%</a:t>
+                      </a:r>
+                    </a:p>
+                  </a:txBody>
+                  <a:tcPr marL="28575" marR="28575" marT="19050" marB="19050" anchor="ctr">
+                    <a:lnL w="4763" cap="flat" cmpd="sng" algn="ctr">
+                      <a:solidFill>
+                        <a:srgbClr val="60647F"/>
+                      </a:solidFill>
+                      <a:prstDash val="solid"/>
+                      <a:round/>
+                      <a:headEnd type="none" w="med" len="med"/>
+                      <a:tailEnd type="none" w="med" len="med"/>
+                    </a:lnL>
+                    <a:lnR w="4763" cap="flat" cmpd="sng" algn="ctr">
+                      <a:solidFill>
+                        <a:srgbClr val="606A7F"/>
+                      </a:solidFill>
+                      <a:prstDash val="solid"/>
+                      <a:round/>
+                      <a:headEnd type="none" w="med" len="med"/>
+                      <a:tailEnd type="none" w="med" len="med"/>
+                    </a:lnR>
+                    <a:lnT w="4763" cap="flat" cmpd="sng" algn="ctr">
+                      <a:solidFill>
+                        <a:srgbClr val="A0687F"/>
+                      </a:solidFill>
+                      <a:prstDash val="solid"/>
+                      <a:round/>
+                      <a:headEnd type="none" w="med" len="med"/>
+                      <a:tailEnd type="none" w="med" len="med"/>
+                    </a:lnT>
+                    <a:lnB>
+                      <a:noFill/>
+                    </a:lnB>
+                    <a:noFill/>
+                  </a:tcPr>
+                </a:tc>
+                <a:tc>
+                  <a:txBody>
+                    <a:bodyPr/>
+                    <a:lstStyle/>
+                    <a:p>
+                      <a:pPr>
+                        <a:buNone/>
+                      </a:pPr>
+                      <a:r>
+                        <a:rPr lang="zh-CN">
+                          <a:effectLst/>
+                        </a:rPr>
+                        <a:t>去标点后不重复字符数 / 80</a:t>
+                      </a:r>
+                    </a:p>
+                  </a:txBody>
+                  <a:tcPr marL="28575" marR="28575" marT="19050" marB="19050" anchor="ctr">
+                    <a:lnL w="4763" cap="flat" cmpd="sng" algn="ctr">
+                      <a:solidFill>
+                        <a:srgbClr val="606A7F"/>
+                      </a:solidFill>
+                      <a:prstDash val="solid"/>
+                      <a:round/>
+                      <a:headEnd type="none" w="med" len="med"/>
+                      <a:tailEnd type="none" w="med" len="med"/>
+                    </a:lnL>
+                    <a:lnR w="4763" cap="flat" cmpd="sng" algn="ctr">
+                      <a:solidFill>
+                        <a:srgbClr val="A07C7F"/>
+                      </a:solidFill>
+                      <a:prstDash val="solid"/>
+                      <a:round/>
+                      <a:headEnd type="none" w="med" len="med"/>
+                      <a:tailEnd type="none" w="med" len="med"/>
+                    </a:lnR>
+                    <a:lnT w="4763" cap="flat" cmpd="sng" algn="ctr">
+                      <a:solidFill>
+                        <a:srgbClr val="E0637F"/>
+                      </a:solidFill>
+                      <a:prstDash val="solid"/>
+                      <a:round/>
+                      <a:headEnd type="none" w="med" len="med"/>
+                      <a:tailEnd type="none" w="med" len="med"/>
+                    </a:lnT>
+                    <a:lnB>
+                      <a:noFill/>
+                    </a:lnB>
+                    <a:noFill/>
+                  </a:tcPr>
+                </a:tc>
+                <a:tc>
+                  <a:txBody>
+                    <a:bodyPr/>
+                    <a:lstStyle/>
+                    <a:p>
+                      <a:pPr>
+                        <a:buNone/>
+                      </a:pPr>
+                      <a:r>
+                        <a:rPr lang="zh-CN" dirty="0">
+                          <a:effectLst/>
+                        </a:rPr>
+                        <a:t>高质量回答使用更多专业术语和不同概念，去重字符种类更多</a:t>
+                      </a:r>
+                    </a:p>
+                  </a:txBody>
+                  <a:tcPr marL="28575" marR="28575" marT="19050" marB="19050" anchor="ctr">
+                    <a:lnL w="4763" cap="flat" cmpd="sng" algn="ctr">
+                      <a:solidFill>
+                        <a:srgbClr val="A07C7F"/>
+                      </a:solidFill>
+                      <a:prstDash val="solid"/>
+                      <a:round/>
+                      <a:headEnd type="none" w="med" len="med"/>
+                      <a:tailEnd type="none" w="med" len="med"/>
+                    </a:lnL>
+                    <a:lnR>
+                      <a:noFill/>
+                    </a:lnR>
+                    <a:lnT w="4763" cap="flat" cmpd="sng" algn="ctr">
+                      <a:solidFill>
+                        <a:srgbClr val="20687F"/>
+                      </a:solidFill>
+                      <a:prstDash val="solid"/>
+                      <a:round/>
+                      <a:headEnd type="none" w="med" len="med"/>
+                      <a:tailEnd type="none" w="med" len="med"/>
+                    </a:lnT>
+                    <a:lnB>
+                      <a:noFill/>
+                    </a:lnB>
+                    <a:noFill/>
+                  </a:tcPr>
+                </a:tc>
+                <a:extLst>
+                  <a:ext uri="{0D108BD9-81ED-4DB2-BD59-A6C34878D82A}">
+                    <a16:rowId xmlns:a16="http://schemas.microsoft.com/office/drawing/2014/main" val="3181907431"/>
+                  </a:ext>
+                </a:extLst>
+              </a:tr>
+            </a:tbl>
+          </a:graphicData>
+        </a:graphic>
+      </p:graphicFrame>
+      <p:sp>
+        <p:nvSpPr>
+          <p:cNvPr id="15" name="文本框 14">
+            <a:extLst>
+              <a:ext uri="{FF2B5EF4-FFF2-40B4-BE49-F238E27FC236}">
+                <a16:creationId xmlns:a16="http://schemas.microsoft.com/office/drawing/2014/main" id="{FC64473D-105B-EACE-A9BF-008D8865B2E8}"/>
+              </a:ext>
+            </a:extLst>
+          </p:cNvPr>
+          <p:cNvSpPr txBox="1"/>
+          <p:nvPr/>
+        </p:nvSpPr>
+        <p:spPr>
+          <a:xfrm>
+            <a:off x="4740088" y="1400984"/>
+            <a:ext cx="7262532" cy="646331"/>
+          </a:xfrm>
+          <a:prstGeom prst="rect">
+            <a:avLst/>
+          </a:prstGeom>
+          <a:noFill/>
+        </p:spPr>
+        <p:txBody>
+          <a:bodyPr wrap="square">
+            <a:spAutoFit/>
+          </a:bodyPr>
+          <a:lstStyle/>
+          <a:p>
+            <a:pPr>
+              <a:spcAft>
+                <a:spcPts val="1200"/>
+              </a:spcAft>
+            </a:pPr>
+            <a:r>
+              <a:rPr lang="zh-CN" altLang="zh-CN" b="0" i="0" dirty="0">
+                <a:effectLst/>
+                <a:latin typeface="Segoe WPC"/>
+              </a:rPr>
+              <a:t>对同一问题下的每个回答，从文本本身提取 3 个特征，加权打分映射到 0–9：</a:t>
+            </a:r>
+            <a:r>
+              <a:rPr lang="en-US" altLang="zh-CN" dirty="0" err="1">
+                <a:latin typeface="Segoe WPC"/>
+              </a:rPr>
+              <a:t>custom_score</a:t>
+            </a:r>
+            <a:r>
+              <a:rPr lang="en-US" altLang="zh-CN" dirty="0">
+                <a:latin typeface="Segoe WPC"/>
+              </a:rPr>
+              <a:t> = (0.50 × F1 + 0.25 × F2 + 0.25 × F3) × 9</a:t>
+            </a:r>
+            <a:endParaRPr lang="zh-CN" altLang="zh-CN" b="0" i="0" dirty="0">
+              <a:effectLst/>
+              <a:latin typeface="Segoe WPC"/>
+            </a:endParaRPr>
+          </a:p>
+        </p:txBody>
+      </p:sp>
+    </p:spTree>
+    <p:extLst>
+      <p:ext uri="{BB962C8B-B14F-4D97-AF65-F5344CB8AC3E}">
+        <p14:creationId xmlns:p14="http://schemas.microsoft.com/office/powerpoint/2010/main" val="3767501602"/>
+      </p:ext>
+    </p:extLst>
+  </p:cSld>
+  <p:clrMapOvr>
+    <a:masterClrMapping/>
+  </p:clrMapOvr>
+</p:sld>
+</file>
+
+<file path=ppt/slides/slide17.xml><?xml version="1.0" encoding="utf-8"?>
 <p:sld xmlns:a="http://schemas.openxmlformats.org/drawingml/2006/main" xmlns:r="http://schemas.openxmlformats.org/officeDocument/2006/relationships" xmlns:p="http://schemas.openxmlformats.org/presentationml/2006/main">
   <p:cSld>
     <p:spTree>

--- a/report/搜索引擎总结.pptx
+++ b/report/搜索引擎总结.pptx
@@ -6545,505 +6545,37 @@
       </p:sp>
       <p:sp>
         <p:nvSpPr>
-          <p:cNvPr id="4" name="矩形 3"/>
-          <p:cNvSpPr>
-            <a:spLocks noGrp="1"/>
-          </p:cNvSpPr>
+          <p:cNvPr id="3" name="TextBox 2">
+            <a:extLst>
+              <a:ext uri="{FF2B5EF4-FFF2-40B4-BE49-F238E27FC236}">
+                <a16:creationId xmlns:a16="http://schemas.microsoft.com/office/drawing/2014/main" id="{6E79D8F8-2327-A489-4B37-5DEE5EC64953}"/>
+              </a:ext>
+            </a:extLst>
+          </p:cNvPr>
+          <p:cNvSpPr txBox="1"/>
           <p:nvPr/>
         </p:nvSpPr>
         <p:spPr>
           <a:xfrm>
-            <a:off x="857250" y="1619250"/>
-            <a:ext cx="4762500" cy="1619250"/>
+            <a:off x="2031318" y="1601734"/>
+            <a:ext cx="8873976" cy="1754326"/>
           </a:xfrm>
           <a:prstGeom prst="rect">
             <a:avLst/>
           </a:prstGeom>
-          <a:solidFill>
-            <a:srgbClr val="FFFFFF"/>
-          </a:solidFill>
-          <a:ln w="9525">
-            <a:solidFill>
-              <a:srgbClr val="C7D0C4"/>
-            </a:solidFill>
-            <a:prstDash val="solid"/>
-          </a:ln>
-        </p:spPr>
-      </p:sp>
-      <p:sp>
-        <p:nvSpPr>
-          <p:cNvPr id="5" name="矩形 4"/>
-          <p:cNvSpPr>
-            <a:spLocks noGrp="1"/>
-          </p:cNvSpPr>
-          <p:nvPr/>
-        </p:nvSpPr>
-        <p:spPr>
-          <a:xfrm>
-            <a:off x="1085850" y="1790700"/>
-            <a:ext cx="4305300" cy="323850"/>
-          </a:xfrm>
-          <a:prstGeom prst="rect">
-            <a:avLst/>
-          </a:prstGeom>
-          <a:solidFill>
-            <a:srgbClr val="000000">
-              <a:alpha val="0"/>
-            </a:srgbClr>
-          </a:solidFill>
-          <a:ln w="0">
-            <a:solidFill>
-              <a:srgbClr val="000000">
-                <a:alpha val="0"/>
-              </a:srgbClr>
-            </a:solidFill>
-            <a:prstDash val="solid"/>
-          </a:ln>
-        </p:spPr>
-        <p:txBody>
-          <a:bodyPr anchor="ctr"/>
-          <a:lstStyle/>
-          <a:p>
-            <a:pPr algn="l">
-              <a:defRPr sz="1650" b="1">
-                <a:solidFill>
-                  <a:srgbClr val="2D4A33"/>
-                </a:solidFill>
-              </a:defRPr>
-            </a:pPr>
-            <a:r>
-              <a:rPr sz="3200" b="1" dirty="0" err="1">
-                <a:solidFill>
-                  <a:srgbClr val="2D4A33"/>
-                </a:solidFill>
-              </a:rPr>
-              <a:t>检索前</a:t>
-            </a:r>
-            <a:endParaRPr sz="3200" b="1" dirty="0">
-              <a:solidFill>
-                <a:srgbClr val="2D4A33"/>
-              </a:solidFill>
-            </a:endParaRPr>
-          </a:p>
-        </p:txBody>
-      </p:sp>
-      <p:sp>
-        <p:nvSpPr>
-          <p:cNvPr id="6" name="矩形 5"/>
-          <p:cNvSpPr>
-            <a:spLocks noGrp="1"/>
-          </p:cNvSpPr>
-          <p:nvPr/>
-        </p:nvSpPr>
-        <p:spPr>
-          <a:xfrm>
-            <a:off x="1085850" y="2228850"/>
-            <a:ext cx="4305300" cy="857250"/>
-          </a:xfrm>
-          <a:prstGeom prst="rect">
-            <a:avLst/>
-          </a:prstGeom>
-          <a:solidFill>
-            <a:srgbClr val="000000">
-              <a:alpha val="0"/>
-            </a:srgbClr>
-          </a:solidFill>
-          <a:ln w="0">
-            <a:solidFill>
-              <a:srgbClr val="000000">
-                <a:alpha val="0"/>
-              </a:srgbClr>
-            </a:solidFill>
-            <a:prstDash val="solid"/>
-          </a:ln>
-        </p:spPr>
-        <p:txBody>
-          <a:bodyPr anchor="ctr"/>
-          <a:lstStyle/>
-          <a:p>
-            <a:pPr algn="l">
-              <a:defRPr sz="1350" b="0">
-                <a:solidFill>
-                  <a:srgbClr val="1F2D22"/>
-                </a:solidFill>
-              </a:defRPr>
-            </a:pPr>
-            <a:r>
-              <a:rPr sz="2000" dirty="0" err="1">
-                <a:solidFill>
-                  <a:srgbClr val="1F2D22"/>
-                </a:solidFill>
-                <a:latin typeface="ui-monospace"/>
-              </a:rPr>
-              <a:t>查询优化</a:t>
-            </a:r>
-            <a:endParaRPr sz="2000" dirty="0">
-              <a:solidFill>
-                <a:srgbClr val="1F2D22"/>
-              </a:solidFill>
-              <a:latin typeface="ui-monospace"/>
-            </a:endParaRPr>
-          </a:p>
-          <a:p>
-            <a:pPr algn="l">
-              <a:defRPr sz="1350" b="0">
-                <a:solidFill>
-                  <a:srgbClr val="1F2D22"/>
-                </a:solidFill>
-              </a:defRPr>
-            </a:pPr>
-            <a:r>
-              <a:rPr sz="2000" dirty="0" err="1">
-                <a:solidFill>
-                  <a:srgbClr val="1F2D22"/>
-                </a:solidFill>
-                <a:latin typeface="ui-monospace"/>
-              </a:rPr>
-              <a:t>检索提示</a:t>
-            </a:r>
-            <a:endParaRPr sz="2000" dirty="0">
-              <a:solidFill>
-                <a:srgbClr val="1F2D22"/>
-              </a:solidFill>
-              <a:latin typeface="ui-monospace"/>
-            </a:endParaRPr>
-          </a:p>
-          <a:p>
-            <a:pPr algn="l">
-              <a:defRPr sz="1350" b="0">
-                <a:solidFill>
-                  <a:srgbClr val="1F2D22"/>
-                </a:solidFill>
-              </a:defRPr>
-            </a:pPr>
-            <a:r>
-              <a:rPr sz="2000" dirty="0" err="1">
-                <a:solidFill>
-                  <a:srgbClr val="1F2D22"/>
-                </a:solidFill>
-                <a:latin typeface="ui-monospace"/>
-              </a:rPr>
-              <a:t>问题改写</a:t>
-            </a:r>
-            <a:endParaRPr sz="2000" dirty="0">
-              <a:solidFill>
-                <a:srgbClr val="1F2D22"/>
-              </a:solidFill>
-              <a:latin typeface="ui-monospace"/>
-            </a:endParaRPr>
-          </a:p>
-        </p:txBody>
-      </p:sp>
-      <p:sp>
-        <p:nvSpPr>
-          <p:cNvPr id="7" name="矩形 6"/>
-          <p:cNvSpPr>
-            <a:spLocks noGrp="1"/>
-          </p:cNvSpPr>
-          <p:nvPr/>
-        </p:nvSpPr>
-        <p:spPr>
-          <a:xfrm>
-            <a:off x="6572250" y="1619250"/>
-            <a:ext cx="4762500" cy="1619250"/>
-          </a:xfrm>
-          <a:prstGeom prst="rect">
-            <a:avLst/>
-          </a:prstGeom>
-          <a:solidFill>
-            <a:srgbClr val="FFFFFF"/>
-          </a:solidFill>
-          <a:ln w="9525">
-            <a:solidFill>
-              <a:srgbClr val="C7D0C4"/>
-            </a:solidFill>
-            <a:prstDash val="solid"/>
-          </a:ln>
-        </p:spPr>
-      </p:sp>
-      <p:sp>
-        <p:nvSpPr>
-          <p:cNvPr id="8" name="矩形 7"/>
-          <p:cNvSpPr>
-            <a:spLocks noGrp="1"/>
-          </p:cNvSpPr>
-          <p:nvPr/>
-        </p:nvSpPr>
-        <p:spPr>
-          <a:xfrm>
-            <a:off x="6800850" y="1790700"/>
-            <a:ext cx="4305300" cy="323850"/>
-          </a:xfrm>
-          <a:prstGeom prst="rect">
-            <a:avLst/>
-          </a:prstGeom>
-          <a:solidFill>
-            <a:srgbClr val="000000">
-              <a:alpha val="0"/>
-            </a:srgbClr>
-          </a:solidFill>
-          <a:ln w="0">
-            <a:solidFill>
-              <a:srgbClr val="000000">
-                <a:alpha val="0"/>
-              </a:srgbClr>
-            </a:solidFill>
-            <a:prstDash val="solid"/>
-          </a:ln>
-        </p:spPr>
-        <p:txBody>
-          <a:bodyPr anchor="ctr"/>
-          <a:lstStyle/>
-          <a:p>
-            <a:pPr>
-              <a:defRPr sz="1650" b="1">
-                <a:solidFill>
-                  <a:srgbClr val="2D4A33"/>
-                </a:solidFill>
-              </a:defRPr>
-            </a:pPr>
-            <a:r>
-              <a:rPr sz="3200" b="1" dirty="0" err="1">
-                <a:solidFill>
-                  <a:srgbClr val="2D4A33"/>
-                </a:solidFill>
-              </a:rPr>
-              <a:t>检索后</a:t>
-            </a:r>
-            <a:endParaRPr sz="3200" b="1" dirty="0">
-              <a:solidFill>
-                <a:srgbClr val="2D4A33"/>
-              </a:solidFill>
-            </a:endParaRPr>
-          </a:p>
-        </p:txBody>
-      </p:sp>
-      <p:sp>
-        <p:nvSpPr>
-          <p:cNvPr id="9" name="矩形 8"/>
-          <p:cNvSpPr>
-            <a:spLocks noGrp="1"/>
-          </p:cNvSpPr>
-          <p:nvPr/>
-        </p:nvSpPr>
-        <p:spPr>
-          <a:xfrm>
-            <a:off x="6800850" y="2228850"/>
-            <a:ext cx="4305300" cy="857250"/>
-          </a:xfrm>
-          <a:prstGeom prst="rect">
-            <a:avLst/>
-          </a:prstGeom>
-          <a:solidFill>
-            <a:srgbClr val="000000">
-              <a:alpha val="0"/>
-            </a:srgbClr>
-          </a:solidFill>
-          <a:ln w="0">
-            <a:solidFill>
-              <a:srgbClr val="000000">
-                <a:alpha val="0"/>
-              </a:srgbClr>
-            </a:solidFill>
-            <a:prstDash val="solid"/>
-          </a:ln>
-        </p:spPr>
-        <p:txBody>
-          <a:bodyPr anchor="ctr"/>
-          <a:lstStyle/>
-          <a:p>
-            <a:pPr algn="l">
-              <a:defRPr sz="1350" b="0">
-                <a:solidFill>
-                  <a:srgbClr val="1F2D22"/>
-                </a:solidFill>
-              </a:defRPr>
-            </a:pPr>
-            <a:r>
-              <a:rPr sz="2000" dirty="0" err="1">
-                <a:solidFill>
-                  <a:srgbClr val="1F2D22"/>
-                </a:solidFill>
-                <a:latin typeface="ui-monospace"/>
-              </a:rPr>
-              <a:t>自我反思</a:t>
-            </a:r>
-            <a:endParaRPr sz="2000" dirty="0">
-              <a:solidFill>
-                <a:srgbClr val="1F2D22"/>
-              </a:solidFill>
-              <a:latin typeface="ui-monospace"/>
-            </a:endParaRPr>
-          </a:p>
-          <a:p>
-            <a:pPr algn="l">
-              <a:defRPr sz="1350" b="0">
-                <a:solidFill>
-                  <a:srgbClr val="1F2D22"/>
-                </a:solidFill>
-              </a:defRPr>
-            </a:pPr>
-            <a:r>
-              <a:rPr sz="2000" dirty="0" err="1">
-                <a:solidFill>
-                  <a:srgbClr val="1F2D22"/>
-                </a:solidFill>
-                <a:latin typeface="ui-monospace"/>
-              </a:rPr>
-              <a:t>答案校正</a:t>
-            </a:r>
-            <a:endParaRPr sz="2000" dirty="0">
-              <a:solidFill>
-                <a:srgbClr val="1F2D22"/>
-              </a:solidFill>
-              <a:latin typeface="ui-monospace"/>
-            </a:endParaRPr>
-          </a:p>
-        </p:txBody>
-      </p:sp>
-      <p:sp>
-        <p:nvSpPr>
-          <p:cNvPr id="10" name="矩形 9"/>
-          <p:cNvSpPr>
-            <a:spLocks noGrp="1"/>
-          </p:cNvSpPr>
-          <p:nvPr/>
-        </p:nvSpPr>
-        <p:spPr>
-          <a:xfrm>
-            <a:off x="2000250" y="3714750"/>
-            <a:ext cx="8191500" cy="1428750"/>
-          </a:xfrm>
-          <a:prstGeom prst="rect">
-            <a:avLst/>
-          </a:prstGeom>
-          <a:solidFill>
-            <a:srgbClr val="FFFFFF"/>
-          </a:solidFill>
-          <a:ln w="9525">
-            <a:solidFill>
-              <a:srgbClr val="C7D0C4"/>
-            </a:solidFill>
-            <a:prstDash val="solid"/>
-          </a:ln>
-        </p:spPr>
-      </p:sp>
-      <p:sp>
-        <p:nvSpPr>
-          <p:cNvPr id="11" name="矩形 10"/>
-          <p:cNvSpPr>
-            <a:spLocks noGrp="1"/>
-          </p:cNvSpPr>
-          <p:nvPr/>
-        </p:nvSpPr>
-        <p:spPr>
-          <a:xfrm>
-            <a:off x="2228850" y="3886200"/>
-            <a:ext cx="7734300" cy="323850"/>
-          </a:xfrm>
-          <a:prstGeom prst="rect">
-            <a:avLst/>
-          </a:prstGeom>
-          <a:solidFill>
-            <a:srgbClr val="000000">
-              <a:alpha val="0"/>
-            </a:srgbClr>
-          </a:solidFill>
-          <a:ln w="0">
-            <a:solidFill>
-              <a:srgbClr val="000000">
-                <a:alpha val="0"/>
-              </a:srgbClr>
-            </a:solidFill>
-            <a:prstDash val="solid"/>
-          </a:ln>
-        </p:spPr>
-        <p:txBody>
-          <a:bodyPr anchor="ctr"/>
-          <a:lstStyle/>
-          <a:p>
-            <a:pPr>
-              <a:defRPr sz="1650" b="1">
-                <a:solidFill>
-                  <a:srgbClr val="2D4A33"/>
-                </a:solidFill>
-              </a:defRPr>
-            </a:pPr>
-            <a:r>
-              <a:rPr sz="3200" b="1" dirty="0" err="1">
-                <a:solidFill>
-                  <a:srgbClr val="2D4A33"/>
-                </a:solidFill>
-              </a:rPr>
-              <a:t>结果</a:t>
-            </a:r>
-            <a:endParaRPr sz="3200" b="1" dirty="0">
-              <a:solidFill>
-                <a:srgbClr val="2D4A33"/>
-              </a:solidFill>
-            </a:endParaRPr>
-          </a:p>
-        </p:txBody>
-      </p:sp>
-      <p:sp>
-        <p:nvSpPr>
-          <p:cNvPr id="12" name="矩形 11"/>
-          <p:cNvSpPr>
-            <a:spLocks noGrp="1"/>
-          </p:cNvSpPr>
-          <p:nvPr/>
-        </p:nvSpPr>
-        <p:spPr>
-          <a:xfrm>
-            <a:off x="2228850" y="4324350"/>
-            <a:ext cx="7734300" cy="666750"/>
-          </a:xfrm>
-          <a:prstGeom prst="rect">
-            <a:avLst/>
-          </a:prstGeom>
-          <a:solidFill>
-            <a:srgbClr val="000000">
-              <a:alpha val="0"/>
-            </a:srgbClr>
-          </a:solidFill>
-          <a:ln w="0">
-            <a:solidFill>
-              <a:srgbClr val="000000">
-                <a:alpha val="0"/>
-              </a:srgbClr>
-            </a:solidFill>
-            <a:prstDash val="solid"/>
-          </a:ln>
-        </p:spPr>
-        <p:txBody>
-          <a:bodyPr anchor="ctr"/>
-          <a:lstStyle/>
-          <a:p>
-            <a:pPr algn="l">
-              <a:defRPr sz="1350" b="0">
-                <a:solidFill>
-                  <a:srgbClr val="1F2D22"/>
-                </a:solidFill>
-              </a:defRPr>
-            </a:pPr>
-            <a:r>
-              <a:rPr lang="zh-CN" altLang="en-US" sz="2000" dirty="0">
-                <a:solidFill>
-                  <a:srgbClr val="1F2D22"/>
-                </a:solidFill>
-                <a:latin typeface="ui-monospace"/>
-              </a:rPr>
-              <a:t>提高结果准确性</a:t>
-            </a:r>
-            <a:r>
-              <a:rPr sz="2000" dirty="0">
-                <a:solidFill>
-                  <a:srgbClr val="1F2D22"/>
-                </a:solidFill>
-                <a:latin typeface="ui-monospace"/>
-              </a:rPr>
-              <a:t>。</a:t>
-            </a:r>
+          <a:noFill/>
+        </p:spPr>
+        <p:txBody>
+          <a:bodyPr wrap="square" rtlCol="0">
+            <a:spAutoFit/>
+          </a:bodyPr>
+          <a:lstStyle/>
+          <a:p>
+            <a:r>
+              <a:rPr lang="zh-CN" altLang="zh-CN" dirty="0"/>
+              <a:t>该前端系统基于 Vue 3 和 Tailwind CSS 开发，实现了一个课程技术问答搜索平台。用户可以输入关键词进行检索，并选择 Match、AND、OR、NOT 等不同搜索模式，同时支持基于答案质量分的自定义排序功能。前端通过 Fetch API 向后端搜索接口发送请求，并将返回的搜索结果动态展示在页面上。结果页面不仅显示问题内容和最佳答案，还提供回答质量评分、搜索耗时统计以及全部回答的展开查看功能。整体界面简洁美观，交互流畅，实现了课程问答数据的高效检索与展示。</a:t>
+            </a:r>
+            <a:endParaRPr lang="zh-CN" altLang="en-US" dirty="0"/>
           </a:p>
         </p:txBody>
       </p:sp>

--- a/report/搜索引擎总结.pptx
+++ b/report/搜索引擎总结.pptx
@@ -5,26 +5,26 @@
     <p:sldMasterId id="2147483648" r:id="rId1"/>
   </p:sldMasterIdLst>
   <p:notesMasterIdLst>
-    <p:notesMasterId r:id="rId19"/>
+    <p:notesMasterId r:id="rId4"/>
   </p:notesMasterIdLst>
   <p:sldIdLst>
-    <p:sldId id="256" r:id="rId2"/>
-    <p:sldId id="273" r:id="rId3"/>
-    <p:sldId id="258" r:id="rId4"/>
-    <p:sldId id="260" r:id="rId5"/>
-    <p:sldId id="262" r:id="rId6"/>
-    <p:sldId id="263" r:id="rId7"/>
-    <p:sldId id="274" r:id="rId8"/>
-    <p:sldId id="276" r:id="rId9"/>
-    <p:sldId id="270" r:id="rId10"/>
-    <p:sldId id="259" r:id="rId11"/>
-    <p:sldId id="271" r:id="rId12"/>
-    <p:sldId id="264" r:id="rId13"/>
-    <p:sldId id="272" r:id="rId14"/>
-    <p:sldId id="261" r:id="rId15"/>
-    <p:sldId id="277" r:id="rId16"/>
-    <p:sldId id="278" r:id="rId17"/>
-    <p:sldId id="268" r:id="rId18"/>
+    <p:sldId id="256" r:id="rId3"/>
+    <p:sldId id="273" r:id="rId5"/>
+    <p:sldId id="258" r:id="rId6"/>
+    <p:sldId id="260" r:id="rId7"/>
+    <p:sldId id="262" r:id="rId8"/>
+    <p:sldId id="263" r:id="rId9"/>
+    <p:sldId id="274" r:id="rId10"/>
+    <p:sldId id="276" r:id="rId11"/>
+    <p:sldId id="270" r:id="rId12"/>
+    <p:sldId id="259" r:id="rId13"/>
+    <p:sldId id="271" r:id="rId14"/>
+    <p:sldId id="279" r:id="rId15"/>
+    <p:sldId id="272" r:id="rId16"/>
+    <p:sldId id="261" r:id="rId17"/>
+    <p:sldId id="277" r:id="rId18"/>
+    <p:sldId id="278" r:id="rId19"/>
+    <p:sldId id="268" r:id="rId20"/>
   </p:sldIdLst>
   <p:sldSz cx="12192000" cy="6858000"/>
   <p:notesSz cx="6858000" cy="9144000"/>
@@ -123,11 +123,6 @@
       </a:defRPr>
     </a:lvl9pPr>
   </p:defaultTextStyle>
-  <p:extLst>
-    <p:ext uri="{EFAFB233-063F-42B5-8137-9DF3F51BA10A}">
-      <p15:sldGuideLst xmlns:p15="http://schemas.microsoft.com/office/powerpoint/2012/main"/>
-    </p:ext>
-  </p:extLst>
 </p:presentation>
 </file>
 
@@ -171,9 +166,7 @@
         <p:txBody>
           <a:bodyPr/>
           <a:lstStyle/>
-          <a:p>
-            <a:endParaRPr/>
-          </a:p>
+          <a:p/>
         </p:txBody>
       </p:sp>
       <p:sp>
@@ -194,9 +187,7 @@
         <p:txBody>
           <a:bodyPr/>
           <a:lstStyle/>
-          <a:p>
-            <a:endParaRPr/>
-          </a:p>
+          <a:p/>
         </p:txBody>
       </p:sp>
       <p:sp>
@@ -217,9 +208,7 @@
         <p:txBody>
           <a:bodyPr/>
           <a:lstStyle/>
-          <a:p>
-            <a:endParaRPr/>
-          </a:p>
+          <a:p/>
         </p:txBody>
       </p:sp>
       <p:sp>
@@ -240,9 +229,7 @@
         <p:txBody>
           <a:bodyPr/>
           <a:lstStyle/>
-          <a:p>
-            <a:endParaRPr/>
-          </a:p>
+          <a:p/>
         </p:txBody>
       </p:sp>
       <p:sp>
@@ -263,9 +250,7 @@
         <p:txBody>
           <a:bodyPr/>
           <a:lstStyle/>
-          <a:p>
-            <a:endParaRPr/>
-          </a:p>
+          <a:p/>
         </p:txBody>
       </p:sp>
       <p:sp>
@@ -286,9 +271,7 @@
         <p:txBody>
           <a:bodyPr/>
           <a:lstStyle/>
-          <a:p>
-            <a:endParaRPr/>
-          </a:p>
+          <a:p/>
         </p:txBody>
       </p:sp>
     </p:spTree>
@@ -345,9 +328,7 @@
         <p:txBody>
           <a:bodyPr/>
           <a:lstStyle/>
-          <a:p>
-            <a:endParaRPr/>
-          </a:p>
+          <a:p/>
         </p:txBody>
       </p:sp>
       <p:sp>
@@ -364,9 +345,7 @@
         <p:txBody>
           <a:bodyPr/>
           <a:lstStyle/>
-          <a:p>
-            <a:endParaRPr/>
-          </a:p>
+          <a:p/>
         </p:txBody>
       </p:sp>
     </p:spTree>
@@ -420,9 +399,7 @@
         <p:txBody>
           <a:bodyPr/>
           <a:lstStyle/>
-          <a:p>
-            <a:endParaRPr/>
-          </a:p>
+          <a:p/>
         </p:txBody>
       </p:sp>
       <p:sp>
@@ -439,9 +416,7 @@
         <p:txBody>
           <a:bodyPr/>
           <a:lstStyle/>
-          <a:p>
-            <a:endParaRPr/>
-          </a:p>
+          <a:p/>
         </p:txBody>
       </p:sp>
     </p:spTree>
@@ -495,9 +470,7 @@
         <p:txBody>
           <a:bodyPr/>
           <a:lstStyle/>
-          <a:p>
-            <a:endParaRPr/>
-          </a:p>
+          <a:p/>
         </p:txBody>
       </p:sp>
       <p:sp>
@@ -599,9 +572,7 @@
         <p:txBody>
           <a:bodyPr/>
           <a:lstStyle/>
-          <a:p>
-            <a:endParaRPr/>
-          </a:p>
+          <a:p/>
         </p:txBody>
       </p:sp>
       <p:sp>
@@ -618,9 +589,7 @@
         <p:txBody>
           <a:bodyPr/>
           <a:lstStyle/>
-          <a:p>
-            <a:endParaRPr/>
-          </a:p>
+          <a:p/>
         </p:txBody>
       </p:sp>
     </p:spTree>
@@ -674,9 +643,7 @@
         <p:txBody>
           <a:bodyPr/>
           <a:lstStyle/>
-          <a:p>
-            <a:endParaRPr/>
-          </a:p>
+          <a:p/>
         </p:txBody>
       </p:sp>
       <p:sp>
@@ -778,9 +745,7 @@
         <p:txBody>
           <a:bodyPr/>
           <a:lstStyle/>
-          <a:p>
-            <a:endParaRPr/>
-          </a:p>
+          <a:p/>
         </p:txBody>
       </p:sp>
       <p:sp>
@@ -797,9 +762,7 @@
         <p:txBody>
           <a:bodyPr/>
           <a:lstStyle/>
-          <a:p>
-            <a:endParaRPr/>
-          </a:p>
+          <a:p/>
         </p:txBody>
       </p:sp>
     </p:spTree>
@@ -815,13 +778,7 @@
   <p:cSld>
     <p:spTree>
       <p:nvGrpSpPr>
-        <p:cNvPr id="1" name="">
-          <a:extLst>
-            <a:ext uri="{FF2B5EF4-FFF2-40B4-BE49-F238E27FC236}">
-              <a16:creationId xmlns:a16="http://schemas.microsoft.com/office/drawing/2014/main" id="{427FE98F-99FE-6221-8B45-DB141A8C755F}"/>
-            </a:ext>
-          </a:extLst>
-        </p:cNvPr>
+        <p:cNvPr id="1" name=""/>
         <p:cNvGrpSpPr/>
         <p:nvPr/>
       </p:nvGrpSpPr>
@@ -835,13 +792,7 @@
       </p:grpSpPr>
       <p:sp>
         <p:nvSpPr>
-          <p:cNvPr id="2" name="Slide Image Placeholder 1">
-            <a:extLst>
-              <a:ext uri="{FF2B5EF4-FFF2-40B4-BE49-F238E27FC236}">
-                <a16:creationId xmlns:a16="http://schemas.microsoft.com/office/drawing/2014/main" id="{BCFE8849-4DAA-F9AF-FEAD-933DEC3A3A72}"/>
-              </a:ext>
-            </a:extLst>
-          </p:cNvPr>
+          <p:cNvPr id="2" name="Slide Image Placeholder 1"/>
           <p:cNvSpPr>
             <a:spLocks noGrp="1" noRot="1" noChangeAspect="1"/>
           </p:cNvSpPr>
@@ -853,13 +804,7 @@
       </p:sp>
       <p:sp>
         <p:nvSpPr>
-          <p:cNvPr id="3" name="Notes Placeholder 2">
-            <a:extLst>
-              <a:ext uri="{FF2B5EF4-FFF2-40B4-BE49-F238E27FC236}">
-                <a16:creationId xmlns:a16="http://schemas.microsoft.com/office/drawing/2014/main" id="{B4D6E39A-5DA3-1957-2F38-C939CC70DDB0}"/>
-              </a:ext>
-            </a:extLst>
-          </p:cNvPr>
+          <p:cNvPr id="3" name="Notes Placeholder 2"/>
           <p:cNvSpPr>
             <a:spLocks noGrp="1"/>
           </p:cNvSpPr>
@@ -871,20 +816,12 @@
         <p:txBody>
           <a:bodyPr/>
           <a:lstStyle/>
-          <a:p>
-            <a:endParaRPr/>
-          </a:p>
-        </p:txBody>
-      </p:sp>
-      <p:sp>
-        <p:nvSpPr>
-          <p:cNvPr id="4" name="Slide Number Placeholder 3">
-            <a:extLst>
-              <a:ext uri="{FF2B5EF4-FFF2-40B4-BE49-F238E27FC236}">
-                <a16:creationId xmlns:a16="http://schemas.microsoft.com/office/drawing/2014/main" id="{8CDEB725-EA38-3C98-6C9C-744406FFBDDF}"/>
-              </a:ext>
-            </a:extLst>
-          </p:cNvPr>
+          <a:p/>
+        </p:txBody>
+      </p:sp>
+      <p:sp>
+        <p:nvSpPr>
+          <p:cNvPr id="4" name="Slide Number Placeholder 3"/>
           <p:cNvSpPr>
             <a:spLocks noGrp="1"/>
           </p:cNvSpPr>
@@ -911,7 +848,6 @@
               <a:buSzTx/>
               <a:buFontTx/>
               <a:buNone/>
-              <a:tabLst/>
               <a:defRPr/>
             </a:pPr>
             <a:endParaRPr kumimoji="0" sz="1800" b="0" i="0" u="none" strike="noStrike" kern="1200" cap="none" spc="0" normalizeH="0" baseline="0" noProof="0">
@@ -932,11 +868,6 @@
         </p:txBody>
       </p:sp>
     </p:spTree>
-    <p:extLst>
-      <p:ext uri="{BB962C8B-B14F-4D97-AF65-F5344CB8AC3E}">
-        <p14:creationId xmlns:p14="http://schemas.microsoft.com/office/powerpoint/2010/main" val="3534818587"/>
-      </p:ext>
-    </p:extLst>
   </p:cSld>
   <p:clrMapOvr>
     <a:masterClrMapping/>
@@ -949,13 +880,7 @@
   <p:cSld>
     <p:spTree>
       <p:nvGrpSpPr>
-        <p:cNvPr id="1" name="">
-          <a:extLst>
-            <a:ext uri="{FF2B5EF4-FFF2-40B4-BE49-F238E27FC236}">
-              <a16:creationId xmlns:a16="http://schemas.microsoft.com/office/drawing/2014/main" id="{34B84345-985B-12BC-D6D8-D3D43234F6E1}"/>
-            </a:ext>
-          </a:extLst>
-        </p:cNvPr>
+        <p:cNvPr id="1" name=""/>
         <p:cNvGrpSpPr/>
         <p:nvPr/>
       </p:nvGrpSpPr>
@@ -969,13 +894,7 @@
       </p:grpSpPr>
       <p:sp>
         <p:nvSpPr>
-          <p:cNvPr id="2" name="Slide Image Placeholder 1">
-            <a:extLst>
-              <a:ext uri="{FF2B5EF4-FFF2-40B4-BE49-F238E27FC236}">
-                <a16:creationId xmlns:a16="http://schemas.microsoft.com/office/drawing/2014/main" id="{1B61CF1B-1357-7310-F075-11C3BB73E802}"/>
-              </a:ext>
-            </a:extLst>
-          </p:cNvPr>
+          <p:cNvPr id="2" name="Slide Image Placeholder 1"/>
           <p:cNvSpPr>
             <a:spLocks noGrp="1" noRot="1" noChangeAspect="1"/>
           </p:cNvSpPr>
@@ -987,13 +906,7 @@
       </p:sp>
       <p:sp>
         <p:nvSpPr>
-          <p:cNvPr id="3" name="Notes Placeholder 2">
-            <a:extLst>
-              <a:ext uri="{FF2B5EF4-FFF2-40B4-BE49-F238E27FC236}">
-                <a16:creationId xmlns:a16="http://schemas.microsoft.com/office/drawing/2014/main" id="{2956C420-5562-C84E-2588-F4B99A397757}"/>
-              </a:ext>
-            </a:extLst>
-          </p:cNvPr>
+          <p:cNvPr id="3" name="Notes Placeholder 2"/>
           <p:cNvSpPr>
             <a:spLocks noGrp="1"/>
           </p:cNvSpPr>
@@ -1005,20 +918,12 @@
         <p:txBody>
           <a:bodyPr/>
           <a:lstStyle/>
-          <a:p>
-            <a:endParaRPr/>
-          </a:p>
-        </p:txBody>
-      </p:sp>
-      <p:sp>
-        <p:nvSpPr>
-          <p:cNvPr id="4" name="Slide Number Placeholder 3">
-            <a:extLst>
-              <a:ext uri="{FF2B5EF4-FFF2-40B4-BE49-F238E27FC236}">
-                <a16:creationId xmlns:a16="http://schemas.microsoft.com/office/drawing/2014/main" id="{1C05C454-A65E-F302-19ED-1F704262633F}"/>
-              </a:ext>
-            </a:extLst>
-          </p:cNvPr>
+          <a:p/>
+        </p:txBody>
+      </p:sp>
+      <p:sp>
+        <p:nvSpPr>
+          <p:cNvPr id="4" name="Slide Number Placeholder 3"/>
           <p:cNvSpPr>
             <a:spLocks noGrp="1"/>
           </p:cNvSpPr>
@@ -1030,17 +935,10 @@
         <p:txBody>
           <a:bodyPr/>
           <a:lstStyle/>
-          <a:p>
-            <a:endParaRPr/>
-          </a:p>
+          <a:p/>
         </p:txBody>
       </p:sp>
     </p:spTree>
-    <p:extLst>
-      <p:ext uri="{BB962C8B-B14F-4D97-AF65-F5344CB8AC3E}">
-        <p14:creationId xmlns:p14="http://schemas.microsoft.com/office/powerpoint/2010/main" val="129320305"/>
-      </p:ext>
-    </p:extLst>
   </p:cSld>
   <p:clrMapOvr>
     <a:masterClrMapping/>
@@ -1091,9 +989,7 @@
         <p:txBody>
           <a:bodyPr/>
           <a:lstStyle/>
-          <a:p>
-            <a:endParaRPr/>
-          </a:p>
+          <a:p/>
         </p:txBody>
       </p:sp>
       <p:sp>
@@ -1110,9 +1006,7 @@
         <p:txBody>
           <a:bodyPr/>
           <a:lstStyle/>
-          <a:p>
-            <a:endParaRPr/>
-          </a:p>
+          <a:p/>
         </p:txBody>
       </p:sp>
     </p:spTree>
@@ -1166,9 +1060,7 @@
         <p:txBody>
           <a:bodyPr/>
           <a:lstStyle/>
-          <a:p>
-            <a:endParaRPr/>
-          </a:p>
+          <a:p/>
         </p:txBody>
       </p:sp>
       <p:sp>
@@ -1270,9 +1162,7 @@
         <p:txBody>
           <a:bodyPr/>
           <a:lstStyle/>
-          <a:p>
-            <a:endParaRPr/>
-          </a:p>
+          <a:p/>
         </p:txBody>
       </p:sp>
       <p:sp>
@@ -1289,9 +1179,7 @@
         <p:txBody>
           <a:bodyPr/>
           <a:lstStyle/>
-          <a:p>
-            <a:endParaRPr/>
-          </a:p>
+          <a:p/>
         </p:txBody>
       </p:sp>
     </p:spTree>
@@ -1345,9 +1233,7 @@
         <p:txBody>
           <a:bodyPr/>
           <a:lstStyle/>
-          <a:p>
-            <a:endParaRPr/>
-          </a:p>
+          <a:p/>
         </p:txBody>
       </p:sp>
       <p:sp>
@@ -1364,9 +1250,7 @@
         <p:txBody>
           <a:bodyPr/>
           <a:lstStyle/>
-          <a:p>
-            <a:endParaRPr/>
-          </a:p>
+          <a:p/>
         </p:txBody>
       </p:sp>
     </p:spTree>
@@ -1420,9 +1304,7 @@
         <p:txBody>
           <a:bodyPr/>
           <a:lstStyle/>
-          <a:p>
-            <a:endParaRPr/>
-          </a:p>
+          <a:p/>
         </p:txBody>
       </p:sp>
       <p:sp>
@@ -1439,9 +1321,7 @@
         <p:txBody>
           <a:bodyPr/>
           <a:lstStyle/>
-          <a:p>
-            <a:endParaRPr/>
-          </a:p>
+          <a:p/>
         </p:txBody>
       </p:sp>
     </p:spTree>
@@ -1495,9 +1375,7 @@
         <p:txBody>
           <a:bodyPr/>
           <a:lstStyle/>
-          <a:p>
-            <a:endParaRPr/>
-          </a:p>
+          <a:p/>
         </p:txBody>
       </p:sp>
       <p:sp>
@@ -1514,9 +1392,7 @@
         <p:txBody>
           <a:bodyPr/>
           <a:lstStyle/>
-          <a:p>
-            <a:endParaRPr/>
-          </a:p>
+          <a:p/>
         </p:txBody>
       </p:sp>
     </p:spTree>
@@ -1570,9 +1446,7 @@
         <p:txBody>
           <a:bodyPr/>
           <a:lstStyle/>
-          <a:p>
-            <a:endParaRPr/>
-          </a:p>
+          <a:p/>
         </p:txBody>
       </p:sp>
       <p:sp>
@@ -1589,9 +1463,7 @@
         <p:txBody>
           <a:bodyPr/>
           <a:lstStyle/>
-          <a:p>
-            <a:endParaRPr/>
-          </a:p>
+          <a:p/>
         </p:txBody>
       </p:sp>
     </p:spTree>
@@ -1645,9 +1517,7 @@
         <p:txBody>
           <a:bodyPr/>
           <a:lstStyle/>
-          <a:p>
-            <a:endParaRPr/>
-          </a:p>
+          <a:p/>
         </p:txBody>
       </p:sp>
       <p:sp>
@@ -1664,9 +1534,7 @@
         <p:txBody>
           <a:bodyPr/>
           <a:lstStyle/>
-          <a:p>
-            <a:endParaRPr/>
-          </a:p>
+          <a:p/>
         </p:txBody>
       </p:sp>
     </p:spTree>
@@ -1720,9 +1588,7 @@
         <p:txBody>
           <a:bodyPr/>
           <a:lstStyle/>
-          <a:p>
-            <a:endParaRPr/>
-          </a:p>
+          <a:p/>
         </p:txBody>
       </p:sp>
       <p:sp>
@@ -1909,9 +1775,8 @@
           <a:p>
             <a:fld id="{A653A8F1-9EDF-49EF-A14D-E495AD864F8A}" type="datetimeFigureOut">
               <a:rPr lang="zh-CN" altLang="en-US"/>
-              <a:t>2026/6/16</a:t>
             </a:fld>
-            <a:endParaRPr/>
+            <a:endParaRPr lang="zh-CN" altLang="en-US"/>
           </a:p>
         </p:txBody>
       </p:sp>
@@ -1929,9 +1794,7 @@
         <p:txBody>
           <a:bodyPr/>
           <a:lstStyle/>
-          <a:p>
-            <a:endParaRPr/>
-          </a:p>
+          <a:p/>
         </p:txBody>
       </p:sp>
       <p:sp>
@@ -1951,7 +1814,6 @@
           <a:p>
             <a:fld id="{43A13857-8FE2-426A-A37B-64DF65062EF2}" type="slidenum">
               <a:rPr/>
-              <a:t>‹#›</a:t>
             </a:fld>
             <a:endParaRPr/>
           </a:p>
@@ -2076,9 +1938,8 @@
           <a:p>
             <a:fld id="{A653A8F1-9EDF-49EF-A14D-E495AD864F8A}" type="datetimeFigureOut">
               <a:rPr lang="zh-CN" altLang="en-US"/>
-              <a:t>2026/6/16</a:t>
             </a:fld>
-            <a:endParaRPr/>
+            <a:endParaRPr lang="zh-CN" altLang="en-US"/>
           </a:p>
         </p:txBody>
       </p:sp>
@@ -2096,9 +1957,7 @@
         <p:txBody>
           <a:bodyPr/>
           <a:lstStyle/>
-          <a:p>
-            <a:endParaRPr/>
-          </a:p>
+          <a:p/>
         </p:txBody>
       </p:sp>
       <p:sp>
@@ -2118,7 +1977,6 @@
           <a:p>
             <a:fld id="{43A13857-8FE2-426A-A37B-64DF65062EF2}" type="slidenum">
               <a:rPr/>
-              <a:t>‹#›</a:t>
             </a:fld>
             <a:endParaRPr/>
           </a:p>
@@ -2253,9 +2111,8 @@
           <a:p>
             <a:fld id="{A653A8F1-9EDF-49EF-A14D-E495AD864F8A}" type="datetimeFigureOut">
               <a:rPr lang="zh-CN" altLang="en-US"/>
-              <a:t>2026/6/16</a:t>
             </a:fld>
-            <a:endParaRPr/>
+            <a:endParaRPr lang="zh-CN" altLang="en-US"/>
           </a:p>
         </p:txBody>
       </p:sp>
@@ -2273,9 +2130,7 @@
         <p:txBody>
           <a:bodyPr/>
           <a:lstStyle/>
-          <a:p>
-            <a:endParaRPr/>
-          </a:p>
+          <a:p/>
         </p:txBody>
       </p:sp>
       <p:sp>
@@ -2295,7 +2150,6 @@
           <a:p>
             <a:fld id="{43A13857-8FE2-426A-A37B-64DF65062EF2}" type="slidenum">
               <a:rPr/>
-              <a:t>‹#›</a:t>
             </a:fld>
             <a:endParaRPr/>
           </a:p>
@@ -2420,9 +2274,8 @@
           <a:p>
             <a:fld id="{A653A8F1-9EDF-49EF-A14D-E495AD864F8A}" type="datetimeFigureOut">
               <a:rPr lang="zh-CN" altLang="en-US"/>
-              <a:t>2026/6/16</a:t>
             </a:fld>
-            <a:endParaRPr/>
+            <a:endParaRPr lang="zh-CN" altLang="en-US"/>
           </a:p>
         </p:txBody>
       </p:sp>
@@ -2440,9 +2293,7 @@
         <p:txBody>
           <a:bodyPr/>
           <a:lstStyle/>
-          <a:p>
-            <a:endParaRPr/>
-          </a:p>
+          <a:p/>
         </p:txBody>
       </p:sp>
       <p:sp>
@@ -2462,7 +2313,6 @@
           <a:p>
             <a:fld id="{43A13857-8FE2-426A-A37B-64DF65062EF2}" type="slidenum">
               <a:rPr/>
-              <a:t>‹#›</a:t>
             </a:fld>
             <a:endParaRPr/>
           </a:p>
@@ -2661,9 +2511,8 @@
           <a:p>
             <a:fld id="{A653A8F1-9EDF-49EF-A14D-E495AD864F8A}" type="datetimeFigureOut">
               <a:rPr lang="zh-CN" altLang="en-US"/>
-              <a:t>2026/6/16</a:t>
             </a:fld>
-            <a:endParaRPr/>
+            <a:endParaRPr lang="zh-CN" altLang="en-US"/>
           </a:p>
         </p:txBody>
       </p:sp>
@@ -2681,9 +2530,7 @@
         <p:txBody>
           <a:bodyPr/>
           <a:lstStyle/>
-          <a:p>
-            <a:endParaRPr/>
-          </a:p>
+          <a:p/>
         </p:txBody>
       </p:sp>
       <p:sp>
@@ -2703,7 +2550,6 @@
           <a:p>
             <a:fld id="{43A13857-8FE2-426A-A37B-64DF65062EF2}" type="slidenum">
               <a:rPr/>
-              <a:t>‹#›</a:t>
             </a:fld>
             <a:endParaRPr/>
           </a:p>
@@ -2894,9 +2740,8 @@
           <a:p>
             <a:fld id="{A653A8F1-9EDF-49EF-A14D-E495AD864F8A}" type="datetimeFigureOut">
               <a:rPr lang="zh-CN" altLang="en-US"/>
-              <a:t>2026/6/16</a:t>
             </a:fld>
-            <a:endParaRPr/>
+            <a:endParaRPr lang="zh-CN" altLang="en-US"/>
           </a:p>
         </p:txBody>
       </p:sp>
@@ -2914,9 +2759,7 @@
         <p:txBody>
           <a:bodyPr/>
           <a:lstStyle/>
-          <a:p>
-            <a:endParaRPr/>
-          </a:p>
+          <a:p/>
         </p:txBody>
       </p:sp>
       <p:sp>
@@ -2936,7 +2779,6 @@
           <a:p>
             <a:fld id="{43A13857-8FE2-426A-A37B-64DF65062EF2}" type="slidenum">
               <a:rPr/>
-              <a:t>‹#›</a:t>
             </a:fld>
             <a:endParaRPr/>
           </a:p>
@@ -3264,9 +3106,8 @@
           <a:p>
             <a:fld id="{A653A8F1-9EDF-49EF-A14D-E495AD864F8A}" type="datetimeFigureOut">
               <a:rPr lang="zh-CN" altLang="en-US"/>
-              <a:t>2026/6/16</a:t>
             </a:fld>
-            <a:endParaRPr/>
+            <a:endParaRPr lang="zh-CN" altLang="en-US"/>
           </a:p>
         </p:txBody>
       </p:sp>
@@ -3284,9 +3125,7 @@
         <p:txBody>
           <a:bodyPr/>
           <a:lstStyle/>
-          <a:p>
-            <a:endParaRPr/>
-          </a:p>
+          <a:p/>
         </p:txBody>
       </p:sp>
       <p:sp>
@@ -3306,7 +3145,6 @@
           <a:p>
             <a:fld id="{43A13857-8FE2-426A-A37B-64DF65062EF2}" type="slidenum">
               <a:rPr/>
-              <a:t>‹#›</a:t>
             </a:fld>
             <a:endParaRPr/>
           </a:p>
@@ -3375,9 +3213,8 @@
           <a:p>
             <a:fld id="{A653A8F1-9EDF-49EF-A14D-E495AD864F8A}" type="datetimeFigureOut">
               <a:rPr lang="zh-CN" altLang="en-US"/>
-              <a:t>2026/6/16</a:t>
             </a:fld>
-            <a:endParaRPr/>
+            <a:endParaRPr lang="zh-CN" altLang="en-US"/>
           </a:p>
         </p:txBody>
       </p:sp>
@@ -3395,9 +3232,7 @@
         <p:txBody>
           <a:bodyPr/>
           <a:lstStyle/>
-          <a:p>
-            <a:endParaRPr/>
-          </a:p>
+          <a:p/>
         </p:txBody>
       </p:sp>
       <p:sp>
@@ -3417,7 +3252,6 @@
           <a:p>
             <a:fld id="{43A13857-8FE2-426A-A37B-64DF65062EF2}" type="slidenum">
               <a:rPr/>
-              <a:t>‹#›</a:t>
             </a:fld>
             <a:endParaRPr/>
           </a:p>
@@ -3465,9 +3299,8 @@
           <a:p>
             <a:fld id="{A653A8F1-9EDF-49EF-A14D-E495AD864F8A}" type="datetimeFigureOut">
               <a:rPr lang="zh-CN" altLang="en-US"/>
-              <a:t>2026/6/16</a:t>
             </a:fld>
-            <a:endParaRPr/>
+            <a:endParaRPr lang="zh-CN" altLang="en-US"/>
           </a:p>
         </p:txBody>
       </p:sp>
@@ -3485,9 +3318,7 @@
         <p:txBody>
           <a:bodyPr/>
           <a:lstStyle/>
-          <a:p>
-            <a:endParaRPr/>
-          </a:p>
+          <a:p/>
         </p:txBody>
       </p:sp>
       <p:sp>
@@ -3507,7 +3338,6 @@
           <a:p>
             <a:fld id="{43A13857-8FE2-426A-A37B-64DF65062EF2}" type="slidenum">
               <a:rPr/>
-              <a:t>‹#›</a:t>
             </a:fld>
             <a:endParaRPr/>
           </a:p>
@@ -3750,9 +3580,8 @@
           <a:p>
             <a:fld id="{A653A8F1-9EDF-49EF-A14D-E495AD864F8A}" type="datetimeFigureOut">
               <a:rPr lang="zh-CN" altLang="en-US"/>
-              <a:t>2026/6/16</a:t>
             </a:fld>
-            <a:endParaRPr/>
+            <a:endParaRPr lang="zh-CN" altLang="en-US"/>
           </a:p>
         </p:txBody>
       </p:sp>
@@ -3770,9 +3599,7 @@
         <p:txBody>
           <a:bodyPr/>
           <a:lstStyle/>
-          <a:p>
-            <a:endParaRPr/>
-          </a:p>
+          <a:p/>
         </p:txBody>
       </p:sp>
       <p:sp>
@@ -3792,7 +3619,6 @@
           <a:p>
             <a:fld id="{43A13857-8FE2-426A-A37B-64DF65062EF2}" type="slidenum">
               <a:rPr/>
-              <a:t>‹#›</a:t>
             </a:fld>
             <a:endParaRPr/>
           </a:p>
@@ -3910,9 +3736,7 @@
               <a:defRPr sz="2000"/>
             </a:lvl9pPr>
           </a:lstStyle>
-          <a:p>
-            <a:endParaRPr/>
-          </a:p>
+          <a:p/>
         </p:txBody>
       </p:sp>
       <p:sp>
@@ -3998,9 +3822,8 @@
           <a:p>
             <a:fld id="{A653A8F1-9EDF-49EF-A14D-E495AD864F8A}" type="datetimeFigureOut">
               <a:rPr lang="zh-CN" altLang="en-US"/>
-              <a:t>2026/6/16</a:t>
             </a:fld>
-            <a:endParaRPr/>
+            <a:endParaRPr lang="zh-CN" altLang="en-US"/>
           </a:p>
         </p:txBody>
       </p:sp>
@@ -4018,9 +3841,7 @@
         <p:txBody>
           <a:bodyPr/>
           <a:lstStyle/>
-          <a:p>
-            <a:endParaRPr/>
-          </a:p>
+          <a:p/>
         </p:txBody>
       </p:sp>
       <p:sp>
@@ -4040,7 +3861,6 @@
           <a:p>
             <a:fld id="{43A13857-8FE2-426A-A37B-64DF65062EF2}" type="slidenum">
               <a:rPr/>
-              <a:t>‹#›</a:t>
             </a:fld>
             <a:endParaRPr/>
           </a:p>
@@ -4209,9 +4029,8 @@
           <a:p>
             <a:fld id="{A653A8F1-9EDF-49EF-A14D-E495AD864F8A}" type="datetimeFigureOut">
               <a:rPr lang="zh-CN" altLang="en-US"/>
-              <a:t>2026/6/16</a:t>
             </a:fld>
-            <a:endParaRPr/>
+            <a:endParaRPr lang="zh-CN" altLang="en-US"/>
           </a:p>
         </p:txBody>
       </p:sp>
@@ -4248,9 +4067,7 @@
               </a:defRPr>
             </a:lvl1pPr>
           </a:lstStyle>
-          <a:p>
-            <a:endParaRPr/>
-          </a:p>
+          <a:p/>
         </p:txBody>
       </p:sp>
       <p:sp>
@@ -4289,7 +4106,6 @@
           <a:p>
             <a:fld id="{43A13857-8FE2-426A-A37B-64DF65062EF2}" type="slidenum">
               <a:rPr/>
-              <a:t>‹#›</a:t>
             </a:fld>
             <a:endParaRPr/>
           </a:p>
@@ -4662,7 +4478,6 @@
             <a:pPr algn="ctr">
               <a:buNone/>
             </a:pPr>
-            <a:endParaRPr/>
           </a:p>
         </p:txBody>
       </p:sp>
@@ -4704,6 +4519,14 @@
               </a:rPr>
               <a:t>搜索引擎总结</a:t>
             </a:r>
+            <a:endParaRPr lang="zh-CN" altLang="en-US" sz="4400" dirty="0">
+              <a:solidFill>
+                <a:schemeClr val="bg1"/>
+              </a:solidFill>
+              <a:latin typeface="字魂17号-萌趣果冻体"/>
+              <a:ea typeface="字魂17号-萌趣果冻体"/>
+              <a:cs typeface="字魂17号-萌趣果冻体"/>
+            </a:endParaRPr>
           </a:p>
         </p:txBody>
       </p:sp>
@@ -4796,7 +4619,6 @@
             <a:pPr algn="ctr">
               <a:buNone/>
             </a:pPr>
-            <a:endParaRPr/>
           </a:p>
         </p:txBody>
       </p:sp>
@@ -4846,7 +4668,6 @@
             <a:pPr algn="ctr">
               <a:buNone/>
             </a:pPr>
-            <a:endParaRPr/>
           </a:p>
         </p:txBody>
       </p:sp>
@@ -4896,7 +4717,6 @@
             <a:pPr algn="ctr">
               <a:buNone/>
             </a:pPr>
-            <a:endParaRPr/>
           </a:p>
         </p:txBody>
       </p:sp>
@@ -4946,7 +4766,6 @@
             <a:pPr algn="ctr">
               <a:buNone/>
             </a:pPr>
-            <a:endParaRPr/>
           </a:p>
         </p:txBody>
       </p:sp>
@@ -4998,7 +4817,6 @@
             <a:pPr algn="ctr">
               <a:buNone/>
             </a:pPr>
-            <a:endParaRPr/>
           </a:p>
         </p:txBody>
       </p:sp>
@@ -5011,7 +4829,7 @@
           <p:nvPr/>
         </p:nvPicPr>
         <p:blipFill>
-          <a:blip r:embed="rId3"/>
+          <a:blip r:embed="rId1"/>
           <a:stretch>
             <a:fillRect/>
           </a:stretch>
@@ -5056,6 +4874,11 @@
               </a:rPr>
               <a:t>小组成员：李嘉轩 刘义群 王秀崧 汤语涵 谢羿衡 唐熙雷 邢泽雷</a:t>
             </a:r>
+            <a:endParaRPr lang="zh-CN" altLang="en-US" dirty="0">
+              <a:solidFill>
+                <a:schemeClr val="bg1"/>
+              </a:solidFill>
+            </a:endParaRPr>
           </a:p>
         </p:txBody>
       </p:sp>
@@ -5237,6 +5060,11 @@
               </a:rPr>
               <a:t>数据集初始化与扩充</a:t>
             </a:r>
+            <a:endParaRPr lang="zh-CN" altLang="en-US" sz="3200" b="1" dirty="0">
+              <a:solidFill>
+                <a:srgbClr val="2D4A33"/>
+              </a:solidFill>
+            </a:endParaRPr>
           </a:p>
         </p:txBody>
       </p:sp>
@@ -5763,14 +5591,6 @@
 <file path=ppt/slides/slide12.xml><?xml version="1.0" encoding="utf-8"?>
 <p:sld xmlns:a="http://schemas.openxmlformats.org/drawingml/2006/main" xmlns:r="http://schemas.openxmlformats.org/officeDocument/2006/relationships" xmlns:p="http://schemas.openxmlformats.org/presentationml/2006/main">
   <p:cSld>
-    <p:bg>
-      <p:bgPr>
-        <a:solidFill>
-          <a:srgbClr val="F7F7F4"/>
-        </a:solidFill>
-        <a:effectLst/>
-      </p:bgPr>
-    </p:bg>
     <p:spTree>
       <p:nvGrpSpPr>
         <p:cNvPr id="1" name=""/>
@@ -5875,12 +5695,16 @@
           <p:cNvSpPr>
             <a:spLocks noGrp="1"/>
           </p:cNvSpPr>
-          <p:nvPr/>
+          <p:nvPr>
+            <p:custDataLst>
+              <p:tags r:id="rId1"/>
+            </p:custDataLst>
+          </p:nvPr>
         </p:nvSpPr>
         <p:spPr>
           <a:xfrm>
             <a:off x="857250" y="1619250"/>
-            <a:ext cx="4762500" cy="1619250"/>
+            <a:ext cx="4762500" cy="4115435"/>
           </a:xfrm>
           <a:prstGeom prst="rect">
             <a:avLst/>
@@ -5902,12 +5726,16 @@
           <p:cNvSpPr>
             <a:spLocks noGrp="1"/>
           </p:cNvSpPr>
-          <p:nvPr/>
+          <p:nvPr>
+            <p:custDataLst>
+              <p:tags r:id="rId2"/>
+            </p:custDataLst>
+          </p:nvPr>
         </p:nvSpPr>
         <p:spPr>
           <a:xfrm>
             <a:off x="1085850" y="1790700"/>
-            <a:ext cx="4305300" cy="323850"/>
+            <a:ext cx="4305300" cy="565150"/>
           </a:xfrm>
           <a:prstGeom prst="rect">
             <a:avLst/>
@@ -5938,13 +5766,26 @@
               </a:defRPr>
             </a:pPr>
             <a:r>
-              <a:rPr sz="1650" b="1">
+              <a:rPr lang="zh-CN" altLang="en-US" sz="2000" b="1">
                 <a:solidFill>
                   <a:srgbClr val="2D4A33"/>
                 </a:solidFill>
               </a:rPr>
-              <a:t>Faiss</a:t>
-            </a:r>
+              <a:t>无监督文本特征工程，公式</a:t>
+            </a:r>
+            <a:r>
+              <a:rPr lang="zh-CN" altLang="en-US" sz="2000" b="1">
+                <a:solidFill>
+                  <a:srgbClr val="2D4A33"/>
+                </a:solidFill>
+              </a:rPr>
+              <a:t>设计</a:t>
+            </a:r>
+            <a:endParaRPr lang="zh-CN" altLang="en-US" sz="2000" b="1">
+              <a:solidFill>
+                <a:srgbClr val="2D4A33"/>
+              </a:solidFill>
+            </a:endParaRPr>
           </a:p>
         </p:txBody>
       </p:sp>
@@ -5954,12 +5795,16 @@
           <p:cNvSpPr>
             <a:spLocks noGrp="1"/>
           </p:cNvSpPr>
-          <p:nvPr/>
+          <p:nvPr>
+            <p:custDataLst>
+              <p:tags r:id="rId3"/>
+            </p:custDataLst>
+          </p:nvPr>
         </p:nvSpPr>
         <p:spPr>
           <a:xfrm>
-            <a:off x="1085850" y="2228850"/>
-            <a:ext cx="4305300" cy="857250"/>
+            <a:off x="1085850" y="2501265"/>
+            <a:ext cx="4305300" cy="2976880"/>
           </a:xfrm>
           <a:prstGeom prst="rect">
             <a:avLst/>
@@ -5990,13 +5835,70 @@
               </a:defRPr>
             </a:pPr>
             <a:r>
-              <a:rPr sz="1350" b="0">
-                <a:solidFill>
-                  <a:srgbClr val="1F2D22"/>
-                </a:solidFill>
-              </a:rPr>
-              <a:t>替换 / 增强向量检索底座</a:t>
-            </a:r>
+              <a:rPr lang="zh-CN" altLang="en-US" sz="1600" b="0">
+                <a:solidFill>
+                  <a:srgbClr val="1F2D22"/>
+                </a:solidFill>
+              </a:rPr>
+              <a:t>四维公式设计：基于文本内在形态，构建涵盖 </a:t>
+            </a:r>
+            <a:r>
+              <a:rPr lang="en-US" altLang="zh-CN" sz="1600" b="0">
+                <a:solidFill>
+                  <a:srgbClr val="1F2D22"/>
+                </a:solidFill>
+              </a:rPr>
+              <a:t>BM25 </a:t>
+            </a:r>
+            <a:r>
+              <a:rPr lang="zh-CN" altLang="en-US" sz="1600" b="0">
+                <a:solidFill>
+                  <a:srgbClr val="1F2D22"/>
+                </a:solidFill>
+              </a:rPr>
+              <a:t>相关性（55%）、回答绝对长度（15%）、词汇信息密度（15%）、逻辑论证深度（15%）的综合加权评分模型。</a:t>
+            </a:r>
+            <a:endParaRPr lang="zh-CN" altLang="en-US" sz="1600" b="0">
+              <a:solidFill>
+                <a:srgbClr val="1F2D22"/>
+              </a:solidFill>
+            </a:endParaRPr>
+          </a:p>
+          <a:p>
+            <a:pPr algn="l">
+              <a:defRPr sz="1350" b="0">
+                <a:solidFill>
+                  <a:srgbClr val="1F2D22"/>
+                </a:solidFill>
+              </a:defRPr>
+            </a:pPr>
+            <a:endParaRPr lang="zh-CN" altLang="en-US" sz="1600" b="0">
+              <a:solidFill>
+                <a:srgbClr val="1F2D22"/>
+              </a:solidFill>
+            </a:endParaRPr>
+          </a:p>
+          <a:p>
+            <a:pPr algn="l">
+              <a:defRPr sz="1350" b="0">
+                <a:solidFill>
+                  <a:srgbClr val="1F2D22"/>
+                </a:solidFill>
+              </a:defRPr>
+            </a:pPr>
+            <a:r>
+              <a:rPr lang="zh-CN" altLang="en-US" sz="1600" b="0">
+                <a:solidFill>
+                  <a:srgbClr val="1F2D22"/>
+                </a:solidFill>
+              </a:rPr>
+              <a:t>轻量级逻辑深度指标：创新性提出“逻辑词命中率”特征。硬编码极轻量通用逻辑词典（因果、转折、举例等），精准捕获技术解答中的推导分析深度，摆脱对庞大专业词库的依赖。</a:t>
+            </a:r>
+            <a:endParaRPr lang="zh-CN" altLang="en-US" sz="1600" b="0">
+              <a:solidFill>
+                <a:srgbClr val="1F2D22"/>
+              </a:solidFill>
+            </a:endParaRPr>
           </a:p>
         </p:txBody>
       </p:sp>
@@ -6006,12 +5908,16 @@
           <p:cNvSpPr>
             <a:spLocks noGrp="1"/>
           </p:cNvSpPr>
-          <p:nvPr/>
+          <p:nvPr>
+            <p:custDataLst>
+              <p:tags r:id="rId4"/>
+            </p:custDataLst>
+          </p:nvPr>
         </p:nvSpPr>
         <p:spPr>
           <a:xfrm>
             <a:off x="6572250" y="1619250"/>
-            <a:ext cx="4762500" cy="1619250"/>
+            <a:ext cx="4762500" cy="4115435"/>
           </a:xfrm>
           <a:prstGeom prst="rect">
             <a:avLst/>
@@ -6033,12 +5939,16 @@
           <p:cNvSpPr>
             <a:spLocks noGrp="1"/>
           </p:cNvSpPr>
-          <p:nvPr/>
+          <p:nvPr>
+            <p:custDataLst>
+              <p:tags r:id="rId5"/>
+            </p:custDataLst>
+          </p:nvPr>
         </p:nvSpPr>
         <p:spPr>
           <a:xfrm>
             <a:off x="6800850" y="1790700"/>
-            <a:ext cx="4305300" cy="323850"/>
+            <a:ext cx="4305300" cy="565150"/>
           </a:xfrm>
           <a:prstGeom prst="rect">
             <a:avLst/>
@@ -6069,13 +5979,26 @@
               </a:defRPr>
             </a:pPr>
             <a:r>
-              <a:rPr sz="1650" b="1">
+              <a:rPr lang="en-US" altLang="zh-CN" sz="2000" b="1">
                 <a:solidFill>
                   <a:srgbClr val="2D4A33"/>
                 </a:solidFill>
               </a:rPr>
-              <a:t>多检索</a:t>
-            </a:r>
+              <a:t>NDCG </a:t>
+            </a:r>
+            <a:r>
+              <a:rPr lang="zh-CN" altLang="en-US" sz="2000" b="1">
+                <a:solidFill>
+                  <a:srgbClr val="2D4A33"/>
+                </a:solidFill>
+              </a:rPr>
+              <a:t>自动化评测</a:t>
+            </a:r>
+            <a:endParaRPr lang="zh-CN" altLang="en-US" sz="2000" b="1">
+              <a:solidFill>
+                <a:srgbClr val="2D4A33"/>
+              </a:solidFill>
+            </a:endParaRPr>
           </a:p>
         </p:txBody>
       </p:sp>
@@ -6085,12 +6008,16 @@
           <p:cNvSpPr>
             <a:spLocks noGrp="1"/>
           </p:cNvSpPr>
-          <p:nvPr/>
+          <p:nvPr>
+            <p:custDataLst>
+              <p:tags r:id="rId6"/>
+            </p:custDataLst>
+          </p:nvPr>
         </p:nvSpPr>
         <p:spPr>
           <a:xfrm>
-            <a:off x="6800850" y="2228850"/>
-            <a:ext cx="4305300" cy="857250"/>
+            <a:off x="6800850" y="2501265"/>
+            <a:ext cx="4305300" cy="2976880"/>
           </a:xfrm>
           <a:prstGeom prst="rect">
             <a:avLst/>
@@ -6121,128 +6048,83 @@
               </a:defRPr>
             </a:pPr>
             <a:r>
-              <a:rPr sz="1350" b="0">
-                <a:solidFill>
-                  <a:srgbClr val="1F2D22"/>
-                </a:solidFill>
-              </a:rPr>
-              <a:t>支持多种召回方式并行比较</a:t>
-            </a:r>
-          </a:p>
-        </p:txBody>
-      </p:sp>
-      <p:sp>
-        <p:nvSpPr>
-          <p:cNvPr id="10" name="矩形 9"/>
-          <p:cNvSpPr>
-            <a:spLocks noGrp="1"/>
-          </p:cNvSpPr>
-          <p:nvPr/>
-        </p:nvSpPr>
-        <p:spPr>
-          <a:xfrm>
-            <a:off x="2000250" y="3714750"/>
-            <a:ext cx="8191500" cy="1428750"/>
-          </a:xfrm>
-          <a:prstGeom prst="rect">
-            <a:avLst/>
-          </a:prstGeom>
-          <a:solidFill>
-            <a:srgbClr val="FFFFFF"/>
-          </a:solidFill>
-          <a:ln w="9525">
-            <a:solidFill>
-              <a:srgbClr val="C7D0C4"/>
-            </a:solidFill>
-            <a:prstDash val="solid"/>
-          </a:ln>
-        </p:spPr>
-      </p:sp>
-      <p:sp>
-        <p:nvSpPr>
-          <p:cNvPr id="11" name="矩形 10"/>
-          <p:cNvSpPr>
-            <a:spLocks noGrp="1"/>
-          </p:cNvSpPr>
-          <p:nvPr/>
-        </p:nvSpPr>
-        <p:spPr>
-          <a:xfrm>
-            <a:off x="2228850" y="3886200"/>
-            <a:ext cx="7734300" cy="323850"/>
-          </a:xfrm>
-          <a:prstGeom prst="rect">
-            <a:avLst/>
-          </a:prstGeom>
-          <a:solidFill>
-            <a:srgbClr val="000000">
-              <a:alpha val="0"/>
-            </a:srgbClr>
-          </a:solidFill>
-          <a:ln w="0">
-            <a:solidFill>
-              <a:srgbClr val="000000">
-                <a:alpha val="0"/>
-              </a:srgbClr>
-            </a:solidFill>
-            <a:prstDash val="solid"/>
-          </a:ln>
-        </p:spPr>
-        <p:txBody>
-          <a:bodyPr anchor="ctr"/>
-          <a:lstStyle/>
-          <a:p>
-            <a:pPr algn="l">
-              <a:defRPr sz="1650" b="1">
-                <a:solidFill>
-                  <a:srgbClr val="2D4A33"/>
-                </a:solidFill>
-              </a:defRPr>
-            </a:pPr>
-            <a:r>
-              <a:rPr sz="1650" b="1">
-                <a:solidFill>
-                  <a:srgbClr val="2D4A33"/>
-                </a:solidFill>
-              </a:rPr>
-              <a:t>结果</a:t>
-            </a:r>
-          </a:p>
-        </p:txBody>
-      </p:sp>
-      <p:sp>
-        <p:nvSpPr>
-          <p:cNvPr id="12" name="矩形 11"/>
-          <p:cNvSpPr>
-            <a:spLocks noGrp="1"/>
-          </p:cNvSpPr>
-          <p:nvPr/>
-        </p:nvSpPr>
-        <p:spPr>
-          <a:xfrm>
-            <a:off x="2228850" y="4324350"/>
-            <a:ext cx="7734300" cy="666750"/>
-          </a:xfrm>
-          <a:prstGeom prst="rect">
-            <a:avLst/>
-          </a:prstGeom>
-          <a:solidFill>
-            <a:srgbClr val="000000">
-              <a:alpha val="0"/>
-            </a:srgbClr>
-          </a:solidFill>
-          <a:ln w="0">
-            <a:solidFill>
-              <a:srgbClr val="000000">
-                <a:alpha val="0"/>
-              </a:srgbClr>
-            </a:solidFill>
-            <a:prstDash val="solid"/>
-          </a:ln>
-        </p:spPr>
-        <p:txBody>
-          <a:bodyPr anchor="ctr"/>
-          <a:lstStyle/>
+              <a:rPr lang="zh-CN" altLang="en-US" sz="1600" b="0">
+                <a:solidFill>
+                  <a:srgbClr val="1F2D22"/>
+                </a:solidFill>
+              </a:rPr>
+              <a:t>评测基准与真值构建：独立编写 </a:t>
+            </a:r>
+            <a:r>
+              <a:rPr lang="en-US" altLang="zh-CN" sz="1600" b="0">
+                <a:solidFill>
+                  <a:srgbClr val="1F2D22"/>
+                </a:solidFill>
+              </a:rPr>
+              <a:t>evaluator </a:t>
+            </a:r>
+            <a:r>
+              <a:rPr lang="zh-CN" altLang="en-US" sz="1600" b="0">
+                <a:solidFill>
+                  <a:srgbClr val="1F2D22"/>
+                </a:solidFill>
+              </a:rPr>
+              <a:t>自动化测试脚本，解析本地测试集生成 </a:t>
+            </a:r>
+            <a:r>
+              <a:rPr lang="en-US" altLang="zh-CN" sz="1600" b="0">
+                <a:solidFill>
+                  <a:srgbClr val="1F2D22"/>
+                </a:solidFill>
+              </a:rPr>
+              <a:t>Ground Truth，</a:t>
+            </a:r>
+            <a:r>
+              <a:rPr lang="zh-CN" altLang="en-US" sz="1600" b="0">
+                <a:solidFill>
+                  <a:srgbClr val="1F2D22"/>
+                </a:solidFill>
+              </a:rPr>
+              <a:t>实现 </a:t>
+            </a:r>
+            <a:r>
+              <a:rPr lang="en-US" altLang="zh-CN" sz="1600" b="0">
+                <a:solidFill>
+                  <a:srgbClr val="1F2D22"/>
+                </a:solidFill>
+              </a:rPr>
+              <a:t>DCG、IDCG </a:t>
+            </a:r>
+            <a:r>
+              <a:rPr lang="zh-CN" altLang="en-US" sz="1600" b="0">
+                <a:solidFill>
+                  <a:srgbClr val="1F2D22"/>
+                </a:solidFill>
+              </a:rPr>
+              <a:t>与 </a:t>
+            </a:r>
+            <a:r>
+              <a:rPr lang="en-US" altLang="zh-CN" sz="1600" b="0">
+                <a:solidFill>
+                  <a:srgbClr val="1F2D22"/>
+                </a:solidFill>
+              </a:rPr>
+              <a:t>NDCG@10 </a:t>
+            </a:r>
+            <a:r>
+              <a:rPr lang="zh-CN" altLang="en-US" sz="1600" b="0">
+                <a:solidFill>
+                  <a:srgbClr val="1F2D22"/>
+                </a:solidFill>
+              </a:rPr>
+              <a:t>核心信息检索指标的计算。</a:t>
+            </a:r>
+            <a:endParaRPr lang="zh-CN" altLang="en-US" sz="1600" b="0">
+              <a:solidFill>
+                <a:srgbClr val="1F2D22"/>
+              </a:solidFill>
+            </a:endParaRPr>
+          </a:p>
           <a:p>
             <a:pPr algn="l">
               <a:defRPr sz="1350" b="0">
@@ -6251,14 +6133,97 @@
                 </a:solidFill>
               </a:defRPr>
             </a:pPr>
-            <a:r>
-              <a:rPr sz="1350" b="0">
-                <a:solidFill>
-                  <a:srgbClr val="1F2D22"/>
-                </a:solidFill>
-              </a:rPr>
-              <a:t>索引与召回更灵活，检索能力明显增强。</a:t>
-            </a:r>
+            <a:endParaRPr lang="zh-CN" altLang="en-US" sz="1600" b="0">
+              <a:solidFill>
+                <a:srgbClr val="1F2D22"/>
+              </a:solidFill>
+            </a:endParaRPr>
+          </a:p>
+          <a:p>
+            <a:pPr algn="l">
+              <a:defRPr sz="1350" b="0">
+                <a:solidFill>
+                  <a:srgbClr val="1F2D22"/>
+                </a:solidFill>
+              </a:defRPr>
+            </a:pPr>
+            <a:r>
+              <a:rPr lang="zh-CN" altLang="en-US" sz="1600" b="0">
+                <a:solidFill>
+                  <a:srgbClr val="1F2D22"/>
+                </a:solidFill>
+              </a:rPr>
+              <a:t>重排效能</a:t>
+            </a:r>
+            <a:r>
+              <a:rPr lang="zh-CN" altLang="en-US" sz="1600" b="0">
+                <a:solidFill>
+                  <a:srgbClr val="1F2D22"/>
+                </a:solidFill>
+              </a:rPr>
+              <a:t>评测：执行端到端对比实验验证。采用 4 维文本特征重排后，在 </a:t>
+            </a:r>
+            <a:r>
+              <a:rPr lang="en-US" altLang="zh-CN" sz="1600" b="0">
+                <a:solidFill>
+                  <a:srgbClr val="1F2D22"/>
+                </a:solidFill>
+              </a:rPr>
+              <a:t>SearchService </a:t>
+            </a:r>
+            <a:r>
+              <a:rPr lang="zh-CN" altLang="en-US" sz="1600" b="0">
+                <a:solidFill>
+                  <a:srgbClr val="1F2D22"/>
+                </a:solidFill>
+              </a:rPr>
+              <a:t>层</a:t>
+            </a:r>
+            <a:r>
+              <a:rPr lang="zh-CN" altLang="en-US" sz="1600" b="0">
+                <a:solidFill>
+                  <a:srgbClr val="1F2D22"/>
+                </a:solidFill>
+              </a:rPr>
+              <a:t>机型结果拦截，截获底层 </a:t>
+            </a:r>
+            <a:r>
+              <a:rPr lang="en-US" altLang="zh-CN" sz="1600" b="0">
+                <a:solidFill>
+                  <a:srgbClr val="1F2D22"/>
+                </a:solidFill>
+              </a:rPr>
+              <a:t>BM25 </a:t>
+            </a:r>
+            <a:r>
+              <a:rPr lang="zh-CN" altLang="en-US" sz="1600" b="0">
+                <a:solidFill>
+                  <a:srgbClr val="1F2D22"/>
+                </a:solidFill>
+              </a:rPr>
+              <a:t>召回结果后，进行组内分数 </a:t>
+            </a:r>
+            <a:r>
+              <a:rPr lang="en-US" altLang="zh-CN" sz="1600" b="0">
+                <a:solidFill>
+                  <a:srgbClr val="1F2D22"/>
+                </a:solidFill>
+              </a:rPr>
+              <a:t>Min-Max </a:t>
+            </a:r>
+            <a:r>
+              <a:rPr lang="zh-CN" altLang="en-US" sz="1600" b="0">
+                <a:solidFill>
+                  <a:srgbClr val="1F2D22"/>
+                </a:solidFill>
+              </a:rPr>
+              <a:t>归一化与动态重打分，系统成功屏蔽“高命中低营养”的废话回答。</a:t>
+            </a:r>
+            <a:endParaRPr lang="zh-CN" altLang="en-US" sz="1600" b="0">
+              <a:solidFill>
+                <a:srgbClr val="1F2D22"/>
+              </a:solidFill>
+            </a:endParaRPr>
           </a:p>
         </p:txBody>
       </p:sp>
@@ -6545,13 +6510,7 @@
       </p:sp>
       <p:sp>
         <p:nvSpPr>
-          <p:cNvPr id="3" name="TextBox 2">
-            <a:extLst>
-              <a:ext uri="{FF2B5EF4-FFF2-40B4-BE49-F238E27FC236}">
-                <a16:creationId xmlns:a16="http://schemas.microsoft.com/office/drawing/2014/main" id="{6E79D8F8-2327-A489-4B37-5DEE5EC64953}"/>
-              </a:ext>
-            </a:extLst>
-          </p:cNvPr>
+          <p:cNvPr id="3" name="TextBox 2"/>
           <p:cNvSpPr txBox="1"/>
           <p:nvPr/>
         </p:nvSpPr>
@@ -6600,13 +6559,7 @@
     </p:bg>
     <p:spTree>
       <p:nvGrpSpPr>
-        <p:cNvPr id="1" name="">
-          <a:extLst>
-            <a:ext uri="{FF2B5EF4-FFF2-40B4-BE49-F238E27FC236}">
-              <a16:creationId xmlns:a16="http://schemas.microsoft.com/office/drawing/2014/main" id="{EE95AC3D-97B5-62C1-C623-39FEE40281DD}"/>
-            </a:ext>
-          </a:extLst>
-        </p:cNvPr>
+        <p:cNvPr id="1" name=""/>
         <p:cNvGrpSpPr/>
         <p:nvPr/>
       </p:nvGrpSpPr>
@@ -6620,13 +6573,7 @@
       </p:grpSpPr>
       <p:sp>
         <p:nvSpPr>
-          <p:cNvPr id="11" name="文本框 10">
-            <a:extLst>
-              <a:ext uri="{FF2B5EF4-FFF2-40B4-BE49-F238E27FC236}">
-                <a16:creationId xmlns:a16="http://schemas.microsoft.com/office/drawing/2014/main" id="{B17E99E7-F638-E6ED-0024-BFF9A3D1D19B}"/>
-              </a:ext>
-            </a:extLst>
-          </p:cNvPr>
+          <p:cNvPr id="11" name="文本框 10"/>
           <p:cNvSpPr>
             <a:spLocks noGrp="1"/>
           </p:cNvSpPr>
@@ -6662,7 +6609,6 @@
               <a:buSzTx/>
               <a:buFontTx/>
               <a:buNone/>
-              <a:tabLst/>
               <a:defRPr/>
             </a:pPr>
             <a:r>
@@ -6711,13 +6657,7 @@
       </p:sp>
       <p:sp>
         <p:nvSpPr>
-          <p:cNvPr id="13" name="矩形 12">
-            <a:extLst>
-              <a:ext uri="{FF2B5EF4-FFF2-40B4-BE49-F238E27FC236}">
-                <a16:creationId xmlns:a16="http://schemas.microsoft.com/office/drawing/2014/main" id="{286FDCB7-259E-7173-B956-0C2E1C45251E}"/>
-              </a:ext>
-            </a:extLst>
-          </p:cNvPr>
+          <p:cNvPr id="13" name="矩形 12"/>
           <p:cNvSpPr>
             <a:spLocks noGrp="1"/>
           </p:cNvSpPr>
@@ -6752,7 +6692,6 @@
               <a:buSzTx/>
               <a:buFontTx/>
               <a:buNone/>
-              <a:tabLst/>
               <a:defRPr/>
             </a:pPr>
             <a:r>
@@ -6761,7 +6700,7 @@
                   <a:prstClr val="white"/>
                 </a:solidFill>
                 <a:latin typeface="Color Emoji"/>
-                <a:ea typeface="STZhongsong"/>
+                <a:ea typeface="华文中宋" panose="02010600040101010101" charset="-122"/>
               </a:rPr>
               <a:t>汤语涵</a:t>
             </a:r>
@@ -6783,11 +6722,6 @@
         </p:txBody>
       </p:sp>
     </p:spTree>
-    <p:extLst>
-      <p:ext uri="{BB962C8B-B14F-4D97-AF65-F5344CB8AC3E}">
-        <p14:creationId xmlns:p14="http://schemas.microsoft.com/office/powerpoint/2010/main" val="121705555"/>
-      </p:ext>
-    </p:extLst>
   </p:cSld>
   <p:clrMapOvr>
     <a:masterClrMapping/>
@@ -6800,13 +6734,7 @@
   <p:cSld>
     <p:spTree>
       <p:nvGrpSpPr>
-        <p:cNvPr id="1" name="">
-          <a:extLst>
-            <a:ext uri="{FF2B5EF4-FFF2-40B4-BE49-F238E27FC236}">
-              <a16:creationId xmlns:a16="http://schemas.microsoft.com/office/drawing/2014/main" id="{53224DE3-BE87-60AE-C61E-71720FBE0D8C}"/>
-            </a:ext>
-          </a:extLst>
-        </p:cNvPr>
+        <p:cNvPr id="1" name=""/>
         <p:cNvGrpSpPr/>
         <p:nvPr/>
       </p:nvGrpSpPr>
@@ -6820,13 +6748,7 @@
       </p:grpSpPr>
       <p:sp>
         <p:nvSpPr>
-          <p:cNvPr id="13" name="矩形 12">
-            <a:extLst>
-              <a:ext uri="{FF2B5EF4-FFF2-40B4-BE49-F238E27FC236}">
-                <a16:creationId xmlns:a16="http://schemas.microsoft.com/office/drawing/2014/main" id="{0FC34F73-EB12-93C4-4293-35C0DDE5861F}"/>
-              </a:ext>
-            </a:extLst>
-          </p:cNvPr>
+          <p:cNvPr id="13" name="矩形 12"/>
           <p:cNvSpPr>
             <a:spLocks noGrp="1"/>
           </p:cNvSpPr>
@@ -6853,13 +6775,7 @@
       </p:sp>
       <p:sp>
         <p:nvSpPr>
-          <p:cNvPr id="2" name="矩形 1">
-            <a:extLst>
-              <a:ext uri="{FF2B5EF4-FFF2-40B4-BE49-F238E27FC236}">
-                <a16:creationId xmlns:a16="http://schemas.microsoft.com/office/drawing/2014/main" id="{16217816-ECAB-5639-7E3D-F542E9F02F33}"/>
-              </a:ext>
-            </a:extLst>
-          </p:cNvPr>
+          <p:cNvPr id="2" name="矩形 1"/>
           <p:cNvSpPr>
             <a:spLocks noGrp="1"/>
           </p:cNvSpPr>
@@ -6910,13 +6826,7 @@
       </p:sp>
       <p:sp>
         <p:nvSpPr>
-          <p:cNvPr id="5" name="矩形 4">
-            <a:extLst>
-              <a:ext uri="{FF2B5EF4-FFF2-40B4-BE49-F238E27FC236}">
-                <a16:creationId xmlns:a16="http://schemas.microsoft.com/office/drawing/2014/main" id="{03555D4E-EB34-77BF-9A14-80AB41FF11C2}"/>
-              </a:ext>
-            </a:extLst>
-          </p:cNvPr>
+          <p:cNvPr id="5" name="矩形 4"/>
           <p:cNvSpPr>
             <a:spLocks noGrp="1"/>
           </p:cNvSpPr>
@@ -6973,13 +6883,7 @@
       </p:sp>
       <p:sp>
         <p:nvSpPr>
-          <p:cNvPr id="6" name="矩形 5">
-            <a:extLst>
-              <a:ext uri="{FF2B5EF4-FFF2-40B4-BE49-F238E27FC236}">
-                <a16:creationId xmlns:a16="http://schemas.microsoft.com/office/drawing/2014/main" id="{D6A10D85-8177-AAE4-76F0-8D3A45AB6BE8}"/>
-              </a:ext>
-            </a:extLst>
-          </p:cNvPr>
+          <p:cNvPr id="6" name="矩形 5"/>
           <p:cNvSpPr>
             <a:spLocks noGrp="1"/>
           </p:cNvSpPr>
@@ -7098,13 +7002,7 @@
       </p:sp>
       <p:sp>
         <p:nvSpPr>
-          <p:cNvPr id="8" name="矩形 7">
-            <a:extLst>
-              <a:ext uri="{FF2B5EF4-FFF2-40B4-BE49-F238E27FC236}">
-                <a16:creationId xmlns:a16="http://schemas.microsoft.com/office/drawing/2014/main" id="{C6D8F764-F4D7-798A-39E7-3F1B0096862E}"/>
-              </a:ext>
-            </a:extLst>
-          </p:cNvPr>
+          <p:cNvPr id="8" name="矩形 7"/>
           <p:cNvSpPr>
             <a:spLocks noGrp="1"/>
           </p:cNvSpPr>
@@ -7161,13 +7059,7 @@
       </p:sp>
       <p:sp>
         <p:nvSpPr>
-          <p:cNvPr id="9" name="矩形 8">
-            <a:extLst>
-              <a:ext uri="{FF2B5EF4-FFF2-40B4-BE49-F238E27FC236}">
-                <a16:creationId xmlns:a16="http://schemas.microsoft.com/office/drawing/2014/main" id="{718F90BC-DC90-BEDC-F4AB-1694E864A254}"/>
-              </a:ext>
-            </a:extLst>
-          </p:cNvPr>
+          <p:cNvPr id="9" name="矩形 8"/>
           <p:cNvSpPr>
             <a:spLocks noGrp="1"/>
           </p:cNvSpPr>
@@ -7217,13 +7109,7 @@
       </p:sp>
       <p:sp>
         <p:nvSpPr>
-          <p:cNvPr id="11" name="矩形 10">
-            <a:extLst>
-              <a:ext uri="{FF2B5EF4-FFF2-40B4-BE49-F238E27FC236}">
-                <a16:creationId xmlns:a16="http://schemas.microsoft.com/office/drawing/2014/main" id="{11669D48-DFC2-F528-67F7-B6E0A04262CD}"/>
-              </a:ext>
-            </a:extLst>
-          </p:cNvPr>
+          <p:cNvPr id="11" name="矩形 10"/>
           <p:cNvSpPr>
             <a:spLocks noGrp="1"/>
           </p:cNvSpPr>
@@ -7280,13 +7166,7 @@
       </p:sp>
       <p:sp>
         <p:nvSpPr>
-          <p:cNvPr id="12" name="矩形 11">
-            <a:extLst>
-              <a:ext uri="{FF2B5EF4-FFF2-40B4-BE49-F238E27FC236}">
-                <a16:creationId xmlns:a16="http://schemas.microsoft.com/office/drawing/2014/main" id="{044D2BBF-5EE7-B9A4-BE11-B7CCF0213BEB}"/>
-              </a:ext>
-            </a:extLst>
-          </p:cNvPr>
+          <p:cNvPr id="12" name="矩形 11"/>
           <p:cNvSpPr>
             <a:spLocks noGrp="1"/>
           </p:cNvSpPr>
@@ -7361,24 +7241,6 @@
               </a:rPr>
               <a:t>ES</a:t>
             </a:r>
-          </a:p>
-          <a:p>
-            <a:pPr algn="l">
-              <a:defRPr sz="1350" b="0">
-                <a:solidFill>
-                  <a:srgbClr val="1F2D22"/>
-                </a:solidFill>
-              </a:defRPr>
-            </a:pPr>
-            <a:r>
-              <a:rPr lang="zh-CN" altLang="en-US" sz="2000" dirty="0">
-                <a:solidFill>
-                  <a:srgbClr val="1F2D22"/>
-                </a:solidFill>
-                <a:latin typeface="ui-monospace"/>
-              </a:rPr>
-              <a:t>查询数据：</a:t>
-            </a:r>
             <a:endParaRPr lang="en-US" altLang="zh-CN" sz="2000" dirty="0">
               <a:solidFill>
                 <a:srgbClr val="1F2D22"/>
@@ -7401,17 +7263,14 @@
                 </a:solidFill>
                 <a:latin typeface="ui-monospace"/>
               </a:rPr>
-              <a:t>写入用 </a:t>
-            </a:r>
-            <a:r>
-              <a:rPr lang="en-US" sz="2000" dirty="0">
-                <a:solidFill>
-                  <a:srgbClr val="1F2D22"/>
-                </a:solidFill>
-                <a:latin typeface="ui-monospace"/>
-              </a:rPr>
-              <a:t>POST /{index}/_bulk</a:t>
-            </a:r>
+              <a:t>查询数据：</a:t>
+            </a:r>
+            <a:endParaRPr lang="en-US" altLang="zh-CN" sz="2000" dirty="0">
+              <a:solidFill>
+                <a:srgbClr val="1F2D22"/>
+              </a:solidFill>
+              <a:latin typeface="ui-monospace"/>
+            </a:endParaRPr>
           </a:p>
           <a:p>
             <a:pPr algn="l">
@@ -7428,6 +7287,39 @@
                 </a:solidFill>
                 <a:latin typeface="ui-monospace"/>
               </a:rPr>
+              <a:t>写入用 </a:t>
+            </a:r>
+            <a:r>
+              <a:rPr lang="en-US" sz="2000" dirty="0">
+                <a:solidFill>
+                  <a:srgbClr val="1F2D22"/>
+                </a:solidFill>
+                <a:latin typeface="ui-monospace"/>
+              </a:rPr>
+              <a:t>POST /{index}/_bulk</a:t>
+            </a:r>
+            <a:endParaRPr lang="en-US" sz="2000" dirty="0">
+              <a:solidFill>
+                <a:srgbClr val="1F2D22"/>
+              </a:solidFill>
+              <a:latin typeface="ui-monospace"/>
+            </a:endParaRPr>
+          </a:p>
+          <a:p>
+            <a:pPr algn="l">
+              <a:defRPr sz="1350" b="0">
+                <a:solidFill>
+                  <a:srgbClr val="1F2D22"/>
+                </a:solidFill>
+              </a:defRPr>
+            </a:pPr>
+            <a:r>
+              <a:rPr lang="zh-CN" altLang="en-US" sz="2000" dirty="0">
+                <a:solidFill>
+                  <a:srgbClr val="1F2D22"/>
+                </a:solidFill>
+                <a:latin typeface="ui-monospace"/>
+              </a:rPr>
               <a:t>查询用 </a:t>
             </a:r>
             <a:r>
@@ -7439,6 +7331,12 @@
               </a:rPr>
               <a:t>POST /{index}/_search</a:t>
             </a:r>
+            <a:endParaRPr lang="en-US" sz="2000" dirty="0">
+              <a:solidFill>
+                <a:srgbClr val="1F2D22"/>
+              </a:solidFill>
+              <a:latin typeface="ui-monospace"/>
+            </a:endParaRPr>
           </a:p>
           <a:p>
             <a:pPr algn="l">
@@ -7486,23 +7384,11 @@
       </p:sp>
       <p:graphicFrame>
         <p:nvGraphicFramePr>
-          <p:cNvPr id="3" name="表格 2">
-            <a:extLst>
-              <a:ext uri="{FF2B5EF4-FFF2-40B4-BE49-F238E27FC236}">
-                <a16:creationId xmlns:a16="http://schemas.microsoft.com/office/drawing/2014/main" id="{302C476D-95BD-A162-8160-7F8DD10193A5}"/>
-              </a:ext>
-            </a:extLst>
-          </p:cNvPr>
+          <p:cNvPr id="3" name="表格 2"/>
           <p:cNvGraphicFramePr>
             <a:graphicFrameLocks noGrp="1"/>
           </p:cNvGraphicFramePr>
-          <p:nvPr>
-            <p:extLst>
-              <p:ext uri="{D42A27DB-BD31-4B8C-83A1-F6EECF244321}">
-                <p14:modId xmlns:p14="http://schemas.microsoft.com/office/powerpoint/2010/main" val="3837746730"/>
-              </p:ext>
-            </p:extLst>
-          </p:nvPr>
+          <p:nvPr/>
         </p:nvGraphicFramePr>
         <p:xfrm>
           <a:off x="5289176" y="2190750"/>
@@ -7513,34 +7399,10 @@
             <a:tbl>
               <a:tblPr/>
               <a:tblGrid>
-                <a:gridCol w="1725706">
-                  <a:extLst>
-                    <a:ext uri="{9D8B030D-6E8A-4147-A177-3AD203B41FA5}">
-                      <a16:colId xmlns:a16="http://schemas.microsoft.com/office/drawing/2014/main" val="850741836"/>
-                    </a:ext>
-                  </a:extLst>
-                </a:gridCol>
-                <a:gridCol w="1725706">
-                  <a:extLst>
-                    <a:ext uri="{9D8B030D-6E8A-4147-A177-3AD203B41FA5}">
-                      <a16:colId xmlns:a16="http://schemas.microsoft.com/office/drawing/2014/main" val="1110310240"/>
-                    </a:ext>
-                  </a:extLst>
-                </a:gridCol>
-                <a:gridCol w="1725706">
-                  <a:extLst>
-                    <a:ext uri="{9D8B030D-6E8A-4147-A177-3AD203B41FA5}">
-                      <a16:colId xmlns:a16="http://schemas.microsoft.com/office/drawing/2014/main" val="839866319"/>
-                    </a:ext>
-                  </a:extLst>
-                </a:gridCol>
-                <a:gridCol w="1725706">
-                  <a:extLst>
-                    <a:ext uri="{9D8B030D-6E8A-4147-A177-3AD203B41FA5}">
-                      <a16:colId xmlns:a16="http://schemas.microsoft.com/office/drawing/2014/main" val="159932957"/>
-                    </a:ext>
-                  </a:extLst>
-                </a:gridCol>
+                <a:gridCol w="1725706"/>
+                <a:gridCol w="1725706"/>
+                <a:gridCol w="1725706"/>
+                <a:gridCol w="1725706"/>
               </a:tblGrid>
               <a:tr h="239952">
                 <a:tc>
@@ -7557,6 +7419,9 @@
                         </a:rPr>
                         <a:t>特征</a:t>
                       </a:r>
+                      <a:endParaRPr lang="zh-CN">
+                        <a:effectLst/>
+                      </a:endParaRPr>
                     </a:p>
                   </a:txBody>
                   <a:tcPr marL="28575" marR="28575" marT="19050" marB="19050" anchor="ctr">
@@ -7601,6 +7466,9 @@
                         </a:rPr>
                         <a:t>权重</a:t>
                       </a:r>
+                      <a:endParaRPr lang="zh-CN">
+                        <a:effectLst/>
+                      </a:endParaRPr>
                     </a:p>
                   </a:txBody>
                   <a:tcPr marL="28575" marR="28575" marT="19050" marB="19050" anchor="ctr">
@@ -7651,6 +7519,9 @@
                         </a:rPr>
                         <a:t>计算方式</a:t>
                       </a:r>
+                      <a:endParaRPr lang="zh-CN">
+                        <a:effectLst/>
+                      </a:endParaRPr>
                     </a:p>
                   </a:txBody>
                   <a:tcPr marL="28575" marR="28575" marT="19050" marB="19050" anchor="ctr">
@@ -7701,6 +7572,9 @@
                         </a:rPr>
                         <a:t>为什么有效</a:t>
                       </a:r>
+                      <a:endParaRPr lang="zh-CN">
+                        <a:effectLst/>
+                      </a:endParaRPr>
                     </a:p>
                   </a:txBody>
                   <a:tcPr marL="28575" marR="28575" marT="19050" marB="19050" anchor="ctr">
@@ -7731,11 +7605,6 @@
                     <a:noFill/>
                   </a:tcPr>
                 </a:tc>
-                <a:extLst>
-                  <a:ext uri="{0D108BD9-81ED-4DB2-BD59-A6C34878D82A}">
-                    <a16:rowId xmlns:a16="http://schemas.microsoft.com/office/drawing/2014/main" val="330288682"/>
-                  </a:ext>
-                </a:extLst>
               </a:tr>
               <a:tr h="1082711">
                 <a:tc>
@@ -7805,6 +7674,9 @@
                         </a:rPr>
                         <a:t>50%</a:t>
                       </a:r>
+                      <a:endParaRPr lang="zh-CN">
+                        <a:effectLst/>
+                      </a:endParaRPr>
                     </a:p>
                   </a:txBody>
                   <a:tcPr marL="28575" marR="28575" marT="19050" marB="19050" anchor="ctr">
@@ -7858,7 +7730,7 @@
                       <a:r>
                         <a:rPr lang="zh-CN" b="0" u="none" strike="noStrike">
                           <a:effectLst/>
-                          <a:hlinkClick r:id="rId3"/>
+                          <a:hlinkClick r:id="rId1"/>
                         </a:rPr>
                         <a:t>min(字符数 / 150, 1)</a:t>
                       </a:r>
@@ -7921,6 +7793,9 @@
                         </a:rPr>
                         <a:t>高质量回答需要展开论述，必然更长；低质量回答往往一句话敷衍</a:t>
                       </a:r>
+                      <a:endParaRPr lang="zh-CN">
+                        <a:effectLst/>
+                      </a:endParaRPr>
                     </a:p>
                   </a:txBody>
                   <a:tcPr marL="28575" marR="28575" marT="19050" marB="19050" anchor="ctr">
@@ -7957,11 +7832,6 @@
                     <a:noFill/>
                   </a:tcPr>
                 </a:tc>
-                <a:extLst>
-                  <a:ext uri="{0D108BD9-81ED-4DB2-BD59-A6C34878D82A}">
-                    <a16:rowId xmlns:a16="http://schemas.microsoft.com/office/drawing/2014/main" val="1296430223"/>
-                  </a:ext>
-                </a:extLst>
               </a:tr>
               <a:tr h="1082711">
                 <a:tc>
@@ -8031,6 +7901,9 @@
                         </a:rPr>
                         <a:t>25%</a:t>
                       </a:r>
+                      <a:endParaRPr lang="zh-CN">
+                        <a:effectLst/>
+                      </a:endParaRPr>
                     </a:p>
                   </a:txBody>
                   <a:tcPr marL="28575" marR="28575" marT="19050" marB="19050" anchor="ctr">
@@ -8087,6 +7960,9 @@
                         </a:rPr>
                         <a:t>组内 min-max 归一化 BM25 分数</a:t>
                       </a:r>
+                      <a:endParaRPr lang="zh-CN">
+                        <a:effectLst/>
+                      </a:endParaRPr>
                     </a:p>
                   </a:txBody>
                   <a:tcPr marL="28575" marR="28575" marT="19050" marB="19050" anchor="ctr">
@@ -8143,6 +8019,9 @@
                         </a:rPr>
                         <a:t>BM25 越高说明答案与问题的词汇重合度越好，即"答非所问"的答案得分低</a:t>
                       </a:r>
+                      <a:endParaRPr lang="zh-CN">
+                        <a:effectLst/>
+                      </a:endParaRPr>
                     </a:p>
                   </a:txBody>
                   <a:tcPr marL="28575" marR="28575" marT="19050" marB="19050" anchor="ctr">
@@ -8179,11 +8058,6 @@
                     <a:noFill/>
                   </a:tcPr>
                 </a:tc>
-                <a:extLst>
-                  <a:ext uri="{0D108BD9-81ED-4DB2-BD59-A6C34878D82A}">
-                    <a16:rowId xmlns:a16="http://schemas.microsoft.com/office/drawing/2014/main" val="2797616348"/>
-                  </a:ext>
-                </a:extLst>
               </a:tr>
               <a:tr h="872021">
                 <a:tc>
@@ -8247,6 +8121,9 @@
                         </a:rPr>
                         <a:t>25%</a:t>
                       </a:r>
+                      <a:endParaRPr lang="zh-CN" dirty="0">
+                        <a:effectLst/>
+                      </a:endParaRPr>
                     </a:p>
                   </a:txBody>
                   <a:tcPr marL="28575" marR="28575" marT="19050" marB="19050" anchor="ctr">
@@ -8297,6 +8174,9 @@
                         </a:rPr>
                         <a:t>去标点后不重复字符数 / 80</a:t>
                       </a:r>
+                      <a:endParaRPr lang="zh-CN">
+                        <a:effectLst/>
+                      </a:endParaRPr>
                     </a:p>
                   </a:txBody>
                   <a:tcPr marL="28575" marR="28575" marT="19050" marB="19050" anchor="ctr">
@@ -8347,6 +8227,9 @@
                         </a:rPr>
                         <a:t>高质量回答使用更多专业术语和不同概念，去重字符种类更多</a:t>
                       </a:r>
+                      <a:endParaRPr lang="zh-CN" dirty="0">
+                        <a:effectLst/>
+                      </a:endParaRPr>
                     </a:p>
                   </a:txBody>
                   <a:tcPr marL="28575" marR="28575" marT="19050" marB="19050" anchor="ctr">
@@ -8377,11 +8260,6 @@
                     <a:noFill/>
                   </a:tcPr>
                 </a:tc>
-                <a:extLst>
-                  <a:ext uri="{0D108BD9-81ED-4DB2-BD59-A6C34878D82A}">
-                    <a16:rowId xmlns:a16="http://schemas.microsoft.com/office/drawing/2014/main" val="3181907431"/>
-                  </a:ext>
-                </a:extLst>
               </a:tr>
             </a:tbl>
           </a:graphicData>
@@ -8389,13 +8267,7 @@
       </p:graphicFrame>
       <p:sp>
         <p:nvSpPr>
-          <p:cNvPr id="15" name="文本框 14">
-            <a:extLst>
-              <a:ext uri="{FF2B5EF4-FFF2-40B4-BE49-F238E27FC236}">
-                <a16:creationId xmlns:a16="http://schemas.microsoft.com/office/drawing/2014/main" id="{FC64473D-105B-EACE-A9BF-008D8865B2E8}"/>
-              </a:ext>
-            </a:extLst>
-          </p:cNvPr>
+          <p:cNvPr id="15" name="文本框 14"/>
           <p:cNvSpPr txBox="1"/>
           <p:nvPr/>
         </p:nvSpPr>
@@ -8447,11 +8319,6 @@
         </p:txBody>
       </p:sp>
     </p:spTree>
-    <p:extLst>
-      <p:ext uri="{BB962C8B-B14F-4D97-AF65-F5344CB8AC3E}">
-        <p14:creationId xmlns:p14="http://schemas.microsoft.com/office/powerpoint/2010/main" val="3767501602"/>
-      </p:ext>
-    </p:extLst>
   </p:cSld>
   <p:clrMapOvr>
     <a:masterClrMapping/>
@@ -8522,7 +8389,6 @@
             <a:pPr algn="ctr">
               <a:buNone/>
             </a:pPr>
-            <a:endParaRPr/>
           </a:p>
         </p:txBody>
       </p:sp>
@@ -8675,7 +8541,6 @@
             <a:pPr algn="ctr">
               <a:buNone/>
             </a:pPr>
-            <a:endParaRPr/>
           </a:p>
         </p:txBody>
       </p:sp>
@@ -8725,7 +8590,6 @@
             <a:pPr algn="ctr">
               <a:buNone/>
             </a:pPr>
-            <a:endParaRPr/>
           </a:p>
         </p:txBody>
       </p:sp>
@@ -8775,7 +8639,6 @@
             <a:pPr algn="ctr">
               <a:buNone/>
             </a:pPr>
-            <a:endParaRPr/>
           </a:p>
         </p:txBody>
       </p:sp>
@@ -8825,7 +8688,6 @@
             <a:pPr algn="ctr">
               <a:buNone/>
             </a:pPr>
-            <a:endParaRPr/>
           </a:p>
         </p:txBody>
       </p:sp>
@@ -8877,7 +8739,6 @@
             <a:pPr algn="ctr">
               <a:buNone/>
             </a:pPr>
-            <a:endParaRPr/>
           </a:p>
         </p:txBody>
       </p:sp>
@@ -8890,7 +8751,7 @@
           <p:nvPr/>
         </p:nvPicPr>
         <p:blipFill>
-          <a:blip r:embed="rId3"/>
+          <a:blip r:embed="rId1"/>
           <a:stretch>
             <a:fillRect/>
           </a:stretch>
@@ -8995,6 +8856,20 @@
               </a:rPr>
               <a:t>01</a:t>
             </a:r>
+            <a:endParaRPr kumimoji="0" sz="13800" b="0" i="0" u="none" strike="noStrike" kern="1200" cap="none" spc="0" normalizeH="0" baseline="0" noProof="0" dirty="0">
+              <a:ln>
+                <a:noFill/>
+              </a:ln>
+              <a:solidFill>
+                <a:srgbClr val="F5F4F9"/>
+              </a:solidFill>
+              <a:effectLst/>
+              <a:uLnTx/>
+              <a:uFillTx/>
+              <a:latin typeface="Arial" panose="020B0604020202020204"/>
+              <a:ea typeface="华文中宋" panose="02010600040101010101" charset="-122"/>
+              <a:cs typeface="+mn-cs"/>
+            </a:endParaRPr>
           </a:p>
         </p:txBody>
       </p:sp>
@@ -9602,6 +9477,11 @@
               </a:rPr>
               <a:t>刘义群</a:t>
             </a:r>
+            <a:endParaRPr lang="zh-CN" altLang="en-US" sz="5400" b="1" dirty="0">
+              <a:solidFill>
+                <a:schemeClr val="bg1"/>
+              </a:solidFill>
+            </a:endParaRPr>
           </a:p>
           <a:p>
             <a:pPr algn="ctr">
@@ -9615,6 +9495,11 @@
               </a:rPr>
               <a:t>负责垂直搜索引擎</a:t>
             </a:r>
+            <a:endParaRPr lang="zh-CN" sz="5400" b="1" dirty="0">
+              <a:solidFill>
+                <a:schemeClr val="bg1"/>
+              </a:solidFill>
+            </a:endParaRPr>
           </a:p>
         </p:txBody>
       </p:sp>
@@ -9735,6 +9620,11 @@
               </a:rPr>
               <a:t>首页显示部分（新增前端功能）</a:t>
             </a:r>
+            <a:endParaRPr lang="zh-CN" altLang="en-US" sz="2550" b="1" dirty="0">
+              <a:solidFill>
+                <a:srgbClr val="2D4A33"/>
+              </a:solidFill>
+            </a:endParaRPr>
           </a:p>
         </p:txBody>
       </p:sp>
@@ -9814,6 +9704,11 @@
               </a:rPr>
               <a:t>页面</a:t>
             </a:r>
+            <a:endParaRPr sz="1650" b="1">
+              <a:solidFill>
+                <a:srgbClr val="2D4A33"/>
+              </a:solidFill>
+            </a:endParaRPr>
           </a:p>
         </p:txBody>
       </p:sp>
@@ -9874,6 +9769,11 @@
               </a:rPr>
               <a:t>搜索页面</a:t>
             </a:r>
+            <a:endParaRPr lang="zh-CN" altLang="en-US" sz="1350" b="0">
+              <a:solidFill>
+                <a:srgbClr val="1F2D22"/>
+              </a:solidFill>
+            </a:endParaRPr>
           </a:p>
           <a:p>
             <a:pPr algn="l">
@@ -9915,6 +9815,11 @@
               </a:rPr>
               <a:t>"</a:t>
             </a:r>
+            <a:endParaRPr lang="en-US" altLang="zh-CN" sz="1350" b="0">
+              <a:solidFill>
+                <a:srgbClr val="1F2D22"/>
+              </a:solidFill>
+            </a:endParaRPr>
           </a:p>
           <a:p>
             <a:pPr algn="l">
@@ -9932,6 +9837,11 @@
               </a:rPr>
               <a:t>结果区域：页面挂载即自动渲染图书列表，无需点击搜索</a:t>
             </a:r>
+            <a:endParaRPr lang="zh-CN" altLang="en-US" sz="1350" b="0">
+              <a:solidFill>
+                <a:srgbClr val="1F2D22"/>
+              </a:solidFill>
+            </a:endParaRPr>
           </a:p>
         </p:txBody>
       </p:sp>
@@ -10011,6 +9921,11 @@
               </a:rPr>
               <a:t>流程</a:t>
             </a:r>
+            <a:endParaRPr sz="1650" b="1">
+              <a:solidFill>
+                <a:srgbClr val="2D4A33"/>
+              </a:solidFill>
+            </a:endParaRPr>
           </a:p>
         </p:txBody>
       </p:sp>
@@ -10103,6 +10018,11 @@
               </a:rPr>
               <a:t> searchPage()</a:t>
             </a:r>
+            <a:endParaRPr lang="en-US" altLang="zh-CN" sz="1350" b="0">
+              <a:solidFill>
+                <a:srgbClr val="1F2D22"/>
+              </a:solidFill>
+            </a:endParaRPr>
           </a:p>
           <a:p>
             <a:pPr algn="l">
@@ -10168,6 +10088,11 @@
               </a:rPr>
               <a:t> /query</a:t>
             </a:r>
+            <a:endParaRPr lang="en-US" altLang="zh-CN" sz="1350" b="0">
+              <a:solidFill>
+                <a:srgbClr val="1F2D22"/>
+              </a:solidFill>
+            </a:endParaRPr>
           </a:p>
           <a:p>
             <a:pPr algn="l">
@@ -10249,6 +10174,11 @@
               </a:rPr>
               <a:t>随机排序</a:t>
             </a:r>
+            <a:endParaRPr lang="zh-CN" altLang="en-US" sz="1350" b="0">
+              <a:solidFill>
+                <a:srgbClr val="1F2D22"/>
+              </a:solidFill>
+            </a:endParaRPr>
           </a:p>
           <a:p>
             <a:pPr algn="l">
@@ -10282,6 +10212,11 @@
               </a:rPr>
               <a:t>返回结果，前端渲染图书列表</a:t>
             </a:r>
+            <a:endParaRPr lang="zh-CN" altLang="en-US" sz="1350" b="0">
+              <a:solidFill>
+                <a:srgbClr val="1F2D22"/>
+              </a:solidFill>
+            </a:endParaRPr>
           </a:p>
         </p:txBody>
       </p:sp>
@@ -10361,6 +10296,11 @@
               </a:rPr>
               <a:t>结果</a:t>
             </a:r>
+            <a:endParaRPr sz="1650" b="1">
+              <a:solidFill>
+                <a:srgbClr val="2D4A33"/>
+              </a:solidFill>
+            </a:endParaRPr>
           </a:p>
         </p:txBody>
       </p:sp>
@@ -10413,6 +10353,11 @@
               </a:rPr>
               <a:t>首页打开即展示随机图书，无需手动搜索</a:t>
             </a:r>
+            <a:endParaRPr lang="zh-CN" altLang="en-US" sz="1350" b="0">
+              <a:solidFill>
+                <a:srgbClr val="1F2D22"/>
+              </a:solidFill>
+            </a:endParaRPr>
           </a:p>
           <a:p>
             <a:pPr algn="l">
@@ -10446,6 +10391,11 @@
               </a:rPr>
               <a:t>索引中的书籍</a:t>
             </a:r>
+            <a:endParaRPr lang="zh-CN" altLang="en-US" sz="1350" b="0">
+              <a:solidFill>
+                <a:srgbClr val="1F2D22"/>
+              </a:solidFill>
+            </a:endParaRPr>
           </a:p>
           <a:p>
             <a:pPr algn="l">
@@ -10463,6 +10413,11 @@
               </a:rPr>
               <a:t>有关键词时仍按标题匹配精确搜索</a:t>
             </a:r>
+            <a:endParaRPr lang="zh-CN" altLang="en-US" sz="1350" b="0">
+              <a:solidFill>
+                <a:srgbClr val="1F2D22"/>
+              </a:solidFill>
+            </a:endParaRPr>
           </a:p>
         </p:txBody>
       </p:sp>
@@ -10583,6 +10538,11 @@
               </a:rPr>
               <a:t>价格排序部分</a:t>
             </a:r>
+            <a:endParaRPr lang="zh-CN" altLang="en-US" sz="2550" b="1" dirty="0">
+              <a:solidFill>
+                <a:srgbClr val="2D4A33"/>
+              </a:solidFill>
+            </a:endParaRPr>
           </a:p>
         </p:txBody>
       </p:sp>
@@ -10662,6 +10622,11 @@
               </a:rPr>
               <a:t>页面</a:t>
             </a:r>
+            <a:endParaRPr sz="1650" b="1">
+              <a:solidFill>
+                <a:srgbClr val="2D4A33"/>
+              </a:solidFill>
+            </a:endParaRPr>
           </a:p>
         </p:txBody>
       </p:sp>
@@ -10722,6 +10687,11 @@
               </a:rPr>
               <a:t>搜索页面</a:t>
             </a:r>
+            <a:endParaRPr lang="zh-CN" altLang="en-US" sz="1350" b="0">
+              <a:solidFill>
+                <a:srgbClr val="1F2D22"/>
+              </a:solidFill>
+            </a:endParaRPr>
           </a:p>
           <a:p>
             <a:pPr algn="l">
@@ -10763,6 +10733,11 @@
               </a:rPr>
               <a:t>文字变为可点击排序控件</a:t>
             </a:r>
+            <a:endParaRPr lang="zh-CN" altLang="en-US" sz="1350" b="0">
+              <a:solidFill>
+                <a:srgbClr val="1F2D22"/>
+              </a:solidFill>
+            </a:endParaRPr>
           </a:p>
           <a:p>
             <a:pPr algn="l">
@@ -10820,6 +10795,11 @@
               </a:rPr>
               <a:t>降序）</a:t>
             </a:r>
+            <a:endParaRPr lang="zh-CN" altLang="en-US" sz="1350" b="0">
+              <a:solidFill>
+                <a:srgbClr val="1F2D22"/>
+              </a:solidFill>
+            </a:endParaRPr>
           </a:p>
         </p:txBody>
       </p:sp>
@@ -10899,6 +10879,11 @@
               </a:rPr>
               <a:t>流程</a:t>
             </a:r>
+            <a:endParaRPr sz="1650" b="1">
+              <a:solidFill>
+                <a:srgbClr val="2D4A33"/>
+              </a:solidFill>
+            </a:endParaRPr>
           </a:p>
         </p:txBody>
       </p:sp>
@@ -11023,6 +11008,11 @@
               </a:rPr>
               <a:t> sortOrder</a:t>
             </a:r>
+            <a:endParaRPr lang="en-US" altLang="zh-CN" sz="1350" b="0">
+              <a:solidFill>
+                <a:srgbClr val="1F2D22"/>
+              </a:solidFill>
+            </a:endParaRPr>
           </a:p>
           <a:p>
             <a:pPr algn="l">
@@ -11080,6 +11070,11 @@
               </a:rPr>
               <a:t> /query</a:t>
             </a:r>
+            <a:endParaRPr lang="en-US" altLang="zh-CN" sz="1350" b="0">
+              <a:solidFill>
+                <a:srgbClr val="1F2D22"/>
+              </a:solidFill>
+            </a:endParaRPr>
           </a:p>
           <a:p>
             <a:pPr algn="l">
@@ -11121,6 +11116,11 @@
               </a:rPr>
               <a:t> ContentService</a:t>
             </a:r>
+            <a:endParaRPr lang="en-US" altLang="zh-CN" sz="1350" b="0">
+              <a:solidFill>
+                <a:srgbClr val="1F2D22"/>
+              </a:solidFill>
+            </a:endParaRPr>
           </a:p>
           <a:p>
             <a:pPr algn="l">
@@ -11170,6 +11170,11 @@
               </a:rPr>
               <a:t>端按价格字段排序</a:t>
             </a:r>
+            <a:endParaRPr lang="zh-CN" altLang="en-US" sz="1350" b="0">
+              <a:solidFill>
+                <a:srgbClr val="1F2D22"/>
+              </a:solidFill>
+            </a:endParaRPr>
           </a:p>
           <a:p>
             <a:pPr algn="l">
@@ -11203,6 +11208,11 @@
               </a:rPr>
               <a:t>排序结果返回前端，页面重新渲染</a:t>
             </a:r>
+            <a:endParaRPr lang="zh-CN" altLang="en-US" sz="1350" b="0">
+              <a:solidFill>
+                <a:srgbClr val="1F2D22"/>
+              </a:solidFill>
+            </a:endParaRPr>
           </a:p>
         </p:txBody>
       </p:sp>
@@ -11282,6 +11292,11 @@
               </a:rPr>
               <a:t>结果</a:t>
             </a:r>
+            <a:endParaRPr sz="1650" b="1">
+              <a:solidFill>
+                <a:srgbClr val="2D4A33"/>
+              </a:solidFill>
+            </a:endParaRPr>
           </a:p>
         </p:txBody>
       </p:sp>
@@ -11350,6 +11365,11 @@
               </a:rPr>
               <a:t>降序切换</a:t>
             </a:r>
+            <a:endParaRPr lang="zh-CN" altLang="en-US" sz="1350" b="0">
+              <a:solidFill>
+                <a:srgbClr val="1F2D22"/>
+              </a:solidFill>
+            </a:endParaRPr>
           </a:p>
           <a:p>
             <a:pPr algn="l">
@@ -11367,6 +11387,11 @@
               </a:rPr>
               <a:t>价格字段含非数字符号时自动解析为数值再排序</a:t>
             </a:r>
+            <a:endParaRPr lang="zh-CN" altLang="en-US" sz="1350" b="0">
+              <a:solidFill>
+                <a:srgbClr val="1F2D22"/>
+              </a:solidFill>
+            </a:endParaRPr>
           </a:p>
           <a:p>
             <a:pPr algn="l">
@@ -11400,6 +11425,11 @@
               </a:rPr>
               <a:t>索引结构</a:t>
             </a:r>
+            <a:endParaRPr lang="zh-CN" altLang="en-US" sz="1350" b="0">
+              <a:solidFill>
+                <a:srgbClr val="1F2D22"/>
+              </a:solidFill>
+            </a:endParaRPr>
           </a:p>
         </p:txBody>
       </p:sp>
@@ -11520,6 +11550,11 @@
               </a:rPr>
               <a:t>增加商品部分</a:t>
             </a:r>
+            <a:endParaRPr lang="zh-CN" altLang="en-US" sz="2550" b="1" dirty="0">
+              <a:solidFill>
+                <a:srgbClr val="2D4A33"/>
+              </a:solidFill>
+            </a:endParaRPr>
           </a:p>
         </p:txBody>
       </p:sp>
@@ -11599,6 +11634,11 @@
               </a:rPr>
               <a:t>流程</a:t>
             </a:r>
+            <a:endParaRPr sz="1650" b="1">
+              <a:solidFill>
+                <a:srgbClr val="2D4A33"/>
+              </a:solidFill>
+            </a:endParaRPr>
           </a:p>
         </p:txBody>
       </p:sp>
@@ -11715,6 +11755,11 @@
               </a:rPr>
               <a:t>中</a:t>
             </a:r>
+            <a:endParaRPr lang="zh-CN" altLang="en-US" sz="1350" b="0">
+              <a:solidFill>
+                <a:srgbClr val="1F2D22"/>
+              </a:solidFill>
+            </a:endParaRPr>
           </a:p>
           <a:p>
             <a:pPr algn="l">
@@ -11764,6 +11809,11 @@
               </a:rPr>
               <a:t>数据库中</a:t>
             </a:r>
+            <a:endParaRPr lang="zh-CN" altLang="en-US" sz="1350" b="0">
+              <a:solidFill>
+                <a:srgbClr val="1F2D22"/>
+              </a:solidFill>
+            </a:endParaRPr>
           </a:p>
         </p:txBody>
       </p:sp>
@@ -11847,6 +11897,11 @@
               </a:rPr>
               <a:t>结果</a:t>
             </a:r>
+            <a:endParaRPr sz="1650" b="1">
+              <a:solidFill>
+                <a:srgbClr val="2D4A33"/>
+              </a:solidFill>
+            </a:endParaRPr>
           </a:p>
         </p:txBody>
       </p:sp>
@@ -11919,6 +11974,11 @@
               </a:rPr>
               <a:t>的功能，并且可以通过搜索引擎查询到</a:t>
             </a:r>
+            <a:endParaRPr lang="zh-CN" altLang="en-US" sz="1350" b="0">
+              <a:solidFill>
+                <a:srgbClr val="1F2D22"/>
+              </a:solidFill>
+            </a:endParaRPr>
           </a:p>
         </p:txBody>
       </p:sp>
@@ -12121,14 +12181,50 @@
 </file>
 
 <file path=ppt/tags/tag1.xml><?xml version="1.0" encoding="utf-8"?>
-<p:tagLst xmlns:a="http://schemas.openxmlformats.org/drawingml/2006/main" xmlns:r="http://schemas.openxmlformats.org/officeDocument/2006/relationships" xmlns:p="http://schemas.openxmlformats.org/presentationml/2006/main">
+<p:tagLst xmlns:p="http://schemas.openxmlformats.org/presentationml/2006/main">
   <p:tag name="KSO_WM_DIAGRAM_VIRTUALLY_FRAME" val="{&quot;height&quot;:285.4,&quot;left&quot;:67.5,&quot;top&quot;:127.5,&quot;width&quot;:717}"/>
 </p:tagLst>
 </file>
 
 <file path=ppt/tags/tag2.xml><?xml version="1.0" encoding="utf-8"?>
-<p:tagLst xmlns:a="http://schemas.openxmlformats.org/drawingml/2006/main" xmlns:r="http://schemas.openxmlformats.org/officeDocument/2006/relationships" xmlns:p="http://schemas.openxmlformats.org/presentationml/2006/main">
+<p:tagLst xmlns:p="http://schemas.openxmlformats.org/presentationml/2006/main">
   <p:tag name="KSO_WM_DIAGRAM_VIRTUALLY_FRAME" val="{&quot;height&quot;:285.4,&quot;left&quot;:67.5,&quot;top&quot;:127.5,&quot;width&quot;:717}"/>
+</p:tagLst>
+</file>
+
+<file path=ppt/tags/tag3.xml><?xml version="1.0" encoding="utf-8"?>
+<p:tagLst xmlns:p="http://schemas.openxmlformats.org/presentationml/2006/main">
+  <p:tag name="KSO_WM_DIAGRAM_VIRTUALLY_FRAME" val="{&quot;height&quot;:373.2,&quot;left&quot;:67.5,&quot;top&quot;:78.35,&quot;width&quot;:825}"/>
+</p:tagLst>
+</file>
+
+<file path=ppt/tags/tag4.xml><?xml version="1.0" encoding="utf-8"?>
+<p:tagLst xmlns:p="http://schemas.openxmlformats.org/presentationml/2006/main">
+  <p:tag name="KSO_WM_DIAGRAM_VIRTUALLY_FRAME" val="{&quot;height&quot;:373.2,&quot;left&quot;:67.5,&quot;top&quot;:78.35,&quot;width&quot;:825}"/>
+</p:tagLst>
+</file>
+
+<file path=ppt/tags/tag5.xml><?xml version="1.0" encoding="utf-8"?>
+<p:tagLst xmlns:p="http://schemas.openxmlformats.org/presentationml/2006/main">
+  <p:tag name="KSO_WM_DIAGRAM_VIRTUALLY_FRAME" val="{&quot;height&quot;:373.2,&quot;left&quot;:67.5,&quot;top&quot;:78.35,&quot;width&quot;:825}"/>
+</p:tagLst>
+</file>
+
+<file path=ppt/tags/tag6.xml><?xml version="1.0" encoding="utf-8"?>
+<p:tagLst xmlns:p="http://schemas.openxmlformats.org/presentationml/2006/main">
+  <p:tag name="KSO_WM_DIAGRAM_VIRTUALLY_FRAME" val="{&quot;height&quot;:373.2,&quot;left&quot;:67.5,&quot;top&quot;:78.35,&quot;width&quot;:825}"/>
+</p:tagLst>
+</file>
+
+<file path=ppt/tags/tag7.xml><?xml version="1.0" encoding="utf-8"?>
+<p:tagLst xmlns:p="http://schemas.openxmlformats.org/presentationml/2006/main">
+  <p:tag name="KSO_WM_DIAGRAM_VIRTUALLY_FRAME" val="{&quot;height&quot;:373.2,&quot;left&quot;:67.5,&quot;top&quot;:78.35,&quot;width&quot;:825}"/>
+</p:tagLst>
+</file>
+
+<file path=ppt/tags/tag8.xml><?xml version="1.0" encoding="utf-8"?>
+<p:tagLst xmlns:p="http://schemas.openxmlformats.org/presentationml/2006/main">
+  <p:tag name="KSO_WM_DIAGRAM_VIRTUALLY_FRAME" val="{&quot;height&quot;:373.2,&quot;left&quot;:67.5,&quot;top&quot;:78.35,&quot;width&quot;:825}"/>
 </p:tagLst>
 </file>
 
@@ -12274,8 +12370,6 @@
       </a:bgFillStyleLst>
     </a:fmtScheme>
   </a:themeElements>
-  <a:objectDefaults/>
-  <a:extraClrSchemeLst/>
   <a:extLst>
     <a:ext uri="{05A4C25C-085E-4340-85A3-A5531E510DB2}">
       <thm15:themeFamily xmlns:thm15="http://schemas.microsoft.com/office/thememl/2012/main" name="Office Theme" id="{62F939B6-93AF-4DB8-9C6B-D6C7DFDC589F}" vid="{4A3C46E8-61CC-4603-A589-7422A47A8E4A}"/>
@@ -12426,8 +12520,6 @@
       </a:bgFillStyleLst>
     </a:fmtScheme>
   </a:themeElements>
-  <a:objectDefaults/>
-  <a:extraClrSchemeLst/>
   <a:extLst>
     <a:ext uri="{05A4C25C-085E-4340-85A3-A5531E510DB2}">
       <thm15:themeFamily xmlns:thm15="http://schemas.microsoft.com/office/thememl/2012/main" name="Office Theme" id="{62F939B6-93AF-4DB8-9C6B-D6C7DFDC589F}" vid="{4A3C46E8-61CC-4603-A589-7422A47A8E4A}"/>

--- a/report/搜索引擎总结.pptx
+++ b/report/搜索引擎总结.pptx
@@ -5,26 +5,27 @@
     <p:sldMasterId id="2147483648" r:id="rId1"/>
   </p:sldMasterIdLst>
   <p:notesMasterIdLst>
-    <p:notesMasterId r:id="rId4"/>
+    <p:notesMasterId r:id="rId20"/>
   </p:notesMasterIdLst>
   <p:sldIdLst>
-    <p:sldId id="256" r:id="rId3"/>
-    <p:sldId id="273" r:id="rId5"/>
-    <p:sldId id="258" r:id="rId6"/>
-    <p:sldId id="260" r:id="rId7"/>
-    <p:sldId id="262" r:id="rId8"/>
-    <p:sldId id="263" r:id="rId9"/>
-    <p:sldId id="274" r:id="rId10"/>
-    <p:sldId id="276" r:id="rId11"/>
-    <p:sldId id="270" r:id="rId12"/>
-    <p:sldId id="259" r:id="rId13"/>
-    <p:sldId id="271" r:id="rId14"/>
-    <p:sldId id="279" r:id="rId15"/>
-    <p:sldId id="272" r:id="rId16"/>
-    <p:sldId id="261" r:id="rId17"/>
-    <p:sldId id="277" r:id="rId18"/>
-    <p:sldId id="278" r:id="rId19"/>
-    <p:sldId id="268" r:id="rId20"/>
+    <p:sldId id="256" r:id="rId2"/>
+    <p:sldId id="273" r:id="rId3"/>
+    <p:sldId id="280" r:id="rId4"/>
+    <p:sldId id="258" r:id="rId5"/>
+    <p:sldId id="260" r:id="rId6"/>
+    <p:sldId id="262" r:id="rId7"/>
+    <p:sldId id="263" r:id="rId8"/>
+    <p:sldId id="274" r:id="rId9"/>
+    <p:sldId id="276" r:id="rId10"/>
+    <p:sldId id="270" r:id="rId11"/>
+    <p:sldId id="259" r:id="rId12"/>
+    <p:sldId id="271" r:id="rId13"/>
+    <p:sldId id="279" r:id="rId14"/>
+    <p:sldId id="272" r:id="rId15"/>
+    <p:sldId id="261" r:id="rId16"/>
+    <p:sldId id="277" r:id="rId17"/>
+    <p:sldId id="278" r:id="rId18"/>
+    <p:sldId id="268" r:id="rId19"/>
   </p:sldIdLst>
   <p:sldSz cx="12192000" cy="6858000"/>
   <p:notesSz cx="6858000" cy="9144000"/>
@@ -123,6 +124,11 @@
       </a:defRPr>
     </a:lvl9pPr>
   </p:defaultTextStyle>
+  <p:extLst>
+    <p:ext uri="{EFAFB233-063F-42B5-8137-9DF3F51BA10A}">
+      <p15:sldGuideLst xmlns:p15="http://schemas.microsoft.com/office/powerpoint/2012/main"/>
+    </p:ext>
+  </p:extLst>
 </p:presentation>
 </file>
 
@@ -166,7 +172,9 @@
         <p:txBody>
           <a:bodyPr/>
           <a:lstStyle/>
-          <a:p/>
+          <a:p>
+            <a:endParaRPr/>
+          </a:p>
         </p:txBody>
       </p:sp>
       <p:sp>
@@ -187,7 +195,9 @@
         <p:txBody>
           <a:bodyPr/>
           <a:lstStyle/>
-          <a:p/>
+          <a:p>
+            <a:endParaRPr/>
+          </a:p>
         </p:txBody>
       </p:sp>
       <p:sp>
@@ -208,7 +218,9 @@
         <p:txBody>
           <a:bodyPr/>
           <a:lstStyle/>
-          <a:p/>
+          <a:p>
+            <a:endParaRPr/>
+          </a:p>
         </p:txBody>
       </p:sp>
       <p:sp>
@@ -229,7 +241,9 @@
         <p:txBody>
           <a:bodyPr/>
           <a:lstStyle/>
-          <a:p/>
+          <a:p>
+            <a:endParaRPr/>
+          </a:p>
         </p:txBody>
       </p:sp>
       <p:sp>
@@ -250,7 +264,9 @@
         <p:txBody>
           <a:bodyPr/>
           <a:lstStyle/>
-          <a:p/>
+          <a:p>
+            <a:endParaRPr/>
+          </a:p>
         </p:txBody>
       </p:sp>
       <p:sp>
@@ -271,7 +287,9 @@
         <p:txBody>
           <a:bodyPr/>
           <a:lstStyle/>
-          <a:p/>
+          <a:p>
+            <a:endParaRPr/>
+          </a:p>
         </p:txBody>
       </p:sp>
     </p:spTree>
@@ -328,7 +346,9 @@
         <p:txBody>
           <a:bodyPr/>
           <a:lstStyle/>
-          <a:p/>
+          <a:p>
+            <a:endParaRPr/>
+          </a:p>
         </p:txBody>
       </p:sp>
       <p:sp>
@@ -345,7 +365,9 @@
         <p:txBody>
           <a:bodyPr/>
           <a:lstStyle/>
-          <a:p/>
+          <a:p>
+            <a:endParaRPr/>
+          </a:p>
         </p:txBody>
       </p:sp>
     </p:spTree>
@@ -399,7 +421,9 @@
         <p:txBody>
           <a:bodyPr/>
           <a:lstStyle/>
-          <a:p/>
+          <a:p>
+            <a:endParaRPr/>
+          </a:p>
         </p:txBody>
       </p:sp>
       <p:sp>
@@ -416,7 +440,38 @@
         <p:txBody>
           <a:bodyPr/>
           <a:lstStyle/>
-          <a:p/>
+          <a:p>
+            <a:pPr marL="0" marR="0" lvl="0" indent="0" algn="l" defTabSz="914400" eaLnBrk="1" fontAlgn="auto" latinLnBrk="0" hangingPunct="1">
+              <a:lnSpc>
+                <a:spcPct val="100000"/>
+              </a:lnSpc>
+              <a:spcBef>
+                <a:spcPts val="0"/>
+              </a:spcBef>
+              <a:spcAft>
+                <a:spcPts val="0"/>
+              </a:spcAft>
+              <a:buClrTx/>
+              <a:buSzTx/>
+              <a:buFontTx/>
+              <a:buNone/>
+              <a:defRPr/>
+            </a:pPr>
+            <a:endParaRPr kumimoji="0" sz="1800" b="0" i="0" u="none" strike="noStrike" kern="1200" cap="none" spc="0" normalizeH="0" baseline="0" noProof="0">
+              <a:ln>
+                <a:noFill/>
+              </a:ln>
+              <a:solidFill>
+                <a:prstClr val="black"/>
+              </a:solidFill>
+              <a:effectLst/>
+              <a:uLnTx/>
+              <a:uFillTx/>
+              <a:latin typeface="Arial" panose="020B0604020202020204"/>
+              <a:ea typeface="华文中宋" panose="02010600040101010101" charset="-122"/>
+              <a:cs typeface="+mn-cs"/>
+            </a:endParaRPr>
+          </a:p>
         </p:txBody>
       </p:sp>
     </p:spTree>
@@ -470,7 +525,9 @@
         <p:txBody>
           <a:bodyPr/>
           <a:lstStyle/>
-          <a:p/>
+          <a:p>
+            <a:endParaRPr/>
+          </a:p>
         </p:txBody>
       </p:sp>
       <p:sp>
@@ -488,36 +545,7 @@
           <a:bodyPr/>
           <a:lstStyle/>
           <a:p>
-            <a:pPr marL="0" marR="0" lvl="0" indent="0" algn="l" defTabSz="914400" eaLnBrk="1" fontAlgn="auto" latinLnBrk="0" hangingPunct="1">
-              <a:lnSpc>
-                <a:spcPct val="100000"/>
-              </a:lnSpc>
-              <a:spcBef>
-                <a:spcPts val="0"/>
-              </a:spcBef>
-              <a:spcAft>
-                <a:spcPts val="0"/>
-              </a:spcAft>
-              <a:buClrTx/>
-              <a:buSzTx/>
-              <a:buFontTx/>
-              <a:buNone/>
-              <a:defRPr/>
-            </a:pPr>
-            <a:endParaRPr kumimoji="0" sz="1800" b="0" i="0" u="none" strike="noStrike" kern="1200" cap="none" spc="0" normalizeH="0" baseline="0" noProof="0">
-              <a:ln>
-                <a:noFill/>
-              </a:ln>
-              <a:solidFill>
-                <a:prstClr val="black"/>
-              </a:solidFill>
-              <a:effectLst/>
-              <a:uLnTx/>
-              <a:uFillTx/>
-              <a:latin typeface="Arial" panose="020B0604020202020204"/>
-              <a:ea typeface="华文中宋" panose="02010600040101010101" charset="-122"/>
-              <a:cs typeface="+mn-cs"/>
-            </a:endParaRPr>
+            <a:endParaRPr/>
           </a:p>
         </p:txBody>
       </p:sp>
@@ -572,7 +600,9 @@
         <p:txBody>
           <a:bodyPr/>
           <a:lstStyle/>
-          <a:p/>
+          <a:p>
+            <a:endParaRPr/>
+          </a:p>
         </p:txBody>
       </p:sp>
       <p:sp>
@@ -589,7 +619,38 @@
         <p:txBody>
           <a:bodyPr/>
           <a:lstStyle/>
-          <a:p/>
+          <a:p>
+            <a:pPr marL="0" marR="0" lvl="0" indent="0" algn="l" defTabSz="914400" eaLnBrk="1" fontAlgn="auto" latinLnBrk="0" hangingPunct="1">
+              <a:lnSpc>
+                <a:spcPct val="100000"/>
+              </a:lnSpc>
+              <a:spcBef>
+                <a:spcPts val="0"/>
+              </a:spcBef>
+              <a:spcAft>
+                <a:spcPts val="0"/>
+              </a:spcAft>
+              <a:buClrTx/>
+              <a:buSzTx/>
+              <a:buFontTx/>
+              <a:buNone/>
+              <a:defRPr/>
+            </a:pPr>
+            <a:endParaRPr kumimoji="0" sz="1800" b="0" i="0" u="none" strike="noStrike" kern="1200" cap="none" spc="0" normalizeH="0" baseline="0" noProof="0">
+              <a:ln>
+                <a:noFill/>
+              </a:ln>
+              <a:solidFill>
+                <a:prstClr val="black"/>
+              </a:solidFill>
+              <a:effectLst/>
+              <a:uLnTx/>
+              <a:uFillTx/>
+              <a:latin typeface="Arial" panose="020B0604020202020204"/>
+              <a:ea typeface="华文中宋" panose="02010600040101010101" charset="-122"/>
+              <a:cs typeface="+mn-cs"/>
+            </a:endParaRPr>
+          </a:p>
         </p:txBody>
       </p:sp>
     </p:spTree>
@@ -643,7 +704,9 @@
         <p:txBody>
           <a:bodyPr/>
           <a:lstStyle/>
-          <a:p/>
+          <a:p>
+            <a:endParaRPr/>
+          </a:p>
         </p:txBody>
       </p:sp>
       <p:sp>
@@ -661,36 +724,7 @@
           <a:bodyPr/>
           <a:lstStyle/>
           <a:p>
-            <a:pPr marL="0" marR="0" lvl="0" indent="0" algn="l" defTabSz="914400" eaLnBrk="1" fontAlgn="auto" latinLnBrk="0" hangingPunct="1">
-              <a:lnSpc>
-                <a:spcPct val="100000"/>
-              </a:lnSpc>
-              <a:spcBef>
-                <a:spcPts val="0"/>
-              </a:spcBef>
-              <a:spcAft>
-                <a:spcPts val="0"/>
-              </a:spcAft>
-              <a:buClrTx/>
-              <a:buSzTx/>
-              <a:buFontTx/>
-              <a:buNone/>
-              <a:defRPr/>
-            </a:pPr>
-            <a:endParaRPr kumimoji="0" sz="1800" b="0" i="0" u="none" strike="noStrike" kern="1200" cap="none" spc="0" normalizeH="0" baseline="0" noProof="0">
-              <a:ln>
-                <a:noFill/>
-              </a:ln>
-              <a:solidFill>
-                <a:prstClr val="black"/>
-              </a:solidFill>
-              <a:effectLst/>
-              <a:uLnTx/>
-              <a:uFillTx/>
-              <a:latin typeface="Arial" panose="020B0604020202020204"/>
-              <a:ea typeface="华文中宋" panose="02010600040101010101" charset="-122"/>
-              <a:cs typeface="+mn-cs"/>
-            </a:endParaRPr>
+            <a:endParaRPr/>
           </a:p>
         </p:txBody>
       </p:sp>
@@ -745,7 +779,9 @@
         <p:txBody>
           <a:bodyPr/>
           <a:lstStyle/>
-          <a:p/>
+          <a:p>
+            <a:endParaRPr/>
+          </a:p>
         </p:txBody>
       </p:sp>
       <p:sp>
@@ -762,7 +798,38 @@
         <p:txBody>
           <a:bodyPr/>
           <a:lstStyle/>
-          <a:p/>
+          <a:p>
+            <a:pPr marL="0" marR="0" lvl="0" indent="0" algn="l" defTabSz="914400" eaLnBrk="1" fontAlgn="auto" latinLnBrk="0" hangingPunct="1">
+              <a:lnSpc>
+                <a:spcPct val="100000"/>
+              </a:lnSpc>
+              <a:spcBef>
+                <a:spcPts val="0"/>
+              </a:spcBef>
+              <a:spcAft>
+                <a:spcPts val="0"/>
+              </a:spcAft>
+              <a:buClrTx/>
+              <a:buSzTx/>
+              <a:buFontTx/>
+              <a:buNone/>
+              <a:defRPr/>
+            </a:pPr>
+            <a:endParaRPr kumimoji="0" sz="1800" b="0" i="0" u="none" strike="noStrike" kern="1200" cap="none" spc="0" normalizeH="0" baseline="0" noProof="0">
+              <a:ln>
+                <a:noFill/>
+              </a:ln>
+              <a:solidFill>
+                <a:prstClr val="black"/>
+              </a:solidFill>
+              <a:effectLst/>
+              <a:uLnTx/>
+              <a:uFillTx/>
+              <a:latin typeface="Arial" panose="020B0604020202020204"/>
+              <a:ea typeface="华文中宋" panose="02010600040101010101" charset="-122"/>
+              <a:cs typeface="+mn-cs"/>
+            </a:endParaRPr>
+          </a:p>
         </p:txBody>
       </p:sp>
     </p:spTree>
@@ -816,7 +883,9 @@
         <p:txBody>
           <a:bodyPr/>
           <a:lstStyle/>
-          <a:p/>
+          <a:p>
+            <a:endParaRPr/>
+          </a:p>
         </p:txBody>
       </p:sp>
       <p:sp>
@@ -834,36 +903,7 @@
           <a:bodyPr/>
           <a:lstStyle/>
           <a:p>
-            <a:pPr marL="0" marR="0" lvl="0" indent="0" algn="l" defTabSz="914400" eaLnBrk="1" fontAlgn="auto" latinLnBrk="0" hangingPunct="1">
-              <a:lnSpc>
-                <a:spcPct val="100000"/>
-              </a:lnSpc>
-              <a:spcBef>
-                <a:spcPts val="0"/>
-              </a:spcBef>
-              <a:spcAft>
-                <a:spcPts val="0"/>
-              </a:spcAft>
-              <a:buClrTx/>
-              <a:buSzTx/>
-              <a:buFontTx/>
-              <a:buNone/>
-              <a:defRPr/>
-            </a:pPr>
-            <a:endParaRPr kumimoji="0" sz="1800" b="0" i="0" u="none" strike="noStrike" kern="1200" cap="none" spc="0" normalizeH="0" baseline="0" noProof="0">
-              <a:ln>
-                <a:noFill/>
-              </a:ln>
-              <a:solidFill>
-                <a:prstClr val="black"/>
-              </a:solidFill>
-              <a:effectLst/>
-              <a:uLnTx/>
-              <a:uFillTx/>
-              <a:latin typeface="Arial" panose="020B0604020202020204"/>
-              <a:ea typeface="华文中宋" panose="02010600040101010101" charset="-122"/>
-              <a:cs typeface="+mn-cs"/>
-            </a:endParaRPr>
+            <a:endParaRPr/>
           </a:p>
         </p:txBody>
       </p:sp>
@@ -918,7 +958,9 @@
         <p:txBody>
           <a:bodyPr/>
           <a:lstStyle/>
-          <a:p/>
+          <a:p>
+            <a:endParaRPr/>
+          </a:p>
         </p:txBody>
       </p:sp>
       <p:sp>
@@ -935,7 +977,38 @@
         <p:txBody>
           <a:bodyPr/>
           <a:lstStyle/>
-          <a:p/>
+          <a:p>
+            <a:pPr marL="0" marR="0" lvl="0" indent="0" algn="l" defTabSz="914400" eaLnBrk="1" fontAlgn="auto" latinLnBrk="0" hangingPunct="1">
+              <a:lnSpc>
+                <a:spcPct val="100000"/>
+              </a:lnSpc>
+              <a:spcBef>
+                <a:spcPts val="0"/>
+              </a:spcBef>
+              <a:spcAft>
+                <a:spcPts val="0"/>
+              </a:spcAft>
+              <a:buClrTx/>
+              <a:buSzTx/>
+              <a:buFontTx/>
+              <a:buNone/>
+              <a:defRPr/>
+            </a:pPr>
+            <a:endParaRPr kumimoji="0" sz="1800" b="0" i="0" u="none" strike="noStrike" kern="1200" cap="none" spc="0" normalizeH="0" baseline="0" noProof="0">
+              <a:ln>
+                <a:noFill/>
+              </a:ln>
+              <a:solidFill>
+                <a:prstClr val="black"/>
+              </a:solidFill>
+              <a:effectLst/>
+              <a:uLnTx/>
+              <a:uFillTx/>
+              <a:latin typeface="Arial" panose="020B0604020202020204"/>
+              <a:ea typeface="华文中宋" panose="02010600040101010101" charset="-122"/>
+              <a:cs typeface="+mn-cs"/>
+            </a:endParaRPr>
+          </a:p>
         </p:txBody>
       </p:sp>
     </p:spTree>
@@ -989,7 +1062,9 @@
         <p:txBody>
           <a:bodyPr/>
           <a:lstStyle/>
-          <a:p/>
+          <a:p>
+            <a:endParaRPr/>
+          </a:p>
         </p:txBody>
       </p:sp>
       <p:sp>
@@ -1006,7 +1081,84 @@
         <p:txBody>
           <a:bodyPr/>
           <a:lstStyle/>
-          <a:p/>
+          <a:p>
+            <a:endParaRPr/>
+          </a:p>
+        </p:txBody>
+      </p:sp>
+    </p:spTree>
+  </p:cSld>
+  <p:clrMapOvr>
+    <a:masterClrMapping/>
+  </p:clrMapOvr>
+</p:notes>
+</file>
+
+<file path=ppt/notesSlides/notesSlide18.xml><?xml version="1.0" encoding="utf-8"?>
+<p:notes xmlns:a="http://schemas.openxmlformats.org/drawingml/2006/main" xmlns:r="http://schemas.openxmlformats.org/officeDocument/2006/relationships" xmlns:p="http://schemas.openxmlformats.org/presentationml/2006/main">
+  <p:cSld>
+    <p:spTree>
+      <p:nvGrpSpPr>
+        <p:cNvPr id="1" name=""/>
+        <p:cNvGrpSpPr/>
+        <p:nvPr/>
+      </p:nvGrpSpPr>
+      <p:grpSpPr>
+        <a:xfrm>
+          <a:off x="0" y="0"/>
+          <a:ext cx="0" cy="0"/>
+          <a:chOff x="0" y="0"/>
+          <a:chExt cx="0" cy="0"/>
+        </a:xfrm>
+      </p:grpSpPr>
+      <p:sp>
+        <p:nvSpPr>
+          <p:cNvPr id="2" name="Slide Image Placeholder 1"/>
+          <p:cNvSpPr>
+            <a:spLocks noGrp="1" noRot="1" noChangeAspect="1"/>
+          </p:cNvSpPr>
+          <p:nvPr>
+            <p:ph type="sldImg"/>
+          </p:nvPr>
+        </p:nvSpPr>
+        <p:spPr/>
+      </p:sp>
+      <p:sp>
+        <p:nvSpPr>
+          <p:cNvPr id="3" name="Notes Placeholder 2"/>
+          <p:cNvSpPr>
+            <a:spLocks noGrp="1"/>
+          </p:cNvSpPr>
+          <p:nvPr>
+            <p:ph type="body" idx="1"/>
+          </p:nvPr>
+        </p:nvSpPr>
+        <p:spPr/>
+        <p:txBody>
+          <a:bodyPr/>
+          <a:lstStyle/>
+          <a:p>
+            <a:endParaRPr/>
+          </a:p>
+        </p:txBody>
+      </p:sp>
+      <p:sp>
+        <p:nvSpPr>
+          <p:cNvPr id="4" name="Slide Number Placeholder 3"/>
+          <p:cNvSpPr>
+            <a:spLocks noGrp="1"/>
+          </p:cNvSpPr>
+          <p:nvPr>
+            <p:ph type="sldNum" idx="5"/>
+          </p:nvPr>
+        </p:nvSpPr>
+        <p:spPr/>
+        <p:txBody>
+          <a:bodyPr/>
+          <a:lstStyle/>
+          <a:p>
+            <a:endParaRPr/>
+          </a:p>
         </p:txBody>
       </p:sp>
     </p:spTree>
@@ -1060,7 +1212,9 @@
         <p:txBody>
           <a:bodyPr/>
           <a:lstStyle/>
-          <a:p/>
+          <a:p>
+            <a:endParaRPr/>
+          </a:p>
         </p:txBody>
       </p:sp>
       <p:sp>
@@ -1162,7 +1316,9 @@
         <p:txBody>
           <a:bodyPr/>
           <a:lstStyle/>
-          <a:p/>
+          <a:p>
+            <a:endParaRPr/>
+          </a:p>
         </p:txBody>
       </p:sp>
       <p:sp>
@@ -1179,10 +1335,17 @@
         <p:txBody>
           <a:bodyPr/>
           <a:lstStyle/>
-          <a:p/>
+          <a:p>
+            <a:endParaRPr/>
+          </a:p>
         </p:txBody>
       </p:sp>
     </p:spTree>
+    <p:extLst>
+      <p:ext uri="{BB962C8B-B14F-4D97-AF65-F5344CB8AC3E}">
+        <p14:creationId xmlns:p14="http://schemas.microsoft.com/office/powerpoint/2010/main" val="1375943346"/>
+      </p:ext>
+    </p:extLst>
   </p:cSld>
   <p:clrMapOvr>
     <a:masterClrMapping/>
@@ -1233,7 +1396,9 @@
         <p:txBody>
           <a:bodyPr/>
           <a:lstStyle/>
-          <a:p/>
+          <a:p>
+            <a:endParaRPr/>
+          </a:p>
         </p:txBody>
       </p:sp>
       <p:sp>
@@ -1250,7 +1415,9 @@
         <p:txBody>
           <a:bodyPr/>
           <a:lstStyle/>
-          <a:p/>
+          <a:p>
+            <a:endParaRPr/>
+          </a:p>
         </p:txBody>
       </p:sp>
     </p:spTree>
@@ -1304,7 +1471,9 @@
         <p:txBody>
           <a:bodyPr/>
           <a:lstStyle/>
-          <a:p/>
+          <a:p>
+            <a:endParaRPr/>
+          </a:p>
         </p:txBody>
       </p:sp>
       <p:sp>
@@ -1321,7 +1490,9 @@
         <p:txBody>
           <a:bodyPr/>
           <a:lstStyle/>
-          <a:p/>
+          <a:p>
+            <a:endParaRPr/>
+          </a:p>
         </p:txBody>
       </p:sp>
     </p:spTree>
@@ -1375,7 +1546,9 @@
         <p:txBody>
           <a:bodyPr/>
           <a:lstStyle/>
-          <a:p/>
+          <a:p>
+            <a:endParaRPr/>
+          </a:p>
         </p:txBody>
       </p:sp>
       <p:sp>
@@ -1392,7 +1565,9 @@
         <p:txBody>
           <a:bodyPr/>
           <a:lstStyle/>
-          <a:p/>
+          <a:p>
+            <a:endParaRPr/>
+          </a:p>
         </p:txBody>
       </p:sp>
     </p:spTree>
@@ -1446,7 +1621,9 @@
         <p:txBody>
           <a:bodyPr/>
           <a:lstStyle/>
-          <a:p/>
+          <a:p>
+            <a:endParaRPr/>
+          </a:p>
         </p:txBody>
       </p:sp>
       <p:sp>
@@ -1463,7 +1640,9 @@
         <p:txBody>
           <a:bodyPr/>
           <a:lstStyle/>
-          <a:p/>
+          <a:p>
+            <a:endParaRPr/>
+          </a:p>
         </p:txBody>
       </p:sp>
     </p:spTree>
@@ -1517,7 +1696,9 @@
         <p:txBody>
           <a:bodyPr/>
           <a:lstStyle/>
-          <a:p/>
+          <a:p>
+            <a:endParaRPr/>
+          </a:p>
         </p:txBody>
       </p:sp>
       <p:sp>
@@ -1534,7 +1715,9 @@
         <p:txBody>
           <a:bodyPr/>
           <a:lstStyle/>
-          <a:p/>
+          <a:p>
+            <a:endParaRPr/>
+          </a:p>
         </p:txBody>
       </p:sp>
     </p:spTree>
@@ -1588,7 +1771,9 @@
         <p:txBody>
           <a:bodyPr/>
           <a:lstStyle/>
-          <a:p/>
+          <a:p>
+            <a:endParaRPr/>
+          </a:p>
         </p:txBody>
       </p:sp>
       <p:sp>
@@ -1606,36 +1791,7 @@
           <a:bodyPr/>
           <a:lstStyle/>
           <a:p>
-            <a:pPr marL="0" marR="0" lvl="0" indent="0" algn="l" defTabSz="914400" eaLnBrk="1" fontAlgn="auto" latinLnBrk="0" hangingPunct="1">
-              <a:lnSpc>
-                <a:spcPct val="100000"/>
-              </a:lnSpc>
-              <a:spcBef>
-                <a:spcPts val="0"/>
-              </a:spcBef>
-              <a:spcAft>
-                <a:spcPts val="0"/>
-              </a:spcAft>
-              <a:buClrTx/>
-              <a:buSzTx/>
-              <a:buFontTx/>
-              <a:buNone/>
-              <a:defRPr/>
-            </a:pPr>
-            <a:endParaRPr kumimoji="0" sz="1800" b="0" i="0" u="none" strike="noStrike" kern="1200" cap="none" spc="0" normalizeH="0" baseline="0" noProof="0">
-              <a:ln>
-                <a:noFill/>
-              </a:ln>
-              <a:solidFill>
-                <a:prstClr val="black"/>
-              </a:solidFill>
-              <a:effectLst/>
-              <a:uLnTx/>
-              <a:uFillTx/>
-              <a:latin typeface="Arial" panose="020B0604020202020204"/>
-              <a:ea typeface="华文中宋" panose="02010600040101010101" charset="-122"/>
-              <a:cs typeface="+mn-cs"/>
-            </a:endParaRPr>
+            <a:endParaRPr/>
           </a:p>
         </p:txBody>
       </p:sp>
@@ -1775,6 +1931,7 @@
           <a:p>
             <a:fld id="{A653A8F1-9EDF-49EF-A14D-E495AD864F8A}" type="datetimeFigureOut">
               <a:rPr lang="zh-CN" altLang="en-US"/>
+              <a:t>2026/6/17</a:t>
             </a:fld>
             <a:endParaRPr lang="zh-CN" altLang="en-US"/>
           </a:p>
@@ -1794,7 +1951,9 @@
         <p:txBody>
           <a:bodyPr/>
           <a:lstStyle/>
-          <a:p/>
+          <a:p>
+            <a:endParaRPr/>
+          </a:p>
         </p:txBody>
       </p:sp>
       <p:sp>
@@ -1814,6 +1973,7 @@
           <a:p>
             <a:fld id="{43A13857-8FE2-426A-A37B-64DF65062EF2}" type="slidenum">
               <a:rPr/>
+              <a:t>‹#›</a:t>
             </a:fld>
             <a:endParaRPr/>
           </a:p>
@@ -1938,6 +2098,7 @@
           <a:p>
             <a:fld id="{A653A8F1-9EDF-49EF-A14D-E495AD864F8A}" type="datetimeFigureOut">
               <a:rPr lang="zh-CN" altLang="en-US"/>
+              <a:t>2026/6/17</a:t>
             </a:fld>
             <a:endParaRPr lang="zh-CN" altLang="en-US"/>
           </a:p>
@@ -1957,7 +2118,9 @@
         <p:txBody>
           <a:bodyPr/>
           <a:lstStyle/>
-          <a:p/>
+          <a:p>
+            <a:endParaRPr/>
+          </a:p>
         </p:txBody>
       </p:sp>
       <p:sp>
@@ -1977,6 +2140,7 @@
           <a:p>
             <a:fld id="{43A13857-8FE2-426A-A37B-64DF65062EF2}" type="slidenum">
               <a:rPr/>
+              <a:t>‹#›</a:t>
             </a:fld>
             <a:endParaRPr/>
           </a:p>
@@ -2111,6 +2275,7 @@
           <a:p>
             <a:fld id="{A653A8F1-9EDF-49EF-A14D-E495AD864F8A}" type="datetimeFigureOut">
               <a:rPr lang="zh-CN" altLang="en-US"/>
+              <a:t>2026/6/17</a:t>
             </a:fld>
             <a:endParaRPr lang="zh-CN" altLang="en-US"/>
           </a:p>
@@ -2130,7 +2295,9 @@
         <p:txBody>
           <a:bodyPr/>
           <a:lstStyle/>
-          <a:p/>
+          <a:p>
+            <a:endParaRPr/>
+          </a:p>
         </p:txBody>
       </p:sp>
       <p:sp>
@@ -2150,6 +2317,7 @@
           <a:p>
             <a:fld id="{43A13857-8FE2-426A-A37B-64DF65062EF2}" type="slidenum">
               <a:rPr/>
+              <a:t>‹#›</a:t>
             </a:fld>
             <a:endParaRPr/>
           </a:p>
@@ -2274,6 +2442,7 @@
           <a:p>
             <a:fld id="{A653A8F1-9EDF-49EF-A14D-E495AD864F8A}" type="datetimeFigureOut">
               <a:rPr lang="zh-CN" altLang="en-US"/>
+              <a:t>2026/6/17</a:t>
             </a:fld>
             <a:endParaRPr lang="zh-CN" altLang="en-US"/>
           </a:p>
@@ -2293,7 +2462,9 @@
         <p:txBody>
           <a:bodyPr/>
           <a:lstStyle/>
-          <a:p/>
+          <a:p>
+            <a:endParaRPr/>
+          </a:p>
         </p:txBody>
       </p:sp>
       <p:sp>
@@ -2313,6 +2484,7 @@
           <a:p>
             <a:fld id="{43A13857-8FE2-426A-A37B-64DF65062EF2}" type="slidenum">
               <a:rPr/>
+              <a:t>‹#›</a:t>
             </a:fld>
             <a:endParaRPr/>
           </a:p>
@@ -2511,6 +2683,7 @@
           <a:p>
             <a:fld id="{A653A8F1-9EDF-49EF-A14D-E495AD864F8A}" type="datetimeFigureOut">
               <a:rPr lang="zh-CN" altLang="en-US"/>
+              <a:t>2026/6/17</a:t>
             </a:fld>
             <a:endParaRPr lang="zh-CN" altLang="en-US"/>
           </a:p>
@@ -2530,7 +2703,9 @@
         <p:txBody>
           <a:bodyPr/>
           <a:lstStyle/>
-          <a:p/>
+          <a:p>
+            <a:endParaRPr/>
+          </a:p>
         </p:txBody>
       </p:sp>
       <p:sp>
@@ -2550,6 +2725,7 @@
           <a:p>
             <a:fld id="{43A13857-8FE2-426A-A37B-64DF65062EF2}" type="slidenum">
               <a:rPr/>
+              <a:t>‹#›</a:t>
             </a:fld>
             <a:endParaRPr/>
           </a:p>
@@ -2740,6 +2916,7 @@
           <a:p>
             <a:fld id="{A653A8F1-9EDF-49EF-A14D-E495AD864F8A}" type="datetimeFigureOut">
               <a:rPr lang="zh-CN" altLang="en-US"/>
+              <a:t>2026/6/17</a:t>
             </a:fld>
             <a:endParaRPr lang="zh-CN" altLang="en-US"/>
           </a:p>
@@ -2759,7 +2936,9 @@
         <p:txBody>
           <a:bodyPr/>
           <a:lstStyle/>
-          <a:p/>
+          <a:p>
+            <a:endParaRPr/>
+          </a:p>
         </p:txBody>
       </p:sp>
       <p:sp>
@@ -2779,6 +2958,7 @@
           <a:p>
             <a:fld id="{43A13857-8FE2-426A-A37B-64DF65062EF2}" type="slidenum">
               <a:rPr/>
+              <a:t>‹#›</a:t>
             </a:fld>
             <a:endParaRPr/>
           </a:p>
@@ -3106,6 +3286,7 @@
           <a:p>
             <a:fld id="{A653A8F1-9EDF-49EF-A14D-E495AD864F8A}" type="datetimeFigureOut">
               <a:rPr lang="zh-CN" altLang="en-US"/>
+              <a:t>2026/6/17</a:t>
             </a:fld>
             <a:endParaRPr lang="zh-CN" altLang="en-US"/>
           </a:p>
@@ -3125,7 +3306,9 @@
         <p:txBody>
           <a:bodyPr/>
           <a:lstStyle/>
-          <a:p/>
+          <a:p>
+            <a:endParaRPr/>
+          </a:p>
         </p:txBody>
       </p:sp>
       <p:sp>
@@ -3145,6 +3328,7 @@
           <a:p>
             <a:fld id="{43A13857-8FE2-426A-A37B-64DF65062EF2}" type="slidenum">
               <a:rPr/>
+              <a:t>‹#›</a:t>
             </a:fld>
             <a:endParaRPr/>
           </a:p>
@@ -3213,6 +3397,7 @@
           <a:p>
             <a:fld id="{A653A8F1-9EDF-49EF-A14D-E495AD864F8A}" type="datetimeFigureOut">
               <a:rPr lang="zh-CN" altLang="en-US"/>
+              <a:t>2026/6/17</a:t>
             </a:fld>
             <a:endParaRPr lang="zh-CN" altLang="en-US"/>
           </a:p>
@@ -3232,7 +3417,9 @@
         <p:txBody>
           <a:bodyPr/>
           <a:lstStyle/>
-          <a:p/>
+          <a:p>
+            <a:endParaRPr/>
+          </a:p>
         </p:txBody>
       </p:sp>
       <p:sp>
@@ -3252,6 +3439,7 @@
           <a:p>
             <a:fld id="{43A13857-8FE2-426A-A37B-64DF65062EF2}" type="slidenum">
               <a:rPr/>
+              <a:t>‹#›</a:t>
             </a:fld>
             <a:endParaRPr/>
           </a:p>
@@ -3299,6 +3487,7 @@
           <a:p>
             <a:fld id="{A653A8F1-9EDF-49EF-A14D-E495AD864F8A}" type="datetimeFigureOut">
               <a:rPr lang="zh-CN" altLang="en-US"/>
+              <a:t>2026/6/17</a:t>
             </a:fld>
             <a:endParaRPr lang="zh-CN" altLang="en-US"/>
           </a:p>
@@ -3318,7 +3507,9 @@
         <p:txBody>
           <a:bodyPr/>
           <a:lstStyle/>
-          <a:p/>
+          <a:p>
+            <a:endParaRPr/>
+          </a:p>
         </p:txBody>
       </p:sp>
       <p:sp>
@@ -3338,6 +3529,7 @@
           <a:p>
             <a:fld id="{43A13857-8FE2-426A-A37B-64DF65062EF2}" type="slidenum">
               <a:rPr/>
+              <a:t>‹#›</a:t>
             </a:fld>
             <a:endParaRPr/>
           </a:p>
@@ -3580,6 +3772,7 @@
           <a:p>
             <a:fld id="{A653A8F1-9EDF-49EF-A14D-E495AD864F8A}" type="datetimeFigureOut">
               <a:rPr lang="zh-CN" altLang="en-US"/>
+              <a:t>2026/6/17</a:t>
             </a:fld>
             <a:endParaRPr lang="zh-CN" altLang="en-US"/>
           </a:p>
@@ -3599,7 +3792,9 @@
         <p:txBody>
           <a:bodyPr/>
           <a:lstStyle/>
-          <a:p/>
+          <a:p>
+            <a:endParaRPr/>
+          </a:p>
         </p:txBody>
       </p:sp>
       <p:sp>
@@ -3619,6 +3814,7 @@
           <a:p>
             <a:fld id="{43A13857-8FE2-426A-A37B-64DF65062EF2}" type="slidenum">
               <a:rPr/>
+              <a:t>‹#›</a:t>
             </a:fld>
             <a:endParaRPr/>
           </a:p>
@@ -3736,7 +3932,9 @@
               <a:defRPr sz="2000"/>
             </a:lvl9pPr>
           </a:lstStyle>
-          <a:p/>
+          <a:p>
+            <a:endParaRPr/>
+          </a:p>
         </p:txBody>
       </p:sp>
       <p:sp>
@@ -3822,6 +4020,7 @@
           <a:p>
             <a:fld id="{A653A8F1-9EDF-49EF-A14D-E495AD864F8A}" type="datetimeFigureOut">
               <a:rPr lang="zh-CN" altLang="en-US"/>
+              <a:t>2026/6/17</a:t>
             </a:fld>
             <a:endParaRPr lang="zh-CN" altLang="en-US"/>
           </a:p>
@@ -3841,7 +4040,9 @@
         <p:txBody>
           <a:bodyPr/>
           <a:lstStyle/>
-          <a:p/>
+          <a:p>
+            <a:endParaRPr/>
+          </a:p>
         </p:txBody>
       </p:sp>
       <p:sp>
@@ -3861,6 +4062,7 @@
           <a:p>
             <a:fld id="{43A13857-8FE2-426A-A37B-64DF65062EF2}" type="slidenum">
               <a:rPr/>
+              <a:t>‹#›</a:t>
             </a:fld>
             <a:endParaRPr/>
           </a:p>
@@ -4029,6 +4231,7 @@
           <a:p>
             <a:fld id="{A653A8F1-9EDF-49EF-A14D-E495AD864F8A}" type="datetimeFigureOut">
               <a:rPr lang="zh-CN" altLang="en-US"/>
+              <a:t>2026/6/17</a:t>
             </a:fld>
             <a:endParaRPr lang="zh-CN" altLang="en-US"/>
           </a:p>
@@ -4067,7 +4270,9 @@
               </a:defRPr>
             </a:lvl1pPr>
           </a:lstStyle>
-          <a:p/>
+          <a:p>
+            <a:endParaRPr/>
+          </a:p>
         </p:txBody>
       </p:sp>
       <p:sp>
@@ -4106,6 +4311,7 @@
           <a:p>
             <a:fld id="{43A13857-8FE2-426A-A37B-64DF65062EF2}" type="slidenum">
               <a:rPr/>
+              <a:t>‹#›</a:t>
             </a:fld>
             <a:endParaRPr/>
           </a:p>
@@ -4478,6 +4684,7 @@
             <a:pPr algn="ctr">
               <a:buNone/>
             </a:pPr>
+            <a:endParaRPr/>
           </a:p>
         </p:txBody>
       </p:sp>
@@ -4519,14 +4726,6 @@
               </a:rPr>
               <a:t>搜索引擎总结</a:t>
             </a:r>
-            <a:endParaRPr lang="zh-CN" altLang="en-US" sz="4400" dirty="0">
-              <a:solidFill>
-                <a:schemeClr val="bg1"/>
-              </a:solidFill>
-              <a:latin typeface="字魂17号-萌趣果冻体"/>
-              <a:ea typeface="字魂17号-萌趣果冻体"/>
-              <a:cs typeface="字魂17号-萌趣果冻体"/>
-            </a:endParaRPr>
           </a:p>
         </p:txBody>
       </p:sp>
@@ -4619,6 +4818,7 @@
             <a:pPr algn="ctr">
               <a:buNone/>
             </a:pPr>
+            <a:endParaRPr/>
           </a:p>
         </p:txBody>
       </p:sp>
@@ -4668,6 +4868,7 @@
             <a:pPr algn="ctr">
               <a:buNone/>
             </a:pPr>
+            <a:endParaRPr/>
           </a:p>
         </p:txBody>
       </p:sp>
@@ -4717,6 +4918,7 @@
             <a:pPr algn="ctr">
               <a:buNone/>
             </a:pPr>
+            <a:endParaRPr/>
           </a:p>
         </p:txBody>
       </p:sp>
@@ -4766,6 +4968,7 @@
             <a:pPr algn="ctr">
               <a:buNone/>
             </a:pPr>
+            <a:endParaRPr/>
           </a:p>
         </p:txBody>
       </p:sp>
@@ -4817,6 +5020,7 @@
             <a:pPr algn="ctr">
               <a:buNone/>
             </a:pPr>
+            <a:endParaRPr/>
           </a:p>
         </p:txBody>
       </p:sp>
@@ -4829,7 +5033,7 @@
           <p:nvPr/>
         </p:nvPicPr>
         <p:blipFill>
-          <a:blip r:embed="rId1"/>
+          <a:blip r:embed="rId3"/>
           <a:stretch>
             <a:fillRect/>
           </a:stretch>
@@ -4874,11 +5078,6 @@
               </a:rPr>
               <a:t>小组成员：李嘉轩 刘义群 王秀崧 汤语涵 谢羿衡 唐熙雷 邢泽雷</a:t>
             </a:r>
-            <a:endParaRPr lang="zh-CN" altLang="en-US" dirty="0">
-              <a:solidFill>
-                <a:schemeClr val="bg1"/>
-              </a:solidFill>
-            </a:endParaRPr>
           </a:p>
         </p:txBody>
       </p:sp>
@@ -4891,514 +5090,6 @@
 </file>
 
 <file path=ppt/slides/slide10.xml><?xml version="1.0" encoding="utf-8"?>
-<p:sld xmlns:a="http://schemas.openxmlformats.org/drawingml/2006/main" xmlns:r="http://schemas.openxmlformats.org/officeDocument/2006/relationships" xmlns:p="http://schemas.openxmlformats.org/presentationml/2006/main">
-  <p:cSld>
-    <p:spTree>
-      <p:nvGrpSpPr>
-        <p:cNvPr id="1" name=""/>
-        <p:cNvGrpSpPr/>
-        <p:nvPr/>
-      </p:nvGrpSpPr>
-      <p:grpSpPr>
-        <a:xfrm>
-          <a:off x="0" y="0"/>
-          <a:ext cx="0" cy="0"/>
-          <a:chOff x="0" y="0"/>
-          <a:chExt cx="0" cy="0"/>
-        </a:xfrm>
-      </p:grpSpPr>
-      <p:sp>
-        <p:nvSpPr>
-          <p:cNvPr id="13" name="矩形 12"/>
-          <p:cNvSpPr>
-            <a:spLocks noGrp="1"/>
-          </p:cNvSpPr>
-          <p:nvPr/>
-        </p:nvSpPr>
-        <p:spPr>
-          <a:xfrm>
-            <a:off x="0" y="0"/>
-            <a:ext cx="12192000" cy="114300"/>
-          </a:xfrm>
-          <a:prstGeom prst="rect">
-            <a:avLst/>
-          </a:prstGeom>
-          <a:solidFill>
-            <a:srgbClr val="2D4A33"/>
-          </a:solidFill>
-          <a:ln w="0">
-            <a:solidFill>
-              <a:srgbClr val="2D4A33"/>
-            </a:solidFill>
-            <a:prstDash val="solid"/>
-          </a:ln>
-        </p:spPr>
-      </p:sp>
-      <p:sp>
-        <p:nvSpPr>
-          <p:cNvPr id="2" name="矩形 1"/>
-          <p:cNvSpPr>
-            <a:spLocks noGrp="1"/>
-          </p:cNvSpPr>
-          <p:nvPr/>
-        </p:nvSpPr>
-        <p:spPr>
-          <a:xfrm>
-            <a:off x="762000" y="400050"/>
-            <a:ext cx="10668000" cy="457200"/>
-          </a:xfrm>
-          <a:prstGeom prst="rect">
-            <a:avLst/>
-          </a:prstGeom>
-          <a:solidFill>
-            <a:srgbClr val="000000">
-              <a:alpha val="0"/>
-            </a:srgbClr>
-          </a:solidFill>
-          <a:ln w="0">
-            <a:solidFill>
-              <a:srgbClr val="000000">
-                <a:alpha val="0"/>
-              </a:srgbClr>
-            </a:solidFill>
-            <a:prstDash val="solid"/>
-          </a:ln>
-        </p:spPr>
-        <p:txBody>
-          <a:bodyPr anchor="ctr"/>
-          <a:lstStyle/>
-          <a:p>
-            <a:pPr algn="ctr">
-              <a:defRPr sz="2550" b="1">
-                <a:solidFill>
-                  <a:srgbClr val="2D4A33"/>
-                </a:solidFill>
-              </a:defRPr>
-            </a:pPr>
-            <a:r>
-              <a:rPr lang="zh-CN" altLang="en-US" sz="2550" b="1" dirty="0">
-                <a:solidFill>
-                  <a:srgbClr val="2D4A33"/>
-                </a:solidFill>
-              </a:rPr>
-              <a:t>李嘉轩</a:t>
-            </a:r>
-            <a:endParaRPr sz="2550" b="1" dirty="0">
-              <a:solidFill>
-                <a:srgbClr val="2D4A33"/>
-              </a:solidFill>
-            </a:endParaRPr>
-          </a:p>
-        </p:txBody>
-      </p:sp>
-      <p:sp>
-        <p:nvSpPr>
-          <p:cNvPr id="4" name="矩形 3"/>
-          <p:cNvSpPr>
-            <a:spLocks noGrp="1"/>
-          </p:cNvSpPr>
-          <p:nvPr/>
-        </p:nvSpPr>
-        <p:spPr>
-          <a:xfrm>
-            <a:off x="1498600" y="1481665"/>
-            <a:ext cx="9465733" cy="2057401"/>
-          </a:xfrm>
-          <a:prstGeom prst="rect">
-            <a:avLst/>
-          </a:prstGeom>
-          <a:solidFill>
-            <a:srgbClr val="FFFFFF"/>
-          </a:solidFill>
-          <a:ln w="9525">
-            <a:solidFill>
-              <a:srgbClr val="C7D0C4"/>
-            </a:solidFill>
-            <a:prstDash val="solid"/>
-          </a:ln>
-        </p:spPr>
-      </p:sp>
-      <p:sp>
-        <p:nvSpPr>
-          <p:cNvPr id="5" name="矩形 4"/>
-          <p:cNvSpPr>
-            <a:spLocks noGrp="1"/>
-          </p:cNvSpPr>
-          <p:nvPr/>
-        </p:nvSpPr>
-        <p:spPr>
-          <a:xfrm>
-            <a:off x="1634067" y="1678782"/>
-            <a:ext cx="4305300" cy="323850"/>
-          </a:xfrm>
-          <a:prstGeom prst="rect">
-            <a:avLst/>
-          </a:prstGeom>
-          <a:solidFill>
-            <a:srgbClr val="000000">
-              <a:alpha val="0"/>
-            </a:srgbClr>
-          </a:solidFill>
-          <a:ln w="0">
-            <a:solidFill>
-              <a:srgbClr val="000000">
-                <a:alpha val="0"/>
-              </a:srgbClr>
-            </a:solidFill>
-            <a:prstDash val="solid"/>
-          </a:ln>
-        </p:spPr>
-        <p:txBody>
-          <a:bodyPr anchor="ctr"/>
-          <a:lstStyle/>
-          <a:p>
-            <a:r>
-              <a:rPr lang="zh-CN" altLang="en-US" sz="3200" b="1" dirty="0">
-                <a:solidFill>
-                  <a:srgbClr val="2D4A33"/>
-                </a:solidFill>
-              </a:rPr>
-              <a:t>数据集初始化与扩充</a:t>
-            </a:r>
-            <a:endParaRPr lang="zh-CN" altLang="en-US" sz="3200" b="1" dirty="0">
-              <a:solidFill>
-                <a:srgbClr val="2D4A33"/>
-              </a:solidFill>
-            </a:endParaRPr>
-          </a:p>
-        </p:txBody>
-      </p:sp>
-      <p:sp>
-        <p:nvSpPr>
-          <p:cNvPr id="6" name="矩形 5"/>
-          <p:cNvSpPr>
-            <a:spLocks noGrp="1"/>
-          </p:cNvSpPr>
-          <p:nvPr/>
-        </p:nvSpPr>
-        <p:spPr>
-          <a:xfrm>
-            <a:off x="1634067" y="2070365"/>
-            <a:ext cx="9059333" cy="1358635"/>
-          </a:xfrm>
-          <a:prstGeom prst="rect">
-            <a:avLst/>
-          </a:prstGeom>
-          <a:solidFill>
-            <a:srgbClr val="000000">
-              <a:alpha val="0"/>
-            </a:srgbClr>
-          </a:solidFill>
-          <a:ln w="0">
-            <a:solidFill>
-              <a:srgbClr val="000000">
-                <a:alpha val="0"/>
-              </a:srgbClr>
-            </a:solidFill>
-            <a:prstDash val="solid"/>
-          </a:ln>
-        </p:spPr>
-        <p:txBody>
-          <a:bodyPr anchor="ctr"/>
-          <a:lstStyle/>
-          <a:p>
-            <a:pPr algn="l">
-              <a:defRPr sz="1350" b="0">
-                <a:solidFill>
-                  <a:srgbClr val="1F2D22"/>
-                </a:solidFill>
-              </a:defRPr>
-            </a:pPr>
-            <a:r>
-              <a:rPr lang="zh-CN" altLang="en-US" sz="2000" dirty="0">
-                <a:solidFill>
-                  <a:srgbClr val="1F2D22"/>
-                </a:solidFill>
-                <a:latin typeface="ui-monospace"/>
-              </a:rPr>
-              <a:t>提交并扩充了 </a:t>
-            </a:r>
-            <a:r>
-              <a:rPr lang="en-US" altLang="zh-CN" sz="2000" dirty="0" err="1">
-                <a:solidFill>
-                  <a:srgbClr val="1F2D22"/>
-                </a:solidFill>
-                <a:latin typeface="ui-monospace"/>
-              </a:rPr>
-              <a:t>course_qa.json</a:t>
-            </a:r>
-            <a:endParaRPr lang="en-US" altLang="zh-CN" sz="2000" dirty="0">
-              <a:solidFill>
-                <a:srgbClr val="1F2D22"/>
-              </a:solidFill>
-              <a:latin typeface="ui-monospace"/>
-            </a:endParaRPr>
-          </a:p>
-          <a:p>
-            <a:pPr algn="l">
-              <a:defRPr sz="1350" b="0">
-                <a:solidFill>
-                  <a:srgbClr val="1F2D22"/>
-                </a:solidFill>
-              </a:defRPr>
-            </a:pPr>
-            <a:r>
-              <a:rPr lang="zh-CN" altLang="en-US" sz="2000" dirty="0">
-                <a:solidFill>
-                  <a:srgbClr val="1F2D22"/>
-                </a:solidFill>
-                <a:latin typeface="ui-monospace"/>
-              </a:rPr>
-              <a:t>整理统一 </a:t>
-            </a:r>
-            <a:r>
-              <a:rPr lang="en-US" altLang="zh-CN" sz="2000" dirty="0" err="1">
-                <a:solidFill>
-                  <a:srgbClr val="1F2D22"/>
-                </a:solidFill>
-                <a:latin typeface="ui-monospace"/>
-              </a:rPr>
-              <a:t>course_qa.json</a:t>
-            </a:r>
-            <a:r>
-              <a:rPr lang="zh-CN" altLang="en-US" sz="2000" dirty="0">
-                <a:solidFill>
-                  <a:srgbClr val="1F2D22"/>
-                </a:solidFill>
-                <a:latin typeface="ui-monospace"/>
-              </a:rPr>
-              <a:t>数据格式、增加质量标注</a:t>
-            </a:r>
-            <a:endParaRPr lang="en-US" altLang="zh-CN" sz="2000" dirty="0">
-              <a:solidFill>
-                <a:srgbClr val="1F2D22"/>
-              </a:solidFill>
-              <a:latin typeface="ui-monospace"/>
-            </a:endParaRPr>
-          </a:p>
-          <a:p>
-            <a:pPr algn="l">
-              <a:defRPr sz="1350" b="0">
-                <a:solidFill>
-                  <a:srgbClr val="1F2D22"/>
-                </a:solidFill>
-              </a:defRPr>
-            </a:pPr>
-            <a:endParaRPr sz="1350" b="0" dirty="0">
-              <a:solidFill>
-                <a:srgbClr val="1F2D22"/>
-              </a:solidFill>
-            </a:endParaRPr>
-          </a:p>
-        </p:txBody>
-      </p:sp>
-      <p:sp>
-        <p:nvSpPr>
-          <p:cNvPr id="7" name="矩形 6"/>
-          <p:cNvSpPr>
-            <a:spLocks noGrp="1"/>
-          </p:cNvSpPr>
-          <p:nvPr/>
-        </p:nvSpPr>
-        <p:spPr>
-          <a:xfrm>
-            <a:off x="1498600" y="4171950"/>
-            <a:ext cx="9465733" cy="1619250"/>
-          </a:xfrm>
-          <a:prstGeom prst="rect">
-            <a:avLst/>
-          </a:prstGeom>
-          <a:solidFill>
-            <a:srgbClr val="FFFFFF"/>
-          </a:solidFill>
-          <a:ln w="9525">
-            <a:solidFill>
-              <a:srgbClr val="C7D0C4"/>
-            </a:solidFill>
-            <a:prstDash val="solid"/>
-          </a:ln>
-        </p:spPr>
-      </p:sp>
-      <p:sp>
-        <p:nvSpPr>
-          <p:cNvPr id="8" name="矩形 7"/>
-          <p:cNvSpPr>
-            <a:spLocks noGrp="1"/>
-          </p:cNvSpPr>
-          <p:nvPr/>
-        </p:nvSpPr>
-        <p:spPr>
-          <a:xfrm>
-            <a:off x="1634067" y="4362450"/>
-            <a:ext cx="5872052" cy="323850"/>
-          </a:xfrm>
-          <a:prstGeom prst="rect">
-            <a:avLst/>
-          </a:prstGeom>
-          <a:solidFill>
-            <a:srgbClr val="000000">
-              <a:alpha val="0"/>
-            </a:srgbClr>
-          </a:solidFill>
-          <a:ln w="0">
-            <a:solidFill>
-              <a:srgbClr val="000000">
-                <a:alpha val="0"/>
-              </a:srgbClr>
-            </a:solidFill>
-            <a:prstDash val="solid"/>
-          </a:ln>
-        </p:spPr>
-        <p:txBody>
-          <a:bodyPr anchor="ctr"/>
-          <a:lstStyle/>
-          <a:p>
-            <a:pPr algn="l">
-              <a:defRPr sz="1650" b="1">
-                <a:solidFill>
-                  <a:srgbClr val="2D4A33"/>
-                </a:solidFill>
-              </a:defRPr>
-            </a:pPr>
-            <a:r>
-              <a:rPr lang="en-US" altLang="zh-CN" sz="3200" dirty="0"/>
-              <a:t>Elasticsearch </a:t>
-            </a:r>
-            <a:r>
-              <a:rPr lang="zh-CN" altLang="en-US" sz="3200" dirty="0"/>
-              <a:t>数据导入能力</a:t>
-            </a:r>
-            <a:endParaRPr sz="3200" b="1" dirty="0">
-              <a:solidFill>
-                <a:srgbClr val="2D4A33"/>
-              </a:solidFill>
-            </a:endParaRPr>
-          </a:p>
-        </p:txBody>
-      </p:sp>
-      <p:sp>
-        <p:nvSpPr>
-          <p:cNvPr id="9" name="矩形 8"/>
-          <p:cNvSpPr>
-            <a:spLocks noGrp="1"/>
-          </p:cNvSpPr>
-          <p:nvPr/>
-        </p:nvSpPr>
-        <p:spPr>
-          <a:xfrm>
-            <a:off x="1634067" y="4677833"/>
-            <a:ext cx="9330266" cy="977900"/>
-          </a:xfrm>
-          <a:prstGeom prst="rect">
-            <a:avLst/>
-          </a:prstGeom>
-          <a:solidFill>
-            <a:srgbClr val="000000">
-              <a:alpha val="0"/>
-            </a:srgbClr>
-          </a:solidFill>
-          <a:ln w="0">
-            <a:solidFill>
-              <a:srgbClr val="000000">
-                <a:alpha val="0"/>
-              </a:srgbClr>
-            </a:solidFill>
-            <a:prstDash val="solid"/>
-          </a:ln>
-        </p:spPr>
-        <p:txBody>
-          <a:bodyPr anchor="ctr"/>
-          <a:lstStyle/>
-          <a:p>
-            <a:r>
-              <a:rPr lang="zh-CN" altLang="en-US" sz="2000" dirty="0">
-                <a:solidFill>
-                  <a:srgbClr val="1F2D22"/>
-                </a:solidFill>
-                <a:latin typeface="ui-monospace"/>
-              </a:rPr>
-              <a:t>添加</a:t>
-            </a:r>
-            <a:r>
-              <a:rPr lang="en-US" altLang="zh-CN" sz="2000" dirty="0">
-                <a:solidFill>
-                  <a:srgbClr val="1F2D22"/>
-                </a:solidFill>
-                <a:latin typeface="ui-monospace"/>
-              </a:rPr>
-              <a:t>ES</a:t>
-            </a:r>
-            <a:r>
-              <a:rPr lang="zh-CN" altLang="en-US" sz="2000" dirty="0">
-                <a:solidFill>
-                  <a:srgbClr val="1F2D22"/>
-                </a:solidFill>
-                <a:latin typeface="ui-monospace"/>
-              </a:rPr>
-              <a:t>数据导入脚本</a:t>
-            </a:r>
-            <a:endParaRPr lang="en-US" altLang="zh-CN" sz="2000" dirty="0">
-              <a:solidFill>
-                <a:srgbClr val="1F2D22"/>
-              </a:solidFill>
-              <a:latin typeface="ui-monospace"/>
-            </a:endParaRPr>
-          </a:p>
-          <a:p>
-            <a:r>
-              <a:rPr lang="zh-CN" altLang="en-US" sz="2000" dirty="0">
-                <a:solidFill>
-                  <a:srgbClr val="1F2D22"/>
-                </a:solidFill>
-                <a:latin typeface="ui-monospace"/>
-              </a:rPr>
-              <a:t>解析</a:t>
-            </a:r>
-            <a:r>
-              <a:rPr lang="en-US" altLang="zh-CN" sz="2000" dirty="0" err="1">
-                <a:solidFill>
-                  <a:srgbClr val="1F2D22"/>
-                </a:solidFill>
-                <a:latin typeface="ui-monospace"/>
-              </a:rPr>
-              <a:t>course_qa.json</a:t>
-            </a:r>
-            <a:r>
-              <a:rPr lang="zh-CN" altLang="en-US" sz="2000" dirty="0">
-                <a:solidFill>
-                  <a:srgbClr val="1F2D22"/>
-                </a:solidFill>
-                <a:latin typeface="ui-monospace"/>
-              </a:rPr>
-              <a:t>并将数据导入</a:t>
-            </a:r>
-            <a:r>
-              <a:rPr lang="en-US" altLang="zh-CN" sz="2000" dirty="0">
-                <a:solidFill>
-                  <a:srgbClr val="1F2D22"/>
-                </a:solidFill>
-                <a:latin typeface="ui-monospace"/>
-              </a:rPr>
-              <a:t>ES</a:t>
-            </a:r>
-            <a:endParaRPr lang="zh-CN" altLang="en-US" sz="2000" dirty="0">
-              <a:solidFill>
-                <a:srgbClr val="1F2D22"/>
-              </a:solidFill>
-              <a:latin typeface="ui-monospace"/>
-            </a:endParaRPr>
-          </a:p>
-        </p:txBody>
-      </p:sp>
-    </p:spTree>
-  </p:cSld>
-  <p:clrMapOvr>
-    <a:masterClrMapping/>
-  </p:clrMapOvr>
-</p:sld>
-</file>
-
-<file path=ppt/slides/slide11.xml><?xml version="1.0" encoding="utf-8"?>
 <p:sld xmlns:a="http://schemas.openxmlformats.org/drawingml/2006/main" xmlns:r="http://schemas.openxmlformats.org/officeDocument/2006/relationships" xmlns:p="http://schemas.openxmlformats.org/presentationml/2006/main">
   <p:cSld>
     <p:bg>
@@ -5481,21 +5172,14 @@
               <a:t>0</a:t>
             </a:r>
             <a:r>
-              <a:rPr kumimoji="0" lang="en-US" sz="13800" b="0" i="0" u="none" strike="noStrike" kern="1200" cap="none" spc="0" normalizeH="0" baseline="0" noProof="0" dirty="0">
-                <a:ln>
-                  <a:noFill/>
-                </a:ln>
+              <a:rPr lang="en-US" sz="13800" dirty="0">
                 <a:solidFill>
                   <a:srgbClr val="F5F4F9"/>
                 </a:solidFill>
-                <a:effectLst/>
-                <a:uLnTx/>
-                <a:uFillTx/>
                 <a:latin typeface="Arial" panose="020B0604020202020204"/>
                 <a:ea typeface="华文中宋" panose="02010600040101010101" charset="-122"/>
-                <a:cs typeface="+mn-cs"/>
-              </a:rPr>
-              <a:t>5</a:t>
+              </a:rPr>
+              <a:t>4</a:t>
             </a:r>
             <a:endParaRPr kumimoji="0" sz="13800" b="0" i="0" u="none" strike="noStrike" kern="1200" cap="none" spc="0" normalizeH="0" baseline="0" noProof="0" dirty="0">
               <a:ln>
@@ -5524,8 +5208,8 @@
         </p:nvSpPr>
         <p:spPr>
           <a:xfrm>
-            <a:off x="6293290" y="2685166"/>
-            <a:ext cx="2339103" cy="923330"/>
+            <a:off x="6331761" y="2685166"/>
+            <a:ext cx="2262159" cy="923330"/>
           </a:xfrm>
           <a:prstGeom prst="rect">
             <a:avLst/>
@@ -5554,14 +5238,21 @@
               <a:defRPr/>
             </a:pPr>
             <a:r>
-              <a:rPr lang="zh-CN" altLang="en-US" sz="5400" b="1" dirty="0">
+              <a:rPr kumimoji="0" lang="zh-CN" altLang="en-US" sz="5400" b="1" i="0" u="none" strike="noStrike" kern="1200" cap="none" spc="0" normalizeH="0" baseline="0" noProof="0" dirty="0">
+                <a:ln>
+                  <a:noFill/>
+                </a:ln>
                 <a:solidFill>
                   <a:prstClr val="white"/>
                 </a:solidFill>
+                <a:effectLst/>
+                <a:uLnTx/>
+                <a:uFillTx/>
                 <a:latin typeface="Arial" panose="020B0604020202020204"/>
                 <a:ea typeface="华文中宋" panose="02010600040101010101" charset="-122"/>
-              </a:rPr>
-              <a:t>唐熙雷</a:t>
+                <a:cs typeface="+mn-cs"/>
+              </a:rPr>
+              <a:t>李嘉轩</a:t>
             </a:r>
             <a:endParaRPr kumimoji="0" sz="5400" b="1" i="0" u="none" strike="noStrike" kern="1200" cap="none" spc="0" normalizeH="0" baseline="0" noProof="0" dirty="0">
               <a:ln>
@@ -5588,7 +5279,7 @@
 </p:sld>
 </file>
 
-<file path=ppt/slides/slide12.xml><?xml version="1.0" encoding="utf-8"?>
+<file path=ppt/slides/slide11.xml><?xml version="1.0" encoding="utf-8"?>
 <p:sld xmlns:a="http://schemas.openxmlformats.org/drawingml/2006/main" xmlns:r="http://schemas.openxmlformats.org/officeDocument/2006/relationships" xmlns:p="http://schemas.openxmlformats.org/presentationml/2006/main">
   <p:cSld>
     <p:spTree>
@@ -5679,7 +5370,7 @@
                   <a:srgbClr val="2D4A33"/>
                 </a:solidFill>
               </a:rPr>
-              <a:t>唐熙雷</a:t>
+              <a:t>李嘉轩</a:t>
             </a:r>
             <a:endParaRPr sz="2550" b="1" dirty="0">
               <a:solidFill>
@@ -5695,16 +5386,12 @@
           <p:cNvSpPr>
             <a:spLocks noGrp="1"/>
           </p:cNvSpPr>
-          <p:nvPr>
-            <p:custDataLst>
-              <p:tags r:id="rId1"/>
-            </p:custDataLst>
-          </p:nvPr>
+          <p:nvPr/>
         </p:nvSpPr>
         <p:spPr>
           <a:xfrm>
-            <a:off x="857250" y="1619250"/>
-            <a:ext cx="4762500" cy="4115435"/>
+            <a:off x="1498600" y="1481665"/>
+            <a:ext cx="9465733" cy="2057401"/>
           </a:xfrm>
           <a:prstGeom prst="rect">
             <a:avLst/>
@@ -5726,16 +5413,12 @@
           <p:cNvSpPr>
             <a:spLocks noGrp="1"/>
           </p:cNvSpPr>
-          <p:nvPr>
-            <p:custDataLst>
-              <p:tags r:id="rId2"/>
-            </p:custDataLst>
-          </p:nvPr>
+          <p:nvPr/>
         </p:nvSpPr>
         <p:spPr>
           <a:xfrm>
-            <a:off x="1085850" y="1790700"/>
-            <a:ext cx="4305300" cy="565150"/>
+            <a:off x="1634067" y="1678782"/>
+            <a:ext cx="4305300" cy="323850"/>
           </a:xfrm>
           <a:prstGeom prst="rect">
             <a:avLst/>
@@ -5758,34 +5441,14 @@
           <a:bodyPr anchor="ctr"/>
           <a:lstStyle/>
           <a:p>
-            <a:pPr algn="l">
-              <a:defRPr sz="1650" b="1">
+            <a:r>
+              <a:rPr lang="zh-CN" altLang="en-US" sz="3200" b="1" dirty="0">
                 <a:solidFill>
                   <a:srgbClr val="2D4A33"/>
                 </a:solidFill>
-              </a:defRPr>
-            </a:pPr>
-            <a:r>
-              <a:rPr lang="zh-CN" altLang="en-US" sz="2000" b="1">
-                <a:solidFill>
-                  <a:srgbClr val="2D4A33"/>
-                </a:solidFill>
-              </a:rPr>
-              <a:t>无监督文本特征工程，公式</a:t>
-            </a:r>
-            <a:r>
-              <a:rPr lang="zh-CN" altLang="en-US" sz="2000" b="1">
-                <a:solidFill>
-                  <a:srgbClr val="2D4A33"/>
-                </a:solidFill>
-              </a:rPr>
-              <a:t>设计</a:t>
-            </a:r>
-            <a:endParaRPr lang="zh-CN" altLang="en-US" sz="2000" b="1">
-              <a:solidFill>
-                <a:srgbClr val="2D4A33"/>
-              </a:solidFill>
-            </a:endParaRPr>
+              </a:rPr>
+              <a:t>数据集初始化与扩充</a:t>
+            </a:r>
           </a:p>
         </p:txBody>
       </p:sp>
@@ -5795,16 +5458,12 @@
           <p:cNvSpPr>
             <a:spLocks noGrp="1"/>
           </p:cNvSpPr>
-          <p:nvPr>
-            <p:custDataLst>
-              <p:tags r:id="rId3"/>
-            </p:custDataLst>
-          </p:nvPr>
+          <p:nvPr/>
         </p:nvSpPr>
         <p:spPr>
           <a:xfrm>
-            <a:off x="1085850" y="2501265"/>
-            <a:ext cx="4305300" cy="2976880"/>
+            <a:off x="1634067" y="2070365"/>
+            <a:ext cx="9059333" cy="1358635"/>
           </a:xfrm>
           <a:prstGeom prst="rect">
             <a:avLst/>
@@ -5835,71 +5494,86 @@
               </a:defRPr>
             </a:pPr>
             <a:r>
-              <a:rPr lang="zh-CN" altLang="en-US" sz="1600" b="0">
-                <a:solidFill>
-                  <a:srgbClr val="1F2D22"/>
-                </a:solidFill>
-              </a:rPr>
-              <a:t>四维公式设计：基于文本内在形态，构建涵盖 </a:t>
-            </a:r>
-            <a:r>
-              <a:rPr lang="en-US" altLang="zh-CN" sz="1600" b="0">
-                <a:solidFill>
-                  <a:srgbClr val="1F2D22"/>
-                </a:solidFill>
-              </a:rPr>
-              <a:t>BM25 </a:t>
-            </a:r>
-            <a:r>
-              <a:rPr lang="zh-CN" altLang="en-US" sz="1600" b="0">
-                <a:solidFill>
-                  <a:srgbClr val="1F2D22"/>
-                </a:solidFill>
-              </a:rPr>
-              <a:t>相关性（55%）、回答绝对长度（15%）、词汇信息密度（15%）、逻辑论证深度（15%）的综合加权评分模型。</a:t>
-            </a:r>
-            <a:endParaRPr lang="zh-CN" altLang="en-US" sz="1600" b="0">
+              <a:rPr lang="zh-CN" altLang="en-US" sz="2000" dirty="0">
+                <a:solidFill>
+                  <a:srgbClr val="1F2D22"/>
+                </a:solidFill>
+                <a:latin typeface="ui-monospace"/>
+              </a:rPr>
+              <a:t>提交并扩充了 </a:t>
+            </a:r>
+            <a:r>
+              <a:rPr lang="en-US" altLang="zh-CN" sz="2000" dirty="0" err="1">
+                <a:solidFill>
+                  <a:srgbClr val="1F2D22"/>
+                </a:solidFill>
+                <a:latin typeface="ui-monospace"/>
+              </a:rPr>
+              <a:t>course_qa.json</a:t>
+            </a:r>
+            <a:endParaRPr lang="en-US" altLang="zh-CN" sz="2000" dirty="0">
+              <a:solidFill>
+                <a:srgbClr val="1F2D22"/>
+              </a:solidFill>
+              <a:latin typeface="ui-monospace"/>
+            </a:endParaRPr>
+          </a:p>
+          <a:p>
+            <a:pPr algn="l">
+              <a:defRPr sz="1350" b="0">
+                <a:solidFill>
+                  <a:srgbClr val="1F2D22"/>
+                </a:solidFill>
+              </a:defRPr>
+            </a:pPr>
+            <a:r>
+              <a:rPr lang="zh-CN" altLang="en-US" sz="2000" dirty="0">
+                <a:solidFill>
+                  <a:srgbClr val="1F2D22"/>
+                </a:solidFill>
+                <a:latin typeface="ui-monospace"/>
+              </a:rPr>
+              <a:t>整理统一 </a:t>
+            </a:r>
+            <a:r>
+              <a:rPr lang="en-US" altLang="zh-CN" sz="2000" dirty="0" err="1">
+                <a:solidFill>
+                  <a:srgbClr val="1F2D22"/>
+                </a:solidFill>
+                <a:latin typeface="ui-monospace"/>
+              </a:rPr>
+              <a:t>course_qa.json</a:t>
+            </a:r>
+            <a:r>
+              <a:rPr lang="zh-CN" altLang="en-US" sz="2000" dirty="0">
+                <a:solidFill>
+                  <a:srgbClr val="1F2D22"/>
+                </a:solidFill>
+                <a:latin typeface="ui-monospace"/>
+              </a:rPr>
+              <a:t>数据格式、增加质量标注</a:t>
+            </a:r>
+            <a:endParaRPr lang="en-US" altLang="zh-CN" sz="2000" dirty="0">
+              <a:solidFill>
+                <a:srgbClr val="1F2D22"/>
+              </a:solidFill>
+              <a:latin typeface="ui-monospace"/>
+            </a:endParaRPr>
+          </a:p>
+          <a:p>
+            <a:pPr algn="l">
+              <a:defRPr sz="1350" b="0">
+                <a:solidFill>
+                  <a:srgbClr val="1F2D22"/>
+                </a:solidFill>
+              </a:defRPr>
+            </a:pPr>
+            <a:endParaRPr sz="1350" b="0" dirty="0">
               <a:solidFill>
                 <a:srgbClr val="1F2D22"/>
               </a:solidFill>
             </a:endParaRPr>
           </a:p>
-          <a:p>
-            <a:pPr algn="l">
-              <a:defRPr sz="1350" b="0">
-                <a:solidFill>
-                  <a:srgbClr val="1F2D22"/>
-                </a:solidFill>
-              </a:defRPr>
-            </a:pPr>
-            <a:endParaRPr lang="zh-CN" altLang="en-US" sz="1600" b="0">
-              <a:solidFill>
-                <a:srgbClr val="1F2D22"/>
-              </a:solidFill>
-            </a:endParaRPr>
-          </a:p>
-          <a:p>
-            <a:pPr algn="l">
-              <a:defRPr sz="1350" b="0">
-                <a:solidFill>
-                  <a:srgbClr val="1F2D22"/>
-                </a:solidFill>
-              </a:defRPr>
-            </a:pPr>
-            <a:r>
-              <a:rPr lang="zh-CN" altLang="en-US" sz="1600" b="0">
-                <a:solidFill>
-                  <a:srgbClr val="1F2D22"/>
-                </a:solidFill>
-              </a:rPr>
-              <a:t>轻量级逻辑深度指标：创新性提出“逻辑词命中率”特征。硬编码极轻量通用逻辑词典（因果、转折、举例等），精准捕获技术解答中的推导分析深度，摆脱对庞大专业词库的依赖。</a:t>
-            </a:r>
-            <a:endParaRPr lang="zh-CN" altLang="en-US" sz="1600" b="0">
-              <a:solidFill>
-                <a:srgbClr val="1F2D22"/>
-              </a:solidFill>
-            </a:endParaRPr>
-          </a:p>
         </p:txBody>
       </p:sp>
       <p:sp>
@@ -5908,16 +5582,12 @@
           <p:cNvSpPr>
             <a:spLocks noGrp="1"/>
           </p:cNvSpPr>
-          <p:nvPr>
-            <p:custDataLst>
-              <p:tags r:id="rId4"/>
-            </p:custDataLst>
-          </p:nvPr>
+          <p:nvPr/>
         </p:nvSpPr>
         <p:spPr>
           <a:xfrm>
-            <a:off x="6572250" y="1619250"/>
-            <a:ext cx="4762500" cy="4115435"/>
+            <a:off x="1498600" y="4171950"/>
+            <a:ext cx="9465733" cy="1619250"/>
           </a:xfrm>
           <a:prstGeom prst="rect">
             <a:avLst/>
@@ -5939,16 +5609,12 @@
           <p:cNvSpPr>
             <a:spLocks noGrp="1"/>
           </p:cNvSpPr>
-          <p:nvPr>
-            <p:custDataLst>
-              <p:tags r:id="rId5"/>
-            </p:custDataLst>
-          </p:nvPr>
+          <p:nvPr/>
         </p:nvSpPr>
         <p:spPr>
           <a:xfrm>
-            <a:off x="6800850" y="1790700"/>
-            <a:ext cx="4305300" cy="565150"/>
+            <a:off x="1634067" y="4362450"/>
+            <a:ext cx="5872052" cy="323850"/>
           </a:xfrm>
           <a:prstGeom prst="rect">
             <a:avLst/>
@@ -5979,22 +5645,14 @@
               </a:defRPr>
             </a:pPr>
             <a:r>
-              <a:rPr lang="en-US" altLang="zh-CN" sz="2000" b="1">
-                <a:solidFill>
-                  <a:srgbClr val="2D4A33"/>
-                </a:solidFill>
-              </a:rPr>
-              <a:t>NDCG </a:t>
-            </a:r>
-            <a:r>
-              <a:rPr lang="zh-CN" altLang="en-US" sz="2000" b="1">
-                <a:solidFill>
-                  <a:srgbClr val="2D4A33"/>
-                </a:solidFill>
-              </a:rPr>
-              <a:t>自动化评测</a:t>
-            </a:r>
-            <a:endParaRPr lang="zh-CN" altLang="en-US" sz="2000" b="1">
+              <a:rPr lang="en-US" altLang="zh-CN" sz="3200" dirty="0"/>
+              <a:t>Elasticsearch </a:t>
+            </a:r>
+            <a:r>
+              <a:rPr lang="zh-CN" altLang="en-US" sz="3200" dirty="0"/>
+              <a:t>数据导入能力</a:t>
+            </a:r>
+            <a:endParaRPr sz="3200" b="1" dirty="0">
               <a:solidFill>
                 <a:srgbClr val="2D4A33"/>
               </a:solidFill>
@@ -6008,16 +5666,12 @@
           <p:cNvSpPr>
             <a:spLocks noGrp="1"/>
           </p:cNvSpPr>
-          <p:nvPr>
-            <p:custDataLst>
-              <p:tags r:id="rId6"/>
-            </p:custDataLst>
-          </p:nvPr>
+          <p:nvPr/>
         </p:nvSpPr>
         <p:spPr>
           <a:xfrm>
-            <a:off x="6800850" y="2501265"/>
-            <a:ext cx="4305300" cy="2976880"/>
+            <a:off x="1634067" y="4677833"/>
+            <a:ext cx="9330266" cy="977900"/>
           </a:xfrm>
           <a:prstGeom prst="rect">
             <a:avLst/>
@@ -6040,189 +5694,82 @@
           <a:bodyPr anchor="ctr"/>
           <a:lstStyle/>
           <a:p>
-            <a:pPr algn="l">
-              <a:defRPr sz="1350" b="0">
-                <a:solidFill>
-                  <a:srgbClr val="1F2D22"/>
-                </a:solidFill>
-              </a:defRPr>
-            </a:pPr>
-            <a:r>
-              <a:rPr lang="zh-CN" altLang="en-US" sz="1600" b="0">
-                <a:solidFill>
-                  <a:srgbClr val="1F2D22"/>
-                </a:solidFill>
-              </a:rPr>
-              <a:t>评测基准与真值构建：独立编写 </a:t>
-            </a:r>
-            <a:r>
-              <a:rPr lang="en-US" altLang="zh-CN" sz="1600" b="0">
-                <a:solidFill>
-                  <a:srgbClr val="1F2D22"/>
-                </a:solidFill>
-              </a:rPr>
-              <a:t>evaluator </a:t>
-            </a:r>
-            <a:r>
-              <a:rPr lang="zh-CN" altLang="en-US" sz="1600" b="0">
-                <a:solidFill>
-                  <a:srgbClr val="1F2D22"/>
-                </a:solidFill>
-              </a:rPr>
-              <a:t>自动化测试脚本，解析本地测试集生成 </a:t>
-            </a:r>
-            <a:r>
-              <a:rPr lang="en-US" altLang="zh-CN" sz="1600" b="0">
-                <a:solidFill>
-                  <a:srgbClr val="1F2D22"/>
-                </a:solidFill>
-              </a:rPr>
-              <a:t>Ground Truth，</a:t>
-            </a:r>
-            <a:r>
-              <a:rPr lang="zh-CN" altLang="en-US" sz="1600" b="0">
-                <a:solidFill>
-                  <a:srgbClr val="1F2D22"/>
-                </a:solidFill>
-              </a:rPr>
-              <a:t>实现 </a:t>
-            </a:r>
-            <a:r>
-              <a:rPr lang="en-US" altLang="zh-CN" sz="1600" b="0">
-                <a:solidFill>
-                  <a:srgbClr val="1F2D22"/>
-                </a:solidFill>
-              </a:rPr>
-              <a:t>DCG、IDCG </a:t>
-            </a:r>
-            <a:r>
-              <a:rPr lang="zh-CN" altLang="en-US" sz="1600" b="0">
-                <a:solidFill>
-                  <a:srgbClr val="1F2D22"/>
-                </a:solidFill>
-              </a:rPr>
-              <a:t>与 </a:t>
-            </a:r>
-            <a:r>
-              <a:rPr lang="en-US" altLang="zh-CN" sz="1600" b="0">
-                <a:solidFill>
-                  <a:srgbClr val="1F2D22"/>
-                </a:solidFill>
-              </a:rPr>
-              <a:t>NDCG@10 </a:t>
-            </a:r>
-            <a:r>
-              <a:rPr lang="zh-CN" altLang="en-US" sz="1600" b="0">
-                <a:solidFill>
-                  <a:srgbClr val="1F2D22"/>
-                </a:solidFill>
-              </a:rPr>
-              <a:t>核心信息检索指标的计算。</a:t>
-            </a:r>
-            <a:endParaRPr lang="zh-CN" altLang="en-US" sz="1600" b="0">
+            <a:r>
+              <a:rPr lang="zh-CN" altLang="en-US" sz="2000" dirty="0">
+                <a:solidFill>
+                  <a:srgbClr val="1F2D22"/>
+                </a:solidFill>
+                <a:latin typeface="ui-monospace"/>
+              </a:rPr>
+              <a:t>添加</a:t>
+            </a:r>
+            <a:r>
+              <a:rPr lang="en-US" altLang="zh-CN" sz="2000" dirty="0">
+                <a:solidFill>
+                  <a:srgbClr val="1F2D22"/>
+                </a:solidFill>
+                <a:latin typeface="ui-monospace"/>
+              </a:rPr>
+              <a:t>ES</a:t>
+            </a:r>
+            <a:r>
+              <a:rPr lang="zh-CN" altLang="en-US" sz="2000" dirty="0">
+                <a:solidFill>
+                  <a:srgbClr val="1F2D22"/>
+                </a:solidFill>
+                <a:latin typeface="ui-monospace"/>
+              </a:rPr>
+              <a:t>数据导入脚本</a:t>
+            </a:r>
+            <a:endParaRPr lang="en-US" altLang="zh-CN" sz="2000" dirty="0">
               <a:solidFill>
                 <a:srgbClr val="1F2D22"/>
               </a:solidFill>
+              <a:latin typeface="ui-monospace"/>
             </a:endParaRPr>
           </a:p>
           <a:p>
-            <a:pPr algn="l">
-              <a:defRPr sz="1350" b="0">
-                <a:solidFill>
-                  <a:srgbClr val="1F2D22"/>
-                </a:solidFill>
-              </a:defRPr>
-            </a:pPr>
-            <a:endParaRPr lang="zh-CN" altLang="en-US" sz="1600" b="0">
+            <a:r>
+              <a:rPr lang="zh-CN" altLang="en-US" sz="2000" dirty="0">
+                <a:solidFill>
+                  <a:srgbClr val="1F2D22"/>
+                </a:solidFill>
+                <a:latin typeface="ui-monospace"/>
+              </a:rPr>
+              <a:t>解析</a:t>
+            </a:r>
+            <a:r>
+              <a:rPr lang="en-US" altLang="zh-CN" sz="2000" dirty="0" err="1">
+                <a:solidFill>
+                  <a:srgbClr val="1F2D22"/>
+                </a:solidFill>
+                <a:latin typeface="ui-monospace"/>
+              </a:rPr>
+              <a:t>course_qa.json</a:t>
+            </a:r>
+            <a:r>
+              <a:rPr lang="zh-CN" altLang="en-US" sz="2000" dirty="0">
+                <a:solidFill>
+                  <a:srgbClr val="1F2D22"/>
+                </a:solidFill>
+                <a:latin typeface="ui-monospace"/>
+              </a:rPr>
+              <a:t>并将数据导入</a:t>
+            </a:r>
+            <a:r>
+              <a:rPr lang="en-US" altLang="zh-CN" sz="2000" dirty="0">
+                <a:solidFill>
+                  <a:srgbClr val="1F2D22"/>
+                </a:solidFill>
+                <a:latin typeface="ui-monospace"/>
+              </a:rPr>
+              <a:t>ES</a:t>
+            </a:r>
+            <a:endParaRPr lang="zh-CN" altLang="en-US" sz="2000" dirty="0">
               <a:solidFill>
                 <a:srgbClr val="1F2D22"/>
               </a:solidFill>
-            </a:endParaRPr>
-          </a:p>
-          <a:p>
-            <a:pPr algn="l">
-              <a:defRPr sz="1350" b="0">
-                <a:solidFill>
-                  <a:srgbClr val="1F2D22"/>
-                </a:solidFill>
-              </a:defRPr>
-            </a:pPr>
-            <a:r>
-              <a:rPr lang="zh-CN" altLang="en-US" sz="1600" b="0">
-                <a:solidFill>
-                  <a:srgbClr val="1F2D22"/>
-                </a:solidFill>
-              </a:rPr>
-              <a:t>重排效能</a:t>
-            </a:r>
-            <a:r>
-              <a:rPr lang="zh-CN" altLang="en-US" sz="1600" b="0">
-                <a:solidFill>
-                  <a:srgbClr val="1F2D22"/>
-                </a:solidFill>
-              </a:rPr>
-              <a:t>评测：执行端到端对比实验验证。采用 4 维文本特征重排后，在 </a:t>
-            </a:r>
-            <a:r>
-              <a:rPr lang="en-US" altLang="zh-CN" sz="1600" b="0">
-                <a:solidFill>
-                  <a:srgbClr val="1F2D22"/>
-                </a:solidFill>
-              </a:rPr>
-              <a:t>SearchService </a:t>
-            </a:r>
-            <a:r>
-              <a:rPr lang="zh-CN" altLang="en-US" sz="1600" b="0">
-                <a:solidFill>
-                  <a:srgbClr val="1F2D22"/>
-                </a:solidFill>
-              </a:rPr>
-              <a:t>层</a:t>
-            </a:r>
-            <a:r>
-              <a:rPr lang="zh-CN" altLang="en-US" sz="1600" b="0">
-                <a:solidFill>
-                  <a:srgbClr val="1F2D22"/>
-                </a:solidFill>
-              </a:rPr>
-              <a:t>机型结果拦截，截获底层 </a:t>
-            </a:r>
-            <a:r>
-              <a:rPr lang="en-US" altLang="zh-CN" sz="1600" b="0">
-                <a:solidFill>
-                  <a:srgbClr val="1F2D22"/>
-                </a:solidFill>
-              </a:rPr>
-              <a:t>BM25 </a:t>
-            </a:r>
-            <a:r>
-              <a:rPr lang="zh-CN" altLang="en-US" sz="1600" b="0">
-                <a:solidFill>
-                  <a:srgbClr val="1F2D22"/>
-                </a:solidFill>
-              </a:rPr>
-              <a:t>召回结果后，进行组内分数 </a:t>
-            </a:r>
-            <a:r>
-              <a:rPr lang="en-US" altLang="zh-CN" sz="1600" b="0">
-                <a:solidFill>
-                  <a:srgbClr val="1F2D22"/>
-                </a:solidFill>
-              </a:rPr>
-              <a:t>Min-Max </a:t>
-            </a:r>
-            <a:r>
-              <a:rPr lang="zh-CN" altLang="en-US" sz="1600" b="0">
-                <a:solidFill>
-                  <a:srgbClr val="1F2D22"/>
-                </a:solidFill>
-              </a:rPr>
-              <a:t>归一化与动态重打分，系统成功屏蔽“高命中低营养”的废话回答。</a:t>
-            </a:r>
-            <a:endParaRPr lang="zh-CN" altLang="en-US" sz="1600" b="0">
-              <a:solidFill>
-                <a:srgbClr val="1F2D22"/>
-              </a:solidFill>
+              <a:latin typeface="ui-monospace"/>
             </a:endParaRPr>
           </a:p>
         </p:txBody>
@@ -6235,7 +5782,7 @@
 </p:sld>
 </file>
 
-<file path=ppt/slides/slide13.xml><?xml version="1.0" encoding="utf-8"?>
+<file path=ppt/slides/slide12.xml><?xml version="1.0" encoding="utf-8"?>
 <p:sld xmlns:a="http://schemas.openxmlformats.org/drawingml/2006/main" xmlns:r="http://schemas.openxmlformats.org/officeDocument/2006/relationships" xmlns:p="http://schemas.openxmlformats.org/presentationml/2006/main">
   <p:cSld>
     <p:bg>
@@ -6332,7 +5879,7 @@
                 <a:ea typeface="华文中宋" panose="02010600040101010101" charset="-122"/>
                 <a:cs typeface="+mn-cs"/>
               </a:rPr>
-              <a:t>6</a:t>
+              <a:t>5</a:t>
             </a:r>
             <a:endParaRPr kumimoji="0" sz="13800" b="0" i="0" u="none" strike="noStrike" kern="1200" cap="none" spc="0" normalizeH="0" baseline="0" noProof="0" dirty="0">
               <a:ln>
@@ -6361,8 +5908,8 @@
         </p:nvSpPr>
         <p:spPr>
           <a:xfrm>
-            <a:off x="6331762" y="2685166"/>
-            <a:ext cx="2262158" cy="923330"/>
+            <a:off x="6293290" y="2685166"/>
+            <a:ext cx="2339103" cy="923330"/>
           </a:xfrm>
           <a:prstGeom prst="rect">
             <a:avLst/>
@@ -6374,25 +5921,38 @@
           </a:bodyPr>
           <a:lstStyle/>
           <a:p>
-            <a:pPr algn="ctr">
+            <a:pPr marL="0" marR="0" lvl="0" indent="0" algn="ctr" defTabSz="914400" eaLnBrk="1" fontAlgn="auto" latinLnBrk="0" hangingPunct="1">
+              <a:lnSpc>
+                <a:spcPct val="100000"/>
+              </a:lnSpc>
+              <a:spcBef>
+                <a:spcPts val="0"/>
+              </a:spcBef>
+              <a:spcAft>
+                <a:spcPts val="0"/>
+              </a:spcAft>
+              <a:buClrTx/>
+              <a:buSzTx/>
+              <a:buFontTx/>
+              <a:buNone/>
               <a:defRPr/>
             </a:pPr>
             <a:r>
-              <a:rPr lang="zh-CN" altLang="en-US" sz="5400" b="0" i="0" dirty="0">
-                <a:solidFill>
-                  <a:schemeClr val="bg1"/>
-                </a:solidFill>
-                <a:effectLst/>
-                <a:latin typeface="Color Emoji"/>
-              </a:rPr>
-              <a:t>邢泽雷</a:t>
-            </a:r>
-            <a:endParaRPr kumimoji="0" lang="zh-CN" altLang="en-US" sz="5400" b="1" i="0" u="none" strike="noStrike" kern="1200" cap="none" spc="0" normalizeH="0" baseline="0" noProof="0" dirty="0">
+              <a:rPr lang="zh-CN" altLang="en-US" sz="5400" b="1" dirty="0">
+                <a:solidFill>
+                  <a:prstClr val="white"/>
+                </a:solidFill>
+                <a:latin typeface="Arial" panose="020B0604020202020204"/>
+                <a:ea typeface="华文中宋" panose="02010600040101010101" charset="-122"/>
+              </a:rPr>
+              <a:t>唐熙雷</a:t>
+            </a:r>
+            <a:endParaRPr kumimoji="0" sz="5400" b="1" i="0" u="none" strike="noStrike" kern="1200" cap="none" spc="0" normalizeH="0" baseline="0" noProof="0" dirty="0">
               <a:ln>
                 <a:noFill/>
               </a:ln>
               <a:solidFill>
-                <a:schemeClr val="bg1"/>
+                <a:prstClr val="white"/>
               </a:solidFill>
               <a:effectLst/>
               <a:uLnTx/>
@@ -6412,7 +5972,7 @@
 </p:sld>
 </file>
 
-<file path=ppt/slides/slide14.xml><?xml version="1.0" encoding="utf-8"?>
+<file path=ppt/slides/slide13.xml><?xml version="1.0" encoding="utf-8"?>
 <p:sld xmlns:a="http://schemas.openxmlformats.org/drawingml/2006/main" xmlns:r="http://schemas.openxmlformats.org/officeDocument/2006/relationships" xmlns:p="http://schemas.openxmlformats.org/presentationml/2006/main">
   <p:cSld>
     <p:spTree>
@@ -6498,43 +6058,502 @@
               </a:defRPr>
             </a:pPr>
             <a:r>
-              <a:rPr lang="zh-CN" altLang="en-US" sz="2800" b="0" i="0" dirty="0">
-                <a:effectLst/>
-                <a:latin typeface="Color Emoji"/>
-              </a:rPr>
-              <a:t>邢泽雷</a:t>
-            </a:r>
-            <a:endParaRPr sz="2550" b="1" dirty="0"/>
-          </a:p>
-        </p:txBody>
-      </p:sp>
-      <p:sp>
-        <p:nvSpPr>
-          <p:cNvPr id="3" name="TextBox 2"/>
-          <p:cNvSpPr txBox="1"/>
-          <p:nvPr/>
+              <a:rPr lang="zh-CN" altLang="en-US" sz="2550" b="1" dirty="0">
+                <a:solidFill>
+                  <a:srgbClr val="2D4A33"/>
+                </a:solidFill>
+              </a:rPr>
+              <a:t>唐熙雷</a:t>
+            </a:r>
+            <a:endParaRPr sz="2550" b="1" dirty="0">
+              <a:solidFill>
+                <a:srgbClr val="2D4A33"/>
+              </a:solidFill>
+            </a:endParaRPr>
+          </a:p>
+        </p:txBody>
+      </p:sp>
+      <p:sp>
+        <p:nvSpPr>
+          <p:cNvPr id="4" name="矩形 3"/>
+          <p:cNvSpPr>
+            <a:spLocks noGrp="1"/>
+          </p:cNvSpPr>
+          <p:nvPr>
+            <p:custDataLst>
+              <p:tags r:id="rId1"/>
+            </p:custDataLst>
+          </p:nvPr>
         </p:nvSpPr>
         <p:spPr>
           <a:xfrm>
-            <a:off x="2031318" y="1601734"/>
-            <a:ext cx="8873976" cy="1754326"/>
+            <a:off x="857250" y="1619250"/>
+            <a:ext cx="4762500" cy="4115435"/>
           </a:xfrm>
           <a:prstGeom prst="rect">
             <a:avLst/>
           </a:prstGeom>
-          <a:noFill/>
-        </p:spPr>
-        <p:txBody>
-          <a:bodyPr wrap="square" rtlCol="0">
-            <a:spAutoFit/>
-          </a:bodyPr>
-          <a:lstStyle/>
-          <a:p>
-            <a:r>
-              <a:rPr lang="zh-CN" altLang="zh-CN" dirty="0"/>
-              <a:t>该前端系统基于 Vue 3 和 Tailwind CSS 开发，实现了一个课程技术问答搜索平台。用户可以输入关键词进行检索，并选择 Match、AND、OR、NOT 等不同搜索模式，同时支持基于答案质量分的自定义排序功能。前端通过 Fetch API 向后端搜索接口发送请求，并将返回的搜索结果动态展示在页面上。结果页面不仅显示问题内容和最佳答案，还提供回答质量评分、搜索耗时统计以及全部回答的展开查看功能。整体界面简洁美观，交互流畅，实现了课程问答数据的高效检索与展示。</a:t>
-            </a:r>
-            <a:endParaRPr lang="zh-CN" altLang="en-US" dirty="0"/>
+          <a:solidFill>
+            <a:srgbClr val="FFFFFF"/>
+          </a:solidFill>
+          <a:ln w="9525">
+            <a:solidFill>
+              <a:srgbClr val="C7D0C4"/>
+            </a:solidFill>
+            <a:prstDash val="solid"/>
+          </a:ln>
+        </p:spPr>
+      </p:sp>
+      <p:sp>
+        <p:nvSpPr>
+          <p:cNvPr id="5" name="矩形 4"/>
+          <p:cNvSpPr>
+            <a:spLocks noGrp="1"/>
+          </p:cNvSpPr>
+          <p:nvPr>
+            <p:custDataLst>
+              <p:tags r:id="rId2"/>
+            </p:custDataLst>
+          </p:nvPr>
+        </p:nvSpPr>
+        <p:spPr>
+          <a:xfrm>
+            <a:off x="1085850" y="1790700"/>
+            <a:ext cx="4305300" cy="565150"/>
+          </a:xfrm>
+          <a:prstGeom prst="rect">
+            <a:avLst/>
+          </a:prstGeom>
+          <a:solidFill>
+            <a:srgbClr val="000000">
+              <a:alpha val="0"/>
+            </a:srgbClr>
+          </a:solidFill>
+          <a:ln w="0">
+            <a:solidFill>
+              <a:srgbClr val="000000">
+                <a:alpha val="0"/>
+              </a:srgbClr>
+            </a:solidFill>
+            <a:prstDash val="solid"/>
+          </a:ln>
+        </p:spPr>
+        <p:txBody>
+          <a:bodyPr anchor="ctr"/>
+          <a:lstStyle/>
+          <a:p>
+            <a:pPr algn="l">
+              <a:defRPr sz="1650" b="1">
+                <a:solidFill>
+                  <a:srgbClr val="2D4A33"/>
+                </a:solidFill>
+              </a:defRPr>
+            </a:pPr>
+            <a:r>
+              <a:rPr lang="zh-CN" altLang="en-US" sz="2000" b="1">
+                <a:solidFill>
+                  <a:srgbClr val="2D4A33"/>
+                </a:solidFill>
+              </a:rPr>
+              <a:t>无监督文本特征工程，公式设计</a:t>
+            </a:r>
+          </a:p>
+        </p:txBody>
+      </p:sp>
+      <p:sp>
+        <p:nvSpPr>
+          <p:cNvPr id="6" name="矩形 5"/>
+          <p:cNvSpPr>
+            <a:spLocks noGrp="1"/>
+          </p:cNvSpPr>
+          <p:nvPr>
+            <p:custDataLst>
+              <p:tags r:id="rId3"/>
+            </p:custDataLst>
+          </p:nvPr>
+        </p:nvSpPr>
+        <p:spPr>
+          <a:xfrm>
+            <a:off x="1085850" y="2501265"/>
+            <a:ext cx="4305300" cy="2976880"/>
+          </a:xfrm>
+          <a:prstGeom prst="rect">
+            <a:avLst/>
+          </a:prstGeom>
+          <a:solidFill>
+            <a:srgbClr val="000000">
+              <a:alpha val="0"/>
+            </a:srgbClr>
+          </a:solidFill>
+          <a:ln w="0">
+            <a:solidFill>
+              <a:srgbClr val="000000">
+                <a:alpha val="0"/>
+              </a:srgbClr>
+            </a:solidFill>
+            <a:prstDash val="solid"/>
+          </a:ln>
+        </p:spPr>
+        <p:txBody>
+          <a:bodyPr anchor="ctr"/>
+          <a:lstStyle/>
+          <a:p>
+            <a:pPr algn="l">
+              <a:defRPr sz="1350" b="0">
+                <a:solidFill>
+                  <a:srgbClr val="1F2D22"/>
+                </a:solidFill>
+              </a:defRPr>
+            </a:pPr>
+            <a:r>
+              <a:rPr lang="zh-CN" altLang="en-US" sz="1600" b="0">
+                <a:solidFill>
+                  <a:srgbClr val="1F2D22"/>
+                </a:solidFill>
+              </a:rPr>
+              <a:t>四维公式设计：基于文本内在形态，构建涵盖 </a:t>
+            </a:r>
+            <a:r>
+              <a:rPr lang="en-US" altLang="zh-CN" sz="1600" b="0">
+                <a:solidFill>
+                  <a:srgbClr val="1F2D22"/>
+                </a:solidFill>
+              </a:rPr>
+              <a:t>BM25 </a:t>
+            </a:r>
+            <a:r>
+              <a:rPr lang="zh-CN" altLang="en-US" sz="1600" b="0">
+                <a:solidFill>
+                  <a:srgbClr val="1F2D22"/>
+                </a:solidFill>
+              </a:rPr>
+              <a:t>相关性（55%）、回答绝对长度（15%）、词汇信息密度（15%）、逻辑论证深度（15%）的综合加权评分模型。</a:t>
+            </a:r>
+          </a:p>
+          <a:p>
+            <a:pPr algn="l">
+              <a:defRPr sz="1350" b="0">
+                <a:solidFill>
+                  <a:srgbClr val="1F2D22"/>
+                </a:solidFill>
+              </a:defRPr>
+            </a:pPr>
+            <a:endParaRPr lang="zh-CN" altLang="en-US" sz="1600" b="0">
+              <a:solidFill>
+                <a:srgbClr val="1F2D22"/>
+              </a:solidFill>
+            </a:endParaRPr>
+          </a:p>
+          <a:p>
+            <a:pPr algn="l">
+              <a:defRPr sz="1350" b="0">
+                <a:solidFill>
+                  <a:srgbClr val="1F2D22"/>
+                </a:solidFill>
+              </a:defRPr>
+            </a:pPr>
+            <a:r>
+              <a:rPr lang="zh-CN" altLang="en-US" sz="1600" b="0">
+                <a:solidFill>
+                  <a:srgbClr val="1F2D22"/>
+                </a:solidFill>
+              </a:rPr>
+              <a:t>轻量级逻辑深度指标：创新性提出“逻辑词命中率”特征。硬编码极轻量通用逻辑词典（因果、转折、举例等），精准捕获技术解答中的推导分析深度，摆脱对庞大专业词库的依赖。</a:t>
+            </a:r>
+          </a:p>
+        </p:txBody>
+      </p:sp>
+      <p:sp>
+        <p:nvSpPr>
+          <p:cNvPr id="7" name="矩形 6"/>
+          <p:cNvSpPr>
+            <a:spLocks noGrp="1"/>
+          </p:cNvSpPr>
+          <p:nvPr>
+            <p:custDataLst>
+              <p:tags r:id="rId4"/>
+            </p:custDataLst>
+          </p:nvPr>
+        </p:nvSpPr>
+        <p:spPr>
+          <a:xfrm>
+            <a:off x="6572250" y="1619250"/>
+            <a:ext cx="4762500" cy="4115435"/>
+          </a:xfrm>
+          <a:prstGeom prst="rect">
+            <a:avLst/>
+          </a:prstGeom>
+          <a:solidFill>
+            <a:srgbClr val="FFFFFF"/>
+          </a:solidFill>
+          <a:ln w="9525">
+            <a:solidFill>
+              <a:srgbClr val="C7D0C4"/>
+            </a:solidFill>
+            <a:prstDash val="solid"/>
+          </a:ln>
+        </p:spPr>
+      </p:sp>
+      <p:sp>
+        <p:nvSpPr>
+          <p:cNvPr id="8" name="矩形 7"/>
+          <p:cNvSpPr>
+            <a:spLocks noGrp="1"/>
+          </p:cNvSpPr>
+          <p:nvPr>
+            <p:custDataLst>
+              <p:tags r:id="rId5"/>
+            </p:custDataLst>
+          </p:nvPr>
+        </p:nvSpPr>
+        <p:spPr>
+          <a:xfrm>
+            <a:off x="6800850" y="1790700"/>
+            <a:ext cx="4305300" cy="565150"/>
+          </a:xfrm>
+          <a:prstGeom prst="rect">
+            <a:avLst/>
+          </a:prstGeom>
+          <a:solidFill>
+            <a:srgbClr val="000000">
+              <a:alpha val="0"/>
+            </a:srgbClr>
+          </a:solidFill>
+          <a:ln w="0">
+            <a:solidFill>
+              <a:srgbClr val="000000">
+                <a:alpha val="0"/>
+              </a:srgbClr>
+            </a:solidFill>
+            <a:prstDash val="solid"/>
+          </a:ln>
+        </p:spPr>
+        <p:txBody>
+          <a:bodyPr anchor="ctr"/>
+          <a:lstStyle/>
+          <a:p>
+            <a:pPr algn="l">
+              <a:defRPr sz="1650" b="1">
+                <a:solidFill>
+                  <a:srgbClr val="2D4A33"/>
+                </a:solidFill>
+              </a:defRPr>
+            </a:pPr>
+            <a:r>
+              <a:rPr lang="en-US" altLang="zh-CN" sz="2000" b="1">
+                <a:solidFill>
+                  <a:srgbClr val="2D4A33"/>
+                </a:solidFill>
+              </a:rPr>
+              <a:t>NDCG </a:t>
+            </a:r>
+            <a:r>
+              <a:rPr lang="zh-CN" altLang="en-US" sz="2000" b="1">
+                <a:solidFill>
+                  <a:srgbClr val="2D4A33"/>
+                </a:solidFill>
+              </a:rPr>
+              <a:t>自动化评测</a:t>
+            </a:r>
+          </a:p>
+        </p:txBody>
+      </p:sp>
+      <p:sp>
+        <p:nvSpPr>
+          <p:cNvPr id="9" name="矩形 8"/>
+          <p:cNvSpPr>
+            <a:spLocks noGrp="1"/>
+          </p:cNvSpPr>
+          <p:nvPr>
+            <p:custDataLst>
+              <p:tags r:id="rId6"/>
+            </p:custDataLst>
+          </p:nvPr>
+        </p:nvSpPr>
+        <p:spPr>
+          <a:xfrm>
+            <a:off x="6800850" y="2501265"/>
+            <a:ext cx="4305300" cy="2976880"/>
+          </a:xfrm>
+          <a:prstGeom prst="rect">
+            <a:avLst/>
+          </a:prstGeom>
+          <a:solidFill>
+            <a:srgbClr val="000000">
+              <a:alpha val="0"/>
+            </a:srgbClr>
+          </a:solidFill>
+          <a:ln w="0">
+            <a:solidFill>
+              <a:srgbClr val="000000">
+                <a:alpha val="0"/>
+              </a:srgbClr>
+            </a:solidFill>
+            <a:prstDash val="solid"/>
+          </a:ln>
+        </p:spPr>
+        <p:txBody>
+          <a:bodyPr anchor="ctr"/>
+          <a:lstStyle/>
+          <a:p>
+            <a:pPr algn="l">
+              <a:defRPr sz="1350" b="0">
+                <a:solidFill>
+                  <a:srgbClr val="1F2D22"/>
+                </a:solidFill>
+              </a:defRPr>
+            </a:pPr>
+            <a:r>
+              <a:rPr lang="zh-CN" altLang="en-US" sz="1600" b="0">
+                <a:solidFill>
+                  <a:srgbClr val="1F2D22"/>
+                </a:solidFill>
+              </a:rPr>
+              <a:t>评测基准与真值构建：独立编写 </a:t>
+            </a:r>
+            <a:r>
+              <a:rPr lang="en-US" altLang="zh-CN" sz="1600" b="0">
+                <a:solidFill>
+                  <a:srgbClr val="1F2D22"/>
+                </a:solidFill>
+              </a:rPr>
+              <a:t>evaluator </a:t>
+            </a:r>
+            <a:r>
+              <a:rPr lang="zh-CN" altLang="en-US" sz="1600" b="0">
+                <a:solidFill>
+                  <a:srgbClr val="1F2D22"/>
+                </a:solidFill>
+              </a:rPr>
+              <a:t>自动化测试脚本，解析本地测试集生成 </a:t>
+            </a:r>
+            <a:r>
+              <a:rPr lang="en-US" altLang="zh-CN" sz="1600" b="0">
+                <a:solidFill>
+                  <a:srgbClr val="1F2D22"/>
+                </a:solidFill>
+              </a:rPr>
+              <a:t>Ground Truth，</a:t>
+            </a:r>
+            <a:r>
+              <a:rPr lang="zh-CN" altLang="en-US" sz="1600" b="0">
+                <a:solidFill>
+                  <a:srgbClr val="1F2D22"/>
+                </a:solidFill>
+              </a:rPr>
+              <a:t>实现 </a:t>
+            </a:r>
+            <a:r>
+              <a:rPr lang="en-US" altLang="zh-CN" sz="1600" b="0">
+                <a:solidFill>
+                  <a:srgbClr val="1F2D22"/>
+                </a:solidFill>
+              </a:rPr>
+              <a:t>DCG、IDCG </a:t>
+            </a:r>
+            <a:r>
+              <a:rPr lang="zh-CN" altLang="en-US" sz="1600" b="0">
+                <a:solidFill>
+                  <a:srgbClr val="1F2D22"/>
+                </a:solidFill>
+              </a:rPr>
+              <a:t>与 </a:t>
+            </a:r>
+            <a:r>
+              <a:rPr lang="en-US" altLang="zh-CN" sz="1600" b="0">
+                <a:solidFill>
+                  <a:srgbClr val="1F2D22"/>
+                </a:solidFill>
+              </a:rPr>
+              <a:t>NDCG@10 </a:t>
+            </a:r>
+            <a:r>
+              <a:rPr lang="zh-CN" altLang="en-US" sz="1600" b="0">
+                <a:solidFill>
+                  <a:srgbClr val="1F2D22"/>
+                </a:solidFill>
+              </a:rPr>
+              <a:t>核心信息检索指标的计算。</a:t>
+            </a:r>
+          </a:p>
+          <a:p>
+            <a:pPr algn="l">
+              <a:defRPr sz="1350" b="0">
+                <a:solidFill>
+                  <a:srgbClr val="1F2D22"/>
+                </a:solidFill>
+              </a:defRPr>
+            </a:pPr>
+            <a:endParaRPr lang="zh-CN" altLang="en-US" sz="1600" b="0">
+              <a:solidFill>
+                <a:srgbClr val="1F2D22"/>
+              </a:solidFill>
+            </a:endParaRPr>
+          </a:p>
+          <a:p>
+            <a:pPr algn="l">
+              <a:defRPr sz="1350" b="0">
+                <a:solidFill>
+                  <a:srgbClr val="1F2D22"/>
+                </a:solidFill>
+              </a:defRPr>
+            </a:pPr>
+            <a:r>
+              <a:rPr lang="zh-CN" altLang="en-US" sz="1600" b="0">
+                <a:solidFill>
+                  <a:srgbClr val="1F2D22"/>
+                </a:solidFill>
+              </a:rPr>
+              <a:t>重排效能评测：执行端到端对比实验验证。采用 4 维文本特征重排后，在 </a:t>
+            </a:r>
+            <a:r>
+              <a:rPr lang="en-US" altLang="zh-CN" sz="1600" b="0">
+                <a:solidFill>
+                  <a:srgbClr val="1F2D22"/>
+                </a:solidFill>
+              </a:rPr>
+              <a:t>SearchService </a:t>
+            </a:r>
+            <a:r>
+              <a:rPr lang="zh-CN" altLang="en-US" sz="1600" b="0">
+                <a:solidFill>
+                  <a:srgbClr val="1F2D22"/>
+                </a:solidFill>
+              </a:rPr>
+              <a:t>层机型结果拦截，截获底层 </a:t>
+            </a:r>
+            <a:r>
+              <a:rPr lang="en-US" altLang="zh-CN" sz="1600" b="0">
+                <a:solidFill>
+                  <a:srgbClr val="1F2D22"/>
+                </a:solidFill>
+              </a:rPr>
+              <a:t>BM25 </a:t>
+            </a:r>
+            <a:r>
+              <a:rPr lang="zh-CN" altLang="en-US" sz="1600" b="0">
+                <a:solidFill>
+                  <a:srgbClr val="1F2D22"/>
+                </a:solidFill>
+              </a:rPr>
+              <a:t>召回结果后，进行组内分数 </a:t>
+            </a:r>
+            <a:r>
+              <a:rPr lang="en-US" altLang="zh-CN" sz="1600" b="0">
+                <a:solidFill>
+                  <a:srgbClr val="1F2D22"/>
+                </a:solidFill>
+              </a:rPr>
+              <a:t>Min-Max </a:t>
+            </a:r>
+            <a:r>
+              <a:rPr lang="zh-CN" altLang="en-US" sz="1600" b="0">
+                <a:solidFill>
+                  <a:srgbClr val="1F2D22"/>
+                </a:solidFill>
+              </a:rPr>
+              <a:t>归一化与动态重打分，系统成功屏蔽“高命中低营养”的废话回答。</a:t>
+            </a:r>
           </a:p>
         </p:txBody>
       </p:sp>
@@ -6546,7 +6565,7 @@
 </p:sld>
 </file>
 
-<file path=ppt/slides/slide15.xml><?xml version="1.0" encoding="utf-8"?>
+<file path=ppt/slides/slide14.xml><?xml version="1.0" encoding="utf-8"?>
 <p:sld xmlns:a="http://schemas.openxmlformats.org/drawingml/2006/main" xmlns:r="http://schemas.openxmlformats.org/officeDocument/2006/relationships" xmlns:p="http://schemas.openxmlformats.org/presentationml/2006/main">
   <p:cSld>
     <p:bg>
@@ -6629,14 +6648,21 @@
               <a:t>0</a:t>
             </a:r>
             <a:r>
-              <a:rPr lang="en-US" sz="13800" dirty="0">
+              <a:rPr kumimoji="0" lang="en-US" sz="13800" b="0" i="0" u="none" strike="noStrike" kern="1200" cap="none" spc="0" normalizeH="0" baseline="0" noProof="0" dirty="0">
+                <a:ln>
+                  <a:noFill/>
+                </a:ln>
                 <a:solidFill>
                   <a:srgbClr val="F5F4F9"/>
                 </a:solidFill>
+                <a:effectLst/>
+                <a:uLnTx/>
+                <a:uFillTx/>
                 <a:latin typeface="Arial" panose="020B0604020202020204"/>
                 <a:ea typeface="华文中宋" panose="02010600040101010101" charset="-122"/>
-              </a:rPr>
-              <a:t>7</a:t>
+                <a:cs typeface="+mn-cs"/>
+              </a:rPr>
+              <a:t>6</a:t>
             </a:r>
             <a:endParaRPr kumimoji="0" sz="13800" b="0" i="0" u="none" strike="noStrike" kern="1200" cap="none" spc="0" normalizeH="0" baseline="0" noProof="0" dirty="0">
               <a:ln>
@@ -6665,7 +6691,7 @@
         </p:nvSpPr>
         <p:spPr>
           <a:xfrm>
-            <a:off x="6331764" y="2685166"/>
+            <a:off x="6331762" y="2685166"/>
             <a:ext cx="2262158" cy="923330"/>
           </a:xfrm>
           <a:prstGeom prst="rect">
@@ -6678,38 +6704,25 @@
           </a:bodyPr>
           <a:lstStyle/>
           <a:p>
-            <a:pPr marL="0" marR="0" lvl="0" indent="0" algn="ctr" defTabSz="914400" eaLnBrk="1" fontAlgn="auto" latinLnBrk="0" hangingPunct="1">
-              <a:lnSpc>
-                <a:spcPct val="100000"/>
-              </a:lnSpc>
-              <a:spcBef>
-                <a:spcPts val="0"/>
-              </a:spcBef>
-              <a:spcAft>
-                <a:spcPts val="0"/>
-              </a:spcAft>
-              <a:buClrTx/>
-              <a:buSzTx/>
-              <a:buFontTx/>
-              <a:buNone/>
+            <a:pPr algn="ctr">
               <a:defRPr/>
             </a:pPr>
             <a:r>
-              <a:rPr lang="zh-CN" altLang="en-US" sz="5400" dirty="0">
-                <a:solidFill>
-                  <a:prstClr val="white"/>
-                </a:solidFill>
+              <a:rPr lang="zh-CN" altLang="en-US" sz="5400" b="0" i="0" dirty="0">
+                <a:solidFill>
+                  <a:schemeClr val="bg1"/>
+                </a:solidFill>
+                <a:effectLst/>
                 <a:latin typeface="Color Emoji"/>
-                <a:ea typeface="华文中宋" panose="02010600040101010101" charset="-122"/>
-              </a:rPr>
-              <a:t>汤语涵</a:t>
+              </a:rPr>
+              <a:t>邢泽雷</a:t>
             </a:r>
             <a:endParaRPr kumimoji="0" lang="zh-CN" altLang="en-US" sz="5400" b="1" i="0" u="none" strike="noStrike" kern="1200" cap="none" spc="0" normalizeH="0" baseline="0" noProof="0" dirty="0">
               <a:ln>
                 <a:noFill/>
               </a:ln>
               <a:solidFill>
-                <a:prstClr val="white"/>
+                <a:schemeClr val="bg1"/>
               </a:solidFill>
               <a:effectLst/>
               <a:uLnTx/>
@@ -6729,7 +6742,7 @@
 </p:sld>
 </file>
 
-<file path=ppt/slides/slide16.xml><?xml version="1.0" encoding="utf-8"?>
+<file path=ppt/slides/slide15.xml><?xml version="1.0" encoding="utf-8"?>
 <p:sld xmlns:a="http://schemas.openxmlformats.org/drawingml/2006/main" xmlns:r="http://schemas.openxmlformats.org/officeDocument/2006/relationships" xmlns:p="http://schemas.openxmlformats.org/presentationml/2006/main">
   <p:cSld>
     <p:spTree>
@@ -6815,6 +6828,323 @@
               </a:defRPr>
             </a:pPr>
             <a:r>
+              <a:rPr lang="zh-CN" altLang="en-US" sz="2800" b="0" i="0" dirty="0">
+                <a:effectLst/>
+                <a:latin typeface="Color Emoji"/>
+              </a:rPr>
+              <a:t>邢泽雷</a:t>
+            </a:r>
+            <a:endParaRPr sz="2550" b="1" dirty="0"/>
+          </a:p>
+        </p:txBody>
+      </p:sp>
+      <p:sp>
+        <p:nvSpPr>
+          <p:cNvPr id="3" name="TextBox 2"/>
+          <p:cNvSpPr txBox="1"/>
+          <p:nvPr/>
+        </p:nvSpPr>
+        <p:spPr>
+          <a:xfrm>
+            <a:off x="2031318" y="1601734"/>
+            <a:ext cx="8873976" cy="1754326"/>
+          </a:xfrm>
+          <a:prstGeom prst="rect">
+            <a:avLst/>
+          </a:prstGeom>
+          <a:noFill/>
+        </p:spPr>
+        <p:txBody>
+          <a:bodyPr wrap="square" rtlCol="0">
+            <a:spAutoFit/>
+          </a:bodyPr>
+          <a:lstStyle/>
+          <a:p>
+            <a:r>
+              <a:rPr lang="zh-CN" altLang="zh-CN" dirty="0"/>
+              <a:t>该前端系统基于 Vue 3 和 Tailwind CSS 开发，实现了一个课程技术问答搜索平台。用户可以输入关键词进行检索，并选择 Match、AND、OR、NOT 等不同搜索模式，同时支持基于答案质量分的自定义排序功能。前端通过 Fetch API 向后端搜索接口发送请求，并将返回的搜索结果动态展示在页面上。结果页面不仅显示问题内容和最佳答案，还提供回答质量评分、搜索耗时统计以及全部回答的展开查看功能。整体界面简洁美观，交互流畅，实现了课程问答数据的高效检索与展示。</a:t>
+            </a:r>
+            <a:endParaRPr lang="zh-CN" altLang="en-US" dirty="0"/>
+          </a:p>
+        </p:txBody>
+      </p:sp>
+    </p:spTree>
+  </p:cSld>
+  <p:clrMapOvr>
+    <a:masterClrMapping/>
+  </p:clrMapOvr>
+</p:sld>
+</file>
+
+<file path=ppt/slides/slide16.xml><?xml version="1.0" encoding="utf-8"?>
+<p:sld xmlns:a="http://schemas.openxmlformats.org/drawingml/2006/main" xmlns:r="http://schemas.openxmlformats.org/officeDocument/2006/relationships" xmlns:p="http://schemas.openxmlformats.org/presentationml/2006/main">
+  <p:cSld>
+    <p:bg>
+      <p:bgPr>
+        <a:solidFill>
+          <a:srgbClr val="253A2A"/>
+        </a:solidFill>
+        <a:effectLst/>
+      </p:bgPr>
+    </p:bg>
+    <p:spTree>
+      <p:nvGrpSpPr>
+        <p:cNvPr id="1" name=""/>
+        <p:cNvGrpSpPr/>
+        <p:nvPr/>
+      </p:nvGrpSpPr>
+      <p:grpSpPr>
+        <a:xfrm>
+          <a:off x="0" y="0"/>
+          <a:ext cx="0" cy="0"/>
+          <a:chOff x="0" y="0"/>
+          <a:chExt cx="0" cy="0"/>
+        </a:xfrm>
+      </p:grpSpPr>
+      <p:sp>
+        <p:nvSpPr>
+          <p:cNvPr id="11" name="文本框 10"/>
+          <p:cNvSpPr>
+            <a:spLocks noGrp="1"/>
+          </p:cNvSpPr>
+          <p:nvPr/>
+        </p:nvSpPr>
+        <p:spPr>
+          <a:xfrm>
+            <a:off x="2614979" y="2321005"/>
+            <a:ext cx="2604077" cy="2215991"/>
+          </a:xfrm>
+          <a:prstGeom prst="rect">
+            <a:avLst/>
+          </a:prstGeom>
+          <a:noFill/>
+        </p:spPr>
+        <p:txBody>
+          <a:bodyPr wrap="square">
+            <a:spAutoFit/>
+          </a:bodyPr>
+          <a:lstStyle/>
+          <a:p>
+            <a:pPr marL="0" marR="0" lvl="0" indent="0" algn="ctr" defTabSz="914400" eaLnBrk="1" fontAlgn="auto" latinLnBrk="0" hangingPunct="1">
+              <a:lnSpc>
+                <a:spcPct val="100000"/>
+              </a:lnSpc>
+              <a:spcBef>
+                <a:spcPts val="0"/>
+              </a:spcBef>
+              <a:spcAft>
+                <a:spcPts val="0"/>
+              </a:spcAft>
+              <a:buClrTx/>
+              <a:buSzTx/>
+              <a:buFontTx/>
+              <a:buNone/>
+              <a:defRPr/>
+            </a:pPr>
+            <a:r>
+              <a:rPr kumimoji="0" sz="13800" b="0" i="0" u="none" strike="noStrike" kern="1200" cap="none" spc="0" normalizeH="0" baseline="0" noProof="0" dirty="0">
+                <a:ln>
+                  <a:noFill/>
+                </a:ln>
+                <a:solidFill>
+                  <a:srgbClr val="F5F4F9"/>
+                </a:solidFill>
+                <a:effectLst/>
+                <a:uLnTx/>
+                <a:uFillTx/>
+                <a:latin typeface="Arial" panose="020B0604020202020204"/>
+                <a:ea typeface="华文中宋" panose="02010600040101010101" charset="-122"/>
+                <a:cs typeface="+mn-cs"/>
+              </a:rPr>
+              <a:t>0</a:t>
+            </a:r>
+            <a:r>
+              <a:rPr lang="en-US" sz="13800" dirty="0">
+                <a:solidFill>
+                  <a:srgbClr val="F5F4F9"/>
+                </a:solidFill>
+                <a:latin typeface="Arial" panose="020B0604020202020204"/>
+                <a:ea typeface="华文中宋" panose="02010600040101010101" charset="-122"/>
+              </a:rPr>
+              <a:t>7</a:t>
+            </a:r>
+            <a:endParaRPr kumimoji="0" sz="13800" b="0" i="0" u="none" strike="noStrike" kern="1200" cap="none" spc="0" normalizeH="0" baseline="0" noProof="0" dirty="0">
+              <a:ln>
+                <a:noFill/>
+              </a:ln>
+              <a:solidFill>
+                <a:srgbClr val="F5F4F9"/>
+              </a:solidFill>
+              <a:effectLst/>
+              <a:uLnTx/>
+              <a:uFillTx/>
+              <a:latin typeface="Arial" panose="020B0604020202020204"/>
+              <a:ea typeface="华文中宋" panose="02010600040101010101" charset="-122"/>
+              <a:cs typeface="+mn-cs"/>
+            </a:endParaRPr>
+          </a:p>
+        </p:txBody>
+      </p:sp>
+      <p:sp>
+        <p:nvSpPr>
+          <p:cNvPr id="13" name="矩形 12"/>
+          <p:cNvSpPr>
+            <a:spLocks noGrp="1"/>
+          </p:cNvSpPr>
+          <p:nvPr/>
+        </p:nvSpPr>
+        <p:spPr>
+          <a:xfrm>
+            <a:off x="6331764" y="2685166"/>
+            <a:ext cx="2262158" cy="923330"/>
+          </a:xfrm>
+          <a:prstGeom prst="rect">
+            <a:avLst/>
+          </a:prstGeom>
+        </p:spPr>
+        <p:txBody>
+          <a:bodyPr wrap="none">
+            <a:spAutoFit/>
+          </a:bodyPr>
+          <a:lstStyle/>
+          <a:p>
+            <a:pPr marL="0" marR="0" lvl="0" indent="0" algn="ctr" defTabSz="914400" eaLnBrk="1" fontAlgn="auto" latinLnBrk="0" hangingPunct="1">
+              <a:lnSpc>
+                <a:spcPct val="100000"/>
+              </a:lnSpc>
+              <a:spcBef>
+                <a:spcPts val="0"/>
+              </a:spcBef>
+              <a:spcAft>
+                <a:spcPts val="0"/>
+              </a:spcAft>
+              <a:buClrTx/>
+              <a:buSzTx/>
+              <a:buFontTx/>
+              <a:buNone/>
+              <a:defRPr/>
+            </a:pPr>
+            <a:r>
+              <a:rPr lang="zh-CN" altLang="en-US" sz="5400" dirty="0">
+                <a:solidFill>
+                  <a:prstClr val="white"/>
+                </a:solidFill>
+                <a:latin typeface="Color Emoji"/>
+                <a:ea typeface="华文中宋" panose="02010600040101010101" charset="-122"/>
+              </a:rPr>
+              <a:t>汤语涵</a:t>
+            </a:r>
+            <a:endParaRPr kumimoji="0" lang="zh-CN" altLang="en-US" sz="5400" b="1" i="0" u="none" strike="noStrike" kern="1200" cap="none" spc="0" normalizeH="0" baseline="0" noProof="0" dirty="0">
+              <a:ln>
+                <a:noFill/>
+              </a:ln>
+              <a:solidFill>
+                <a:prstClr val="white"/>
+              </a:solidFill>
+              <a:effectLst/>
+              <a:uLnTx/>
+              <a:uFillTx/>
+              <a:latin typeface="Arial" panose="020B0604020202020204"/>
+              <a:ea typeface="华文中宋" panose="02010600040101010101" charset="-122"/>
+              <a:cs typeface="+mn-cs"/>
+            </a:endParaRPr>
+          </a:p>
+        </p:txBody>
+      </p:sp>
+    </p:spTree>
+  </p:cSld>
+  <p:clrMapOvr>
+    <a:masterClrMapping/>
+  </p:clrMapOvr>
+</p:sld>
+</file>
+
+<file path=ppt/slides/slide17.xml><?xml version="1.0" encoding="utf-8"?>
+<p:sld xmlns:a="http://schemas.openxmlformats.org/drawingml/2006/main" xmlns:r="http://schemas.openxmlformats.org/officeDocument/2006/relationships" xmlns:p="http://schemas.openxmlformats.org/presentationml/2006/main">
+  <p:cSld>
+    <p:spTree>
+      <p:nvGrpSpPr>
+        <p:cNvPr id="1" name=""/>
+        <p:cNvGrpSpPr/>
+        <p:nvPr/>
+      </p:nvGrpSpPr>
+      <p:grpSpPr>
+        <a:xfrm>
+          <a:off x="0" y="0"/>
+          <a:ext cx="0" cy="0"/>
+          <a:chOff x="0" y="0"/>
+          <a:chExt cx="0" cy="0"/>
+        </a:xfrm>
+      </p:grpSpPr>
+      <p:sp>
+        <p:nvSpPr>
+          <p:cNvPr id="13" name="矩形 12"/>
+          <p:cNvSpPr>
+            <a:spLocks noGrp="1"/>
+          </p:cNvSpPr>
+          <p:nvPr/>
+        </p:nvSpPr>
+        <p:spPr>
+          <a:xfrm>
+            <a:off x="0" y="0"/>
+            <a:ext cx="12192000" cy="114300"/>
+          </a:xfrm>
+          <a:prstGeom prst="rect">
+            <a:avLst/>
+          </a:prstGeom>
+          <a:solidFill>
+            <a:srgbClr val="2D4A33"/>
+          </a:solidFill>
+          <a:ln w="0">
+            <a:solidFill>
+              <a:srgbClr val="2D4A33"/>
+            </a:solidFill>
+            <a:prstDash val="solid"/>
+          </a:ln>
+        </p:spPr>
+      </p:sp>
+      <p:sp>
+        <p:nvSpPr>
+          <p:cNvPr id="2" name="矩形 1"/>
+          <p:cNvSpPr>
+            <a:spLocks noGrp="1"/>
+          </p:cNvSpPr>
+          <p:nvPr/>
+        </p:nvSpPr>
+        <p:spPr>
+          <a:xfrm>
+            <a:off x="762000" y="400050"/>
+            <a:ext cx="10668000" cy="457200"/>
+          </a:xfrm>
+          <a:prstGeom prst="rect">
+            <a:avLst/>
+          </a:prstGeom>
+          <a:solidFill>
+            <a:srgbClr val="000000">
+              <a:alpha val="0"/>
+            </a:srgbClr>
+          </a:solidFill>
+          <a:ln w="0">
+            <a:solidFill>
+              <a:srgbClr val="000000">
+                <a:alpha val="0"/>
+              </a:srgbClr>
+            </a:solidFill>
+            <a:prstDash val="solid"/>
+          </a:ln>
+        </p:spPr>
+        <p:txBody>
+          <a:bodyPr anchor="ctr"/>
+          <a:lstStyle/>
+          <a:p>
+            <a:pPr algn="ctr">
+              <a:defRPr sz="2550" b="1">
+                <a:solidFill>
+                  <a:srgbClr val="2D4A33"/>
+                </a:solidFill>
+              </a:defRPr>
+            </a:pPr>
+            <a:r>
               <a:rPr lang="zh-CN" altLang="en-US" sz="2800" dirty="0">
                 <a:latin typeface="Color Emoji"/>
               </a:rPr>
@@ -7241,6 +7571,24 @@
               </a:rPr>
               <a:t>ES</a:t>
             </a:r>
+          </a:p>
+          <a:p>
+            <a:pPr algn="l">
+              <a:defRPr sz="1350" b="0">
+                <a:solidFill>
+                  <a:srgbClr val="1F2D22"/>
+                </a:solidFill>
+              </a:defRPr>
+            </a:pPr>
+            <a:r>
+              <a:rPr lang="zh-CN" altLang="en-US" sz="2000" dirty="0">
+                <a:solidFill>
+                  <a:srgbClr val="1F2D22"/>
+                </a:solidFill>
+                <a:latin typeface="ui-monospace"/>
+              </a:rPr>
+              <a:t>查询数据：</a:t>
+            </a:r>
             <a:endParaRPr lang="en-US" altLang="zh-CN" sz="2000" dirty="0">
               <a:solidFill>
                 <a:srgbClr val="1F2D22"/>
@@ -7263,14 +7611,17 @@
                 </a:solidFill>
                 <a:latin typeface="ui-monospace"/>
               </a:rPr>
-              <a:t>查询数据：</a:t>
-            </a:r>
-            <a:endParaRPr lang="en-US" altLang="zh-CN" sz="2000" dirty="0">
-              <a:solidFill>
-                <a:srgbClr val="1F2D22"/>
-              </a:solidFill>
-              <a:latin typeface="ui-monospace"/>
-            </a:endParaRPr>
+              <a:t>写入用 </a:t>
+            </a:r>
+            <a:r>
+              <a:rPr lang="en-US" sz="2000" dirty="0">
+                <a:solidFill>
+                  <a:srgbClr val="1F2D22"/>
+                </a:solidFill>
+                <a:latin typeface="ui-monospace"/>
+              </a:rPr>
+              <a:t>POST /{index}/_bulk</a:t>
+            </a:r>
           </a:p>
           <a:p>
             <a:pPr algn="l">
@@ -7287,7 +7638,7 @@
                 </a:solidFill>
                 <a:latin typeface="ui-monospace"/>
               </a:rPr>
-              <a:t>写入用 </a:t>
+              <a:t>查询用 </a:t>
             </a:r>
             <a:r>
               <a:rPr lang="en-US" sz="2000" dirty="0">
@@ -7296,47 +7647,8 @@
                 </a:solidFill>
                 <a:latin typeface="ui-monospace"/>
               </a:rPr>
-              <a:t>POST /{index}/_bulk</a:t>
-            </a:r>
-            <a:endParaRPr lang="en-US" sz="2000" dirty="0">
-              <a:solidFill>
-                <a:srgbClr val="1F2D22"/>
-              </a:solidFill>
-              <a:latin typeface="ui-monospace"/>
-            </a:endParaRPr>
-          </a:p>
-          <a:p>
-            <a:pPr algn="l">
-              <a:defRPr sz="1350" b="0">
-                <a:solidFill>
-                  <a:srgbClr val="1F2D22"/>
-                </a:solidFill>
-              </a:defRPr>
-            </a:pPr>
-            <a:r>
-              <a:rPr lang="zh-CN" altLang="en-US" sz="2000" dirty="0">
-                <a:solidFill>
-                  <a:srgbClr val="1F2D22"/>
-                </a:solidFill>
-                <a:latin typeface="ui-monospace"/>
-              </a:rPr>
-              <a:t>查询用 </a:t>
-            </a:r>
-            <a:r>
-              <a:rPr lang="en-US" sz="2000" dirty="0">
-                <a:solidFill>
-                  <a:srgbClr val="1F2D22"/>
-                </a:solidFill>
-                <a:latin typeface="ui-monospace"/>
-              </a:rPr>
               <a:t>POST /{index}/_search</a:t>
             </a:r>
-            <a:endParaRPr lang="en-US" sz="2000" dirty="0">
-              <a:solidFill>
-                <a:srgbClr val="1F2D22"/>
-              </a:solidFill>
-              <a:latin typeface="ui-monospace"/>
-            </a:endParaRPr>
           </a:p>
           <a:p>
             <a:pPr algn="l">
@@ -7399,10 +7711,34 @@
             <a:tbl>
               <a:tblPr/>
               <a:tblGrid>
-                <a:gridCol w="1725706"/>
-                <a:gridCol w="1725706"/>
-                <a:gridCol w="1725706"/>
-                <a:gridCol w="1725706"/>
+                <a:gridCol w="1725706">
+                  <a:extLst>
+                    <a:ext uri="{9D8B030D-6E8A-4147-A177-3AD203B41FA5}">
+                      <a16:colId xmlns:a16="http://schemas.microsoft.com/office/drawing/2014/main" val="20000"/>
+                    </a:ext>
+                  </a:extLst>
+                </a:gridCol>
+                <a:gridCol w="1725706">
+                  <a:extLst>
+                    <a:ext uri="{9D8B030D-6E8A-4147-A177-3AD203B41FA5}">
+                      <a16:colId xmlns:a16="http://schemas.microsoft.com/office/drawing/2014/main" val="20001"/>
+                    </a:ext>
+                  </a:extLst>
+                </a:gridCol>
+                <a:gridCol w="1725706">
+                  <a:extLst>
+                    <a:ext uri="{9D8B030D-6E8A-4147-A177-3AD203B41FA5}">
+                      <a16:colId xmlns:a16="http://schemas.microsoft.com/office/drawing/2014/main" val="20002"/>
+                    </a:ext>
+                  </a:extLst>
+                </a:gridCol>
+                <a:gridCol w="1725706">
+                  <a:extLst>
+                    <a:ext uri="{9D8B030D-6E8A-4147-A177-3AD203B41FA5}">
+                      <a16:colId xmlns:a16="http://schemas.microsoft.com/office/drawing/2014/main" val="20003"/>
+                    </a:ext>
+                  </a:extLst>
+                </a:gridCol>
               </a:tblGrid>
               <a:tr h="239952">
                 <a:tc>
@@ -7419,9 +7755,6 @@
                         </a:rPr>
                         <a:t>特征</a:t>
                       </a:r>
-                      <a:endParaRPr lang="zh-CN">
-                        <a:effectLst/>
-                      </a:endParaRPr>
                     </a:p>
                   </a:txBody>
                   <a:tcPr marL="28575" marR="28575" marT="19050" marB="19050" anchor="ctr">
@@ -7466,9 +7799,6 @@
                         </a:rPr>
                         <a:t>权重</a:t>
                       </a:r>
-                      <a:endParaRPr lang="zh-CN">
-                        <a:effectLst/>
-                      </a:endParaRPr>
                     </a:p>
                   </a:txBody>
                   <a:tcPr marL="28575" marR="28575" marT="19050" marB="19050" anchor="ctr">
@@ -7519,9 +7849,6 @@
                         </a:rPr>
                         <a:t>计算方式</a:t>
                       </a:r>
-                      <a:endParaRPr lang="zh-CN">
-                        <a:effectLst/>
-                      </a:endParaRPr>
                     </a:p>
                   </a:txBody>
                   <a:tcPr marL="28575" marR="28575" marT="19050" marB="19050" anchor="ctr">
@@ -7572,9 +7899,6 @@
                         </a:rPr>
                         <a:t>为什么有效</a:t>
                       </a:r>
-                      <a:endParaRPr lang="zh-CN">
-                        <a:effectLst/>
-                      </a:endParaRPr>
                     </a:p>
                   </a:txBody>
                   <a:tcPr marL="28575" marR="28575" marT="19050" marB="19050" anchor="ctr">
@@ -7605,6 +7929,11 @@
                     <a:noFill/>
                   </a:tcPr>
                 </a:tc>
+                <a:extLst>
+                  <a:ext uri="{0D108BD9-81ED-4DB2-BD59-A6C34878D82A}">
+                    <a16:rowId xmlns:a16="http://schemas.microsoft.com/office/drawing/2014/main" val="10000"/>
+                  </a:ext>
+                </a:extLst>
               </a:tr>
               <a:tr h="1082711">
                 <a:tc>
@@ -7674,9 +8003,6 @@
                         </a:rPr>
                         <a:t>50%</a:t>
                       </a:r>
-                      <a:endParaRPr lang="zh-CN">
-                        <a:effectLst/>
-                      </a:endParaRPr>
                     </a:p>
                   </a:txBody>
                   <a:tcPr marL="28575" marR="28575" marT="19050" marB="19050" anchor="ctr">
@@ -7730,7 +8056,7 @@
                       <a:r>
                         <a:rPr lang="zh-CN" b="0" u="none" strike="noStrike">
                           <a:effectLst/>
-                          <a:hlinkClick r:id="rId1"/>
+                          <a:hlinkClick r:id="rId3"/>
                         </a:rPr>
                         <a:t>min(字符数 / 150, 1)</a:t>
                       </a:r>
@@ -7793,9 +8119,6 @@
                         </a:rPr>
                         <a:t>高质量回答需要展开论述，必然更长；低质量回答往往一句话敷衍</a:t>
                       </a:r>
-                      <a:endParaRPr lang="zh-CN">
-                        <a:effectLst/>
-                      </a:endParaRPr>
                     </a:p>
                   </a:txBody>
                   <a:tcPr marL="28575" marR="28575" marT="19050" marB="19050" anchor="ctr">
@@ -7832,6 +8155,11 @@
                     <a:noFill/>
                   </a:tcPr>
                 </a:tc>
+                <a:extLst>
+                  <a:ext uri="{0D108BD9-81ED-4DB2-BD59-A6C34878D82A}">
+                    <a16:rowId xmlns:a16="http://schemas.microsoft.com/office/drawing/2014/main" val="10001"/>
+                  </a:ext>
+                </a:extLst>
               </a:tr>
               <a:tr h="1082711">
                 <a:tc>
@@ -7901,9 +8229,6 @@
                         </a:rPr>
                         <a:t>25%</a:t>
                       </a:r>
-                      <a:endParaRPr lang="zh-CN">
-                        <a:effectLst/>
-                      </a:endParaRPr>
                     </a:p>
                   </a:txBody>
                   <a:tcPr marL="28575" marR="28575" marT="19050" marB="19050" anchor="ctr">
@@ -7960,9 +8285,6 @@
                         </a:rPr>
                         <a:t>组内 min-max 归一化 BM25 分数</a:t>
                       </a:r>
-                      <a:endParaRPr lang="zh-CN">
-                        <a:effectLst/>
-                      </a:endParaRPr>
                     </a:p>
                   </a:txBody>
                   <a:tcPr marL="28575" marR="28575" marT="19050" marB="19050" anchor="ctr">
@@ -8019,9 +8341,6 @@
                         </a:rPr>
                         <a:t>BM25 越高说明答案与问题的词汇重合度越好，即"答非所问"的答案得分低</a:t>
                       </a:r>
-                      <a:endParaRPr lang="zh-CN">
-                        <a:effectLst/>
-                      </a:endParaRPr>
                     </a:p>
                   </a:txBody>
                   <a:tcPr marL="28575" marR="28575" marT="19050" marB="19050" anchor="ctr">
@@ -8058,6 +8377,11 @@
                     <a:noFill/>
                   </a:tcPr>
                 </a:tc>
+                <a:extLst>
+                  <a:ext uri="{0D108BD9-81ED-4DB2-BD59-A6C34878D82A}">
+                    <a16:rowId xmlns:a16="http://schemas.microsoft.com/office/drawing/2014/main" val="10002"/>
+                  </a:ext>
+                </a:extLst>
               </a:tr>
               <a:tr h="872021">
                 <a:tc>
@@ -8121,9 +8445,6 @@
                         </a:rPr>
                         <a:t>25%</a:t>
                       </a:r>
-                      <a:endParaRPr lang="zh-CN" dirty="0">
-                        <a:effectLst/>
-                      </a:endParaRPr>
                     </a:p>
                   </a:txBody>
                   <a:tcPr marL="28575" marR="28575" marT="19050" marB="19050" anchor="ctr">
@@ -8174,9 +8495,6 @@
                         </a:rPr>
                         <a:t>去标点后不重复字符数 / 80</a:t>
                       </a:r>
-                      <a:endParaRPr lang="zh-CN">
-                        <a:effectLst/>
-                      </a:endParaRPr>
                     </a:p>
                   </a:txBody>
                   <a:tcPr marL="28575" marR="28575" marT="19050" marB="19050" anchor="ctr">
@@ -8227,9 +8545,6 @@
                         </a:rPr>
                         <a:t>高质量回答使用更多专业术语和不同概念，去重字符种类更多</a:t>
                       </a:r>
-                      <a:endParaRPr lang="zh-CN" dirty="0">
-                        <a:effectLst/>
-                      </a:endParaRPr>
                     </a:p>
                   </a:txBody>
                   <a:tcPr marL="28575" marR="28575" marT="19050" marB="19050" anchor="ctr">
@@ -8260,6 +8575,11 @@
                     <a:noFill/>
                   </a:tcPr>
                 </a:tc>
+                <a:extLst>
+                  <a:ext uri="{0D108BD9-81ED-4DB2-BD59-A6C34878D82A}">
+                    <a16:rowId xmlns:a16="http://schemas.microsoft.com/office/drawing/2014/main" val="10003"/>
+                  </a:ext>
+                </a:extLst>
               </a:tr>
             </a:tbl>
           </a:graphicData>
@@ -8326,7 +8646,7 @@
 </p:sld>
 </file>
 
-<file path=ppt/slides/slide17.xml><?xml version="1.0" encoding="utf-8"?>
+<file path=ppt/slides/slide18.xml><?xml version="1.0" encoding="utf-8"?>
 <p:sld xmlns:a="http://schemas.openxmlformats.org/drawingml/2006/main" xmlns:r="http://schemas.openxmlformats.org/officeDocument/2006/relationships" xmlns:p="http://schemas.openxmlformats.org/presentationml/2006/main">
   <p:cSld>
     <p:spTree>
@@ -8389,6 +8709,7 @@
             <a:pPr algn="ctr">
               <a:buNone/>
             </a:pPr>
+            <a:endParaRPr/>
           </a:p>
         </p:txBody>
       </p:sp>
@@ -8541,6 +8862,7 @@
             <a:pPr algn="ctr">
               <a:buNone/>
             </a:pPr>
+            <a:endParaRPr/>
           </a:p>
         </p:txBody>
       </p:sp>
@@ -8590,6 +8912,7 @@
             <a:pPr algn="ctr">
               <a:buNone/>
             </a:pPr>
+            <a:endParaRPr/>
           </a:p>
         </p:txBody>
       </p:sp>
@@ -8639,6 +8962,7 @@
             <a:pPr algn="ctr">
               <a:buNone/>
             </a:pPr>
+            <a:endParaRPr/>
           </a:p>
         </p:txBody>
       </p:sp>
@@ -8688,6 +9012,7 @@
             <a:pPr algn="ctr">
               <a:buNone/>
             </a:pPr>
+            <a:endParaRPr/>
           </a:p>
         </p:txBody>
       </p:sp>
@@ -8739,6 +9064,7 @@
             <a:pPr algn="ctr">
               <a:buNone/>
             </a:pPr>
+            <a:endParaRPr/>
           </a:p>
         </p:txBody>
       </p:sp>
@@ -8751,7 +9077,7 @@
           <p:nvPr/>
         </p:nvPicPr>
         <p:blipFill>
-          <a:blip r:embed="rId1"/>
+          <a:blip r:embed="rId3"/>
           <a:stretch>
             <a:fillRect/>
           </a:stretch>
@@ -8856,20 +9182,6 @@
               </a:rPr>
               <a:t>01</a:t>
             </a:r>
-            <a:endParaRPr kumimoji="0" sz="13800" b="0" i="0" u="none" strike="noStrike" kern="1200" cap="none" spc="0" normalizeH="0" baseline="0" noProof="0" dirty="0">
-              <a:ln>
-                <a:noFill/>
-              </a:ln>
-              <a:solidFill>
-                <a:srgbClr val="F5F4F9"/>
-              </a:solidFill>
-              <a:effectLst/>
-              <a:uLnTx/>
-              <a:uFillTx/>
-              <a:latin typeface="Arial" panose="020B0604020202020204"/>
-              <a:ea typeface="华文中宋" panose="02010600040101010101" charset="-122"/>
-              <a:cs typeface="+mn-cs"/>
-            </a:endParaRPr>
           </a:p>
         </p:txBody>
       </p:sp>
@@ -8955,6 +9267,204 @@
 </file>
 
 <file path=ppt/slides/slide3.xml><?xml version="1.0" encoding="utf-8"?>
+<p:sld xmlns:a="http://schemas.openxmlformats.org/drawingml/2006/main" xmlns:r="http://schemas.openxmlformats.org/officeDocument/2006/relationships" xmlns:p="http://schemas.openxmlformats.org/presentationml/2006/main">
+  <p:cSld>
+    <p:spTree>
+      <p:nvGrpSpPr>
+        <p:cNvPr id="1" name=""/>
+        <p:cNvGrpSpPr/>
+        <p:nvPr/>
+      </p:nvGrpSpPr>
+      <p:grpSpPr>
+        <a:xfrm>
+          <a:off x="0" y="0"/>
+          <a:ext cx="0" cy="0"/>
+          <a:chOff x="0" y="0"/>
+          <a:chExt cx="0" cy="0"/>
+        </a:xfrm>
+      </p:grpSpPr>
+      <p:sp>
+        <p:nvSpPr>
+          <p:cNvPr id="13" name="矩形 12"/>
+          <p:cNvSpPr>
+            <a:spLocks noGrp="1"/>
+          </p:cNvSpPr>
+          <p:nvPr/>
+        </p:nvSpPr>
+        <p:spPr>
+          <a:xfrm>
+            <a:off x="0" y="0"/>
+            <a:ext cx="12192000" cy="114300"/>
+          </a:xfrm>
+          <a:prstGeom prst="rect">
+            <a:avLst/>
+          </a:prstGeom>
+          <a:solidFill>
+            <a:srgbClr val="2D4A33"/>
+          </a:solidFill>
+          <a:ln w="0">
+            <a:solidFill>
+              <a:srgbClr val="2D4A33"/>
+            </a:solidFill>
+            <a:prstDash val="solid"/>
+          </a:ln>
+        </p:spPr>
+      </p:sp>
+      <p:sp>
+        <p:nvSpPr>
+          <p:cNvPr id="2" name="矩形 1"/>
+          <p:cNvSpPr>
+            <a:spLocks noGrp="1"/>
+          </p:cNvSpPr>
+          <p:nvPr/>
+        </p:nvSpPr>
+        <p:spPr>
+          <a:xfrm>
+            <a:off x="762000" y="400050"/>
+            <a:ext cx="10668000" cy="457200"/>
+          </a:xfrm>
+          <a:prstGeom prst="rect">
+            <a:avLst/>
+          </a:prstGeom>
+          <a:solidFill>
+            <a:srgbClr val="000000">
+              <a:alpha val="0"/>
+            </a:srgbClr>
+          </a:solidFill>
+          <a:ln w="0">
+            <a:solidFill>
+              <a:srgbClr val="000000">
+                <a:alpha val="0"/>
+              </a:srgbClr>
+            </a:solidFill>
+            <a:prstDash val="solid"/>
+          </a:ln>
+        </p:spPr>
+        <p:txBody>
+          <a:bodyPr anchor="ctr"/>
+          <a:lstStyle/>
+          <a:p>
+            <a:pPr algn="ctr">
+              <a:defRPr sz="2550" b="1">
+                <a:solidFill>
+                  <a:srgbClr val="2D4A33"/>
+                </a:solidFill>
+              </a:defRPr>
+            </a:pPr>
+            <a:r>
+              <a:rPr lang="zh-CN" altLang="en-US" sz="2550" b="1" dirty="0">
+                <a:solidFill>
+                  <a:srgbClr val="2D4A33"/>
+                </a:solidFill>
+              </a:rPr>
+              <a:t>组内评分</a:t>
+            </a:r>
+            <a:endParaRPr sz="2550" b="1" dirty="0">
+              <a:solidFill>
+                <a:srgbClr val="2D4A33"/>
+              </a:solidFill>
+            </a:endParaRPr>
+          </a:p>
+        </p:txBody>
+      </p:sp>
+      <p:sp>
+        <p:nvSpPr>
+          <p:cNvPr id="10" name="矩形 9"/>
+          <p:cNvSpPr>
+            <a:spLocks noGrp="1"/>
+          </p:cNvSpPr>
+          <p:nvPr/>
+        </p:nvSpPr>
+        <p:spPr>
+          <a:xfrm>
+            <a:off x="2000250" y="1346200"/>
+            <a:ext cx="8191500" cy="3225800"/>
+          </a:xfrm>
+          <a:prstGeom prst="rect">
+            <a:avLst/>
+          </a:prstGeom>
+          <a:solidFill>
+            <a:srgbClr val="FFFFFF"/>
+          </a:solidFill>
+          <a:ln w="9525">
+            <a:solidFill>
+              <a:srgbClr val="C7D0C4"/>
+            </a:solidFill>
+            <a:prstDash val="solid"/>
+          </a:ln>
+        </p:spPr>
+      </p:sp>
+      <p:sp>
+        <p:nvSpPr>
+          <p:cNvPr id="12" name="矩形 11"/>
+          <p:cNvSpPr>
+            <a:spLocks noGrp="1"/>
+          </p:cNvSpPr>
+          <p:nvPr/>
+        </p:nvSpPr>
+        <p:spPr>
+          <a:xfrm>
+            <a:off x="2228850" y="2515870"/>
+            <a:ext cx="7734300" cy="913130"/>
+          </a:xfrm>
+          <a:prstGeom prst="rect">
+            <a:avLst/>
+          </a:prstGeom>
+          <a:solidFill>
+            <a:srgbClr val="000000">
+              <a:alpha val="0"/>
+            </a:srgbClr>
+          </a:solidFill>
+          <a:ln w="0">
+            <a:solidFill>
+              <a:srgbClr val="000000">
+                <a:alpha val="0"/>
+              </a:srgbClr>
+            </a:solidFill>
+            <a:prstDash val="solid"/>
+          </a:ln>
+        </p:spPr>
+        <p:txBody>
+          <a:bodyPr anchor="ctr"/>
+          <a:lstStyle/>
+          <a:p>
+            <a:pPr algn="l">
+              <a:defRPr sz="1350" b="0">
+                <a:solidFill>
+                  <a:srgbClr val="1F2D22"/>
+                </a:solidFill>
+              </a:defRPr>
+            </a:pPr>
+            <a:r>
+              <a:rPr lang="zh-CN" altLang="en-US" sz="4000" dirty="0">
+                <a:solidFill>
+                  <a:srgbClr val="1F2D22"/>
+                </a:solidFill>
+              </a:rPr>
+              <a:t>出于分工明确考虑，并非所有组员均参与了两个项目。但每个组员的总体贡献相近，组内评分所有组员相同平分。</a:t>
+            </a:r>
+            <a:endParaRPr sz="4000" b="0" dirty="0">
+              <a:solidFill>
+                <a:srgbClr val="1F2D22"/>
+              </a:solidFill>
+            </a:endParaRPr>
+          </a:p>
+        </p:txBody>
+      </p:sp>
+    </p:spTree>
+    <p:extLst>
+      <p:ext uri="{BB962C8B-B14F-4D97-AF65-F5344CB8AC3E}">
+        <p14:creationId xmlns:p14="http://schemas.microsoft.com/office/powerpoint/2010/main" val="1816285141"/>
+      </p:ext>
+    </p:extLst>
+  </p:cSld>
+  <p:clrMapOvr>
+    <a:masterClrMapping/>
+  </p:clrMapOvr>
+</p:sld>
+</file>
+
+<file path=ppt/slides/slide4.xml><?xml version="1.0" encoding="utf-8"?>
 <p:sld xmlns:a="http://schemas.openxmlformats.org/drawingml/2006/main" xmlns:r="http://schemas.openxmlformats.org/officeDocument/2006/relationships" xmlns:p="http://schemas.openxmlformats.org/presentationml/2006/main">
   <p:cSld>
     <p:bg>
@@ -9080,7 +9590,7 @@
 </p:sld>
 </file>
 
-<file path=ppt/slides/slide4.xml><?xml version="1.0" encoding="utf-8"?>
+<file path=ppt/slides/slide5.xml><?xml version="1.0" encoding="utf-8"?>
 <p:sld xmlns:a="http://schemas.openxmlformats.org/drawingml/2006/main" xmlns:r="http://schemas.openxmlformats.org/officeDocument/2006/relationships" xmlns:p="http://schemas.openxmlformats.org/presentationml/2006/main">
   <p:cSld>
     <p:spTree>
@@ -9367,7 +9877,7 @@
 </p:sld>
 </file>
 
-<file path=ppt/slides/slide5.xml><?xml version="1.0" encoding="utf-8"?>
+<file path=ppt/slides/slide6.xml><?xml version="1.0" encoding="utf-8"?>
 <p:sld xmlns:a="http://schemas.openxmlformats.org/drawingml/2006/main" xmlns:r="http://schemas.openxmlformats.org/officeDocument/2006/relationships" xmlns:p="http://schemas.openxmlformats.org/presentationml/2006/main">
   <p:cSld>
     <p:bg>
@@ -9477,11 +9987,6 @@
               </a:rPr>
               <a:t>刘义群</a:t>
             </a:r>
-            <a:endParaRPr lang="zh-CN" altLang="en-US" sz="5400" b="1" dirty="0">
-              <a:solidFill>
-                <a:schemeClr val="bg1"/>
-              </a:solidFill>
-            </a:endParaRPr>
           </a:p>
           <a:p>
             <a:pPr algn="ctr">
@@ -9495,929 +10000,6 @@
               </a:rPr>
               <a:t>负责垂直搜索引擎</a:t>
             </a:r>
-            <a:endParaRPr lang="zh-CN" sz="5400" b="1" dirty="0">
-              <a:solidFill>
-                <a:schemeClr val="bg1"/>
-              </a:solidFill>
-            </a:endParaRPr>
-          </a:p>
-        </p:txBody>
-      </p:sp>
-    </p:spTree>
-  </p:cSld>
-  <p:clrMapOvr>
-    <a:masterClrMapping/>
-  </p:clrMapOvr>
-</p:sld>
-</file>
-
-<file path=ppt/slides/slide6.xml><?xml version="1.0" encoding="utf-8"?>
-<p:sld xmlns:a="http://schemas.openxmlformats.org/drawingml/2006/main" xmlns:r="http://schemas.openxmlformats.org/officeDocument/2006/relationships" xmlns:p="http://schemas.openxmlformats.org/presentationml/2006/main">
-  <p:cSld>
-    <p:spTree>
-      <p:nvGrpSpPr>
-        <p:cNvPr id="1" name=""/>
-        <p:cNvGrpSpPr/>
-        <p:nvPr/>
-      </p:nvGrpSpPr>
-      <p:grpSpPr>
-        <a:xfrm>
-          <a:off x="0" y="0"/>
-          <a:ext cx="0" cy="0"/>
-          <a:chOff x="0" y="0"/>
-          <a:chExt cx="0" cy="0"/>
-        </a:xfrm>
-      </p:grpSpPr>
-      <p:sp>
-        <p:nvSpPr>
-          <p:cNvPr id="13" name="矩形 12"/>
-          <p:cNvSpPr>
-            <a:spLocks noGrp="1"/>
-          </p:cNvSpPr>
-          <p:nvPr/>
-        </p:nvSpPr>
-        <p:spPr>
-          <a:xfrm>
-            <a:off x="0" y="0"/>
-            <a:ext cx="12192000" cy="114300"/>
-          </a:xfrm>
-          <a:prstGeom prst="rect">
-            <a:avLst/>
-          </a:prstGeom>
-          <a:solidFill>
-            <a:srgbClr val="2D4A33"/>
-          </a:solidFill>
-          <a:ln w="0">
-            <a:solidFill>
-              <a:srgbClr val="2D4A33"/>
-            </a:solidFill>
-            <a:prstDash val="solid"/>
-          </a:ln>
-        </p:spPr>
-      </p:sp>
-      <p:sp>
-        <p:nvSpPr>
-          <p:cNvPr id="2" name="矩形 1"/>
-          <p:cNvSpPr>
-            <a:spLocks noGrp="1"/>
-          </p:cNvSpPr>
-          <p:nvPr/>
-        </p:nvSpPr>
-        <p:spPr>
-          <a:xfrm>
-            <a:off x="762000" y="400050"/>
-            <a:ext cx="10668000" cy="457200"/>
-          </a:xfrm>
-          <a:prstGeom prst="rect">
-            <a:avLst/>
-          </a:prstGeom>
-          <a:solidFill>
-            <a:srgbClr val="000000">
-              <a:alpha val="0"/>
-            </a:srgbClr>
-          </a:solidFill>
-          <a:ln w="0">
-            <a:solidFill>
-              <a:srgbClr val="000000">
-                <a:alpha val="0"/>
-              </a:srgbClr>
-            </a:solidFill>
-            <a:prstDash val="solid"/>
-          </a:ln>
-        </p:spPr>
-        <p:txBody>
-          <a:bodyPr anchor="ctr"/>
-          <a:lstStyle/>
-          <a:p>
-            <a:pPr algn="ctr">
-              <a:defRPr sz="2550" b="1">
-                <a:solidFill>
-                  <a:srgbClr val="2D4A33"/>
-                </a:solidFill>
-              </a:defRPr>
-            </a:pPr>
-            <a:r>
-              <a:rPr lang="zh-CN" altLang="en-US" sz="2550" b="1" dirty="0">
-                <a:solidFill>
-                  <a:srgbClr val="2D4A33"/>
-                </a:solidFill>
-              </a:rPr>
-              <a:t>刘义群</a:t>
-            </a:r>
-            <a:r>
-              <a:rPr lang="en-US" altLang="zh-CN" sz="2550" b="1" dirty="0">
-                <a:solidFill>
-                  <a:srgbClr val="2D4A33"/>
-                </a:solidFill>
-              </a:rPr>
-              <a:t> </a:t>
-            </a:r>
-            <a:r>
-              <a:rPr lang="zh-CN" altLang="en-US" sz="2550" b="1" dirty="0">
-                <a:solidFill>
-                  <a:srgbClr val="2D4A33"/>
-                </a:solidFill>
-              </a:rPr>
-              <a:t>首页显示部分（新增前端功能）</a:t>
-            </a:r>
-            <a:endParaRPr lang="zh-CN" altLang="en-US" sz="2550" b="1" dirty="0">
-              <a:solidFill>
-                <a:srgbClr val="2D4A33"/>
-              </a:solidFill>
-            </a:endParaRPr>
-          </a:p>
-        </p:txBody>
-      </p:sp>
-      <p:sp>
-        <p:nvSpPr>
-          <p:cNvPr id="4" name="矩形 3"/>
-          <p:cNvSpPr>
-            <a:spLocks noGrp="1"/>
-          </p:cNvSpPr>
-          <p:nvPr/>
-        </p:nvSpPr>
-        <p:spPr>
-          <a:xfrm>
-            <a:off x="857250" y="1619250"/>
-            <a:ext cx="4762500" cy="1809750"/>
-          </a:xfrm>
-          <a:prstGeom prst="rect">
-            <a:avLst/>
-          </a:prstGeom>
-          <a:solidFill>
-            <a:srgbClr val="FFFFFF"/>
-          </a:solidFill>
-          <a:ln w="9525">
-            <a:solidFill>
-              <a:srgbClr val="C7D0C4"/>
-            </a:solidFill>
-            <a:prstDash val="solid"/>
-          </a:ln>
-        </p:spPr>
-      </p:sp>
-      <p:sp>
-        <p:nvSpPr>
-          <p:cNvPr id="5" name="矩形 4"/>
-          <p:cNvSpPr>
-            <a:spLocks noGrp="1"/>
-          </p:cNvSpPr>
-          <p:nvPr/>
-        </p:nvSpPr>
-        <p:spPr>
-          <a:xfrm>
-            <a:off x="1157605" y="1666875"/>
-            <a:ext cx="4305300" cy="323850"/>
-          </a:xfrm>
-          <a:prstGeom prst="rect">
-            <a:avLst/>
-          </a:prstGeom>
-          <a:solidFill>
-            <a:srgbClr val="000000">
-              <a:alpha val="0"/>
-            </a:srgbClr>
-          </a:solidFill>
-          <a:ln w="0">
-            <a:solidFill>
-              <a:srgbClr val="000000">
-                <a:alpha val="0"/>
-              </a:srgbClr>
-            </a:solidFill>
-            <a:prstDash val="solid"/>
-          </a:ln>
-        </p:spPr>
-        <p:txBody>
-          <a:bodyPr anchor="ctr"/>
-          <a:lstStyle/>
-          <a:p>
-            <a:pPr algn="l">
-              <a:defRPr sz="1650" b="1">
-                <a:solidFill>
-                  <a:srgbClr val="2D4A33"/>
-                </a:solidFill>
-              </a:defRPr>
-            </a:pPr>
-            <a:r>
-              <a:rPr sz="1650" b="1">
-                <a:solidFill>
-                  <a:srgbClr val="2D4A33"/>
-                </a:solidFill>
-              </a:rPr>
-              <a:t>页面</a:t>
-            </a:r>
-            <a:endParaRPr sz="1650" b="1">
-              <a:solidFill>
-                <a:srgbClr val="2D4A33"/>
-              </a:solidFill>
-            </a:endParaRPr>
-          </a:p>
-        </p:txBody>
-      </p:sp>
-      <p:sp>
-        <p:nvSpPr>
-          <p:cNvPr id="6" name="矩形 5"/>
-          <p:cNvSpPr>
-            <a:spLocks noGrp="1"/>
-          </p:cNvSpPr>
-          <p:nvPr/>
-        </p:nvSpPr>
-        <p:spPr>
-          <a:xfrm>
-            <a:off x="1157605" y="2228850"/>
-            <a:ext cx="4305300" cy="857250"/>
-          </a:xfrm>
-          <a:prstGeom prst="rect">
-            <a:avLst/>
-          </a:prstGeom>
-          <a:solidFill>
-            <a:srgbClr val="000000">
-              <a:alpha val="0"/>
-            </a:srgbClr>
-          </a:solidFill>
-          <a:ln w="0">
-            <a:solidFill>
-              <a:srgbClr val="000000">
-                <a:alpha val="0"/>
-              </a:srgbClr>
-            </a:solidFill>
-            <a:prstDash val="solid"/>
-          </a:ln>
-        </p:spPr>
-        <p:txBody>
-          <a:bodyPr anchor="ctr"/>
-          <a:lstStyle/>
-          <a:p>
-            <a:pPr algn="l">
-              <a:defRPr sz="1350" b="0">
-                <a:solidFill>
-                  <a:srgbClr val="1F2D22"/>
-                </a:solidFill>
-              </a:defRPr>
-            </a:pPr>
-            <a:r>
-              <a:rPr lang="en-US" altLang="zh-CN" sz="1350" b="0">
-                <a:solidFill>
-                  <a:srgbClr val="1F2D22"/>
-                </a:solidFill>
-              </a:rPr>
-              <a:t>jdsearch </a:t>
-            </a:r>
-            <a:r>
-              <a:rPr lang="zh-CN" altLang="en-US" sz="1350" b="0">
-                <a:solidFill>
-                  <a:srgbClr val="1F2D22"/>
-                </a:solidFill>
-              </a:rPr>
-              <a:t>搜索页面</a:t>
-            </a:r>
-            <a:endParaRPr lang="zh-CN" altLang="en-US" sz="1350" b="0">
-              <a:solidFill>
-                <a:srgbClr val="1F2D22"/>
-              </a:solidFill>
-            </a:endParaRPr>
-          </a:p>
-          <a:p>
-            <a:pPr algn="l">
-              <a:defRPr sz="1350" b="0">
-                <a:solidFill>
-                  <a:srgbClr val="1F2D22"/>
-                </a:solidFill>
-              </a:defRPr>
-            </a:pPr>
-            <a:r>
-              <a:rPr lang="zh-CN" altLang="en-US" sz="1350" b="0">
-                <a:solidFill>
-                  <a:srgbClr val="1F2D22"/>
-                </a:solidFill>
-              </a:rPr>
-              <a:t>搜索框下方：空关键词时显示提示文字</a:t>
-            </a:r>
-            <a:r>
-              <a:rPr lang="en-US" altLang="zh-CN" sz="1350" b="0">
-                <a:solidFill>
-                  <a:srgbClr val="1F2D22"/>
-                </a:solidFill>
-              </a:rPr>
-              <a:t>"</a:t>
-            </a:r>
-            <a:r>
-              <a:rPr lang="zh-CN" altLang="en-US" sz="1350" b="0">
-                <a:solidFill>
-                  <a:srgbClr val="1F2D22"/>
-                </a:solidFill>
-              </a:rPr>
-              <a:t>首页随机展示部分图书，输入关键词后可进行精确搜索</a:t>
-            </a:r>
-            <a:r>
-              <a:rPr lang="en-US" altLang="zh-CN" sz="1350" b="0">
-                <a:solidFill>
-                  <a:srgbClr val="1F2D22"/>
-                </a:solidFill>
-              </a:rPr>
-              <a:t>"</a:t>
-            </a:r>
-            <a:endParaRPr lang="en-US" altLang="zh-CN" sz="1350" b="0">
-              <a:solidFill>
-                <a:srgbClr val="1F2D22"/>
-              </a:solidFill>
-            </a:endParaRPr>
-          </a:p>
-          <a:p>
-            <a:pPr algn="l">
-              <a:defRPr sz="1350" b="0">
-                <a:solidFill>
-                  <a:srgbClr val="1F2D22"/>
-                </a:solidFill>
-              </a:defRPr>
-            </a:pPr>
-            <a:r>
-              <a:rPr lang="zh-CN" altLang="en-US" sz="1350" b="0">
-                <a:solidFill>
-                  <a:srgbClr val="1F2D22"/>
-                </a:solidFill>
-              </a:rPr>
-              <a:t>结果区域：页面挂载即自动渲染图书列表，无需点击搜索</a:t>
-            </a:r>
-            <a:endParaRPr lang="zh-CN" altLang="en-US" sz="1350" b="0">
-              <a:solidFill>
-                <a:srgbClr val="1F2D22"/>
-              </a:solidFill>
-            </a:endParaRPr>
-          </a:p>
-        </p:txBody>
-      </p:sp>
-      <p:sp>
-        <p:nvSpPr>
-          <p:cNvPr id="7" name="矩形 6"/>
-          <p:cNvSpPr>
-            <a:spLocks noGrp="1"/>
-          </p:cNvSpPr>
-          <p:nvPr/>
-        </p:nvSpPr>
-        <p:spPr>
-          <a:xfrm>
-            <a:off x="6572250" y="1619250"/>
-            <a:ext cx="4762500" cy="1619250"/>
-          </a:xfrm>
-          <a:prstGeom prst="rect">
-            <a:avLst/>
-          </a:prstGeom>
-          <a:solidFill>
-            <a:srgbClr val="FFFFFF"/>
-          </a:solidFill>
-          <a:ln w="9525">
-            <a:solidFill>
-              <a:srgbClr val="C7D0C4"/>
-            </a:solidFill>
-            <a:prstDash val="solid"/>
-          </a:ln>
-        </p:spPr>
-      </p:sp>
-      <p:sp>
-        <p:nvSpPr>
-          <p:cNvPr id="8" name="矩形 7"/>
-          <p:cNvSpPr>
-            <a:spLocks noGrp="1"/>
-          </p:cNvSpPr>
-          <p:nvPr/>
-        </p:nvSpPr>
-        <p:spPr>
-          <a:xfrm>
-            <a:off x="6800850" y="1728470"/>
-            <a:ext cx="4305300" cy="323850"/>
-          </a:xfrm>
-          <a:prstGeom prst="rect">
-            <a:avLst/>
-          </a:prstGeom>
-          <a:solidFill>
-            <a:srgbClr val="000000">
-              <a:alpha val="0"/>
-            </a:srgbClr>
-          </a:solidFill>
-          <a:ln w="0">
-            <a:solidFill>
-              <a:srgbClr val="000000">
-                <a:alpha val="0"/>
-              </a:srgbClr>
-            </a:solidFill>
-            <a:prstDash val="solid"/>
-          </a:ln>
-        </p:spPr>
-        <p:txBody>
-          <a:bodyPr anchor="ctr"/>
-          <a:lstStyle/>
-          <a:p>
-            <a:pPr algn="l">
-              <a:defRPr sz="1650" b="1">
-                <a:solidFill>
-                  <a:srgbClr val="2D4A33"/>
-                </a:solidFill>
-              </a:defRPr>
-            </a:pPr>
-            <a:r>
-              <a:rPr sz="1650" b="1">
-                <a:solidFill>
-                  <a:srgbClr val="2D4A33"/>
-                </a:solidFill>
-              </a:rPr>
-              <a:t>流程</a:t>
-            </a:r>
-            <a:endParaRPr sz="1650" b="1">
-              <a:solidFill>
-                <a:srgbClr val="2D4A33"/>
-              </a:solidFill>
-            </a:endParaRPr>
-          </a:p>
-        </p:txBody>
-      </p:sp>
-      <p:sp>
-        <p:nvSpPr>
-          <p:cNvPr id="9" name="矩形 8"/>
-          <p:cNvSpPr>
-            <a:spLocks noGrp="1"/>
-          </p:cNvSpPr>
-          <p:nvPr/>
-        </p:nvSpPr>
-        <p:spPr>
-          <a:xfrm>
-            <a:off x="6758940" y="2052320"/>
-            <a:ext cx="4671060" cy="1076960"/>
-          </a:xfrm>
-          <a:prstGeom prst="rect">
-            <a:avLst/>
-          </a:prstGeom>
-          <a:solidFill>
-            <a:srgbClr val="000000">
-              <a:alpha val="0"/>
-            </a:srgbClr>
-          </a:solidFill>
-          <a:ln w="0">
-            <a:solidFill>
-              <a:srgbClr val="000000">
-                <a:alpha val="0"/>
-              </a:srgbClr>
-            </a:solidFill>
-            <a:prstDash val="solid"/>
-          </a:ln>
-        </p:spPr>
-        <p:txBody>
-          <a:bodyPr anchor="ctr"/>
-          <a:lstStyle/>
-          <a:p>
-            <a:pPr algn="l">
-              <a:defRPr sz="1350" b="0">
-                <a:solidFill>
-                  <a:srgbClr val="1F2D22"/>
-                </a:solidFill>
-              </a:defRPr>
-            </a:pPr>
-            <a:r>
-              <a:rPr lang="zh-CN" altLang="en-US" sz="1350" b="0">
-                <a:solidFill>
-                  <a:srgbClr val="1F2D22"/>
-                </a:solidFill>
-              </a:rPr>
-              <a:t>页面加载</a:t>
-            </a:r>
-            <a:r>
-              <a:rPr lang="en-US" altLang="zh-CN" sz="1350" b="0">
-                <a:solidFill>
-                  <a:srgbClr val="1F2D22"/>
-                </a:solidFill>
-              </a:rPr>
-              <a:t> </a:t>
-            </a:r>
-            <a:r>
-              <a:rPr lang="en-US" altLang="en-US" sz="1350" b="0">
-                <a:solidFill>
-                  <a:srgbClr val="1F2D22"/>
-                </a:solidFill>
-              </a:rPr>
-              <a:t>→</a:t>
-            </a:r>
-            <a:r>
-              <a:rPr lang="en-US" altLang="zh-CN" sz="1350" b="0">
-                <a:solidFill>
-                  <a:srgbClr val="1F2D22"/>
-                </a:solidFill>
-              </a:rPr>
-              <a:t> Vue mounted() </a:t>
-            </a:r>
-            <a:r>
-              <a:rPr lang="zh-CN" altLang="en-US" sz="1350" b="0">
-                <a:solidFill>
-                  <a:srgbClr val="1F2D22"/>
-                </a:solidFill>
-              </a:rPr>
-              <a:t>自动调用</a:t>
-            </a:r>
-            <a:r>
-              <a:rPr lang="en-US" altLang="zh-CN" sz="1350" b="0">
-                <a:solidFill>
-                  <a:srgbClr val="1F2D22"/>
-                </a:solidFill>
-              </a:rPr>
-              <a:t> searchPage()</a:t>
-            </a:r>
-            <a:endParaRPr lang="en-US" altLang="zh-CN" sz="1350" b="0">
-              <a:solidFill>
-                <a:srgbClr val="1F2D22"/>
-              </a:solidFill>
-            </a:endParaRPr>
-          </a:p>
-          <a:p>
-            <a:pPr algn="l">
-              <a:defRPr sz="1350" b="0">
-                <a:solidFill>
-                  <a:srgbClr val="1F2D22"/>
-                </a:solidFill>
-              </a:defRPr>
-            </a:pPr>
-            <a:r>
-              <a:rPr lang="en-US" altLang="zh-CN" sz="1350" b="0">
-                <a:solidFill>
-                  <a:srgbClr val="1F2D22"/>
-                </a:solidFill>
-              </a:rPr>
-              <a:t>searchPage() </a:t>
-            </a:r>
-            <a:r>
-              <a:rPr lang="en-US" altLang="en-US" sz="1350" b="0">
-                <a:solidFill>
-                  <a:srgbClr val="1F2D22"/>
-                </a:solidFill>
-              </a:rPr>
-              <a:t>→</a:t>
-            </a:r>
-            <a:r>
-              <a:rPr lang="en-US" altLang="zh-CN" sz="1350" b="0">
-                <a:solidFill>
-                  <a:srgbClr val="1F2D22"/>
-                </a:solidFill>
-              </a:rPr>
-              <a:t> </a:t>
-            </a:r>
-            <a:r>
-              <a:rPr lang="zh-CN" altLang="en-US" sz="1350" b="0">
-                <a:solidFill>
-                  <a:srgbClr val="1F2D22"/>
-                </a:solidFill>
-              </a:rPr>
-              <a:t>发送</a:t>
-            </a:r>
-            <a:r>
-              <a:rPr lang="en-US" altLang="zh-CN" sz="1350" b="0">
-                <a:solidFill>
-                  <a:srgbClr val="1F2D22"/>
-                </a:solidFill>
-              </a:rPr>
-              <a:t> POST </a:t>
-            </a:r>
-            <a:r>
-              <a:rPr lang="zh-CN" altLang="en-US" sz="1350" b="0">
-                <a:solidFill>
-                  <a:srgbClr val="1F2D22"/>
-                </a:solidFill>
-              </a:rPr>
-              <a:t>请求至</a:t>
-            </a:r>
-            <a:r>
-              <a:rPr lang="en-US" altLang="zh-CN" sz="1350" b="0">
-                <a:solidFill>
-                  <a:srgbClr val="1F2D22"/>
-                </a:solidFill>
-              </a:rPr>
-              <a:t> /query</a:t>
-            </a:r>
-            <a:endParaRPr lang="en-US" altLang="zh-CN" sz="1350" b="0">
-              <a:solidFill>
-                <a:srgbClr val="1F2D22"/>
-              </a:solidFill>
-            </a:endParaRPr>
-          </a:p>
-          <a:p>
-            <a:pPr algn="l">
-              <a:defRPr sz="1350" b="0">
-                <a:solidFill>
-                  <a:srgbClr val="1F2D22"/>
-                </a:solidFill>
-              </a:defRPr>
-            </a:pPr>
-            <a:r>
-              <a:rPr lang="zh-CN" altLang="en-US" sz="1350" b="0">
-                <a:solidFill>
-                  <a:srgbClr val="1F2D22"/>
-                </a:solidFill>
-              </a:rPr>
-              <a:t>后端判断</a:t>
-            </a:r>
-            <a:r>
-              <a:rPr lang="en-US" altLang="zh-CN" sz="1350" b="0">
-                <a:solidFill>
-                  <a:srgbClr val="1F2D22"/>
-                </a:solidFill>
-              </a:rPr>
-              <a:t> keyword </a:t>
-            </a:r>
-            <a:r>
-              <a:rPr lang="zh-CN" altLang="en-US" sz="1350" b="0">
-                <a:solidFill>
-                  <a:srgbClr val="1F2D22"/>
-                </a:solidFill>
-              </a:rPr>
-              <a:t>是否为空</a:t>
-            </a:r>
-            <a:r>
-              <a:rPr lang="en-US" altLang="zh-CN" sz="1350" b="0">
-                <a:solidFill>
-                  <a:srgbClr val="1F2D22"/>
-                </a:solidFill>
-              </a:rPr>
-              <a:t> </a:t>
-            </a:r>
-            <a:r>
-              <a:rPr lang="en-US" altLang="en-US" sz="1350" b="0">
-                <a:solidFill>
-                  <a:srgbClr val="1F2D22"/>
-                </a:solidFill>
-              </a:rPr>
-              <a:t>→</a:t>
-            </a:r>
-            <a:r>
-              <a:rPr lang="en-US" altLang="zh-CN" sz="1350" b="0">
-                <a:solidFill>
-                  <a:srgbClr val="1F2D22"/>
-                </a:solidFill>
-              </a:rPr>
-              <a:t> </a:t>
-            </a:r>
-            <a:r>
-              <a:rPr lang="zh-CN" altLang="en-US" sz="1350" b="0">
-                <a:solidFill>
-                  <a:srgbClr val="1F2D22"/>
-                </a:solidFill>
-              </a:rPr>
-              <a:t>为空则执行</a:t>
-            </a:r>
-            <a:r>
-              <a:rPr lang="en-US" altLang="zh-CN" sz="1350" b="0">
-                <a:solidFill>
-                  <a:srgbClr val="1F2D22"/>
-                </a:solidFill>
-              </a:rPr>
-              <a:t> matchAllQuery + randomFunction </a:t>
-            </a:r>
-            <a:r>
-              <a:rPr lang="zh-CN" altLang="en-US" sz="1350" b="0">
-                <a:solidFill>
-                  <a:srgbClr val="1F2D22"/>
-                </a:solidFill>
-              </a:rPr>
-              <a:t>随机排序</a:t>
-            </a:r>
-            <a:endParaRPr lang="zh-CN" altLang="en-US" sz="1350" b="0">
-              <a:solidFill>
-                <a:srgbClr val="1F2D22"/>
-              </a:solidFill>
-            </a:endParaRPr>
-          </a:p>
-          <a:p>
-            <a:pPr algn="l">
-              <a:defRPr sz="1350" b="0">
-                <a:solidFill>
-                  <a:srgbClr val="1F2D22"/>
-                </a:solidFill>
-              </a:defRPr>
-            </a:pPr>
-            <a:r>
-              <a:rPr lang="en-US" altLang="en-US" sz="1350" b="0">
-                <a:solidFill>
-                  <a:srgbClr val="1F2D22"/>
-                </a:solidFill>
-              </a:rPr>
-              <a:t>→</a:t>
-            </a:r>
-            <a:r>
-              <a:rPr lang="en-US" altLang="zh-CN" sz="1350" b="0">
-                <a:solidFill>
-                  <a:srgbClr val="1F2D22"/>
-                </a:solidFill>
-              </a:rPr>
-              <a:t> </a:t>
-            </a:r>
-            <a:r>
-              <a:rPr lang="zh-CN" altLang="en-US" sz="1350" b="0">
-                <a:solidFill>
-                  <a:srgbClr val="1F2D22"/>
-                </a:solidFill>
-              </a:rPr>
-              <a:t>返回结果，前端渲染图书列表</a:t>
-            </a:r>
-            <a:endParaRPr lang="zh-CN" altLang="en-US" sz="1350" b="0">
-              <a:solidFill>
-                <a:srgbClr val="1F2D22"/>
-              </a:solidFill>
-            </a:endParaRPr>
-          </a:p>
-        </p:txBody>
-      </p:sp>
-      <p:sp>
-        <p:nvSpPr>
-          <p:cNvPr id="10" name="矩形 9"/>
-          <p:cNvSpPr>
-            <a:spLocks noGrp="1"/>
-          </p:cNvSpPr>
-          <p:nvPr/>
-        </p:nvSpPr>
-        <p:spPr>
-          <a:xfrm>
-            <a:off x="2000250" y="3714750"/>
-            <a:ext cx="8191500" cy="1995170"/>
-          </a:xfrm>
-          <a:prstGeom prst="rect">
-            <a:avLst/>
-          </a:prstGeom>
-          <a:solidFill>
-            <a:srgbClr val="FFFFFF"/>
-          </a:solidFill>
-          <a:ln w="9525">
-            <a:solidFill>
-              <a:srgbClr val="C7D0C4"/>
-            </a:solidFill>
-            <a:prstDash val="solid"/>
-          </a:ln>
-        </p:spPr>
-      </p:sp>
-      <p:sp>
-        <p:nvSpPr>
-          <p:cNvPr id="11" name="矩形 10"/>
-          <p:cNvSpPr>
-            <a:spLocks noGrp="1"/>
-          </p:cNvSpPr>
-          <p:nvPr/>
-        </p:nvSpPr>
-        <p:spPr>
-          <a:xfrm>
-            <a:off x="2228850" y="3886200"/>
-            <a:ext cx="7734300" cy="323850"/>
-          </a:xfrm>
-          <a:prstGeom prst="rect">
-            <a:avLst/>
-          </a:prstGeom>
-          <a:solidFill>
-            <a:srgbClr val="000000">
-              <a:alpha val="0"/>
-            </a:srgbClr>
-          </a:solidFill>
-          <a:ln w="0">
-            <a:solidFill>
-              <a:srgbClr val="000000">
-                <a:alpha val="0"/>
-              </a:srgbClr>
-            </a:solidFill>
-            <a:prstDash val="solid"/>
-          </a:ln>
-        </p:spPr>
-        <p:txBody>
-          <a:bodyPr anchor="ctr"/>
-          <a:lstStyle/>
-          <a:p>
-            <a:pPr algn="l">
-              <a:defRPr sz="1650" b="1">
-                <a:solidFill>
-                  <a:srgbClr val="2D4A33"/>
-                </a:solidFill>
-              </a:defRPr>
-            </a:pPr>
-            <a:r>
-              <a:rPr sz="1650" b="1">
-                <a:solidFill>
-                  <a:srgbClr val="2D4A33"/>
-                </a:solidFill>
-              </a:rPr>
-              <a:t>结果</a:t>
-            </a:r>
-            <a:endParaRPr sz="1650" b="1">
-              <a:solidFill>
-                <a:srgbClr val="2D4A33"/>
-              </a:solidFill>
-            </a:endParaRPr>
-          </a:p>
-        </p:txBody>
-      </p:sp>
-      <p:sp>
-        <p:nvSpPr>
-          <p:cNvPr id="12" name="矩形 11"/>
-          <p:cNvSpPr>
-            <a:spLocks noGrp="1"/>
-          </p:cNvSpPr>
-          <p:nvPr/>
-        </p:nvSpPr>
-        <p:spPr>
-          <a:xfrm>
-            <a:off x="2228850" y="4324350"/>
-            <a:ext cx="7734300" cy="919480"/>
-          </a:xfrm>
-          <a:prstGeom prst="rect">
-            <a:avLst/>
-          </a:prstGeom>
-          <a:solidFill>
-            <a:srgbClr val="000000">
-              <a:alpha val="0"/>
-            </a:srgbClr>
-          </a:solidFill>
-          <a:ln w="0">
-            <a:solidFill>
-              <a:srgbClr val="000000">
-                <a:alpha val="0"/>
-              </a:srgbClr>
-            </a:solidFill>
-            <a:prstDash val="solid"/>
-          </a:ln>
-        </p:spPr>
-        <p:txBody>
-          <a:bodyPr anchor="ctr"/>
-          <a:lstStyle/>
-          <a:p>
-            <a:pPr algn="l">
-              <a:defRPr sz="1350" b="0">
-                <a:solidFill>
-                  <a:srgbClr val="1F2D22"/>
-                </a:solidFill>
-              </a:defRPr>
-            </a:pPr>
-            <a:r>
-              <a:rPr lang="zh-CN" altLang="en-US" sz="1350" b="0">
-                <a:solidFill>
-                  <a:srgbClr val="1F2D22"/>
-                </a:solidFill>
-              </a:rPr>
-              <a:t>首页打开即展示随机图书，无需手动搜索</a:t>
-            </a:r>
-            <a:endParaRPr lang="zh-CN" altLang="en-US" sz="1350" b="0">
-              <a:solidFill>
-                <a:srgbClr val="1F2D22"/>
-              </a:solidFill>
-            </a:endParaRPr>
-          </a:p>
-          <a:p>
-            <a:pPr algn="l">
-              <a:defRPr sz="1350" b="0">
-                <a:solidFill>
-                  <a:srgbClr val="1F2D22"/>
-                </a:solidFill>
-              </a:defRPr>
-            </a:pPr>
-            <a:r>
-              <a:rPr lang="zh-CN" altLang="en-US" sz="1350" b="0">
-                <a:solidFill>
-                  <a:srgbClr val="1F2D22"/>
-                </a:solidFill>
-              </a:rPr>
-              <a:t>空关键词时随机展示</a:t>
-            </a:r>
-            <a:r>
-              <a:rPr lang="en-US" altLang="zh-CN" sz="1350" b="0">
-                <a:solidFill>
-                  <a:srgbClr val="1F2D22"/>
-                </a:solidFill>
-              </a:rPr>
-              <a:t> jddata </a:t>
-            </a:r>
-            <a:r>
-              <a:rPr lang="zh-CN" altLang="en-US" sz="1350" b="0">
-                <a:solidFill>
-                  <a:srgbClr val="1F2D22"/>
-                </a:solidFill>
-              </a:rPr>
-              <a:t>索引中的书籍</a:t>
-            </a:r>
-            <a:endParaRPr lang="zh-CN" altLang="en-US" sz="1350" b="0">
-              <a:solidFill>
-                <a:srgbClr val="1F2D22"/>
-              </a:solidFill>
-            </a:endParaRPr>
-          </a:p>
-          <a:p>
-            <a:pPr algn="l">
-              <a:defRPr sz="1350" b="0">
-                <a:solidFill>
-                  <a:srgbClr val="1F2D22"/>
-                </a:solidFill>
-              </a:defRPr>
-            </a:pPr>
-            <a:r>
-              <a:rPr lang="zh-CN" altLang="en-US" sz="1350" b="0">
-                <a:solidFill>
-                  <a:srgbClr val="1F2D22"/>
-                </a:solidFill>
-              </a:rPr>
-              <a:t>有关键词时仍按标题匹配精确搜索</a:t>
-            </a:r>
-            <a:endParaRPr lang="zh-CN" altLang="en-US" sz="1350" b="0">
-              <a:solidFill>
-                <a:srgbClr val="1F2D22"/>
-              </a:solidFill>
-            </a:endParaRPr>
           </a:p>
         </p:txBody>
       </p:sp>
@@ -10536,13 +10118,8 @@
                   <a:srgbClr val="2D4A33"/>
                 </a:solidFill>
               </a:rPr>
-              <a:t>价格排序部分</a:t>
-            </a:r>
-            <a:endParaRPr lang="zh-CN" altLang="en-US" sz="2550" b="1" dirty="0">
-              <a:solidFill>
-                <a:srgbClr val="2D4A33"/>
-              </a:solidFill>
-            </a:endParaRPr>
+              <a:t>首页显示部分（新增前端功能）</a:t>
+            </a:r>
           </a:p>
         </p:txBody>
       </p:sp>
@@ -10622,11 +10199,6 @@
               </a:rPr>
               <a:t>页面</a:t>
             </a:r>
-            <a:endParaRPr sz="1650" b="1">
-              <a:solidFill>
-                <a:srgbClr val="2D4A33"/>
-              </a:solidFill>
-            </a:endParaRPr>
           </a:p>
         </p:txBody>
       </p:sp>
@@ -10687,11 +10259,6 @@
               </a:rPr>
               <a:t>搜索页面</a:t>
             </a:r>
-            <a:endParaRPr lang="zh-CN" altLang="en-US" sz="1350" b="0">
-              <a:solidFill>
-                <a:srgbClr val="1F2D22"/>
-              </a:solidFill>
-            </a:endParaRPr>
           </a:p>
           <a:p>
             <a:pPr algn="l">
@@ -10702,6 +10269,14 @@
               </a:defRPr>
             </a:pPr>
             <a:r>
+              <a:rPr lang="zh-CN" altLang="en-US" sz="1350" b="0">
+                <a:solidFill>
+                  <a:srgbClr val="1F2D22"/>
+                </a:solidFill>
+              </a:rPr>
+              <a:t>搜索框下方：空关键词时显示提示文字</a:t>
+            </a:r>
+            <a:r>
               <a:rPr lang="en-US" altLang="zh-CN" sz="1350" b="0">
                 <a:solidFill>
                   <a:srgbClr val="1F2D22"/>
@@ -10715,7 +10290,7 @@
                   <a:srgbClr val="1F2D22"/>
                 </a:solidFill>
               </a:rPr>
-              <a:t>价格</a:t>
+              <a:t>首页随机展示部分图书，输入关键词后可进行精确搜索</a:t>
             </a:r>
             <a:r>
               <a:rPr lang="en-US" altLang="zh-CN" sz="1350" b="0">
@@ -10725,19 +10300,6 @@
               </a:rPr>
               <a:t>"</a:t>
             </a:r>
-            <a:r>
-              <a:rPr lang="zh-CN" altLang="en-US" sz="1350" b="0">
-                <a:solidFill>
-                  <a:srgbClr val="1F2D22"/>
-                </a:solidFill>
-              </a:rPr>
-              <a:t>文字变为可点击排序控件</a:t>
-            </a:r>
-            <a:endParaRPr lang="zh-CN" altLang="en-US" sz="1350" b="0">
-              <a:solidFill>
-                <a:srgbClr val="1F2D22"/>
-              </a:solidFill>
-            </a:endParaRPr>
           </a:p>
           <a:p>
             <a:pPr algn="l">
@@ -10753,53 +10315,8 @@
                   <a:srgbClr val="1F2D22"/>
                 </a:solidFill>
               </a:rPr>
-              <a:t>点击后显示排序方向箭头（</a:t>
-            </a:r>
-            <a:r>
-              <a:rPr lang="en-US" altLang="en-US" sz="1350" b="0">
-                <a:solidFill>
-                  <a:srgbClr val="1F2D22"/>
-                </a:solidFill>
-              </a:rPr>
-              <a:t>↑</a:t>
-            </a:r>
-            <a:r>
-              <a:rPr lang="zh-CN" altLang="en-US" sz="1350" b="0">
-                <a:solidFill>
-                  <a:srgbClr val="1F2D22"/>
-                </a:solidFill>
-              </a:rPr>
-              <a:t>升序</a:t>
-            </a:r>
-            <a:r>
-              <a:rPr lang="en-US" altLang="zh-CN" sz="1350" b="0">
-                <a:solidFill>
-                  <a:srgbClr val="1F2D22"/>
-                </a:solidFill>
-              </a:rPr>
-              <a:t> / </a:t>
-            </a:r>
-            <a:r>
-              <a:rPr lang="en-US" altLang="en-US" sz="1350" b="0">
-                <a:solidFill>
-                  <a:srgbClr val="1F2D22"/>
-                </a:solidFill>
-              </a:rPr>
-              <a:t>↓</a:t>
-            </a:r>
-            <a:r>
-              <a:rPr lang="zh-CN" altLang="en-US" sz="1350" b="0">
-                <a:solidFill>
-                  <a:srgbClr val="1F2D22"/>
-                </a:solidFill>
-              </a:rPr>
-              <a:t>降序）</a:t>
-            </a:r>
-            <a:endParaRPr lang="zh-CN" altLang="en-US" sz="1350" b="0">
-              <a:solidFill>
-                <a:srgbClr val="1F2D22"/>
-              </a:solidFill>
-            </a:endParaRPr>
+              <a:t>结果区域：页面挂载即自动渲染图书列表，无需点击搜索</a:t>
+            </a:r>
           </a:p>
         </p:txBody>
       </p:sp>
@@ -10813,8 +10330,8 @@
         </p:nvSpPr>
         <p:spPr>
           <a:xfrm>
-            <a:off x="6285865" y="1379855"/>
-            <a:ext cx="5144135" cy="2091055"/>
+            <a:off x="6572250" y="1619250"/>
+            <a:ext cx="4762500" cy="1619250"/>
           </a:xfrm>
           <a:prstGeom prst="rect">
             <a:avLst/>
@@ -10840,7 +10357,7 @@
         </p:nvSpPr>
         <p:spPr>
           <a:xfrm>
-            <a:off x="6534785" y="1475740"/>
+            <a:off x="6800850" y="1728470"/>
             <a:ext cx="4305300" cy="323850"/>
           </a:xfrm>
           <a:prstGeom prst="rect">
@@ -10879,11 +10396,6 @@
               </a:rPr>
               <a:t>流程</a:t>
             </a:r>
-            <a:endParaRPr sz="1650" b="1">
-              <a:solidFill>
-                <a:srgbClr val="2D4A33"/>
-              </a:solidFill>
-            </a:endParaRPr>
           </a:p>
         </p:txBody>
       </p:sp>
@@ -10897,7 +10409,7 @@
         </p:nvSpPr>
         <p:spPr>
           <a:xfrm>
-            <a:off x="6595110" y="1990725"/>
+            <a:off x="6758940" y="2052320"/>
             <a:ext cx="4671060" cy="1076960"/>
           </a:xfrm>
           <a:prstGeom prst="rect">
@@ -10934,7 +10446,7 @@
                   <a:srgbClr val="1F2D22"/>
                 </a:solidFill>
               </a:rPr>
-              <a:t>点击</a:t>
+              <a:t>页面加载</a:t>
             </a:r>
             <a:r>
               <a:rPr lang="en-US" altLang="zh-CN" sz="1350" b="0">
@@ -10942,7 +10454,23 @@
                   <a:srgbClr val="1F2D22"/>
                 </a:solidFill>
               </a:rPr>
-              <a:t>"</a:t>
+              <a:t> </a:t>
+            </a:r>
+            <a:r>
+              <a:rPr lang="en-US" altLang="en-US" sz="1350" b="0">
+                <a:solidFill>
+                  <a:srgbClr val="1F2D22"/>
+                </a:solidFill>
+              </a:rPr>
+              <a:t>→</a:t>
+            </a:r>
+            <a:r>
+              <a:rPr lang="en-US" altLang="zh-CN" sz="1350" b="0">
+                <a:solidFill>
+                  <a:srgbClr val="1F2D22"/>
+                </a:solidFill>
+              </a:rPr>
+              <a:t> Vue mounted() </a:t>
             </a:r>
             <a:r>
               <a:rPr lang="zh-CN" altLang="en-US" sz="1350" b="0">
@@ -10950,7 +10478,7 @@
                   <a:srgbClr val="1F2D22"/>
                 </a:solidFill>
               </a:rPr>
-              <a:t>价格</a:t>
+              <a:t>自动调用</a:t>
             </a:r>
             <a:r>
               <a:rPr lang="en-US" altLang="zh-CN" sz="1350" b="0">
@@ -10958,61 +10486,8 @@
                   <a:srgbClr val="1F2D22"/>
                 </a:solidFill>
               </a:rPr>
-              <a:t>" </a:t>
-            </a:r>
-            <a:r>
-              <a:rPr lang="en-US" altLang="en-US" sz="1350" b="0">
-                <a:solidFill>
-                  <a:srgbClr val="1F2D22"/>
-                </a:solidFill>
-              </a:rPr>
-              <a:t>→</a:t>
-            </a:r>
-            <a:r>
-              <a:rPr lang="en-US" altLang="zh-CN" sz="1350" b="0">
-                <a:solidFill>
-                  <a:srgbClr val="1F2D22"/>
-                </a:solidFill>
-              </a:rPr>
-              <a:t> togglePriceSort() </a:t>
-            </a:r>
-            <a:r>
-              <a:rPr lang="zh-CN" altLang="en-US" sz="1350" b="0">
-                <a:solidFill>
-                  <a:srgbClr val="1F2D22"/>
-                </a:solidFill>
-              </a:rPr>
-              <a:t>设置</a:t>
-            </a:r>
-            <a:r>
-              <a:rPr lang="en-US" altLang="zh-CN" sz="1350" b="0">
-                <a:solidFill>
-                  <a:srgbClr val="1F2D22"/>
-                </a:solidFill>
-              </a:rPr>
-              <a:t> sortField='price' </a:t>
-            </a:r>
-            <a:r>
-              <a:rPr lang="zh-CN" altLang="en-US" sz="1350" b="0">
-                <a:solidFill>
-                  <a:srgbClr val="1F2D22"/>
-                </a:solidFill>
-              </a:rPr>
-              <a:t>和</a:t>
-            </a:r>
-            <a:r>
-              <a:rPr lang="en-US" altLang="zh-CN" sz="1350" b="0">
-                <a:solidFill>
-                  <a:srgbClr val="1F2D22"/>
-                </a:solidFill>
-              </a:rPr>
-              <a:t> sortOrder</a:t>
-            </a:r>
-            <a:endParaRPr lang="en-US" altLang="zh-CN" sz="1350" b="0">
-              <a:solidFill>
-                <a:srgbClr val="1F2D22"/>
-              </a:solidFill>
-            </a:endParaRPr>
+              <a:t> searchPage()</a:t>
+            </a:r>
           </a:p>
           <a:p>
             <a:pPr algn="l">
@@ -11023,6 +10498,14 @@
               </a:defRPr>
             </a:pPr>
             <a:r>
+              <a:rPr lang="en-US" altLang="zh-CN" sz="1350" b="0">
+                <a:solidFill>
+                  <a:srgbClr val="1F2D22"/>
+                </a:solidFill>
+              </a:rPr>
+              <a:t>searchPage() </a:t>
+            </a:r>
+            <a:r>
               <a:rPr lang="en-US" altLang="en-US" sz="1350" b="0">
                 <a:solidFill>
                   <a:srgbClr val="1F2D22"/>
@@ -11044,7 +10527,7 @@
                   <a:srgbClr val="1F2D22"/>
                 </a:solidFill>
               </a:rPr>
-              <a:t>自动重新调用</a:t>
+              <a:t>发送</a:t>
             </a:r>
             <a:r>
               <a:rPr lang="en-US" altLang="zh-CN" sz="1350" b="0">
@@ -11052,7 +10535,7 @@
                   <a:srgbClr val="1F2D22"/>
                 </a:solidFill>
               </a:rPr>
-              <a:t> searchPage()</a:t>
+              <a:t> POST </a:t>
             </a:r>
             <a:r>
               <a:rPr lang="zh-CN" altLang="en-US" sz="1350" b="0">
@@ -11060,7 +10543,7 @@
                   <a:srgbClr val="1F2D22"/>
                 </a:solidFill>
               </a:rPr>
-              <a:t>，将排序参数传至后端</a:t>
+              <a:t>请求至</a:t>
             </a:r>
             <a:r>
               <a:rPr lang="en-US" altLang="zh-CN" sz="1350" b="0">
@@ -11070,11 +10553,6 @@
               </a:rPr>
               <a:t> /query</a:t>
             </a:r>
-            <a:endParaRPr lang="en-US" altLang="zh-CN" sz="1350" b="0">
-              <a:solidFill>
-                <a:srgbClr val="1F2D22"/>
-              </a:solidFill>
-            </a:endParaRPr>
           </a:p>
           <a:p>
             <a:pPr algn="l">
@@ -11085,6 +10563,38 @@
               </a:defRPr>
             </a:pPr>
             <a:r>
+              <a:rPr lang="zh-CN" altLang="en-US" sz="1350" b="0">
+                <a:solidFill>
+                  <a:srgbClr val="1F2D22"/>
+                </a:solidFill>
+              </a:rPr>
+              <a:t>后端判断</a:t>
+            </a:r>
+            <a:r>
+              <a:rPr lang="en-US" altLang="zh-CN" sz="1350" b="0">
+                <a:solidFill>
+                  <a:srgbClr val="1F2D22"/>
+                </a:solidFill>
+              </a:rPr>
+              <a:t> keyword </a:t>
+            </a:r>
+            <a:r>
+              <a:rPr lang="zh-CN" altLang="en-US" sz="1350" b="0">
+                <a:solidFill>
+                  <a:srgbClr val="1F2D22"/>
+                </a:solidFill>
+              </a:rPr>
+              <a:t>是否为空</a:t>
+            </a:r>
+            <a:r>
+              <a:rPr lang="en-US" altLang="zh-CN" sz="1350" b="0">
+                <a:solidFill>
+                  <a:srgbClr val="1F2D22"/>
+                </a:solidFill>
+              </a:rPr>
+              <a:t> </a:t>
+            </a:r>
+            <a:r>
               <a:rPr lang="en-US" altLang="en-US" sz="1350" b="0">
                 <a:solidFill>
                   <a:srgbClr val="1F2D22"/>
@@ -11098,7 +10608,7 @@
                   <a:srgbClr val="1F2D22"/>
                 </a:solidFill>
               </a:rPr>
-              <a:t> ContentController </a:t>
+              <a:t> </a:t>
             </a:r>
             <a:r>
               <a:rPr lang="zh-CN" altLang="en-US" sz="1350" b="0">
@@ -11106,7 +10616,7 @@
                   <a:srgbClr val="1F2D22"/>
                 </a:solidFill>
               </a:rPr>
-              <a:t>接收参数传给</a:t>
+              <a:t>为空则执行</a:t>
             </a:r>
             <a:r>
               <a:rPr lang="en-US" altLang="zh-CN" sz="1350" b="0">
@@ -11114,13 +10624,16 @@
                   <a:srgbClr val="1F2D22"/>
                 </a:solidFill>
               </a:rPr>
-              <a:t> ContentService</a:t>
-            </a:r>
-            <a:endParaRPr lang="en-US" altLang="zh-CN" sz="1350" b="0">
-              <a:solidFill>
-                <a:srgbClr val="1F2D22"/>
-              </a:solidFill>
-            </a:endParaRPr>
+              <a:t> matchAllQuery + randomFunction </a:t>
+            </a:r>
+            <a:r>
+              <a:rPr lang="zh-CN" altLang="en-US" sz="1350" b="0">
+                <a:solidFill>
+                  <a:srgbClr val="1F2D22"/>
+                </a:solidFill>
+              </a:rPr>
+              <a:t>随机排序</a:t>
+            </a:r>
           </a:p>
           <a:p>
             <a:pPr algn="l">
@@ -11144,7 +10657,7 @@
                   <a:srgbClr val="1F2D22"/>
                 </a:solidFill>
               </a:rPr>
-              <a:t> ES </a:t>
+              <a:t> </a:t>
             </a:r>
             <a:r>
               <a:rPr lang="zh-CN" altLang="en-US" sz="1350" b="0">
@@ -11152,67 +10665,8 @@
                   <a:srgbClr val="1F2D22"/>
                 </a:solidFill>
               </a:rPr>
-              <a:t>查询返回结果后，</a:t>
-            </a:r>
-            <a:r>
-              <a:rPr lang="en-US" altLang="zh-CN" sz="1350" b="0">
-                <a:solidFill>
-                  <a:srgbClr val="1F2D22"/>
-                </a:solidFill>
-              </a:rPr>
-              <a:t>Java </a:t>
-            </a:r>
-            <a:r>
-              <a:rPr lang="zh-CN" altLang="en-US" sz="1350" b="0">
-                <a:solidFill>
-                  <a:srgbClr val="1F2D22"/>
-                </a:solidFill>
-              </a:rPr>
-              <a:t>端按价格字段排序</a:t>
-            </a:r>
-            <a:endParaRPr lang="zh-CN" altLang="en-US" sz="1350" b="0">
-              <a:solidFill>
-                <a:srgbClr val="1F2D22"/>
-              </a:solidFill>
-            </a:endParaRPr>
-          </a:p>
-          <a:p>
-            <a:pPr algn="l">
-              <a:defRPr sz="1350" b="0">
-                <a:solidFill>
-                  <a:srgbClr val="1F2D22"/>
-                </a:solidFill>
-              </a:defRPr>
-            </a:pPr>
-            <a:r>
-              <a:rPr lang="en-US" altLang="en-US" sz="1350" b="0">
-                <a:solidFill>
-                  <a:srgbClr val="1F2D22"/>
-                </a:solidFill>
-              </a:rPr>
-              <a:t>→</a:t>
-            </a:r>
-            <a:r>
-              <a:rPr lang="en-US" altLang="zh-CN" sz="1350" b="0">
-                <a:solidFill>
-                  <a:srgbClr val="1F2D22"/>
-                </a:solidFill>
-              </a:rPr>
-              <a:t> </a:t>
-            </a:r>
-            <a:r>
-              <a:rPr lang="zh-CN" altLang="en-US" sz="1350" b="0">
-                <a:solidFill>
-                  <a:srgbClr val="1F2D22"/>
-                </a:solidFill>
-              </a:rPr>
-              <a:t>排序结果返回前端，页面重新渲染</a:t>
-            </a:r>
-            <a:endParaRPr lang="zh-CN" altLang="en-US" sz="1350" b="0">
-              <a:solidFill>
-                <a:srgbClr val="1F2D22"/>
-              </a:solidFill>
-            </a:endParaRPr>
+              <a:t>返回结果，前端渲染图书列表</a:t>
+            </a:r>
           </a:p>
         </p:txBody>
       </p:sp>
@@ -11292,11 +10746,6 @@
               </a:rPr>
               <a:t>结果</a:t>
             </a:r>
-            <a:endParaRPr sz="1650" b="1">
-              <a:solidFill>
-                <a:srgbClr val="2D4A33"/>
-              </a:solidFill>
-            </a:endParaRPr>
           </a:p>
         </p:txBody>
       </p:sp>
@@ -11310,7 +10759,7 @@
         </p:nvSpPr>
         <p:spPr>
           <a:xfrm>
-            <a:off x="2146935" y="4324350"/>
+            <a:off x="2228850" y="4324350"/>
             <a:ext cx="7734300" cy="919480"/>
           </a:xfrm>
           <a:prstGeom prst="rect">
@@ -11347,29 +10796,8 @@
                   <a:srgbClr val="1F2D22"/>
                 </a:solidFill>
               </a:rPr>
-              <a:t>支持价格升序</a:t>
-            </a:r>
-            <a:r>
-              <a:rPr lang="en-US" altLang="zh-CN" sz="1350" b="0">
-                <a:solidFill>
-                  <a:srgbClr val="1F2D22"/>
-                </a:solidFill>
-              </a:rPr>
-              <a:t> / </a:t>
-            </a:r>
-            <a:r>
-              <a:rPr lang="zh-CN" altLang="en-US" sz="1350" b="0">
-                <a:solidFill>
-                  <a:srgbClr val="1F2D22"/>
-                </a:solidFill>
-              </a:rPr>
-              <a:t>降序切换</a:t>
-            </a:r>
-            <a:endParaRPr lang="zh-CN" altLang="en-US" sz="1350" b="0">
-              <a:solidFill>
-                <a:srgbClr val="1F2D22"/>
-              </a:solidFill>
-            </a:endParaRPr>
+              <a:t>首页打开即展示随机图书，无需手动搜索</a:t>
+            </a:r>
           </a:p>
           <a:p>
             <a:pPr algn="l">
@@ -11385,13 +10813,24 @@
                   <a:srgbClr val="1F2D22"/>
                 </a:solidFill>
               </a:rPr>
-              <a:t>价格字段含非数字符号时自动解析为数值再排序</a:t>
-            </a:r>
-            <a:endParaRPr lang="zh-CN" altLang="en-US" sz="1350" b="0">
-              <a:solidFill>
-                <a:srgbClr val="1F2D22"/>
-              </a:solidFill>
-            </a:endParaRPr>
+              <a:t>空关键词时随机展示</a:t>
+            </a:r>
+            <a:r>
+              <a:rPr lang="en-US" altLang="zh-CN" sz="1350" b="0">
+                <a:solidFill>
+                  <a:srgbClr val="1F2D22"/>
+                </a:solidFill>
+              </a:rPr>
+              <a:t> jddata </a:t>
+            </a:r>
+            <a:r>
+              <a:rPr lang="zh-CN" altLang="en-US" sz="1350" b="0">
+                <a:solidFill>
+                  <a:srgbClr val="1F2D22"/>
+                </a:solidFill>
+              </a:rPr>
+              <a:t>索引中的书籍</a:t>
+            </a:r>
           </a:p>
           <a:p>
             <a:pPr algn="l">
@@ -11407,29 +10846,8 @@
                   <a:srgbClr val="1F2D22"/>
                 </a:solidFill>
               </a:rPr>
-              <a:t>排序在后端内存中完成，无需改动</a:t>
-            </a:r>
-            <a:r>
-              <a:rPr lang="en-US" altLang="zh-CN" sz="1350" b="0">
-                <a:solidFill>
-                  <a:srgbClr val="1F2D22"/>
-                </a:solidFill>
-              </a:rPr>
-              <a:t> ES </a:t>
-            </a:r>
-            <a:r>
-              <a:rPr lang="zh-CN" altLang="en-US" sz="1350" b="0">
-                <a:solidFill>
-                  <a:srgbClr val="1F2D22"/>
-                </a:solidFill>
-              </a:rPr>
-              <a:t>索引结构</a:t>
-            </a:r>
-            <a:endParaRPr lang="zh-CN" altLang="en-US" sz="1350" b="0">
-              <a:solidFill>
-                <a:srgbClr val="1F2D22"/>
-              </a:solidFill>
-            </a:endParaRPr>
+              <a:t>有关键词时仍按标题匹配精确搜索</a:t>
+            </a:r>
           </a:p>
         </p:txBody>
       </p:sp>
@@ -11548,13 +10966,945 @@
                   <a:srgbClr val="2D4A33"/>
                 </a:solidFill>
               </a:rPr>
+              <a:t>价格排序部分</a:t>
+            </a:r>
+          </a:p>
+        </p:txBody>
+      </p:sp>
+      <p:sp>
+        <p:nvSpPr>
+          <p:cNvPr id="4" name="矩形 3"/>
+          <p:cNvSpPr>
+            <a:spLocks noGrp="1"/>
+          </p:cNvSpPr>
+          <p:nvPr/>
+        </p:nvSpPr>
+        <p:spPr>
+          <a:xfrm>
+            <a:off x="857250" y="1619250"/>
+            <a:ext cx="4762500" cy="1809750"/>
+          </a:xfrm>
+          <a:prstGeom prst="rect">
+            <a:avLst/>
+          </a:prstGeom>
+          <a:solidFill>
+            <a:srgbClr val="FFFFFF"/>
+          </a:solidFill>
+          <a:ln w="9525">
+            <a:solidFill>
+              <a:srgbClr val="C7D0C4"/>
+            </a:solidFill>
+            <a:prstDash val="solid"/>
+          </a:ln>
+        </p:spPr>
+      </p:sp>
+      <p:sp>
+        <p:nvSpPr>
+          <p:cNvPr id="5" name="矩形 4"/>
+          <p:cNvSpPr>
+            <a:spLocks noGrp="1"/>
+          </p:cNvSpPr>
+          <p:nvPr/>
+        </p:nvSpPr>
+        <p:spPr>
+          <a:xfrm>
+            <a:off x="1157605" y="1666875"/>
+            <a:ext cx="4305300" cy="323850"/>
+          </a:xfrm>
+          <a:prstGeom prst="rect">
+            <a:avLst/>
+          </a:prstGeom>
+          <a:solidFill>
+            <a:srgbClr val="000000">
+              <a:alpha val="0"/>
+            </a:srgbClr>
+          </a:solidFill>
+          <a:ln w="0">
+            <a:solidFill>
+              <a:srgbClr val="000000">
+                <a:alpha val="0"/>
+              </a:srgbClr>
+            </a:solidFill>
+            <a:prstDash val="solid"/>
+          </a:ln>
+        </p:spPr>
+        <p:txBody>
+          <a:bodyPr anchor="ctr"/>
+          <a:lstStyle/>
+          <a:p>
+            <a:pPr algn="l">
+              <a:defRPr sz="1650" b="1">
+                <a:solidFill>
+                  <a:srgbClr val="2D4A33"/>
+                </a:solidFill>
+              </a:defRPr>
+            </a:pPr>
+            <a:r>
+              <a:rPr sz="1650" b="1">
+                <a:solidFill>
+                  <a:srgbClr val="2D4A33"/>
+                </a:solidFill>
+              </a:rPr>
+              <a:t>页面</a:t>
+            </a:r>
+          </a:p>
+        </p:txBody>
+      </p:sp>
+      <p:sp>
+        <p:nvSpPr>
+          <p:cNvPr id="6" name="矩形 5"/>
+          <p:cNvSpPr>
+            <a:spLocks noGrp="1"/>
+          </p:cNvSpPr>
+          <p:nvPr/>
+        </p:nvSpPr>
+        <p:spPr>
+          <a:xfrm>
+            <a:off x="1157605" y="2228850"/>
+            <a:ext cx="4305300" cy="857250"/>
+          </a:xfrm>
+          <a:prstGeom prst="rect">
+            <a:avLst/>
+          </a:prstGeom>
+          <a:solidFill>
+            <a:srgbClr val="000000">
+              <a:alpha val="0"/>
+            </a:srgbClr>
+          </a:solidFill>
+          <a:ln w="0">
+            <a:solidFill>
+              <a:srgbClr val="000000">
+                <a:alpha val="0"/>
+              </a:srgbClr>
+            </a:solidFill>
+            <a:prstDash val="solid"/>
+          </a:ln>
+        </p:spPr>
+        <p:txBody>
+          <a:bodyPr anchor="ctr"/>
+          <a:lstStyle/>
+          <a:p>
+            <a:pPr algn="l">
+              <a:defRPr sz="1350" b="0">
+                <a:solidFill>
+                  <a:srgbClr val="1F2D22"/>
+                </a:solidFill>
+              </a:defRPr>
+            </a:pPr>
+            <a:r>
+              <a:rPr lang="en-US" altLang="zh-CN" sz="1350" b="0">
+                <a:solidFill>
+                  <a:srgbClr val="1F2D22"/>
+                </a:solidFill>
+              </a:rPr>
+              <a:t>jdsearch </a:t>
+            </a:r>
+            <a:r>
+              <a:rPr lang="zh-CN" altLang="en-US" sz="1350" b="0">
+                <a:solidFill>
+                  <a:srgbClr val="1F2D22"/>
+                </a:solidFill>
+              </a:rPr>
+              <a:t>搜索页面</a:t>
+            </a:r>
+          </a:p>
+          <a:p>
+            <a:pPr algn="l">
+              <a:defRPr sz="1350" b="0">
+                <a:solidFill>
+                  <a:srgbClr val="1F2D22"/>
+                </a:solidFill>
+              </a:defRPr>
+            </a:pPr>
+            <a:r>
+              <a:rPr lang="en-US" altLang="zh-CN" sz="1350" b="0">
+                <a:solidFill>
+                  <a:srgbClr val="1F2D22"/>
+                </a:solidFill>
+              </a:rPr>
+              <a:t>"</a:t>
+            </a:r>
+            <a:r>
+              <a:rPr lang="zh-CN" altLang="en-US" sz="1350" b="0">
+                <a:solidFill>
+                  <a:srgbClr val="1F2D22"/>
+                </a:solidFill>
+              </a:rPr>
+              <a:t>价格</a:t>
+            </a:r>
+            <a:r>
+              <a:rPr lang="en-US" altLang="zh-CN" sz="1350" b="0">
+                <a:solidFill>
+                  <a:srgbClr val="1F2D22"/>
+                </a:solidFill>
+              </a:rPr>
+              <a:t>"</a:t>
+            </a:r>
+            <a:r>
+              <a:rPr lang="zh-CN" altLang="en-US" sz="1350" b="0">
+                <a:solidFill>
+                  <a:srgbClr val="1F2D22"/>
+                </a:solidFill>
+              </a:rPr>
+              <a:t>文字变为可点击排序控件</a:t>
+            </a:r>
+          </a:p>
+          <a:p>
+            <a:pPr algn="l">
+              <a:defRPr sz="1350" b="0">
+                <a:solidFill>
+                  <a:srgbClr val="1F2D22"/>
+                </a:solidFill>
+              </a:defRPr>
+            </a:pPr>
+            <a:r>
+              <a:rPr lang="zh-CN" altLang="en-US" sz="1350" b="0">
+                <a:solidFill>
+                  <a:srgbClr val="1F2D22"/>
+                </a:solidFill>
+              </a:rPr>
+              <a:t>点击后显示排序方向箭头（</a:t>
+            </a:r>
+            <a:r>
+              <a:rPr lang="en-US" altLang="en-US" sz="1350" b="0">
+                <a:solidFill>
+                  <a:srgbClr val="1F2D22"/>
+                </a:solidFill>
+              </a:rPr>
+              <a:t>↑</a:t>
+            </a:r>
+            <a:r>
+              <a:rPr lang="zh-CN" altLang="en-US" sz="1350" b="0">
+                <a:solidFill>
+                  <a:srgbClr val="1F2D22"/>
+                </a:solidFill>
+              </a:rPr>
+              <a:t>升序</a:t>
+            </a:r>
+            <a:r>
+              <a:rPr lang="en-US" altLang="zh-CN" sz="1350" b="0">
+                <a:solidFill>
+                  <a:srgbClr val="1F2D22"/>
+                </a:solidFill>
+              </a:rPr>
+              <a:t> / </a:t>
+            </a:r>
+            <a:r>
+              <a:rPr lang="en-US" altLang="en-US" sz="1350" b="0">
+                <a:solidFill>
+                  <a:srgbClr val="1F2D22"/>
+                </a:solidFill>
+              </a:rPr>
+              <a:t>↓</a:t>
+            </a:r>
+            <a:r>
+              <a:rPr lang="zh-CN" altLang="en-US" sz="1350" b="0">
+                <a:solidFill>
+                  <a:srgbClr val="1F2D22"/>
+                </a:solidFill>
+              </a:rPr>
+              <a:t>降序）</a:t>
+            </a:r>
+          </a:p>
+        </p:txBody>
+      </p:sp>
+      <p:sp>
+        <p:nvSpPr>
+          <p:cNvPr id="7" name="矩形 6"/>
+          <p:cNvSpPr>
+            <a:spLocks noGrp="1"/>
+          </p:cNvSpPr>
+          <p:nvPr/>
+        </p:nvSpPr>
+        <p:spPr>
+          <a:xfrm>
+            <a:off x="6285865" y="1379855"/>
+            <a:ext cx="5144135" cy="2091055"/>
+          </a:xfrm>
+          <a:prstGeom prst="rect">
+            <a:avLst/>
+          </a:prstGeom>
+          <a:solidFill>
+            <a:srgbClr val="FFFFFF"/>
+          </a:solidFill>
+          <a:ln w="9525">
+            <a:solidFill>
+              <a:srgbClr val="C7D0C4"/>
+            </a:solidFill>
+            <a:prstDash val="solid"/>
+          </a:ln>
+        </p:spPr>
+      </p:sp>
+      <p:sp>
+        <p:nvSpPr>
+          <p:cNvPr id="8" name="矩形 7"/>
+          <p:cNvSpPr>
+            <a:spLocks noGrp="1"/>
+          </p:cNvSpPr>
+          <p:nvPr/>
+        </p:nvSpPr>
+        <p:spPr>
+          <a:xfrm>
+            <a:off x="6534785" y="1475740"/>
+            <a:ext cx="4305300" cy="323850"/>
+          </a:xfrm>
+          <a:prstGeom prst="rect">
+            <a:avLst/>
+          </a:prstGeom>
+          <a:solidFill>
+            <a:srgbClr val="000000">
+              <a:alpha val="0"/>
+            </a:srgbClr>
+          </a:solidFill>
+          <a:ln w="0">
+            <a:solidFill>
+              <a:srgbClr val="000000">
+                <a:alpha val="0"/>
+              </a:srgbClr>
+            </a:solidFill>
+            <a:prstDash val="solid"/>
+          </a:ln>
+        </p:spPr>
+        <p:txBody>
+          <a:bodyPr anchor="ctr"/>
+          <a:lstStyle/>
+          <a:p>
+            <a:pPr algn="l">
+              <a:defRPr sz="1650" b="1">
+                <a:solidFill>
+                  <a:srgbClr val="2D4A33"/>
+                </a:solidFill>
+              </a:defRPr>
+            </a:pPr>
+            <a:r>
+              <a:rPr sz="1650" b="1">
+                <a:solidFill>
+                  <a:srgbClr val="2D4A33"/>
+                </a:solidFill>
+              </a:rPr>
+              <a:t>流程</a:t>
+            </a:r>
+          </a:p>
+        </p:txBody>
+      </p:sp>
+      <p:sp>
+        <p:nvSpPr>
+          <p:cNvPr id="9" name="矩形 8"/>
+          <p:cNvSpPr>
+            <a:spLocks noGrp="1"/>
+          </p:cNvSpPr>
+          <p:nvPr/>
+        </p:nvSpPr>
+        <p:spPr>
+          <a:xfrm>
+            <a:off x="6595110" y="1990725"/>
+            <a:ext cx="4671060" cy="1076960"/>
+          </a:xfrm>
+          <a:prstGeom prst="rect">
+            <a:avLst/>
+          </a:prstGeom>
+          <a:solidFill>
+            <a:srgbClr val="000000">
+              <a:alpha val="0"/>
+            </a:srgbClr>
+          </a:solidFill>
+          <a:ln w="0">
+            <a:solidFill>
+              <a:srgbClr val="000000">
+                <a:alpha val="0"/>
+              </a:srgbClr>
+            </a:solidFill>
+            <a:prstDash val="solid"/>
+          </a:ln>
+        </p:spPr>
+        <p:txBody>
+          <a:bodyPr anchor="ctr"/>
+          <a:lstStyle/>
+          <a:p>
+            <a:pPr algn="l">
+              <a:defRPr sz="1350" b="0">
+                <a:solidFill>
+                  <a:srgbClr val="1F2D22"/>
+                </a:solidFill>
+              </a:defRPr>
+            </a:pPr>
+            <a:r>
+              <a:rPr lang="zh-CN" altLang="en-US" sz="1350" b="0">
+                <a:solidFill>
+                  <a:srgbClr val="1F2D22"/>
+                </a:solidFill>
+              </a:rPr>
+              <a:t>点击</a:t>
+            </a:r>
+            <a:r>
+              <a:rPr lang="en-US" altLang="zh-CN" sz="1350" b="0">
+                <a:solidFill>
+                  <a:srgbClr val="1F2D22"/>
+                </a:solidFill>
+              </a:rPr>
+              <a:t>"</a:t>
+            </a:r>
+            <a:r>
+              <a:rPr lang="zh-CN" altLang="en-US" sz="1350" b="0">
+                <a:solidFill>
+                  <a:srgbClr val="1F2D22"/>
+                </a:solidFill>
+              </a:rPr>
+              <a:t>价格</a:t>
+            </a:r>
+            <a:r>
+              <a:rPr lang="en-US" altLang="zh-CN" sz="1350" b="0">
+                <a:solidFill>
+                  <a:srgbClr val="1F2D22"/>
+                </a:solidFill>
+              </a:rPr>
+              <a:t>" </a:t>
+            </a:r>
+            <a:r>
+              <a:rPr lang="en-US" altLang="en-US" sz="1350" b="0">
+                <a:solidFill>
+                  <a:srgbClr val="1F2D22"/>
+                </a:solidFill>
+              </a:rPr>
+              <a:t>→</a:t>
+            </a:r>
+            <a:r>
+              <a:rPr lang="en-US" altLang="zh-CN" sz="1350" b="0">
+                <a:solidFill>
+                  <a:srgbClr val="1F2D22"/>
+                </a:solidFill>
+              </a:rPr>
+              <a:t> togglePriceSort() </a:t>
+            </a:r>
+            <a:r>
+              <a:rPr lang="zh-CN" altLang="en-US" sz="1350" b="0">
+                <a:solidFill>
+                  <a:srgbClr val="1F2D22"/>
+                </a:solidFill>
+              </a:rPr>
+              <a:t>设置</a:t>
+            </a:r>
+            <a:r>
+              <a:rPr lang="en-US" altLang="zh-CN" sz="1350" b="0">
+                <a:solidFill>
+                  <a:srgbClr val="1F2D22"/>
+                </a:solidFill>
+              </a:rPr>
+              <a:t> sortField='price' </a:t>
+            </a:r>
+            <a:r>
+              <a:rPr lang="zh-CN" altLang="en-US" sz="1350" b="0">
+                <a:solidFill>
+                  <a:srgbClr val="1F2D22"/>
+                </a:solidFill>
+              </a:rPr>
+              <a:t>和</a:t>
+            </a:r>
+            <a:r>
+              <a:rPr lang="en-US" altLang="zh-CN" sz="1350" b="0">
+                <a:solidFill>
+                  <a:srgbClr val="1F2D22"/>
+                </a:solidFill>
+              </a:rPr>
+              <a:t> sortOrder</a:t>
+            </a:r>
+          </a:p>
+          <a:p>
+            <a:pPr algn="l">
+              <a:defRPr sz="1350" b="0">
+                <a:solidFill>
+                  <a:srgbClr val="1F2D22"/>
+                </a:solidFill>
+              </a:defRPr>
+            </a:pPr>
+            <a:r>
+              <a:rPr lang="en-US" altLang="en-US" sz="1350" b="0">
+                <a:solidFill>
+                  <a:srgbClr val="1F2D22"/>
+                </a:solidFill>
+              </a:rPr>
+              <a:t>→</a:t>
+            </a:r>
+            <a:r>
+              <a:rPr lang="en-US" altLang="zh-CN" sz="1350" b="0">
+                <a:solidFill>
+                  <a:srgbClr val="1F2D22"/>
+                </a:solidFill>
+              </a:rPr>
+              <a:t> </a:t>
+            </a:r>
+            <a:r>
+              <a:rPr lang="zh-CN" altLang="en-US" sz="1350" b="0">
+                <a:solidFill>
+                  <a:srgbClr val="1F2D22"/>
+                </a:solidFill>
+              </a:rPr>
+              <a:t>自动重新调用</a:t>
+            </a:r>
+            <a:r>
+              <a:rPr lang="en-US" altLang="zh-CN" sz="1350" b="0">
+                <a:solidFill>
+                  <a:srgbClr val="1F2D22"/>
+                </a:solidFill>
+              </a:rPr>
+              <a:t> searchPage()</a:t>
+            </a:r>
+            <a:r>
+              <a:rPr lang="zh-CN" altLang="en-US" sz="1350" b="0">
+                <a:solidFill>
+                  <a:srgbClr val="1F2D22"/>
+                </a:solidFill>
+              </a:rPr>
+              <a:t>，将排序参数传至后端</a:t>
+            </a:r>
+            <a:r>
+              <a:rPr lang="en-US" altLang="zh-CN" sz="1350" b="0">
+                <a:solidFill>
+                  <a:srgbClr val="1F2D22"/>
+                </a:solidFill>
+              </a:rPr>
+              <a:t> /query</a:t>
+            </a:r>
+          </a:p>
+          <a:p>
+            <a:pPr algn="l">
+              <a:defRPr sz="1350" b="0">
+                <a:solidFill>
+                  <a:srgbClr val="1F2D22"/>
+                </a:solidFill>
+              </a:defRPr>
+            </a:pPr>
+            <a:r>
+              <a:rPr lang="en-US" altLang="en-US" sz="1350" b="0">
+                <a:solidFill>
+                  <a:srgbClr val="1F2D22"/>
+                </a:solidFill>
+              </a:rPr>
+              <a:t>→</a:t>
+            </a:r>
+            <a:r>
+              <a:rPr lang="en-US" altLang="zh-CN" sz="1350" b="0">
+                <a:solidFill>
+                  <a:srgbClr val="1F2D22"/>
+                </a:solidFill>
+              </a:rPr>
+              <a:t> ContentController </a:t>
+            </a:r>
+            <a:r>
+              <a:rPr lang="zh-CN" altLang="en-US" sz="1350" b="0">
+                <a:solidFill>
+                  <a:srgbClr val="1F2D22"/>
+                </a:solidFill>
+              </a:rPr>
+              <a:t>接收参数传给</a:t>
+            </a:r>
+            <a:r>
+              <a:rPr lang="en-US" altLang="zh-CN" sz="1350" b="0">
+                <a:solidFill>
+                  <a:srgbClr val="1F2D22"/>
+                </a:solidFill>
+              </a:rPr>
+              <a:t> ContentService</a:t>
+            </a:r>
+          </a:p>
+          <a:p>
+            <a:pPr algn="l">
+              <a:defRPr sz="1350" b="0">
+                <a:solidFill>
+                  <a:srgbClr val="1F2D22"/>
+                </a:solidFill>
+              </a:defRPr>
+            </a:pPr>
+            <a:r>
+              <a:rPr lang="en-US" altLang="en-US" sz="1350" b="0">
+                <a:solidFill>
+                  <a:srgbClr val="1F2D22"/>
+                </a:solidFill>
+              </a:rPr>
+              <a:t>→</a:t>
+            </a:r>
+            <a:r>
+              <a:rPr lang="en-US" altLang="zh-CN" sz="1350" b="0">
+                <a:solidFill>
+                  <a:srgbClr val="1F2D22"/>
+                </a:solidFill>
+              </a:rPr>
+              <a:t> ES </a:t>
+            </a:r>
+            <a:r>
+              <a:rPr lang="zh-CN" altLang="en-US" sz="1350" b="0">
+                <a:solidFill>
+                  <a:srgbClr val="1F2D22"/>
+                </a:solidFill>
+              </a:rPr>
+              <a:t>查询返回结果后，</a:t>
+            </a:r>
+            <a:r>
+              <a:rPr lang="en-US" altLang="zh-CN" sz="1350" b="0">
+                <a:solidFill>
+                  <a:srgbClr val="1F2D22"/>
+                </a:solidFill>
+              </a:rPr>
+              <a:t>Java </a:t>
+            </a:r>
+            <a:r>
+              <a:rPr lang="zh-CN" altLang="en-US" sz="1350" b="0">
+                <a:solidFill>
+                  <a:srgbClr val="1F2D22"/>
+                </a:solidFill>
+              </a:rPr>
+              <a:t>端按价格字段排序</a:t>
+            </a:r>
+          </a:p>
+          <a:p>
+            <a:pPr algn="l">
+              <a:defRPr sz="1350" b="0">
+                <a:solidFill>
+                  <a:srgbClr val="1F2D22"/>
+                </a:solidFill>
+              </a:defRPr>
+            </a:pPr>
+            <a:r>
+              <a:rPr lang="en-US" altLang="en-US" sz="1350" b="0">
+                <a:solidFill>
+                  <a:srgbClr val="1F2D22"/>
+                </a:solidFill>
+              </a:rPr>
+              <a:t>→</a:t>
+            </a:r>
+            <a:r>
+              <a:rPr lang="en-US" altLang="zh-CN" sz="1350" b="0">
+                <a:solidFill>
+                  <a:srgbClr val="1F2D22"/>
+                </a:solidFill>
+              </a:rPr>
+              <a:t> </a:t>
+            </a:r>
+            <a:r>
+              <a:rPr lang="zh-CN" altLang="en-US" sz="1350" b="0">
+                <a:solidFill>
+                  <a:srgbClr val="1F2D22"/>
+                </a:solidFill>
+              </a:rPr>
+              <a:t>排序结果返回前端，页面重新渲染</a:t>
+            </a:r>
+          </a:p>
+        </p:txBody>
+      </p:sp>
+      <p:sp>
+        <p:nvSpPr>
+          <p:cNvPr id="10" name="矩形 9"/>
+          <p:cNvSpPr>
+            <a:spLocks noGrp="1"/>
+          </p:cNvSpPr>
+          <p:nvPr/>
+        </p:nvSpPr>
+        <p:spPr>
+          <a:xfrm>
+            <a:off x="2000250" y="3714750"/>
+            <a:ext cx="8191500" cy="1995170"/>
+          </a:xfrm>
+          <a:prstGeom prst="rect">
+            <a:avLst/>
+          </a:prstGeom>
+          <a:solidFill>
+            <a:srgbClr val="FFFFFF"/>
+          </a:solidFill>
+          <a:ln w="9525">
+            <a:solidFill>
+              <a:srgbClr val="C7D0C4"/>
+            </a:solidFill>
+            <a:prstDash val="solid"/>
+          </a:ln>
+        </p:spPr>
+      </p:sp>
+      <p:sp>
+        <p:nvSpPr>
+          <p:cNvPr id="11" name="矩形 10"/>
+          <p:cNvSpPr>
+            <a:spLocks noGrp="1"/>
+          </p:cNvSpPr>
+          <p:nvPr/>
+        </p:nvSpPr>
+        <p:spPr>
+          <a:xfrm>
+            <a:off x="2228850" y="3886200"/>
+            <a:ext cx="7734300" cy="323850"/>
+          </a:xfrm>
+          <a:prstGeom prst="rect">
+            <a:avLst/>
+          </a:prstGeom>
+          <a:solidFill>
+            <a:srgbClr val="000000">
+              <a:alpha val="0"/>
+            </a:srgbClr>
+          </a:solidFill>
+          <a:ln w="0">
+            <a:solidFill>
+              <a:srgbClr val="000000">
+                <a:alpha val="0"/>
+              </a:srgbClr>
+            </a:solidFill>
+            <a:prstDash val="solid"/>
+          </a:ln>
+        </p:spPr>
+        <p:txBody>
+          <a:bodyPr anchor="ctr"/>
+          <a:lstStyle/>
+          <a:p>
+            <a:pPr algn="l">
+              <a:defRPr sz="1650" b="1">
+                <a:solidFill>
+                  <a:srgbClr val="2D4A33"/>
+                </a:solidFill>
+              </a:defRPr>
+            </a:pPr>
+            <a:r>
+              <a:rPr sz="1650" b="1">
+                <a:solidFill>
+                  <a:srgbClr val="2D4A33"/>
+                </a:solidFill>
+              </a:rPr>
+              <a:t>结果</a:t>
+            </a:r>
+          </a:p>
+        </p:txBody>
+      </p:sp>
+      <p:sp>
+        <p:nvSpPr>
+          <p:cNvPr id="12" name="矩形 11"/>
+          <p:cNvSpPr>
+            <a:spLocks noGrp="1"/>
+          </p:cNvSpPr>
+          <p:nvPr/>
+        </p:nvSpPr>
+        <p:spPr>
+          <a:xfrm>
+            <a:off x="2146935" y="4324350"/>
+            <a:ext cx="7734300" cy="919480"/>
+          </a:xfrm>
+          <a:prstGeom prst="rect">
+            <a:avLst/>
+          </a:prstGeom>
+          <a:solidFill>
+            <a:srgbClr val="000000">
+              <a:alpha val="0"/>
+            </a:srgbClr>
+          </a:solidFill>
+          <a:ln w="0">
+            <a:solidFill>
+              <a:srgbClr val="000000">
+                <a:alpha val="0"/>
+              </a:srgbClr>
+            </a:solidFill>
+            <a:prstDash val="solid"/>
+          </a:ln>
+        </p:spPr>
+        <p:txBody>
+          <a:bodyPr anchor="ctr"/>
+          <a:lstStyle/>
+          <a:p>
+            <a:pPr algn="l">
+              <a:defRPr sz="1350" b="0">
+                <a:solidFill>
+                  <a:srgbClr val="1F2D22"/>
+                </a:solidFill>
+              </a:defRPr>
+            </a:pPr>
+            <a:r>
+              <a:rPr lang="zh-CN" altLang="en-US" sz="1350" b="0">
+                <a:solidFill>
+                  <a:srgbClr val="1F2D22"/>
+                </a:solidFill>
+              </a:rPr>
+              <a:t>支持价格升序</a:t>
+            </a:r>
+            <a:r>
+              <a:rPr lang="en-US" altLang="zh-CN" sz="1350" b="0">
+                <a:solidFill>
+                  <a:srgbClr val="1F2D22"/>
+                </a:solidFill>
+              </a:rPr>
+              <a:t> / </a:t>
+            </a:r>
+            <a:r>
+              <a:rPr lang="zh-CN" altLang="en-US" sz="1350" b="0">
+                <a:solidFill>
+                  <a:srgbClr val="1F2D22"/>
+                </a:solidFill>
+              </a:rPr>
+              <a:t>降序切换</a:t>
+            </a:r>
+          </a:p>
+          <a:p>
+            <a:pPr algn="l">
+              <a:defRPr sz="1350" b="0">
+                <a:solidFill>
+                  <a:srgbClr val="1F2D22"/>
+                </a:solidFill>
+              </a:defRPr>
+            </a:pPr>
+            <a:r>
+              <a:rPr lang="zh-CN" altLang="en-US" sz="1350" b="0">
+                <a:solidFill>
+                  <a:srgbClr val="1F2D22"/>
+                </a:solidFill>
+              </a:rPr>
+              <a:t>价格字段含非数字符号时自动解析为数值再排序</a:t>
+            </a:r>
+          </a:p>
+          <a:p>
+            <a:pPr algn="l">
+              <a:defRPr sz="1350" b="0">
+                <a:solidFill>
+                  <a:srgbClr val="1F2D22"/>
+                </a:solidFill>
+              </a:defRPr>
+            </a:pPr>
+            <a:r>
+              <a:rPr lang="zh-CN" altLang="en-US" sz="1350" b="0">
+                <a:solidFill>
+                  <a:srgbClr val="1F2D22"/>
+                </a:solidFill>
+              </a:rPr>
+              <a:t>排序在后端内存中完成，无需改动</a:t>
+            </a:r>
+            <a:r>
+              <a:rPr lang="en-US" altLang="zh-CN" sz="1350" b="0">
+                <a:solidFill>
+                  <a:srgbClr val="1F2D22"/>
+                </a:solidFill>
+              </a:rPr>
+              <a:t> ES </a:t>
+            </a:r>
+            <a:r>
+              <a:rPr lang="zh-CN" altLang="en-US" sz="1350" b="0">
+                <a:solidFill>
+                  <a:srgbClr val="1F2D22"/>
+                </a:solidFill>
+              </a:rPr>
+              <a:t>索引结构</a:t>
+            </a:r>
+          </a:p>
+        </p:txBody>
+      </p:sp>
+    </p:spTree>
+  </p:cSld>
+  <p:clrMapOvr>
+    <a:masterClrMapping/>
+  </p:clrMapOvr>
+</p:sld>
+</file>
+
+<file path=ppt/slides/slide9.xml><?xml version="1.0" encoding="utf-8"?>
+<p:sld xmlns:a="http://schemas.openxmlformats.org/drawingml/2006/main" xmlns:r="http://schemas.openxmlformats.org/officeDocument/2006/relationships" xmlns:p="http://schemas.openxmlformats.org/presentationml/2006/main">
+  <p:cSld>
+    <p:spTree>
+      <p:nvGrpSpPr>
+        <p:cNvPr id="1" name=""/>
+        <p:cNvGrpSpPr/>
+        <p:nvPr/>
+      </p:nvGrpSpPr>
+      <p:grpSpPr>
+        <a:xfrm>
+          <a:off x="0" y="0"/>
+          <a:ext cx="0" cy="0"/>
+          <a:chOff x="0" y="0"/>
+          <a:chExt cx="0" cy="0"/>
+        </a:xfrm>
+      </p:grpSpPr>
+      <p:sp>
+        <p:nvSpPr>
+          <p:cNvPr id="13" name="矩形 12"/>
+          <p:cNvSpPr>
+            <a:spLocks noGrp="1"/>
+          </p:cNvSpPr>
+          <p:nvPr/>
+        </p:nvSpPr>
+        <p:spPr>
+          <a:xfrm>
+            <a:off x="0" y="0"/>
+            <a:ext cx="12192000" cy="114300"/>
+          </a:xfrm>
+          <a:prstGeom prst="rect">
+            <a:avLst/>
+          </a:prstGeom>
+          <a:solidFill>
+            <a:srgbClr val="2D4A33"/>
+          </a:solidFill>
+          <a:ln w="0">
+            <a:solidFill>
+              <a:srgbClr val="2D4A33"/>
+            </a:solidFill>
+            <a:prstDash val="solid"/>
+          </a:ln>
+        </p:spPr>
+      </p:sp>
+      <p:sp>
+        <p:nvSpPr>
+          <p:cNvPr id="2" name="矩形 1"/>
+          <p:cNvSpPr>
+            <a:spLocks noGrp="1"/>
+          </p:cNvSpPr>
+          <p:nvPr/>
+        </p:nvSpPr>
+        <p:spPr>
+          <a:xfrm>
+            <a:off x="762000" y="400050"/>
+            <a:ext cx="10668000" cy="457200"/>
+          </a:xfrm>
+          <a:prstGeom prst="rect">
+            <a:avLst/>
+          </a:prstGeom>
+          <a:solidFill>
+            <a:srgbClr val="000000">
+              <a:alpha val="0"/>
+            </a:srgbClr>
+          </a:solidFill>
+          <a:ln w="0">
+            <a:solidFill>
+              <a:srgbClr val="000000">
+                <a:alpha val="0"/>
+              </a:srgbClr>
+            </a:solidFill>
+            <a:prstDash val="solid"/>
+          </a:ln>
+        </p:spPr>
+        <p:txBody>
+          <a:bodyPr anchor="ctr"/>
+          <a:lstStyle/>
+          <a:p>
+            <a:pPr algn="ctr">
+              <a:defRPr sz="2550" b="1">
+                <a:solidFill>
+                  <a:srgbClr val="2D4A33"/>
+                </a:solidFill>
+              </a:defRPr>
+            </a:pPr>
+            <a:r>
+              <a:rPr lang="zh-CN" altLang="en-US" sz="2550" b="1" dirty="0">
+                <a:solidFill>
+                  <a:srgbClr val="2D4A33"/>
+                </a:solidFill>
+              </a:rPr>
+              <a:t>刘义群</a:t>
+            </a:r>
+            <a:r>
+              <a:rPr lang="en-US" altLang="zh-CN" sz="2550" b="1" dirty="0">
+                <a:solidFill>
+                  <a:srgbClr val="2D4A33"/>
+                </a:solidFill>
+              </a:rPr>
+              <a:t> </a:t>
+            </a:r>
+            <a:r>
+              <a:rPr lang="zh-CN" altLang="en-US" sz="2550" b="1" dirty="0">
+                <a:solidFill>
+                  <a:srgbClr val="2D4A33"/>
+                </a:solidFill>
+              </a:rPr>
               <a:t>增加商品部分</a:t>
             </a:r>
-            <a:endParaRPr lang="zh-CN" altLang="en-US" sz="2550" b="1" dirty="0">
-              <a:solidFill>
-                <a:srgbClr val="2D4A33"/>
-              </a:solidFill>
-            </a:endParaRPr>
           </a:p>
         </p:txBody>
       </p:sp>
@@ -11634,11 +11984,6 @@
               </a:rPr>
               <a:t>流程</a:t>
             </a:r>
-            <a:endParaRPr sz="1650" b="1">
-              <a:solidFill>
-                <a:srgbClr val="2D4A33"/>
-              </a:solidFill>
-            </a:endParaRPr>
           </a:p>
         </p:txBody>
       </p:sp>
@@ -11755,11 +12100,6 @@
               </a:rPr>
               <a:t>中</a:t>
             </a:r>
-            <a:endParaRPr lang="zh-CN" altLang="en-US" sz="1350" b="0">
-              <a:solidFill>
-                <a:srgbClr val="1F2D22"/>
-              </a:solidFill>
-            </a:endParaRPr>
           </a:p>
           <a:p>
             <a:pPr algn="l">
@@ -11809,11 +12149,6 @@
               </a:rPr>
               <a:t>数据库中</a:t>
             </a:r>
-            <a:endParaRPr lang="zh-CN" altLang="en-US" sz="1350" b="0">
-              <a:solidFill>
-                <a:srgbClr val="1F2D22"/>
-              </a:solidFill>
-            </a:endParaRPr>
           </a:p>
         </p:txBody>
       </p:sp>
@@ -11897,11 +12232,6 @@
               </a:rPr>
               <a:t>结果</a:t>
             </a:r>
-            <a:endParaRPr sz="1650" b="1">
-              <a:solidFill>
-                <a:srgbClr val="2D4A33"/>
-              </a:solidFill>
-            </a:endParaRPr>
           </a:p>
         </p:txBody>
       </p:sp>
@@ -11974,201 +12304,6 @@
               </a:rPr>
               <a:t>的功能，并且可以通过搜索引擎查询到</a:t>
             </a:r>
-            <a:endParaRPr lang="zh-CN" altLang="en-US" sz="1350" b="0">
-              <a:solidFill>
-                <a:srgbClr val="1F2D22"/>
-              </a:solidFill>
-            </a:endParaRPr>
-          </a:p>
-        </p:txBody>
-      </p:sp>
-    </p:spTree>
-  </p:cSld>
-  <p:clrMapOvr>
-    <a:masterClrMapping/>
-  </p:clrMapOvr>
-</p:sld>
-</file>
-
-<file path=ppt/slides/slide9.xml><?xml version="1.0" encoding="utf-8"?>
-<p:sld xmlns:a="http://schemas.openxmlformats.org/drawingml/2006/main" xmlns:r="http://schemas.openxmlformats.org/officeDocument/2006/relationships" xmlns:p="http://schemas.openxmlformats.org/presentationml/2006/main">
-  <p:cSld>
-    <p:bg>
-      <p:bgPr>
-        <a:solidFill>
-          <a:srgbClr val="253A2A"/>
-        </a:solidFill>
-        <a:effectLst/>
-      </p:bgPr>
-    </p:bg>
-    <p:spTree>
-      <p:nvGrpSpPr>
-        <p:cNvPr id="1" name=""/>
-        <p:cNvGrpSpPr/>
-        <p:nvPr/>
-      </p:nvGrpSpPr>
-      <p:grpSpPr>
-        <a:xfrm>
-          <a:off x="0" y="0"/>
-          <a:ext cx="0" cy="0"/>
-          <a:chOff x="0" y="0"/>
-          <a:chExt cx="0" cy="0"/>
-        </a:xfrm>
-      </p:grpSpPr>
-      <p:sp>
-        <p:nvSpPr>
-          <p:cNvPr id="11" name="文本框 10"/>
-          <p:cNvSpPr>
-            <a:spLocks noGrp="1"/>
-          </p:cNvSpPr>
-          <p:nvPr/>
-        </p:nvSpPr>
-        <p:spPr>
-          <a:xfrm>
-            <a:off x="2614979" y="2321005"/>
-            <a:ext cx="2604077" cy="2215991"/>
-          </a:xfrm>
-          <a:prstGeom prst="rect">
-            <a:avLst/>
-          </a:prstGeom>
-          <a:noFill/>
-        </p:spPr>
-        <p:txBody>
-          <a:bodyPr wrap="square">
-            <a:spAutoFit/>
-          </a:bodyPr>
-          <a:lstStyle/>
-          <a:p>
-            <a:pPr marL="0" marR="0" lvl="0" indent="0" algn="ctr" defTabSz="914400" eaLnBrk="1" fontAlgn="auto" latinLnBrk="0" hangingPunct="1">
-              <a:lnSpc>
-                <a:spcPct val="100000"/>
-              </a:lnSpc>
-              <a:spcBef>
-                <a:spcPts val="0"/>
-              </a:spcBef>
-              <a:spcAft>
-                <a:spcPts val="0"/>
-              </a:spcAft>
-              <a:buClrTx/>
-              <a:buSzTx/>
-              <a:buFontTx/>
-              <a:buNone/>
-              <a:defRPr/>
-            </a:pPr>
-            <a:r>
-              <a:rPr kumimoji="0" sz="13800" b="0" i="0" u="none" strike="noStrike" kern="1200" cap="none" spc="0" normalizeH="0" baseline="0" noProof="0" dirty="0">
-                <a:ln>
-                  <a:noFill/>
-                </a:ln>
-                <a:solidFill>
-                  <a:srgbClr val="F5F4F9"/>
-                </a:solidFill>
-                <a:effectLst/>
-                <a:uLnTx/>
-                <a:uFillTx/>
-                <a:latin typeface="Arial" panose="020B0604020202020204"/>
-                <a:ea typeface="华文中宋" panose="02010600040101010101" charset="-122"/>
-                <a:cs typeface="+mn-cs"/>
-              </a:rPr>
-              <a:t>0</a:t>
-            </a:r>
-            <a:r>
-              <a:rPr lang="en-US" sz="13800" dirty="0">
-                <a:solidFill>
-                  <a:srgbClr val="F5F4F9"/>
-                </a:solidFill>
-                <a:latin typeface="Arial" panose="020B0604020202020204"/>
-                <a:ea typeface="华文中宋" panose="02010600040101010101" charset="-122"/>
-              </a:rPr>
-              <a:t>4</a:t>
-            </a:r>
-            <a:endParaRPr kumimoji="0" sz="13800" b="0" i="0" u="none" strike="noStrike" kern="1200" cap="none" spc="0" normalizeH="0" baseline="0" noProof="0" dirty="0">
-              <a:ln>
-                <a:noFill/>
-              </a:ln>
-              <a:solidFill>
-                <a:srgbClr val="F5F4F9"/>
-              </a:solidFill>
-              <a:effectLst/>
-              <a:uLnTx/>
-              <a:uFillTx/>
-              <a:latin typeface="Arial" panose="020B0604020202020204"/>
-              <a:ea typeface="华文中宋" panose="02010600040101010101" charset="-122"/>
-              <a:cs typeface="+mn-cs"/>
-            </a:endParaRPr>
-          </a:p>
-        </p:txBody>
-      </p:sp>
-      <p:sp>
-        <p:nvSpPr>
-          <p:cNvPr id="13" name="矩形 12"/>
-          <p:cNvSpPr>
-            <a:spLocks noGrp="1"/>
-          </p:cNvSpPr>
-          <p:nvPr/>
-        </p:nvSpPr>
-        <p:spPr>
-          <a:xfrm>
-            <a:off x="6331761" y="2685166"/>
-            <a:ext cx="2262159" cy="923330"/>
-          </a:xfrm>
-          <a:prstGeom prst="rect">
-            <a:avLst/>
-          </a:prstGeom>
-        </p:spPr>
-        <p:txBody>
-          <a:bodyPr wrap="none">
-            <a:spAutoFit/>
-          </a:bodyPr>
-          <a:lstStyle/>
-          <a:p>
-            <a:pPr marL="0" marR="0" lvl="0" indent="0" algn="ctr" defTabSz="914400" eaLnBrk="1" fontAlgn="auto" latinLnBrk="0" hangingPunct="1">
-              <a:lnSpc>
-                <a:spcPct val="100000"/>
-              </a:lnSpc>
-              <a:spcBef>
-                <a:spcPts val="0"/>
-              </a:spcBef>
-              <a:spcAft>
-                <a:spcPts val="0"/>
-              </a:spcAft>
-              <a:buClrTx/>
-              <a:buSzTx/>
-              <a:buFontTx/>
-              <a:buNone/>
-              <a:defRPr/>
-            </a:pPr>
-            <a:r>
-              <a:rPr kumimoji="0" lang="zh-CN" altLang="en-US" sz="5400" b="1" i="0" u="none" strike="noStrike" kern="1200" cap="none" spc="0" normalizeH="0" baseline="0" noProof="0" dirty="0">
-                <a:ln>
-                  <a:noFill/>
-                </a:ln>
-                <a:solidFill>
-                  <a:prstClr val="white"/>
-                </a:solidFill>
-                <a:effectLst/>
-                <a:uLnTx/>
-                <a:uFillTx/>
-                <a:latin typeface="Arial" panose="020B0604020202020204"/>
-                <a:ea typeface="华文中宋" panose="02010600040101010101" charset="-122"/>
-                <a:cs typeface="+mn-cs"/>
-              </a:rPr>
-              <a:t>李嘉轩</a:t>
-            </a:r>
-            <a:endParaRPr kumimoji="0" sz="5400" b="1" i="0" u="none" strike="noStrike" kern="1200" cap="none" spc="0" normalizeH="0" baseline="0" noProof="0" dirty="0">
-              <a:ln>
-                <a:noFill/>
-              </a:ln>
-              <a:solidFill>
-                <a:prstClr val="white"/>
-              </a:solidFill>
-              <a:effectLst/>
-              <a:uLnTx/>
-              <a:uFillTx/>
-              <a:latin typeface="Arial" panose="020B0604020202020204"/>
-              <a:ea typeface="华文中宋" panose="02010600040101010101" charset="-122"/>
-              <a:cs typeface="+mn-cs"/>
-            </a:endParaRPr>
           </a:p>
         </p:txBody>
       </p:sp>
@@ -12181,49 +12316,49 @@
 </file>
 
 <file path=ppt/tags/tag1.xml><?xml version="1.0" encoding="utf-8"?>
-<p:tagLst xmlns:p="http://schemas.openxmlformats.org/presentationml/2006/main">
+<p:tagLst xmlns:a="http://schemas.openxmlformats.org/drawingml/2006/main" xmlns:r="http://schemas.openxmlformats.org/officeDocument/2006/relationships" xmlns:p="http://schemas.openxmlformats.org/presentationml/2006/main">
   <p:tag name="KSO_WM_DIAGRAM_VIRTUALLY_FRAME" val="{&quot;height&quot;:285.4,&quot;left&quot;:67.5,&quot;top&quot;:127.5,&quot;width&quot;:717}"/>
 </p:tagLst>
 </file>
 
 <file path=ppt/tags/tag2.xml><?xml version="1.0" encoding="utf-8"?>
-<p:tagLst xmlns:p="http://schemas.openxmlformats.org/presentationml/2006/main">
+<p:tagLst xmlns:a="http://schemas.openxmlformats.org/drawingml/2006/main" xmlns:r="http://schemas.openxmlformats.org/officeDocument/2006/relationships" xmlns:p="http://schemas.openxmlformats.org/presentationml/2006/main">
   <p:tag name="KSO_WM_DIAGRAM_VIRTUALLY_FRAME" val="{&quot;height&quot;:285.4,&quot;left&quot;:67.5,&quot;top&quot;:127.5,&quot;width&quot;:717}"/>
 </p:tagLst>
 </file>
 
 <file path=ppt/tags/tag3.xml><?xml version="1.0" encoding="utf-8"?>
-<p:tagLst xmlns:p="http://schemas.openxmlformats.org/presentationml/2006/main">
+<p:tagLst xmlns:a="http://schemas.openxmlformats.org/drawingml/2006/main" xmlns:r="http://schemas.openxmlformats.org/officeDocument/2006/relationships" xmlns:p="http://schemas.openxmlformats.org/presentationml/2006/main">
   <p:tag name="KSO_WM_DIAGRAM_VIRTUALLY_FRAME" val="{&quot;height&quot;:373.2,&quot;left&quot;:67.5,&quot;top&quot;:78.35,&quot;width&quot;:825}"/>
 </p:tagLst>
 </file>
 
 <file path=ppt/tags/tag4.xml><?xml version="1.0" encoding="utf-8"?>
-<p:tagLst xmlns:p="http://schemas.openxmlformats.org/presentationml/2006/main">
+<p:tagLst xmlns:a="http://schemas.openxmlformats.org/drawingml/2006/main" xmlns:r="http://schemas.openxmlformats.org/officeDocument/2006/relationships" xmlns:p="http://schemas.openxmlformats.org/presentationml/2006/main">
   <p:tag name="KSO_WM_DIAGRAM_VIRTUALLY_FRAME" val="{&quot;height&quot;:373.2,&quot;left&quot;:67.5,&quot;top&quot;:78.35,&quot;width&quot;:825}"/>
 </p:tagLst>
 </file>
 
 <file path=ppt/tags/tag5.xml><?xml version="1.0" encoding="utf-8"?>
-<p:tagLst xmlns:p="http://schemas.openxmlformats.org/presentationml/2006/main">
+<p:tagLst xmlns:a="http://schemas.openxmlformats.org/drawingml/2006/main" xmlns:r="http://schemas.openxmlformats.org/officeDocument/2006/relationships" xmlns:p="http://schemas.openxmlformats.org/presentationml/2006/main">
   <p:tag name="KSO_WM_DIAGRAM_VIRTUALLY_FRAME" val="{&quot;height&quot;:373.2,&quot;left&quot;:67.5,&quot;top&quot;:78.35,&quot;width&quot;:825}"/>
 </p:tagLst>
 </file>
 
 <file path=ppt/tags/tag6.xml><?xml version="1.0" encoding="utf-8"?>
-<p:tagLst xmlns:p="http://schemas.openxmlformats.org/presentationml/2006/main">
+<p:tagLst xmlns:a="http://schemas.openxmlformats.org/drawingml/2006/main" xmlns:r="http://schemas.openxmlformats.org/officeDocument/2006/relationships" xmlns:p="http://schemas.openxmlformats.org/presentationml/2006/main">
   <p:tag name="KSO_WM_DIAGRAM_VIRTUALLY_FRAME" val="{&quot;height&quot;:373.2,&quot;left&quot;:67.5,&quot;top&quot;:78.35,&quot;width&quot;:825}"/>
 </p:tagLst>
 </file>
 
 <file path=ppt/tags/tag7.xml><?xml version="1.0" encoding="utf-8"?>
-<p:tagLst xmlns:p="http://schemas.openxmlformats.org/presentationml/2006/main">
+<p:tagLst xmlns:a="http://schemas.openxmlformats.org/drawingml/2006/main" xmlns:r="http://schemas.openxmlformats.org/officeDocument/2006/relationships" xmlns:p="http://schemas.openxmlformats.org/presentationml/2006/main">
   <p:tag name="KSO_WM_DIAGRAM_VIRTUALLY_FRAME" val="{&quot;height&quot;:373.2,&quot;left&quot;:67.5,&quot;top&quot;:78.35,&quot;width&quot;:825}"/>
 </p:tagLst>
 </file>
 
 <file path=ppt/tags/tag8.xml><?xml version="1.0" encoding="utf-8"?>
-<p:tagLst xmlns:p="http://schemas.openxmlformats.org/presentationml/2006/main">
+<p:tagLst xmlns:a="http://schemas.openxmlformats.org/drawingml/2006/main" xmlns:r="http://schemas.openxmlformats.org/officeDocument/2006/relationships" xmlns:p="http://schemas.openxmlformats.org/presentationml/2006/main">
   <p:tag name="KSO_WM_DIAGRAM_VIRTUALLY_FRAME" val="{&quot;height&quot;:373.2,&quot;left&quot;:67.5,&quot;top&quot;:78.35,&quot;width&quot;:825}"/>
 </p:tagLst>
 </file>
@@ -12370,6 +12505,8 @@
       </a:bgFillStyleLst>
     </a:fmtScheme>
   </a:themeElements>
+  <a:objectDefaults/>
+  <a:extraClrSchemeLst/>
   <a:extLst>
     <a:ext uri="{05A4C25C-085E-4340-85A3-A5531E510DB2}">
       <thm15:themeFamily xmlns:thm15="http://schemas.microsoft.com/office/thememl/2012/main" name="Office Theme" id="{62F939B6-93AF-4DB8-9C6B-D6C7DFDC589F}" vid="{4A3C46E8-61CC-4603-A589-7422A47A8E4A}"/>
@@ -12520,6 +12657,8 @@
       </a:bgFillStyleLst>
     </a:fmtScheme>
   </a:themeElements>
+  <a:objectDefaults/>
+  <a:extraClrSchemeLst/>
   <a:extLst>
     <a:ext uri="{05A4C25C-085E-4340-85A3-A5531E510DB2}">
       <thm15:themeFamily xmlns:thm15="http://schemas.microsoft.com/office/thememl/2012/main" name="Office Theme" id="{62F939B6-93AF-4DB8-9C6B-D6C7DFDC589F}" vid="{4A3C46E8-61CC-4603-A589-7422A47A8E4A}"/>
